--- a/documentation/eapli.framework-Tech-Description.pptx
+++ b/documentation/eapli.framework-Tech-Description.pptx
@@ -5,52 +5,64 @@
     <p:sldMasterId id="2147483900" r:id="rId1"/>
   </p:sldMasterIdLst>
   <p:notesMasterIdLst>
-    <p:notesMasterId r:id="rId42"/>
+    <p:notesMasterId r:id="rId54"/>
   </p:notesMasterIdLst>
   <p:handoutMasterIdLst>
-    <p:handoutMasterId r:id="rId43"/>
+    <p:handoutMasterId r:id="rId55"/>
   </p:handoutMasterIdLst>
   <p:sldIdLst>
     <p:sldId id="367" r:id="rId2"/>
-    <p:sldId id="412" r:id="rId3"/>
-    <p:sldId id="375" r:id="rId4"/>
-    <p:sldId id="376" r:id="rId5"/>
-    <p:sldId id="381" r:id="rId6"/>
-    <p:sldId id="382" r:id="rId7"/>
-    <p:sldId id="383" r:id="rId8"/>
-    <p:sldId id="384" r:id="rId9"/>
-    <p:sldId id="385" r:id="rId10"/>
-    <p:sldId id="415" r:id="rId11"/>
-    <p:sldId id="377" r:id="rId12"/>
-    <p:sldId id="378" r:id="rId13"/>
-    <p:sldId id="379" r:id="rId14"/>
-    <p:sldId id="380" r:id="rId15"/>
-    <p:sldId id="399" r:id="rId16"/>
-    <p:sldId id="400" r:id="rId17"/>
-    <p:sldId id="409" r:id="rId18"/>
-    <p:sldId id="410" r:id="rId19"/>
-    <p:sldId id="411" r:id="rId20"/>
-    <p:sldId id="413" r:id="rId21"/>
-    <p:sldId id="347" r:id="rId22"/>
-    <p:sldId id="368" r:id="rId23"/>
-    <p:sldId id="335" r:id="rId24"/>
-    <p:sldId id="416" r:id="rId25"/>
-    <p:sldId id="322" r:id="rId26"/>
-    <p:sldId id="370" r:id="rId27"/>
-    <p:sldId id="406" r:id="rId28"/>
-    <p:sldId id="341" r:id="rId29"/>
-    <p:sldId id="374" r:id="rId30"/>
-    <p:sldId id="338" r:id="rId31"/>
-    <p:sldId id="386" r:id="rId32"/>
-    <p:sldId id="395" r:id="rId33"/>
-    <p:sldId id="405" r:id="rId34"/>
-    <p:sldId id="404" r:id="rId35"/>
-    <p:sldId id="407" r:id="rId36"/>
-    <p:sldId id="408" r:id="rId37"/>
-    <p:sldId id="414" r:id="rId38"/>
-    <p:sldId id="350" r:id="rId39"/>
-    <p:sldId id="351" r:id="rId40"/>
-    <p:sldId id="337" r:id="rId41"/>
+    <p:sldId id="417" r:id="rId3"/>
+    <p:sldId id="418" r:id="rId4"/>
+    <p:sldId id="419" r:id="rId5"/>
+    <p:sldId id="412" r:id="rId6"/>
+    <p:sldId id="376" r:id="rId7"/>
+    <p:sldId id="432" r:id="rId8"/>
+    <p:sldId id="375" r:id="rId9"/>
+    <p:sldId id="381" r:id="rId10"/>
+    <p:sldId id="382" r:id="rId11"/>
+    <p:sldId id="383" r:id="rId12"/>
+    <p:sldId id="384" r:id="rId13"/>
+    <p:sldId id="385" r:id="rId14"/>
+    <p:sldId id="415" r:id="rId15"/>
+    <p:sldId id="377" r:id="rId16"/>
+    <p:sldId id="378" r:id="rId17"/>
+    <p:sldId id="434" r:id="rId18"/>
+    <p:sldId id="435" r:id="rId19"/>
+    <p:sldId id="436" r:id="rId20"/>
+    <p:sldId id="379" r:id="rId21"/>
+    <p:sldId id="380" r:id="rId22"/>
+    <p:sldId id="423" r:id="rId23"/>
+    <p:sldId id="430" r:id="rId24"/>
+    <p:sldId id="433" r:id="rId25"/>
+    <p:sldId id="431" r:id="rId26"/>
+    <p:sldId id="422" r:id="rId27"/>
+    <p:sldId id="424" r:id="rId28"/>
+    <p:sldId id="425" r:id="rId29"/>
+    <p:sldId id="426" r:id="rId30"/>
+    <p:sldId id="427" r:id="rId31"/>
+    <p:sldId id="428" r:id="rId32"/>
+    <p:sldId id="429" r:id="rId33"/>
+    <p:sldId id="399" r:id="rId34"/>
+    <p:sldId id="400" r:id="rId35"/>
+    <p:sldId id="409" r:id="rId36"/>
+    <p:sldId id="410" r:id="rId37"/>
+    <p:sldId id="411" r:id="rId38"/>
+    <p:sldId id="413" r:id="rId39"/>
+    <p:sldId id="347" r:id="rId40"/>
+    <p:sldId id="368" r:id="rId41"/>
+    <p:sldId id="335" r:id="rId42"/>
+    <p:sldId id="420" r:id="rId43"/>
+    <p:sldId id="439" r:id="rId44"/>
+    <p:sldId id="421" r:id="rId45"/>
+    <p:sldId id="437" r:id="rId46"/>
+    <p:sldId id="440" r:id="rId47"/>
+    <p:sldId id="438" r:id="rId48"/>
+    <p:sldId id="441" r:id="rId49"/>
+    <p:sldId id="414" r:id="rId50"/>
+    <p:sldId id="350" r:id="rId51"/>
+    <p:sldId id="351" r:id="rId52"/>
+    <p:sldId id="337" r:id="rId53"/>
   </p:sldIdLst>
   <p:sldSz cx="9144000" cy="6858000" type="screen4x3"/>
   <p:notesSz cx="10234613" cy="7099300"/>
@@ -951,7 +963,7 @@
             <a:fld id="{54F76911-F589-44E9-8155-61F0472246BF}" type="slidenum">
               <a:rPr lang="pt-PT" smtClean="0"/>
               <a:pPr/>
-              <a:t>4</a:t>
+              <a:t>6</a:t>
             </a:fld>
             <a:endParaRPr lang="pt-PT"/>
           </a:p>
@@ -1208,7 +1220,7 @@
             <a:fld id="{54F76911-F589-44E9-8155-61F0472246BF}" type="slidenum">
               <a:rPr lang="pt-PT" smtClean="0"/>
               <a:pPr/>
-              <a:t>5</a:t>
+              <a:t>9</a:t>
             </a:fld>
             <a:endParaRPr lang="pt-PT"/>
           </a:p>
@@ -1465,7 +1477,7 @@
             <a:fld id="{54F76911-F589-44E9-8155-61F0472246BF}" type="slidenum">
               <a:rPr lang="pt-PT" smtClean="0"/>
               <a:pPr/>
-              <a:t>11</a:t>
+              <a:t>15</a:t>
             </a:fld>
             <a:endParaRPr lang="pt-PT"/>
           </a:p>
@@ -1529,81 +1541,91 @@
           <a:lstStyle/>
           <a:p>
             <a:r>
-              <a:rPr lang="en-GB" dirty="0" err="1"/>
-              <a:t>Extrato</a:t>
-            </a:r>
-            <a:r>
-              <a:rPr lang="en-GB" dirty="0"/>
+              <a:rPr lang="pt-PT" dirty="0"/>
+              <a:t>Necessidade de suportar duas persistências</a:t>
+            </a:r>
+          </a:p>
+          <a:p>
+            <a:pPr lvl="1"/>
+            <a:r>
+              <a:rPr lang="pt-PT" dirty="0"/>
+              <a:t>Em memória</a:t>
+            </a:r>
+          </a:p>
+          <a:p>
+            <a:pPr lvl="1"/>
+            <a:r>
+              <a:rPr lang="pt-PT" dirty="0"/>
+              <a:t>BD usando ORM JPA</a:t>
+            </a:r>
+          </a:p>
+          <a:p>
+            <a:pPr lvl="1"/>
+            <a:r>
+              <a:rPr lang="pt-PT" dirty="0"/>
+              <a:t>Esconder este pormenor do restante código</a:t>
+            </a:r>
+          </a:p>
+          <a:p>
+            <a:pPr marL="365760" lvl="1" indent="0">
+              <a:buNone/>
+            </a:pPr>
+            <a:endParaRPr lang="pt-PT" dirty="0"/>
+          </a:p>
+          <a:p>
+            <a:pPr lvl="1"/>
+            <a:r>
+              <a:rPr lang="pt-PT" dirty="0"/>
+              <a:t>Vários repositórios (um por agregado)</a:t>
+            </a:r>
+          </a:p>
+          <a:p>
+            <a:pPr lvl="1"/>
+            <a:r>
+              <a:rPr lang="pt-PT" dirty="0"/>
+              <a:t>Fábrica para os repositórios de acordo com tipo de persistência</a:t>
+            </a:r>
+          </a:p>
+          <a:p>
+            <a:pPr lvl="1"/>
+            <a:endParaRPr lang="pt-PT" dirty="0"/>
+          </a:p>
+          <a:p>
+            <a:pPr lvl="1"/>
+            <a:r>
+              <a:rPr lang="pt-PT" dirty="0"/>
+              <a:t>Fábrica de fábricas para esconder lógica de criação de qual o tipo de persistência a usar</a:t>
+            </a:r>
+          </a:p>
+          <a:p>
+            <a:pPr lvl="1"/>
+            <a:endParaRPr lang="pt-PT" dirty="0"/>
+          </a:p>
+          <a:p>
+            <a:pPr lvl="1"/>
+            <a:r>
+              <a:rPr lang="pt-PT" dirty="0" err="1"/>
+              <a:t>Abstract</a:t>
+            </a:r>
+            <a:r>
+              <a:rPr lang="pt-PT" dirty="0"/>
               <a:t> </a:t>
             </a:r>
             <a:r>
-              <a:rPr lang="en-GB" dirty="0" err="1"/>
-              <a:t>faltam</a:t>
-            </a:r>
-            <a:r>
-              <a:rPr lang="en-GB" dirty="0"/>
+              <a:rPr lang="pt-PT" dirty="0" err="1"/>
+              <a:t>Factory</a:t>
+            </a:r>
+            <a:r>
+              <a:rPr lang="pt-PT" dirty="0"/>
               <a:t> </a:t>
             </a:r>
             <a:r>
-              <a:rPr lang="en-GB" dirty="0" err="1"/>
-              <a:t>aqui</a:t>
-            </a:r>
-            <a:r>
-              <a:rPr lang="en-GB" dirty="0"/>
-              <a:t> </a:t>
-            </a:r>
-            <a:r>
-              <a:rPr lang="en-GB" dirty="0" err="1"/>
-              <a:t>alguns</a:t>
-            </a:r>
-            <a:r>
-              <a:rPr lang="en-GB" dirty="0"/>
-              <a:t> </a:t>
-            </a:r>
-            <a:r>
-              <a:rPr lang="en-GB" dirty="0" err="1"/>
-              <a:t>métodos</a:t>
-            </a:r>
-            <a:r>
-              <a:rPr lang="en-GB" dirty="0"/>
-              <a:t>. </a:t>
-            </a:r>
-            <a:r>
-              <a:rPr lang="en-GB" dirty="0" err="1"/>
-              <a:t>Devem</a:t>
-            </a:r>
-            <a:r>
-              <a:rPr lang="en-GB" dirty="0"/>
-              <a:t> </a:t>
-            </a:r>
-            <a:r>
-              <a:rPr lang="en-GB" dirty="0" err="1"/>
-              <a:t>ver</a:t>
-            </a:r>
-            <a:r>
-              <a:rPr lang="en-GB" dirty="0"/>
-              <a:t> o </a:t>
-            </a:r>
-            <a:r>
-              <a:rPr lang="en-GB" dirty="0" err="1"/>
-              <a:t>código</a:t>
-            </a:r>
-            <a:r>
-              <a:rPr lang="en-GB" dirty="0"/>
-              <a:t> </a:t>
-            </a:r>
-            <a:r>
-              <a:rPr lang="en-GB" dirty="0" err="1"/>
-              <a:t>fonte</a:t>
-            </a:r>
-            <a:r>
-              <a:rPr lang="en-GB" dirty="0"/>
-              <a:t> </a:t>
-            </a:r>
-            <a:r>
-              <a:rPr lang="en-GB" dirty="0" err="1"/>
-              <a:t>completo</a:t>
-            </a:r>
+              <a:rPr lang="pt-PT" dirty="0" err="1"/>
+              <a:t>Pattern</a:t>
+            </a:r>
+            <a:endParaRPr lang="pt-PT" dirty="0"/>
+          </a:p>
+          <a:p>
             <a:endParaRPr lang="en-GB" dirty="0"/>
           </a:p>
         </p:txBody>
@@ -1626,7 +1648,7 @@
             <a:fld id="{54F76911-F589-44E9-8155-61F0472246BF}" type="slidenum">
               <a:rPr lang="pt-PT" smtClean="0"/>
               <a:pPr/>
-              <a:t>23</a:t>
+              <a:t>17</a:t>
             </a:fld>
             <a:endParaRPr lang="pt-PT"/>
           </a:p>
@@ -1635,7 +1657,7 @@
     </p:spTree>
     <p:extLst>
       <p:ext uri="{BB962C8B-B14F-4D97-AF65-F5344CB8AC3E}">
-        <p14:creationId xmlns:p14="http://schemas.microsoft.com/office/powerpoint/2010/main" val="2471195910"/>
+        <p14:creationId xmlns:p14="http://schemas.microsoft.com/office/powerpoint/2010/main" val="237350633"/>
       </p:ext>
     </p:extLst>
   </p:cSld>
@@ -1689,6 +1711,55 @@
           <a:bodyPr/>
           <a:lstStyle/>
           <a:p>
+            <a:r>
+              <a:rPr lang="en-GB" dirty="0"/>
+              <a:t>Each repository is defined by an interface</a:t>
+            </a:r>
+            <a:r>
+              <a:rPr lang="en-GB" baseline="0" dirty="0"/>
+              <a:t> that is the well known contract to the rest of the application. We will have one repository per domain aggregate.</a:t>
+            </a:r>
+          </a:p>
+          <a:p>
+            <a:r>
+              <a:rPr lang="en-GB" baseline="0" dirty="0"/>
+              <a:t>Since we have interfaces we need a factory to hide the details of the concrete object to create. E.g., </a:t>
+            </a:r>
+            <a:r>
+              <a:rPr lang="en-GB" baseline="0" dirty="0" err="1"/>
+              <a:t>ExpenseTypeRepositoryFactory</a:t>
+            </a:r>
+            <a:endParaRPr lang="en-GB" baseline="0" dirty="0"/>
+          </a:p>
+          <a:p>
+            <a:r>
+              <a:rPr lang="en-GB" baseline="0" dirty="0"/>
+              <a:t>Since we have several repositories we group their creation in a single factory (i.e., </a:t>
+            </a:r>
+            <a:r>
+              <a:rPr lang="en-GB" baseline="0" dirty="0" err="1"/>
+              <a:t>RepositoryFactory</a:t>
+            </a:r>
+            <a:r>
+              <a:rPr lang="en-GB" baseline="0" dirty="0"/>
+              <a:t>) to avoid duplication of code, i.e., each factory would have the decision code to choose which implementation to create. This way the </a:t>
+            </a:r>
+            <a:r>
+              <a:rPr lang="en-GB" baseline="0" dirty="0" err="1"/>
+              <a:t>JpaFactory</a:t>
+            </a:r>
+            <a:r>
+              <a:rPr lang="en-GB" baseline="0" dirty="0"/>
+              <a:t> knows it only creates </a:t>
+            </a:r>
+            <a:r>
+              <a:rPr lang="en-GB" baseline="0" dirty="0" err="1"/>
+              <a:t>Jpa</a:t>
+            </a:r>
+            <a:r>
+              <a:rPr lang="en-GB" baseline="0"/>
+              <a:t> implementations</a:t>
+            </a:r>
             <a:endParaRPr lang="en-GB" dirty="0"/>
           </a:p>
         </p:txBody>
@@ -1711,7 +1782,7 @@
             <a:fld id="{54F76911-F589-44E9-8155-61F0472246BF}" type="slidenum">
               <a:rPr lang="pt-PT" smtClean="0"/>
               <a:pPr/>
-              <a:t>25</a:t>
+              <a:t>18</a:t>
             </a:fld>
             <a:endParaRPr lang="pt-PT"/>
           </a:p>
@@ -1720,7 +1791,7 @@
     </p:spTree>
     <p:extLst>
       <p:ext uri="{BB962C8B-B14F-4D97-AF65-F5344CB8AC3E}">
-        <p14:creationId xmlns:p14="http://schemas.microsoft.com/office/powerpoint/2010/main" val="3201787388"/>
+        <p14:creationId xmlns:p14="http://schemas.microsoft.com/office/powerpoint/2010/main" val="4273046043"/>
       </p:ext>
     </p:extLst>
   </p:cSld>
@@ -1774,92 +1845,6 @@
           <a:bodyPr/>
           <a:lstStyle/>
           <a:p>
-            <a:r>
-              <a:rPr lang="pt-PT" dirty="0"/>
-              <a:t>Necessidade de suportar duas persistências</a:t>
-            </a:r>
-          </a:p>
-          <a:p>
-            <a:pPr lvl="1"/>
-            <a:r>
-              <a:rPr lang="pt-PT" dirty="0"/>
-              <a:t>Em memória</a:t>
-            </a:r>
-          </a:p>
-          <a:p>
-            <a:pPr lvl="1"/>
-            <a:r>
-              <a:rPr lang="pt-PT" dirty="0"/>
-              <a:t>BD usando ORM JPA</a:t>
-            </a:r>
-          </a:p>
-          <a:p>
-            <a:pPr lvl="1"/>
-            <a:r>
-              <a:rPr lang="pt-PT" dirty="0"/>
-              <a:t>Esconder este pormenor do restante código</a:t>
-            </a:r>
-          </a:p>
-          <a:p>
-            <a:pPr marL="365760" lvl="1" indent="0">
-              <a:buNone/>
-            </a:pPr>
-            <a:endParaRPr lang="pt-PT" dirty="0"/>
-          </a:p>
-          <a:p>
-            <a:pPr lvl="1"/>
-            <a:r>
-              <a:rPr lang="pt-PT" dirty="0"/>
-              <a:t>Vários repositórios (um por agregado)</a:t>
-            </a:r>
-          </a:p>
-          <a:p>
-            <a:pPr lvl="1"/>
-            <a:r>
-              <a:rPr lang="pt-PT" dirty="0"/>
-              <a:t>Fábrica para os repositórios de acordo com tipo de persistência</a:t>
-            </a:r>
-          </a:p>
-          <a:p>
-            <a:pPr lvl="1"/>
-            <a:endParaRPr lang="pt-PT" dirty="0"/>
-          </a:p>
-          <a:p>
-            <a:pPr lvl="1"/>
-            <a:r>
-              <a:rPr lang="pt-PT" dirty="0"/>
-              <a:t>Fábrica de fábricas para esconder lógica de criação de qual o tipo de persistência a usar</a:t>
-            </a:r>
-          </a:p>
-          <a:p>
-            <a:pPr lvl="1"/>
-            <a:endParaRPr lang="pt-PT" dirty="0"/>
-          </a:p>
-          <a:p>
-            <a:pPr lvl="1"/>
-            <a:r>
-              <a:rPr lang="pt-PT" dirty="0" err="1"/>
-              <a:t>Abstract</a:t>
-            </a:r>
-            <a:r>
-              <a:rPr lang="pt-PT" dirty="0"/>
-              <a:t> </a:t>
-            </a:r>
-            <a:r>
-              <a:rPr lang="pt-PT" dirty="0" err="1"/>
-              <a:t>Factory</a:t>
-            </a:r>
-            <a:r>
-              <a:rPr lang="pt-PT" dirty="0"/>
-              <a:t> </a:t>
-            </a:r>
-            <a:r>
-              <a:rPr lang="pt-PT" dirty="0" err="1"/>
-              <a:t>Pattern</a:t>
-            </a:r>
-            <a:endParaRPr lang="pt-PT" dirty="0"/>
-          </a:p>
-          <a:p>
             <a:endParaRPr lang="en-GB" dirty="0"/>
           </a:p>
         </p:txBody>
@@ -1882,7 +1867,7 @@
             <a:fld id="{54F76911-F589-44E9-8155-61F0472246BF}" type="slidenum">
               <a:rPr lang="pt-PT" smtClean="0"/>
               <a:pPr/>
-              <a:t>28</a:t>
+              <a:t>23</a:t>
             </a:fld>
             <a:endParaRPr lang="pt-PT"/>
           </a:p>
@@ -1891,7 +1876,7 @@
     </p:spTree>
     <p:extLst>
       <p:ext uri="{BB962C8B-B14F-4D97-AF65-F5344CB8AC3E}">
-        <p14:creationId xmlns:p14="http://schemas.microsoft.com/office/powerpoint/2010/main" val="1722972317"/>
+        <p14:creationId xmlns:p14="http://schemas.microsoft.com/office/powerpoint/2010/main" val="1114675585"/>
       </p:ext>
     </p:extLst>
   </p:cSld>
@@ -1946,53 +1931,80 @@
           <a:lstStyle/>
           <a:p>
             <a:r>
+              <a:rPr lang="en-GB" dirty="0" err="1"/>
+              <a:t>Extrato</a:t>
+            </a:r>
+            <a:r>
               <a:rPr lang="en-GB" dirty="0"/>
-              <a:t>Each repository is defined by an interface</a:t>
-            </a:r>
-            <a:r>
-              <a:rPr lang="en-GB" baseline="0" dirty="0"/>
-              <a:t> that is the well known contract to the rest of the application. We will have one repository per domain aggregate.</a:t>
-            </a:r>
-          </a:p>
-          <a:p>
-            <a:r>
-              <a:rPr lang="en-GB" baseline="0" dirty="0"/>
-              <a:t>Since we have interfaces we need a factory to hide the details of the concrete object to create. E.g., </a:t>
-            </a:r>
-            <a:r>
-              <a:rPr lang="en-GB" baseline="0" dirty="0" err="1"/>
-              <a:t>ExpenseTypeRepositoryFactory</a:t>
-            </a:r>
-            <a:endParaRPr lang="en-GB" baseline="0" dirty="0"/>
-          </a:p>
-          <a:p>
-            <a:r>
-              <a:rPr lang="en-GB" baseline="0" dirty="0"/>
-              <a:t>Since we have several repositories we group their creation in a single factory (i.e., </a:t>
-            </a:r>
-            <a:r>
-              <a:rPr lang="en-GB" baseline="0" dirty="0" err="1"/>
-              <a:t>RepositoryFactory</a:t>
-            </a:r>
-            <a:r>
-              <a:rPr lang="en-GB" baseline="0" dirty="0"/>
-              <a:t>) to avoid duplication of code, i.e., each factory would have the decision code to choose which implementation to create. This way the </a:t>
-            </a:r>
-            <a:r>
-              <a:rPr lang="en-GB" baseline="0" dirty="0" err="1"/>
-              <a:t>JpaFactory</a:t>
-            </a:r>
-            <a:r>
-              <a:rPr lang="en-GB" baseline="0" dirty="0"/>
-              <a:t> knows it only creates </a:t>
-            </a:r>
-            <a:r>
-              <a:rPr lang="en-GB" baseline="0" dirty="0" err="1"/>
-              <a:t>Jpa</a:t>
-            </a:r>
-            <a:r>
-              <a:rPr lang="en-GB" baseline="0"/>
-              <a:t> implementations</a:t>
+              <a:t> </a:t>
+            </a:r>
+            <a:r>
+              <a:rPr lang="en-GB" dirty="0" err="1"/>
+              <a:t>faltam</a:t>
+            </a:r>
+            <a:r>
+              <a:rPr lang="en-GB" dirty="0"/>
+              <a:t> </a:t>
+            </a:r>
+            <a:r>
+              <a:rPr lang="en-GB" dirty="0" err="1"/>
+              <a:t>aqui</a:t>
+            </a:r>
+            <a:r>
+              <a:rPr lang="en-GB" dirty="0"/>
+              <a:t> </a:t>
+            </a:r>
+            <a:r>
+              <a:rPr lang="en-GB" dirty="0" err="1"/>
+              <a:t>alguns</a:t>
+            </a:r>
+            <a:r>
+              <a:rPr lang="en-GB" dirty="0"/>
+              <a:t> </a:t>
+            </a:r>
+            <a:r>
+              <a:rPr lang="en-GB" dirty="0" err="1"/>
+              <a:t>métodos</a:t>
+            </a:r>
+            <a:r>
+              <a:rPr lang="en-GB" dirty="0"/>
+              <a:t>. </a:t>
+            </a:r>
+            <a:r>
+              <a:rPr lang="en-GB" dirty="0" err="1"/>
+              <a:t>Devem</a:t>
+            </a:r>
+            <a:r>
+              <a:rPr lang="en-GB" dirty="0"/>
+              <a:t> </a:t>
+            </a:r>
+            <a:r>
+              <a:rPr lang="en-GB" dirty="0" err="1"/>
+              <a:t>ver</a:t>
+            </a:r>
+            <a:r>
+              <a:rPr lang="en-GB" dirty="0"/>
+              <a:t> o </a:t>
+            </a:r>
+            <a:r>
+              <a:rPr lang="en-GB" dirty="0" err="1"/>
+              <a:t>código</a:t>
+            </a:r>
+            <a:r>
+              <a:rPr lang="en-GB" dirty="0"/>
+              <a:t> </a:t>
+            </a:r>
+            <a:r>
+              <a:rPr lang="en-GB" dirty="0" err="1"/>
+              <a:t>fonte</a:t>
+            </a:r>
+            <a:r>
+              <a:rPr lang="en-GB" dirty="0"/>
+              <a:t> </a:t>
+            </a:r>
+            <a:r>
+              <a:rPr lang="en-GB" dirty="0" err="1"/>
+              <a:t>completo</a:t>
             </a:r>
             <a:endParaRPr lang="en-GB" dirty="0"/>
           </a:p>
@@ -2016,7 +2028,7 @@
             <a:fld id="{54F76911-F589-44E9-8155-61F0472246BF}" type="slidenum">
               <a:rPr lang="pt-PT" smtClean="0"/>
               <a:pPr/>
-              <a:t>30</a:t>
+              <a:t>41</a:t>
             </a:fld>
             <a:endParaRPr lang="pt-PT"/>
           </a:p>
@@ -2025,7 +2037,7 @@
     </p:spTree>
     <p:extLst>
       <p:ext uri="{BB962C8B-B14F-4D97-AF65-F5344CB8AC3E}">
-        <p14:creationId xmlns:p14="http://schemas.microsoft.com/office/powerpoint/2010/main" val="3854836870"/>
+        <p14:creationId xmlns:p14="http://schemas.microsoft.com/office/powerpoint/2010/main" val="2471195910"/>
       </p:ext>
     </p:extLst>
   </p:cSld>
@@ -5803,7 +5815,7 @@
       </p:grpSpPr>
       <p:sp>
         <p:nvSpPr>
-          <p:cNvPr id="6" name="Title 5"/>
+          <p:cNvPr id="2" name="Title 1"/>
           <p:cNvSpPr>
             <a:spLocks noGrp="1"/>
           </p:cNvSpPr>
@@ -5817,33 +5829,14 @@
           <a:lstStyle/>
           <a:p>
             <a:r>
+              <a:rPr lang="en-GB" dirty="0"/>
+              <a:t>P</a:t>
+            </a:r>
+            <a:r>
               <a:rPr lang="en-GB" dirty="0" smtClean="0"/>
-              <a:t>core</a:t>
-            </a:r>
-            <a:endParaRPr lang="en-US" dirty="0"/>
-          </a:p>
-        </p:txBody>
-      </p:sp>
-      <p:sp>
-        <p:nvSpPr>
-          <p:cNvPr id="7" name="Text Placeholder 6"/>
-          <p:cNvSpPr>
-            <a:spLocks noGrp="1"/>
-          </p:cNvSpPr>
-          <p:nvPr>
-            <p:ph type="body" idx="1"/>
-          </p:nvPr>
-        </p:nvSpPr>
-        <p:spPr/>
-        <p:txBody>
-          <a:bodyPr/>
-          <a:lstStyle/>
-          <a:p>
-            <a:r>
-              <a:rPr lang="en-GB" dirty="0" smtClean="0"/>
-              <a:t>Persistence </a:t>
-            </a:r>
-            <a:endParaRPr lang="en-US" dirty="0"/>
+              <a:t>resentation</a:t>
+            </a:r>
+            <a:endParaRPr lang="en-GB" dirty="0"/>
           </a:p>
         </p:txBody>
       </p:sp>
@@ -5871,16 +5864,43 @@
           </a:p>
         </p:txBody>
       </p:sp>
+      <p:pic>
+        <p:nvPicPr>
+          <p:cNvPr id="4" name="Picture 3"/>
+          <p:cNvPicPr>
+            <a:picLocks noChangeAspect="1"/>
+          </p:cNvPicPr>
+          <p:nvPr/>
+        </p:nvPicPr>
+        <p:blipFill>
+          <a:blip r:embed="rId2"/>
+          <a:stretch>
+            <a:fillRect/>
+          </a:stretch>
+        </p:blipFill>
+        <p:spPr>
+          <a:xfrm>
+            <a:off x="674905" y="1499769"/>
+            <a:ext cx="7794190" cy="5251550"/>
+          </a:xfrm>
+          <a:prstGeom prst="rect">
+            <a:avLst/>
+          </a:prstGeom>
+        </p:spPr>
+      </p:pic>
     </p:spTree>
     <p:extLst>
       <p:ext uri="{BB962C8B-B14F-4D97-AF65-F5344CB8AC3E}">
-        <p14:creationId xmlns:p14="http://schemas.microsoft.com/office/powerpoint/2010/main" val="2371246310"/>
+        <p14:creationId xmlns:p14="http://schemas.microsoft.com/office/powerpoint/2010/main" val="437931580"/>
       </p:ext>
     </p:extLst>
   </p:cSld>
   <p:clrMapOvr>
     <a:masterClrMapping/>
   </p:clrMapOvr>
+  <p:transition spd="med">
+    <p:fade/>
+  </p:transition>
 </p:sld>
 </file>
 
@@ -5903,101 +5923,6 @@
       </p:grpSpPr>
       <p:sp>
         <p:nvSpPr>
-          <p:cNvPr id="2" name="Title 1"/>
-          <p:cNvSpPr>
-            <a:spLocks noGrp="1"/>
-          </p:cNvSpPr>
-          <p:nvPr>
-            <p:ph type="title"/>
-          </p:nvPr>
-        </p:nvSpPr>
-        <p:spPr/>
-        <p:txBody>
-          <a:bodyPr/>
-          <a:lstStyle/>
-          <a:p>
-            <a:r>
-              <a:rPr lang="en-GB" dirty="0" err="1"/>
-              <a:t>Eapli.Framework</a:t>
-            </a:r>
-            <a:endParaRPr lang="en-GB" dirty="0"/>
-          </a:p>
-        </p:txBody>
-      </p:sp>
-      <p:sp>
-        <p:nvSpPr>
-          <p:cNvPr id="3" name="Content Placeholder 2"/>
-          <p:cNvSpPr>
-            <a:spLocks noGrp="1"/>
-          </p:cNvSpPr>
-          <p:nvPr>
-            <p:ph sz="half" idx="1"/>
-          </p:nvPr>
-        </p:nvSpPr>
-        <p:spPr/>
-        <p:txBody>
-          <a:bodyPr/>
-          <a:lstStyle/>
-          <a:p>
-            <a:r>
-              <a:rPr lang="en-GB" dirty="0"/>
-              <a:t>Persistence</a:t>
-            </a:r>
-          </a:p>
-          <a:p>
-            <a:pPr lvl="1"/>
-            <a:r>
-              <a:rPr lang="en-GB" dirty="0"/>
-              <a:t>Repository interfaces</a:t>
-            </a:r>
-          </a:p>
-          <a:p>
-            <a:r>
-              <a:rPr lang="en-GB" dirty="0"/>
-              <a:t>Implementations</a:t>
-            </a:r>
-          </a:p>
-          <a:p>
-            <a:pPr lvl="1"/>
-            <a:r>
-              <a:rPr lang="en-GB" dirty="0"/>
-              <a:t>JPA</a:t>
-            </a:r>
-          </a:p>
-          <a:p>
-            <a:pPr lvl="1"/>
-            <a:r>
-              <a:rPr lang="en-GB" dirty="0" err="1"/>
-              <a:t>InMemory</a:t>
-            </a:r>
-            <a:r>
-              <a:rPr lang="en-GB" dirty="0"/>
-              <a:t> list</a:t>
-            </a:r>
-          </a:p>
-        </p:txBody>
-      </p:sp>
-      <p:sp>
-        <p:nvSpPr>
-          <p:cNvPr id="4" name="Content Placeholder 3"/>
-          <p:cNvSpPr>
-            <a:spLocks noGrp="1"/>
-          </p:cNvSpPr>
-          <p:nvPr>
-            <p:ph sz="half" idx="2"/>
-          </p:nvPr>
-        </p:nvSpPr>
-        <p:spPr/>
-        <p:txBody>
-          <a:bodyPr/>
-          <a:lstStyle/>
-          <a:p>
-            <a:endParaRPr lang="en-GB"/>
-          </a:p>
-        </p:txBody>
-      </p:sp>
-      <p:sp>
-        <p:nvSpPr>
           <p:cNvPr id="5" name="Slide Number Placeholder 4"/>
           <p:cNvSpPr>
             <a:spLocks noGrp="1"/>
@@ -6015,6 +5940,520 @@
               <a:rPr lang="pt-PT" smtClean="0"/>
               <a:pPr/>
               <a:t>11</a:t>
+            </a:fld>
+            <a:endParaRPr lang="pt-PT"/>
+          </a:p>
+        </p:txBody>
+      </p:sp>
+      <p:sp>
+        <p:nvSpPr>
+          <p:cNvPr id="2" name="Title 1"/>
+          <p:cNvSpPr>
+            <a:spLocks noGrp="1"/>
+          </p:cNvSpPr>
+          <p:nvPr>
+            <p:ph type="title" idx="4294967295"/>
+          </p:nvPr>
+        </p:nvSpPr>
+        <p:spPr>
+          <a:xfrm>
+            <a:off x="0" y="152400"/>
+            <a:ext cx="8229600" cy="1250950"/>
+          </a:xfrm>
+        </p:spPr>
+        <p:txBody>
+          <a:bodyPr/>
+          <a:lstStyle/>
+          <a:p>
+            <a:endParaRPr lang="en-GB" dirty="0"/>
+          </a:p>
+        </p:txBody>
+      </p:sp>
+      <p:pic>
+        <p:nvPicPr>
+          <p:cNvPr id="3" name="Picture 2"/>
+          <p:cNvPicPr>
+            <a:picLocks noChangeAspect="1"/>
+          </p:cNvPicPr>
+          <p:nvPr/>
+        </p:nvPicPr>
+        <p:blipFill rotWithShape="1">
+          <a:blip r:embed="rId2"/>
+          <a:srcRect r="29215"/>
+          <a:stretch/>
+        </p:blipFill>
+        <p:spPr>
+          <a:xfrm>
+            <a:off x="793" y="0"/>
+            <a:ext cx="9181020" cy="7018769"/>
+          </a:xfrm>
+          <a:prstGeom prst="rect">
+            <a:avLst/>
+          </a:prstGeom>
+        </p:spPr>
+      </p:pic>
+    </p:spTree>
+    <p:extLst>
+      <p:ext uri="{BB962C8B-B14F-4D97-AF65-F5344CB8AC3E}">
+        <p14:creationId xmlns:p14="http://schemas.microsoft.com/office/powerpoint/2010/main" val="89138438"/>
+      </p:ext>
+    </p:extLst>
+  </p:cSld>
+  <p:clrMapOvr>
+    <a:masterClrMapping/>
+  </p:clrMapOvr>
+</p:sld>
+</file>
+
+<file path=ppt/slides/slide12.xml><?xml version="1.0" encoding="utf-8"?>
+<p:sld xmlns:a="http://schemas.openxmlformats.org/drawingml/2006/main" xmlns:r="http://schemas.openxmlformats.org/officeDocument/2006/relationships" xmlns:p="http://schemas.openxmlformats.org/presentationml/2006/main">
+  <p:cSld>
+    <p:spTree>
+      <p:nvGrpSpPr>
+        <p:cNvPr id="1" name=""/>
+        <p:cNvGrpSpPr/>
+        <p:nvPr/>
+      </p:nvGrpSpPr>
+      <p:grpSpPr>
+        <a:xfrm>
+          <a:off x="0" y="0"/>
+          <a:ext cx="0" cy="0"/>
+          <a:chOff x="0" y="0"/>
+          <a:chExt cx="0" cy="0"/>
+        </a:xfrm>
+      </p:grpSpPr>
+      <p:sp>
+        <p:nvSpPr>
+          <p:cNvPr id="2" name="Slide Number Placeholder 1"/>
+          <p:cNvSpPr>
+            <a:spLocks noGrp="1"/>
+          </p:cNvSpPr>
+          <p:nvPr>
+            <p:ph type="sldNum" sz="quarter" idx="12"/>
+          </p:nvPr>
+        </p:nvSpPr>
+        <p:spPr/>
+        <p:txBody>
+          <a:bodyPr/>
+          <a:lstStyle/>
+          <a:p>
+            <a:fld id="{024A9932-4E76-455F-8E1A-2CC10C89B014}" type="slidenum">
+              <a:rPr lang="pt-PT" smtClean="0"/>
+              <a:pPr/>
+              <a:t>12</a:t>
+            </a:fld>
+            <a:endParaRPr lang="pt-PT"/>
+          </a:p>
+        </p:txBody>
+      </p:sp>
+      <p:pic>
+        <p:nvPicPr>
+          <p:cNvPr id="3" name="Picture 2"/>
+          <p:cNvPicPr>
+            <a:picLocks noChangeAspect="1"/>
+          </p:cNvPicPr>
+          <p:nvPr/>
+        </p:nvPicPr>
+        <p:blipFill rotWithShape="1">
+          <a:blip r:embed="rId2"/>
+          <a:srcRect r="31875"/>
+          <a:stretch/>
+        </p:blipFill>
+        <p:spPr>
+          <a:xfrm>
+            <a:off x="14869" y="12576"/>
+            <a:ext cx="9129640" cy="7252112"/>
+          </a:xfrm>
+          <a:prstGeom prst="rect">
+            <a:avLst/>
+          </a:prstGeom>
+        </p:spPr>
+      </p:pic>
+    </p:spTree>
+    <p:extLst>
+      <p:ext uri="{BB962C8B-B14F-4D97-AF65-F5344CB8AC3E}">
+        <p14:creationId xmlns:p14="http://schemas.microsoft.com/office/powerpoint/2010/main" val="3224620507"/>
+      </p:ext>
+    </p:extLst>
+  </p:cSld>
+  <p:clrMapOvr>
+    <a:masterClrMapping/>
+  </p:clrMapOvr>
+</p:sld>
+</file>
+
+<file path=ppt/slides/slide13.xml><?xml version="1.0" encoding="utf-8"?>
+<p:sld xmlns:a="http://schemas.openxmlformats.org/drawingml/2006/main" xmlns:r="http://schemas.openxmlformats.org/officeDocument/2006/relationships" xmlns:p="http://schemas.openxmlformats.org/presentationml/2006/main">
+  <p:cSld>
+    <p:spTree>
+      <p:nvGrpSpPr>
+        <p:cNvPr id="1" name=""/>
+        <p:cNvGrpSpPr/>
+        <p:nvPr/>
+      </p:nvGrpSpPr>
+      <p:grpSpPr>
+        <a:xfrm>
+          <a:off x="0" y="0"/>
+          <a:ext cx="0" cy="0"/>
+          <a:chOff x="0" y="0"/>
+          <a:chExt cx="0" cy="0"/>
+        </a:xfrm>
+      </p:grpSpPr>
+      <p:sp>
+        <p:nvSpPr>
+          <p:cNvPr id="5" name="Slide Number Placeholder 4"/>
+          <p:cNvSpPr>
+            <a:spLocks noGrp="1"/>
+          </p:cNvSpPr>
+          <p:nvPr>
+            <p:ph type="sldNum" sz="quarter" idx="12"/>
+          </p:nvPr>
+        </p:nvSpPr>
+        <p:spPr/>
+        <p:txBody>
+          <a:bodyPr/>
+          <a:lstStyle/>
+          <a:p>
+            <a:fld id="{024A9932-4E76-455F-8E1A-2CC10C89B014}" type="slidenum">
+              <a:rPr lang="pt-PT" smtClean="0"/>
+              <a:pPr/>
+              <a:t>13</a:t>
+            </a:fld>
+            <a:endParaRPr lang="pt-PT"/>
+          </a:p>
+        </p:txBody>
+      </p:sp>
+      <p:sp>
+        <p:nvSpPr>
+          <p:cNvPr id="2" name="Title 1"/>
+          <p:cNvSpPr>
+            <a:spLocks noGrp="1"/>
+          </p:cNvSpPr>
+          <p:nvPr>
+            <p:ph type="title" idx="4294967295"/>
+          </p:nvPr>
+        </p:nvSpPr>
+        <p:spPr>
+          <a:xfrm>
+            <a:off x="0" y="152400"/>
+            <a:ext cx="8229600" cy="1250950"/>
+          </a:xfrm>
+        </p:spPr>
+        <p:txBody>
+          <a:bodyPr/>
+          <a:lstStyle/>
+          <a:p>
+            <a:endParaRPr lang="en-GB" dirty="0"/>
+          </a:p>
+        </p:txBody>
+      </p:sp>
+      <p:pic>
+        <p:nvPicPr>
+          <p:cNvPr id="6" name="Picture 4"/>
+          <p:cNvPicPr>
+            <a:picLocks noChangeAspect="1" noChangeArrowheads="1"/>
+          </p:cNvPicPr>
+          <p:nvPr/>
+        </p:nvPicPr>
+        <p:blipFill>
+          <a:blip r:embed="rId2">
+            <a:extLst>
+              <a:ext uri="{28A0092B-C50C-407E-A947-70E740481C1C}">
+                <a14:useLocalDpi xmlns:a14="http://schemas.microsoft.com/office/drawing/2010/main" val="0"/>
+              </a:ext>
+            </a:extLst>
+          </a:blip>
+          <a:srcRect/>
+          <a:stretch>
+            <a:fillRect/>
+          </a:stretch>
+        </p:blipFill>
+        <p:spPr bwMode="auto">
+          <a:xfrm>
+            <a:off x="27514" y="68745"/>
+            <a:ext cx="9088972" cy="6720510"/>
+          </a:xfrm>
+          <a:prstGeom prst="rect">
+            <a:avLst/>
+          </a:prstGeom>
+          <a:noFill/>
+          <a:ln>
+            <a:noFill/>
+          </a:ln>
+          <a:extLst>
+            <a:ext uri="{909E8E84-426E-40DD-AFC4-6F175D3DCCD1}">
+              <a14:hiddenFill xmlns:a14="http://schemas.microsoft.com/office/drawing/2010/main">
+                <a:solidFill>
+                  <a:schemeClr val="accent1"/>
+                </a:solidFill>
+              </a14:hiddenFill>
+            </a:ext>
+            <a:ext uri="{91240B29-F687-4F45-9708-019B960494DF}">
+              <a14:hiddenLine xmlns:a14="http://schemas.microsoft.com/office/drawing/2010/main" w="9525">
+                <a:solidFill>
+                  <a:schemeClr val="tx1"/>
+                </a:solidFill>
+                <a:miter lim="800000"/>
+                <a:headEnd/>
+                <a:tailEnd/>
+              </a14:hiddenLine>
+            </a:ext>
+          </a:extLst>
+        </p:spPr>
+      </p:pic>
+    </p:spTree>
+    <p:extLst>
+      <p:ext uri="{BB962C8B-B14F-4D97-AF65-F5344CB8AC3E}">
+        <p14:creationId xmlns:p14="http://schemas.microsoft.com/office/powerpoint/2010/main" val="2514559034"/>
+      </p:ext>
+    </p:extLst>
+  </p:cSld>
+  <p:clrMapOvr>
+    <a:masterClrMapping/>
+  </p:clrMapOvr>
+</p:sld>
+</file>
+
+<file path=ppt/slides/slide14.xml><?xml version="1.0" encoding="utf-8"?>
+<p:sld xmlns:a="http://schemas.openxmlformats.org/drawingml/2006/main" xmlns:r="http://schemas.openxmlformats.org/officeDocument/2006/relationships" xmlns:p="http://schemas.openxmlformats.org/presentationml/2006/main">
+  <p:cSld>
+    <p:spTree>
+      <p:nvGrpSpPr>
+        <p:cNvPr id="1" name=""/>
+        <p:cNvGrpSpPr/>
+        <p:nvPr/>
+      </p:nvGrpSpPr>
+      <p:grpSpPr>
+        <a:xfrm>
+          <a:off x="0" y="0"/>
+          <a:ext cx="0" cy="0"/>
+          <a:chOff x="0" y="0"/>
+          <a:chExt cx="0" cy="0"/>
+        </a:xfrm>
+      </p:grpSpPr>
+      <p:sp>
+        <p:nvSpPr>
+          <p:cNvPr id="6" name="Title 5"/>
+          <p:cNvSpPr>
+            <a:spLocks noGrp="1"/>
+          </p:cNvSpPr>
+          <p:nvPr>
+            <p:ph type="title"/>
+          </p:nvPr>
+        </p:nvSpPr>
+        <p:spPr/>
+        <p:txBody>
+          <a:bodyPr/>
+          <a:lstStyle/>
+          <a:p>
+            <a:r>
+              <a:rPr lang="en-GB" dirty="0"/>
+              <a:t>C</a:t>
+            </a:r>
+            <a:r>
+              <a:rPr lang="en-GB" dirty="0" smtClean="0"/>
+              <a:t>ore</a:t>
+            </a:r>
+            <a:endParaRPr lang="en-US" dirty="0"/>
+          </a:p>
+        </p:txBody>
+      </p:sp>
+      <p:sp>
+        <p:nvSpPr>
+          <p:cNvPr id="7" name="Text Placeholder 6"/>
+          <p:cNvSpPr>
+            <a:spLocks noGrp="1"/>
+          </p:cNvSpPr>
+          <p:nvPr>
+            <p:ph type="body" idx="1"/>
+          </p:nvPr>
+        </p:nvSpPr>
+        <p:spPr/>
+        <p:txBody>
+          <a:bodyPr/>
+          <a:lstStyle/>
+          <a:p>
+            <a:r>
+              <a:rPr lang="en-GB" dirty="0" smtClean="0"/>
+              <a:t>Persistence </a:t>
+            </a:r>
+            <a:endParaRPr lang="en-US" dirty="0"/>
+          </a:p>
+        </p:txBody>
+      </p:sp>
+      <p:sp>
+        <p:nvSpPr>
+          <p:cNvPr id="5" name="Slide Number Placeholder 4"/>
+          <p:cNvSpPr>
+            <a:spLocks noGrp="1"/>
+          </p:cNvSpPr>
+          <p:nvPr>
+            <p:ph type="sldNum" sz="quarter" idx="12"/>
+          </p:nvPr>
+        </p:nvSpPr>
+        <p:spPr/>
+        <p:txBody>
+          <a:bodyPr/>
+          <a:lstStyle/>
+          <a:p>
+            <a:fld id="{024A9932-4E76-455F-8E1A-2CC10C89B014}" type="slidenum">
+              <a:rPr lang="pt-PT" smtClean="0"/>
+              <a:pPr/>
+              <a:t>14</a:t>
+            </a:fld>
+            <a:endParaRPr lang="pt-PT"/>
+          </a:p>
+        </p:txBody>
+      </p:sp>
+    </p:spTree>
+    <p:extLst>
+      <p:ext uri="{BB962C8B-B14F-4D97-AF65-F5344CB8AC3E}">
+        <p14:creationId xmlns:p14="http://schemas.microsoft.com/office/powerpoint/2010/main" val="2371246310"/>
+      </p:ext>
+    </p:extLst>
+  </p:cSld>
+  <p:clrMapOvr>
+    <a:masterClrMapping/>
+  </p:clrMapOvr>
+</p:sld>
+</file>
+
+<file path=ppt/slides/slide15.xml><?xml version="1.0" encoding="utf-8"?>
+<p:sld xmlns:a="http://schemas.openxmlformats.org/drawingml/2006/main" xmlns:r="http://schemas.openxmlformats.org/officeDocument/2006/relationships" xmlns:p="http://schemas.openxmlformats.org/presentationml/2006/main">
+  <p:cSld>
+    <p:spTree>
+      <p:nvGrpSpPr>
+        <p:cNvPr id="1" name=""/>
+        <p:cNvGrpSpPr/>
+        <p:nvPr/>
+      </p:nvGrpSpPr>
+      <p:grpSpPr>
+        <a:xfrm>
+          <a:off x="0" y="0"/>
+          <a:ext cx="0" cy="0"/>
+          <a:chOff x="0" y="0"/>
+          <a:chExt cx="0" cy="0"/>
+        </a:xfrm>
+      </p:grpSpPr>
+      <p:sp>
+        <p:nvSpPr>
+          <p:cNvPr id="2" name="Title 1"/>
+          <p:cNvSpPr>
+            <a:spLocks noGrp="1"/>
+          </p:cNvSpPr>
+          <p:nvPr>
+            <p:ph type="title"/>
+          </p:nvPr>
+        </p:nvSpPr>
+        <p:spPr/>
+        <p:txBody>
+          <a:bodyPr/>
+          <a:lstStyle/>
+          <a:p>
+            <a:r>
+              <a:rPr lang="en-GB" dirty="0" smtClean="0"/>
+              <a:t>Persistence</a:t>
+            </a:r>
+            <a:endParaRPr lang="en-GB" dirty="0"/>
+          </a:p>
+        </p:txBody>
+      </p:sp>
+      <p:sp>
+        <p:nvSpPr>
+          <p:cNvPr id="3" name="Content Placeholder 2"/>
+          <p:cNvSpPr>
+            <a:spLocks noGrp="1"/>
+          </p:cNvSpPr>
+          <p:nvPr>
+            <p:ph sz="half" idx="1"/>
+          </p:nvPr>
+        </p:nvSpPr>
+        <p:spPr/>
+        <p:txBody>
+          <a:bodyPr/>
+          <a:lstStyle/>
+          <a:p>
+            <a:r>
+              <a:rPr lang="en-GB" dirty="0"/>
+              <a:t>Persistence</a:t>
+            </a:r>
+          </a:p>
+          <a:p>
+            <a:pPr lvl="1"/>
+            <a:r>
+              <a:rPr lang="en-GB" dirty="0"/>
+              <a:t>Repository interfaces</a:t>
+            </a:r>
+          </a:p>
+          <a:p>
+            <a:r>
+              <a:rPr lang="en-GB" dirty="0"/>
+              <a:t>Implementations</a:t>
+            </a:r>
+          </a:p>
+          <a:p>
+            <a:pPr lvl="1"/>
+            <a:r>
+              <a:rPr lang="en-GB" dirty="0"/>
+              <a:t>JPA</a:t>
+            </a:r>
+          </a:p>
+          <a:p>
+            <a:pPr lvl="1"/>
+            <a:r>
+              <a:rPr lang="en-GB" dirty="0" err="1" smtClean="0"/>
+              <a:t>InMemory</a:t>
+            </a:r>
+            <a:endParaRPr lang="en-GB" dirty="0" smtClean="0"/>
+          </a:p>
+          <a:p>
+            <a:pPr lvl="1"/>
+            <a:r>
+              <a:rPr lang="en-GB" dirty="0" smtClean="0"/>
+              <a:t>Spring Data JPA</a:t>
+            </a:r>
+            <a:endParaRPr lang="en-GB" dirty="0"/>
+          </a:p>
+        </p:txBody>
+      </p:sp>
+      <p:sp>
+        <p:nvSpPr>
+          <p:cNvPr id="4" name="Content Placeholder 3"/>
+          <p:cNvSpPr>
+            <a:spLocks noGrp="1"/>
+          </p:cNvSpPr>
+          <p:nvPr>
+            <p:ph sz="half" idx="2"/>
+          </p:nvPr>
+        </p:nvSpPr>
+        <p:spPr/>
+        <p:txBody>
+          <a:bodyPr/>
+          <a:lstStyle/>
+          <a:p>
+            <a:endParaRPr lang="en-GB"/>
+          </a:p>
+        </p:txBody>
+      </p:sp>
+      <p:sp>
+        <p:nvSpPr>
+          <p:cNvPr id="5" name="Slide Number Placeholder 4"/>
+          <p:cNvSpPr>
+            <a:spLocks noGrp="1"/>
+          </p:cNvSpPr>
+          <p:nvPr>
+            <p:ph type="sldNum" sz="quarter" idx="12"/>
+          </p:nvPr>
+        </p:nvSpPr>
+        <p:spPr/>
+        <p:txBody>
+          <a:bodyPr/>
+          <a:lstStyle/>
+          <a:p>
+            <a:fld id="{024A9932-4E76-455F-8E1A-2CC10C89B014}" type="slidenum">
+              <a:rPr lang="pt-PT" smtClean="0"/>
+              <a:pPr/>
+              <a:t>15</a:t>
             </a:fld>
             <a:endParaRPr lang="pt-PT"/>
           </a:p>
@@ -6057,7 +6496,7 @@
 </p:sld>
 </file>
 
-<file path=ppt/slides/slide12.xml><?xml version="1.0" encoding="utf-8"?>
+<file path=ppt/slides/slide16.xml><?xml version="1.0" encoding="utf-8"?>
 <p:sld xmlns:a="http://schemas.openxmlformats.org/drawingml/2006/main" xmlns:r="http://schemas.openxmlformats.org/officeDocument/2006/relationships" xmlns:p="http://schemas.openxmlformats.org/presentationml/2006/main">
   <p:cSld>
     <p:spTree>
@@ -6155,7 +6594,7 @@
             <a:fld id="{024A9932-4E76-455F-8E1A-2CC10C89B014}" type="slidenum">
               <a:rPr lang="pt-PT" smtClean="0"/>
               <a:pPr/>
-              <a:t>12</a:t>
+              <a:t>16</a:t>
             </a:fld>
             <a:endParaRPr lang="pt-PT"/>
           </a:p>
@@ -6174,7 +6613,7 @@
 </p:sld>
 </file>
 
-<file path=ppt/slides/slide13.xml><?xml version="1.0" encoding="utf-8"?>
+<file path=ppt/slides/slide17.xml><?xml version="1.0" encoding="utf-8"?>
 <p:sld xmlns:a="http://schemas.openxmlformats.org/drawingml/2006/main" xmlns:r="http://schemas.openxmlformats.org/officeDocument/2006/relationships" xmlns:p="http://schemas.openxmlformats.org/presentationml/2006/main">
   <p:cSld>
     <p:spTree>
@@ -6193,7 +6632,7 @@
       </p:grpSpPr>
       <p:sp>
         <p:nvSpPr>
-          <p:cNvPr id="2" name="Title 1"/>
+          <p:cNvPr id="6" name="Title 5"/>
           <p:cNvSpPr>
             <a:spLocks noGrp="1"/>
           </p:cNvSpPr>
@@ -6208,15 +6647,14 @@
           <a:p>
             <a:r>
               <a:rPr lang="en-GB" dirty="0"/>
-              <a:t>In memory Repositories</a:t>
-            </a:r>
-            <a:endParaRPr lang="en-US" dirty="0"/>
-          </a:p>
-        </p:txBody>
-      </p:sp>
-      <p:sp>
-        <p:nvSpPr>
-          <p:cNvPr id="3" name="Content Placeholder 2"/>
+              <a:t>Persistence</a:t>
+            </a:r>
+          </a:p>
+        </p:txBody>
+      </p:sp>
+      <p:sp>
+        <p:nvSpPr>
+          <p:cNvPr id="7" name="Content Placeholder 6"/>
           <p:cNvSpPr>
             <a:spLocks noGrp="1"/>
           </p:cNvSpPr>
@@ -6226,31 +6664,68 @@
         </p:nvSpPr>
         <p:spPr/>
         <p:txBody>
-          <a:bodyPr/>
-          <a:lstStyle/>
-          <a:p>
+          <a:bodyPr>
+            <a:normAutofit lnSpcReduction="10000"/>
+          </a:bodyPr>
+          <a:lstStyle/>
+          <a:p>
+            <a:r>
+              <a:rPr lang="en-GB" dirty="0"/>
+              <a:t>Controller needs to access the repositories</a:t>
+            </a:r>
+          </a:p>
+          <a:p>
+            <a:r>
+              <a:rPr lang="en-GB" dirty="0"/>
+              <a:t>But we have three repository implementations</a:t>
+            </a:r>
+          </a:p>
+          <a:p>
+            <a:pPr lvl="1"/>
+            <a:r>
+              <a:rPr lang="en-GB" dirty="0"/>
+              <a:t>In memory</a:t>
+            </a:r>
+          </a:p>
+          <a:p>
+            <a:pPr lvl="1"/>
+            <a:r>
+              <a:rPr lang="en-GB" dirty="0"/>
+              <a:t>Relational database thru JPA</a:t>
+            </a:r>
+          </a:p>
+          <a:p>
+            <a:pPr lvl="1"/>
+            <a:r>
+              <a:rPr lang="en-GB" dirty="0"/>
+              <a:t>Relational database thru </a:t>
+            </a:r>
             <a:r>
               <a:rPr lang="en-GB" dirty="0" err="1"/>
-              <a:t>InMemoryBaseRepository</a:t>
+              <a:t>SpringData</a:t>
             </a:r>
             <a:endParaRPr lang="en-GB" dirty="0"/>
           </a:p>
           <a:p>
             <a:r>
-              <a:rPr lang="en-GB" dirty="0" err="1"/>
-              <a:t>InMemoryBaseRepositorywithLongPK</a:t>
+              <a:rPr lang="en-GB" dirty="0"/>
+              <a:t>Hide persistence details from rest of the code</a:t>
+            </a:r>
+          </a:p>
+          <a:p>
+            <a:pPr lvl="1"/>
+            <a:r>
+              <a:rPr lang="en-GB" dirty="0"/>
+              <a:t>Interfaces</a:t>
+            </a:r>
+          </a:p>
+          <a:p>
+            <a:pPr lvl="1"/>
+            <a:r>
+              <a:rPr lang="en-GB" dirty="0" smtClean="0"/>
+              <a:t>Dependency injection or Factories </a:t>
             </a:r>
             <a:endParaRPr lang="en-GB" dirty="0"/>
-          </a:p>
-          <a:p>
-            <a:endParaRPr lang="en-GB" dirty="0"/>
-          </a:p>
-          <a:p>
-            <a:r>
-              <a:rPr lang="en-GB" dirty="0"/>
-              <a:t>For pedagogical testing purposes only!</a:t>
-            </a:r>
-            <a:endParaRPr lang="en-US" dirty="0"/>
           </a:p>
         </p:txBody>
       </p:sp>
@@ -6272,7 +6747,7 @@
             <a:fld id="{024A9932-4E76-455F-8E1A-2CC10C89B014}" type="slidenum">
               <a:rPr lang="pt-PT" smtClean="0"/>
               <a:pPr/>
-              <a:t>13</a:t>
+              <a:t>17</a:t>
             </a:fld>
             <a:endParaRPr lang="pt-PT"/>
           </a:p>
@@ -6281,7 +6756,7 @@
     </p:spTree>
     <p:extLst>
       <p:ext uri="{BB962C8B-B14F-4D97-AF65-F5344CB8AC3E}">
-        <p14:creationId xmlns:p14="http://schemas.microsoft.com/office/powerpoint/2010/main" val="1746043456"/>
+        <p14:creationId xmlns:p14="http://schemas.microsoft.com/office/powerpoint/2010/main" val="1703766327"/>
       </p:ext>
     </p:extLst>
   </p:cSld>
@@ -6291,7 +6766,7 @@
 </p:sld>
 </file>
 
-<file path=ppt/slides/slide14.xml><?xml version="1.0" encoding="utf-8"?>
+<file path=ppt/slides/slide18.xml><?xml version="1.0" encoding="utf-8"?>
 <p:sld xmlns:a="http://schemas.openxmlformats.org/drawingml/2006/main" xmlns:r="http://schemas.openxmlformats.org/officeDocument/2006/relationships" xmlns:p="http://schemas.openxmlformats.org/presentationml/2006/main">
   <p:cSld>
     <p:spTree>
@@ -6310,108 +6785,7 @@
       </p:grpSpPr>
       <p:sp>
         <p:nvSpPr>
-          <p:cNvPr id="2" name="Title 1"/>
-          <p:cNvSpPr>
-            <a:spLocks noGrp="1"/>
-          </p:cNvSpPr>
-          <p:nvPr>
-            <p:ph type="title"/>
-          </p:nvPr>
-        </p:nvSpPr>
-        <p:spPr/>
-        <p:txBody>
-          <a:bodyPr/>
-          <a:lstStyle/>
-          <a:p>
-            <a:r>
-              <a:rPr lang="en-GB" dirty="0"/>
-              <a:t>JPA Repositories</a:t>
-            </a:r>
-            <a:endParaRPr lang="en-US" dirty="0"/>
-          </a:p>
-        </p:txBody>
-      </p:sp>
-      <p:sp>
-        <p:nvSpPr>
-          <p:cNvPr id="3" name="Content Placeholder 2"/>
-          <p:cNvSpPr>
-            <a:spLocks noGrp="1"/>
-          </p:cNvSpPr>
-          <p:nvPr>
-            <p:ph idx="1"/>
-          </p:nvPr>
-        </p:nvSpPr>
-        <p:spPr/>
-        <p:txBody>
-          <a:bodyPr>
-            <a:normAutofit fontScale="77500" lnSpcReduction="20000"/>
-          </a:bodyPr>
-          <a:lstStyle/>
-          <a:p>
-            <a:r>
-              <a:rPr lang="en-GB" dirty="0" err="1"/>
-              <a:t>JpaBaseRepository</a:t>
-            </a:r>
-            <a:endParaRPr lang="en-GB" dirty="0"/>
-          </a:p>
-          <a:p>
-            <a:pPr lvl="1"/>
-            <a:r>
-              <a:rPr lang="en-GB" dirty="0"/>
-              <a:t>Generic repository implementation that expects the entity manager factory to be injected by a container, e.g., web server</a:t>
-            </a:r>
-          </a:p>
-          <a:p>
-            <a:r>
-              <a:rPr lang="en-GB" dirty="0" err="1"/>
-              <a:t>JpaNotRunningInContainerBaseRepository</a:t>
-            </a:r>
-            <a:endParaRPr lang="en-GB" dirty="0"/>
-          </a:p>
-          <a:p>
-            <a:pPr lvl="1"/>
-            <a:r>
-              <a:rPr lang="en-GB" dirty="0"/>
-              <a:t>For scenarios where the code is not running in a container but transaction is managed by the outside, e.g., controller</a:t>
-            </a:r>
-          </a:p>
-          <a:p>
-            <a:r>
-              <a:rPr lang="en-GB" dirty="0" err="1"/>
-              <a:t>JpaTransactionalBaseRepository</a:t>
-            </a:r>
-            <a:endParaRPr lang="en-GB" dirty="0"/>
-          </a:p>
-          <a:p>
-            <a:pPr lvl="1"/>
-            <a:r>
-              <a:rPr lang="en-GB" dirty="0"/>
-              <a:t>For scenarios not running in a container but transactions are created and committed by each repository method; the connection is also closed automatically in each method.</a:t>
-            </a:r>
-          </a:p>
-          <a:p>
-            <a:r>
-              <a:rPr lang="en-GB" dirty="0" err="1"/>
-              <a:t>JpaAutoTxRepository</a:t>
-            </a:r>
-            <a:endParaRPr lang="en-GB" dirty="0"/>
-          </a:p>
-          <a:p>
-            <a:pPr lvl="1"/>
-            <a:r>
-              <a:rPr lang="en-GB" dirty="0"/>
-              <a:t>Dual behaviour to either have outside transactional control or explicit transaction in each method</a:t>
-            </a:r>
-          </a:p>
-          <a:p>
-            <a:pPr lvl="1"/>
-            <a:endParaRPr lang="en-US" dirty="0"/>
-          </a:p>
-        </p:txBody>
-      </p:sp>
-      <p:sp>
-        <p:nvSpPr>
-          <p:cNvPr id="5" name="Slide Number Placeholder 4"/>
+          <p:cNvPr id="4" name="Slide Number Placeholder 3"/>
           <p:cNvSpPr>
             <a:spLocks noGrp="1"/>
           </p:cNvSpPr>
@@ -6427,16 +6801,40 @@
             <a:fld id="{024A9932-4E76-455F-8E1A-2CC10C89B014}" type="slidenum">
               <a:rPr lang="pt-PT" smtClean="0"/>
               <a:pPr/>
-              <a:t>14</a:t>
+              <a:t>18</a:t>
             </a:fld>
             <a:endParaRPr lang="pt-PT"/>
           </a:p>
         </p:txBody>
       </p:sp>
+      <p:pic>
+        <p:nvPicPr>
+          <p:cNvPr id="6" name="Picture 5"/>
+          <p:cNvPicPr>
+            <a:picLocks noChangeAspect="1"/>
+          </p:cNvPicPr>
+          <p:nvPr/>
+        </p:nvPicPr>
+        <p:blipFill>
+          <a:blip r:embed="rId3"/>
+          <a:stretch>
+            <a:fillRect/>
+          </a:stretch>
+        </p:blipFill>
+        <p:spPr>
+          <a:xfrm>
+            <a:off x="1115616" y="260648"/>
+            <a:ext cx="6912767" cy="6332377"/>
+          </a:xfrm>
+          <a:prstGeom prst="rect">
+            <a:avLst/>
+          </a:prstGeom>
+        </p:spPr>
+      </p:pic>
     </p:spTree>
     <p:extLst>
       <p:ext uri="{BB962C8B-B14F-4D97-AF65-F5344CB8AC3E}">
-        <p14:creationId xmlns:p14="http://schemas.microsoft.com/office/powerpoint/2010/main" val="3449136498"/>
+        <p14:creationId xmlns:p14="http://schemas.microsoft.com/office/powerpoint/2010/main" val="1110602120"/>
       </p:ext>
     </p:extLst>
   </p:cSld>
@@ -6446,7 +6844,7 @@
 </p:sld>
 </file>
 
-<file path=ppt/slides/slide15.xml><?xml version="1.0" encoding="utf-8"?>
+<file path=ppt/slides/slide19.xml><?xml version="1.0" encoding="utf-8"?>
 <p:sld xmlns:a="http://schemas.openxmlformats.org/drawingml/2006/main" xmlns:r="http://schemas.openxmlformats.org/officeDocument/2006/relationships" xmlns:p="http://schemas.openxmlformats.org/presentationml/2006/main">
   <p:cSld>
     <p:spTree>
@@ -6476,13 +6874,13 @@
         <p:spPr/>
         <p:txBody>
           <a:bodyPr>
-            <a:normAutofit fontScale="90000"/>
+            <a:normAutofit/>
           </a:bodyPr>
           <a:lstStyle/>
           <a:p>
             <a:r>
               <a:rPr lang="en-GB" dirty="0"/>
-              <a:t>Full transaction control by the repository</a:t>
+              <a:t>Example</a:t>
             </a:r>
             <a:endParaRPr lang="pt-PT" dirty="0"/>
           </a:p>
@@ -6506,7 +6904,2369 @@
             <a:fld id="{024A9932-4E76-455F-8E1A-2CC10C89B014}" type="slidenum">
               <a:rPr lang="pt-PT" smtClean="0"/>
               <a:pPr/>
-              <a:t>15</a:t>
+              <a:t>19</a:t>
+            </a:fld>
+            <a:endParaRPr lang="pt-PT"/>
+          </a:p>
+        </p:txBody>
+      </p:sp>
+      <p:pic>
+        <p:nvPicPr>
+          <p:cNvPr id="5" name="Picture 4"/>
+          <p:cNvPicPr>
+            <a:picLocks noChangeAspect="1"/>
+          </p:cNvPicPr>
+          <p:nvPr/>
+        </p:nvPicPr>
+        <p:blipFill rotWithShape="1">
+          <a:blip r:embed="rId2"/>
+          <a:srcRect t="58928"/>
+          <a:stretch/>
+        </p:blipFill>
+        <p:spPr>
+          <a:xfrm>
+            <a:off x="143508" y="1092401"/>
+            <a:ext cx="8676964" cy="1260076"/>
+          </a:xfrm>
+          <a:prstGeom prst="rect">
+            <a:avLst/>
+          </a:prstGeom>
+          <a:ln>
+            <a:noFill/>
+          </a:ln>
+          <a:effectLst>
+            <a:outerShdw blurRad="292100" dist="139700" dir="2700000" algn="tl" rotWithShape="0">
+              <a:srgbClr val="333333">
+                <a:alpha val="65000"/>
+              </a:srgbClr>
+            </a:outerShdw>
+          </a:effectLst>
+        </p:spPr>
+      </p:pic>
+      <p:pic>
+        <p:nvPicPr>
+          <p:cNvPr id="6" name="Picture 5"/>
+          <p:cNvPicPr>
+            <a:picLocks noChangeAspect="1"/>
+          </p:cNvPicPr>
+          <p:nvPr/>
+        </p:nvPicPr>
+        <p:blipFill>
+          <a:blip r:embed="rId3"/>
+          <a:stretch>
+            <a:fillRect/>
+          </a:stretch>
+        </p:blipFill>
+        <p:spPr>
+          <a:xfrm>
+            <a:off x="143508" y="2534438"/>
+            <a:ext cx="8925985" cy="1987426"/>
+          </a:xfrm>
+          <a:prstGeom prst="rect">
+            <a:avLst/>
+          </a:prstGeom>
+          <a:ln>
+            <a:noFill/>
+          </a:ln>
+          <a:effectLst>
+            <a:outerShdw blurRad="292100" dist="139700" dir="2700000" algn="tl" rotWithShape="0">
+              <a:srgbClr val="333333">
+                <a:alpha val="65000"/>
+              </a:srgbClr>
+            </a:outerShdw>
+          </a:effectLst>
+        </p:spPr>
+      </p:pic>
+      <p:pic>
+        <p:nvPicPr>
+          <p:cNvPr id="7" name="Picture 6"/>
+          <p:cNvPicPr>
+            <a:picLocks noChangeAspect="1"/>
+          </p:cNvPicPr>
+          <p:nvPr/>
+        </p:nvPicPr>
+        <p:blipFill>
+          <a:blip r:embed="rId4"/>
+          <a:stretch>
+            <a:fillRect/>
+          </a:stretch>
+        </p:blipFill>
+        <p:spPr>
+          <a:xfrm>
+            <a:off x="136953" y="4689140"/>
+            <a:ext cx="8899668" cy="2109551"/>
+          </a:xfrm>
+          <a:prstGeom prst="rect">
+            <a:avLst/>
+          </a:prstGeom>
+          <a:ln>
+            <a:noFill/>
+          </a:ln>
+          <a:effectLst>
+            <a:outerShdw blurRad="292100" dist="139700" dir="2700000" algn="tl" rotWithShape="0">
+              <a:srgbClr val="333333">
+                <a:alpha val="65000"/>
+              </a:srgbClr>
+            </a:outerShdw>
+          </a:effectLst>
+        </p:spPr>
+      </p:pic>
+    </p:spTree>
+    <p:extLst>
+      <p:ext uri="{BB962C8B-B14F-4D97-AF65-F5344CB8AC3E}">
+        <p14:creationId xmlns:p14="http://schemas.microsoft.com/office/powerpoint/2010/main" val="1471818370"/>
+      </p:ext>
+    </p:extLst>
+  </p:cSld>
+  <p:clrMapOvr>
+    <a:masterClrMapping/>
+  </p:clrMapOvr>
+</p:sld>
+</file>
+
+<file path=ppt/slides/slide2.xml><?xml version="1.0" encoding="utf-8"?>
+<p:sld xmlns:a="http://schemas.openxmlformats.org/drawingml/2006/main" xmlns:r="http://schemas.openxmlformats.org/officeDocument/2006/relationships" xmlns:p="http://schemas.openxmlformats.org/presentationml/2006/main">
+  <p:cSld>
+    <p:spTree>
+      <p:nvGrpSpPr>
+        <p:cNvPr id="1" name=""/>
+        <p:cNvGrpSpPr/>
+        <p:nvPr/>
+      </p:nvGrpSpPr>
+      <p:grpSpPr>
+        <a:xfrm>
+          <a:off x="0" y="0"/>
+          <a:ext cx="0" cy="0"/>
+          <a:chOff x="0" y="0"/>
+          <a:chExt cx="0" cy="0"/>
+        </a:xfrm>
+      </p:grpSpPr>
+      <p:sp>
+        <p:nvSpPr>
+          <p:cNvPr id="2" name="Title 1"/>
+          <p:cNvSpPr>
+            <a:spLocks noGrp="1"/>
+          </p:cNvSpPr>
+          <p:nvPr>
+            <p:ph type="title"/>
+          </p:nvPr>
+        </p:nvSpPr>
+        <p:spPr/>
+        <p:txBody>
+          <a:bodyPr/>
+          <a:lstStyle/>
+          <a:p>
+            <a:r>
+              <a:rPr lang="en-GB" dirty="0" smtClean="0"/>
+              <a:t>What it is</a:t>
+            </a:r>
+            <a:endParaRPr lang="en-US" dirty="0"/>
+          </a:p>
+        </p:txBody>
+      </p:sp>
+      <p:sp>
+        <p:nvSpPr>
+          <p:cNvPr id="3" name="Content Placeholder 2"/>
+          <p:cNvSpPr>
+            <a:spLocks noGrp="1"/>
+          </p:cNvSpPr>
+          <p:nvPr>
+            <p:ph idx="1"/>
+          </p:nvPr>
+        </p:nvSpPr>
+        <p:spPr/>
+        <p:txBody>
+          <a:bodyPr/>
+          <a:lstStyle/>
+          <a:p>
+            <a:r>
+              <a:rPr lang="en-GB" dirty="0" smtClean="0"/>
+              <a:t>Standard application framework developed in the scope of the course unit “</a:t>
+            </a:r>
+            <a:r>
+              <a:rPr lang="en-GB" dirty="0" err="1" smtClean="0"/>
+              <a:t>Engenharia</a:t>
+            </a:r>
+            <a:r>
+              <a:rPr lang="en-GB" dirty="0" smtClean="0"/>
+              <a:t> de </a:t>
+            </a:r>
+            <a:r>
+              <a:rPr lang="en-GB" dirty="0" err="1" smtClean="0"/>
+              <a:t>Aplicações</a:t>
+            </a:r>
+            <a:r>
+              <a:rPr lang="en-GB" dirty="0" smtClean="0"/>
+              <a:t>” at </a:t>
+            </a:r>
+            <a:r>
+              <a:rPr lang="en-GB" dirty="0" err="1" smtClean="0"/>
+              <a:t>Instituto</a:t>
+            </a:r>
+            <a:r>
+              <a:rPr lang="en-GB" dirty="0" smtClean="0"/>
+              <a:t> Superior de </a:t>
+            </a:r>
+            <a:r>
+              <a:rPr lang="en-GB" dirty="0" err="1" smtClean="0"/>
+              <a:t>Engenharia</a:t>
+            </a:r>
+            <a:r>
+              <a:rPr lang="en-GB" dirty="0" smtClean="0"/>
+              <a:t> do Porto </a:t>
+            </a:r>
+            <a:r>
+              <a:rPr lang="en-GB" dirty="0" smtClean="0">
+                <a:hlinkClick r:id="rId2"/>
+              </a:rPr>
+              <a:t>http://www.isep.ipp.pt</a:t>
+            </a:r>
+            <a:r>
+              <a:rPr lang="en-GB" dirty="0" smtClean="0"/>
+              <a:t> </a:t>
+            </a:r>
+            <a:endParaRPr lang="en-US" dirty="0"/>
+          </a:p>
+        </p:txBody>
+      </p:sp>
+      <p:sp>
+        <p:nvSpPr>
+          <p:cNvPr id="4" name="Slide Number Placeholder 3"/>
+          <p:cNvSpPr>
+            <a:spLocks noGrp="1"/>
+          </p:cNvSpPr>
+          <p:nvPr>
+            <p:ph type="sldNum" sz="quarter" idx="12"/>
+          </p:nvPr>
+        </p:nvSpPr>
+        <p:spPr/>
+        <p:txBody>
+          <a:bodyPr/>
+          <a:lstStyle/>
+          <a:p>
+            <a:fld id="{024A9932-4E76-455F-8E1A-2CC10C89B014}" type="slidenum">
+              <a:rPr lang="pt-PT" smtClean="0"/>
+              <a:pPr/>
+              <a:t>2</a:t>
+            </a:fld>
+            <a:endParaRPr lang="pt-PT"/>
+          </a:p>
+        </p:txBody>
+      </p:sp>
+    </p:spTree>
+    <p:extLst>
+      <p:ext uri="{BB962C8B-B14F-4D97-AF65-F5344CB8AC3E}">
+        <p14:creationId xmlns:p14="http://schemas.microsoft.com/office/powerpoint/2010/main" val="1881727189"/>
+      </p:ext>
+    </p:extLst>
+  </p:cSld>
+  <p:clrMapOvr>
+    <a:masterClrMapping/>
+  </p:clrMapOvr>
+</p:sld>
+</file>
+
+<file path=ppt/slides/slide20.xml><?xml version="1.0" encoding="utf-8"?>
+<p:sld xmlns:a="http://schemas.openxmlformats.org/drawingml/2006/main" xmlns:r="http://schemas.openxmlformats.org/officeDocument/2006/relationships" xmlns:p="http://schemas.openxmlformats.org/presentationml/2006/main">
+  <p:cSld>
+    <p:spTree>
+      <p:nvGrpSpPr>
+        <p:cNvPr id="1" name=""/>
+        <p:cNvGrpSpPr/>
+        <p:nvPr/>
+      </p:nvGrpSpPr>
+      <p:grpSpPr>
+        <a:xfrm>
+          <a:off x="0" y="0"/>
+          <a:ext cx="0" cy="0"/>
+          <a:chOff x="0" y="0"/>
+          <a:chExt cx="0" cy="0"/>
+        </a:xfrm>
+      </p:grpSpPr>
+      <p:sp>
+        <p:nvSpPr>
+          <p:cNvPr id="2" name="Title 1"/>
+          <p:cNvSpPr>
+            <a:spLocks noGrp="1"/>
+          </p:cNvSpPr>
+          <p:nvPr>
+            <p:ph type="title"/>
+          </p:nvPr>
+        </p:nvSpPr>
+        <p:spPr/>
+        <p:txBody>
+          <a:bodyPr/>
+          <a:lstStyle/>
+          <a:p>
+            <a:r>
+              <a:rPr lang="en-GB" dirty="0"/>
+              <a:t>In memory Repositories</a:t>
+            </a:r>
+            <a:endParaRPr lang="en-US" dirty="0"/>
+          </a:p>
+        </p:txBody>
+      </p:sp>
+      <p:sp>
+        <p:nvSpPr>
+          <p:cNvPr id="3" name="Content Placeholder 2"/>
+          <p:cNvSpPr>
+            <a:spLocks noGrp="1"/>
+          </p:cNvSpPr>
+          <p:nvPr>
+            <p:ph idx="1"/>
+          </p:nvPr>
+        </p:nvSpPr>
+        <p:spPr/>
+        <p:txBody>
+          <a:bodyPr/>
+          <a:lstStyle/>
+          <a:p>
+            <a:r>
+              <a:rPr lang="en-GB" dirty="0" err="1"/>
+              <a:t>InMemoryBaseRepository</a:t>
+            </a:r>
+            <a:endParaRPr lang="en-GB" dirty="0"/>
+          </a:p>
+          <a:p>
+            <a:r>
+              <a:rPr lang="en-GB" dirty="0" err="1"/>
+              <a:t>InMemoryBaseRepositorywithLongPK</a:t>
+            </a:r>
+            <a:endParaRPr lang="en-GB" dirty="0"/>
+          </a:p>
+          <a:p>
+            <a:endParaRPr lang="en-GB" dirty="0"/>
+          </a:p>
+          <a:p>
+            <a:r>
+              <a:rPr lang="en-GB" b="1" dirty="0"/>
+              <a:t>For pedagogical testing purposes only!</a:t>
+            </a:r>
+            <a:endParaRPr lang="en-US" b="1" dirty="0"/>
+          </a:p>
+        </p:txBody>
+      </p:sp>
+      <p:sp>
+        <p:nvSpPr>
+          <p:cNvPr id="5" name="Slide Number Placeholder 4"/>
+          <p:cNvSpPr>
+            <a:spLocks noGrp="1"/>
+          </p:cNvSpPr>
+          <p:nvPr>
+            <p:ph type="sldNum" sz="quarter" idx="12"/>
+          </p:nvPr>
+        </p:nvSpPr>
+        <p:spPr/>
+        <p:txBody>
+          <a:bodyPr/>
+          <a:lstStyle/>
+          <a:p>
+            <a:fld id="{024A9932-4E76-455F-8E1A-2CC10C89B014}" type="slidenum">
+              <a:rPr lang="pt-PT" smtClean="0"/>
+              <a:pPr/>
+              <a:t>20</a:t>
+            </a:fld>
+            <a:endParaRPr lang="pt-PT"/>
+          </a:p>
+        </p:txBody>
+      </p:sp>
+    </p:spTree>
+    <p:extLst>
+      <p:ext uri="{BB962C8B-B14F-4D97-AF65-F5344CB8AC3E}">
+        <p14:creationId xmlns:p14="http://schemas.microsoft.com/office/powerpoint/2010/main" val="1746043456"/>
+      </p:ext>
+    </p:extLst>
+  </p:cSld>
+  <p:clrMapOvr>
+    <a:masterClrMapping/>
+  </p:clrMapOvr>
+</p:sld>
+</file>
+
+<file path=ppt/slides/slide21.xml><?xml version="1.0" encoding="utf-8"?>
+<p:sld xmlns:a="http://schemas.openxmlformats.org/drawingml/2006/main" xmlns:r="http://schemas.openxmlformats.org/officeDocument/2006/relationships" xmlns:p="http://schemas.openxmlformats.org/presentationml/2006/main">
+  <p:cSld>
+    <p:spTree>
+      <p:nvGrpSpPr>
+        <p:cNvPr id="1" name=""/>
+        <p:cNvGrpSpPr/>
+        <p:nvPr/>
+      </p:nvGrpSpPr>
+      <p:grpSpPr>
+        <a:xfrm>
+          <a:off x="0" y="0"/>
+          <a:ext cx="0" cy="0"/>
+          <a:chOff x="0" y="0"/>
+          <a:chExt cx="0" cy="0"/>
+        </a:xfrm>
+      </p:grpSpPr>
+      <p:sp>
+        <p:nvSpPr>
+          <p:cNvPr id="2" name="Title 1"/>
+          <p:cNvSpPr>
+            <a:spLocks noGrp="1"/>
+          </p:cNvSpPr>
+          <p:nvPr>
+            <p:ph type="title"/>
+          </p:nvPr>
+        </p:nvSpPr>
+        <p:spPr/>
+        <p:txBody>
+          <a:bodyPr/>
+          <a:lstStyle/>
+          <a:p>
+            <a:r>
+              <a:rPr lang="en-GB" dirty="0"/>
+              <a:t>JPA Repositories</a:t>
+            </a:r>
+            <a:endParaRPr lang="en-US" dirty="0"/>
+          </a:p>
+        </p:txBody>
+      </p:sp>
+      <p:sp>
+        <p:nvSpPr>
+          <p:cNvPr id="3" name="Content Placeholder 2"/>
+          <p:cNvSpPr>
+            <a:spLocks noGrp="1"/>
+          </p:cNvSpPr>
+          <p:nvPr>
+            <p:ph idx="1"/>
+          </p:nvPr>
+        </p:nvSpPr>
+        <p:spPr/>
+        <p:txBody>
+          <a:bodyPr>
+            <a:normAutofit fontScale="77500" lnSpcReduction="20000"/>
+          </a:bodyPr>
+          <a:lstStyle/>
+          <a:p>
+            <a:r>
+              <a:rPr lang="en-GB" dirty="0" err="1"/>
+              <a:t>JpaBaseRepository</a:t>
+            </a:r>
+            <a:endParaRPr lang="en-GB" dirty="0"/>
+          </a:p>
+          <a:p>
+            <a:pPr lvl="1"/>
+            <a:r>
+              <a:rPr lang="en-GB" dirty="0"/>
+              <a:t>Generic repository implementation that expects the entity manager factory to be injected by a container, e.g., web server</a:t>
+            </a:r>
+          </a:p>
+          <a:p>
+            <a:r>
+              <a:rPr lang="en-GB" dirty="0" err="1"/>
+              <a:t>JpaNotRunningInContainerBaseRepository</a:t>
+            </a:r>
+            <a:endParaRPr lang="en-GB" dirty="0"/>
+          </a:p>
+          <a:p>
+            <a:pPr lvl="1"/>
+            <a:r>
+              <a:rPr lang="en-GB" dirty="0"/>
+              <a:t>For scenarios where the code is not running in a container but transaction is managed by the outside, e.g., controller</a:t>
+            </a:r>
+          </a:p>
+          <a:p>
+            <a:r>
+              <a:rPr lang="en-GB" dirty="0" err="1"/>
+              <a:t>JpaTransactionalBaseRepository</a:t>
+            </a:r>
+            <a:endParaRPr lang="en-GB" dirty="0"/>
+          </a:p>
+          <a:p>
+            <a:pPr lvl="1"/>
+            <a:r>
+              <a:rPr lang="en-GB" dirty="0"/>
+              <a:t>For scenarios not running in a container but transactions are created and committed by each repository method; the connection is also closed automatically in each method.</a:t>
+            </a:r>
+          </a:p>
+          <a:p>
+            <a:r>
+              <a:rPr lang="en-GB" dirty="0" err="1"/>
+              <a:t>JpaAutoTxRepository</a:t>
+            </a:r>
+            <a:endParaRPr lang="en-GB" dirty="0"/>
+          </a:p>
+          <a:p>
+            <a:pPr lvl="1"/>
+            <a:r>
+              <a:rPr lang="en-GB" dirty="0"/>
+              <a:t>Dual behaviour to either have outside transactional control or explicit transaction in each method</a:t>
+            </a:r>
+          </a:p>
+          <a:p>
+            <a:pPr lvl="1"/>
+            <a:endParaRPr lang="en-US" dirty="0"/>
+          </a:p>
+        </p:txBody>
+      </p:sp>
+      <p:sp>
+        <p:nvSpPr>
+          <p:cNvPr id="5" name="Slide Number Placeholder 4"/>
+          <p:cNvSpPr>
+            <a:spLocks noGrp="1"/>
+          </p:cNvSpPr>
+          <p:nvPr>
+            <p:ph type="sldNum" sz="quarter" idx="12"/>
+          </p:nvPr>
+        </p:nvSpPr>
+        <p:spPr/>
+        <p:txBody>
+          <a:bodyPr/>
+          <a:lstStyle/>
+          <a:p>
+            <a:fld id="{024A9932-4E76-455F-8E1A-2CC10C89B014}" type="slidenum">
+              <a:rPr lang="pt-PT" smtClean="0"/>
+              <a:pPr/>
+              <a:t>21</a:t>
+            </a:fld>
+            <a:endParaRPr lang="pt-PT"/>
+          </a:p>
+        </p:txBody>
+      </p:sp>
+    </p:spTree>
+    <p:extLst>
+      <p:ext uri="{BB962C8B-B14F-4D97-AF65-F5344CB8AC3E}">
+        <p14:creationId xmlns:p14="http://schemas.microsoft.com/office/powerpoint/2010/main" val="3449136498"/>
+      </p:ext>
+    </p:extLst>
+  </p:cSld>
+  <p:clrMapOvr>
+    <a:masterClrMapping/>
+  </p:clrMapOvr>
+</p:sld>
+</file>
+
+<file path=ppt/slides/slide22.xml><?xml version="1.0" encoding="utf-8"?>
+<p:sld xmlns:a="http://schemas.openxmlformats.org/drawingml/2006/main" xmlns:r="http://schemas.openxmlformats.org/officeDocument/2006/relationships" xmlns:p="http://schemas.openxmlformats.org/presentationml/2006/main">
+  <p:cSld>
+    <p:spTree>
+      <p:nvGrpSpPr>
+        <p:cNvPr id="1" name=""/>
+        <p:cNvGrpSpPr/>
+        <p:nvPr/>
+      </p:nvGrpSpPr>
+      <p:grpSpPr>
+        <a:xfrm>
+          <a:off x="0" y="0"/>
+          <a:ext cx="0" cy="0"/>
+          <a:chOff x="0" y="0"/>
+          <a:chExt cx="0" cy="0"/>
+        </a:xfrm>
+      </p:grpSpPr>
+      <p:sp>
+        <p:nvSpPr>
+          <p:cNvPr id="2" name="Title 1"/>
+          <p:cNvSpPr>
+            <a:spLocks noGrp="1"/>
+          </p:cNvSpPr>
+          <p:nvPr>
+            <p:ph type="title"/>
+          </p:nvPr>
+        </p:nvSpPr>
+        <p:spPr/>
+        <p:txBody>
+          <a:bodyPr/>
+          <a:lstStyle/>
+          <a:p>
+            <a:r>
+              <a:rPr lang="en-GB" dirty="0" smtClean="0"/>
+              <a:t>Spring Data JPA repositories</a:t>
+            </a:r>
+            <a:endParaRPr lang="en-US" dirty="0"/>
+          </a:p>
+        </p:txBody>
+      </p:sp>
+      <p:sp>
+        <p:nvSpPr>
+          <p:cNvPr id="3" name="Content Placeholder 2"/>
+          <p:cNvSpPr>
+            <a:spLocks noGrp="1"/>
+          </p:cNvSpPr>
+          <p:nvPr>
+            <p:ph idx="1"/>
+          </p:nvPr>
+        </p:nvSpPr>
+        <p:spPr/>
+        <p:txBody>
+          <a:bodyPr/>
+          <a:lstStyle/>
+          <a:p>
+            <a:endParaRPr lang="en-US"/>
+          </a:p>
+        </p:txBody>
+      </p:sp>
+      <p:sp>
+        <p:nvSpPr>
+          <p:cNvPr id="4" name="Slide Number Placeholder 3"/>
+          <p:cNvSpPr>
+            <a:spLocks noGrp="1"/>
+          </p:cNvSpPr>
+          <p:nvPr>
+            <p:ph type="sldNum" sz="quarter" idx="12"/>
+          </p:nvPr>
+        </p:nvSpPr>
+        <p:spPr/>
+        <p:txBody>
+          <a:bodyPr/>
+          <a:lstStyle/>
+          <a:p>
+            <a:fld id="{024A9932-4E76-455F-8E1A-2CC10C89B014}" type="slidenum">
+              <a:rPr lang="pt-PT" smtClean="0"/>
+              <a:pPr/>
+              <a:t>22</a:t>
+            </a:fld>
+            <a:endParaRPr lang="pt-PT"/>
+          </a:p>
+        </p:txBody>
+      </p:sp>
+    </p:spTree>
+    <p:extLst>
+      <p:ext uri="{BB962C8B-B14F-4D97-AF65-F5344CB8AC3E}">
+        <p14:creationId xmlns:p14="http://schemas.microsoft.com/office/powerpoint/2010/main" val="3679903379"/>
+      </p:ext>
+    </p:extLst>
+  </p:cSld>
+  <p:clrMapOvr>
+    <a:masterClrMapping/>
+  </p:clrMapOvr>
+</p:sld>
+</file>
+
+<file path=ppt/slides/slide23.xml><?xml version="1.0" encoding="utf-8"?>
+<p:sld xmlns:a="http://schemas.openxmlformats.org/drawingml/2006/main" xmlns:r="http://schemas.openxmlformats.org/officeDocument/2006/relationships" xmlns:p="http://schemas.openxmlformats.org/presentationml/2006/main">
+  <p:cSld>
+    <p:spTree>
+      <p:nvGrpSpPr>
+        <p:cNvPr id="1" name=""/>
+        <p:cNvGrpSpPr/>
+        <p:nvPr/>
+      </p:nvGrpSpPr>
+      <p:grpSpPr>
+        <a:xfrm>
+          <a:off x="0" y="0"/>
+          <a:ext cx="0" cy="0"/>
+          <a:chOff x="0" y="0"/>
+          <a:chExt cx="0" cy="0"/>
+        </a:xfrm>
+      </p:grpSpPr>
+      <p:sp>
+        <p:nvSpPr>
+          <p:cNvPr id="2" name="Title 1"/>
+          <p:cNvSpPr>
+            <a:spLocks noGrp="1"/>
+          </p:cNvSpPr>
+          <p:nvPr>
+            <p:ph type="title"/>
+          </p:nvPr>
+        </p:nvSpPr>
+        <p:spPr/>
+        <p:txBody>
+          <a:bodyPr/>
+          <a:lstStyle/>
+          <a:p>
+            <a:r>
+              <a:rPr lang="en-GB" dirty="0"/>
+              <a:t>Resources </a:t>
+            </a:r>
+          </a:p>
+        </p:txBody>
+      </p:sp>
+      <p:sp>
+        <p:nvSpPr>
+          <p:cNvPr id="5" name="Slide Number Placeholder 4"/>
+          <p:cNvSpPr>
+            <a:spLocks noGrp="1"/>
+          </p:cNvSpPr>
+          <p:nvPr>
+            <p:ph type="sldNum" sz="quarter" idx="12"/>
+          </p:nvPr>
+        </p:nvSpPr>
+        <p:spPr/>
+        <p:txBody>
+          <a:bodyPr/>
+          <a:lstStyle/>
+          <a:p>
+            <a:fld id="{024A9932-4E76-455F-8E1A-2CC10C89B014}" type="slidenum">
+              <a:rPr lang="pt-PT" smtClean="0"/>
+              <a:pPr/>
+              <a:t>23</a:t>
+            </a:fld>
+            <a:endParaRPr lang="pt-PT"/>
+          </a:p>
+        </p:txBody>
+      </p:sp>
+      <p:pic>
+        <p:nvPicPr>
+          <p:cNvPr id="6" name="Picture 5"/>
+          <p:cNvPicPr>
+            <a:picLocks noChangeAspect="1"/>
+          </p:cNvPicPr>
+          <p:nvPr/>
+        </p:nvPicPr>
+        <p:blipFill>
+          <a:blip r:embed="rId3"/>
+          <a:stretch>
+            <a:fillRect/>
+          </a:stretch>
+        </p:blipFill>
+        <p:spPr>
+          <a:xfrm>
+            <a:off x="5256077" y="0"/>
+            <a:ext cx="3887924" cy="7925001"/>
+          </a:xfrm>
+          <a:prstGeom prst="rect">
+            <a:avLst/>
+          </a:prstGeom>
+        </p:spPr>
+      </p:pic>
+      <p:sp>
+        <p:nvSpPr>
+          <p:cNvPr id="7" name="Rounded Rectangle 6"/>
+          <p:cNvSpPr/>
+          <p:nvPr/>
+        </p:nvSpPr>
+        <p:spPr>
+          <a:xfrm>
+            <a:off x="5479368" y="2312876"/>
+            <a:ext cx="3125080" cy="1476164"/>
+          </a:xfrm>
+          <a:prstGeom prst="roundRect">
+            <a:avLst/>
+          </a:prstGeom>
+          <a:solidFill>
+            <a:srgbClr val="CC9900">
+              <a:alpha val="20000"/>
+            </a:srgbClr>
+          </a:solidFill>
+        </p:spPr>
+        <p:style>
+          <a:lnRef idx="1">
+            <a:schemeClr val="accent6"/>
+          </a:lnRef>
+          <a:fillRef idx="2">
+            <a:schemeClr val="accent6"/>
+          </a:fillRef>
+          <a:effectRef idx="1">
+            <a:schemeClr val="accent6"/>
+          </a:effectRef>
+          <a:fontRef idx="minor">
+            <a:schemeClr val="dk1"/>
+          </a:fontRef>
+        </p:style>
+        <p:txBody>
+          <a:bodyPr rtlCol="0" anchor="ctr"/>
+          <a:lstStyle/>
+          <a:p>
+            <a:pPr algn="ctr"/>
+            <a:endParaRPr lang="en-GB"/>
+          </a:p>
+        </p:txBody>
+      </p:sp>
+      <p:sp>
+        <p:nvSpPr>
+          <p:cNvPr id="10" name="Rounded Rectangle 9"/>
+          <p:cNvSpPr/>
+          <p:nvPr/>
+        </p:nvSpPr>
+        <p:spPr>
+          <a:xfrm>
+            <a:off x="5446248" y="6013237"/>
+            <a:ext cx="3125080" cy="548111"/>
+          </a:xfrm>
+          <a:prstGeom prst="roundRect">
+            <a:avLst/>
+          </a:prstGeom>
+          <a:solidFill>
+            <a:srgbClr val="CC9900">
+              <a:alpha val="20000"/>
+            </a:srgbClr>
+          </a:solidFill>
+        </p:spPr>
+        <p:style>
+          <a:lnRef idx="1">
+            <a:schemeClr val="accent6"/>
+          </a:lnRef>
+          <a:fillRef idx="2">
+            <a:schemeClr val="accent6"/>
+          </a:fillRef>
+          <a:effectRef idx="1">
+            <a:schemeClr val="accent6"/>
+          </a:effectRef>
+          <a:fontRef idx="minor">
+            <a:schemeClr val="dk1"/>
+          </a:fontRef>
+        </p:style>
+        <p:txBody>
+          <a:bodyPr rtlCol="0" anchor="ctr"/>
+          <a:lstStyle/>
+          <a:p>
+            <a:pPr algn="ctr"/>
+            <a:endParaRPr lang="en-GB"/>
+          </a:p>
+        </p:txBody>
+      </p:sp>
+      <p:pic>
+        <p:nvPicPr>
+          <p:cNvPr id="4" name="Picture 3"/>
+          <p:cNvPicPr>
+            <a:picLocks noChangeAspect="1"/>
+          </p:cNvPicPr>
+          <p:nvPr/>
+        </p:nvPicPr>
+        <p:blipFill>
+          <a:blip r:embed="rId4"/>
+          <a:stretch>
+            <a:fillRect/>
+          </a:stretch>
+        </p:blipFill>
+        <p:spPr>
+          <a:xfrm>
+            <a:off x="128622" y="1863700"/>
+            <a:ext cx="4856579" cy="4085579"/>
+          </a:xfrm>
+          <a:prstGeom prst="rect">
+            <a:avLst/>
+          </a:prstGeom>
+          <a:ln>
+            <a:noFill/>
+          </a:ln>
+          <a:effectLst>
+            <a:outerShdw blurRad="292100" dist="139700" dir="2700000" algn="tl" rotWithShape="0">
+              <a:srgbClr val="333333">
+                <a:alpha val="65000"/>
+              </a:srgbClr>
+            </a:outerShdw>
+          </a:effectLst>
+        </p:spPr>
+      </p:pic>
+    </p:spTree>
+    <p:extLst>
+      <p:ext uri="{BB962C8B-B14F-4D97-AF65-F5344CB8AC3E}">
+        <p14:creationId xmlns:p14="http://schemas.microsoft.com/office/powerpoint/2010/main" val="4111144306"/>
+      </p:ext>
+    </p:extLst>
+  </p:cSld>
+  <p:clrMapOvr>
+    <a:masterClrMapping/>
+  </p:clrMapOvr>
+</p:sld>
+</file>
+
+<file path=ppt/slides/slide24.xml><?xml version="1.0" encoding="utf-8"?>
+<p:sld xmlns:a="http://schemas.openxmlformats.org/drawingml/2006/main" xmlns:r="http://schemas.openxmlformats.org/officeDocument/2006/relationships" xmlns:p="http://schemas.openxmlformats.org/presentationml/2006/main">
+  <p:cSld>
+    <p:spTree>
+      <p:nvGrpSpPr>
+        <p:cNvPr id="1" name=""/>
+        <p:cNvGrpSpPr/>
+        <p:nvPr/>
+      </p:nvGrpSpPr>
+      <p:grpSpPr>
+        <a:xfrm>
+          <a:off x="0" y="0"/>
+          <a:ext cx="0" cy="0"/>
+          <a:chOff x="0" y="0"/>
+          <a:chExt cx="0" cy="0"/>
+        </a:xfrm>
+      </p:grpSpPr>
+      <p:sp>
+        <p:nvSpPr>
+          <p:cNvPr id="6" name="Title 5"/>
+          <p:cNvSpPr>
+            <a:spLocks noGrp="1"/>
+          </p:cNvSpPr>
+          <p:nvPr>
+            <p:ph type="title"/>
+          </p:nvPr>
+        </p:nvSpPr>
+        <p:spPr/>
+        <p:txBody>
+          <a:bodyPr>
+            <a:normAutofit/>
+          </a:bodyPr>
+          <a:lstStyle/>
+          <a:p>
+            <a:r>
+              <a:rPr lang="en-GB" dirty="0" smtClean="0"/>
+              <a:t>applicationContext.xml</a:t>
+            </a:r>
+            <a:endParaRPr lang="en-US" dirty="0"/>
+          </a:p>
+        </p:txBody>
+      </p:sp>
+      <p:sp>
+        <p:nvSpPr>
+          <p:cNvPr id="7" name="Content Placeholder 6"/>
+          <p:cNvSpPr>
+            <a:spLocks noGrp="1"/>
+          </p:cNvSpPr>
+          <p:nvPr>
+            <p:ph idx="1"/>
+          </p:nvPr>
+        </p:nvSpPr>
+        <p:spPr/>
+        <p:txBody>
+          <a:bodyPr/>
+          <a:lstStyle/>
+          <a:p>
+            <a:endParaRPr lang="en-US"/>
+          </a:p>
+        </p:txBody>
+      </p:sp>
+      <p:sp>
+        <p:nvSpPr>
+          <p:cNvPr id="5" name="Slide Number Placeholder 4"/>
+          <p:cNvSpPr>
+            <a:spLocks noGrp="1"/>
+          </p:cNvSpPr>
+          <p:nvPr>
+            <p:ph type="sldNum" sz="quarter" idx="12"/>
+          </p:nvPr>
+        </p:nvSpPr>
+        <p:spPr/>
+        <p:txBody>
+          <a:bodyPr/>
+          <a:lstStyle/>
+          <a:p>
+            <a:fld id="{024A9932-4E76-455F-8E1A-2CC10C89B014}" type="slidenum">
+              <a:rPr lang="pt-PT" smtClean="0"/>
+              <a:pPr/>
+              <a:t>24</a:t>
+            </a:fld>
+            <a:endParaRPr lang="pt-PT"/>
+          </a:p>
+        </p:txBody>
+      </p:sp>
+    </p:spTree>
+    <p:extLst>
+      <p:ext uri="{BB962C8B-B14F-4D97-AF65-F5344CB8AC3E}">
+        <p14:creationId xmlns:p14="http://schemas.microsoft.com/office/powerpoint/2010/main" val="1017614504"/>
+      </p:ext>
+    </p:extLst>
+  </p:cSld>
+  <p:clrMapOvr>
+    <a:masterClrMapping/>
+  </p:clrMapOvr>
+</p:sld>
+</file>
+
+<file path=ppt/slides/slide25.xml><?xml version="1.0" encoding="utf-8"?>
+<p:sld xmlns:a="http://schemas.openxmlformats.org/drawingml/2006/main" xmlns:r="http://schemas.openxmlformats.org/officeDocument/2006/relationships" xmlns:p="http://schemas.openxmlformats.org/presentationml/2006/main">
+  <p:cSld>
+    <p:spTree>
+      <p:nvGrpSpPr>
+        <p:cNvPr id="1" name=""/>
+        <p:cNvGrpSpPr/>
+        <p:nvPr/>
+      </p:nvGrpSpPr>
+      <p:grpSpPr>
+        <a:xfrm>
+          <a:off x="0" y="0"/>
+          <a:ext cx="0" cy="0"/>
+          <a:chOff x="0" y="0"/>
+          <a:chExt cx="0" cy="0"/>
+        </a:xfrm>
+      </p:grpSpPr>
+      <p:sp>
+        <p:nvSpPr>
+          <p:cNvPr id="6" name="Title 5"/>
+          <p:cNvSpPr>
+            <a:spLocks noGrp="1"/>
+          </p:cNvSpPr>
+          <p:nvPr>
+            <p:ph type="title"/>
+          </p:nvPr>
+        </p:nvSpPr>
+        <p:spPr/>
+        <p:txBody>
+          <a:bodyPr>
+            <a:normAutofit fontScale="90000"/>
+          </a:bodyPr>
+          <a:lstStyle/>
+          <a:p>
+            <a:r>
+              <a:rPr lang="en-GB" dirty="0" smtClean="0"/>
+              <a:t>applicationContext-persistence.xml</a:t>
+            </a:r>
+            <a:endParaRPr lang="en-US" dirty="0"/>
+          </a:p>
+        </p:txBody>
+      </p:sp>
+      <p:sp>
+        <p:nvSpPr>
+          <p:cNvPr id="7" name="Content Placeholder 6"/>
+          <p:cNvSpPr>
+            <a:spLocks noGrp="1"/>
+          </p:cNvSpPr>
+          <p:nvPr>
+            <p:ph idx="1"/>
+          </p:nvPr>
+        </p:nvSpPr>
+        <p:spPr/>
+        <p:txBody>
+          <a:bodyPr/>
+          <a:lstStyle/>
+          <a:p>
+            <a:endParaRPr lang="en-US"/>
+          </a:p>
+        </p:txBody>
+      </p:sp>
+      <p:sp>
+        <p:nvSpPr>
+          <p:cNvPr id="5" name="Slide Number Placeholder 4"/>
+          <p:cNvSpPr>
+            <a:spLocks noGrp="1"/>
+          </p:cNvSpPr>
+          <p:nvPr>
+            <p:ph type="sldNum" sz="quarter" idx="12"/>
+          </p:nvPr>
+        </p:nvSpPr>
+        <p:spPr/>
+        <p:txBody>
+          <a:bodyPr/>
+          <a:lstStyle/>
+          <a:p>
+            <a:fld id="{024A9932-4E76-455F-8E1A-2CC10C89B014}" type="slidenum">
+              <a:rPr lang="pt-PT" smtClean="0"/>
+              <a:pPr/>
+              <a:t>25</a:t>
+            </a:fld>
+            <a:endParaRPr lang="pt-PT"/>
+          </a:p>
+        </p:txBody>
+      </p:sp>
+    </p:spTree>
+    <p:extLst>
+      <p:ext uri="{BB962C8B-B14F-4D97-AF65-F5344CB8AC3E}">
+        <p14:creationId xmlns:p14="http://schemas.microsoft.com/office/powerpoint/2010/main" val="1907279577"/>
+      </p:ext>
+    </p:extLst>
+  </p:cSld>
+  <p:clrMapOvr>
+    <a:masterClrMapping/>
+  </p:clrMapOvr>
+</p:sld>
+</file>
+
+<file path=ppt/slides/slide26.xml><?xml version="1.0" encoding="utf-8"?>
+<p:sld xmlns:a="http://schemas.openxmlformats.org/drawingml/2006/main" xmlns:r="http://schemas.openxmlformats.org/officeDocument/2006/relationships" xmlns:p="http://schemas.openxmlformats.org/presentationml/2006/main">
+  <p:cSld>
+    <p:spTree>
+      <p:nvGrpSpPr>
+        <p:cNvPr id="1" name=""/>
+        <p:cNvGrpSpPr/>
+        <p:nvPr/>
+      </p:nvGrpSpPr>
+      <p:grpSpPr>
+        <a:xfrm>
+          <a:off x="0" y="0"/>
+          <a:ext cx="0" cy="0"/>
+          <a:chOff x="0" y="0"/>
+          <a:chExt cx="0" cy="0"/>
+        </a:xfrm>
+      </p:grpSpPr>
+      <p:sp>
+        <p:nvSpPr>
+          <p:cNvPr id="2" name="Title 1"/>
+          <p:cNvSpPr>
+            <a:spLocks noGrp="1"/>
+          </p:cNvSpPr>
+          <p:nvPr>
+            <p:ph type="title"/>
+          </p:nvPr>
+        </p:nvSpPr>
+        <p:spPr/>
+        <p:txBody>
+          <a:bodyPr/>
+          <a:lstStyle/>
+          <a:p>
+            <a:r>
+              <a:rPr lang="en-GB" dirty="0" smtClean="0"/>
+              <a:t>Transaction control</a:t>
+            </a:r>
+            <a:endParaRPr lang="en-US" dirty="0"/>
+          </a:p>
+        </p:txBody>
+      </p:sp>
+      <p:sp>
+        <p:nvSpPr>
+          <p:cNvPr id="3" name="Content Placeholder 2"/>
+          <p:cNvSpPr>
+            <a:spLocks noGrp="1"/>
+          </p:cNvSpPr>
+          <p:nvPr>
+            <p:ph idx="1"/>
+          </p:nvPr>
+        </p:nvSpPr>
+        <p:spPr/>
+        <p:txBody>
+          <a:bodyPr/>
+          <a:lstStyle/>
+          <a:p>
+            <a:r>
+              <a:rPr lang="en-GB" dirty="0" smtClean="0"/>
+              <a:t>Preferably use a container and managed transaction context, e.g., spring</a:t>
+            </a:r>
+          </a:p>
+          <a:p>
+            <a:endParaRPr lang="en-GB" dirty="0"/>
+          </a:p>
+          <a:p>
+            <a:r>
+              <a:rPr lang="en-GB" dirty="0" smtClean="0"/>
+              <a:t>Optionally control the transaction yourself</a:t>
+            </a:r>
+            <a:endParaRPr lang="en-US" dirty="0"/>
+          </a:p>
+        </p:txBody>
+      </p:sp>
+      <p:sp>
+        <p:nvSpPr>
+          <p:cNvPr id="4" name="Slide Number Placeholder 3"/>
+          <p:cNvSpPr>
+            <a:spLocks noGrp="1"/>
+          </p:cNvSpPr>
+          <p:nvPr>
+            <p:ph type="sldNum" sz="quarter" idx="12"/>
+          </p:nvPr>
+        </p:nvSpPr>
+        <p:spPr/>
+        <p:txBody>
+          <a:bodyPr/>
+          <a:lstStyle/>
+          <a:p>
+            <a:fld id="{024A9932-4E76-455F-8E1A-2CC10C89B014}" type="slidenum">
+              <a:rPr lang="pt-PT" smtClean="0"/>
+              <a:pPr/>
+              <a:t>26</a:t>
+            </a:fld>
+            <a:endParaRPr lang="pt-PT"/>
+          </a:p>
+        </p:txBody>
+      </p:sp>
+    </p:spTree>
+    <p:extLst>
+      <p:ext uri="{BB962C8B-B14F-4D97-AF65-F5344CB8AC3E}">
+        <p14:creationId xmlns:p14="http://schemas.microsoft.com/office/powerpoint/2010/main" val="3792329237"/>
+      </p:ext>
+    </p:extLst>
+  </p:cSld>
+  <p:clrMapOvr>
+    <a:masterClrMapping/>
+  </p:clrMapOvr>
+</p:sld>
+</file>
+
+<file path=ppt/slides/slide27.xml><?xml version="1.0" encoding="utf-8"?>
+<p:sld xmlns:a="http://schemas.openxmlformats.org/drawingml/2006/main" xmlns:r="http://schemas.openxmlformats.org/officeDocument/2006/relationships" xmlns:p="http://schemas.openxmlformats.org/presentationml/2006/main">
+  <p:cSld>
+    <p:spTree>
+      <p:nvGrpSpPr>
+        <p:cNvPr id="1" name=""/>
+        <p:cNvGrpSpPr/>
+        <p:nvPr/>
+      </p:nvGrpSpPr>
+      <p:grpSpPr>
+        <a:xfrm>
+          <a:off x="0" y="0"/>
+          <a:ext cx="0" cy="0"/>
+          <a:chOff x="0" y="0"/>
+          <a:chExt cx="0" cy="0"/>
+        </a:xfrm>
+      </p:grpSpPr>
+      <p:sp>
+        <p:nvSpPr>
+          <p:cNvPr id="2" name="Title 1"/>
+          <p:cNvSpPr>
+            <a:spLocks noGrp="1"/>
+          </p:cNvSpPr>
+          <p:nvPr>
+            <p:ph type="title"/>
+          </p:nvPr>
+        </p:nvSpPr>
+        <p:spPr/>
+        <p:txBody>
+          <a:bodyPr/>
+          <a:lstStyle/>
+          <a:p>
+            <a:r>
+              <a:rPr lang="en-GB" dirty="0" smtClean="0"/>
+              <a:t>Transaction control #1</a:t>
+            </a:r>
+            <a:endParaRPr lang="pt-PT" dirty="0"/>
+          </a:p>
+        </p:txBody>
+      </p:sp>
+      <p:sp>
+        <p:nvSpPr>
+          <p:cNvPr id="3" name="Content Placeholder 2"/>
+          <p:cNvSpPr>
+            <a:spLocks noGrp="1"/>
+          </p:cNvSpPr>
+          <p:nvPr>
+            <p:ph idx="1"/>
+          </p:nvPr>
+        </p:nvSpPr>
+        <p:spPr/>
+        <p:txBody>
+          <a:bodyPr/>
+          <a:lstStyle/>
+          <a:p>
+            <a:r>
+              <a:rPr lang="pt-PT" b="1" dirty="0" smtClean="0"/>
+              <a:t>Managed repositories</a:t>
+            </a:r>
+            <a:r>
+              <a:rPr lang="pt-PT" dirty="0" smtClean="0"/>
+              <a:t>, e.g., Spring </a:t>
+            </a:r>
+            <a:r>
+              <a:rPr lang="pt-PT" dirty="0"/>
+              <a:t>Framework</a:t>
+            </a:r>
+          </a:p>
+          <a:p>
+            <a:pPr lvl="1"/>
+            <a:r>
+              <a:rPr lang="pt-PT" dirty="0"/>
+              <a:t>Spring will load the repositories</a:t>
+            </a:r>
+          </a:p>
+          <a:p>
+            <a:pPr lvl="1"/>
+            <a:r>
+              <a:rPr lang="pt-PT" dirty="0"/>
+              <a:t>Spring will control the transactional context</a:t>
+            </a:r>
+          </a:p>
+          <a:p>
+            <a:pPr lvl="1"/>
+            <a:endParaRPr lang="pt-PT" dirty="0"/>
+          </a:p>
+        </p:txBody>
+      </p:sp>
+      <p:sp>
+        <p:nvSpPr>
+          <p:cNvPr id="4" name="Slide Number Placeholder 3"/>
+          <p:cNvSpPr>
+            <a:spLocks noGrp="1"/>
+          </p:cNvSpPr>
+          <p:nvPr>
+            <p:ph type="sldNum" sz="quarter" idx="12"/>
+          </p:nvPr>
+        </p:nvSpPr>
+        <p:spPr/>
+        <p:txBody>
+          <a:bodyPr/>
+          <a:lstStyle/>
+          <a:p>
+            <a:fld id="{024A9932-4E76-455F-8E1A-2CC10C89B014}" type="slidenum">
+              <a:rPr lang="pt-PT" smtClean="0"/>
+              <a:pPr/>
+              <a:t>27</a:t>
+            </a:fld>
+            <a:endParaRPr lang="pt-PT"/>
+          </a:p>
+        </p:txBody>
+      </p:sp>
+    </p:spTree>
+    <p:extLst>
+      <p:ext uri="{BB962C8B-B14F-4D97-AF65-F5344CB8AC3E}">
+        <p14:creationId xmlns:p14="http://schemas.microsoft.com/office/powerpoint/2010/main" val="2754409186"/>
+      </p:ext>
+    </p:extLst>
+  </p:cSld>
+  <p:clrMapOvr>
+    <a:masterClrMapping/>
+  </p:clrMapOvr>
+  <p:transition spd="med">
+    <p:fade/>
+  </p:transition>
+</p:sld>
+</file>
+
+<file path=ppt/slides/slide28.xml><?xml version="1.0" encoding="utf-8"?>
+<p:sld xmlns:a="http://schemas.openxmlformats.org/drawingml/2006/main" xmlns:r="http://schemas.openxmlformats.org/officeDocument/2006/relationships" xmlns:p="http://schemas.openxmlformats.org/presentationml/2006/main">
+  <p:cSld>
+    <p:spTree>
+      <p:nvGrpSpPr>
+        <p:cNvPr id="1" name=""/>
+        <p:cNvGrpSpPr/>
+        <p:nvPr/>
+      </p:nvGrpSpPr>
+      <p:grpSpPr>
+        <a:xfrm>
+          <a:off x="0" y="0"/>
+          <a:ext cx="0" cy="0"/>
+          <a:chOff x="0" y="0"/>
+          <a:chExt cx="0" cy="0"/>
+        </a:xfrm>
+      </p:grpSpPr>
+      <p:sp>
+        <p:nvSpPr>
+          <p:cNvPr id="2" name="Title 1"/>
+          <p:cNvSpPr>
+            <a:spLocks noGrp="1"/>
+          </p:cNvSpPr>
+          <p:nvPr>
+            <p:ph type="title"/>
+          </p:nvPr>
+        </p:nvSpPr>
+        <p:spPr/>
+        <p:txBody>
+          <a:bodyPr>
+            <a:noAutofit/>
+          </a:bodyPr>
+          <a:lstStyle/>
+          <a:p>
+            <a:r>
+              <a:rPr lang="pt-PT" sz="2800" dirty="0"/>
+              <a:t>All JPA repositories extend JpaBaseRepository to use spring transactional control</a:t>
+            </a:r>
+          </a:p>
+        </p:txBody>
+      </p:sp>
+      <p:sp>
+        <p:nvSpPr>
+          <p:cNvPr id="4" name="Slide Number Placeholder 3"/>
+          <p:cNvSpPr>
+            <a:spLocks noGrp="1"/>
+          </p:cNvSpPr>
+          <p:nvPr>
+            <p:ph type="sldNum" sz="quarter" idx="12"/>
+          </p:nvPr>
+        </p:nvSpPr>
+        <p:spPr/>
+        <p:txBody>
+          <a:bodyPr/>
+          <a:lstStyle/>
+          <a:p>
+            <a:fld id="{024A9932-4E76-455F-8E1A-2CC10C89B014}" type="slidenum">
+              <a:rPr lang="pt-PT" smtClean="0"/>
+              <a:pPr/>
+              <a:t>28</a:t>
+            </a:fld>
+            <a:endParaRPr lang="pt-PT"/>
+          </a:p>
+        </p:txBody>
+      </p:sp>
+      <p:pic>
+        <p:nvPicPr>
+          <p:cNvPr id="6" name="Picture 5"/>
+          <p:cNvPicPr>
+            <a:picLocks noChangeAspect="1"/>
+          </p:cNvPicPr>
+          <p:nvPr/>
+        </p:nvPicPr>
+        <p:blipFill>
+          <a:blip r:embed="rId2"/>
+          <a:stretch>
+            <a:fillRect/>
+          </a:stretch>
+        </p:blipFill>
+        <p:spPr>
+          <a:xfrm>
+            <a:off x="287524" y="1808820"/>
+            <a:ext cx="7019925" cy="1981200"/>
+          </a:xfrm>
+          <a:prstGeom prst="rect">
+            <a:avLst/>
+          </a:prstGeom>
+          <a:ln>
+            <a:noFill/>
+          </a:ln>
+          <a:effectLst>
+            <a:outerShdw blurRad="292100" dist="139700" dir="2700000" algn="tl" rotWithShape="0">
+              <a:srgbClr val="333333">
+                <a:alpha val="65000"/>
+              </a:srgbClr>
+            </a:outerShdw>
+          </a:effectLst>
+        </p:spPr>
+      </p:pic>
+      <p:pic>
+        <p:nvPicPr>
+          <p:cNvPr id="7" name="Picture 6"/>
+          <p:cNvPicPr>
+            <a:picLocks noChangeAspect="1"/>
+          </p:cNvPicPr>
+          <p:nvPr/>
+        </p:nvPicPr>
+        <p:blipFill>
+          <a:blip r:embed="rId3"/>
+          <a:stretch>
+            <a:fillRect/>
+          </a:stretch>
+        </p:blipFill>
+        <p:spPr>
+          <a:xfrm>
+            <a:off x="2473103" y="4293096"/>
+            <a:ext cx="6105525" cy="1943100"/>
+          </a:xfrm>
+          <a:prstGeom prst="rect">
+            <a:avLst/>
+          </a:prstGeom>
+          <a:ln>
+            <a:noFill/>
+          </a:ln>
+          <a:effectLst>
+            <a:outerShdw blurRad="292100" dist="139700" dir="2700000" algn="tl" rotWithShape="0">
+              <a:srgbClr val="333333">
+                <a:alpha val="65000"/>
+              </a:srgbClr>
+            </a:outerShdw>
+          </a:effectLst>
+        </p:spPr>
+      </p:pic>
+      <p:sp>
+        <p:nvSpPr>
+          <p:cNvPr id="8" name="Right Arrow 7"/>
+          <p:cNvSpPr/>
+          <p:nvPr/>
+        </p:nvSpPr>
+        <p:spPr>
+          <a:xfrm rot="11334279">
+            <a:off x="4229963" y="3264185"/>
+            <a:ext cx="684076" cy="288032"/>
+          </a:xfrm>
+          <a:prstGeom prst="rightArrow">
+            <a:avLst/>
+          </a:prstGeom>
+        </p:spPr>
+        <p:style>
+          <a:lnRef idx="2">
+            <a:schemeClr val="accent1">
+              <a:shade val="50000"/>
+            </a:schemeClr>
+          </a:lnRef>
+          <a:fillRef idx="1">
+            <a:schemeClr val="accent1"/>
+          </a:fillRef>
+          <a:effectRef idx="0">
+            <a:schemeClr val="accent1"/>
+          </a:effectRef>
+          <a:fontRef idx="minor">
+            <a:schemeClr val="lt1"/>
+          </a:fontRef>
+        </p:style>
+        <p:txBody>
+          <a:bodyPr rtlCol="0" anchor="ctr"/>
+          <a:lstStyle/>
+          <a:p>
+            <a:pPr algn="ctr"/>
+            <a:endParaRPr lang="en-US"/>
+          </a:p>
+        </p:txBody>
+      </p:sp>
+      <p:sp>
+        <p:nvSpPr>
+          <p:cNvPr id="9" name="Right Arrow 8"/>
+          <p:cNvSpPr/>
+          <p:nvPr/>
+        </p:nvSpPr>
+        <p:spPr>
+          <a:xfrm rot="21438638">
+            <a:off x="2480537" y="4561015"/>
+            <a:ext cx="684076" cy="288032"/>
+          </a:xfrm>
+          <a:prstGeom prst="rightArrow">
+            <a:avLst/>
+          </a:prstGeom>
+        </p:spPr>
+        <p:style>
+          <a:lnRef idx="2">
+            <a:schemeClr val="accent1">
+              <a:shade val="50000"/>
+            </a:schemeClr>
+          </a:lnRef>
+          <a:fillRef idx="1">
+            <a:schemeClr val="accent1"/>
+          </a:fillRef>
+          <a:effectRef idx="0">
+            <a:schemeClr val="accent1"/>
+          </a:effectRef>
+          <a:fontRef idx="minor">
+            <a:schemeClr val="lt1"/>
+          </a:fontRef>
+        </p:style>
+        <p:txBody>
+          <a:bodyPr rtlCol="0" anchor="ctr"/>
+          <a:lstStyle/>
+          <a:p>
+            <a:pPr algn="ctr"/>
+            <a:endParaRPr lang="en-US"/>
+          </a:p>
+        </p:txBody>
+      </p:sp>
+    </p:spTree>
+    <p:extLst>
+      <p:ext uri="{BB962C8B-B14F-4D97-AF65-F5344CB8AC3E}">
+        <p14:creationId xmlns:p14="http://schemas.microsoft.com/office/powerpoint/2010/main" val="1143776668"/>
+      </p:ext>
+    </p:extLst>
+  </p:cSld>
+  <p:clrMapOvr>
+    <a:masterClrMapping/>
+  </p:clrMapOvr>
+  <p:transition spd="med">
+    <p:fade/>
+  </p:transition>
+</p:sld>
+</file>
+
+<file path=ppt/slides/slide29.xml><?xml version="1.0" encoding="utf-8"?>
+<p:sld xmlns:a="http://schemas.openxmlformats.org/drawingml/2006/main" xmlns:r="http://schemas.openxmlformats.org/officeDocument/2006/relationships" xmlns:p="http://schemas.openxmlformats.org/presentationml/2006/main">
+  <p:cSld>
+    <p:spTree>
+      <p:nvGrpSpPr>
+        <p:cNvPr id="1" name=""/>
+        <p:cNvGrpSpPr/>
+        <p:nvPr/>
+      </p:nvGrpSpPr>
+      <p:grpSpPr>
+        <a:xfrm>
+          <a:off x="0" y="0"/>
+          <a:ext cx="0" cy="0"/>
+          <a:chOff x="0" y="0"/>
+          <a:chExt cx="0" cy="0"/>
+        </a:xfrm>
+      </p:grpSpPr>
+      <p:sp>
+        <p:nvSpPr>
+          <p:cNvPr id="2" name="Title 1"/>
+          <p:cNvSpPr>
+            <a:spLocks noGrp="1"/>
+          </p:cNvSpPr>
+          <p:nvPr>
+            <p:ph type="title"/>
+          </p:nvPr>
+        </p:nvSpPr>
+        <p:spPr/>
+        <p:txBody>
+          <a:bodyPr/>
+          <a:lstStyle/>
+          <a:p>
+            <a:r>
+              <a:rPr lang="en-GB" dirty="0"/>
+              <a:t>Spring Transactional control</a:t>
+            </a:r>
+            <a:endParaRPr lang="en-US" dirty="0"/>
+          </a:p>
+        </p:txBody>
+      </p:sp>
+      <p:sp>
+        <p:nvSpPr>
+          <p:cNvPr id="4" name="Slide Number Placeholder 3"/>
+          <p:cNvSpPr>
+            <a:spLocks noGrp="1"/>
+          </p:cNvSpPr>
+          <p:nvPr>
+            <p:ph type="sldNum" sz="quarter" idx="12"/>
+          </p:nvPr>
+        </p:nvSpPr>
+        <p:spPr/>
+        <p:txBody>
+          <a:bodyPr/>
+          <a:lstStyle/>
+          <a:p>
+            <a:fld id="{024A9932-4E76-455F-8E1A-2CC10C89B014}" type="slidenum">
+              <a:rPr lang="pt-PT" smtClean="0"/>
+              <a:pPr/>
+              <a:t>29</a:t>
+            </a:fld>
+            <a:endParaRPr lang="pt-PT"/>
+          </a:p>
+        </p:txBody>
+      </p:sp>
+      <p:pic>
+        <p:nvPicPr>
+          <p:cNvPr id="5" name="Picture 4"/>
+          <p:cNvPicPr>
+            <a:picLocks noChangeAspect="1"/>
+          </p:cNvPicPr>
+          <p:nvPr/>
+        </p:nvPicPr>
+        <p:blipFill>
+          <a:blip r:embed="rId2"/>
+          <a:stretch>
+            <a:fillRect/>
+          </a:stretch>
+        </p:blipFill>
+        <p:spPr>
+          <a:xfrm>
+            <a:off x="59055" y="1529122"/>
+            <a:ext cx="8753475" cy="1914525"/>
+          </a:xfrm>
+          <a:prstGeom prst="rect">
+            <a:avLst/>
+          </a:prstGeom>
+          <a:ln>
+            <a:noFill/>
+          </a:ln>
+          <a:effectLst>
+            <a:outerShdw blurRad="292100" dist="139700" dir="2700000" algn="tl" rotWithShape="0">
+              <a:srgbClr val="333333">
+                <a:alpha val="65000"/>
+              </a:srgbClr>
+            </a:outerShdw>
+          </a:effectLst>
+        </p:spPr>
+      </p:pic>
+      <p:pic>
+        <p:nvPicPr>
+          <p:cNvPr id="6" name="Picture 5"/>
+          <p:cNvPicPr>
+            <a:picLocks noChangeAspect="1"/>
+          </p:cNvPicPr>
+          <p:nvPr/>
+        </p:nvPicPr>
+        <p:blipFill>
+          <a:blip r:embed="rId3"/>
+          <a:stretch>
+            <a:fillRect/>
+          </a:stretch>
+        </p:blipFill>
+        <p:spPr>
+          <a:xfrm>
+            <a:off x="1612143" y="3633345"/>
+            <a:ext cx="7172325" cy="3009900"/>
+          </a:xfrm>
+          <a:prstGeom prst="rect">
+            <a:avLst/>
+          </a:prstGeom>
+          <a:ln>
+            <a:noFill/>
+          </a:ln>
+          <a:effectLst>
+            <a:outerShdw blurRad="292100" dist="139700" dir="2700000" algn="tl" rotWithShape="0">
+              <a:srgbClr val="333333">
+                <a:alpha val="65000"/>
+              </a:srgbClr>
+            </a:outerShdw>
+          </a:effectLst>
+        </p:spPr>
+      </p:pic>
+      <p:sp>
+        <p:nvSpPr>
+          <p:cNvPr id="7" name="Right Arrow 6"/>
+          <p:cNvSpPr/>
+          <p:nvPr/>
+        </p:nvSpPr>
+        <p:spPr>
+          <a:xfrm rot="20879346">
+            <a:off x="1390125" y="4816307"/>
+            <a:ext cx="684076" cy="288032"/>
+          </a:xfrm>
+          <a:prstGeom prst="rightArrow">
+            <a:avLst/>
+          </a:prstGeom>
+        </p:spPr>
+        <p:style>
+          <a:lnRef idx="2">
+            <a:schemeClr val="accent1">
+              <a:shade val="50000"/>
+            </a:schemeClr>
+          </a:lnRef>
+          <a:fillRef idx="1">
+            <a:schemeClr val="accent1"/>
+          </a:fillRef>
+          <a:effectRef idx="0">
+            <a:schemeClr val="accent1"/>
+          </a:effectRef>
+          <a:fontRef idx="minor">
+            <a:schemeClr val="lt1"/>
+          </a:fontRef>
+        </p:style>
+        <p:txBody>
+          <a:bodyPr rtlCol="0" anchor="ctr"/>
+          <a:lstStyle/>
+          <a:p>
+            <a:pPr algn="ctr"/>
+            <a:endParaRPr lang="en-US"/>
+          </a:p>
+        </p:txBody>
+      </p:sp>
+    </p:spTree>
+    <p:extLst>
+      <p:ext uri="{BB962C8B-B14F-4D97-AF65-F5344CB8AC3E}">
+        <p14:creationId xmlns:p14="http://schemas.microsoft.com/office/powerpoint/2010/main" val="2654608186"/>
+      </p:ext>
+    </p:extLst>
+  </p:cSld>
+  <p:clrMapOvr>
+    <a:masterClrMapping/>
+  </p:clrMapOvr>
+</p:sld>
+</file>
+
+<file path=ppt/slides/slide3.xml><?xml version="1.0" encoding="utf-8"?>
+<p:sld xmlns:a="http://schemas.openxmlformats.org/drawingml/2006/main" xmlns:r="http://schemas.openxmlformats.org/officeDocument/2006/relationships" xmlns:p="http://schemas.openxmlformats.org/presentationml/2006/main">
+  <p:cSld>
+    <p:spTree>
+      <p:nvGrpSpPr>
+        <p:cNvPr id="1" name=""/>
+        <p:cNvGrpSpPr/>
+        <p:nvPr/>
+      </p:nvGrpSpPr>
+      <p:grpSpPr>
+        <a:xfrm>
+          <a:off x="0" y="0"/>
+          <a:ext cx="0" cy="0"/>
+          <a:chOff x="0" y="0"/>
+          <a:chExt cx="0" cy="0"/>
+        </a:xfrm>
+      </p:grpSpPr>
+      <p:sp>
+        <p:nvSpPr>
+          <p:cNvPr id="2" name="Title 1"/>
+          <p:cNvSpPr>
+            <a:spLocks noGrp="1"/>
+          </p:cNvSpPr>
+          <p:nvPr>
+            <p:ph type="title"/>
+          </p:nvPr>
+        </p:nvSpPr>
+        <p:spPr/>
+        <p:txBody>
+          <a:bodyPr/>
+          <a:lstStyle/>
+          <a:p>
+            <a:r>
+              <a:rPr lang="en-GB" dirty="0" smtClean="0"/>
+              <a:t>Components </a:t>
+            </a:r>
+            <a:endParaRPr lang="en-US" dirty="0"/>
+          </a:p>
+        </p:txBody>
+      </p:sp>
+      <p:sp>
+        <p:nvSpPr>
+          <p:cNvPr id="3" name="Content Placeholder 2"/>
+          <p:cNvSpPr>
+            <a:spLocks noGrp="1"/>
+          </p:cNvSpPr>
+          <p:nvPr>
+            <p:ph idx="1"/>
+          </p:nvPr>
+        </p:nvSpPr>
+        <p:spPr/>
+        <p:txBody>
+          <a:bodyPr/>
+          <a:lstStyle/>
+          <a:p>
+            <a:r>
+              <a:rPr lang="en-GB" dirty="0" smtClean="0"/>
+              <a:t>Core</a:t>
+            </a:r>
+          </a:p>
+          <a:p>
+            <a:pPr lvl="1"/>
+            <a:r>
+              <a:rPr lang="en-GB" dirty="0"/>
+              <a:t>Domain driven design</a:t>
+            </a:r>
+          </a:p>
+          <a:p>
+            <a:pPr lvl="1"/>
+            <a:r>
+              <a:rPr lang="en-GB" dirty="0" smtClean="0"/>
+              <a:t>Persistence</a:t>
+            </a:r>
+          </a:p>
+          <a:p>
+            <a:pPr lvl="1"/>
+            <a:r>
+              <a:rPr lang="en-GB" dirty="0" smtClean="0"/>
+              <a:t>Utilities</a:t>
+            </a:r>
+            <a:endParaRPr lang="en-GB" dirty="0"/>
+          </a:p>
+          <a:p>
+            <a:pPr lvl="1"/>
+            <a:r>
+              <a:rPr lang="en-GB" dirty="0" smtClean="0"/>
+              <a:t>Simple Console Presentation framework</a:t>
+            </a:r>
+          </a:p>
+          <a:p>
+            <a:r>
+              <a:rPr lang="en-GB" dirty="0" smtClean="0"/>
+              <a:t>Infrastructure </a:t>
+            </a:r>
+            <a:r>
+              <a:rPr lang="en-GB" dirty="0" err="1" smtClean="0"/>
+              <a:t>Authz</a:t>
+            </a:r>
+            <a:endParaRPr lang="en-GB" dirty="0" smtClean="0"/>
+          </a:p>
+          <a:p>
+            <a:r>
+              <a:rPr lang="en-GB" dirty="0"/>
+              <a:t>Infrastructure </a:t>
+            </a:r>
+            <a:r>
+              <a:rPr lang="en-GB" dirty="0" smtClean="0"/>
+              <a:t>Pub/Sub</a:t>
+            </a:r>
+          </a:p>
+          <a:p>
+            <a:pPr lvl="1"/>
+            <a:r>
+              <a:rPr lang="en-GB" dirty="0" smtClean="0"/>
+              <a:t>Event publishing and dispatching</a:t>
+            </a:r>
+            <a:endParaRPr lang="en-US" dirty="0"/>
+          </a:p>
+        </p:txBody>
+      </p:sp>
+      <p:sp>
+        <p:nvSpPr>
+          <p:cNvPr id="4" name="Slide Number Placeholder 3"/>
+          <p:cNvSpPr>
+            <a:spLocks noGrp="1"/>
+          </p:cNvSpPr>
+          <p:nvPr>
+            <p:ph type="sldNum" sz="quarter" idx="12"/>
+          </p:nvPr>
+        </p:nvSpPr>
+        <p:spPr/>
+        <p:txBody>
+          <a:bodyPr/>
+          <a:lstStyle/>
+          <a:p>
+            <a:fld id="{024A9932-4E76-455F-8E1A-2CC10C89B014}" type="slidenum">
+              <a:rPr lang="pt-PT" smtClean="0"/>
+              <a:pPr/>
+              <a:t>3</a:t>
+            </a:fld>
+            <a:endParaRPr lang="pt-PT"/>
+          </a:p>
+        </p:txBody>
+      </p:sp>
+    </p:spTree>
+    <p:extLst>
+      <p:ext uri="{BB962C8B-B14F-4D97-AF65-F5344CB8AC3E}">
+        <p14:creationId xmlns:p14="http://schemas.microsoft.com/office/powerpoint/2010/main" val="3205579399"/>
+      </p:ext>
+    </p:extLst>
+  </p:cSld>
+  <p:clrMapOvr>
+    <a:masterClrMapping/>
+  </p:clrMapOvr>
+</p:sld>
+</file>
+
+<file path=ppt/slides/slide30.xml><?xml version="1.0" encoding="utf-8"?>
+<p:sld xmlns:a="http://schemas.openxmlformats.org/drawingml/2006/main" xmlns:r="http://schemas.openxmlformats.org/officeDocument/2006/relationships" xmlns:p="http://schemas.openxmlformats.org/presentationml/2006/main">
+  <p:cSld>
+    <p:spTree>
+      <p:nvGrpSpPr>
+        <p:cNvPr id="1" name=""/>
+        <p:cNvGrpSpPr/>
+        <p:nvPr/>
+      </p:nvGrpSpPr>
+      <p:grpSpPr>
+        <a:xfrm>
+          <a:off x="0" y="0"/>
+          <a:ext cx="0" cy="0"/>
+          <a:chOff x="0" y="0"/>
+          <a:chExt cx="0" cy="0"/>
+        </a:xfrm>
+      </p:grpSpPr>
+      <p:sp>
+        <p:nvSpPr>
+          <p:cNvPr id="2" name="Title 1"/>
+          <p:cNvSpPr>
+            <a:spLocks noGrp="1"/>
+          </p:cNvSpPr>
+          <p:nvPr>
+            <p:ph type="title"/>
+          </p:nvPr>
+        </p:nvSpPr>
+        <p:spPr/>
+        <p:txBody>
+          <a:bodyPr/>
+          <a:lstStyle/>
+          <a:p>
+            <a:r>
+              <a:rPr lang="en-GB" dirty="0" err="1"/>
+              <a:t>SpringData</a:t>
+            </a:r>
+            <a:r>
+              <a:rPr lang="en-GB" dirty="0"/>
+              <a:t> repositories (1)</a:t>
+            </a:r>
+            <a:endParaRPr lang="en-US" dirty="0"/>
+          </a:p>
+        </p:txBody>
+      </p:sp>
+      <p:sp>
+        <p:nvSpPr>
+          <p:cNvPr id="4" name="Slide Number Placeholder 3"/>
+          <p:cNvSpPr>
+            <a:spLocks noGrp="1"/>
+          </p:cNvSpPr>
+          <p:nvPr>
+            <p:ph type="sldNum" sz="quarter" idx="12"/>
+          </p:nvPr>
+        </p:nvSpPr>
+        <p:spPr/>
+        <p:txBody>
+          <a:bodyPr/>
+          <a:lstStyle/>
+          <a:p>
+            <a:fld id="{024A9932-4E76-455F-8E1A-2CC10C89B014}" type="slidenum">
+              <a:rPr lang="pt-PT" smtClean="0"/>
+              <a:pPr/>
+              <a:t>30</a:t>
+            </a:fld>
+            <a:endParaRPr lang="pt-PT"/>
+          </a:p>
+        </p:txBody>
+      </p:sp>
+      <p:pic>
+        <p:nvPicPr>
+          <p:cNvPr id="5" name="Picture 4"/>
+          <p:cNvPicPr>
+            <a:picLocks noChangeAspect="1"/>
+          </p:cNvPicPr>
+          <p:nvPr/>
+        </p:nvPicPr>
+        <p:blipFill>
+          <a:blip r:embed="rId2"/>
+          <a:stretch>
+            <a:fillRect/>
+          </a:stretch>
+        </p:blipFill>
+        <p:spPr>
+          <a:xfrm>
+            <a:off x="287524" y="1670875"/>
+            <a:ext cx="7677150" cy="1514475"/>
+          </a:xfrm>
+          <a:prstGeom prst="rect">
+            <a:avLst/>
+          </a:prstGeom>
+          <a:ln>
+            <a:noFill/>
+          </a:ln>
+          <a:effectLst>
+            <a:outerShdw blurRad="292100" dist="139700" dir="2700000" algn="tl" rotWithShape="0">
+              <a:srgbClr val="333333">
+                <a:alpha val="65000"/>
+              </a:srgbClr>
+            </a:outerShdw>
+          </a:effectLst>
+        </p:spPr>
+      </p:pic>
+      <p:pic>
+        <p:nvPicPr>
+          <p:cNvPr id="6" name="Picture 5"/>
+          <p:cNvPicPr>
+            <a:picLocks noChangeAspect="1"/>
+          </p:cNvPicPr>
+          <p:nvPr/>
+        </p:nvPicPr>
+        <p:blipFill>
+          <a:blip r:embed="rId3"/>
+          <a:stretch>
+            <a:fillRect/>
+          </a:stretch>
+        </p:blipFill>
+        <p:spPr>
+          <a:xfrm>
+            <a:off x="1514475" y="3861048"/>
+            <a:ext cx="7172325" cy="2324100"/>
+          </a:xfrm>
+          <a:prstGeom prst="rect">
+            <a:avLst/>
+          </a:prstGeom>
+          <a:ln>
+            <a:noFill/>
+          </a:ln>
+          <a:effectLst>
+            <a:outerShdw blurRad="292100" dist="139700" dir="2700000" algn="tl" rotWithShape="0">
+              <a:srgbClr val="333333">
+                <a:alpha val="65000"/>
+              </a:srgbClr>
+            </a:outerShdw>
+          </a:effectLst>
+        </p:spPr>
+      </p:pic>
+      <p:sp>
+        <p:nvSpPr>
+          <p:cNvPr id="7" name="Right Arrow 6"/>
+          <p:cNvSpPr/>
+          <p:nvPr/>
+        </p:nvSpPr>
+        <p:spPr>
+          <a:xfrm rot="20879346">
+            <a:off x="1547353" y="4289113"/>
+            <a:ext cx="684076" cy="288032"/>
+          </a:xfrm>
+          <a:prstGeom prst="rightArrow">
+            <a:avLst/>
+          </a:prstGeom>
+        </p:spPr>
+        <p:style>
+          <a:lnRef idx="2">
+            <a:schemeClr val="accent1">
+              <a:shade val="50000"/>
+            </a:schemeClr>
+          </a:lnRef>
+          <a:fillRef idx="1">
+            <a:schemeClr val="accent1"/>
+          </a:fillRef>
+          <a:effectRef idx="0">
+            <a:schemeClr val="accent1"/>
+          </a:effectRef>
+          <a:fontRef idx="minor">
+            <a:schemeClr val="lt1"/>
+          </a:fontRef>
+        </p:style>
+        <p:txBody>
+          <a:bodyPr rtlCol="0" anchor="ctr"/>
+          <a:lstStyle/>
+          <a:p>
+            <a:pPr algn="ctr"/>
+            <a:endParaRPr lang="en-US"/>
+          </a:p>
+        </p:txBody>
+      </p:sp>
+    </p:spTree>
+    <p:extLst>
+      <p:ext uri="{BB962C8B-B14F-4D97-AF65-F5344CB8AC3E}">
+        <p14:creationId xmlns:p14="http://schemas.microsoft.com/office/powerpoint/2010/main" val="3411906299"/>
+      </p:ext>
+    </p:extLst>
+  </p:cSld>
+  <p:clrMapOvr>
+    <a:masterClrMapping/>
+  </p:clrMapOvr>
+</p:sld>
+</file>
+
+<file path=ppt/slides/slide31.xml><?xml version="1.0" encoding="utf-8"?>
+<p:sld xmlns:a="http://schemas.openxmlformats.org/drawingml/2006/main" xmlns:r="http://schemas.openxmlformats.org/officeDocument/2006/relationships" xmlns:p="http://schemas.openxmlformats.org/presentationml/2006/main">
+  <p:cSld>
+    <p:spTree>
+      <p:nvGrpSpPr>
+        <p:cNvPr id="1" name=""/>
+        <p:cNvGrpSpPr/>
+        <p:nvPr/>
+      </p:nvGrpSpPr>
+      <p:grpSpPr>
+        <a:xfrm>
+          <a:off x="0" y="0"/>
+          <a:ext cx="0" cy="0"/>
+          <a:chOff x="0" y="0"/>
+          <a:chExt cx="0" cy="0"/>
+        </a:xfrm>
+      </p:grpSpPr>
+      <p:sp>
+        <p:nvSpPr>
+          <p:cNvPr id="2" name="Title 1"/>
+          <p:cNvSpPr>
+            <a:spLocks noGrp="1"/>
+          </p:cNvSpPr>
+          <p:nvPr>
+            <p:ph type="title"/>
+          </p:nvPr>
+        </p:nvSpPr>
+        <p:spPr/>
+        <p:txBody>
+          <a:bodyPr/>
+          <a:lstStyle/>
+          <a:p>
+            <a:r>
+              <a:rPr lang="en-GB" dirty="0" err="1"/>
+              <a:t>SpringData</a:t>
+            </a:r>
+            <a:r>
+              <a:rPr lang="en-GB" dirty="0"/>
+              <a:t> repositories (2)</a:t>
+            </a:r>
+            <a:endParaRPr lang="en-US" dirty="0"/>
+          </a:p>
+        </p:txBody>
+      </p:sp>
+      <p:sp>
+        <p:nvSpPr>
+          <p:cNvPr id="4" name="Slide Number Placeholder 3"/>
+          <p:cNvSpPr>
+            <a:spLocks noGrp="1"/>
+          </p:cNvSpPr>
+          <p:nvPr>
+            <p:ph type="sldNum" sz="quarter" idx="12"/>
+          </p:nvPr>
+        </p:nvSpPr>
+        <p:spPr/>
+        <p:txBody>
+          <a:bodyPr/>
+          <a:lstStyle/>
+          <a:p>
+            <a:fld id="{024A9932-4E76-455F-8E1A-2CC10C89B014}" type="slidenum">
+              <a:rPr lang="pt-PT" smtClean="0"/>
+              <a:pPr/>
+              <a:t>31</a:t>
+            </a:fld>
+            <a:endParaRPr lang="pt-PT"/>
+          </a:p>
+        </p:txBody>
+      </p:sp>
+      <p:pic>
+        <p:nvPicPr>
+          <p:cNvPr id="8" name="Picture 7"/>
+          <p:cNvPicPr>
+            <a:picLocks noChangeAspect="1"/>
+          </p:cNvPicPr>
+          <p:nvPr/>
+        </p:nvPicPr>
+        <p:blipFill>
+          <a:blip r:embed="rId2"/>
+          <a:stretch>
+            <a:fillRect/>
+          </a:stretch>
+        </p:blipFill>
+        <p:spPr>
+          <a:xfrm>
+            <a:off x="995362" y="1458072"/>
+            <a:ext cx="7153275" cy="5010150"/>
+          </a:xfrm>
+          <a:prstGeom prst="rect">
+            <a:avLst/>
+          </a:prstGeom>
+          <a:ln>
+            <a:noFill/>
+          </a:ln>
+          <a:effectLst>
+            <a:outerShdw blurRad="292100" dist="139700" dir="2700000" algn="tl" rotWithShape="0">
+              <a:srgbClr val="333333">
+                <a:alpha val="65000"/>
+              </a:srgbClr>
+            </a:outerShdw>
+          </a:effectLst>
+        </p:spPr>
+      </p:pic>
+      <p:sp>
+        <p:nvSpPr>
+          <p:cNvPr id="7" name="Right Arrow 6"/>
+          <p:cNvSpPr/>
+          <p:nvPr/>
+        </p:nvSpPr>
+        <p:spPr>
+          <a:xfrm rot="11911389">
+            <a:off x="4589232" y="5222389"/>
+            <a:ext cx="684076" cy="288032"/>
+          </a:xfrm>
+          <a:prstGeom prst="rightArrow">
+            <a:avLst/>
+          </a:prstGeom>
+        </p:spPr>
+        <p:style>
+          <a:lnRef idx="2">
+            <a:schemeClr val="accent1">
+              <a:shade val="50000"/>
+            </a:schemeClr>
+          </a:lnRef>
+          <a:fillRef idx="1">
+            <a:schemeClr val="accent1"/>
+          </a:fillRef>
+          <a:effectRef idx="0">
+            <a:schemeClr val="accent1"/>
+          </a:effectRef>
+          <a:fontRef idx="minor">
+            <a:schemeClr val="lt1"/>
+          </a:fontRef>
+        </p:style>
+        <p:txBody>
+          <a:bodyPr rtlCol="0" anchor="ctr"/>
+          <a:lstStyle/>
+          <a:p>
+            <a:pPr algn="ctr"/>
+            <a:endParaRPr lang="en-US"/>
+          </a:p>
+        </p:txBody>
+      </p:sp>
+    </p:spTree>
+    <p:extLst>
+      <p:ext uri="{BB962C8B-B14F-4D97-AF65-F5344CB8AC3E}">
+        <p14:creationId xmlns:p14="http://schemas.microsoft.com/office/powerpoint/2010/main" val="559085085"/>
+      </p:ext>
+    </p:extLst>
+  </p:cSld>
+  <p:clrMapOvr>
+    <a:masterClrMapping/>
+  </p:clrMapOvr>
+</p:sld>
+</file>
+
+<file path=ppt/slides/slide32.xml><?xml version="1.0" encoding="utf-8"?>
+<p:sld xmlns:a="http://schemas.openxmlformats.org/drawingml/2006/main" xmlns:r="http://schemas.openxmlformats.org/officeDocument/2006/relationships" xmlns:p="http://schemas.openxmlformats.org/presentationml/2006/main">
+  <p:cSld>
+    <p:spTree>
+      <p:nvGrpSpPr>
+        <p:cNvPr id="1" name=""/>
+        <p:cNvGrpSpPr/>
+        <p:nvPr/>
+      </p:nvGrpSpPr>
+      <p:grpSpPr>
+        <a:xfrm>
+          <a:off x="0" y="0"/>
+          <a:ext cx="0" cy="0"/>
+          <a:chOff x="0" y="0"/>
+          <a:chExt cx="0" cy="0"/>
+        </a:xfrm>
+      </p:grpSpPr>
+      <p:sp>
+        <p:nvSpPr>
+          <p:cNvPr id="2" name="Title 1"/>
+          <p:cNvSpPr>
+            <a:spLocks noGrp="1"/>
+          </p:cNvSpPr>
+          <p:nvPr>
+            <p:ph type="title"/>
+          </p:nvPr>
+        </p:nvSpPr>
+        <p:spPr/>
+        <p:txBody>
+          <a:bodyPr/>
+          <a:lstStyle/>
+          <a:p>
+            <a:r>
+              <a:rPr lang="en-GB" dirty="0" smtClean="0"/>
+              <a:t>Transaction control #2</a:t>
+            </a:r>
+            <a:endParaRPr lang="en-US" dirty="0"/>
+          </a:p>
+        </p:txBody>
+      </p:sp>
+      <p:sp>
+        <p:nvSpPr>
+          <p:cNvPr id="3" name="Content Placeholder 2"/>
+          <p:cNvSpPr>
+            <a:spLocks noGrp="1"/>
+          </p:cNvSpPr>
+          <p:nvPr>
+            <p:ph idx="1"/>
+          </p:nvPr>
+        </p:nvSpPr>
+        <p:spPr/>
+        <p:txBody>
+          <a:bodyPr/>
+          <a:lstStyle/>
+          <a:p>
+            <a:r>
+              <a:rPr lang="en-GB" b="1" dirty="0" smtClean="0"/>
+              <a:t>Control the transaction yourself </a:t>
+            </a:r>
+            <a:r>
+              <a:rPr lang="en-GB" dirty="0" smtClean="0"/>
+              <a:t> using helper classes in the persistence package</a:t>
+            </a:r>
+            <a:endParaRPr lang="en-US" b="1" dirty="0"/>
+          </a:p>
+        </p:txBody>
+      </p:sp>
+      <p:sp>
+        <p:nvSpPr>
+          <p:cNvPr id="4" name="Slide Number Placeholder 3"/>
+          <p:cNvSpPr>
+            <a:spLocks noGrp="1"/>
+          </p:cNvSpPr>
+          <p:nvPr>
+            <p:ph type="sldNum" sz="quarter" idx="12"/>
+          </p:nvPr>
+        </p:nvSpPr>
+        <p:spPr/>
+        <p:txBody>
+          <a:bodyPr/>
+          <a:lstStyle/>
+          <a:p>
+            <a:fld id="{024A9932-4E76-455F-8E1A-2CC10C89B014}" type="slidenum">
+              <a:rPr lang="pt-PT" smtClean="0"/>
+              <a:pPr/>
+              <a:t>32</a:t>
+            </a:fld>
+            <a:endParaRPr lang="pt-PT"/>
+          </a:p>
+        </p:txBody>
+      </p:sp>
+    </p:spTree>
+    <p:extLst>
+      <p:ext uri="{BB962C8B-B14F-4D97-AF65-F5344CB8AC3E}">
+        <p14:creationId xmlns:p14="http://schemas.microsoft.com/office/powerpoint/2010/main" val="3563145965"/>
+      </p:ext>
+    </p:extLst>
+  </p:cSld>
+  <p:clrMapOvr>
+    <a:masterClrMapping/>
+  </p:clrMapOvr>
+</p:sld>
+</file>
+
+<file path=ppt/slides/slide33.xml><?xml version="1.0" encoding="utf-8"?>
+<p:sld xmlns:a="http://schemas.openxmlformats.org/drawingml/2006/main" xmlns:r="http://schemas.openxmlformats.org/officeDocument/2006/relationships" xmlns:p="http://schemas.openxmlformats.org/presentationml/2006/main">
+  <p:cSld>
+    <p:spTree>
+      <p:nvGrpSpPr>
+        <p:cNvPr id="1" name=""/>
+        <p:cNvGrpSpPr/>
+        <p:nvPr/>
+      </p:nvGrpSpPr>
+      <p:grpSpPr>
+        <a:xfrm>
+          <a:off x="0" y="0"/>
+          <a:ext cx="0" cy="0"/>
+          <a:chOff x="0" y="0"/>
+          <a:chExt cx="0" cy="0"/>
+        </a:xfrm>
+      </p:grpSpPr>
+      <p:sp>
+        <p:nvSpPr>
+          <p:cNvPr id="2" name="Title 1"/>
+          <p:cNvSpPr>
+            <a:spLocks noGrp="1"/>
+          </p:cNvSpPr>
+          <p:nvPr>
+            <p:ph type="title"/>
+          </p:nvPr>
+        </p:nvSpPr>
+        <p:spPr/>
+        <p:txBody>
+          <a:bodyPr>
+            <a:normAutofit fontScale="90000"/>
+          </a:bodyPr>
+          <a:lstStyle/>
+          <a:p>
+            <a:r>
+              <a:rPr lang="en-GB" dirty="0"/>
+              <a:t>Full transaction control by the repository</a:t>
+            </a:r>
+            <a:endParaRPr lang="pt-PT" dirty="0"/>
+          </a:p>
+        </p:txBody>
+      </p:sp>
+      <p:sp>
+        <p:nvSpPr>
+          <p:cNvPr id="4" name="Slide Number Placeholder 3"/>
+          <p:cNvSpPr>
+            <a:spLocks noGrp="1"/>
+          </p:cNvSpPr>
+          <p:nvPr>
+            <p:ph type="sldNum" sz="quarter" idx="12"/>
+          </p:nvPr>
+        </p:nvSpPr>
+        <p:spPr/>
+        <p:txBody>
+          <a:bodyPr/>
+          <a:lstStyle/>
+          <a:p>
+            <a:fld id="{024A9932-4E76-455F-8E1A-2CC10C89B014}" type="slidenum">
+              <a:rPr lang="pt-PT" smtClean="0"/>
+              <a:pPr/>
+              <a:t>33</a:t>
             </a:fld>
             <a:endParaRPr lang="pt-PT"/>
           </a:p>
@@ -6593,7 +9353,7 @@
 </p:sld>
 </file>
 
-<file path=ppt/slides/slide16.xml><?xml version="1.0" encoding="utf-8"?>
+<file path=ppt/slides/slide34.xml><?xml version="1.0" encoding="utf-8"?>
 <p:sld xmlns:a="http://schemas.openxmlformats.org/drawingml/2006/main" xmlns:r="http://schemas.openxmlformats.org/officeDocument/2006/relationships" xmlns:p="http://schemas.openxmlformats.org/presentationml/2006/main">
   <p:cSld>
     <p:spTree>
@@ -6702,7 +9462,7 @@
             <a:fld id="{024A9932-4E76-455F-8E1A-2CC10C89B014}" type="slidenum">
               <a:rPr lang="pt-PT" smtClean="0"/>
               <a:pPr/>
-              <a:t>16</a:t>
+              <a:t>34</a:t>
             </a:fld>
             <a:endParaRPr lang="pt-PT"/>
           </a:p>
@@ -6721,7 +9481,7 @@
 </p:sld>
 </file>
 
-<file path=ppt/slides/slide17.xml><?xml version="1.0" encoding="utf-8"?>
+<file path=ppt/slides/slide35.xml><?xml version="1.0" encoding="utf-8"?>
 <p:sld xmlns:a="http://schemas.openxmlformats.org/drawingml/2006/main" xmlns:r="http://schemas.openxmlformats.org/officeDocument/2006/relationships" xmlns:p="http://schemas.openxmlformats.org/presentationml/2006/main">
   <p:cSld>
     <p:spTree>
@@ -6785,7 +9545,7 @@
             <a:fld id="{024A9932-4E76-455F-8E1A-2CC10C89B014}" type="slidenum">
               <a:rPr lang="pt-PT" smtClean="0"/>
               <a:pPr/>
-              <a:t>17</a:t>
+              <a:t>35</a:t>
             </a:fld>
             <a:endParaRPr lang="pt-PT"/>
           </a:p>
@@ -6906,7 +9666,7 @@
 </p:sld>
 </file>
 
-<file path=ppt/slides/slide18.xml><?xml version="1.0" encoding="utf-8"?>
+<file path=ppt/slides/slide36.xml><?xml version="1.0" encoding="utf-8"?>
 <p:sld xmlns:a="http://schemas.openxmlformats.org/drawingml/2006/main" xmlns:r="http://schemas.openxmlformats.org/officeDocument/2006/relationships" xmlns:p="http://schemas.openxmlformats.org/presentationml/2006/main">
   <p:cSld>
     <p:spTree>
@@ -6966,7 +9726,7 @@
             <a:fld id="{024A9932-4E76-455F-8E1A-2CC10C89B014}" type="slidenum">
               <a:rPr lang="pt-PT" smtClean="0"/>
               <a:pPr/>
-              <a:t>18</a:t>
+              <a:t>36</a:t>
             </a:fld>
             <a:endParaRPr lang="pt-PT"/>
           </a:p>
@@ -7019,7 +9779,7 @@
 </p:sld>
 </file>
 
-<file path=ppt/slides/slide19.xml><?xml version="1.0" encoding="utf-8"?>
+<file path=ppt/slides/slide37.xml><?xml version="1.0" encoding="utf-8"?>
 <p:sld xmlns:a="http://schemas.openxmlformats.org/drawingml/2006/main" xmlns:r="http://schemas.openxmlformats.org/officeDocument/2006/relationships" xmlns:p="http://schemas.openxmlformats.org/presentationml/2006/main">
   <p:cSld>
     <p:spTree>
@@ -7079,7 +9839,7 @@
             <a:fld id="{024A9932-4E76-455F-8E1A-2CC10C89B014}" type="slidenum">
               <a:rPr lang="pt-PT" smtClean="0"/>
               <a:pPr/>
-              <a:t>19</a:t>
+              <a:t>37</a:t>
             </a:fld>
             <a:endParaRPr lang="pt-PT"/>
           </a:p>
@@ -7132,7 +9892,7 @@
 </p:sld>
 </file>
 
-<file path=ppt/slides/slide2.xml><?xml version="1.0" encoding="utf-8"?>
+<file path=ppt/slides/slide38.xml><?xml version="1.0" encoding="utf-8"?>
 <p:sld xmlns:a="http://schemas.openxmlformats.org/drawingml/2006/main" xmlns:r="http://schemas.openxmlformats.org/officeDocument/2006/relationships" xmlns:p="http://schemas.openxmlformats.org/presentationml/2006/main">
   <p:cSld>
     <p:spTree>
@@ -7151,7 +9911,7 @@
       </p:grpSpPr>
       <p:sp>
         <p:nvSpPr>
-          <p:cNvPr id="5" name="Title 4"/>
+          <p:cNvPr id="3" name="Title 2"/>
           <p:cNvSpPr>
             <a:spLocks noGrp="1"/>
           </p:cNvSpPr>
@@ -7166,7 +9926,11 @@
           <a:p>
             <a:r>
               <a:rPr lang="en-GB" dirty="0" smtClean="0"/>
-              <a:t>core</a:t>
+              <a:t>Infrastructure </a:t>
+            </a:r>
+            <a:r>
+              <a:rPr lang="en-GB" dirty="0" err="1" smtClean="0"/>
+              <a:t>Authz</a:t>
             </a:r>
             <a:endParaRPr lang="en-US" dirty="0"/>
           </a:p>
@@ -7174,7 +9938,7 @@
       </p:sp>
       <p:sp>
         <p:nvSpPr>
-          <p:cNvPr id="6" name="Text Placeholder 5"/>
+          <p:cNvPr id="4" name="Text Placeholder 3"/>
           <p:cNvSpPr>
             <a:spLocks noGrp="1"/>
           </p:cNvSpPr>
@@ -7193,7 +9957,7 @@
       </p:sp>
       <p:sp>
         <p:nvSpPr>
-          <p:cNvPr id="4" name="Slide Number Placeholder 3"/>
+          <p:cNvPr id="2" name="Slide Number Placeholder 1"/>
           <p:cNvSpPr>
             <a:spLocks noGrp="1"/>
           </p:cNvSpPr>
@@ -7209,7 +9973,7 @@
             <a:fld id="{024A9932-4E76-455F-8E1A-2CC10C89B014}" type="slidenum">
               <a:rPr lang="pt-PT" smtClean="0"/>
               <a:pPr/>
-              <a:t>2</a:t>
+              <a:t>38</a:t>
             </a:fld>
             <a:endParaRPr lang="pt-PT"/>
           </a:p>
@@ -7218,7 +9982,7 @@
     </p:spTree>
     <p:extLst>
       <p:ext uri="{BB962C8B-B14F-4D97-AF65-F5344CB8AC3E}">
-        <p14:creationId xmlns:p14="http://schemas.microsoft.com/office/powerpoint/2010/main" val="3579007156"/>
+        <p14:creationId xmlns:p14="http://schemas.microsoft.com/office/powerpoint/2010/main" val="4178914156"/>
       </p:ext>
     </p:extLst>
   </p:cSld>
@@ -7228,7 +9992,7 @@
 </p:sld>
 </file>
 
-<file path=ppt/slides/slide20.xml><?xml version="1.0" encoding="utf-8"?>
+<file path=ppt/slides/slide39.xml><?xml version="1.0" encoding="utf-8"?>
 <p:sld xmlns:a="http://schemas.openxmlformats.org/drawingml/2006/main" xmlns:r="http://schemas.openxmlformats.org/officeDocument/2006/relationships" xmlns:p="http://schemas.openxmlformats.org/presentationml/2006/main">
   <p:cSld>
     <p:spTree>
@@ -7247,7 +10011,7 @@
       </p:grpSpPr>
       <p:sp>
         <p:nvSpPr>
-          <p:cNvPr id="3" name="Title 2"/>
+          <p:cNvPr id="2" name="Title 1"/>
           <p:cNvSpPr>
             <a:spLocks noGrp="1"/>
           </p:cNvSpPr>
@@ -7261,8 +10025,8 @@
           <a:lstStyle/>
           <a:p>
             <a:r>
-              <a:rPr lang="en-GB" dirty="0" err="1" smtClean="0"/>
-              <a:t>authz</a:t>
+              <a:rPr lang="en-GB" dirty="0"/>
+              <a:t>User model</a:t>
             </a:r>
             <a:endParaRPr lang="en-US" dirty="0"/>
           </a:p>
@@ -7270,26 +10034,7 @@
       </p:sp>
       <p:sp>
         <p:nvSpPr>
-          <p:cNvPr id="4" name="Text Placeholder 3"/>
-          <p:cNvSpPr>
-            <a:spLocks noGrp="1"/>
-          </p:cNvSpPr>
-          <p:nvPr>
-            <p:ph type="body" idx="1"/>
-          </p:nvPr>
-        </p:nvSpPr>
-        <p:spPr/>
-        <p:txBody>
-          <a:bodyPr/>
-          <a:lstStyle/>
-          <a:p>
-            <a:endParaRPr lang="en-US"/>
-          </a:p>
-        </p:txBody>
-      </p:sp>
-      <p:sp>
-        <p:nvSpPr>
-          <p:cNvPr id="2" name="Slide Number Placeholder 1"/>
+          <p:cNvPr id="4" name="Slide Number Placeholder 3"/>
           <p:cNvSpPr>
             <a:spLocks noGrp="1"/>
           </p:cNvSpPr>
@@ -7305,84 +10050,7 @@
             <a:fld id="{024A9932-4E76-455F-8E1A-2CC10C89B014}" type="slidenum">
               <a:rPr lang="pt-PT" smtClean="0"/>
               <a:pPr/>
-              <a:t>20</a:t>
-            </a:fld>
-            <a:endParaRPr lang="pt-PT"/>
-          </a:p>
-        </p:txBody>
-      </p:sp>
-    </p:spTree>
-    <p:extLst>
-      <p:ext uri="{BB962C8B-B14F-4D97-AF65-F5344CB8AC3E}">
-        <p14:creationId xmlns:p14="http://schemas.microsoft.com/office/powerpoint/2010/main" val="4178914156"/>
-      </p:ext>
-    </p:extLst>
-  </p:cSld>
-  <p:clrMapOvr>
-    <a:masterClrMapping/>
-  </p:clrMapOvr>
-</p:sld>
-</file>
-
-<file path=ppt/slides/slide21.xml><?xml version="1.0" encoding="utf-8"?>
-<p:sld xmlns:a="http://schemas.openxmlformats.org/drawingml/2006/main" xmlns:r="http://schemas.openxmlformats.org/officeDocument/2006/relationships" xmlns:p="http://schemas.openxmlformats.org/presentationml/2006/main">
-  <p:cSld>
-    <p:spTree>
-      <p:nvGrpSpPr>
-        <p:cNvPr id="1" name=""/>
-        <p:cNvGrpSpPr/>
-        <p:nvPr/>
-      </p:nvGrpSpPr>
-      <p:grpSpPr>
-        <a:xfrm>
-          <a:off x="0" y="0"/>
-          <a:ext cx="0" cy="0"/>
-          <a:chOff x="0" y="0"/>
-          <a:chExt cx="0" cy="0"/>
-        </a:xfrm>
-      </p:grpSpPr>
-      <p:sp>
-        <p:nvSpPr>
-          <p:cNvPr id="2" name="Title 1"/>
-          <p:cNvSpPr>
-            <a:spLocks noGrp="1"/>
-          </p:cNvSpPr>
-          <p:nvPr>
-            <p:ph type="title"/>
-          </p:nvPr>
-        </p:nvSpPr>
-        <p:spPr/>
-        <p:txBody>
-          <a:bodyPr/>
-          <a:lstStyle/>
-          <a:p>
-            <a:r>
-              <a:rPr lang="en-GB" dirty="0"/>
-              <a:t>User model</a:t>
-            </a:r>
-            <a:endParaRPr lang="en-US" dirty="0"/>
-          </a:p>
-        </p:txBody>
-      </p:sp>
-      <p:sp>
-        <p:nvSpPr>
-          <p:cNvPr id="4" name="Slide Number Placeholder 3"/>
-          <p:cNvSpPr>
-            <a:spLocks noGrp="1"/>
-          </p:cNvSpPr>
-          <p:nvPr>
-            <p:ph type="sldNum" sz="quarter" idx="12"/>
-          </p:nvPr>
-        </p:nvSpPr>
-        <p:spPr/>
-        <p:txBody>
-          <a:bodyPr/>
-          <a:lstStyle/>
-          <a:p>
-            <a:fld id="{024A9932-4E76-455F-8E1A-2CC10C89B014}" type="slidenum">
-              <a:rPr lang="pt-PT" smtClean="0"/>
-              <a:pPr/>
-              <a:t>21</a:t>
+              <a:t>39</a:t>
             </a:fld>
             <a:endParaRPr lang="pt-PT"/>
           </a:p>
@@ -7458,7 +10126,7 @@
 </p:sld>
 </file>
 
-<file path=ppt/slides/slide22.xml><?xml version="1.0" encoding="utf-8"?>
+<file path=ppt/slides/slide4.xml><?xml version="1.0" encoding="utf-8"?>
 <p:sld xmlns:a="http://schemas.openxmlformats.org/drawingml/2006/main" xmlns:r="http://schemas.openxmlformats.org/officeDocument/2006/relationships" xmlns:p="http://schemas.openxmlformats.org/presentationml/2006/main">
   <p:cSld>
     <p:spTree>
@@ -7491,9 +10159,10 @@
           <a:lstStyle/>
           <a:p>
             <a:r>
-              <a:rPr lang="en-GB" dirty="0"/>
-              <a:t>Domain invariants</a:t>
-            </a:r>
+              <a:rPr lang="en-GB" dirty="0" smtClean="0"/>
+              <a:t>Dependencies</a:t>
+            </a:r>
+            <a:endParaRPr lang="en-US" dirty="0"/>
           </a:p>
         </p:txBody>
       </p:sp>
@@ -7508,257 +10177,39 @@
           </p:nvPr>
         </p:nvSpPr>
         <p:spPr/>
-        <p:style>
-          <a:lnRef idx="1">
-            <a:schemeClr val="accent2"/>
-          </a:lnRef>
-          <a:fillRef idx="2">
-            <a:schemeClr val="accent2"/>
-          </a:fillRef>
-          <a:effectRef idx="1">
-            <a:schemeClr val="accent2"/>
-          </a:effectRef>
-          <a:fontRef idx="minor">
-            <a:schemeClr val="dk1"/>
-          </a:fontRef>
-        </p:style>
-        <p:txBody>
-          <a:bodyPr>
-            <a:noAutofit/>
-          </a:bodyPr>
-          <a:lstStyle/>
-          <a:p>
-            <a:pPr marL="118872" indent="0">
-              <a:buNone/>
-            </a:pPr>
-            <a:endParaRPr lang="en-GB" sz="1600" dirty="0">
-              <a:latin typeface="Courier New" panose="02070309020205020404" pitchFamily="49" charset="0"/>
-              <a:cs typeface="Courier New" panose="02070309020205020404" pitchFamily="49" charset="0"/>
-            </a:endParaRPr>
-          </a:p>
-          <a:p>
-            <a:pPr marL="118872" indent="0">
-              <a:buNone/>
-            </a:pPr>
-            <a:r>
-              <a:rPr lang="en-GB" sz="1600" dirty="0">
-                <a:latin typeface="Courier New" panose="02070309020205020404" pitchFamily="49" charset="0"/>
-                <a:cs typeface="Courier New" panose="02070309020205020404" pitchFamily="49" charset="0"/>
-              </a:rPr>
-              <a:t>@Test</a:t>
-            </a:r>
-          </a:p>
-          <a:p>
-            <a:pPr marL="118872" indent="0">
-              <a:buNone/>
-            </a:pPr>
-            <a:r>
-              <a:rPr lang="en-GB" sz="1600" dirty="0">
-                <a:latin typeface="Courier New" panose="02070309020205020404" pitchFamily="49" charset="0"/>
-                <a:cs typeface="Courier New" panose="02070309020205020404" pitchFamily="49" charset="0"/>
-              </a:rPr>
-              <a:t>public void ensurePasswordHasAtLeastOneDigitAnd6CharactersLong() {</a:t>
-            </a:r>
-          </a:p>
-          <a:p>
-            <a:pPr marL="118872" indent="0">
-              <a:buNone/>
-            </a:pPr>
-            <a:r>
-              <a:rPr lang="en-GB" sz="1600" dirty="0">
-                <a:latin typeface="Courier New" panose="02070309020205020404" pitchFamily="49" charset="0"/>
-                <a:cs typeface="Courier New" panose="02070309020205020404" pitchFamily="49" charset="0"/>
-              </a:rPr>
-              <a:t>	new Password("abcdefgh1");</a:t>
-            </a:r>
-          </a:p>
-          <a:p>
-            <a:pPr marL="118872" indent="0">
-              <a:buNone/>
-            </a:pPr>
-            <a:r>
-              <a:rPr lang="en-GB" sz="1600" dirty="0">
-                <a:latin typeface="Courier New" panose="02070309020205020404" pitchFamily="49" charset="0"/>
-                <a:cs typeface="Courier New" panose="02070309020205020404" pitchFamily="49" charset="0"/>
-              </a:rPr>
-              <a:t>}</a:t>
-            </a:r>
-          </a:p>
-          <a:p>
-            <a:pPr marL="118872" indent="0">
-              <a:buNone/>
-            </a:pPr>
-            <a:endParaRPr lang="en-GB" sz="1600" dirty="0">
-              <a:latin typeface="Courier New" panose="02070309020205020404" pitchFamily="49" charset="0"/>
-              <a:cs typeface="Courier New" panose="02070309020205020404" pitchFamily="49" charset="0"/>
-            </a:endParaRPr>
-          </a:p>
-          <a:p>
-            <a:pPr marL="118872" indent="0">
-              <a:buNone/>
-            </a:pPr>
-            <a:r>
-              <a:rPr lang="en-GB" sz="1600" dirty="0">
-                <a:latin typeface="Courier New" panose="02070309020205020404" pitchFamily="49" charset="0"/>
-                <a:cs typeface="Courier New" panose="02070309020205020404" pitchFamily="49" charset="0"/>
-              </a:rPr>
-              <a:t>@Test(expected = </a:t>
-            </a:r>
-            <a:r>
-              <a:rPr lang="en-GB" sz="1600" dirty="0" err="1">
-                <a:latin typeface="Courier New" panose="02070309020205020404" pitchFamily="49" charset="0"/>
-                <a:cs typeface="Courier New" panose="02070309020205020404" pitchFamily="49" charset="0"/>
-              </a:rPr>
-              <a:t>IllegalArgumentException.class</a:t>
-            </a:r>
-            <a:r>
-              <a:rPr lang="en-GB" sz="1600" dirty="0">
-                <a:latin typeface="Courier New" panose="02070309020205020404" pitchFamily="49" charset="0"/>
-                <a:cs typeface="Courier New" panose="02070309020205020404" pitchFamily="49" charset="0"/>
-              </a:rPr>
-              <a:t>)</a:t>
-            </a:r>
-          </a:p>
-          <a:p>
-            <a:pPr marL="118872" indent="0">
-              <a:buNone/>
-            </a:pPr>
-            <a:r>
-              <a:rPr lang="en-GB" sz="1600" dirty="0">
-                <a:latin typeface="Courier New" panose="02070309020205020404" pitchFamily="49" charset="0"/>
-                <a:cs typeface="Courier New" panose="02070309020205020404" pitchFamily="49" charset="0"/>
-              </a:rPr>
-              <a:t>public void ensurePasswordsSmallerThan6CharactersAreNotAllowed() {</a:t>
-            </a:r>
-          </a:p>
-          <a:p>
-            <a:pPr marL="118872" indent="0">
-              <a:buNone/>
-            </a:pPr>
-            <a:r>
-              <a:rPr lang="en-GB" sz="1600" dirty="0">
-                <a:latin typeface="Courier New" panose="02070309020205020404" pitchFamily="49" charset="0"/>
-                <a:cs typeface="Courier New" panose="02070309020205020404" pitchFamily="49" charset="0"/>
-              </a:rPr>
-              <a:t>	new Password("ab1c");</a:t>
-            </a:r>
-          </a:p>
-          <a:p>
-            <a:pPr marL="118872" indent="0">
-              <a:buNone/>
-            </a:pPr>
-            <a:r>
-              <a:rPr lang="en-GB" sz="1600" dirty="0">
-                <a:latin typeface="Courier New" panose="02070309020205020404" pitchFamily="49" charset="0"/>
-                <a:cs typeface="Courier New" panose="02070309020205020404" pitchFamily="49" charset="0"/>
-              </a:rPr>
-              <a:t>}</a:t>
-            </a:r>
-          </a:p>
-          <a:p>
-            <a:pPr marL="118872" indent="0">
-              <a:buNone/>
-            </a:pPr>
-            <a:endParaRPr lang="en-GB" sz="1600" dirty="0">
-              <a:latin typeface="Courier New" panose="02070309020205020404" pitchFamily="49" charset="0"/>
-              <a:cs typeface="Courier New" panose="02070309020205020404" pitchFamily="49" charset="0"/>
-            </a:endParaRPr>
-          </a:p>
-          <a:p>
-            <a:pPr marL="118872" indent="0">
-              <a:buNone/>
-            </a:pPr>
-            <a:r>
-              <a:rPr lang="en-GB" sz="1600" dirty="0">
-                <a:latin typeface="Courier New" panose="02070309020205020404" pitchFamily="49" charset="0"/>
-                <a:cs typeface="Courier New" panose="02070309020205020404" pitchFamily="49" charset="0"/>
-              </a:rPr>
-              <a:t>@Test(expected = </a:t>
-            </a:r>
-            <a:r>
-              <a:rPr lang="en-GB" sz="1600" dirty="0" err="1">
-                <a:latin typeface="Courier New" panose="02070309020205020404" pitchFamily="49" charset="0"/>
-                <a:cs typeface="Courier New" panose="02070309020205020404" pitchFamily="49" charset="0"/>
-              </a:rPr>
-              <a:t>IllegalArgumentException.class</a:t>
-            </a:r>
-            <a:r>
-              <a:rPr lang="en-GB" sz="1600" dirty="0">
-                <a:latin typeface="Courier New" panose="02070309020205020404" pitchFamily="49" charset="0"/>
-                <a:cs typeface="Courier New" panose="02070309020205020404" pitchFamily="49" charset="0"/>
-              </a:rPr>
-              <a:t>)</a:t>
-            </a:r>
-          </a:p>
-          <a:p>
-            <a:pPr marL="118872" indent="0">
-              <a:buNone/>
-            </a:pPr>
-            <a:r>
-              <a:rPr lang="en-GB" sz="1600" dirty="0">
-                <a:latin typeface="Courier New" panose="02070309020205020404" pitchFamily="49" charset="0"/>
-                <a:cs typeface="Courier New" panose="02070309020205020404" pitchFamily="49" charset="0"/>
-              </a:rPr>
-              <a:t>public void </a:t>
-            </a:r>
-            <a:r>
-              <a:rPr lang="en-GB" sz="1600" dirty="0" err="1">
-                <a:latin typeface="Courier New" panose="02070309020205020404" pitchFamily="49" charset="0"/>
-                <a:cs typeface="Courier New" panose="02070309020205020404" pitchFamily="49" charset="0"/>
-              </a:rPr>
-              <a:t>ensurePasswordsWithoutDigitsAreNotAllowed</a:t>
-            </a:r>
-            <a:r>
-              <a:rPr lang="en-GB" sz="1600" dirty="0">
-                <a:latin typeface="Courier New" panose="02070309020205020404" pitchFamily="49" charset="0"/>
-                <a:cs typeface="Courier New" panose="02070309020205020404" pitchFamily="49" charset="0"/>
-              </a:rPr>
-              <a:t>() {</a:t>
-            </a:r>
-          </a:p>
-          <a:p>
-            <a:pPr marL="118872" indent="0">
-              <a:buNone/>
-            </a:pPr>
-            <a:r>
-              <a:rPr lang="en-GB" sz="1600" dirty="0">
-                <a:latin typeface="Courier New" panose="02070309020205020404" pitchFamily="49" charset="0"/>
-                <a:cs typeface="Courier New" panose="02070309020205020404" pitchFamily="49" charset="0"/>
-              </a:rPr>
-              <a:t>	new Password("</a:t>
-            </a:r>
-            <a:r>
-              <a:rPr lang="en-GB" sz="1600" dirty="0" err="1">
-                <a:latin typeface="Courier New" panose="02070309020205020404" pitchFamily="49" charset="0"/>
-                <a:cs typeface="Courier New" panose="02070309020205020404" pitchFamily="49" charset="0"/>
-              </a:rPr>
-              <a:t>abcdefgh</a:t>
-            </a:r>
-            <a:r>
-              <a:rPr lang="en-GB" sz="1600" dirty="0">
-                <a:latin typeface="Courier New" panose="02070309020205020404" pitchFamily="49" charset="0"/>
-                <a:cs typeface="Courier New" panose="02070309020205020404" pitchFamily="49" charset="0"/>
-              </a:rPr>
-              <a:t>");</a:t>
-            </a:r>
-          </a:p>
-          <a:p>
-            <a:pPr marL="118872" indent="0">
-              <a:buNone/>
-            </a:pPr>
-            <a:r>
-              <a:rPr lang="en-GB" sz="1600" dirty="0">
-                <a:latin typeface="Courier New" panose="02070309020205020404" pitchFamily="49" charset="0"/>
-                <a:cs typeface="Courier New" panose="02070309020205020404" pitchFamily="49" charset="0"/>
-              </a:rPr>
-              <a:t>}</a:t>
-            </a:r>
-          </a:p>
-        </p:txBody>
-      </p:sp>
-      <p:sp>
-        <p:nvSpPr>
-          <p:cNvPr id="5" name="Slide Number Placeholder 4"/>
+        <p:txBody>
+          <a:bodyPr/>
+          <a:lstStyle/>
+          <a:p>
+            <a:r>
+              <a:rPr lang="en-GB" dirty="0" smtClean="0"/>
+              <a:t>Apache Commons Logging</a:t>
+            </a:r>
+          </a:p>
+          <a:p>
+            <a:r>
+              <a:rPr lang="en-GB" dirty="0" smtClean="0"/>
+              <a:t>JPA</a:t>
+            </a:r>
+          </a:p>
+          <a:p>
+            <a:r>
+              <a:rPr lang="en-GB" dirty="0" smtClean="0"/>
+              <a:t>Spring Data JPA</a:t>
+            </a:r>
+          </a:p>
+          <a:p>
+            <a:r>
+              <a:rPr lang="en-GB" dirty="0" smtClean="0"/>
+              <a:t>Spring Framework dependency injection</a:t>
+            </a:r>
+            <a:endParaRPr lang="en-US" dirty="0"/>
+          </a:p>
+        </p:txBody>
+      </p:sp>
+      <p:sp>
+        <p:nvSpPr>
+          <p:cNvPr id="4" name="Slide Number Placeholder 3"/>
           <p:cNvSpPr>
             <a:spLocks noGrp="1"/>
           </p:cNvSpPr>
@@ -7774,7 +10225,7 @@
             <a:fld id="{024A9932-4E76-455F-8E1A-2CC10C89B014}" type="slidenum">
               <a:rPr lang="pt-PT" smtClean="0"/>
               <a:pPr/>
-              <a:t>22</a:t>
+              <a:t>4</a:t>
             </a:fld>
             <a:endParaRPr lang="pt-PT"/>
           </a:p>
@@ -7783,7 +10234,7 @@
     </p:spTree>
     <p:extLst>
       <p:ext uri="{BB962C8B-B14F-4D97-AF65-F5344CB8AC3E}">
-        <p14:creationId xmlns:p14="http://schemas.microsoft.com/office/powerpoint/2010/main" val="1968312242"/>
+        <p14:creationId xmlns:p14="http://schemas.microsoft.com/office/powerpoint/2010/main" val="2447458527"/>
       </p:ext>
     </p:extLst>
   </p:cSld>
@@ -7793,7 +10244,7 @@
 </p:sld>
 </file>
 
-<file path=ppt/slides/slide23.xml><?xml version="1.0" encoding="utf-8"?>
+<file path=ppt/slides/slide40.xml><?xml version="1.0" encoding="utf-8"?>
 <p:sld xmlns:a="http://schemas.openxmlformats.org/drawingml/2006/main" xmlns:r="http://schemas.openxmlformats.org/officeDocument/2006/relationships" xmlns:p="http://schemas.openxmlformats.org/presentationml/2006/main">
   <p:cSld>
     <p:spTree>
@@ -7827,7 +10278,7 @@
           <a:p>
             <a:r>
               <a:rPr lang="en-GB" dirty="0"/>
-              <a:t>Domain</a:t>
+              <a:t>Domain invariants</a:t>
             </a:r>
           </a:p>
         </p:txBody>
@@ -7866,6 +10317,341 @@
             <a:pPr marL="118872" indent="0">
               <a:buNone/>
             </a:pPr>
+            <a:endParaRPr lang="en-GB" sz="1600" dirty="0">
+              <a:latin typeface="Courier New" panose="02070309020205020404" pitchFamily="49" charset="0"/>
+              <a:cs typeface="Courier New" panose="02070309020205020404" pitchFamily="49" charset="0"/>
+            </a:endParaRPr>
+          </a:p>
+          <a:p>
+            <a:pPr marL="118872" indent="0">
+              <a:buNone/>
+            </a:pPr>
+            <a:r>
+              <a:rPr lang="en-GB" sz="1600" dirty="0">
+                <a:latin typeface="Courier New" panose="02070309020205020404" pitchFamily="49" charset="0"/>
+                <a:cs typeface="Courier New" panose="02070309020205020404" pitchFamily="49" charset="0"/>
+              </a:rPr>
+              <a:t>@Test</a:t>
+            </a:r>
+          </a:p>
+          <a:p>
+            <a:pPr marL="118872" indent="0">
+              <a:buNone/>
+            </a:pPr>
+            <a:r>
+              <a:rPr lang="en-GB" sz="1600" dirty="0">
+                <a:latin typeface="Courier New" panose="02070309020205020404" pitchFamily="49" charset="0"/>
+                <a:cs typeface="Courier New" panose="02070309020205020404" pitchFamily="49" charset="0"/>
+              </a:rPr>
+              <a:t>public void ensurePasswordHasAtLeastOneDigitAnd6CharactersLong() {</a:t>
+            </a:r>
+          </a:p>
+          <a:p>
+            <a:pPr marL="118872" indent="0">
+              <a:buNone/>
+            </a:pPr>
+            <a:r>
+              <a:rPr lang="en-GB" sz="1600" dirty="0">
+                <a:latin typeface="Courier New" panose="02070309020205020404" pitchFamily="49" charset="0"/>
+                <a:cs typeface="Courier New" panose="02070309020205020404" pitchFamily="49" charset="0"/>
+              </a:rPr>
+              <a:t>	new Password("abcdefgh1");</a:t>
+            </a:r>
+          </a:p>
+          <a:p>
+            <a:pPr marL="118872" indent="0">
+              <a:buNone/>
+            </a:pPr>
+            <a:r>
+              <a:rPr lang="en-GB" sz="1600" dirty="0">
+                <a:latin typeface="Courier New" panose="02070309020205020404" pitchFamily="49" charset="0"/>
+                <a:cs typeface="Courier New" panose="02070309020205020404" pitchFamily="49" charset="0"/>
+              </a:rPr>
+              <a:t>}</a:t>
+            </a:r>
+          </a:p>
+          <a:p>
+            <a:pPr marL="118872" indent="0">
+              <a:buNone/>
+            </a:pPr>
+            <a:endParaRPr lang="en-GB" sz="1600" dirty="0">
+              <a:latin typeface="Courier New" panose="02070309020205020404" pitchFamily="49" charset="0"/>
+              <a:cs typeface="Courier New" panose="02070309020205020404" pitchFamily="49" charset="0"/>
+            </a:endParaRPr>
+          </a:p>
+          <a:p>
+            <a:pPr marL="118872" indent="0">
+              <a:buNone/>
+            </a:pPr>
+            <a:r>
+              <a:rPr lang="en-GB" sz="1600" dirty="0">
+                <a:latin typeface="Courier New" panose="02070309020205020404" pitchFamily="49" charset="0"/>
+                <a:cs typeface="Courier New" panose="02070309020205020404" pitchFamily="49" charset="0"/>
+              </a:rPr>
+              <a:t>@Test(expected = </a:t>
+            </a:r>
+            <a:r>
+              <a:rPr lang="en-GB" sz="1600" dirty="0" err="1">
+                <a:latin typeface="Courier New" panose="02070309020205020404" pitchFamily="49" charset="0"/>
+                <a:cs typeface="Courier New" panose="02070309020205020404" pitchFamily="49" charset="0"/>
+              </a:rPr>
+              <a:t>IllegalArgumentException.class</a:t>
+            </a:r>
+            <a:r>
+              <a:rPr lang="en-GB" sz="1600" dirty="0">
+                <a:latin typeface="Courier New" panose="02070309020205020404" pitchFamily="49" charset="0"/>
+                <a:cs typeface="Courier New" panose="02070309020205020404" pitchFamily="49" charset="0"/>
+              </a:rPr>
+              <a:t>)</a:t>
+            </a:r>
+          </a:p>
+          <a:p>
+            <a:pPr marL="118872" indent="0">
+              <a:buNone/>
+            </a:pPr>
+            <a:r>
+              <a:rPr lang="en-GB" sz="1600" dirty="0">
+                <a:latin typeface="Courier New" panose="02070309020205020404" pitchFamily="49" charset="0"/>
+                <a:cs typeface="Courier New" panose="02070309020205020404" pitchFamily="49" charset="0"/>
+              </a:rPr>
+              <a:t>public void ensurePasswordsSmallerThan6CharactersAreNotAllowed() {</a:t>
+            </a:r>
+          </a:p>
+          <a:p>
+            <a:pPr marL="118872" indent="0">
+              <a:buNone/>
+            </a:pPr>
+            <a:r>
+              <a:rPr lang="en-GB" sz="1600" dirty="0">
+                <a:latin typeface="Courier New" panose="02070309020205020404" pitchFamily="49" charset="0"/>
+                <a:cs typeface="Courier New" panose="02070309020205020404" pitchFamily="49" charset="0"/>
+              </a:rPr>
+              <a:t>	new Password("ab1c");</a:t>
+            </a:r>
+          </a:p>
+          <a:p>
+            <a:pPr marL="118872" indent="0">
+              <a:buNone/>
+            </a:pPr>
+            <a:r>
+              <a:rPr lang="en-GB" sz="1600" dirty="0">
+                <a:latin typeface="Courier New" panose="02070309020205020404" pitchFamily="49" charset="0"/>
+                <a:cs typeface="Courier New" panose="02070309020205020404" pitchFamily="49" charset="0"/>
+              </a:rPr>
+              <a:t>}</a:t>
+            </a:r>
+          </a:p>
+          <a:p>
+            <a:pPr marL="118872" indent="0">
+              <a:buNone/>
+            </a:pPr>
+            <a:endParaRPr lang="en-GB" sz="1600" dirty="0">
+              <a:latin typeface="Courier New" panose="02070309020205020404" pitchFamily="49" charset="0"/>
+              <a:cs typeface="Courier New" panose="02070309020205020404" pitchFamily="49" charset="0"/>
+            </a:endParaRPr>
+          </a:p>
+          <a:p>
+            <a:pPr marL="118872" indent="0">
+              <a:buNone/>
+            </a:pPr>
+            <a:r>
+              <a:rPr lang="en-GB" sz="1600" dirty="0">
+                <a:latin typeface="Courier New" panose="02070309020205020404" pitchFamily="49" charset="0"/>
+                <a:cs typeface="Courier New" panose="02070309020205020404" pitchFamily="49" charset="0"/>
+              </a:rPr>
+              <a:t>@Test(expected = </a:t>
+            </a:r>
+            <a:r>
+              <a:rPr lang="en-GB" sz="1600" dirty="0" err="1">
+                <a:latin typeface="Courier New" panose="02070309020205020404" pitchFamily="49" charset="0"/>
+                <a:cs typeface="Courier New" panose="02070309020205020404" pitchFamily="49" charset="0"/>
+              </a:rPr>
+              <a:t>IllegalArgumentException.class</a:t>
+            </a:r>
+            <a:r>
+              <a:rPr lang="en-GB" sz="1600" dirty="0">
+                <a:latin typeface="Courier New" panose="02070309020205020404" pitchFamily="49" charset="0"/>
+                <a:cs typeface="Courier New" panose="02070309020205020404" pitchFamily="49" charset="0"/>
+              </a:rPr>
+              <a:t>)</a:t>
+            </a:r>
+          </a:p>
+          <a:p>
+            <a:pPr marL="118872" indent="0">
+              <a:buNone/>
+            </a:pPr>
+            <a:r>
+              <a:rPr lang="en-GB" sz="1600" dirty="0">
+                <a:latin typeface="Courier New" panose="02070309020205020404" pitchFamily="49" charset="0"/>
+                <a:cs typeface="Courier New" panose="02070309020205020404" pitchFamily="49" charset="0"/>
+              </a:rPr>
+              <a:t>public void </a:t>
+            </a:r>
+            <a:r>
+              <a:rPr lang="en-GB" sz="1600" dirty="0" err="1">
+                <a:latin typeface="Courier New" panose="02070309020205020404" pitchFamily="49" charset="0"/>
+                <a:cs typeface="Courier New" panose="02070309020205020404" pitchFamily="49" charset="0"/>
+              </a:rPr>
+              <a:t>ensurePasswordsWithoutDigitsAreNotAllowed</a:t>
+            </a:r>
+            <a:r>
+              <a:rPr lang="en-GB" sz="1600" dirty="0">
+                <a:latin typeface="Courier New" panose="02070309020205020404" pitchFamily="49" charset="0"/>
+                <a:cs typeface="Courier New" panose="02070309020205020404" pitchFamily="49" charset="0"/>
+              </a:rPr>
+              <a:t>() {</a:t>
+            </a:r>
+          </a:p>
+          <a:p>
+            <a:pPr marL="118872" indent="0">
+              <a:buNone/>
+            </a:pPr>
+            <a:r>
+              <a:rPr lang="en-GB" sz="1600" dirty="0">
+                <a:latin typeface="Courier New" panose="02070309020205020404" pitchFamily="49" charset="0"/>
+                <a:cs typeface="Courier New" panose="02070309020205020404" pitchFamily="49" charset="0"/>
+              </a:rPr>
+              <a:t>	new Password("</a:t>
+            </a:r>
+            <a:r>
+              <a:rPr lang="en-GB" sz="1600" dirty="0" err="1">
+                <a:latin typeface="Courier New" panose="02070309020205020404" pitchFamily="49" charset="0"/>
+                <a:cs typeface="Courier New" panose="02070309020205020404" pitchFamily="49" charset="0"/>
+              </a:rPr>
+              <a:t>abcdefgh</a:t>
+            </a:r>
+            <a:r>
+              <a:rPr lang="en-GB" sz="1600" dirty="0">
+                <a:latin typeface="Courier New" panose="02070309020205020404" pitchFamily="49" charset="0"/>
+                <a:cs typeface="Courier New" panose="02070309020205020404" pitchFamily="49" charset="0"/>
+              </a:rPr>
+              <a:t>");</a:t>
+            </a:r>
+          </a:p>
+          <a:p>
+            <a:pPr marL="118872" indent="0">
+              <a:buNone/>
+            </a:pPr>
+            <a:r>
+              <a:rPr lang="en-GB" sz="1600" dirty="0">
+                <a:latin typeface="Courier New" panose="02070309020205020404" pitchFamily="49" charset="0"/>
+                <a:cs typeface="Courier New" panose="02070309020205020404" pitchFamily="49" charset="0"/>
+              </a:rPr>
+              <a:t>}</a:t>
+            </a:r>
+          </a:p>
+        </p:txBody>
+      </p:sp>
+      <p:sp>
+        <p:nvSpPr>
+          <p:cNvPr id="5" name="Slide Number Placeholder 4"/>
+          <p:cNvSpPr>
+            <a:spLocks noGrp="1"/>
+          </p:cNvSpPr>
+          <p:nvPr>
+            <p:ph type="sldNum" sz="quarter" idx="12"/>
+          </p:nvPr>
+        </p:nvSpPr>
+        <p:spPr/>
+        <p:txBody>
+          <a:bodyPr/>
+          <a:lstStyle/>
+          <a:p>
+            <a:fld id="{024A9932-4E76-455F-8E1A-2CC10C89B014}" type="slidenum">
+              <a:rPr lang="pt-PT" smtClean="0"/>
+              <a:pPr/>
+              <a:t>40</a:t>
+            </a:fld>
+            <a:endParaRPr lang="pt-PT"/>
+          </a:p>
+        </p:txBody>
+      </p:sp>
+    </p:spTree>
+    <p:extLst>
+      <p:ext uri="{BB962C8B-B14F-4D97-AF65-F5344CB8AC3E}">
+        <p14:creationId xmlns:p14="http://schemas.microsoft.com/office/powerpoint/2010/main" val="1968312242"/>
+      </p:ext>
+    </p:extLst>
+  </p:cSld>
+  <p:clrMapOvr>
+    <a:masterClrMapping/>
+  </p:clrMapOvr>
+</p:sld>
+</file>
+
+<file path=ppt/slides/slide41.xml><?xml version="1.0" encoding="utf-8"?>
+<p:sld xmlns:a="http://schemas.openxmlformats.org/drawingml/2006/main" xmlns:r="http://schemas.openxmlformats.org/officeDocument/2006/relationships" xmlns:p="http://schemas.openxmlformats.org/presentationml/2006/main">
+  <p:cSld>
+    <p:spTree>
+      <p:nvGrpSpPr>
+        <p:cNvPr id="1" name=""/>
+        <p:cNvGrpSpPr/>
+        <p:nvPr/>
+      </p:nvGrpSpPr>
+      <p:grpSpPr>
+        <a:xfrm>
+          <a:off x="0" y="0"/>
+          <a:ext cx="0" cy="0"/>
+          <a:chOff x="0" y="0"/>
+          <a:chExt cx="0" cy="0"/>
+        </a:xfrm>
+      </p:grpSpPr>
+      <p:sp>
+        <p:nvSpPr>
+          <p:cNvPr id="2" name="Title 1"/>
+          <p:cNvSpPr>
+            <a:spLocks noGrp="1"/>
+          </p:cNvSpPr>
+          <p:nvPr>
+            <p:ph type="title"/>
+          </p:nvPr>
+        </p:nvSpPr>
+        <p:spPr/>
+        <p:txBody>
+          <a:bodyPr/>
+          <a:lstStyle/>
+          <a:p>
+            <a:r>
+              <a:rPr lang="en-GB" dirty="0"/>
+              <a:t>Domain</a:t>
+            </a:r>
+          </a:p>
+        </p:txBody>
+      </p:sp>
+      <p:sp>
+        <p:nvSpPr>
+          <p:cNvPr id="3" name="Content Placeholder 2"/>
+          <p:cNvSpPr>
+            <a:spLocks noGrp="1"/>
+          </p:cNvSpPr>
+          <p:nvPr>
+            <p:ph idx="1"/>
+          </p:nvPr>
+        </p:nvSpPr>
+        <p:spPr/>
+        <p:style>
+          <a:lnRef idx="1">
+            <a:schemeClr val="accent2"/>
+          </a:lnRef>
+          <a:fillRef idx="2">
+            <a:schemeClr val="accent2"/>
+          </a:fillRef>
+          <a:effectRef idx="1">
+            <a:schemeClr val="accent2"/>
+          </a:effectRef>
+          <a:fontRef idx="minor">
+            <a:schemeClr val="dk1"/>
+          </a:fontRef>
+        </p:style>
+        <p:txBody>
+          <a:bodyPr>
+            <a:noAutofit/>
+          </a:bodyPr>
+          <a:lstStyle/>
+          <a:p>
+            <a:pPr marL="118872" indent="0">
+              <a:buNone/>
+            </a:pPr>
             <a:r>
               <a:rPr lang="en-GB" sz="1400" dirty="0">
                 <a:latin typeface="Courier New" panose="02070309020205020404" pitchFamily="49" charset="0"/>
@@ -8234,7 +11020,7 @@
             <a:fld id="{024A9932-4E76-455F-8E1A-2CC10C89B014}" type="slidenum">
               <a:rPr lang="pt-PT" smtClean="0"/>
               <a:pPr/>
-              <a:t>23</a:t>
+              <a:t>41</a:t>
             </a:fld>
             <a:endParaRPr lang="pt-PT"/>
           </a:p>
@@ -8256,7 +11042,7 @@
 </p:sld>
 </file>
 
-<file path=ppt/slides/slide24.xml><?xml version="1.0" encoding="utf-8"?>
+<file path=ppt/slides/slide42.xml><?xml version="1.0" encoding="utf-8"?>
 <p:sld xmlns:a="http://schemas.openxmlformats.org/drawingml/2006/main" xmlns:r="http://schemas.openxmlformats.org/officeDocument/2006/relationships" xmlns:p="http://schemas.openxmlformats.org/presentationml/2006/main">
   <p:cSld>
     <p:spTree>
@@ -8288,7 +11074,11 @@
           <a:bodyPr/>
           <a:lstStyle/>
           <a:p>
-            <a:endParaRPr lang="en-US"/>
+            <a:r>
+              <a:rPr lang="en-GB" dirty="0" smtClean="0"/>
+              <a:t>Infrastructure Pub/Sub</a:t>
+            </a:r>
+            <a:endParaRPr lang="en-US" dirty="0"/>
           </a:p>
         </p:txBody>
       </p:sp>
@@ -8329,7 +11119,7 @@
             <a:fld id="{024A9932-4E76-455F-8E1A-2CC10C89B014}" type="slidenum">
               <a:rPr lang="pt-PT" smtClean="0"/>
               <a:pPr/>
-              <a:t>24</a:t>
+              <a:t>42</a:t>
             </a:fld>
             <a:endParaRPr lang="pt-PT"/>
           </a:p>
@@ -8338,7 +11128,7 @@
     </p:spTree>
     <p:extLst>
       <p:ext uri="{BB962C8B-B14F-4D97-AF65-F5344CB8AC3E}">
-        <p14:creationId xmlns:p14="http://schemas.microsoft.com/office/powerpoint/2010/main" val="2173170066"/>
+        <p14:creationId xmlns:p14="http://schemas.microsoft.com/office/powerpoint/2010/main" val="477722368"/>
       </p:ext>
     </p:extLst>
   </p:cSld>
@@ -8348,7 +11138,7 @@
 </p:sld>
 </file>
 
-<file path=ppt/slides/slide25.xml><?xml version="1.0" encoding="utf-8"?>
+<file path=ppt/slides/slide43.xml><?xml version="1.0" encoding="utf-8"?>
 <p:sld xmlns:a="http://schemas.openxmlformats.org/drawingml/2006/main" xmlns:r="http://schemas.openxmlformats.org/officeDocument/2006/relationships" xmlns:p="http://schemas.openxmlformats.org/presentationml/2006/main">
   <p:cSld>
     <p:spTree>
@@ -8367,7 +11157,7 @@
       </p:grpSpPr>
       <p:sp>
         <p:nvSpPr>
-          <p:cNvPr id="2" name="Title 1"/>
+          <p:cNvPr id="5" name="Title 4"/>
           <p:cNvSpPr>
             <a:spLocks noGrp="1"/>
           </p:cNvSpPr>
@@ -8380,16 +11170,32 @@
           <a:bodyPr/>
           <a:lstStyle/>
           <a:p>
-            <a:r>
-              <a:rPr lang="en-GB" dirty="0"/>
-              <a:t>Resources </a:t>
-            </a:r>
-          </a:p>
-        </p:txBody>
-      </p:sp>
-      <p:sp>
-        <p:nvSpPr>
-          <p:cNvPr id="5" name="Slide Number Placeholder 4"/>
+            <a:endParaRPr lang="en-US"/>
+          </a:p>
+        </p:txBody>
+      </p:sp>
+      <p:sp>
+        <p:nvSpPr>
+          <p:cNvPr id="6" name="Content Placeholder 5"/>
+          <p:cNvSpPr>
+            <a:spLocks noGrp="1"/>
+          </p:cNvSpPr>
+          <p:nvPr>
+            <p:ph idx="1"/>
+          </p:nvPr>
+        </p:nvSpPr>
+        <p:spPr/>
+        <p:txBody>
+          <a:bodyPr/>
+          <a:lstStyle/>
+          <a:p>
+            <a:endParaRPr lang="en-US"/>
+          </a:p>
+        </p:txBody>
+      </p:sp>
+      <p:sp>
+        <p:nvSpPr>
+          <p:cNvPr id="4" name="Slide Number Placeholder 3"/>
           <p:cNvSpPr>
             <a:spLocks noGrp="1"/>
           </p:cNvSpPr>
@@ -8405,160 +11211,16 @@
             <a:fld id="{024A9932-4E76-455F-8E1A-2CC10C89B014}" type="slidenum">
               <a:rPr lang="pt-PT" smtClean="0"/>
               <a:pPr/>
-              <a:t>25</a:t>
+              <a:t>43</a:t>
             </a:fld>
             <a:endParaRPr lang="pt-PT"/>
           </a:p>
         </p:txBody>
       </p:sp>
-      <p:pic>
-        <p:nvPicPr>
-          <p:cNvPr id="6" name="Picture 5"/>
-          <p:cNvPicPr>
-            <a:picLocks noChangeAspect="1"/>
-          </p:cNvPicPr>
-          <p:nvPr/>
-        </p:nvPicPr>
-        <p:blipFill>
-          <a:blip r:embed="rId3"/>
-          <a:stretch>
-            <a:fillRect/>
-          </a:stretch>
-        </p:blipFill>
-        <p:spPr>
-          <a:xfrm>
-            <a:off x="5256077" y="0"/>
-            <a:ext cx="3887924" cy="7925001"/>
-          </a:xfrm>
-          <a:prstGeom prst="rect">
-            <a:avLst/>
-          </a:prstGeom>
-        </p:spPr>
-      </p:pic>
-      <p:sp>
-        <p:nvSpPr>
-          <p:cNvPr id="7" name="Rounded Rectangle 6"/>
-          <p:cNvSpPr/>
-          <p:nvPr/>
-        </p:nvSpPr>
-        <p:spPr>
-          <a:xfrm>
-            <a:off x="5479368" y="2312876"/>
-            <a:ext cx="3125080" cy="1476164"/>
-          </a:xfrm>
-          <a:prstGeom prst="roundRect">
-            <a:avLst/>
-          </a:prstGeom>
-          <a:solidFill>
-            <a:srgbClr val="CC9900">
-              <a:alpha val="20000"/>
-            </a:srgbClr>
-          </a:solidFill>
-        </p:spPr>
-        <p:style>
-          <a:lnRef idx="1">
-            <a:schemeClr val="accent6"/>
-          </a:lnRef>
-          <a:fillRef idx="2">
-            <a:schemeClr val="accent6"/>
-          </a:fillRef>
-          <a:effectRef idx="1">
-            <a:schemeClr val="accent6"/>
-          </a:effectRef>
-          <a:fontRef idx="minor">
-            <a:schemeClr val="dk1"/>
-          </a:fontRef>
-        </p:style>
-        <p:txBody>
-          <a:bodyPr rtlCol="0" anchor="ctr"/>
-          <a:lstStyle/>
-          <a:p>
-            <a:pPr algn="ctr"/>
-            <a:endParaRPr lang="en-GB"/>
-          </a:p>
-        </p:txBody>
-      </p:sp>
-      <p:sp>
-        <p:nvSpPr>
-          <p:cNvPr id="10" name="Rounded Rectangle 9"/>
-          <p:cNvSpPr/>
-          <p:nvPr/>
-        </p:nvSpPr>
-        <p:spPr>
-          <a:xfrm>
-            <a:off x="5446248" y="6013237"/>
-            <a:ext cx="3125080" cy="548111"/>
-          </a:xfrm>
-          <a:prstGeom prst="roundRect">
-            <a:avLst/>
-          </a:prstGeom>
-          <a:solidFill>
-            <a:srgbClr val="CC9900">
-              <a:alpha val="20000"/>
-            </a:srgbClr>
-          </a:solidFill>
-        </p:spPr>
-        <p:style>
-          <a:lnRef idx="1">
-            <a:schemeClr val="accent6"/>
-          </a:lnRef>
-          <a:fillRef idx="2">
-            <a:schemeClr val="accent6"/>
-          </a:fillRef>
-          <a:effectRef idx="1">
-            <a:schemeClr val="accent6"/>
-          </a:effectRef>
-          <a:fontRef idx="minor">
-            <a:schemeClr val="dk1"/>
-          </a:fontRef>
-        </p:style>
-        <p:txBody>
-          <a:bodyPr rtlCol="0" anchor="ctr"/>
-          <a:lstStyle/>
-          <a:p>
-            <a:pPr algn="ctr"/>
-            <a:endParaRPr lang="en-GB"/>
-          </a:p>
-        </p:txBody>
-      </p:sp>
-      <p:pic>
-        <p:nvPicPr>
-          <p:cNvPr id="4" name="Picture 3"/>
-          <p:cNvPicPr>
-            <a:picLocks noChangeAspect="1"/>
-          </p:cNvPicPr>
-          <p:nvPr/>
-        </p:nvPicPr>
-        <p:blipFill>
-          <a:blip r:embed="rId4"/>
-          <a:stretch>
-            <a:fillRect/>
-          </a:stretch>
-        </p:blipFill>
-        <p:spPr>
-          <a:xfrm>
-            <a:off x="128622" y="1863700"/>
-            <a:ext cx="4856579" cy="4085579"/>
-          </a:xfrm>
-          <a:prstGeom prst="rect">
-            <a:avLst/>
-          </a:prstGeom>
-          <a:ln>
-            <a:noFill/>
-          </a:ln>
-          <a:effectLst>
-            <a:outerShdw blurRad="292100" dist="139700" dir="2700000" algn="tl" rotWithShape="0">
-              <a:srgbClr val="333333">
-                <a:alpha val="65000"/>
-              </a:srgbClr>
-            </a:outerShdw>
-          </a:effectLst>
-        </p:spPr>
-      </p:pic>
     </p:spTree>
     <p:extLst>
       <p:ext uri="{BB962C8B-B14F-4D97-AF65-F5344CB8AC3E}">
-        <p14:creationId xmlns:p14="http://schemas.microsoft.com/office/powerpoint/2010/main" val="30821949"/>
+        <p14:creationId xmlns:p14="http://schemas.microsoft.com/office/powerpoint/2010/main" val="709132927"/>
       </p:ext>
     </p:extLst>
   </p:cSld>
@@ -8568,7 +11230,7 @@
 </p:sld>
 </file>
 
-<file path=ppt/slides/slide26.xml><?xml version="1.0" encoding="utf-8"?>
+<file path=ppt/slides/slide44.xml><?xml version="1.0" encoding="utf-8"?>
 <p:sld xmlns:a="http://schemas.openxmlformats.org/drawingml/2006/main" xmlns:r="http://schemas.openxmlformats.org/officeDocument/2006/relationships" xmlns:p="http://schemas.openxmlformats.org/presentationml/2006/main">
   <p:cSld>
     <p:spTree>
@@ -8601,44 +11263,22 @@
           <a:lstStyle/>
           <a:p>
             <a:r>
-              <a:rPr lang="en-GB" dirty="0"/>
-              <a:t>Spring Dependency Injection</a:t>
+              <a:rPr lang="en-GB" dirty="0" smtClean="0"/>
+              <a:t>Abstract service</a:t>
             </a:r>
             <a:endParaRPr lang="en-US" dirty="0"/>
-          </a:p>
-        </p:txBody>
-      </p:sp>
-      <p:sp>
-        <p:nvSpPr>
-          <p:cNvPr id="4" name="Slide Number Placeholder 3"/>
-          <p:cNvSpPr>
-            <a:spLocks noGrp="1"/>
-          </p:cNvSpPr>
-          <p:nvPr>
-            <p:ph type="sldNum" sz="quarter" idx="12"/>
-          </p:nvPr>
-        </p:nvSpPr>
-        <p:spPr/>
-        <p:txBody>
-          <a:bodyPr/>
-          <a:lstStyle/>
-          <a:p>
-            <a:fld id="{024A9932-4E76-455F-8E1A-2CC10C89B014}" type="slidenum">
-              <a:rPr lang="pt-PT" smtClean="0"/>
-              <a:pPr/>
-              <a:t>26</a:t>
-            </a:fld>
-            <a:endParaRPr lang="pt-PT"/>
           </a:p>
         </p:txBody>
       </p:sp>
       <p:pic>
         <p:nvPicPr>
-          <p:cNvPr id="6" name="Picture 5"/>
+          <p:cNvPr id="5" name="Content Placeholder 4"/>
           <p:cNvPicPr>
-            <a:picLocks noChangeAspect="1"/>
+            <a:picLocks noGrp="1" noChangeAspect="1"/>
           </p:cNvPicPr>
-          <p:nvPr/>
+          <p:nvPr>
+            <p:ph idx="1"/>
+          </p:nvPr>
         </p:nvPicPr>
         <p:blipFill>
           <a:blip r:embed="rId2"/>
@@ -8648,142 +11288,42 @@
         </p:blipFill>
         <p:spPr>
           <a:xfrm>
-            <a:off x="179512" y="1604540"/>
-            <a:ext cx="6067425" cy="990600"/>
+            <a:off x="1674829" y="1774825"/>
+            <a:ext cx="5794342" cy="4625975"/>
           </a:xfrm>
           <a:prstGeom prst="rect">
             <a:avLst/>
           </a:prstGeom>
-          <a:ln>
-            <a:noFill/>
-          </a:ln>
-          <a:effectLst>
-            <a:outerShdw blurRad="292100" dist="139700" dir="2700000" algn="tl" rotWithShape="0">
-              <a:srgbClr val="333333">
-                <a:alpha val="65000"/>
-              </a:srgbClr>
-            </a:outerShdw>
-          </a:effectLst>
         </p:spPr>
       </p:pic>
-      <p:pic>
-        <p:nvPicPr>
-          <p:cNvPr id="7" name="Picture 6"/>
-          <p:cNvPicPr>
-            <a:picLocks noChangeAspect="1"/>
-          </p:cNvPicPr>
-          <p:nvPr/>
-        </p:nvPicPr>
-        <p:blipFill>
-          <a:blip r:embed="rId3"/>
-          <a:stretch>
-            <a:fillRect/>
-          </a:stretch>
-        </p:blipFill>
-        <p:spPr>
-          <a:xfrm>
-            <a:off x="1511660" y="2765791"/>
-            <a:ext cx="7924800" cy="5143500"/>
-          </a:xfrm>
-          <a:prstGeom prst="rect">
-            <a:avLst/>
-          </a:prstGeom>
-          <a:ln>
-            <a:noFill/>
-          </a:ln>
-          <a:effectLst>
-            <a:outerShdw blurRad="292100" dist="139700" dir="2700000" algn="tl" rotWithShape="0">
-              <a:srgbClr val="333333">
-                <a:alpha val="65000"/>
-              </a:srgbClr>
-            </a:outerShdw>
-          </a:effectLst>
-        </p:spPr>
-      </p:pic>
-      <p:sp>
-        <p:nvSpPr>
-          <p:cNvPr id="8" name="Right Arrow 7"/>
-          <p:cNvSpPr/>
-          <p:nvPr/>
-        </p:nvSpPr>
-        <p:spPr>
-          <a:xfrm rot="10800000">
-            <a:off x="6480212" y="2132856"/>
-            <a:ext cx="684076" cy="288032"/>
-          </a:xfrm>
-          <a:prstGeom prst="rightArrow">
-            <a:avLst/>
-          </a:prstGeom>
-        </p:spPr>
-        <p:style>
-          <a:lnRef idx="2">
-            <a:schemeClr val="accent1">
-              <a:shade val="50000"/>
-            </a:schemeClr>
-          </a:lnRef>
-          <a:fillRef idx="1">
-            <a:schemeClr val="accent1"/>
-          </a:fillRef>
-          <a:effectRef idx="0">
-            <a:schemeClr val="accent1"/>
-          </a:effectRef>
-          <a:fontRef idx="minor">
-            <a:schemeClr val="lt1"/>
-          </a:fontRef>
-        </p:style>
-        <p:txBody>
-          <a:bodyPr rtlCol="0" anchor="ctr"/>
-          <a:lstStyle/>
-          <a:p>
-            <a:pPr algn="ctr"/>
-            <a:endParaRPr lang="en-US"/>
-          </a:p>
-        </p:txBody>
-      </p:sp>
-      <p:sp>
-        <p:nvSpPr>
-          <p:cNvPr id="9" name="Right Arrow 8"/>
-          <p:cNvSpPr/>
-          <p:nvPr/>
-        </p:nvSpPr>
-        <p:spPr>
-          <a:xfrm rot="20801830">
-            <a:off x="1391604" y="5844097"/>
-            <a:ext cx="684076" cy="288032"/>
-          </a:xfrm>
-          <a:prstGeom prst="rightArrow">
-            <a:avLst/>
-          </a:prstGeom>
-        </p:spPr>
-        <p:style>
-          <a:lnRef idx="2">
-            <a:schemeClr val="accent1">
-              <a:shade val="50000"/>
-            </a:schemeClr>
-          </a:lnRef>
-          <a:fillRef idx="1">
-            <a:schemeClr val="accent1"/>
-          </a:fillRef>
-          <a:effectRef idx="0">
-            <a:schemeClr val="accent1"/>
-          </a:effectRef>
-          <a:fontRef idx="minor">
-            <a:schemeClr val="lt1"/>
-          </a:fontRef>
-        </p:style>
-        <p:txBody>
-          <a:bodyPr rtlCol="0" anchor="ctr"/>
-          <a:lstStyle/>
-          <a:p>
-            <a:pPr algn="ctr"/>
-            <a:endParaRPr lang="en-US"/>
+      <p:sp>
+        <p:nvSpPr>
+          <p:cNvPr id="4" name="Slide Number Placeholder 3"/>
+          <p:cNvSpPr>
+            <a:spLocks noGrp="1"/>
+          </p:cNvSpPr>
+          <p:nvPr>
+            <p:ph type="sldNum" sz="quarter" idx="12"/>
+          </p:nvPr>
+        </p:nvSpPr>
+        <p:spPr/>
+        <p:txBody>
+          <a:bodyPr/>
+          <a:lstStyle/>
+          <a:p>
+            <a:fld id="{024A9932-4E76-455F-8E1A-2CC10C89B014}" type="slidenum">
+              <a:rPr lang="pt-PT" smtClean="0"/>
+              <a:pPr/>
+              <a:t>44</a:t>
+            </a:fld>
+            <a:endParaRPr lang="pt-PT"/>
           </a:p>
         </p:txBody>
       </p:sp>
     </p:spTree>
     <p:extLst>
       <p:ext uri="{BB962C8B-B14F-4D97-AF65-F5344CB8AC3E}">
-        <p14:creationId xmlns:p14="http://schemas.microsoft.com/office/powerpoint/2010/main" val="177396378"/>
+        <p14:creationId xmlns:p14="http://schemas.microsoft.com/office/powerpoint/2010/main" val="1783994502"/>
       </p:ext>
     </p:extLst>
   </p:cSld>
@@ -8793,7 +11333,7 @@
 </p:sld>
 </file>
 
-<file path=ppt/slides/slide27.xml><?xml version="1.0" encoding="utf-8"?>
+<file path=ppt/slides/slide45.xml><?xml version="1.0" encoding="utf-8"?>
 <p:sld xmlns:a="http://schemas.openxmlformats.org/drawingml/2006/main" xmlns:r="http://schemas.openxmlformats.org/officeDocument/2006/relationships" xmlns:p="http://schemas.openxmlformats.org/presentationml/2006/main">
   <p:cSld>
     <p:spTree>
@@ -8826,44 +11366,22 @@
           <a:lstStyle/>
           <a:p>
             <a:r>
-              <a:rPr lang="en-GB" dirty="0"/>
-              <a:t>Spring Dependency Injection</a:t>
+              <a:rPr lang="en-GB" dirty="0" smtClean="0"/>
+              <a:t>In Process</a:t>
             </a:r>
             <a:endParaRPr lang="en-US" dirty="0"/>
-          </a:p>
-        </p:txBody>
-      </p:sp>
-      <p:sp>
-        <p:nvSpPr>
-          <p:cNvPr id="4" name="Slide Number Placeholder 3"/>
-          <p:cNvSpPr>
-            <a:spLocks noGrp="1"/>
-          </p:cNvSpPr>
-          <p:nvPr>
-            <p:ph type="sldNum" sz="quarter" idx="12"/>
-          </p:nvPr>
-        </p:nvSpPr>
-        <p:spPr/>
-        <p:txBody>
-          <a:bodyPr/>
-          <a:lstStyle/>
-          <a:p>
-            <a:fld id="{024A9932-4E76-455F-8E1A-2CC10C89B014}" type="slidenum">
-              <a:rPr lang="pt-PT" smtClean="0"/>
-              <a:pPr/>
-              <a:t>27</a:t>
-            </a:fld>
-            <a:endParaRPr lang="pt-PT"/>
           </a:p>
         </p:txBody>
       </p:sp>
       <p:pic>
         <p:nvPicPr>
-          <p:cNvPr id="5" name="Picture 4"/>
+          <p:cNvPr id="5" name="Content Placeholder 4"/>
           <p:cNvPicPr>
-            <a:picLocks noChangeAspect="1"/>
+            <a:picLocks noGrp="1" noChangeAspect="1"/>
           </p:cNvPicPr>
-          <p:nvPr/>
+          <p:nvPr>
+            <p:ph idx="1"/>
+          </p:nvPr>
         </p:nvPicPr>
         <p:blipFill>
           <a:blip r:embed="rId2"/>
@@ -8873,142 +11391,42 @@
         </p:blipFill>
         <p:spPr>
           <a:xfrm>
-            <a:off x="323528" y="1772816"/>
-            <a:ext cx="7724775" cy="2486025"/>
+            <a:off x="1123950" y="1958975"/>
+            <a:ext cx="6896100" cy="4257675"/>
           </a:xfrm>
           <a:prstGeom prst="rect">
             <a:avLst/>
           </a:prstGeom>
-          <a:ln>
-            <a:noFill/>
-          </a:ln>
-          <a:effectLst>
-            <a:outerShdw blurRad="292100" dist="139700" dir="2700000" algn="tl" rotWithShape="0">
-              <a:srgbClr val="333333">
-                <a:alpha val="65000"/>
-              </a:srgbClr>
-            </a:outerShdw>
-          </a:effectLst>
         </p:spPr>
       </p:pic>
-      <p:pic>
-        <p:nvPicPr>
-          <p:cNvPr id="8" name="Picture 7"/>
-          <p:cNvPicPr>
-            <a:picLocks noChangeAspect="1"/>
-          </p:cNvPicPr>
-          <p:nvPr/>
-        </p:nvPicPr>
-        <p:blipFill>
-          <a:blip r:embed="rId3"/>
-          <a:stretch>
-            <a:fillRect/>
-          </a:stretch>
-        </p:blipFill>
-        <p:spPr>
-          <a:xfrm>
-            <a:off x="1765935" y="4639310"/>
-            <a:ext cx="7172325" cy="3009900"/>
-          </a:xfrm>
-          <a:prstGeom prst="rect">
-            <a:avLst/>
-          </a:prstGeom>
-          <a:ln>
-            <a:noFill/>
-          </a:ln>
-          <a:effectLst>
-            <a:outerShdw blurRad="292100" dist="139700" dir="2700000" algn="tl" rotWithShape="0">
-              <a:srgbClr val="333333">
-                <a:alpha val="65000"/>
-              </a:srgbClr>
-            </a:outerShdw>
-          </a:effectLst>
-        </p:spPr>
-      </p:pic>
-      <p:sp>
-        <p:nvSpPr>
-          <p:cNvPr id="9" name="Right Arrow 8"/>
-          <p:cNvSpPr/>
-          <p:nvPr/>
-        </p:nvSpPr>
-        <p:spPr>
-          <a:xfrm rot="21052957">
-            <a:off x="1242127" y="4704968"/>
-            <a:ext cx="684076" cy="288032"/>
-          </a:xfrm>
-          <a:prstGeom prst="rightArrow">
-            <a:avLst/>
-          </a:prstGeom>
-        </p:spPr>
-        <p:style>
-          <a:lnRef idx="2">
-            <a:schemeClr val="accent1">
-              <a:shade val="50000"/>
-            </a:schemeClr>
-          </a:lnRef>
-          <a:fillRef idx="1">
-            <a:schemeClr val="accent1"/>
-          </a:fillRef>
-          <a:effectRef idx="0">
-            <a:schemeClr val="accent1"/>
-          </a:effectRef>
-          <a:fontRef idx="minor">
-            <a:schemeClr val="lt1"/>
-          </a:fontRef>
-        </p:style>
-        <p:txBody>
-          <a:bodyPr rtlCol="0" anchor="ctr"/>
-          <a:lstStyle/>
-          <a:p>
-            <a:pPr algn="ctr"/>
-            <a:endParaRPr lang="en-US"/>
-          </a:p>
-        </p:txBody>
-      </p:sp>
-      <p:sp>
-        <p:nvSpPr>
-          <p:cNvPr id="10" name="Right Arrow 9"/>
-          <p:cNvSpPr/>
-          <p:nvPr/>
-        </p:nvSpPr>
-        <p:spPr>
-          <a:xfrm rot="21052957">
-            <a:off x="1601172" y="5281580"/>
-            <a:ext cx="684076" cy="288032"/>
-          </a:xfrm>
-          <a:prstGeom prst="rightArrow">
-            <a:avLst/>
-          </a:prstGeom>
-        </p:spPr>
-        <p:style>
-          <a:lnRef idx="2">
-            <a:schemeClr val="accent1">
-              <a:shade val="50000"/>
-            </a:schemeClr>
-          </a:lnRef>
-          <a:fillRef idx="1">
-            <a:schemeClr val="accent1"/>
-          </a:fillRef>
-          <a:effectRef idx="0">
-            <a:schemeClr val="accent1"/>
-          </a:effectRef>
-          <a:fontRef idx="minor">
-            <a:schemeClr val="lt1"/>
-          </a:fontRef>
-        </p:style>
-        <p:txBody>
-          <a:bodyPr rtlCol="0" anchor="ctr"/>
-          <a:lstStyle/>
-          <a:p>
-            <a:pPr algn="ctr"/>
-            <a:endParaRPr lang="en-US"/>
+      <p:sp>
+        <p:nvSpPr>
+          <p:cNvPr id="4" name="Slide Number Placeholder 3"/>
+          <p:cNvSpPr>
+            <a:spLocks noGrp="1"/>
+          </p:cNvSpPr>
+          <p:nvPr>
+            <p:ph type="sldNum" sz="quarter" idx="12"/>
+          </p:nvPr>
+        </p:nvSpPr>
+        <p:spPr/>
+        <p:txBody>
+          <a:bodyPr/>
+          <a:lstStyle/>
+          <a:p>
+            <a:fld id="{024A9932-4E76-455F-8E1A-2CC10C89B014}" type="slidenum">
+              <a:rPr lang="pt-PT" smtClean="0"/>
+              <a:pPr/>
+              <a:t>45</a:t>
+            </a:fld>
+            <a:endParaRPr lang="pt-PT"/>
           </a:p>
         </p:txBody>
       </p:sp>
     </p:spTree>
     <p:extLst>
       <p:ext uri="{BB962C8B-B14F-4D97-AF65-F5344CB8AC3E}">
-        <p14:creationId xmlns:p14="http://schemas.microsoft.com/office/powerpoint/2010/main" val="2830750395"/>
+        <p14:creationId xmlns:p14="http://schemas.microsoft.com/office/powerpoint/2010/main" val="3197191611"/>
       </p:ext>
     </p:extLst>
   </p:cSld>
@@ -9018,7 +11436,7 @@
 </p:sld>
 </file>
 
-<file path=ppt/slides/slide28.xml><?xml version="1.0" encoding="utf-8"?>
+<file path=ppt/slides/slide46.xml><?xml version="1.0" encoding="utf-8"?>
 <p:sld xmlns:a="http://schemas.openxmlformats.org/drawingml/2006/main" xmlns:r="http://schemas.openxmlformats.org/officeDocument/2006/relationships" xmlns:p="http://schemas.openxmlformats.org/presentationml/2006/main">
   <p:cSld>
     <p:spTree>
@@ -9037,7 +11455,7 @@
       </p:grpSpPr>
       <p:sp>
         <p:nvSpPr>
-          <p:cNvPr id="6" name="Title 5"/>
+          <p:cNvPr id="2" name="Title 1"/>
           <p:cNvSpPr>
             <a:spLocks noGrp="1"/>
           </p:cNvSpPr>
@@ -9051,15 +11469,16 @@
           <a:lstStyle/>
           <a:p>
             <a:r>
-              <a:rPr lang="en-GB" dirty="0"/>
-              <a:t>Persistence</a:t>
-            </a:r>
-          </a:p>
-        </p:txBody>
-      </p:sp>
-      <p:sp>
-        <p:nvSpPr>
-          <p:cNvPr id="7" name="Content Placeholder 6"/>
+              <a:rPr lang="en-GB" dirty="0" smtClean="0"/>
+              <a:t>In Process</a:t>
+            </a:r>
+            <a:endParaRPr lang="en-US" dirty="0"/>
+          </a:p>
+        </p:txBody>
+      </p:sp>
+      <p:sp>
+        <p:nvSpPr>
+          <p:cNvPr id="3" name="Content Placeholder 2"/>
           <p:cNvSpPr>
             <a:spLocks noGrp="1"/>
           </p:cNvSpPr>
@@ -9069,73 +11488,36 @@
         </p:nvSpPr>
         <p:spPr/>
         <p:txBody>
-          <a:bodyPr>
-            <a:normAutofit lnSpcReduction="10000"/>
-          </a:bodyPr>
-          <a:lstStyle/>
-          <a:p>
-            <a:r>
-              <a:rPr lang="en-GB" dirty="0"/>
-              <a:t>Controller needs to access the repositories</a:t>
-            </a:r>
-          </a:p>
-          <a:p>
-            <a:r>
-              <a:rPr lang="en-GB" dirty="0"/>
-              <a:t>But we have three repository implementations</a:t>
-            </a:r>
-          </a:p>
-          <a:p>
-            <a:pPr lvl="1"/>
-            <a:r>
-              <a:rPr lang="en-GB" dirty="0"/>
-              <a:t>In memory</a:t>
-            </a:r>
-          </a:p>
-          <a:p>
-            <a:pPr lvl="1"/>
-            <a:r>
-              <a:rPr lang="en-GB" dirty="0"/>
-              <a:t>Relational database thru JPA</a:t>
-            </a:r>
-          </a:p>
-          <a:p>
-            <a:pPr lvl="1"/>
-            <a:r>
-              <a:rPr lang="en-GB" dirty="0"/>
-              <a:t>Relational database thru </a:t>
-            </a:r>
-            <a:r>
-              <a:rPr lang="en-GB" dirty="0" err="1"/>
-              <a:t>SpringData</a:t>
-            </a:r>
-            <a:endParaRPr lang="en-GB" dirty="0"/>
-          </a:p>
-          <a:p>
-            <a:r>
-              <a:rPr lang="en-GB" dirty="0"/>
-              <a:t>Hide persistence details from rest of the code</a:t>
-            </a:r>
-          </a:p>
-          <a:p>
-            <a:pPr lvl="1"/>
-            <a:r>
-              <a:rPr lang="en-GB" dirty="0"/>
-              <a:t>Interfaces</a:t>
-            </a:r>
-          </a:p>
-          <a:p>
-            <a:pPr lvl="1"/>
-            <a:r>
-              <a:rPr lang="en-GB" dirty="0"/>
-              <a:t>Factories </a:t>
-            </a:r>
-          </a:p>
-        </p:txBody>
-      </p:sp>
-      <p:sp>
-        <p:nvSpPr>
-          <p:cNvPr id="5" name="Slide Number Placeholder 4"/>
+          <a:bodyPr/>
+          <a:lstStyle/>
+          <a:p>
+            <a:r>
+              <a:rPr lang="en-GB" dirty="0" smtClean="0"/>
+              <a:t>Client code uses </a:t>
+            </a:r>
+            <a:r>
+              <a:rPr lang="en-GB" dirty="0" err="1" smtClean="0"/>
+              <a:t>InProcessEventPublisher</a:t>
+            </a:r>
+            <a:r>
+              <a:rPr lang="en-GB" dirty="0" smtClean="0"/>
+              <a:t> or </a:t>
+            </a:r>
+            <a:r>
+              <a:rPr lang="en-GB" dirty="0" err="1" smtClean="0"/>
+              <a:t>InProcessEventDispatcher</a:t>
+            </a:r>
+            <a:r>
+              <a:rPr lang="en-GB" dirty="0" smtClean="0"/>
+              <a:t> via static instance() method or via dependency injection </a:t>
+            </a:r>
+            <a:endParaRPr lang="en-US" dirty="0"/>
+          </a:p>
+        </p:txBody>
+      </p:sp>
+      <p:sp>
+        <p:nvSpPr>
+          <p:cNvPr id="4" name="Slide Number Placeholder 3"/>
           <p:cNvSpPr>
             <a:spLocks noGrp="1"/>
           </p:cNvSpPr>
@@ -9151,7 +11533,7 @@
             <a:fld id="{024A9932-4E76-455F-8E1A-2CC10C89B014}" type="slidenum">
               <a:rPr lang="pt-PT" smtClean="0"/>
               <a:pPr/>
-              <a:t>28</a:t>
+              <a:t>46</a:t>
             </a:fld>
             <a:endParaRPr lang="pt-PT"/>
           </a:p>
@@ -9160,17 +11542,24 @@
     </p:spTree>
     <p:extLst>
       <p:ext uri="{BB962C8B-B14F-4D97-AF65-F5344CB8AC3E}">
-        <p14:creationId xmlns:p14="http://schemas.microsoft.com/office/powerpoint/2010/main" val="3554960124"/>
+        <p14:creationId xmlns:p14="http://schemas.microsoft.com/office/powerpoint/2010/main" val="1984569913"/>
       </p:ext>
     </p:extLst>
   </p:cSld>
   <p:clrMapOvr>
     <a:masterClrMapping/>
   </p:clrMapOvr>
+  <p:timing>
+    <p:tnLst>
+      <p:par>
+        <p:cTn id="1" dur="indefinite" restart="never" nodeType="tmRoot"/>
+      </p:par>
+    </p:tnLst>
+  </p:timing>
 </p:sld>
 </file>
 
-<file path=ppt/slides/slide29.xml><?xml version="1.0" encoding="utf-8"?>
+<file path=ppt/slides/slide47.xml><?xml version="1.0" encoding="utf-8"?>
 <p:sld xmlns:a="http://schemas.openxmlformats.org/drawingml/2006/main" xmlns:r="http://schemas.openxmlformats.org/officeDocument/2006/relationships" xmlns:p="http://schemas.openxmlformats.org/presentationml/2006/main">
   <p:cSld>
     <p:spTree>
@@ -9189,35 +11578,36 @@
       </p:grpSpPr>
       <p:sp>
         <p:nvSpPr>
-          <p:cNvPr id="2" name="Title 1"/>
-          <p:cNvSpPr>
-            <a:spLocks noGrp="1"/>
-          </p:cNvSpPr>
-          <p:nvPr>
-            <p:ph type="title"/>
-          </p:nvPr>
-        </p:nvSpPr>
-        <p:spPr/>
-        <p:txBody>
-          <a:bodyPr/>
-          <a:lstStyle/>
-          <a:p>
-            <a:r>
-              <a:rPr lang="en-GB" dirty="0"/>
-              <a:t>Persistence</a:t>
-            </a:r>
-            <a:endParaRPr lang="pt-PT" dirty="0"/>
+          <p:cNvPr id="4" name="Slide Number Placeholder 3"/>
+          <p:cNvSpPr>
+            <a:spLocks noGrp="1"/>
+          </p:cNvSpPr>
+          <p:nvPr>
+            <p:ph type="sldNum" sz="quarter" idx="12"/>
+          </p:nvPr>
+        </p:nvSpPr>
+        <p:spPr/>
+        <p:txBody>
+          <a:bodyPr/>
+          <a:lstStyle/>
+          <a:p>
+            <a:fld id="{024A9932-4E76-455F-8E1A-2CC10C89B014}" type="slidenum">
+              <a:rPr lang="pt-PT" smtClean="0"/>
+              <a:pPr/>
+              <a:t>47</a:t>
+            </a:fld>
+            <a:endParaRPr lang="pt-PT"/>
           </a:p>
         </p:txBody>
       </p:sp>
       <p:pic>
         <p:nvPicPr>
-          <p:cNvPr id="8" name="Content Placeholder 7"/>
+          <p:cNvPr id="5" name="Content Placeholder 4"/>
           <p:cNvPicPr>
             <a:picLocks noGrp="1" noChangeAspect="1"/>
           </p:cNvPicPr>
           <p:nvPr>
-            <p:ph sz="half" idx="1"/>
+            <p:ph idx="4294967295"/>
           </p:nvPr>
         </p:nvPicPr>
         <p:blipFill>
@@ -9228,8 +11618,8 @@
         </p:blipFill>
         <p:spPr>
           <a:xfrm>
-            <a:off x="719572" y="1752595"/>
-            <a:ext cx="2880320" cy="4880761"/>
+            <a:off x="571500" y="-41275"/>
+            <a:ext cx="8572500" cy="6899275"/>
           </a:xfrm>
           <a:prstGeom prst="rect">
             <a:avLst/>
@@ -9238,92 +11628,79 @@
       </p:pic>
       <p:sp>
         <p:nvSpPr>
-          <p:cNvPr id="7" name="Content Placeholder 6"/>
-          <p:cNvSpPr>
-            <a:spLocks noGrp="1"/>
-          </p:cNvSpPr>
-          <p:nvPr>
-            <p:ph sz="half" idx="2"/>
-          </p:nvPr>
-        </p:nvSpPr>
-        <p:spPr/>
-        <p:txBody>
-          <a:bodyPr/>
-          <a:lstStyle/>
-          <a:p>
-            <a:r>
-              <a:rPr lang="en-GB" dirty="0"/>
-              <a:t>Separate the definition of repositories (core) from the actual implementation (</a:t>
-            </a:r>
-            <a:r>
-              <a:rPr lang="en-GB" dirty="0" err="1"/>
-              <a:t>persistence.impl</a:t>
-            </a:r>
-            <a:r>
-              <a:rPr lang="en-GB" dirty="0"/>
-              <a:t>)</a:t>
-            </a:r>
-          </a:p>
-          <a:p>
-            <a:endParaRPr lang="en-GB" dirty="0"/>
-          </a:p>
-          <a:p>
-            <a:r>
-              <a:rPr lang="en-GB" dirty="0"/>
-              <a:t>Spring will work as dependency injector (“Abstract Factory” </a:t>
-            </a:r>
-            <a:r>
-              <a:rPr lang="en-GB" dirty="0" err="1"/>
-              <a:t>GoF</a:t>
-            </a:r>
-            <a:r>
-              <a:rPr lang="en-GB" dirty="0"/>
-              <a:t> pattern)</a:t>
-            </a:r>
-          </a:p>
-          <a:p>
-            <a:endParaRPr lang="pt-PT" dirty="0"/>
-          </a:p>
-        </p:txBody>
-      </p:sp>
-      <p:sp>
-        <p:nvSpPr>
-          <p:cNvPr id="4" name="Slide Number Placeholder 3"/>
-          <p:cNvSpPr>
-            <a:spLocks noGrp="1"/>
-          </p:cNvSpPr>
-          <p:nvPr>
-            <p:ph type="sldNum" sz="quarter" idx="12"/>
-          </p:nvPr>
-        </p:nvSpPr>
-        <p:spPr/>
-        <p:txBody>
-          <a:bodyPr/>
-          <a:lstStyle/>
-          <a:p>
-            <a:fld id="{024A9932-4E76-455F-8E1A-2CC10C89B014}" type="slidenum">
-              <a:rPr lang="pt-PT" smtClean="0"/>
-              <a:pPr/>
-              <a:t>29</a:t>
-            </a:fld>
-            <a:endParaRPr lang="pt-PT"/>
+          <p:cNvPr id="2" name="Title 1"/>
+          <p:cNvSpPr>
+            <a:spLocks noGrp="1"/>
+          </p:cNvSpPr>
+          <p:nvPr>
+            <p:ph type="title" idx="4294967295"/>
+          </p:nvPr>
+        </p:nvSpPr>
+        <p:spPr>
+          <a:xfrm>
+            <a:off x="0" y="8620"/>
+            <a:ext cx="8229600" cy="1252538"/>
+          </a:xfrm>
+        </p:spPr>
+        <p:txBody>
+          <a:bodyPr/>
+          <a:lstStyle/>
+          <a:p>
+            <a:r>
+              <a:rPr lang="en-GB" dirty="0" smtClean="0">
+                <a:ln w="22225">
+                  <a:solidFill>
+                    <a:schemeClr val="accent2"/>
+                  </a:solidFill>
+                  <a:prstDash val="solid"/>
+                </a:ln>
+                <a:solidFill>
+                  <a:schemeClr val="accent2">
+                    <a:lumMod val="40000"/>
+                    <a:lumOff val="60000"/>
+                  </a:schemeClr>
+                </a:solidFill>
+              </a:rPr>
+              <a:t>Simple Persistent</a:t>
+            </a:r>
+            <a:endParaRPr lang="en-US" dirty="0">
+              <a:ln w="22225">
+                <a:solidFill>
+                  <a:schemeClr val="accent2"/>
+                </a:solidFill>
+                <a:prstDash val="solid"/>
+              </a:ln>
+              <a:solidFill>
+                <a:schemeClr val="accent2">
+                  <a:lumMod val="40000"/>
+                  <a:lumOff val="60000"/>
+                </a:schemeClr>
+              </a:solidFill>
+            </a:endParaRPr>
           </a:p>
         </p:txBody>
       </p:sp>
     </p:spTree>
     <p:extLst>
       <p:ext uri="{BB962C8B-B14F-4D97-AF65-F5344CB8AC3E}">
-        <p14:creationId xmlns:p14="http://schemas.microsoft.com/office/powerpoint/2010/main" val="3540174525"/>
+        <p14:creationId xmlns:p14="http://schemas.microsoft.com/office/powerpoint/2010/main" val="3159413259"/>
       </p:ext>
     </p:extLst>
   </p:cSld>
   <p:clrMapOvr>
     <a:masterClrMapping/>
   </p:clrMapOvr>
+  <p:timing>
+    <p:tnLst>
+      <p:par>
+        <p:cTn id="1" dur="indefinite" restart="never" nodeType="tmRoot"/>
+      </p:par>
+    </p:tnLst>
+  </p:timing>
 </p:sld>
 </file>
 
-<file path=ppt/slides/slide3.xml><?xml version="1.0" encoding="utf-8"?>
+<file path=ppt/slides/slide48.xml><?xml version="1.0" encoding="utf-8"?>
 <p:sld xmlns:a="http://schemas.openxmlformats.org/drawingml/2006/main" xmlns:r="http://schemas.openxmlformats.org/officeDocument/2006/relationships" xmlns:p="http://schemas.openxmlformats.org/presentationml/2006/main">
   <p:cSld>
     <p:spTree>
@@ -9356,10 +11733,10 @@
           <a:lstStyle/>
           <a:p>
             <a:r>
-              <a:rPr lang="en-GB" dirty="0" err="1"/>
-              <a:t>Eapli.Util</a:t>
-            </a:r>
-            <a:endParaRPr lang="en-GB" dirty="0"/>
+              <a:rPr lang="en-GB" dirty="0" smtClean="0"/>
+              <a:t>Simple Persistent</a:t>
+            </a:r>
+            <a:endParaRPr lang="en-US" dirty="0"/>
           </a:p>
         </p:txBody>
       </p:sp>
@@ -9370,121 +11747,33 @@
             <a:spLocks noGrp="1"/>
           </p:cNvSpPr>
           <p:nvPr>
-            <p:ph sz="half" idx="1"/>
-          </p:nvPr>
-        </p:nvSpPr>
-        <p:spPr/>
-        <p:txBody>
-          <a:bodyPr>
-            <a:normAutofit/>
-          </a:bodyPr>
-          <a:lstStyle/>
-          <a:p>
-            <a:r>
-              <a:rPr lang="en-GB" dirty="0"/>
-              <a:t>Console</a:t>
-            </a:r>
-          </a:p>
-          <a:p>
-            <a:pPr lvl="1"/>
-            <a:r>
-              <a:rPr lang="en-GB" dirty="0"/>
-              <a:t>Helper console reading functions</a:t>
-            </a:r>
-          </a:p>
-          <a:p>
-            <a:r>
-              <a:rPr lang="en-GB" dirty="0" err="1"/>
-              <a:t>DateTime</a:t>
-            </a:r>
-            <a:endParaRPr lang="en-GB" dirty="0"/>
-          </a:p>
-          <a:p>
-            <a:pPr lvl="1"/>
-            <a:r>
-              <a:rPr lang="en-GB" dirty="0"/>
-              <a:t>Simplifies manipulation of dates and times thru java Calendar</a:t>
-            </a:r>
-          </a:p>
-          <a:p>
-            <a:r>
-              <a:rPr lang="en-GB" dirty="0"/>
-              <a:t>Files</a:t>
-            </a:r>
-          </a:p>
-          <a:p>
-            <a:pPr lvl="1"/>
-            <a:r>
-              <a:rPr lang="en-GB" dirty="0"/>
-              <a:t>File manipulation helper</a:t>
-            </a:r>
-          </a:p>
-          <a:p>
-            <a:endParaRPr lang="en-GB" dirty="0"/>
-          </a:p>
-        </p:txBody>
-      </p:sp>
-      <p:sp>
-        <p:nvSpPr>
-          <p:cNvPr id="4" name="Content Placeholder 3"/>
-          <p:cNvSpPr>
-            <a:spLocks noGrp="1"/>
-          </p:cNvSpPr>
-          <p:nvPr>
-            <p:ph sz="half" idx="2"/>
-          </p:nvPr>
-        </p:nvSpPr>
-        <p:spPr/>
-        <p:txBody>
-          <a:bodyPr>
-            <a:normAutofit/>
-          </a:bodyPr>
-          <a:lstStyle/>
-          <a:p>
-            <a:r>
-              <a:rPr lang="en-GB" dirty="0"/>
-              <a:t>Math</a:t>
-            </a:r>
-          </a:p>
-          <a:p>
-            <a:pPr lvl="1"/>
-            <a:r>
-              <a:rPr lang="en-GB" dirty="0"/>
-              <a:t>Sample math utility</a:t>
-            </a:r>
-          </a:p>
-          <a:p>
-            <a:r>
-              <a:rPr lang="en-GB" dirty="0" err="1"/>
-              <a:t>RomanNumeral</a:t>
-            </a:r>
-            <a:endParaRPr lang="en-GB" dirty="0"/>
-          </a:p>
-          <a:p>
-            <a:pPr lvl="1"/>
-            <a:r>
-              <a:rPr lang="en-GB" dirty="0"/>
-              <a:t>Represents a decimal number as a Roman numeral</a:t>
-            </a:r>
-          </a:p>
-          <a:p>
-            <a:r>
-              <a:rPr lang="en-GB" dirty="0"/>
-              <a:t>Strings</a:t>
-            </a:r>
-          </a:p>
-          <a:p>
-            <a:pPr lvl="1"/>
-            <a:r>
-              <a:rPr lang="en-GB" dirty="0"/>
-              <a:t>String manipulation</a:t>
-            </a:r>
-          </a:p>
-        </p:txBody>
-      </p:sp>
-      <p:sp>
-        <p:nvSpPr>
-          <p:cNvPr id="5" name="Slide Number Placeholder 4"/>
+            <p:ph idx="1"/>
+          </p:nvPr>
+        </p:nvSpPr>
+        <p:spPr/>
+        <p:txBody>
+          <a:bodyPr/>
+          <a:lstStyle/>
+          <a:p>
+            <a:r>
+              <a:rPr lang="en-GB" dirty="0" smtClean="0"/>
+              <a:t>Use only via dependency injection</a:t>
+            </a:r>
+          </a:p>
+          <a:p>
+            <a:r>
+              <a:rPr lang="en-GB" dirty="0" smtClean="0"/>
+              <a:t>Domain entities must be registered in persistence.xml</a:t>
+            </a:r>
+          </a:p>
+          <a:p>
+            <a:endParaRPr lang="en-US" dirty="0"/>
+          </a:p>
+        </p:txBody>
+      </p:sp>
+      <p:sp>
+        <p:nvSpPr>
+          <p:cNvPr id="4" name="Slide Number Placeholder 3"/>
           <p:cNvSpPr>
             <a:spLocks noGrp="1"/>
           </p:cNvSpPr>
@@ -9500,7 +11789,7 @@
             <a:fld id="{024A9932-4E76-455F-8E1A-2CC10C89B014}" type="slidenum">
               <a:rPr lang="pt-PT" smtClean="0"/>
               <a:pPr/>
-              <a:t>3</a:t>
+              <a:t>48</a:t>
             </a:fld>
             <a:endParaRPr lang="pt-PT"/>
           </a:p>
@@ -9509,17 +11798,24 @@
     </p:spTree>
     <p:extLst>
       <p:ext uri="{BB962C8B-B14F-4D97-AF65-F5344CB8AC3E}">
-        <p14:creationId xmlns:p14="http://schemas.microsoft.com/office/powerpoint/2010/main" val="419243926"/>
+        <p14:creationId xmlns:p14="http://schemas.microsoft.com/office/powerpoint/2010/main" val="3162552291"/>
       </p:ext>
     </p:extLst>
   </p:cSld>
   <p:clrMapOvr>
     <a:masterClrMapping/>
   </p:clrMapOvr>
+  <p:timing>
+    <p:tnLst>
+      <p:par>
+        <p:cTn id="1" dur="indefinite" restart="never" nodeType="tmRoot"/>
+      </p:par>
+    </p:tnLst>
+  </p:timing>
 </p:sld>
 </file>
 
-<file path=ppt/slides/slide30.xml><?xml version="1.0" encoding="utf-8"?>
+<file path=ppt/slides/slide49.xml><?xml version="1.0" encoding="utf-8"?>
 <p:sld xmlns:a="http://schemas.openxmlformats.org/drawingml/2006/main" xmlns:r="http://schemas.openxmlformats.org/officeDocument/2006/relationships" xmlns:p="http://schemas.openxmlformats.org/presentationml/2006/main">
   <p:cSld>
     <p:spTree>
@@ -9538,6 +11834,44 @@
       </p:grpSpPr>
       <p:sp>
         <p:nvSpPr>
+          <p:cNvPr id="5" name="Title 4"/>
+          <p:cNvSpPr>
+            <a:spLocks noGrp="1"/>
+          </p:cNvSpPr>
+          <p:nvPr>
+            <p:ph type="title"/>
+          </p:nvPr>
+        </p:nvSpPr>
+        <p:spPr/>
+        <p:txBody>
+          <a:bodyPr/>
+          <a:lstStyle/>
+          <a:p>
+            <a:endParaRPr lang="en-US"/>
+          </a:p>
+        </p:txBody>
+      </p:sp>
+      <p:sp>
+        <p:nvSpPr>
+          <p:cNvPr id="6" name="Text Placeholder 5"/>
+          <p:cNvSpPr>
+            <a:spLocks noGrp="1"/>
+          </p:cNvSpPr>
+          <p:nvPr>
+            <p:ph type="body" idx="1"/>
+          </p:nvPr>
+        </p:nvSpPr>
+        <p:spPr/>
+        <p:txBody>
+          <a:bodyPr/>
+          <a:lstStyle/>
+          <a:p>
+            <a:endParaRPr lang="en-US"/>
+          </a:p>
+        </p:txBody>
+      </p:sp>
+      <p:sp>
+        <p:nvSpPr>
           <p:cNvPr id="4" name="Slide Number Placeholder 3"/>
           <p:cNvSpPr>
             <a:spLocks noGrp="1"/>
@@ -9554,40 +11888,16 @@
             <a:fld id="{024A9932-4E76-455F-8E1A-2CC10C89B014}" type="slidenum">
               <a:rPr lang="pt-PT" smtClean="0"/>
               <a:pPr/>
-              <a:t>30</a:t>
+              <a:t>49</a:t>
             </a:fld>
             <a:endParaRPr lang="pt-PT"/>
           </a:p>
         </p:txBody>
       </p:sp>
-      <p:pic>
-        <p:nvPicPr>
-          <p:cNvPr id="6" name="Picture 5"/>
-          <p:cNvPicPr>
-            <a:picLocks noChangeAspect="1"/>
-          </p:cNvPicPr>
-          <p:nvPr/>
-        </p:nvPicPr>
-        <p:blipFill>
-          <a:blip r:embed="rId3"/>
-          <a:stretch>
-            <a:fillRect/>
-          </a:stretch>
-        </p:blipFill>
-        <p:spPr>
-          <a:xfrm>
-            <a:off x="1115616" y="260648"/>
-            <a:ext cx="6912767" cy="6332377"/>
-          </a:xfrm>
-          <a:prstGeom prst="rect">
-            <a:avLst/>
-          </a:prstGeom>
-        </p:spPr>
-      </p:pic>
     </p:spTree>
     <p:extLst>
       <p:ext uri="{BB962C8B-B14F-4D97-AF65-F5344CB8AC3E}">
-        <p14:creationId xmlns:p14="http://schemas.microsoft.com/office/powerpoint/2010/main" val="577370424"/>
+        <p14:creationId xmlns:p14="http://schemas.microsoft.com/office/powerpoint/2010/main" val="3437654254"/>
       </p:ext>
     </p:extLst>
   </p:cSld>
@@ -9597,7 +11907,7 @@
 </p:sld>
 </file>
 
-<file path=ppt/slides/slide31.xml><?xml version="1.0" encoding="utf-8"?>
+<file path=ppt/slides/slide5.xml><?xml version="1.0" encoding="utf-8"?>
 <p:sld xmlns:a="http://schemas.openxmlformats.org/drawingml/2006/main" xmlns:r="http://schemas.openxmlformats.org/officeDocument/2006/relationships" xmlns:p="http://schemas.openxmlformats.org/presentationml/2006/main">
   <p:cSld>
     <p:spTree>
@@ -9616,7 +11926,7 @@
       </p:grpSpPr>
       <p:sp>
         <p:nvSpPr>
-          <p:cNvPr id="2" name="Title 1"/>
+          <p:cNvPr id="5" name="Title 4"/>
           <p:cNvSpPr>
             <a:spLocks noGrp="1"/>
           </p:cNvSpPr>
@@ -9626,16 +11936,37 @@
         </p:nvSpPr>
         <p:spPr/>
         <p:txBody>
-          <a:bodyPr>
-            <a:normAutofit/>
-          </a:bodyPr>
+          <a:bodyPr/>
           <a:lstStyle/>
           <a:p>
             <a:r>
               <a:rPr lang="en-GB" dirty="0"/>
-              <a:t>Example</a:t>
-            </a:r>
-            <a:endParaRPr lang="pt-PT" dirty="0"/>
+              <a:t>C</a:t>
+            </a:r>
+            <a:r>
+              <a:rPr lang="en-GB" dirty="0" smtClean="0"/>
+              <a:t>ore</a:t>
+            </a:r>
+            <a:endParaRPr lang="en-US" dirty="0"/>
+          </a:p>
+        </p:txBody>
+      </p:sp>
+      <p:sp>
+        <p:nvSpPr>
+          <p:cNvPr id="6" name="Text Placeholder 5"/>
+          <p:cNvSpPr>
+            <a:spLocks noGrp="1"/>
+          </p:cNvSpPr>
+          <p:nvPr>
+            <p:ph type="body" idx="1"/>
+          </p:nvPr>
+        </p:nvSpPr>
+        <p:spPr/>
+        <p:txBody>
+          <a:bodyPr/>
+          <a:lstStyle/>
+          <a:p>
+            <a:endParaRPr lang="en-US"/>
           </a:p>
         </p:txBody>
       </p:sp>
@@ -9657,117 +11988,16 @@
             <a:fld id="{024A9932-4E76-455F-8E1A-2CC10C89B014}" type="slidenum">
               <a:rPr lang="pt-PT" smtClean="0"/>
               <a:pPr/>
-              <a:t>31</a:t>
+              <a:t>5</a:t>
             </a:fld>
             <a:endParaRPr lang="pt-PT"/>
           </a:p>
         </p:txBody>
       </p:sp>
-      <p:pic>
-        <p:nvPicPr>
-          <p:cNvPr id="5" name="Picture 4"/>
-          <p:cNvPicPr>
-            <a:picLocks noChangeAspect="1"/>
-          </p:cNvPicPr>
-          <p:nvPr/>
-        </p:nvPicPr>
-        <p:blipFill rotWithShape="1">
-          <a:blip r:embed="rId2"/>
-          <a:srcRect t="58928"/>
-          <a:stretch/>
-        </p:blipFill>
-        <p:spPr>
-          <a:xfrm>
-            <a:off x="143508" y="1092401"/>
-            <a:ext cx="8676964" cy="1260076"/>
-          </a:xfrm>
-          <a:prstGeom prst="rect">
-            <a:avLst/>
-          </a:prstGeom>
-          <a:ln>
-            <a:noFill/>
-          </a:ln>
-          <a:effectLst>
-            <a:outerShdw blurRad="292100" dist="139700" dir="2700000" algn="tl" rotWithShape="0">
-              <a:srgbClr val="333333">
-                <a:alpha val="65000"/>
-              </a:srgbClr>
-            </a:outerShdw>
-          </a:effectLst>
-        </p:spPr>
-      </p:pic>
-      <p:pic>
-        <p:nvPicPr>
-          <p:cNvPr id="6" name="Picture 5"/>
-          <p:cNvPicPr>
-            <a:picLocks noChangeAspect="1"/>
-          </p:cNvPicPr>
-          <p:nvPr/>
-        </p:nvPicPr>
-        <p:blipFill>
-          <a:blip r:embed="rId3"/>
-          <a:stretch>
-            <a:fillRect/>
-          </a:stretch>
-        </p:blipFill>
-        <p:spPr>
-          <a:xfrm>
-            <a:off x="143508" y="2534438"/>
-            <a:ext cx="8925985" cy="1987426"/>
-          </a:xfrm>
-          <a:prstGeom prst="rect">
-            <a:avLst/>
-          </a:prstGeom>
-          <a:ln>
-            <a:noFill/>
-          </a:ln>
-          <a:effectLst>
-            <a:outerShdw blurRad="292100" dist="139700" dir="2700000" algn="tl" rotWithShape="0">
-              <a:srgbClr val="333333">
-                <a:alpha val="65000"/>
-              </a:srgbClr>
-            </a:outerShdw>
-          </a:effectLst>
-        </p:spPr>
-      </p:pic>
-      <p:pic>
-        <p:nvPicPr>
-          <p:cNvPr id="7" name="Picture 6"/>
-          <p:cNvPicPr>
-            <a:picLocks noChangeAspect="1"/>
-          </p:cNvPicPr>
-          <p:nvPr/>
-        </p:nvPicPr>
-        <p:blipFill>
-          <a:blip r:embed="rId4"/>
-          <a:stretch>
-            <a:fillRect/>
-          </a:stretch>
-        </p:blipFill>
-        <p:spPr>
-          <a:xfrm>
-            <a:off x="136953" y="4689140"/>
-            <a:ext cx="8899668" cy="2109551"/>
-          </a:xfrm>
-          <a:prstGeom prst="rect">
-            <a:avLst/>
-          </a:prstGeom>
-          <a:ln>
-            <a:noFill/>
-          </a:ln>
-          <a:effectLst>
-            <a:outerShdw blurRad="292100" dist="139700" dir="2700000" algn="tl" rotWithShape="0">
-              <a:srgbClr val="333333">
-                <a:alpha val="65000"/>
-              </a:srgbClr>
-            </a:outerShdw>
-          </a:effectLst>
-        </p:spPr>
-      </p:pic>
     </p:spTree>
     <p:extLst>
       <p:ext uri="{BB962C8B-B14F-4D97-AF65-F5344CB8AC3E}">
-        <p14:creationId xmlns:p14="http://schemas.microsoft.com/office/powerpoint/2010/main" val="3144117861"/>
+        <p14:creationId xmlns:p14="http://schemas.microsoft.com/office/powerpoint/2010/main" val="3579007156"/>
       </p:ext>
     </p:extLst>
   </p:cSld>
@@ -9777,7 +12007,7 @@
 </p:sld>
 </file>
 
-<file path=ppt/slides/slide32.xml><?xml version="1.0" encoding="utf-8"?>
+<file path=ppt/slides/slide50.xml><?xml version="1.0" encoding="utf-8"?>
 <p:sld xmlns:a="http://schemas.openxmlformats.org/drawingml/2006/main" xmlns:r="http://schemas.openxmlformats.org/officeDocument/2006/relationships" xmlns:p="http://schemas.openxmlformats.org/presentationml/2006/main">
   <p:cSld>
     <p:spTree>
@@ -9796,7 +12026,7 @@
       </p:grpSpPr>
       <p:sp>
         <p:nvSpPr>
-          <p:cNvPr id="2" name="Title 1"/>
+          <p:cNvPr id="3" name="Title 2"/>
           <p:cNvSpPr>
             <a:spLocks noGrp="1"/>
           </p:cNvSpPr>
@@ -9811,15 +12041,15 @@
           <a:p>
             <a:r>
               <a:rPr lang="en-GB" dirty="0"/>
-              <a:t>Managed repositories</a:t>
-            </a:r>
-            <a:endParaRPr lang="pt-PT" dirty="0"/>
-          </a:p>
-        </p:txBody>
-      </p:sp>
-      <p:sp>
-        <p:nvSpPr>
-          <p:cNvPr id="3" name="Content Placeholder 2"/>
+              <a:t>Build</a:t>
+            </a:r>
+            <a:endParaRPr lang="en-US" dirty="0"/>
+          </a:p>
+        </p:txBody>
+      </p:sp>
+      <p:sp>
+        <p:nvSpPr>
+          <p:cNvPr id="4" name="Content Placeholder 3"/>
           <p:cNvSpPr>
             <a:spLocks noGrp="1"/>
           </p:cNvSpPr>
@@ -9833,33 +12063,75 @@
           <a:lstStyle/>
           <a:p>
             <a:r>
-              <a:rPr lang="pt-PT" dirty="0"/>
-              <a:t>Since we are using Spring Framework</a:t>
+              <a:rPr lang="en-GB" dirty="0"/>
+              <a:t>Maven</a:t>
             </a:r>
           </a:p>
           <a:p>
             <a:pPr lvl="1"/>
             <a:r>
-              <a:rPr lang="pt-PT" dirty="0"/>
-              <a:t>Spring will load the repositories</a:t>
+              <a:rPr lang="en-GB" dirty="0"/>
+              <a:t>Dependency manager</a:t>
             </a:r>
           </a:p>
           <a:p>
             <a:pPr lvl="1"/>
             <a:r>
-              <a:rPr lang="pt-PT" dirty="0"/>
-              <a:t>Spring will control the transactional context</a:t>
+              <a:rPr lang="en-GB" dirty="0" err="1"/>
+              <a:t>Artifact</a:t>
+            </a:r>
+            <a:r>
+              <a:rPr lang="en-GB" dirty="0"/>
+              <a:t> (jar) repository </a:t>
             </a:r>
           </a:p>
           <a:p>
             <a:pPr lvl="1"/>
-            <a:endParaRPr lang="pt-PT" dirty="0"/>
-          </a:p>
-        </p:txBody>
-      </p:sp>
-      <p:sp>
-        <p:nvSpPr>
-          <p:cNvPr id="4" name="Slide Number Placeholder 3"/>
+            <a:r>
+              <a:rPr lang="en-GB" dirty="0"/>
+              <a:t>Build automation</a:t>
+            </a:r>
+          </a:p>
+          <a:p>
+            <a:pPr lvl="1"/>
+            <a:r>
+              <a:rPr lang="en-GB" dirty="0"/>
+              <a:t>Other tasks, e.g., deploy, run</a:t>
+            </a:r>
+          </a:p>
+          <a:p>
+            <a:r>
+              <a:rPr lang="en-GB" dirty="0"/>
+              <a:t>Works for Eclipse, </a:t>
+            </a:r>
+            <a:r>
+              <a:rPr lang="en-GB" dirty="0" err="1"/>
+              <a:t>InteliJ</a:t>
+            </a:r>
+            <a:r>
+              <a:rPr lang="en-GB" dirty="0"/>
+              <a:t>, </a:t>
+            </a:r>
+            <a:r>
+              <a:rPr lang="en-GB" dirty="0" err="1"/>
+              <a:t>Netbeans</a:t>
+            </a:r>
+            <a:endParaRPr lang="en-GB" dirty="0"/>
+          </a:p>
+          <a:p>
+            <a:r>
+              <a:rPr lang="en-GB" dirty="0"/>
+              <a:t>Pom.xml</a:t>
+            </a:r>
+          </a:p>
+          <a:p>
+            <a:endParaRPr lang="en-US" dirty="0"/>
+          </a:p>
+        </p:txBody>
+      </p:sp>
+      <p:sp>
+        <p:nvSpPr>
+          <p:cNvPr id="2" name="Slide Number Placeholder 1"/>
           <p:cNvSpPr>
             <a:spLocks noGrp="1"/>
           </p:cNvSpPr>
@@ -9875,7 +12147,7 @@
             <a:fld id="{024A9932-4E76-455F-8E1A-2CC10C89B014}" type="slidenum">
               <a:rPr lang="pt-PT" smtClean="0"/>
               <a:pPr/>
-              <a:t>32</a:t>
+              <a:t>50</a:t>
             </a:fld>
             <a:endParaRPr lang="pt-PT"/>
           </a:p>
@@ -9884,20 +12156,17 @@
     </p:spTree>
     <p:extLst>
       <p:ext uri="{BB962C8B-B14F-4D97-AF65-F5344CB8AC3E}">
-        <p14:creationId xmlns:p14="http://schemas.microsoft.com/office/powerpoint/2010/main" val="240977563"/>
+        <p14:creationId xmlns:p14="http://schemas.microsoft.com/office/powerpoint/2010/main" val="3878863745"/>
       </p:ext>
     </p:extLst>
   </p:cSld>
   <p:clrMapOvr>
     <a:masterClrMapping/>
   </p:clrMapOvr>
-  <p:transition spd="med">
-    <p:fade/>
-  </p:transition>
 </p:sld>
 </file>
 
-<file path=ppt/slides/slide33.xml><?xml version="1.0" encoding="utf-8"?>
+<file path=ppt/slides/slide51.xml><?xml version="1.0" encoding="utf-8"?>
 <p:sld xmlns:a="http://schemas.openxmlformats.org/drawingml/2006/main" xmlns:r="http://schemas.openxmlformats.org/officeDocument/2006/relationships" xmlns:p="http://schemas.openxmlformats.org/presentationml/2006/main">
   <p:cSld>
     <p:spTree>
@@ -9926,15 +12195,29 @@
         </p:nvSpPr>
         <p:spPr/>
         <p:txBody>
-          <a:bodyPr>
-            <a:noAutofit/>
-          </a:bodyPr>
-          <a:lstStyle/>
-          <a:p>
-            <a:r>
-              <a:rPr lang="pt-PT" sz="2800" dirty="0"/>
-              <a:t>All JPA repositories extend JpaBaseRepository to use spring transactional control</a:t>
-            </a:r>
+          <a:bodyPr/>
+          <a:lstStyle/>
+          <a:p>
+            <a:endParaRPr lang="en-US"/>
+          </a:p>
+        </p:txBody>
+      </p:sp>
+      <p:sp>
+        <p:nvSpPr>
+          <p:cNvPr id="3" name="Content Placeholder 2"/>
+          <p:cNvSpPr>
+            <a:spLocks noGrp="1"/>
+          </p:cNvSpPr>
+          <p:nvPr>
+            <p:ph idx="1"/>
+          </p:nvPr>
+        </p:nvSpPr>
+        <p:spPr/>
+        <p:txBody>
+          <a:bodyPr/>
+          <a:lstStyle/>
+          <a:p>
+            <a:endParaRPr lang="en-US"/>
           </a:p>
         </p:txBody>
       </p:sp>
@@ -9956,1030 +12239,7 @@
             <a:fld id="{024A9932-4E76-455F-8E1A-2CC10C89B014}" type="slidenum">
               <a:rPr lang="pt-PT" smtClean="0"/>
               <a:pPr/>
-              <a:t>33</a:t>
-            </a:fld>
-            <a:endParaRPr lang="pt-PT"/>
-          </a:p>
-        </p:txBody>
-      </p:sp>
-      <p:pic>
-        <p:nvPicPr>
-          <p:cNvPr id="6" name="Picture 5"/>
-          <p:cNvPicPr>
-            <a:picLocks noChangeAspect="1"/>
-          </p:cNvPicPr>
-          <p:nvPr/>
-        </p:nvPicPr>
-        <p:blipFill>
-          <a:blip r:embed="rId2"/>
-          <a:stretch>
-            <a:fillRect/>
-          </a:stretch>
-        </p:blipFill>
-        <p:spPr>
-          <a:xfrm>
-            <a:off x="287524" y="1808820"/>
-            <a:ext cx="7019925" cy="1981200"/>
-          </a:xfrm>
-          <a:prstGeom prst="rect">
-            <a:avLst/>
-          </a:prstGeom>
-          <a:ln>
-            <a:noFill/>
-          </a:ln>
-          <a:effectLst>
-            <a:outerShdw blurRad="292100" dist="139700" dir="2700000" algn="tl" rotWithShape="0">
-              <a:srgbClr val="333333">
-                <a:alpha val="65000"/>
-              </a:srgbClr>
-            </a:outerShdw>
-          </a:effectLst>
-        </p:spPr>
-      </p:pic>
-      <p:pic>
-        <p:nvPicPr>
-          <p:cNvPr id="7" name="Picture 6"/>
-          <p:cNvPicPr>
-            <a:picLocks noChangeAspect="1"/>
-          </p:cNvPicPr>
-          <p:nvPr/>
-        </p:nvPicPr>
-        <p:blipFill>
-          <a:blip r:embed="rId3"/>
-          <a:stretch>
-            <a:fillRect/>
-          </a:stretch>
-        </p:blipFill>
-        <p:spPr>
-          <a:xfrm>
-            <a:off x="2473103" y="4293096"/>
-            <a:ext cx="6105525" cy="1943100"/>
-          </a:xfrm>
-          <a:prstGeom prst="rect">
-            <a:avLst/>
-          </a:prstGeom>
-          <a:ln>
-            <a:noFill/>
-          </a:ln>
-          <a:effectLst>
-            <a:outerShdw blurRad="292100" dist="139700" dir="2700000" algn="tl" rotWithShape="0">
-              <a:srgbClr val="333333">
-                <a:alpha val="65000"/>
-              </a:srgbClr>
-            </a:outerShdw>
-          </a:effectLst>
-        </p:spPr>
-      </p:pic>
-      <p:sp>
-        <p:nvSpPr>
-          <p:cNvPr id="8" name="Right Arrow 7"/>
-          <p:cNvSpPr/>
-          <p:nvPr/>
-        </p:nvSpPr>
-        <p:spPr>
-          <a:xfrm rot="11334279">
-            <a:off x="4229963" y="3264185"/>
-            <a:ext cx="684076" cy="288032"/>
-          </a:xfrm>
-          <a:prstGeom prst="rightArrow">
-            <a:avLst/>
-          </a:prstGeom>
-        </p:spPr>
-        <p:style>
-          <a:lnRef idx="2">
-            <a:schemeClr val="accent1">
-              <a:shade val="50000"/>
-            </a:schemeClr>
-          </a:lnRef>
-          <a:fillRef idx="1">
-            <a:schemeClr val="accent1"/>
-          </a:fillRef>
-          <a:effectRef idx="0">
-            <a:schemeClr val="accent1"/>
-          </a:effectRef>
-          <a:fontRef idx="minor">
-            <a:schemeClr val="lt1"/>
-          </a:fontRef>
-        </p:style>
-        <p:txBody>
-          <a:bodyPr rtlCol="0" anchor="ctr"/>
-          <a:lstStyle/>
-          <a:p>
-            <a:pPr algn="ctr"/>
-            <a:endParaRPr lang="en-US"/>
-          </a:p>
-        </p:txBody>
-      </p:sp>
-      <p:sp>
-        <p:nvSpPr>
-          <p:cNvPr id="9" name="Right Arrow 8"/>
-          <p:cNvSpPr/>
-          <p:nvPr/>
-        </p:nvSpPr>
-        <p:spPr>
-          <a:xfrm rot="21438638">
-            <a:off x="2480537" y="4561015"/>
-            <a:ext cx="684076" cy="288032"/>
-          </a:xfrm>
-          <a:prstGeom prst="rightArrow">
-            <a:avLst/>
-          </a:prstGeom>
-        </p:spPr>
-        <p:style>
-          <a:lnRef idx="2">
-            <a:schemeClr val="accent1">
-              <a:shade val="50000"/>
-            </a:schemeClr>
-          </a:lnRef>
-          <a:fillRef idx="1">
-            <a:schemeClr val="accent1"/>
-          </a:fillRef>
-          <a:effectRef idx="0">
-            <a:schemeClr val="accent1"/>
-          </a:effectRef>
-          <a:fontRef idx="minor">
-            <a:schemeClr val="lt1"/>
-          </a:fontRef>
-        </p:style>
-        <p:txBody>
-          <a:bodyPr rtlCol="0" anchor="ctr"/>
-          <a:lstStyle/>
-          <a:p>
-            <a:pPr algn="ctr"/>
-            <a:endParaRPr lang="en-US"/>
-          </a:p>
-        </p:txBody>
-      </p:sp>
-    </p:spTree>
-    <p:extLst>
-      <p:ext uri="{BB962C8B-B14F-4D97-AF65-F5344CB8AC3E}">
-        <p14:creationId xmlns:p14="http://schemas.microsoft.com/office/powerpoint/2010/main" val="1751129927"/>
-      </p:ext>
-    </p:extLst>
-  </p:cSld>
-  <p:clrMapOvr>
-    <a:masterClrMapping/>
-  </p:clrMapOvr>
-  <p:transition spd="med">
-    <p:fade/>
-  </p:transition>
-</p:sld>
-</file>
-
-<file path=ppt/slides/slide34.xml><?xml version="1.0" encoding="utf-8"?>
-<p:sld xmlns:a="http://schemas.openxmlformats.org/drawingml/2006/main" xmlns:r="http://schemas.openxmlformats.org/officeDocument/2006/relationships" xmlns:p="http://schemas.openxmlformats.org/presentationml/2006/main">
-  <p:cSld>
-    <p:spTree>
-      <p:nvGrpSpPr>
-        <p:cNvPr id="1" name=""/>
-        <p:cNvGrpSpPr/>
-        <p:nvPr/>
-      </p:nvGrpSpPr>
-      <p:grpSpPr>
-        <a:xfrm>
-          <a:off x="0" y="0"/>
-          <a:ext cx="0" cy="0"/>
-          <a:chOff x="0" y="0"/>
-          <a:chExt cx="0" cy="0"/>
-        </a:xfrm>
-      </p:grpSpPr>
-      <p:sp>
-        <p:nvSpPr>
-          <p:cNvPr id="2" name="Title 1"/>
-          <p:cNvSpPr>
-            <a:spLocks noGrp="1"/>
-          </p:cNvSpPr>
-          <p:nvPr>
-            <p:ph type="title"/>
-          </p:nvPr>
-        </p:nvSpPr>
-        <p:spPr/>
-        <p:txBody>
-          <a:bodyPr/>
-          <a:lstStyle/>
-          <a:p>
-            <a:r>
-              <a:rPr lang="en-GB" dirty="0"/>
-              <a:t>Spring Transactional control</a:t>
-            </a:r>
-            <a:endParaRPr lang="en-US" dirty="0"/>
-          </a:p>
-        </p:txBody>
-      </p:sp>
-      <p:sp>
-        <p:nvSpPr>
-          <p:cNvPr id="4" name="Slide Number Placeholder 3"/>
-          <p:cNvSpPr>
-            <a:spLocks noGrp="1"/>
-          </p:cNvSpPr>
-          <p:nvPr>
-            <p:ph type="sldNum" sz="quarter" idx="12"/>
-          </p:nvPr>
-        </p:nvSpPr>
-        <p:spPr/>
-        <p:txBody>
-          <a:bodyPr/>
-          <a:lstStyle/>
-          <a:p>
-            <a:fld id="{024A9932-4E76-455F-8E1A-2CC10C89B014}" type="slidenum">
-              <a:rPr lang="pt-PT" smtClean="0"/>
-              <a:pPr/>
-              <a:t>34</a:t>
-            </a:fld>
-            <a:endParaRPr lang="pt-PT"/>
-          </a:p>
-        </p:txBody>
-      </p:sp>
-      <p:pic>
-        <p:nvPicPr>
-          <p:cNvPr id="5" name="Picture 4"/>
-          <p:cNvPicPr>
-            <a:picLocks noChangeAspect="1"/>
-          </p:cNvPicPr>
-          <p:nvPr/>
-        </p:nvPicPr>
-        <p:blipFill>
-          <a:blip r:embed="rId2"/>
-          <a:stretch>
-            <a:fillRect/>
-          </a:stretch>
-        </p:blipFill>
-        <p:spPr>
-          <a:xfrm>
-            <a:off x="59055" y="1529122"/>
-            <a:ext cx="8753475" cy="1914525"/>
-          </a:xfrm>
-          <a:prstGeom prst="rect">
-            <a:avLst/>
-          </a:prstGeom>
-          <a:ln>
-            <a:noFill/>
-          </a:ln>
-          <a:effectLst>
-            <a:outerShdw blurRad="292100" dist="139700" dir="2700000" algn="tl" rotWithShape="0">
-              <a:srgbClr val="333333">
-                <a:alpha val="65000"/>
-              </a:srgbClr>
-            </a:outerShdw>
-          </a:effectLst>
-        </p:spPr>
-      </p:pic>
-      <p:pic>
-        <p:nvPicPr>
-          <p:cNvPr id="6" name="Picture 5"/>
-          <p:cNvPicPr>
-            <a:picLocks noChangeAspect="1"/>
-          </p:cNvPicPr>
-          <p:nvPr/>
-        </p:nvPicPr>
-        <p:blipFill>
-          <a:blip r:embed="rId3"/>
-          <a:stretch>
-            <a:fillRect/>
-          </a:stretch>
-        </p:blipFill>
-        <p:spPr>
-          <a:xfrm>
-            <a:off x="1612143" y="3633345"/>
-            <a:ext cx="7172325" cy="3009900"/>
-          </a:xfrm>
-          <a:prstGeom prst="rect">
-            <a:avLst/>
-          </a:prstGeom>
-          <a:ln>
-            <a:noFill/>
-          </a:ln>
-          <a:effectLst>
-            <a:outerShdw blurRad="292100" dist="139700" dir="2700000" algn="tl" rotWithShape="0">
-              <a:srgbClr val="333333">
-                <a:alpha val="65000"/>
-              </a:srgbClr>
-            </a:outerShdw>
-          </a:effectLst>
-        </p:spPr>
-      </p:pic>
-      <p:sp>
-        <p:nvSpPr>
-          <p:cNvPr id="7" name="Right Arrow 6"/>
-          <p:cNvSpPr/>
-          <p:nvPr/>
-        </p:nvSpPr>
-        <p:spPr>
-          <a:xfrm rot="20879346">
-            <a:off x="1390125" y="4816307"/>
-            <a:ext cx="684076" cy="288032"/>
-          </a:xfrm>
-          <a:prstGeom prst="rightArrow">
-            <a:avLst/>
-          </a:prstGeom>
-        </p:spPr>
-        <p:style>
-          <a:lnRef idx="2">
-            <a:schemeClr val="accent1">
-              <a:shade val="50000"/>
-            </a:schemeClr>
-          </a:lnRef>
-          <a:fillRef idx="1">
-            <a:schemeClr val="accent1"/>
-          </a:fillRef>
-          <a:effectRef idx="0">
-            <a:schemeClr val="accent1"/>
-          </a:effectRef>
-          <a:fontRef idx="minor">
-            <a:schemeClr val="lt1"/>
-          </a:fontRef>
-        </p:style>
-        <p:txBody>
-          <a:bodyPr rtlCol="0" anchor="ctr"/>
-          <a:lstStyle/>
-          <a:p>
-            <a:pPr algn="ctr"/>
-            <a:endParaRPr lang="en-US"/>
-          </a:p>
-        </p:txBody>
-      </p:sp>
-    </p:spTree>
-    <p:extLst>
-      <p:ext uri="{BB962C8B-B14F-4D97-AF65-F5344CB8AC3E}">
-        <p14:creationId xmlns:p14="http://schemas.microsoft.com/office/powerpoint/2010/main" val="3793707585"/>
-      </p:ext>
-    </p:extLst>
-  </p:cSld>
-  <p:clrMapOvr>
-    <a:masterClrMapping/>
-  </p:clrMapOvr>
-</p:sld>
-</file>
-
-<file path=ppt/slides/slide35.xml><?xml version="1.0" encoding="utf-8"?>
-<p:sld xmlns:a="http://schemas.openxmlformats.org/drawingml/2006/main" xmlns:r="http://schemas.openxmlformats.org/officeDocument/2006/relationships" xmlns:p="http://schemas.openxmlformats.org/presentationml/2006/main">
-  <p:cSld>
-    <p:spTree>
-      <p:nvGrpSpPr>
-        <p:cNvPr id="1" name=""/>
-        <p:cNvGrpSpPr/>
-        <p:nvPr/>
-      </p:nvGrpSpPr>
-      <p:grpSpPr>
-        <a:xfrm>
-          <a:off x="0" y="0"/>
-          <a:ext cx="0" cy="0"/>
-          <a:chOff x="0" y="0"/>
-          <a:chExt cx="0" cy="0"/>
-        </a:xfrm>
-      </p:grpSpPr>
-      <p:sp>
-        <p:nvSpPr>
-          <p:cNvPr id="2" name="Title 1"/>
-          <p:cNvSpPr>
-            <a:spLocks noGrp="1"/>
-          </p:cNvSpPr>
-          <p:nvPr>
-            <p:ph type="title"/>
-          </p:nvPr>
-        </p:nvSpPr>
-        <p:spPr/>
-        <p:txBody>
-          <a:bodyPr/>
-          <a:lstStyle/>
-          <a:p>
-            <a:r>
-              <a:rPr lang="en-GB" dirty="0" err="1"/>
-              <a:t>SpringData</a:t>
-            </a:r>
-            <a:r>
-              <a:rPr lang="en-GB" dirty="0"/>
-              <a:t> repositories (1)</a:t>
-            </a:r>
-            <a:endParaRPr lang="en-US" dirty="0"/>
-          </a:p>
-        </p:txBody>
-      </p:sp>
-      <p:sp>
-        <p:nvSpPr>
-          <p:cNvPr id="4" name="Slide Number Placeholder 3"/>
-          <p:cNvSpPr>
-            <a:spLocks noGrp="1"/>
-          </p:cNvSpPr>
-          <p:nvPr>
-            <p:ph type="sldNum" sz="quarter" idx="12"/>
-          </p:nvPr>
-        </p:nvSpPr>
-        <p:spPr/>
-        <p:txBody>
-          <a:bodyPr/>
-          <a:lstStyle/>
-          <a:p>
-            <a:fld id="{024A9932-4E76-455F-8E1A-2CC10C89B014}" type="slidenum">
-              <a:rPr lang="pt-PT" smtClean="0"/>
-              <a:pPr/>
-              <a:t>35</a:t>
-            </a:fld>
-            <a:endParaRPr lang="pt-PT"/>
-          </a:p>
-        </p:txBody>
-      </p:sp>
-      <p:pic>
-        <p:nvPicPr>
-          <p:cNvPr id="5" name="Picture 4"/>
-          <p:cNvPicPr>
-            <a:picLocks noChangeAspect="1"/>
-          </p:cNvPicPr>
-          <p:nvPr/>
-        </p:nvPicPr>
-        <p:blipFill>
-          <a:blip r:embed="rId2"/>
-          <a:stretch>
-            <a:fillRect/>
-          </a:stretch>
-        </p:blipFill>
-        <p:spPr>
-          <a:xfrm>
-            <a:off x="287524" y="1670875"/>
-            <a:ext cx="7677150" cy="1514475"/>
-          </a:xfrm>
-          <a:prstGeom prst="rect">
-            <a:avLst/>
-          </a:prstGeom>
-          <a:ln>
-            <a:noFill/>
-          </a:ln>
-          <a:effectLst>
-            <a:outerShdw blurRad="292100" dist="139700" dir="2700000" algn="tl" rotWithShape="0">
-              <a:srgbClr val="333333">
-                <a:alpha val="65000"/>
-              </a:srgbClr>
-            </a:outerShdw>
-          </a:effectLst>
-        </p:spPr>
-      </p:pic>
-      <p:pic>
-        <p:nvPicPr>
-          <p:cNvPr id="6" name="Picture 5"/>
-          <p:cNvPicPr>
-            <a:picLocks noChangeAspect="1"/>
-          </p:cNvPicPr>
-          <p:nvPr/>
-        </p:nvPicPr>
-        <p:blipFill>
-          <a:blip r:embed="rId3"/>
-          <a:stretch>
-            <a:fillRect/>
-          </a:stretch>
-        </p:blipFill>
-        <p:spPr>
-          <a:xfrm>
-            <a:off x="1514475" y="3861048"/>
-            <a:ext cx="7172325" cy="2324100"/>
-          </a:xfrm>
-          <a:prstGeom prst="rect">
-            <a:avLst/>
-          </a:prstGeom>
-          <a:ln>
-            <a:noFill/>
-          </a:ln>
-          <a:effectLst>
-            <a:outerShdw blurRad="292100" dist="139700" dir="2700000" algn="tl" rotWithShape="0">
-              <a:srgbClr val="333333">
-                <a:alpha val="65000"/>
-              </a:srgbClr>
-            </a:outerShdw>
-          </a:effectLst>
-        </p:spPr>
-      </p:pic>
-      <p:sp>
-        <p:nvSpPr>
-          <p:cNvPr id="7" name="Right Arrow 6"/>
-          <p:cNvSpPr/>
-          <p:nvPr/>
-        </p:nvSpPr>
-        <p:spPr>
-          <a:xfrm rot="20879346">
-            <a:off x="1547353" y="4289113"/>
-            <a:ext cx="684076" cy="288032"/>
-          </a:xfrm>
-          <a:prstGeom prst="rightArrow">
-            <a:avLst/>
-          </a:prstGeom>
-        </p:spPr>
-        <p:style>
-          <a:lnRef idx="2">
-            <a:schemeClr val="accent1">
-              <a:shade val="50000"/>
-            </a:schemeClr>
-          </a:lnRef>
-          <a:fillRef idx="1">
-            <a:schemeClr val="accent1"/>
-          </a:fillRef>
-          <a:effectRef idx="0">
-            <a:schemeClr val="accent1"/>
-          </a:effectRef>
-          <a:fontRef idx="minor">
-            <a:schemeClr val="lt1"/>
-          </a:fontRef>
-        </p:style>
-        <p:txBody>
-          <a:bodyPr rtlCol="0" anchor="ctr"/>
-          <a:lstStyle/>
-          <a:p>
-            <a:pPr algn="ctr"/>
-            <a:endParaRPr lang="en-US"/>
-          </a:p>
-        </p:txBody>
-      </p:sp>
-    </p:spTree>
-    <p:extLst>
-      <p:ext uri="{BB962C8B-B14F-4D97-AF65-F5344CB8AC3E}">
-        <p14:creationId xmlns:p14="http://schemas.microsoft.com/office/powerpoint/2010/main" val="393082300"/>
-      </p:ext>
-    </p:extLst>
-  </p:cSld>
-  <p:clrMapOvr>
-    <a:masterClrMapping/>
-  </p:clrMapOvr>
-</p:sld>
-</file>
-
-<file path=ppt/slides/slide36.xml><?xml version="1.0" encoding="utf-8"?>
-<p:sld xmlns:a="http://schemas.openxmlformats.org/drawingml/2006/main" xmlns:r="http://schemas.openxmlformats.org/officeDocument/2006/relationships" xmlns:p="http://schemas.openxmlformats.org/presentationml/2006/main">
-  <p:cSld>
-    <p:spTree>
-      <p:nvGrpSpPr>
-        <p:cNvPr id="1" name=""/>
-        <p:cNvGrpSpPr/>
-        <p:nvPr/>
-      </p:nvGrpSpPr>
-      <p:grpSpPr>
-        <a:xfrm>
-          <a:off x="0" y="0"/>
-          <a:ext cx="0" cy="0"/>
-          <a:chOff x="0" y="0"/>
-          <a:chExt cx="0" cy="0"/>
-        </a:xfrm>
-      </p:grpSpPr>
-      <p:sp>
-        <p:nvSpPr>
-          <p:cNvPr id="2" name="Title 1"/>
-          <p:cNvSpPr>
-            <a:spLocks noGrp="1"/>
-          </p:cNvSpPr>
-          <p:nvPr>
-            <p:ph type="title"/>
-          </p:nvPr>
-        </p:nvSpPr>
-        <p:spPr/>
-        <p:txBody>
-          <a:bodyPr/>
-          <a:lstStyle/>
-          <a:p>
-            <a:r>
-              <a:rPr lang="en-GB" dirty="0" err="1"/>
-              <a:t>SpringData</a:t>
-            </a:r>
-            <a:r>
-              <a:rPr lang="en-GB" dirty="0"/>
-              <a:t> repositories (2)</a:t>
-            </a:r>
-            <a:endParaRPr lang="en-US" dirty="0"/>
-          </a:p>
-        </p:txBody>
-      </p:sp>
-      <p:sp>
-        <p:nvSpPr>
-          <p:cNvPr id="4" name="Slide Number Placeholder 3"/>
-          <p:cNvSpPr>
-            <a:spLocks noGrp="1"/>
-          </p:cNvSpPr>
-          <p:nvPr>
-            <p:ph type="sldNum" sz="quarter" idx="12"/>
-          </p:nvPr>
-        </p:nvSpPr>
-        <p:spPr/>
-        <p:txBody>
-          <a:bodyPr/>
-          <a:lstStyle/>
-          <a:p>
-            <a:fld id="{024A9932-4E76-455F-8E1A-2CC10C89B014}" type="slidenum">
-              <a:rPr lang="pt-PT" smtClean="0"/>
-              <a:pPr/>
-              <a:t>36</a:t>
-            </a:fld>
-            <a:endParaRPr lang="pt-PT"/>
-          </a:p>
-        </p:txBody>
-      </p:sp>
-      <p:pic>
-        <p:nvPicPr>
-          <p:cNvPr id="8" name="Picture 7"/>
-          <p:cNvPicPr>
-            <a:picLocks noChangeAspect="1"/>
-          </p:cNvPicPr>
-          <p:nvPr/>
-        </p:nvPicPr>
-        <p:blipFill>
-          <a:blip r:embed="rId2"/>
-          <a:stretch>
-            <a:fillRect/>
-          </a:stretch>
-        </p:blipFill>
-        <p:spPr>
-          <a:xfrm>
-            <a:off x="995362" y="1458072"/>
-            <a:ext cx="7153275" cy="5010150"/>
-          </a:xfrm>
-          <a:prstGeom prst="rect">
-            <a:avLst/>
-          </a:prstGeom>
-          <a:ln>
-            <a:noFill/>
-          </a:ln>
-          <a:effectLst>
-            <a:outerShdw blurRad="292100" dist="139700" dir="2700000" algn="tl" rotWithShape="0">
-              <a:srgbClr val="333333">
-                <a:alpha val="65000"/>
-              </a:srgbClr>
-            </a:outerShdw>
-          </a:effectLst>
-        </p:spPr>
-      </p:pic>
-      <p:sp>
-        <p:nvSpPr>
-          <p:cNvPr id="7" name="Right Arrow 6"/>
-          <p:cNvSpPr/>
-          <p:nvPr/>
-        </p:nvSpPr>
-        <p:spPr>
-          <a:xfrm rot="11911389">
-            <a:off x="4589232" y="5222389"/>
-            <a:ext cx="684076" cy="288032"/>
-          </a:xfrm>
-          <a:prstGeom prst="rightArrow">
-            <a:avLst/>
-          </a:prstGeom>
-        </p:spPr>
-        <p:style>
-          <a:lnRef idx="2">
-            <a:schemeClr val="accent1">
-              <a:shade val="50000"/>
-            </a:schemeClr>
-          </a:lnRef>
-          <a:fillRef idx="1">
-            <a:schemeClr val="accent1"/>
-          </a:fillRef>
-          <a:effectRef idx="0">
-            <a:schemeClr val="accent1"/>
-          </a:effectRef>
-          <a:fontRef idx="minor">
-            <a:schemeClr val="lt1"/>
-          </a:fontRef>
-        </p:style>
-        <p:txBody>
-          <a:bodyPr rtlCol="0" anchor="ctr"/>
-          <a:lstStyle/>
-          <a:p>
-            <a:pPr algn="ctr"/>
-            <a:endParaRPr lang="en-US"/>
-          </a:p>
-        </p:txBody>
-      </p:sp>
-    </p:spTree>
-    <p:extLst>
-      <p:ext uri="{BB962C8B-B14F-4D97-AF65-F5344CB8AC3E}">
-        <p14:creationId xmlns:p14="http://schemas.microsoft.com/office/powerpoint/2010/main" val="1420527429"/>
-      </p:ext>
-    </p:extLst>
-  </p:cSld>
-  <p:clrMapOvr>
-    <a:masterClrMapping/>
-  </p:clrMapOvr>
-</p:sld>
-</file>
-
-<file path=ppt/slides/slide37.xml><?xml version="1.0" encoding="utf-8"?>
-<p:sld xmlns:a="http://schemas.openxmlformats.org/drawingml/2006/main" xmlns:r="http://schemas.openxmlformats.org/officeDocument/2006/relationships" xmlns:p="http://schemas.openxmlformats.org/presentationml/2006/main">
-  <p:cSld>
-    <p:spTree>
-      <p:nvGrpSpPr>
-        <p:cNvPr id="1" name=""/>
-        <p:cNvGrpSpPr/>
-        <p:nvPr/>
-      </p:nvGrpSpPr>
-      <p:grpSpPr>
-        <a:xfrm>
-          <a:off x="0" y="0"/>
-          <a:ext cx="0" cy="0"/>
-          <a:chOff x="0" y="0"/>
-          <a:chExt cx="0" cy="0"/>
-        </a:xfrm>
-      </p:grpSpPr>
-      <p:sp>
-        <p:nvSpPr>
-          <p:cNvPr id="5" name="Title 4"/>
-          <p:cNvSpPr>
-            <a:spLocks noGrp="1"/>
-          </p:cNvSpPr>
-          <p:nvPr>
-            <p:ph type="title"/>
-          </p:nvPr>
-        </p:nvSpPr>
-        <p:spPr/>
-        <p:txBody>
-          <a:bodyPr/>
-          <a:lstStyle/>
-          <a:p>
-            <a:endParaRPr lang="en-US"/>
-          </a:p>
-        </p:txBody>
-      </p:sp>
-      <p:sp>
-        <p:nvSpPr>
-          <p:cNvPr id="6" name="Text Placeholder 5"/>
-          <p:cNvSpPr>
-            <a:spLocks noGrp="1"/>
-          </p:cNvSpPr>
-          <p:nvPr>
-            <p:ph type="body" idx="1"/>
-          </p:nvPr>
-        </p:nvSpPr>
-        <p:spPr/>
-        <p:txBody>
-          <a:bodyPr/>
-          <a:lstStyle/>
-          <a:p>
-            <a:endParaRPr lang="en-US"/>
-          </a:p>
-        </p:txBody>
-      </p:sp>
-      <p:sp>
-        <p:nvSpPr>
-          <p:cNvPr id="4" name="Slide Number Placeholder 3"/>
-          <p:cNvSpPr>
-            <a:spLocks noGrp="1"/>
-          </p:cNvSpPr>
-          <p:nvPr>
-            <p:ph type="sldNum" sz="quarter" idx="12"/>
-          </p:nvPr>
-        </p:nvSpPr>
-        <p:spPr/>
-        <p:txBody>
-          <a:bodyPr/>
-          <a:lstStyle/>
-          <a:p>
-            <a:fld id="{024A9932-4E76-455F-8E1A-2CC10C89B014}" type="slidenum">
-              <a:rPr lang="pt-PT" smtClean="0"/>
-              <a:pPr/>
-              <a:t>37</a:t>
-            </a:fld>
-            <a:endParaRPr lang="pt-PT"/>
-          </a:p>
-        </p:txBody>
-      </p:sp>
-    </p:spTree>
-    <p:extLst>
-      <p:ext uri="{BB962C8B-B14F-4D97-AF65-F5344CB8AC3E}">
-        <p14:creationId xmlns:p14="http://schemas.microsoft.com/office/powerpoint/2010/main" val="3437654254"/>
-      </p:ext>
-    </p:extLst>
-  </p:cSld>
-  <p:clrMapOvr>
-    <a:masterClrMapping/>
-  </p:clrMapOvr>
-</p:sld>
-</file>
-
-<file path=ppt/slides/slide38.xml><?xml version="1.0" encoding="utf-8"?>
-<p:sld xmlns:a="http://schemas.openxmlformats.org/drawingml/2006/main" xmlns:r="http://schemas.openxmlformats.org/officeDocument/2006/relationships" xmlns:p="http://schemas.openxmlformats.org/presentationml/2006/main">
-  <p:cSld>
-    <p:spTree>
-      <p:nvGrpSpPr>
-        <p:cNvPr id="1" name=""/>
-        <p:cNvGrpSpPr/>
-        <p:nvPr/>
-      </p:nvGrpSpPr>
-      <p:grpSpPr>
-        <a:xfrm>
-          <a:off x="0" y="0"/>
-          <a:ext cx="0" cy="0"/>
-          <a:chOff x="0" y="0"/>
-          <a:chExt cx="0" cy="0"/>
-        </a:xfrm>
-      </p:grpSpPr>
-      <p:sp>
-        <p:nvSpPr>
-          <p:cNvPr id="3" name="Title 2"/>
-          <p:cNvSpPr>
-            <a:spLocks noGrp="1"/>
-          </p:cNvSpPr>
-          <p:nvPr>
-            <p:ph type="title"/>
-          </p:nvPr>
-        </p:nvSpPr>
-        <p:spPr/>
-        <p:txBody>
-          <a:bodyPr/>
-          <a:lstStyle/>
-          <a:p>
-            <a:r>
-              <a:rPr lang="en-GB" dirty="0"/>
-              <a:t>Build</a:t>
-            </a:r>
-            <a:endParaRPr lang="en-US" dirty="0"/>
-          </a:p>
-        </p:txBody>
-      </p:sp>
-      <p:sp>
-        <p:nvSpPr>
-          <p:cNvPr id="4" name="Content Placeholder 3"/>
-          <p:cNvSpPr>
-            <a:spLocks noGrp="1"/>
-          </p:cNvSpPr>
-          <p:nvPr>
-            <p:ph idx="1"/>
-          </p:nvPr>
-        </p:nvSpPr>
-        <p:spPr/>
-        <p:txBody>
-          <a:bodyPr/>
-          <a:lstStyle/>
-          <a:p>
-            <a:r>
-              <a:rPr lang="en-GB" dirty="0"/>
-              <a:t>Maven</a:t>
-            </a:r>
-          </a:p>
-          <a:p>
-            <a:pPr lvl="1"/>
-            <a:r>
-              <a:rPr lang="en-GB" dirty="0"/>
-              <a:t>Dependency manager</a:t>
-            </a:r>
-          </a:p>
-          <a:p>
-            <a:pPr lvl="1"/>
-            <a:r>
-              <a:rPr lang="en-GB" dirty="0" err="1"/>
-              <a:t>Artifact</a:t>
-            </a:r>
-            <a:r>
-              <a:rPr lang="en-GB" dirty="0"/>
-              <a:t> (jar) repository </a:t>
-            </a:r>
-          </a:p>
-          <a:p>
-            <a:pPr lvl="1"/>
-            <a:r>
-              <a:rPr lang="en-GB" dirty="0"/>
-              <a:t>Build automation</a:t>
-            </a:r>
-          </a:p>
-          <a:p>
-            <a:pPr lvl="1"/>
-            <a:r>
-              <a:rPr lang="en-GB" dirty="0"/>
-              <a:t>Other tasks, e.g., deploy, run</a:t>
-            </a:r>
-          </a:p>
-          <a:p>
-            <a:r>
-              <a:rPr lang="en-GB" dirty="0"/>
-              <a:t>Works for Eclipse, </a:t>
-            </a:r>
-            <a:r>
-              <a:rPr lang="en-GB" dirty="0" err="1"/>
-              <a:t>InteliJ</a:t>
-            </a:r>
-            <a:r>
-              <a:rPr lang="en-GB" dirty="0"/>
-              <a:t>, </a:t>
-            </a:r>
-            <a:r>
-              <a:rPr lang="en-GB" dirty="0" err="1"/>
-              <a:t>Netbeans</a:t>
-            </a:r>
-            <a:endParaRPr lang="en-GB" dirty="0"/>
-          </a:p>
-          <a:p>
-            <a:r>
-              <a:rPr lang="en-GB" dirty="0"/>
-              <a:t>Pom.xml</a:t>
-            </a:r>
-          </a:p>
-          <a:p>
-            <a:endParaRPr lang="en-US" dirty="0"/>
-          </a:p>
-        </p:txBody>
-      </p:sp>
-      <p:sp>
-        <p:nvSpPr>
-          <p:cNvPr id="2" name="Slide Number Placeholder 1"/>
-          <p:cNvSpPr>
-            <a:spLocks noGrp="1"/>
-          </p:cNvSpPr>
-          <p:nvPr>
-            <p:ph type="sldNum" sz="quarter" idx="12"/>
-          </p:nvPr>
-        </p:nvSpPr>
-        <p:spPr/>
-        <p:txBody>
-          <a:bodyPr/>
-          <a:lstStyle/>
-          <a:p>
-            <a:fld id="{024A9932-4E76-455F-8E1A-2CC10C89B014}" type="slidenum">
-              <a:rPr lang="pt-PT" smtClean="0"/>
-              <a:pPr/>
-              <a:t>38</a:t>
-            </a:fld>
-            <a:endParaRPr lang="pt-PT"/>
-          </a:p>
-        </p:txBody>
-      </p:sp>
-    </p:spTree>
-    <p:extLst>
-      <p:ext uri="{BB962C8B-B14F-4D97-AF65-F5344CB8AC3E}">
-        <p14:creationId xmlns:p14="http://schemas.microsoft.com/office/powerpoint/2010/main" val="3878863745"/>
-      </p:ext>
-    </p:extLst>
-  </p:cSld>
-  <p:clrMapOvr>
-    <a:masterClrMapping/>
-  </p:clrMapOvr>
-</p:sld>
-</file>
-
-<file path=ppt/slides/slide39.xml><?xml version="1.0" encoding="utf-8"?>
-<p:sld xmlns:a="http://schemas.openxmlformats.org/drawingml/2006/main" xmlns:r="http://schemas.openxmlformats.org/officeDocument/2006/relationships" xmlns:p="http://schemas.openxmlformats.org/presentationml/2006/main">
-  <p:cSld>
-    <p:spTree>
-      <p:nvGrpSpPr>
-        <p:cNvPr id="1" name=""/>
-        <p:cNvGrpSpPr/>
-        <p:nvPr/>
-      </p:nvGrpSpPr>
-      <p:grpSpPr>
-        <a:xfrm>
-          <a:off x="0" y="0"/>
-          <a:ext cx="0" cy="0"/>
-          <a:chOff x="0" y="0"/>
-          <a:chExt cx="0" cy="0"/>
-        </a:xfrm>
-      </p:grpSpPr>
-      <p:sp>
-        <p:nvSpPr>
-          <p:cNvPr id="2" name="Title 1"/>
-          <p:cNvSpPr>
-            <a:spLocks noGrp="1"/>
-          </p:cNvSpPr>
-          <p:nvPr>
-            <p:ph type="title"/>
-          </p:nvPr>
-        </p:nvSpPr>
-        <p:spPr/>
-        <p:txBody>
-          <a:bodyPr/>
-          <a:lstStyle/>
-          <a:p>
-            <a:endParaRPr lang="en-US"/>
-          </a:p>
-        </p:txBody>
-      </p:sp>
-      <p:sp>
-        <p:nvSpPr>
-          <p:cNvPr id="3" name="Content Placeholder 2"/>
-          <p:cNvSpPr>
-            <a:spLocks noGrp="1"/>
-          </p:cNvSpPr>
-          <p:nvPr>
-            <p:ph idx="1"/>
-          </p:nvPr>
-        </p:nvSpPr>
-        <p:spPr/>
-        <p:txBody>
-          <a:bodyPr/>
-          <a:lstStyle/>
-          <a:p>
-            <a:endParaRPr lang="en-US"/>
-          </a:p>
-        </p:txBody>
-      </p:sp>
-      <p:sp>
-        <p:nvSpPr>
-          <p:cNvPr id="4" name="Slide Number Placeholder 3"/>
-          <p:cNvSpPr>
-            <a:spLocks noGrp="1"/>
-          </p:cNvSpPr>
-          <p:nvPr>
-            <p:ph type="sldNum" sz="quarter" idx="12"/>
-          </p:nvPr>
-        </p:nvSpPr>
-        <p:spPr/>
-        <p:txBody>
-          <a:bodyPr/>
-          <a:lstStyle/>
-          <a:p>
-            <a:fld id="{024A9932-4E76-455F-8E1A-2CC10C89B014}" type="slidenum">
-              <a:rPr lang="pt-PT" smtClean="0"/>
-              <a:pPr/>
-              <a:t>39</a:t>
+              <a:t>51</a:t>
             </a:fld>
             <a:endParaRPr lang="pt-PT"/>
           </a:p>
@@ -11022,7 +12282,7 @@
 </p:sld>
 </file>
 
-<file path=ppt/slides/slide4.xml><?xml version="1.0" encoding="utf-8"?>
+<file path=ppt/slides/slide52.xml><?xml version="1.0" encoding="utf-8"?>
 <p:sld xmlns:a="http://schemas.openxmlformats.org/drawingml/2006/main" xmlns:r="http://schemas.openxmlformats.org/officeDocument/2006/relationships" xmlns:p="http://schemas.openxmlformats.org/presentationml/2006/main">
   <p:cSld>
     <p:spTree>
@@ -11055,10 +12315,9 @@
           <a:lstStyle/>
           <a:p>
             <a:r>
-              <a:rPr lang="en-GB" dirty="0" err="1"/>
-              <a:t>Eapli.Framework</a:t>
-            </a:r>
-            <a:endParaRPr lang="en-GB" dirty="0"/>
+              <a:rPr lang="en-GB" dirty="0"/>
+              <a:t>Build</a:t>
+            </a:r>
           </a:p>
         </p:txBody>
       </p:sp>
@@ -11069,80 +12328,7 @@
             <a:spLocks noGrp="1"/>
           </p:cNvSpPr>
           <p:nvPr>
-            <p:ph sz="half" idx="1"/>
-          </p:nvPr>
-        </p:nvSpPr>
-        <p:spPr/>
-        <p:txBody>
-          <a:bodyPr/>
-          <a:lstStyle/>
-          <a:p>
-            <a:r>
-              <a:rPr lang="en-GB" dirty="0"/>
-              <a:t>Domain objects</a:t>
-            </a:r>
-          </a:p>
-          <a:p>
-            <a:pPr lvl="1"/>
-            <a:r>
-              <a:rPr lang="en-GB" dirty="0"/>
-              <a:t>Money</a:t>
-            </a:r>
-          </a:p>
-          <a:p>
-            <a:pPr lvl="1"/>
-            <a:r>
-              <a:rPr lang="en-GB" dirty="0"/>
-              <a:t>Range</a:t>
-            </a:r>
-          </a:p>
-          <a:p>
-            <a:pPr lvl="1"/>
-            <a:r>
-              <a:rPr lang="en-GB" dirty="0"/>
-              <a:t>Time period</a:t>
-            </a:r>
-          </a:p>
-          <a:p>
-            <a:r>
-              <a:rPr lang="en-GB" dirty="0"/>
-              <a:t>DDD pattern interfaces</a:t>
-            </a:r>
-          </a:p>
-          <a:p>
-            <a:pPr lvl="1"/>
-            <a:r>
-              <a:rPr lang="en-GB" dirty="0" err="1"/>
-              <a:t>ValueObject</a:t>
-            </a:r>
-            <a:endParaRPr lang="en-GB" dirty="0"/>
-          </a:p>
-          <a:p>
-            <a:pPr lvl="1"/>
-            <a:r>
-              <a:rPr lang="en-GB" dirty="0" err="1"/>
-              <a:t>DomainEntity</a:t>
-            </a:r>
-            <a:endParaRPr lang="en-GB" dirty="0"/>
-          </a:p>
-          <a:p>
-            <a:pPr lvl="1"/>
-            <a:r>
-              <a:rPr lang="en-GB" dirty="0" err="1"/>
-              <a:t>AggregateRoot</a:t>
-            </a:r>
-            <a:endParaRPr lang="en-GB" dirty="0"/>
-          </a:p>
-        </p:txBody>
-      </p:sp>
-      <p:sp>
-        <p:nvSpPr>
-          <p:cNvPr id="4" name="Content Placeholder 3"/>
-          <p:cNvSpPr>
-            <a:spLocks noGrp="1"/>
-          </p:cNvSpPr>
-          <p:nvPr>
-            <p:ph sz="half" idx="2"/>
+            <p:ph idx="1"/>
           </p:nvPr>
         </p:nvSpPr>
         <p:spPr/>
@@ -11156,7 +12342,7 @@
       </p:sp>
       <p:sp>
         <p:nvSpPr>
-          <p:cNvPr id="5" name="Slide Number Placeholder 4"/>
+          <p:cNvPr id="4" name="Slide Number Placeholder 3"/>
           <p:cNvSpPr>
             <a:spLocks noGrp="1"/>
           </p:cNvSpPr>
@@ -11172,7 +12358,207 @@
             <a:fld id="{024A9932-4E76-455F-8E1A-2CC10C89B014}" type="slidenum">
               <a:rPr lang="pt-PT" smtClean="0"/>
               <a:pPr/>
-              <a:t>4</a:t>
+              <a:t>52</a:t>
+            </a:fld>
+            <a:endParaRPr lang="pt-PT"/>
+          </a:p>
+        </p:txBody>
+      </p:sp>
+      <p:pic>
+        <p:nvPicPr>
+          <p:cNvPr id="6" name="Picture 5"/>
+          <p:cNvPicPr>
+            <a:picLocks noChangeAspect="1"/>
+          </p:cNvPicPr>
+          <p:nvPr/>
+        </p:nvPicPr>
+        <p:blipFill>
+          <a:blip r:embed="rId2"/>
+          <a:stretch>
+            <a:fillRect/>
+          </a:stretch>
+        </p:blipFill>
+        <p:spPr>
+          <a:xfrm>
+            <a:off x="2252" y="0"/>
+            <a:ext cx="12752738" cy="7173416"/>
+          </a:xfrm>
+          <a:prstGeom prst="rect">
+            <a:avLst/>
+          </a:prstGeom>
+        </p:spPr>
+      </p:pic>
+    </p:spTree>
+    <p:extLst>
+      <p:ext uri="{BB962C8B-B14F-4D97-AF65-F5344CB8AC3E}">
+        <p14:creationId xmlns:p14="http://schemas.microsoft.com/office/powerpoint/2010/main" val="1074830409"/>
+      </p:ext>
+    </p:extLst>
+  </p:cSld>
+  <p:clrMapOvr>
+    <a:masterClrMapping/>
+  </p:clrMapOvr>
+</p:sld>
+</file>
+
+<file path=ppt/slides/slide6.xml><?xml version="1.0" encoding="utf-8"?>
+<p:sld xmlns:a="http://schemas.openxmlformats.org/drawingml/2006/main" xmlns:r="http://schemas.openxmlformats.org/officeDocument/2006/relationships" xmlns:p="http://schemas.openxmlformats.org/presentationml/2006/main">
+  <p:cSld>
+    <p:spTree>
+      <p:nvGrpSpPr>
+        <p:cNvPr id="1" name=""/>
+        <p:cNvGrpSpPr/>
+        <p:nvPr/>
+      </p:nvGrpSpPr>
+      <p:grpSpPr>
+        <a:xfrm>
+          <a:off x="0" y="0"/>
+          <a:ext cx="0" cy="0"/>
+          <a:chOff x="0" y="0"/>
+          <a:chExt cx="0" cy="0"/>
+        </a:xfrm>
+      </p:grpSpPr>
+      <p:sp>
+        <p:nvSpPr>
+          <p:cNvPr id="2" name="Title 1"/>
+          <p:cNvSpPr>
+            <a:spLocks noGrp="1"/>
+          </p:cNvSpPr>
+          <p:nvPr>
+            <p:ph type="title"/>
+          </p:nvPr>
+        </p:nvSpPr>
+        <p:spPr/>
+        <p:txBody>
+          <a:bodyPr/>
+          <a:lstStyle/>
+          <a:p>
+            <a:r>
+              <a:rPr lang="en-GB" dirty="0" smtClean="0"/>
+              <a:t>DDD</a:t>
+            </a:r>
+            <a:endParaRPr lang="en-GB" dirty="0"/>
+          </a:p>
+        </p:txBody>
+      </p:sp>
+      <p:sp>
+        <p:nvSpPr>
+          <p:cNvPr id="3" name="Content Placeholder 2"/>
+          <p:cNvSpPr>
+            <a:spLocks noGrp="1"/>
+          </p:cNvSpPr>
+          <p:nvPr>
+            <p:ph sz="half" idx="1"/>
+          </p:nvPr>
+        </p:nvSpPr>
+        <p:spPr/>
+        <p:txBody>
+          <a:bodyPr/>
+          <a:lstStyle/>
+          <a:p>
+            <a:r>
+              <a:rPr lang="en-GB" dirty="0"/>
+              <a:t>Domain objects</a:t>
+            </a:r>
+          </a:p>
+          <a:p>
+            <a:pPr lvl="1"/>
+            <a:r>
+              <a:rPr lang="en-GB" dirty="0"/>
+              <a:t>Money</a:t>
+            </a:r>
+          </a:p>
+          <a:p>
+            <a:pPr lvl="1"/>
+            <a:r>
+              <a:rPr lang="en-GB" dirty="0"/>
+              <a:t>Range</a:t>
+            </a:r>
+          </a:p>
+          <a:p>
+            <a:pPr lvl="1"/>
+            <a:r>
+              <a:rPr lang="en-GB" dirty="0"/>
+              <a:t>Time period</a:t>
+            </a:r>
+          </a:p>
+          <a:p>
+            <a:endParaRPr lang="en-GB" dirty="0" smtClean="0"/>
+          </a:p>
+          <a:p>
+            <a:r>
+              <a:rPr lang="en-GB" dirty="0" smtClean="0"/>
+              <a:t>DDD </a:t>
+            </a:r>
+            <a:r>
+              <a:rPr lang="en-GB" dirty="0"/>
+              <a:t>pattern interfaces</a:t>
+            </a:r>
+          </a:p>
+          <a:p>
+            <a:pPr lvl="1"/>
+            <a:r>
+              <a:rPr lang="en-GB" dirty="0" err="1"/>
+              <a:t>ValueObject</a:t>
+            </a:r>
+            <a:endParaRPr lang="en-GB" dirty="0"/>
+          </a:p>
+          <a:p>
+            <a:pPr lvl="1"/>
+            <a:r>
+              <a:rPr lang="en-GB" dirty="0" err="1"/>
+              <a:t>DomainEntity</a:t>
+            </a:r>
+            <a:endParaRPr lang="en-GB" dirty="0"/>
+          </a:p>
+          <a:p>
+            <a:pPr lvl="1"/>
+            <a:r>
+              <a:rPr lang="en-GB" dirty="0" err="1"/>
+              <a:t>AggregateRoot</a:t>
+            </a:r>
+            <a:endParaRPr lang="en-GB" dirty="0"/>
+          </a:p>
+        </p:txBody>
+      </p:sp>
+      <p:sp>
+        <p:nvSpPr>
+          <p:cNvPr id="4" name="Content Placeholder 3"/>
+          <p:cNvSpPr>
+            <a:spLocks noGrp="1"/>
+          </p:cNvSpPr>
+          <p:nvPr>
+            <p:ph sz="half" idx="2"/>
+          </p:nvPr>
+        </p:nvSpPr>
+        <p:spPr/>
+        <p:txBody>
+          <a:bodyPr/>
+          <a:lstStyle/>
+          <a:p>
+            <a:endParaRPr lang="en-GB"/>
+          </a:p>
+        </p:txBody>
+      </p:sp>
+      <p:sp>
+        <p:nvSpPr>
+          <p:cNvPr id="5" name="Slide Number Placeholder 4"/>
+          <p:cNvSpPr>
+            <a:spLocks noGrp="1"/>
+          </p:cNvSpPr>
+          <p:nvPr>
+            <p:ph type="sldNum" sz="quarter" idx="12"/>
+          </p:nvPr>
+        </p:nvSpPr>
+        <p:spPr/>
+        <p:txBody>
+          <a:bodyPr/>
+          <a:lstStyle/>
+          <a:p>
+            <a:fld id="{024A9932-4E76-455F-8E1A-2CC10C89B014}" type="slidenum">
+              <a:rPr lang="pt-PT" smtClean="0"/>
+              <a:pPr/>
+              <a:t>6</a:t>
             </a:fld>
             <a:endParaRPr lang="pt-PT"/>
           </a:p>
@@ -11215,7 +12601,7 @@
 </p:sld>
 </file>
 
-<file path=ppt/slides/slide40.xml><?xml version="1.0" encoding="utf-8"?>
+<file path=ppt/slides/slide7.xml><?xml version="1.0" encoding="utf-8"?>
 <p:sld xmlns:a="http://schemas.openxmlformats.org/drawingml/2006/main" xmlns:r="http://schemas.openxmlformats.org/officeDocument/2006/relationships" xmlns:p="http://schemas.openxmlformats.org/presentationml/2006/main">
   <p:cSld>
     <p:spTree>
@@ -11234,7 +12620,7 @@
       </p:grpSpPr>
       <p:sp>
         <p:nvSpPr>
-          <p:cNvPr id="2" name="Title 1"/>
+          <p:cNvPr id="6" name="Title 5"/>
           <p:cNvSpPr>
             <a:spLocks noGrp="1"/>
           </p:cNvSpPr>
@@ -11248,15 +12634,16 @@
           <a:lstStyle/>
           <a:p>
             <a:r>
-              <a:rPr lang="en-GB" dirty="0"/>
-              <a:t>Build</a:t>
-            </a:r>
-          </a:p>
-        </p:txBody>
-      </p:sp>
-      <p:sp>
-        <p:nvSpPr>
-          <p:cNvPr id="3" name="Content Placeholder 2"/>
+              <a:rPr lang="en-GB" dirty="0" smtClean="0"/>
+              <a:t>Standard patterns</a:t>
+            </a:r>
+            <a:endParaRPr lang="en-US" dirty="0"/>
+          </a:p>
+        </p:txBody>
+      </p:sp>
+      <p:sp>
+        <p:nvSpPr>
+          <p:cNvPr id="7" name="Content Placeholder 6"/>
           <p:cNvSpPr>
             <a:spLocks noGrp="1"/>
           </p:cNvSpPr>
@@ -11269,13 +12656,43 @@
           <a:bodyPr/>
           <a:lstStyle/>
           <a:p>
-            <a:endParaRPr lang="en-GB"/>
-          </a:p>
-        </p:txBody>
-      </p:sp>
-      <p:sp>
-        <p:nvSpPr>
-          <p:cNvPr id="4" name="Slide Number Placeholder 3"/>
+            <a:r>
+              <a:rPr lang="en-GB" dirty="0" smtClean="0"/>
+              <a:t>Actions, </a:t>
+            </a:r>
+            <a:r>
+              <a:rPr lang="en-GB" dirty="0" err="1" smtClean="0"/>
+              <a:t>a.k.a</a:t>
+            </a:r>
+            <a:r>
+              <a:rPr lang="en-GB" dirty="0" smtClean="0"/>
+              <a:t> Command</a:t>
+            </a:r>
+          </a:p>
+          <a:p>
+            <a:r>
+              <a:rPr lang="en-GB" dirty="0" smtClean="0"/>
+              <a:t>Memento</a:t>
+            </a:r>
+          </a:p>
+          <a:p>
+            <a:r>
+              <a:rPr lang="en-GB" dirty="0" smtClean="0"/>
+              <a:t>Visitor</a:t>
+            </a:r>
+          </a:p>
+          <a:p>
+            <a:r>
+              <a:rPr lang="en-GB" dirty="0" smtClean="0"/>
+              <a:t>DTO</a:t>
+            </a:r>
+            <a:endParaRPr lang="en-US" dirty="0"/>
+          </a:p>
+        </p:txBody>
+      </p:sp>
+      <p:sp>
+        <p:nvSpPr>
+          <p:cNvPr id="5" name="Slide Number Placeholder 4"/>
           <p:cNvSpPr>
             <a:spLocks noGrp="1"/>
           </p:cNvSpPr>
@@ -11291,40 +12708,16 @@
             <a:fld id="{024A9932-4E76-455F-8E1A-2CC10C89B014}" type="slidenum">
               <a:rPr lang="pt-PT" smtClean="0"/>
               <a:pPr/>
-              <a:t>40</a:t>
+              <a:t>7</a:t>
             </a:fld>
             <a:endParaRPr lang="pt-PT"/>
           </a:p>
         </p:txBody>
       </p:sp>
-      <p:pic>
-        <p:nvPicPr>
-          <p:cNvPr id="6" name="Picture 5"/>
-          <p:cNvPicPr>
-            <a:picLocks noChangeAspect="1"/>
-          </p:cNvPicPr>
-          <p:nvPr/>
-        </p:nvPicPr>
-        <p:blipFill>
-          <a:blip r:embed="rId2"/>
-          <a:stretch>
-            <a:fillRect/>
-          </a:stretch>
-        </p:blipFill>
-        <p:spPr>
-          <a:xfrm>
-            <a:off x="2252" y="0"/>
-            <a:ext cx="12752738" cy="7173416"/>
-          </a:xfrm>
-          <a:prstGeom prst="rect">
-            <a:avLst/>
-          </a:prstGeom>
-        </p:spPr>
-      </p:pic>
     </p:spTree>
     <p:extLst>
       <p:ext uri="{BB962C8B-B14F-4D97-AF65-F5344CB8AC3E}">
-        <p14:creationId xmlns:p14="http://schemas.microsoft.com/office/powerpoint/2010/main" val="1074830409"/>
+        <p14:creationId xmlns:p14="http://schemas.microsoft.com/office/powerpoint/2010/main" val="2931379580"/>
       </p:ext>
     </p:extLst>
   </p:cSld>
@@ -11334,7 +12727,7 @@
 </p:sld>
 </file>
 
-<file path=ppt/slides/slide5.xml><?xml version="1.0" encoding="utf-8"?>
+<file path=ppt/slides/slide8.xml><?xml version="1.0" encoding="utf-8"?>
 <p:sld xmlns:a="http://schemas.openxmlformats.org/drawingml/2006/main" xmlns:r="http://schemas.openxmlformats.org/officeDocument/2006/relationships" xmlns:p="http://schemas.openxmlformats.org/presentationml/2006/main">
   <p:cSld>
     <p:spTree>
@@ -11367,9 +12760,71 @@
           <a:lstStyle/>
           <a:p>
             <a:r>
+              <a:rPr lang="en-GB" dirty="0" smtClean="0"/>
+              <a:t>Utilities</a:t>
+            </a:r>
+            <a:endParaRPr lang="en-GB" dirty="0"/>
+          </a:p>
+        </p:txBody>
+      </p:sp>
+      <p:sp>
+        <p:nvSpPr>
+          <p:cNvPr id="3" name="Content Placeholder 2"/>
+          <p:cNvSpPr>
+            <a:spLocks noGrp="1"/>
+          </p:cNvSpPr>
+          <p:nvPr>
+            <p:ph sz="half" idx="1"/>
+          </p:nvPr>
+        </p:nvSpPr>
+        <p:spPr/>
+        <p:txBody>
+          <a:bodyPr>
+            <a:normAutofit/>
+          </a:bodyPr>
+          <a:lstStyle/>
+          <a:p>
+            <a:r>
               <a:rPr lang="en-GB" dirty="0"/>
-              <a:t>Presentation</a:t>
-            </a:r>
+              <a:t>Console</a:t>
+            </a:r>
+          </a:p>
+          <a:p>
+            <a:pPr lvl="1"/>
+            <a:r>
+              <a:rPr lang="en-GB" dirty="0"/>
+              <a:t>Helper console reading functions</a:t>
+            </a:r>
+          </a:p>
+          <a:p>
+            <a:r>
+              <a:rPr lang="en-GB" dirty="0" err="1"/>
+              <a:t>DateTime</a:t>
+            </a:r>
+            <a:endParaRPr lang="en-GB" dirty="0"/>
+          </a:p>
+          <a:p>
+            <a:pPr lvl="1"/>
+            <a:r>
+              <a:rPr lang="en-GB" dirty="0"/>
+              <a:t>Simplifies manipulation of dates and times thru java Calendar</a:t>
+            </a:r>
+          </a:p>
+          <a:p>
+            <a:r>
+              <a:rPr lang="en-GB" dirty="0"/>
+              <a:t>Files</a:t>
+            </a:r>
+          </a:p>
+          <a:p>
+            <a:pPr lvl="1"/>
+            <a:r>
+              <a:rPr lang="en-GB" dirty="0"/>
+              <a:t>File manipulation helper</a:t>
+            </a:r>
+          </a:p>
+          <a:p>
+            <a:endParaRPr lang="en-GB" dirty="0"/>
           </a:p>
         </p:txBody>
       </p:sp>
@@ -11385,10 +12840,36 @@
         </p:nvSpPr>
         <p:spPr/>
         <p:txBody>
-          <a:bodyPr/>
-          <a:lstStyle/>
-          <a:p>
-            <a:endParaRPr lang="en-GB"/>
+          <a:bodyPr>
+            <a:normAutofit/>
+          </a:bodyPr>
+          <a:lstStyle/>
+          <a:p>
+            <a:r>
+              <a:rPr lang="en-GB" dirty="0"/>
+              <a:t>Math</a:t>
+            </a:r>
+          </a:p>
+          <a:p>
+            <a:pPr lvl="1"/>
+            <a:r>
+              <a:rPr lang="en-GB" dirty="0"/>
+              <a:t>Sample math utility</a:t>
+            </a:r>
+          </a:p>
+          <a:p>
+            <a:r>
+              <a:rPr lang="en-GB" dirty="0" smtClean="0"/>
+              <a:t>Strings</a:t>
+            </a:r>
+            <a:endParaRPr lang="en-GB" dirty="0"/>
+          </a:p>
+          <a:p>
+            <a:pPr lvl="1"/>
+            <a:r>
+              <a:rPr lang="en-GB" dirty="0"/>
+              <a:t>String manipulation</a:t>
+            </a:r>
           </a:p>
         </p:txBody>
       </p:sp>
@@ -11410,7 +12891,102 @@
             <a:fld id="{024A9932-4E76-455F-8E1A-2CC10C89B014}" type="slidenum">
               <a:rPr lang="pt-PT" smtClean="0"/>
               <a:pPr/>
-              <a:t>5</a:t>
+              <a:t>8</a:t>
+            </a:fld>
+            <a:endParaRPr lang="pt-PT"/>
+          </a:p>
+        </p:txBody>
+      </p:sp>
+    </p:spTree>
+    <p:extLst>
+      <p:ext uri="{BB962C8B-B14F-4D97-AF65-F5344CB8AC3E}">
+        <p14:creationId xmlns:p14="http://schemas.microsoft.com/office/powerpoint/2010/main" val="419243926"/>
+      </p:ext>
+    </p:extLst>
+  </p:cSld>
+  <p:clrMapOvr>
+    <a:masterClrMapping/>
+  </p:clrMapOvr>
+</p:sld>
+</file>
+
+<file path=ppt/slides/slide9.xml><?xml version="1.0" encoding="utf-8"?>
+<p:sld xmlns:a="http://schemas.openxmlformats.org/drawingml/2006/main" xmlns:r="http://schemas.openxmlformats.org/officeDocument/2006/relationships" xmlns:p="http://schemas.openxmlformats.org/presentationml/2006/main">
+  <p:cSld>
+    <p:spTree>
+      <p:nvGrpSpPr>
+        <p:cNvPr id="1" name=""/>
+        <p:cNvGrpSpPr/>
+        <p:nvPr/>
+      </p:nvGrpSpPr>
+      <p:grpSpPr>
+        <a:xfrm>
+          <a:off x="0" y="0"/>
+          <a:ext cx="0" cy="0"/>
+          <a:chOff x="0" y="0"/>
+          <a:chExt cx="0" cy="0"/>
+        </a:xfrm>
+      </p:grpSpPr>
+      <p:sp>
+        <p:nvSpPr>
+          <p:cNvPr id="2" name="Title 1"/>
+          <p:cNvSpPr>
+            <a:spLocks noGrp="1"/>
+          </p:cNvSpPr>
+          <p:nvPr>
+            <p:ph type="title"/>
+          </p:nvPr>
+        </p:nvSpPr>
+        <p:spPr/>
+        <p:txBody>
+          <a:bodyPr/>
+          <a:lstStyle/>
+          <a:p>
+            <a:r>
+              <a:rPr lang="en-GB" dirty="0"/>
+              <a:t>Presentation</a:t>
+            </a:r>
+          </a:p>
+        </p:txBody>
+      </p:sp>
+      <p:sp>
+        <p:nvSpPr>
+          <p:cNvPr id="4" name="Content Placeholder 3"/>
+          <p:cNvSpPr>
+            <a:spLocks noGrp="1"/>
+          </p:cNvSpPr>
+          <p:nvPr>
+            <p:ph sz="half" idx="2"/>
+          </p:nvPr>
+        </p:nvSpPr>
+        <p:spPr/>
+        <p:txBody>
+          <a:bodyPr/>
+          <a:lstStyle/>
+          <a:p>
+            <a:endParaRPr lang="en-GB"/>
+          </a:p>
+        </p:txBody>
+      </p:sp>
+      <p:sp>
+        <p:nvSpPr>
+          <p:cNvPr id="5" name="Slide Number Placeholder 4"/>
+          <p:cNvSpPr>
+            <a:spLocks noGrp="1"/>
+          </p:cNvSpPr>
+          <p:nvPr>
+            <p:ph type="sldNum" sz="quarter" idx="12"/>
+          </p:nvPr>
+        </p:nvSpPr>
+        <p:spPr/>
+        <p:txBody>
+          <a:bodyPr/>
+          <a:lstStyle/>
+          <a:p>
+            <a:fld id="{024A9932-4E76-455F-8E1A-2CC10C89B014}" type="slidenum">
+              <a:rPr lang="pt-PT" smtClean="0"/>
+              <a:pPr/>
+              <a:t>9</a:t>
             </a:fld>
             <a:endParaRPr lang="pt-PT"/>
           </a:p>
@@ -11468,419 +13044,6 @@
     <p:extLst>
       <p:ext uri="{BB962C8B-B14F-4D97-AF65-F5344CB8AC3E}">
         <p14:creationId xmlns:p14="http://schemas.microsoft.com/office/powerpoint/2010/main" val="1368000890"/>
-      </p:ext>
-    </p:extLst>
-  </p:cSld>
-  <p:clrMapOvr>
-    <a:masterClrMapping/>
-  </p:clrMapOvr>
-</p:sld>
-</file>
-
-<file path=ppt/slides/slide6.xml><?xml version="1.0" encoding="utf-8"?>
-<p:sld xmlns:a="http://schemas.openxmlformats.org/drawingml/2006/main" xmlns:r="http://schemas.openxmlformats.org/officeDocument/2006/relationships" xmlns:p="http://schemas.openxmlformats.org/presentationml/2006/main">
-  <p:cSld>
-    <p:spTree>
-      <p:nvGrpSpPr>
-        <p:cNvPr id="1" name=""/>
-        <p:cNvGrpSpPr/>
-        <p:nvPr/>
-      </p:nvGrpSpPr>
-      <p:grpSpPr>
-        <a:xfrm>
-          <a:off x="0" y="0"/>
-          <a:ext cx="0" cy="0"/>
-          <a:chOff x="0" y="0"/>
-          <a:chExt cx="0" cy="0"/>
-        </a:xfrm>
-      </p:grpSpPr>
-      <p:sp>
-        <p:nvSpPr>
-          <p:cNvPr id="2" name="Title 1"/>
-          <p:cNvSpPr>
-            <a:spLocks noGrp="1"/>
-          </p:cNvSpPr>
-          <p:nvPr>
-            <p:ph type="title"/>
-          </p:nvPr>
-        </p:nvSpPr>
-        <p:spPr/>
-        <p:txBody>
-          <a:bodyPr/>
-          <a:lstStyle/>
-          <a:p>
-            <a:r>
-              <a:rPr lang="en-GB" dirty="0"/>
-              <a:t>presentation</a:t>
-            </a:r>
-          </a:p>
-        </p:txBody>
-      </p:sp>
-      <p:sp>
-        <p:nvSpPr>
-          <p:cNvPr id="5" name="Slide Number Placeholder 4"/>
-          <p:cNvSpPr>
-            <a:spLocks noGrp="1"/>
-          </p:cNvSpPr>
-          <p:nvPr>
-            <p:ph type="sldNum" sz="quarter" idx="12"/>
-          </p:nvPr>
-        </p:nvSpPr>
-        <p:spPr/>
-        <p:txBody>
-          <a:bodyPr/>
-          <a:lstStyle/>
-          <a:p>
-            <a:fld id="{024A9932-4E76-455F-8E1A-2CC10C89B014}" type="slidenum">
-              <a:rPr lang="pt-PT" smtClean="0"/>
-              <a:pPr/>
-              <a:t>6</a:t>
-            </a:fld>
-            <a:endParaRPr lang="pt-PT"/>
-          </a:p>
-        </p:txBody>
-      </p:sp>
-      <p:pic>
-        <p:nvPicPr>
-          <p:cNvPr id="4" name="Picture 3"/>
-          <p:cNvPicPr>
-            <a:picLocks noChangeAspect="1"/>
-          </p:cNvPicPr>
-          <p:nvPr/>
-        </p:nvPicPr>
-        <p:blipFill>
-          <a:blip r:embed="rId2"/>
-          <a:stretch>
-            <a:fillRect/>
-          </a:stretch>
-        </p:blipFill>
-        <p:spPr>
-          <a:xfrm>
-            <a:off x="674905" y="1499769"/>
-            <a:ext cx="7794190" cy="5251550"/>
-          </a:xfrm>
-          <a:prstGeom prst="rect">
-            <a:avLst/>
-          </a:prstGeom>
-        </p:spPr>
-      </p:pic>
-    </p:spTree>
-    <p:extLst>
-      <p:ext uri="{BB962C8B-B14F-4D97-AF65-F5344CB8AC3E}">
-        <p14:creationId xmlns:p14="http://schemas.microsoft.com/office/powerpoint/2010/main" val="437931580"/>
-      </p:ext>
-    </p:extLst>
-  </p:cSld>
-  <p:clrMapOvr>
-    <a:masterClrMapping/>
-  </p:clrMapOvr>
-  <p:transition spd="med">
-    <p:fade/>
-  </p:transition>
-</p:sld>
-</file>
-
-<file path=ppt/slides/slide7.xml><?xml version="1.0" encoding="utf-8"?>
-<p:sld xmlns:a="http://schemas.openxmlformats.org/drawingml/2006/main" xmlns:r="http://schemas.openxmlformats.org/officeDocument/2006/relationships" xmlns:p="http://schemas.openxmlformats.org/presentationml/2006/main">
-  <p:cSld>
-    <p:spTree>
-      <p:nvGrpSpPr>
-        <p:cNvPr id="1" name=""/>
-        <p:cNvGrpSpPr/>
-        <p:nvPr/>
-      </p:nvGrpSpPr>
-      <p:grpSpPr>
-        <a:xfrm>
-          <a:off x="0" y="0"/>
-          <a:ext cx="0" cy="0"/>
-          <a:chOff x="0" y="0"/>
-          <a:chExt cx="0" cy="0"/>
-        </a:xfrm>
-      </p:grpSpPr>
-      <p:sp>
-        <p:nvSpPr>
-          <p:cNvPr id="5" name="Slide Number Placeholder 4"/>
-          <p:cNvSpPr>
-            <a:spLocks noGrp="1"/>
-          </p:cNvSpPr>
-          <p:nvPr>
-            <p:ph type="sldNum" sz="quarter" idx="12"/>
-          </p:nvPr>
-        </p:nvSpPr>
-        <p:spPr/>
-        <p:txBody>
-          <a:bodyPr/>
-          <a:lstStyle/>
-          <a:p>
-            <a:fld id="{024A9932-4E76-455F-8E1A-2CC10C89B014}" type="slidenum">
-              <a:rPr lang="pt-PT" smtClean="0"/>
-              <a:pPr/>
-              <a:t>7</a:t>
-            </a:fld>
-            <a:endParaRPr lang="pt-PT"/>
-          </a:p>
-        </p:txBody>
-      </p:sp>
-      <p:sp>
-        <p:nvSpPr>
-          <p:cNvPr id="2" name="Title 1"/>
-          <p:cNvSpPr>
-            <a:spLocks noGrp="1"/>
-          </p:cNvSpPr>
-          <p:nvPr>
-            <p:ph type="title" idx="4294967295"/>
-          </p:nvPr>
-        </p:nvSpPr>
-        <p:spPr>
-          <a:xfrm>
-            <a:off x="0" y="152400"/>
-            <a:ext cx="8229600" cy="1250950"/>
-          </a:xfrm>
-        </p:spPr>
-        <p:txBody>
-          <a:bodyPr/>
-          <a:lstStyle/>
-          <a:p>
-            <a:endParaRPr lang="en-GB" dirty="0"/>
-          </a:p>
-        </p:txBody>
-      </p:sp>
-      <p:pic>
-        <p:nvPicPr>
-          <p:cNvPr id="3" name="Picture 2"/>
-          <p:cNvPicPr>
-            <a:picLocks noChangeAspect="1"/>
-          </p:cNvPicPr>
-          <p:nvPr/>
-        </p:nvPicPr>
-        <p:blipFill rotWithShape="1">
-          <a:blip r:embed="rId2"/>
-          <a:srcRect r="29215"/>
-          <a:stretch/>
-        </p:blipFill>
-        <p:spPr>
-          <a:xfrm>
-            <a:off x="793" y="0"/>
-            <a:ext cx="9181020" cy="7018769"/>
-          </a:xfrm>
-          <a:prstGeom prst="rect">
-            <a:avLst/>
-          </a:prstGeom>
-        </p:spPr>
-      </p:pic>
-    </p:spTree>
-    <p:extLst>
-      <p:ext uri="{BB962C8B-B14F-4D97-AF65-F5344CB8AC3E}">
-        <p14:creationId xmlns:p14="http://schemas.microsoft.com/office/powerpoint/2010/main" val="89138438"/>
-      </p:ext>
-    </p:extLst>
-  </p:cSld>
-  <p:clrMapOvr>
-    <a:masterClrMapping/>
-  </p:clrMapOvr>
-</p:sld>
-</file>
-
-<file path=ppt/slides/slide8.xml><?xml version="1.0" encoding="utf-8"?>
-<p:sld xmlns:a="http://schemas.openxmlformats.org/drawingml/2006/main" xmlns:r="http://schemas.openxmlformats.org/officeDocument/2006/relationships" xmlns:p="http://schemas.openxmlformats.org/presentationml/2006/main">
-  <p:cSld>
-    <p:spTree>
-      <p:nvGrpSpPr>
-        <p:cNvPr id="1" name=""/>
-        <p:cNvGrpSpPr/>
-        <p:nvPr/>
-      </p:nvGrpSpPr>
-      <p:grpSpPr>
-        <a:xfrm>
-          <a:off x="0" y="0"/>
-          <a:ext cx="0" cy="0"/>
-          <a:chOff x="0" y="0"/>
-          <a:chExt cx="0" cy="0"/>
-        </a:xfrm>
-      </p:grpSpPr>
-      <p:sp>
-        <p:nvSpPr>
-          <p:cNvPr id="2" name="Slide Number Placeholder 1"/>
-          <p:cNvSpPr>
-            <a:spLocks noGrp="1"/>
-          </p:cNvSpPr>
-          <p:nvPr>
-            <p:ph type="sldNum" sz="quarter" idx="12"/>
-          </p:nvPr>
-        </p:nvSpPr>
-        <p:spPr/>
-        <p:txBody>
-          <a:bodyPr/>
-          <a:lstStyle/>
-          <a:p>
-            <a:fld id="{024A9932-4E76-455F-8E1A-2CC10C89B014}" type="slidenum">
-              <a:rPr lang="pt-PT" smtClean="0"/>
-              <a:pPr/>
-              <a:t>8</a:t>
-            </a:fld>
-            <a:endParaRPr lang="pt-PT"/>
-          </a:p>
-        </p:txBody>
-      </p:sp>
-      <p:pic>
-        <p:nvPicPr>
-          <p:cNvPr id="3" name="Picture 2"/>
-          <p:cNvPicPr>
-            <a:picLocks noChangeAspect="1"/>
-          </p:cNvPicPr>
-          <p:nvPr/>
-        </p:nvPicPr>
-        <p:blipFill rotWithShape="1">
-          <a:blip r:embed="rId2"/>
-          <a:srcRect r="31875"/>
-          <a:stretch/>
-        </p:blipFill>
-        <p:spPr>
-          <a:xfrm>
-            <a:off x="14869" y="12576"/>
-            <a:ext cx="9129640" cy="7252112"/>
-          </a:xfrm>
-          <a:prstGeom prst="rect">
-            <a:avLst/>
-          </a:prstGeom>
-        </p:spPr>
-      </p:pic>
-    </p:spTree>
-    <p:extLst>
-      <p:ext uri="{BB962C8B-B14F-4D97-AF65-F5344CB8AC3E}">
-        <p14:creationId xmlns:p14="http://schemas.microsoft.com/office/powerpoint/2010/main" val="3224620507"/>
-      </p:ext>
-    </p:extLst>
-  </p:cSld>
-  <p:clrMapOvr>
-    <a:masterClrMapping/>
-  </p:clrMapOvr>
-</p:sld>
-</file>
-
-<file path=ppt/slides/slide9.xml><?xml version="1.0" encoding="utf-8"?>
-<p:sld xmlns:a="http://schemas.openxmlformats.org/drawingml/2006/main" xmlns:r="http://schemas.openxmlformats.org/officeDocument/2006/relationships" xmlns:p="http://schemas.openxmlformats.org/presentationml/2006/main">
-  <p:cSld>
-    <p:spTree>
-      <p:nvGrpSpPr>
-        <p:cNvPr id="1" name=""/>
-        <p:cNvGrpSpPr/>
-        <p:nvPr/>
-      </p:nvGrpSpPr>
-      <p:grpSpPr>
-        <a:xfrm>
-          <a:off x="0" y="0"/>
-          <a:ext cx="0" cy="0"/>
-          <a:chOff x="0" y="0"/>
-          <a:chExt cx="0" cy="0"/>
-        </a:xfrm>
-      </p:grpSpPr>
-      <p:sp>
-        <p:nvSpPr>
-          <p:cNvPr id="5" name="Slide Number Placeholder 4"/>
-          <p:cNvSpPr>
-            <a:spLocks noGrp="1"/>
-          </p:cNvSpPr>
-          <p:nvPr>
-            <p:ph type="sldNum" sz="quarter" idx="12"/>
-          </p:nvPr>
-        </p:nvSpPr>
-        <p:spPr/>
-        <p:txBody>
-          <a:bodyPr/>
-          <a:lstStyle/>
-          <a:p>
-            <a:fld id="{024A9932-4E76-455F-8E1A-2CC10C89B014}" type="slidenum">
-              <a:rPr lang="pt-PT" smtClean="0"/>
-              <a:pPr/>
-              <a:t>9</a:t>
-            </a:fld>
-            <a:endParaRPr lang="pt-PT"/>
-          </a:p>
-        </p:txBody>
-      </p:sp>
-      <p:sp>
-        <p:nvSpPr>
-          <p:cNvPr id="2" name="Title 1"/>
-          <p:cNvSpPr>
-            <a:spLocks noGrp="1"/>
-          </p:cNvSpPr>
-          <p:nvPr>
-            <p:ph type="title" idx="4294967295"/>
-          </p:nvPr>
-        </p:nvSpPr>
-        <p:spPr>
-          <a:xfrm>
-            <a:off x="0" y="152400"/>
-            <a:ext cx="8229600" cy="1250950"/>
-          </a:xfrm>
-        </p:spPr>
-        <p:txBody>
-          <a:bodyPr/>
-          <a:lstStyle/>
-          <a:p>
-            <a:endParaRPr lang="en-GB" dirty="0"/>
-          </a:p>
-        </p:txBody>
-      </p:sp>
-      <p:pic>
-        <p:nvPicPr>
-          <p:cNvPr id="6" name="Picture 4"/>
-          <p:cNvPicPr>
-            <a:picLocks noChangeAspect="1" noChangeArrowheads="1"/>
-          </p:cNvPicPr>
-          <p:nvPr/>
-        </p:nvPicPr>
-        <p:blipFill>
-          <a:blip r:embed="rId2">
-            <a:extLst>
-              <a:ext uri="{28A0092B-C50C-407E-A947-70E740481C1C}">
-                <a14:useLocalDpi xmlns:a14="http://schemas.microsoft.com/office/drawing/2010/main" val="0"/>
-              </a:ext>
-            </a:extLst>
-          </a:blip>
-          <a:srcRect/>
-          <a:stretch>
-            <a:fillRect/>
-          </a:stretch>
-        </p:blipFill>
-        <p:spPr bwMode="auto">
-          <a:xfrm>
-            <a:off x="27514" y="68745"/>
-            <a:ext cx="9088972" cy="6720510"/>
-          </a:xfrm>
-          <a:prstGeom prst="rect">
-            <a:avLst/>
-          </a:prstGeom>
-          <a:noFill/>
-          <a:ln>
-            <a:noFill/>
-          </a:ln>
-          <a:extLst>
-            <a:ext uri="{909E8E84-426E-40DD-AFC4-6F175D3DCCD1}">
-              <a14:hiddenFill xmlns:a14="http://schemas.microsoft.com/office/drawing/2010/main">
-                <a:solidFill>
-                  <a:schemeClr val="accent1"/>
-                </a:solidFill>
-              </a14:hiddenFill>
-            </a:ext>
-            <a:ext uri="{91240B29-F687-4F45-9708-019B960494DF}">
-              <a14:hiddenLine xmlns:a14="http://schemas.microsoft.com/office/drawing/2010/main" w="9525">
-                <a:solidFill>
-                  <a:schemeClr val="tx1"/>
-                </a:solidFill>
-                <a:miter lim="800000"/>
-                <a:headEnd/>
-                <a:tailEnd/>
-              </a14:hiddenLine>
-            </a:ext>
-          </a:extLst>
-        </p:spPr>
-      </p:pic>
-    </p:spTree>
-    <p:extLst>
-      <p:ext uri="{BB962C8B-B14F-4D97-AF65-F5344CB8AC3E}">
-        <p14:creationId xmlns:p14="http://schemas.microsoft.com/office/powerpoint/2010/main" val="2514559034"/>
       </p:ext>
     </p:extLst>
   </p:cSld>

--- a/documentation/eapli.framework-Tech-Description.pptx
+++ b/documentation/eapli.framework-Tech-Description.pptx
@@ -5,10 +5,10 @@
     <p:sldMasterId id="2147483900" r:id="rId1"/>
   </p:sldMasterIdLst>
   <p:notesMasterIdLst>
-    <p:notesMasterId r:id="rId54"/>
+    <p:notesMasterId r:id="rId55"/>
   </p:notesMasterIdLst>
   <p:handoutMasterIdLst>
-    <p:handoutMasterId r:id="rId55"/>
+    <p:handoutMasterId r:id="rId56"/>
   </p:handoutMasterIdLst>
   <p:sldIdLst>
     <p:sldId id="367" r:id="rId2"/>
@@ -19,50 +19,51 @@
     <p:sldId id="376" r:id="rId7"/>
     <p:sldId id="432" r:id="rId8"/>
     <p:sldId id="375" r:id="rId9"/>
-    <p:sldId id="381" r:id="rId10"/>
-    <p:sldId id="382" r:id="rId11"/>
-    <p:sldId id="383" r:id="rId12"/>
-    <p:sldId id="384" r:id="rId13"/>
-    <p:sldId id="385" r:id="rId14"/>
-    <p:sldId id="415" r:id="rId15"/>
-    <p:sldId id="377" r:id="rId16"/>
-    <p:sldId id="378" r:id="rId17"/>
-    <p:sldId id="434" r:id="rId18"/>
-    <p:sldId id="435" r:id="rId19"/>
-    <p:sldId id="436" r:id="rId20"/>
-    <p:sldId id="379" r:id="rId21"/>
-    <p:sldId id="380" r:id="rId22"/>
-    <p:sldId id="423" r:id="rId23"/>
-    <p:sldId id="430" r:id="rId24"/>
-    <p:sldId id="433" r:id="rId25"/>
-    <p:sldId id="431" r:id="rId26"/>
-    <p:sldId id="422" r:id="rId27"/>
-    <p:sldId id="424" r:id="rId28"/>
-    <p:sldId id="425" r:id="rId29"/>
-    <p:sldId id="426" r:id="rId30"/>
-    <p:sldId id="427" r:id="rId31"/>
-    <p:sldId id="428" r:id="rId32"/>
-    <p:sldId id="429" r:id="rId33"/>
-    <p:sldId id="399" r:id="rId34"/>
-    <p:sldId id="400" r:id="rId35"/>
-    <p:sldId id="409" r:id="rId36"/>
-    <p:sldId id="410" r:id="rId37"/>
-    <p:sldId id="411" r:id="rId38"/>
-    <p:sldId id="413" r:id="rId39"/>
-    <p:sldId id="347" r:id="rId40"/>
-    <p:sldId id="368" r:id="rId41"/>
-    <p:sldId id="335" r:id="rId42"/>
-    <p:sldId id="420" r:id="rId43"/>
-    <p:sldId id="439" r:id="rId44"/>
-    <p:sldId id="421" r:id="rId45"/>
-    <p:sldId id="437" r:id="rId46"/>
-    <p:sldId id="440" r:id="rId47"/>
-    <p:sldId id="438" r:id="rId48"/>
-    <p:sldId id="441" r:id="rId49"/>
-    <p:sldId id="414" r:id="rId50"/>
-    <p:sldId id="350" r:id="rId51"/>
-    <p:sldId id="351" r:id="rId52"/>
-    <p:sldId id="337" r:id="rId53"/>
+    <p:sldId id="442" r:id="rId10"/>
+    <p:sldId id="381" r:id="rId11"/>
+    <p:sldId id="382" r:id="rId12"/>
+    <p:sldId id="383" r:id="rId13"/>
+    <p:sldId id="384" r:id="rId14"/>
+    <p:sldId id="385" r:id="rId15"/>
+    <p:sldId id="415" r:id="rId16"/>
+    <p:sldId id="377" r:id="rId17"/>
+    <p:sldId id="378" r:id="rId18"/>
+    <p:sldId id="434" r:id="rId19"/>
+    <p:sldId id="435" r:id="rId20"/>
+    <p:sldId id="436" r:id="rId21"/>
+    <p:sldId id="379" r:id="rId22"/>
+    <p:sldId id="380" r:id="rId23"/>
+    <p:sldId id="423" r:id="rId24"/>
+    <p:sldId id="430" r:id="rId25"/>
+    <p:sldId id="433" r:id="rId26"/>
+    <p:sldId id="431" r:id="rId27"/>
+    <p:sldId id="422" r:id="rId28"/>
+    <p:sldId id="424" r:id="rId29"/>
+    <p:sldId id="425" r:id="rId30"/>
+    <p:sldId id="426" r:id="rId31"/>
+    <p:sldId id="427" r:id="rId32"/>
+    <p:sldId id="428" r:id="rId33"/>
+    <p:sldId id="429" r:id="rId34"/>
+    <p:sldId id="399" r:id="rId35"/>
+    <p:sldId id="400" r:id="rId36"/>
+    <p:sldId id="409" r:id="rId37"/>
+    <p:sldId id="410" r:id="rId38"/>
+    <p:sldId id="411" r:id="rId39"/>
+    <p:sldId id="413" r:id="rId40"/>
+    <p:sldId id="347" r:id="rId41"/>
+    <p:sldId id="368" r:id="rId42"/>
+    <p:sldId id="335" r:id="rId43"/>
+    <p:sldId id="420" r:id="rId44"/>
+    <p:sldId id="439" r:id="rId45"/>
+    <p:sldId id="421" r:id="rId46"/>
+    <p:sldId id="437" r:id="rId47"/>
+    <p:sldId id="440" r:id="rId48"/>
+    <p:sldId id="438" r:id="rId49"/>
+    <p:sldId id="441" r:id="rId50"/>
+    <p:sldId id="414" r:id="rId51"/>
+    <p:sldId id="350" r:id="rId52"/>
+    <p:sldId id="351" r:id="rId53"/>
+    <p:sldId id="337" r:id="rId54"/>
   </p:sldIdLst>
   <p:sldSz cx="9144000" cy="6858000" type="screen4x3"/>
   <p:notesSz cx="10234613" cy="7099300"/>
@@ -287,7 +288,7 @@
             <a:fld id="{DF9BBED1-C878-4044-B70F-841416CAC1AE}" type="datetimeFigureOut">
               <a:rPr lang="en-US" smtClean="0"/>
               <a:pPr/>
-              <a:t>6/12/2018</a:t>
+              <a:t>6/14/2018</a:t>
             </a:fld>
             <a:endParaRPr lang="en-US"/>
           </a:p>
@@ -454,7 +455,7 @@
             <a:fld id="{754636F6-6535-4DFB-8291-07E7DDBE6239}" type="datetimeFigureOut">
               <a:rPr lang="pt-PT" smtClean="0"/>
               <a:pPr/>
-              <a:t>12/06/2018</a:t>
+              <a:t>14/06/2018</a:t>
             </a:fld>
             <a:endParaRPr lang="pt-PT"/>
           </a:p>
@@ -769,178 +770,6 @@
           <a:bodyPr/>
           <a:lstStyle/>
           <a:p>
-            <a:r>
-              <a:rPr lang="en-GB" dirty="0"/>
-              <a:t>3 packages </a:t>
-            </a:r>
-            <a:r>
-              <a:rPr lang="en-GB" dirty="0" err="1"/>
-              <a:t>principais</a:t>
-            </a:r>
-            <a:endParaRPr lang="en-GB" dirty="0"/>
-          </a:p>
-          <a:p>
-            <a:pPr marL="171450" indent="-171450">
-              <a:buFontTx/>
-              <a:buChar char="-"/>
-            </a:pPr>
-            <a:r>
-              <a:rPr lang="en-GB" dirty="0"/>
-              <a:t>Model – classes </a:t>
-            </a:r>
-            <a:r>
-              <a:rPr lang="en-GB" dirty="0" err="1"/>
-              <a:t>utilitárias</a:t>
-            </a:r>
-            <a:r>
-              <a:rPr lang="en-GB" dirty="0"/>
-              <a:t> </a:t>
-            </a:r>
-            <a:r>
-              <a:rPr lang="en-GB" dirty="0" err="1"/>
-              <a:t>que</a:t>
-            </a:r>
-            <a:r>
-              <a:rPr lang="en-GB" dirty="0"/>
-              <a:t> </a:t>
-            </a:r>
-            <a:r>
-              <a:rPr lang="en-GB" dirty="0" err="1"/>
-              <a:t>podem</a:t>
-            </a:r>
-            <a:r>
-              <a:rPr lang="en-GB" dirty="0"/>
-              <a:t> </a:t>
-            </a:r>
-            <a:r>
-              <a:rPr lang="en-GB" dirty="0" err="1"/>
-              <a:t>ser</a:t>
-            </a:r>
-            <a:r>
-              <a:rPr lang="en-GB" dirty="0"/>
-              <a:t> </a:t>
-            </a:r>
-            <a:r>
-              <a:rPr lang="en-GB" dirty="0" err="1"/>
-              <a:t>usadas</a:t>
-            </a:r>
-            <a:r>
-              <a:rPr lang="en-GB" dirty="0"/>
-              <a:t> </a:t>
-            </a:r>
-            <a:r>
-              <a:rPr lang="en-GB" dirty="0" err="1"/>
-              <a:t>em</a:t>
-            </a:r>
-            <a:r>
-              <a:rPr lang="en-GB" dirty="0"/>
-              <a:t> </a:t>
-            </a:r>
-            <a:r>
-              <a:rPr lang="en-GB" dirty="0" err="1"/>
-              <a:t>qq</a:t>
-            </a:r>
-            <a:r>
-              <a:rPr lang="en-GB" dirty="0"/>
-              <a:t> </a:t>
-            </a:r>
-            <a:r>
-              <a:rPr lang="en-GB" dirty="0" err="1"/>
-              <a:t>modelo</a:t>
-            </a:r>
-            <a:r>
-              <a:rPr lang="en-GB" dirty="0"/>
-              <a:t>, ex., «value object» Money</a:t>
-            </a:r>
-          </a:p>
-          <a:p>
-            <a:pPr marL="171450" indent="-171450">
-              <a:buFontTx/>
-              <a:buChar char="-"/>
-            </a:pPr>
-            <a:r>
-              <a:rPr lang="en-GB" dirty="0"/>
-              <a:t>Patterns – </a:t>
-            </a:r>
-            <a:r>
-              <a:rPr lang="en-GB" dirty="0" err="1"/>
-              <a:t>essencialmente</a:t>
-            </a:r>
-            <a:r>
-              <a:rPr lang="en-GB" dirty="0"/>
-              <a:t> interfaces para “</a:t>
-            </a:r>
-            <a:r>
-              <a:rPr lang="en-GB" dirty="0" err="1"/>
-              <a:t>marcação</a:t>
-            </a:r>
-            <a:r>
-              <a:rPr lang="en-GB" dirty="0"/>
-              <a:t>” de classes DDD. </a:t>
-            </a:r>
-            <a:r>
-              <a:rPr lang="en-GB" dirty="0" err="1"/>
-              <a:t>Possui</a:t>
-            </a:r>
-            <a:r>
-              <a:rPr lang="en-GB" dirty="0"/>
-              <a:t> </a:t>
-            </a:r>
-            <a:r>
-              <a:rPr lang="en-GB" dirty="0" err="1"/>
-              <a:t>subpackage</a:t>
-            </a:r>
-            <a:r>
-              <a:rPr lang="en-GB" dirty="0"/>
-              <a:t> com </a:t>
-            </a:r>
-            <a:r>
-              <a:rPr lang="en-GB" dirty="0" err="1"/>
-              <a:t>implementações</a:t>
-            </a:r>
-            <a:r>
-              <a:rPr lang="en-GB" dirty="0"/>
-              <a:t> </a:t>
-            </a:r>
-            <a:r>
-              <a:rPr lang="en-GB" dirty="0" err="1"/>
-              <a:t>auxiliares</a:t>
-            </a:r>
-            <a:endParaRPr lang="en-GB" dirty="0"/>
-          </a:p>
-          <a:p>
-            <a:pPr marL="171450" indent="-171450">
-              <a:buFontTx/>
-              <a:buChar char="-"/>
-            </a:pPr>
-            <a:r>
-              <a:rPr lang="en-GB" dirty="0" err="1"/>
-              <a:t>Persistence.jpa</a:t>
-            </a:r>
-            <a:r>
-              <a:rPr lang="en-GB" dirty="0"/>
-              <a:t> – </a:t>
-            </a:r>
-            <a:r>
-              <a:rPr lang="en-GB" dirty="0" err="1"/>
-              <a:t>classe</a:t>
-            </a:r>
-            <a:r>
-              <a:rPr lang="en-GB" dirty="0"/>
-              <a:t> </a:t>
-            </a:r>
-            <a:r>
-              <a:rPr lang="en-GB" dirty="0" err="1"/>
-              <a:t>utilitária</a:t>
-            </a:r>
-            <a:r>
-              <a:rPr lang="en-GB" dirty="0"/>
-              <a:t> </a:t>
-            </a:r>
-            <a:r>
-              <a:rPr lang="en-GB" dirty="0" err="1"/>
-              <a:t>JpaRepository</a:t>
-            </a:r>
             <a:endParaRPr lang="en-GB" dirty="0"/>
           </a:p>
         </p:txBody>
@@ -1026,178 +855,6 @@
           <a:bodyPr/>
           <a:lstStyle/>
           <a:p>
-            <a:r>
-              <a:rPr lang="en-GB" dirty="0"/>
-              <a:t>3 packages </a:t>
-            </a:r>
-            <a:r>
-              <a:rPr lang="en-GB" dirty="0" err="1"/>
-              <a:t>principais</a:t>
-            </a:r>
-            <a:endParaRPr lang="en-GB" dirty="0"/>
-          </a:p>
-          <a:p>
-            <a:pPr marL="171450" indent="-171450">
-              <a:buFontTx/>
-              <a:buChar char="-"/>
-            </a:pPr>
-            <a:r>
-              <a:rPr lang="en-GB" dirty="0"/>
-              <a:t>Model – classes </a:t>
-            </a:r>
-            <a:r>
-              <a:rPr lang="en-GB" dirty="0" err="1"/>
-              <a:t>utilitárias</a:t>
-            </a:r>
-            <a:r>
-              <a:rPr lang="en-GB" dirty="0"/>
-              <a:t> </a:t>
-            </a:r>
-            <a:r>
-              <a:rPr lang="en-GB" dirty="0" err="1"/>
-              <a:t>que</a:t>
-            </a:r>
-            <a:r>
-              <a:rPr lang="en-GB" dirty="0"/>
-              <a:t> </a:t>
-            </a:r>
-            <a:r>
-              <a:rPr lang="en-GB" dirty="0" err="1"/>
-              <a:t>podem</a:t>
-            </a:r>
-            <a:r>
-              <a:rPr lang="en-GB" dirty="0"/>
-              <a:t> </a:t>
-            </a:r>
-            <a:r>
-              <a:rPr lang="en-GB" dirty="0" err="1"/>
-              <a:t>ser</a:t>
-            </a:r>
-            <a:r>
-              <a:rPr lang="en-GB" dirty="0"/>
-              <a:t> </a:t>
-            </a:r>
-            <a:r>
-              <a:rPr lang="en-GB" dirty="0" err="1"/>
-              <a:t>usadas</a:t>
-            </a:r>
-            <a:r>
-              <a:rPr lang="en-GB" dirty="0"/>
-              <a:t> </a:t>
-            </a:r>
-            <a:r>
-              <a:rPr lang="en-GB" dirty="0" err="1"/>
-              <a:t>em</a:t>
-            </a:r>
-            <a:r>
-              <a:rPr lang="en-GB" dirty="0"/>
-              <a:t> </a:t>
-            </a:r>
-            <a:r>
-              <a:rPr lang="en-GB" dirty="0" err="1"/>
-              <a:t>qq</a:t>
-            </a:r>
-            <a:r>
-              <a:rPr lang="en-GB" dirty="0"/>
-              <a:t> </a:t>
-            </a:r>
-            <a:r>
-              <a:rPr lang="en-GB" dirty="0" err="1"/>
-              <a:t>modelo</a:t>
-            </a:r>
-            <a:r>
-              <a:rPr lang="en-GB" dirty="0"/>
-              <a:t>, ex., «value object» Money</a:t>
-            </a:r>
-          </a:p>
-          <a:p>
-            <a:pPr marL="171450" indent="-171450">
-              <a:buFontTx/>
-              <a:buChar char="-"/>
-            </a:pPr>
-            <a:r>
-              <a:rPr lang="en-GB" dirty="0"/>
-              <a:t>Patterns – </a:t>
-            </a:r>
-            <a:r>
-              <a:rPr lang="en-GB" dirty="0" err="1"/>
-              <a:t>essencialmente</a:t>
-            </a:r>
-            <a:r>
-              <a:rPr lang="en-GB" dirty="0"/>
-              <a:t> interfaces para “</a:t>
-            </a:r>
-            <a:r>
-              <a:rPr lang="en-GB" dirty="0" err="1"/>
-              <a:t>marcação</a:t>
-            </a:r>
-            <a:r>
-              <a:rPr lang="en-GB" dirty="0"/>
-              <a:t>” de classes DDD. </a:t>
-            </a:r>
-            <a:r>
-              <a:rPr lang="en-GB" dirty="0" err="1"/>
-              <a:t>Possui</a:t>
-            </a:r>
-            <a:r>
-              <a:rPr lang="en-GB" dirty="0"/>
-              <a:t> </a:t>
-            </a:r>
-            <a:r>
-              <a:rPr lang="en-GB" dirty="0" err="1"/>
-              <a:t>subpackage</a:t>
-            </a:r>
-            <a:r>
-              <a:rPr lang="en-GB" dirty="0"/>
-              <a:t> com </a:t>
-            </a:r>
-            <a:r>
-              <a:rPr lang="en-GB" dirty="0" err="1"/>
-              <a:t>implementações</a:t>
-            </a:r>
-            <a:r>
-              <a:rPr lang="en-GB" dirty="0"/>
-              <a:t> </a:t>
-            </a:r>
-            <a:r>
-              <a:rPr lang="en-GB" dirty="0" err="1"/>
-              <a:t>auxiliares</a:t>
-            </a:r>
-            <a:endParaRPr lang="en-GB" dirty="0"/>
-          </a:p>
-          <a:p>
-            <a:pPr marL="171450" indent="-171450">
-              <a:buFontTx/>
-              <a:buChar char="-"/>
-            </a:pPr>
-            <a:r>
-              <a:rPr lang="en-GB" dirty="0" err="1"/>
-              <a:t>Persistence.jpa</a:t>
-            </a:r>
-            <a:r>
-              <a:rPr lang="en-GB" dirty="0"/>
-              <a:t> – </a:t>
-            </a:r>
-            <a:r>
-              <a:rPr lang="en-GB" dirty="0" err="1"/>
-              <a:t>classe</a:t>
-            </a:r>
-            <a:r>
-              <a:rPr lang="en-GB" dirty="0"/>
-              <a:t> </a:t>
-            </a:r>
-            <a:r>
-              <a:rPr lang="en-GB" dirty="0" err="1"/>
-              <a:t>utilitária</a:t>
-            </a:r>
-            <a:r>
-              <a:rPr lang="en-GB" dirty="0"/>
-              <a:t> </a:t>
-            </a:r>
-            <a:r>
-              <a:rPr lang="en-GB" dirty="0" err="1"/>
-              <a:t>JpaRepository</a:t>
-            </a:r>
             <a:endParaRPr lang="en-GB" dirty="0"/>
           </a:p>
         </p:txBody>
@@ -1220,7 +877,7 @@
             <a:fld id="{54F76911-F589-44E9-8155-61F0472246BF}" type="slidenum">
               <a:rPr lang="pt-PT" smtClean="0"/>
               <a:pPr/>
-              <a:t>9</a:t>
+              <a:t>10</a:t>
             </a:fld>
             <a:endParaRPr lang="pt-PT"/>
           </a:p>
@@ -1477,7 +1134,7 @@
             <a:fld id="{54F76911-F589-44E9-8155-61F0472246BF}" type="slidenum">
               <a:rPr lang="pt-PT" smtClean="0"/>
               <a:pPr/>
-              <a:t>15</a:t>
+              <a:t>16</a:t>
             </a:fld>
             <a:endParaRPr lang="pt-PT"/>
           </a:p>
@@ -1648,7 +1305,7 @@
             <a:fld id="{54F76911-F589-44E9-8155-61F0472246BF}" type="slidenum">
               <a:rPr lang="pt-PT" smtClean="0"/>
               <a:pPr/>
-              <a:t>17</a:t>
+              <a:t>18</a:t>
             </a:fld>
             <a:endParaRPr lang="pt-PT"/>
           </a:p>
@@ -1782,7 +1439,7 @@
             <a:fld id="{54F76911-F589-44E9-8155-61F0472246BF}" type="slidenum">
               <a:rPr lang="pt-PT" smtClean="0"/>
               <a:pPr/>
-              <a:t>18</a:t>
+              <a:t>19</a:t>
             </a:fld>
             <a:endParaRPr lang="pt-PT"/>
           </a:p>
@@ -1867,7 +1524,7 @@
             <a:fld id="{54F76911-F589-44E9-8155-61F0472246BF}" type="slidenum">
               <a:rPr lang="pt-PT" smtClean="0"/>
               <a:pPr/>
-              <a:t>23</a:t>
+              <a:t>24</a:t>
             </a:fld>
             <a:endParaRPr lang="pt-PT"/>
           </a:p>
@@ -2028,7 +1685,7 @@
             <a:fld id="{54F76911-F589-44E9-8155-61F0472246BF}" type="slidenum">
               <a:rPr lang="pt-PT" smtClean="0"/>
               <a:pPr/>
-              <a:t>41</a:t>
+              <a:t>42</a:t>
             </a:fld>
             <a:endParaRPr lang="pt-PT"/>
           </a:p>
@@ -2292,7 +1949,7 @@
             <a:fld id="{1A3222AE-4D74-4601-B435-B179E428ACD9}" type="datetime1">
               <a:rPr lang="pt-PT" smtClean="0"/>
               <a:pPr/>
-              <a:t>12/06/2018</a:t>
+              <a:t>14/06/2018</a:t>
             </a:fld>
             <a:endParaRPr lang="pt-PT"/>
           </a:p>
@@ -2510,7 +2167,7 @@
             <a:fld id="{03643B1D-A57E-46BD-9617-845A2C51AEF7}" type="datetime1">
               <a:rPr lang="pt-PT" smtClean="0"/>
               <a:pPr/>
-              <a:t>12/06/2018</a:t>
+              <a:t>14/06/2018</a:t>
             </a:fld>
             <a:endParaRPr lang="pt-PT"/>
           </a:p>
@@ -2784,7 +2441,7 @@
             <a:fld id="{03643B1D-A57E-46BD-9617-845A2C51AEF7}" type="datetime1">
               <a:rPr lang="pt-PT" smtClean="0"/>
               <a:pPr/>
-              <a:t>12/06/2018</a:t>
+              <a:t>14/06/2018</a:t>
             </a:fld>
             <a:endParaRPr lang="pt-PT"/>
           </a:p>
@@ -2961,7 +2618,7 @@
             <a:fld id="{03643B1D-A57E-46BD-9617-845A2C51AEF7}" type="datetime1">
               <a:rPr lang="pt-PT" smtClean="0"/>
               <a:pPr/>
-              <a:t>12/06/2018</a:t>
+              <a:t>14/06/2018</a:t>
             </a:fld>
             <a:endParaRPr lang="pt-PT"/>
           </a:p>
@@ -3317,7 +2974,7 @@
             <a:fld id="{03643B1D-A57E-46BD-9617-845A2C51AEF7}" type="datetime1">
               <a:rPr lang="pt-PT" smtClean="0"/>
               <a:pPr/>
-              <a:t>12/06/2018</a:t>
+              <a:t>14/06/2018</a:t>
             </a:fld>
             <a:endParaRPr lang="pt-PT"/>
           </a:p>
@@ -3604,7 +3261,7 @@
             <a:fld id="{03643B1D-A57E-46BD-9617-845A2C51AEF7}" type="datetime1">
               <a:rPr lang="pt-PT" smtClean="0"/>
               <a:pPr/>
-              <a:t>12/06/2018</a:t>
+              <a:t>14/06/2018</a:t>
             </a:fld>
             <a:endParaRPr lang="pt-PT"/>
           </a:p>
@@ -4028,7 +3685,7 @@
             <a:fld id="{03643B1D-A57E-46BD-9617-845A2C51AEF7}" type="datetime1">
               <a:rPr lang="pt-PT" smtClean="0"/>
               <a:pPr/>
-              <a:t>12/06/2018</a:t>
+              <a:t>14/06/2018</a:t>
             </a:fld>
             <a:endParaRPr lang="pt-PT"/>
           </a:p>
@@ -4143,7 +3800,7 @@
             <a:fld id="{03643B1D-A57E-46BD-9617-845A2C51AEF7}" type="datetime1">
               <a:rPr lang="pt-PT" smtClean="0"/>
               <a:pPr/>
-              <a:t>12/06/2018</a:t>
+              <a:t>14/06/2018</a:t>
             </a:fld>
             <a:endParaRPr lang="pt-PT"/>
           </a:p>
@@ -4236,7 +3893,7 @@
             <a:fld id="{03643B1D-A57E-46BD-9617-845A2C51AEF7}" type="datetime1">
               <a:rPr lang="pt-PT" smtClean="0"/>
               <a:pPr/>
-              <a:t>12/06/2018</a:t>
+              <a:t>14/06/2018</a:t>
             </a:fld>
             <a:endParaRPr lang="pt-PT"/>
           </a:p>
@@ -4516,7 +4173,7 @@
             <a:fld id="{03643B1D-A57E-46BD-9617-845A2C51AEF7}" type="datetime1">
               <a:rPr lang="pt-PT" smtClean="0"/>
               <a:pPr/>
-              <a:t>12/06/2018</a:t>
+              <a:t>14/06/2018</a:t>
             </a:fld>
             <a:endParaRPr lang="pt-PT"/>
           </a:p>
@@ -4880,7 +4537,7 @@
             <a:fld id="{03643B1D-A57E-46BD-9617-845A2C51AEF7}" type="datetime1">
               <a:rPr lang="pt-PT" smtClean="0"/>
               <a:pPr/>
-              <a:t>12/06/2018</a:t>
+              <a:t>14/06/2018</a:t>
             </a:fld>
             <a:endParaRPr lang="pt-PT"/>
           </a:p>
@@ -5306,7 +4963,7 @@
             <a:fld id="{03643B1D-A57E-46BD-9617-845A2C51AEF7}" type="datetime1">
               <a:rPr lang="pt-PT" smtClean="0"/>
               <a:pPr/>
-              <a:t>12/06/2018</a:t>
+              <a:t>14/06/2018</a:t>
             </a:fld>
             <a:endParaRPr lang="pt-PT"/>
           </a:p>
@@ -5830,16 +5487,47 @@
           <a:p>
             <a:r>
               <a:rPr lang="en-GB" dirty="0"/>
-              <a:t>P</a:t>
-            </a:r>
-            <a:r>
-              <a:rPr lang="en-GB" dirty="0" smtClean="0"/>
-              <a:t>resentation</a:t>
-            </a:r>
-            <a:endParaRPr lang="en-GB" dirty="0"/>
-          </a:p>
-        </p:txBody>
-      </p:sp>
+              <a:t>Presentation</a:t>
+            </a:r>
+          </a:p>
+        </p:txBody>
+      </p:sp>
+      <p:pic>
+        <p:nvPicPr>
+          <p:cNvPr id="3" name="Content Placeholder 2"/>
+          <p:cNvPicPr>
+            <a:picLocks noGrp="1" noChangeAspect="1"/>
+          </p:cNvPicPr>
+          <p:nvPr>
+            <p:ph sz="half" idx="2"/>
+          </p:nvPr>
+        </p:nvPicPr>
+        <p:blipFill>
+          <a:blip r:embed="rId3"/>
+          <a:stretch>
+            <a:fillRect/>
+          </a:stretch>
+        </p:blipFill>
+        <p:spPr>
+          <a:xfrm>
+            <a:off x="5195887" y="2451894"/>
+            <a:ext cx="2943225" cy="3267075"/>
+          </a:xfrm>
+          <a:prstGeom prst="rect">
+            <a:avLst/>
+          </a:prstGeom>
+          <a:ln>
+            <a:noFill/>
+          </a:ln>
+          <a:effectLst>
+            <a:outerShdw blurRad="292100" dist="139700" dir="2700000" algn="tl" rotWithShape="0">
+              <a:srgbClr val="333333">
+                <a:alpha val="65000"/>
+              </a:srgbClr>
+            </a:outerShdw>
+          </a:effectLst>
+        </p:spPr>
+      </p:pic>
       <p:sp>
         <p:nvSpPr>
           <p:cNvPr id="5" name="Slide Number Placeholder 4"/>
@@ -5859,6 +5547,111 @@
               <a:rPr lang="pt-PT" smtClean="0"/>
               <a:pPr/>
               <a:t>10</a:t>
+            </a:fld>
+            <a:endParaRPr lang="pt-PT"/>
+          </a:p>
+        </p:txBody>
+      </p:sp>
+      <p:pic>
+        <p:nvPicPr>
+          <p:cNvPr id="9" name="Picture 8"/>
+          <p:cNvPicPr>
+            <a:picLocks noChangeAspect="1"/>
+          </p:cNvPicPr>
+          <p:nvPr/>
+        </p:nvPicPr>
+        <p:blipFill>
+          <a:blip r:embed="rId4"/>
+          <a:stretch>
+            <a:fillRect/>
+          </a:stretch>
+        </p:blipFill>
+        <p:spPr>
+          <a:xfrm>
+            <a:off x="431540" y="1376772"/>
+            <a:ext cx="3636404" cy="5458939"/>
+          </a:xfrm>
+          <a:prstGeom prst="rect">
+            <a:avLst/>
+          </a:prstGeom>
+        </p:spPr>
+      </p:pic>
+    </p:spTree>
+    <p:extLst>
+      <p:ext uri="{BB962C8B-B14F-4D97-AF65-F5344CB8AC3E}">
+        <p14:creationId xmlns:p14="http://schemas.microsoft.com/office/powerpoint/2010/main" val="1368000890"/>
+      </p:ext>
+    </p:extLst>
+  </p:cSld>
+  <p:clrMapOvr>
+    <a:masterClrMapping/>
+  </p:clrMapOvr>
+</p:sld>
+</file>
+
+<file path=ppt/slides/slide11.xml><?xml version="1.0" encoding="utf-8"?>
+<p:sld xmlns:a="http://schemas.openxmlformats.org/drawingml/2006/main" xmlns:r="http://schemas.openxmlformats.org/officeDocument/2006/relationships" xmlns:p="http://schemas.openxmlformats.org/presentationml/2006/main">
+  <p:cSld>
+    <p:spTree>
+      <p:nvGrpSpPr>
+        <p:cNvPr id="1" name=""/>
+        <p:cNvGrpSpPr/>
+        <p:nvPr/>
+      </p:nvGrpSpPr>
+      <p:grpSpPr>
+        <a:xfrm>
+          <a:off x="0" y="0"/>
+          <a:ext cx="0" cy="0"/>
+          <a:chOff x="0" y="0"/>
+          <a:chExt cx="0" cy="0"/>
+        </a:xfrm>
+      </p:grpSpPr>
+      <p:sp>
+        <p:nvSpPr>
+          <p:cNvPr id="2" name="Title 1"/>
+          <p:cNvSpPr>
+            <a:spLocks noGrp="1"/>
+          </p:cNvSpPr>
+          <p:nvPr>
+            <p:ph type="title"/>
+          </p:nvPr>
+        </p:nvSpPr>
+        <p:spPr/>
+        <p:txBody>
+          <a:bodyPr/>
+          <a:lstStyle/>
+          <a:p>
+            <a:r>
+              <a:rPr lang="en-GB" dirty="0"/>
+              <a:t>P</a:t>
+            </a:r>
+            <a:r>
+              <a:rPr lang="en-GB" dirty="0" smtClean="0"/>
+              <a:t>resentation</a:t>
+            </a:r>
+            <a:endParaRPr lang="en-GB" dirty="0"/>
+          </a:p>
+        </p:txBody>
+      </p:sp>
+      <p:sp>
+        <p:nvSpPr>
+          <p:cNvPr id="5" name="Slide Number Placeholder 4"/>
+          <p:cNvSpPr>
+            <a:spLocks noGrp="1"/>
+          </p:cNvSpPr>
+          <p:nvPr>
+            <p:ph type="sldNum" sz="quarter" idx="12"/>
+          </p:nvPr>
+        </p:nvSpPr>
+        <p:spPr/>
+        <p:txBody>
+          <a:bodyPr/>
+          <a:lstStyle/>
+          <a:p>
+            <a:fld id="{024A9932-4E76-455F-8E1A-2CC10C89B014}" type="slidenum">
+              <a:rPr lang="pt-PT" smtClean="0"/>
+              <a:pPr/>
+              <a:t>11</a:t>
             </a:fld>
             <a:endParaRPr lang="pt-PT"/>
           </a:p>
@@ -5904,7 +5697,7 @@
 </p:sld>
 </file>
 
-<file path=ppt/slides/slide11.xml><?xml version="1.0" encoding="utf-8"?>
+<file path=ppt/slides/slide12.xml><?xml version="1.0" encoding="utf-8"?>
 <p:sld xmlns:a="http://schemas.openxmlformats.org/drawingml/2006/main" xmlns:r="http://schemas.openxmlformats.org/officeDocument/2006/relationships" xmlns:p="http://schemas.openxmlformats.org/presentationml/2006/main">
   <p:cSld>
     <p:spTree>
@@ -5939,7 +5732,7 @@
             <a:fld id="{024A9932-4E76-455F-8E1A-2CC10C89B014}" type="slidenum">
               <a:rPr lang="pt-PT" smtClean="0"/>
               <a:pPr/>
-              <a:t>11</a:t>
+              <a:t>12</a:t>
             </a:fld>
             <a:endParaRPr lang="pt-PT"/>
           </a:p>
@@ -6005,7 +5798,7 @@
 </p:sld>
 </file>
 
-<file path=ppt/slides/slide12.xml><?xml version="1.0" encoding="utf-8"?>
+<file path=ppt/slides/slide13.xml><?xml version="1.0" encoding="utf-8"?>
 <p:sld xmlns:a="http://schemas.openxmlformats.org/drawingml/2006/main" xmlns:r="http://schemas.openxmlformats.org/officeDocument/2006/relationships" xmlns:p="http://schemas.openxmlformats.org/presentationml/2006/main">
   <p:cSld>
     <p:spTree>
@@ -6040,7 +5833,7 @@
             <a:fld id="{024A9932-4E76-455F-8E1A-2CC10C89B014}" type="slidenum">
               <a:rPr lang="pt-PT" smtClean="0"/>
               <a:pPr/>
-              <a:t>12</a:t>
+              <a:t>13</a:t>
             </a:fld>
             <a:endParaRPr lang="pt-PT"/>
           </a:p>
@@ -6082,7 +5875,7 @@
 </p:sld>
 </file>
 
-<file path=ppt/slides/slide13.xml><?xml version="1.0" encoding="utf-8"?>
+<file path=ppt/slides/slide14.xml><?xml version="1.0" encoding="utf-8"?>
 <p:sld xmlns:a="http://schemas.openxmlformats.org/drawingml/2006/main" xmlns:r="http://schemas.openxmlformats.org/officeDocument/2006/relationships" xmlns:p="http://schemas.openxmlformats.org/presentationml/2006/main">
   <p:cSld>
     <p:spTree>
@@ -6117,7 +5910,7 @@
             <a:fld id="{024A9932-4E76-455F-8E1A-2CC10C89B014}" type="slidenum">
               <a:rPr lang="pt-PT" smtClean="0"/>
               <a:pPr/>
-              <a:t>13</a:t>
+              <a:t>14</a:t>
             </a:fld>
             <a:endParaRPr lang="pt-PT"/>
           </a:p>
@@ -6214,110 +6007,6 @@
 </p:sld>
 </file>
 
-<file path=ppt/slides/slide14.xml><?xml version="1.0" encoding="utf-8"?>
-<p:sld xmlns:a="http://schemas.openxmlformats.org/drawingml/2006/main" xmlns:r="http://schemas.openxmlformats.org/officeDocument/2006/relationships" xmlns:p="http://schemas.openxmlformats.org/presentationml/2006/main">
-  <p:cSld>
-    <p:spTree>
-      <p:nvGrpSpPr>
-        <p:cNvPr id="1" name=""/>
-        <p:cNvGrpSpPr/>
-        <p:nvPr/>
-      </p:nvGrpSpPr>
-      <p:grpSpPr>
-        <a:xfrm>
-          <a:off x="0" y="0"/>
-          <a:ext cx="0" cy="0"/>
-          <a:chOff x="0" y="0"/>
-          <a:chExt cx="0" cy="0"/>
-        </a:xfrm>
-      </p:grpSpPr>
-      <p:sp>
-        <p:nvSpPr>
-          <p:cNvPr id="6" name="Title 5"/>
-          <p:cNvSpPr>
-            <a:spLocks noGrp="1"/>
-          </p:cNvSpPr>
-          <p:nvPr>
-            <p:ph type="title"/>
-          </p:nvPr>
-        </p:nvSpPr>
-        <p:spPr/>
-        <p:txBody>
-          <a:bodyPr/>
-          <a:lstStyle/>
-          <a:p>
-            <a:r>
-              <a:rPr lang="en-GB" dirty="0"/>
-              <a:t>C</a:t>
-            </a:r>
-            <a:r>
-              <a:rPr lang="en-GB" dirty="0" smtClean="0"/>
-              <a:t>ore</a:t>
-            </a:r>
-            <a:endParaRPr lang="en-US" dirty="0"/>
-          </a:p>
-        </p:txBody>
-      </p:sp>
-      <p:sp>
-        <p:nvSpPr>
-          <p:cNvPr id="7" name="Text Placeholder 6"/>
-          <p:cNvSpPr>
-            <a:spLocks noGrp="1"/>
-          </p:cNvSpPr>
-          <p:nvPr>
-            <p:ph type="body" idx="1"/>
-          </p:nvPr>
-        </p:nvSpPr>
-        <p:spPr/>
-        <p:txBody>
-          <a:bodyPr/>
-          <a:lstStyle/>
-          <a:p>
-            <a:r>
-              <a:rPr lang="en-GB" dirty="0" smtClean="0"/>
-              <a:t>Persistence </a:t>
-            </a:r>
-            <a:endParaRPr lang="en-US" dirty="0"/>
-          </a:p>
-        </p:txBody>
-      </p:sp>
-      <p:sp>
-        <p:nvSpPr>
-          <p:cNvPr id="5" name="Slide Number Placeholder 4"/>
-          <p:cNvSpPr>
-            <a:spLocks noGrp="1"/>
-          </p:cNvSpPr>
-          <p:nvPr>
-            <p:ph type="sldNum" sz="quarter" idx="12"/>
-          </p:nvPr>
-        </p:nvSpPr>
-        <p:spPr/>
-        <p:txBody>
-          <a:bodyPr/>
-          <a:lstStyle/>
-          <a:p>
-            <a:fld id="{024A9932-4E76-455F-8E1A-2CC10C89B014}" type="slidenum">
-              <a:rPr lang="pt-PT" smtClean="0"/>
-              <a:pPr/>
-              <a:t>14</a:t>
-            </a:fld>
-            <a:endParaRPr lang="pt-PT"/>
-          </a:p>
-        </p:txBody>
-      </p:sp>
-    </p:spTree>
-    <p:extLst>
-      <p:ext uri="{BB962C8B-B14F-4D97-AF65-F5344CB8AC3E}">
-        <p14:creationId xmlns:p14="http://schemas.microsoft.com/office/powerpoint/2010/main" val="2371246310"/>
-      </p:ext>
-    </p:extLst>
-  </p:cSld>
-  <p:clrMapOvr>
-    <a:masterClrMapping/>
-  </p:clrMapOvr>
-</p:sld>
-</file>
-
 <file path=ppt/slides/slide15.xml><?xml version="1.0" encoding="utf-8"?>
 <p:sld xmlns:a="http://schemas.openxmlformats.org/drawingml/2006/main" xmlns:r="http://schemas.openxmlformats.org/officeDocument/2006/relationships" xmlns:p="http://schemas.openxmlformats.org/presentationml/2006/main">
   <p:cSld>
@@ -6337,7 +6026,7 @@
       </p:grpSpPr>
       <p:sp>
         <p:nvSpPr>
-          <p:cNvPr id="2" name="Title 1"/>
+          <p:cNvPr id="6" name="Title 5"/>
           <p:cNvSpPr>
             <a:spLocks noGrp="1"/>
           </p:cNvSpPr>
@@ -6351,87 +6040,37 @@
           <a:lstStyle/>
           <a:p>
             <a:r>
+              <a:rPr lang="en-GB" dirty="0"/>
+              <a:t>C</a:t>
+            </a:r>
+            <a:r>
               <a:rPr lang="en-GB" dirty="0" smtClean="0"/>
-              <a:t>Persistence</a:t>
-            </a:r>
-            <a:endParaRPr lang="en-GB" dirty="0"/>
-          </a:p>
-        </p:txBody>
-      </p:sp>
-      <p:sp>
-        <p:nvSpPr>
-          <p:cNvPr id="3" name="Content Placeholder 2"/>
-          <p:cNvSpPr>
-            <a:spLocks noGrp="1"/>
-          </p:cNvSpPr>
-          <p:nvPr>
-            <p:ph sz="half" idx="1"/>
-          </p:nvPr>
-        </p:nvSpPr>
-        <p:spPr/>
-        <p:txBody>
-          <a:bodyPr/>
-          <a:lstStyle/>
-          <a:p>
-            <a:r>
-              <a:rPr lang="en-GB" dirty="0"/>
-              <a:t>Persistence</a:t>
-            </a:r>
-          </a:p>
-          <a:p>
-            <a:pPr lvl="1"/>
-            <a:r>
-              <a:rPr lang="en-GB" dirty="0"/>
-              <a:t>Repository interfaces</a:t>
-            </a:r>
-          </a:p>
-          <a:p>
-            <a:r>
-              <a:rPr lang="en-GB" dirty="0"/>
-              <a:t>Implementations</a:t>
-            </a:r>
-          </a:p>
-          <a:p>
-            <a:pPr lvl="1"/>
-            <a:r>
-              <a:rPr lang="en-GB" dirty="0"/>
-              <a:t>JPA</a:t>
-            </a:r>
-          </a:p>
-          <a:p>
-            <a:pPr lvl="1"/>
-            <a:r>
-              <a:rPr lang="en-GB" dirty="0" err="1" smtClean="0"/>
-              <a:t>InMemory</a:t>
-            </a:r>
-            <a:endParaRPr lang="en-GB" dirty="0" smtClean="0"/>
-          </a:p>
-          <a:p>
-            <a:pPr lvl="1"/>
+              <a:t>ore</a:t>
+            </a:r>
+            <a:endParaRPr lang="en-US" dirty="0"/>
+          </a:p>
+        </p:txBody>
+      </p:sp>
+      <p:sp>
+        <p:nvSpPr>
+          <p:cNvPr id="7" name="Text Placeholder 6"/>
+          <p:cNvSpPr>
+            <a:spLocks noGrp="1"/>
+          </p:cNvSpPr>
+          <p:nvPr>
+            <p:ph type="body" idx="1"/>
+          </p:nvPr>
+        </p:nvSpPr>
+        <p:spPr/>
+        <p:txBody>
+          <a:bodyPr/>
+          <a:lstStyle/>
+          <a:p>
             <a:r>
               <a:rPr lang="en-GB" dirty="0" smtClean="0"/>
-              <a:t>Spring Data JPA</a:t>
-            </a:r>
-            <a:endParaRPr lang="en-GB" dirty="0"/>
-          </a:p>
-        </p:txBody>
-      </p:sp>
-      <p:sp>
-        <p:nvSpPr>
-          <p:cNvPr id="4" name="Content Placeholder 3"/>
-          <p:cNvSpPr>
-            <a:spLocks noGrp="1"/>
-          </p:cNvSpPr>
-          <p:nvPr>
-            <p:ph sz="half" idx="2"/>
-          </p:nvPr>
-        </p:nvSpPr>
-        <p:spPr/>
-        <p:txBody>
-          <a:bodyPr/>
-          <a:lstStyle/>
-          <a:p>
-            <a:endParaRPr lang="en-GB"/>
+              <a:t>Persistence </a:t>
+            </a:r>
+            <a:endParaRPr lang="en-US" dirty="0"/>
           </a:p>
         </p:txBody>
       </p:sp>
@@ -6454,6 +6093,160 @@
               <a:rPr lang="pt-PT" smtClean="0"/>
               <a:pPr/>
               <a:t>15</a:t>
+            </a:fld>
+            <a:endParaRPr lang="pt-PT"/>
+          </a:p>
+        </p:txBody>
+      </p:sp>
+    </p:spTree>
+    <p:extLst>
+      <p:ext uri="{BB962C8B-B14F-4D97-AF65-F5344CB8AC3E}">
+        <p14:creationId xmlns:p14="http://schemas.microsoft.com/office/powerpoint/2010/main" val="2371246310"/>
+      </p:ext>
+    </p:extLst>
+  </p:cSld>
+  <p:clrMapOvr>
+    <a:masterClrMapping/>
+  </p:clrMapOvr>
+</p:sld>
+</file>
+
+<file path=ppt/slides/slide16.xml><?xml version="1.0" encoding="utf-8"?>
+<p:sld xmlns:a="http://schemas.openxmlformats.org/drawingml/2006/main" xmlns:r="http://schemas.openxmlformats.org/officeDocument/2006/relationships" xmlns:p="http://schemas.openxmlformats.org/presentationml/2006/main">
+  <p:cSld>
+    <p:spTree>
+      <p:nvGrpSpPr>
+        <p:cNvPr id="1" name=""/>
+        <p:cNvGrpSpPr/>
+        <p:nvPr/>
+      </p:nvGrpSpPr>
+      <p:grpSpPr>
+        <a:xfrm>
+          <a:off x="0" y="0"/>
+          <a:ext cx="0" cy="0"/>
+          <a:chOff x="0" y="0"/>
+          <a:chExt cx="0" cy="0"/>
+        </a:xfrm>
+      </p:grpSpPr>
+      <p:sp>
+        <p:nvSpPr>
+          <p:cNvPr id="2" name="Title 1"/>
+          <p:cNvSpPr>
+            <a:spLocks noGrp="1"/>
+          </p:cNvSpPr>
+          <p:nvPr>
+            <p:ph type="title"/>
+          </p:nvPr>
+        </p:nvSpPr>
+        <p:spPr/>
+        <p:txBody>
+          <a:bodyPr/>
+          <a:lstStyle/>
+          <a:p>
+            <a:r>
+              <a:rPr lang="en-GB" dirty="0" smtClean="0"/>
+              <a:t>Persistence</a:t>
+            </a:r>
+            <a:endParaRPr lang="en-GB" dirty="0"/>
+          </a:p>
+        </p:txBody>
+      </p:sp>
+      <p:sp>
+        <p:nvSpPr>
+          <p:cNvPr id="3" name="Content Placeholder 2"/>
+          <p:cNvSpPr>
+            <a:spLocks noGrp="1"/>
+          </p:cNvSpPr>
+          <p:nvPr>
+            <p:ph sz="half" idx="1"/>
+          </p:nvPr>
+        </p:nvSpPr>
+        <p:spPr/>
+        <p:txBody>
+          <a:bodyPr/>
+          <a:lstStyle/>
+          <a:p>
+            <a:r>
+              <a:rPr lang="en-GB" dirty="0"/>
+              <a:t>Persistence</a:t>
+            </a:r>
+          </a:p>
+          <a:p>
+            <a:pPr lvl="1"/>
+            <a:r>
+              <a:rPr lang="en-GB" dirty="0"/>
+              <a:t>Repository interfaces</a:t>
+            </a:r>
+          </a:p>
+          <a:p>
+            <a:r>
+              <a:rPr lang="en-GB" dirty="0"/>
+              <a:t>Implementations</a:t>
+            </a:r>
+          </a:p>
+          <a:p>
+            <a:pPr lvl="1"/>
+            <a:r>
+              <a:rPr lang="en-GB" dirty="0"/>
+              <a:t>JPA</a:t>
+            </a:r>
+          </a:p>
+          <a:p>
+            <a:pPr lvl="1"/>
+            <a:r>
+              <a:rPr lang="en-GB" dirty="0" err="1" smtClean="0"/>
+              <a:t>InMemory</a:t>
+            </a:r>
+            <a:endParaRPr lang="en-GB" dirty="0" smtClean="0"/>
+          </a:p>
+          <a:p>
+            <a:pPr lvl="1"/>
+            <a:r>
+              <a:rPr lang="en-GB" dirty="0" smtClean="0"/>
+              <a:t>Spring Data JPA</a:t>
+            </a:r>
+            <a:endParaRPr lang="en-GB" dirty="0"/>
+          </a:p>
+        </p:txBody>
+      </p:sp>
+      <p:sp>
+        <p:nvSpPr>
+          <p:cNvPr id="4" name="Content Placeholder 3"/>
+          <p:cNvSpPr>
+            <a:spLocks noGrp="1"/>
+          </p:cNvSpPr>
+          <p:nvPr>
+            <p:ph sz="half" idx="2"/>
+          </p:nvPr>
+        </p:nvSpPr>
+        <p:spPr/>
+        <p:txBody>
+          <a:bodyPr/>
+          <a:lstStyle/>
+          <a:p>
+            <a:endParaRPr lang="en-GB"/>
+          </a:p>
+        </p:txBody>
+      </p:sp>
+      <p:sp>
+        <p:nvSpPr>
+          <p:cNvPr id="5" name="Slide Number Placeholder 4"/>
+          <p:cNvSpPr>
+            <a:spLocks noGrp="1"/>
+          </p:cNvSpPr>
+          <p:nvPr>
+            <p:ph type="sldNum" sz="quarter" idx="12"/>
+          </p:nvPr>
+        </p:nvSpPr>
+        <p:spPr/>
+        <p:txBody>
+          <a:bodyPr/>
+          <a:lstStyle/>
+          <a:p>
+            <a:fld id="{024A9932-4E76-455F-8E1A-2CC10C89B014}" type="slidenum">
+              <a:rPr lang="pt-PT" smtClean="0"/>
+              <a:pPr/>
+              <a:t>16</a:t>
             </a:fld>
             <a:endParaRPr lang="pt-PT"/>
           </a:p>
@@ -6496,123 +6289,6 @@
 </p:sld>
 </file>
 
-<file path=ppt/slides/slide16.xml><?xml version="1.0" encoding="utf-8"?>
-<p:sld xmlns:a="http://schemas.openxmlformats.org/drawingml/2006/main" xmlns:r="http://schemas.openxmlformats.org/officeDocument/2006/relationships" xmlns:p="http://schemas.openxmlformats.org/presentationml/2006/main">
-  <p:cSld>
-    <p:spTree>
-      <p:nvGrpSpPr>
-        <p:cNvPr id="1" name=""/>
-        <p:cNvGrpSpPr/>
-        <p:nvPr/>
-      </p:nvGrpSpPr>
-      <p:grpSpPr>
-        <a:xfrm>
-          <a:off x="0" y="0"/>
-          <a:ext cx="0" cy="0"/>
-          <a:chOff x="0" y="0"/>
-          <a:chExt cx="0" cy="0"/>
-        </a:xfrm>
-      </p:grpSpPr>
-      <p:sp>
-        <p:nvSpPr>
-          <p:cNvPr id="2" name="Title 1"/>
-          <p:cNvSpPr>
-            <a:spLocks noGrp="1"/>
-          </p:cNvSpPr>
-          <p:nvPr>
-            <p:ph type="title"/>
-          </p:nvPr>
-        </p:nvSpPr>
-        <p:spPr/>
-        <p:txBody>
-          <a:bodyPr/>
-          <a:lstStyle/>
-          <a:p>
-            <a:r>
-              <a:rPr lang="en-GB" dirty="0"/>
-              <a:t>Repositories</a:t>
-            </a:r>
-            <a:endParaRPr lang="en-US" dirty="0"/>
-          </a:p>
-        </p:txBody>
-      </p:sp>
-      <p:sp>
-        <p:nvSpPr>
-          <p:cNvPr id="3" name="Content Placeholder 2"/>
-          <p:cNvSpPr>
-            <a:spLocks noGrp="1"/>
-          </p:cNvSpPr>
-          <p:nvPr>
-            <p:ph idx="1"/>
-          </p:nvPr>
-        </p:nvSpPr>
-        <p:spPr/>
-        <p:txBody>
-          <a:bodyPr/>
-          <a:lstStyle/>
-          <a:p>
-            <a:r>
-              <a:rPr lang="en-GB" dirty="0" err="1"/>
-              <a:t>DataRepository</a:t>
-            </a:r>
-            <a:endParaRPr lang="en-GB" dirty="0"/>
-          </a:p>
-          <a:p>
-            <a:r>
-              <a:rPr lang="en-GB" dirty="0" err="1"/>
-              <a:t>TransactionalContext</a:t>
-            </a:r>
-            <a:endParaRPr lang="en-GB" dirty="0"/>
-          </a:p>
-          <a:p>
-            <a:endParaRPr lang="en-GB" dirty="0"/>
-          </a:p>
-          <a:p>
-            <a:r>
-              <a:rPr lang="en-GB" dirty="0"/>
-              <a:t>Interfaces for describing repository functionalities and transactions</a:t>
-            </a:r>
-            <a:endParaRPr lang="en-US" dirty="0"/>
-          </a:p>
-        </p:txBody>
-      </p:sp>
-      <p:sp>
-        <p:nvSpPr>
-          <p:cNvPr id="5" name="Slide Number Placeholder 4"/>
-          <p:cNvSpPr>
-            <a:spLocks noGrp="1"/>
-          </p:cNvSpPr>
-          <p:nvPr>
-            <p:ph type="sldNum" sz="quarter" idx="12"/>
-          </p:nvPr>
-        </p:nvSpPr>
-        <p:spPr/>
-        <p:txBody>
-          <a:bodyPr/>
-          <a:lstStyle/>
-          <a:p>
-            <a:fld id="{024A9932-4E76-455F-8E1A-2CC10C89B014}" type="slidenum">
-              <a:rPr lang="pt-PT" smtClean="0"/>
-              <a:pPr/>
-              <a:t>16</a:t>
-            </a:fld>
-            <a:endParaRPr lang="pt-PT"/>
-          </a:p>
-        </p:txBody>
-      </p:sp>
-    </p:spTree>
-    <p:extLst>
-      <p:ext uri="{BB962C8B-B14F-4D97-AF65-F5344CB8AC3E}">
-        <p14:creationId xmlns:p14="http://schemas.microsoft.com/office/powerpoint/2010/main" val="4047766332"/>
-      </p:ext>
-    </p:extLst>
-  </p:cSld>
-  <p:clrMapOvr>
-    <a:masterClrMapping/>
-  </p:clrMapOvr>
-</p:sld>
-</file>
-
 <file path=ppt/slides/slide17.xml><?xml version="1.0" encoding="utf-8"?>
 <p:sld xmlns:a="http://schemas.openxmlformats.org/drawingml/2006/main" xmlns:r="http://schemas.openxmlformats.org/officeDocument/2006/relationships" xmlns:p="http://schemas.openxmlformats.org/presentationml/2006/main">
   <p:cSld>
@@ -6632,7 +6308,7 @@
       </p:grpSpPr>
       <p:sp>
         <p:nvSpPr>
-          <p:cNvPr id="6" name="Title 5"/>
+          <p:cNvPr id="2" name="Title 1"/>
           <p:cNvSpPr>
             <a:spLocks noGrp="1"/>
           </p:cNvSpPr>
@@ -6647,14 +6323,15 @@
           <a:p>
             <a:r>
               <a:rPr lang="en-GB" dirty="0"/>
-              <a:t>Persistence</a:t>
-            </a:r>
-          </a:p>
-        </p:txBody>
-      </p:sp>
-      <p:sp>
-        <p:nvSpPr>
-          <p:cNvPr id="7" name="Content Placeholder 6"/>
+              <a:t>Repositories</a:t>
+            </a:r>
+            <a:endParaRPr lang="en-US" dirty="0"/>
+          </a:p>
+        </p:txBody>
+      </p:sp>
+      <p:sp>
+        <p:nvSpPr>
+          <p:cNvPr id="3" name="Content Placeholder 2"/>
           <p:cNvSpPr>
             <a:spLocks noGrp="1"/>
           </p:cNvSpPr>
@@ -6664,68 +6341,31 @@
         </p:nvSpPr>
         <p:spPr/>
         <p:txBody>
-          <a:bodyPr>
-            <a:normAutofit lnSpcReduction="10000"/>
-          </a:bodyPr>
-          <a:lstStyle/>
+          <a:bodyPr/>
+          <a:lstStyle/>
+          <a:p>
+            <a:r>
+              <a:rPr lang="en-GB" dirty="0" err="1"/>
+              <a:t>DataRepository</a:t>
+            </a:r>
+            <a:endParaRPr lang="en-GB" dirty="0"/>
+          </a:p>
+          <a:p>
+            <a:r>
+              <a:rPr lang="en-GB" dirty="0" err="1"/>
+              <a:t>TransactionalContext</a:t>
+            </a:r>
+            <a:endParaRPr lang="en-GB" dirty="0"/>
+          </a:p>
+          <a:p>
+            <a:endParaRPr lang="en-GB" dirty="0"/>
+          </a:p>
           <a:p>
             <a:r>
               <a:rPr lang="en-GB" dirty="0"/>
-              <a:t>Controller needs to access the repositories</a:t>
-            </a:r>
-          </a:p>
-          <a:p>
-            <a:r>
-              <a:rPr lang="en-GB" dirty="0"/>
-              <a:t>But we have three repository implementations</a:t>
-            </a:r>
-          </a:p>
-          <a:p>
-            <a:pPr lvl="1"/>
-            <a:r>
-              <a:rPr lang="en-GB" dirty="0"/>
-              <a:t>In memory</a:t>
-            </a:r>
-          </a:p>
-          <a:p>
-            <a:pPr lvl="1"/>
-            <a:r>
-              <a:rPr lang="en-GB" dirty="0"/>
-              <a:t>Relational database thru JPA</a:t>
-            </a:r>
-          </a:p>
-          <a:p>
-            <a:pPr lvl="1"/>
-            <a:r>
-              <a:rPr lang="en-GB" dirty="0"/>
-              <a:t>Relational database thru </a:t>
-            </a:r>
-            <a:r>
-              <a:rPr lang="en-GB" dirty="0" err="1"/>
-              <a:t>SpringData</a:t>
-            </a:r>
-            <a:endParaRPr lang="en-GB" dirty="0"/>
-          </a:p>
-          <a:p>
-            <a:r>
-              <a:rPr lang="en-GB" dirty="0"/>
-              <a:t>Hide persistence details from rest of the code</a:t>
-            </a:r>
-          </a:p>
-          <a:p>
-            <a:pPr lvl="1"/>
-            <a:r>
-              <a:rPr lang="en-GB" dirty="0"/>
-              <a:t>Interfaces</a:t>
-            </a:r>
-          </a:p>
-          <a:p>
-            <a:pPr lvl="1"/>
-            <a:r>
-              <a:rPr lang="en-GB" dirty="0" smtClean="0"/>
-              <a:t>Dependency injection or Factories </a:t>
-            </a:r>
-            <a:endParaRPr lang="en-GB" dirty="0"/>
+              <a:t>Interfaces for describing repository functionalities and transactions</a:t>
+            </a:r>
+            <a:endParaRPr lang="en-US" dirty="0"/>
           </a:p>
         </p:txBody>
       </p:sp>
@@ -6756,7 +6396,7 @@
     </p:spTree>
     <p:extLst>
       <p:ext uri="{BB962C8B-B14F-4D97-AF65-F5344CB8AC3E}">
-        <p14:creationId xmlns:p14="http://schemas.microsoft.com/office/powerpoint/2010/main" val="1703766327"/>
+        <p14:creationId xmlns:p14="http://schemas.microsoft.com/office/powerpoint/2010/main" val="4047766332"/>
       </p:ext>
     </p:extLst>
   </p:cSld>
@@ -6785,7 +6425,106 @@
       </p:grpSpPr>
       <p:sp>
         <p:nvSpPr>
-          <p:cNvPr id="4" name="Slide Number Placeholder 3"/>
+          <p:cNvPr id="6" name="Title 5"/>
+          <p:cNvSpPr>
+            <a:spLocks noGrp="1"/>
+          </p:cNvSpPr>
+          <p:nvPr>
+            <p:ph type="title"/>
+          </p:nvPr>
+        </p:nvSpPr>
+        <p:spPr/>
+        <p:txBody>
+          <a:bodyPr/>
+          <a:lstStyle/>
+          <a:p>
+            <a:r>
+              <a:rPr lang="en-GB" dirty="0"/>
+              <a:t>Persistence</a:t>
+            </a:r>
+          </a:p>
+        </p:txBody>
+      </p:sp>
+      <p:sp>
+        <p:nvSpPr>
+          <p:cNvPr id="7" name="Content Placeholder 6"/>
+          <p:cNvSpPr>
+            <a:spLocks noGrp="1"/>
+          </p:cNvSpPr>
+          <p:nvPr>
+            <p:ph idx="1"/>
+          </p:nvPr>
+        </p:nvSpPr>
+        <p:spPr/>
+        <p:txBody>
+          <a:bodyPr>
+            <a:normAutofit lnSpcReduction="10000"/>
+          </a:bodyPr>
+          <a:lstStyle/>
+          <a:p>
+            <a:r>
+              <a:rPr lang="en-GB" dirty="0"/>
+              <a:t>Controller needs to access the repositories</a:t>
+            </a:r>
+          </a:p>
+          <a:p>
+            <a:r>
+              <a:rPr lang="en-GB" dirty="0"/>
+              <a:t>But we have three repository implementations</a:t>
+            </a:r>
+          </a:p>
+          <a:p>
+            <a:pPr lvl="1"/>
+            <a:r>
+              <a:rPr lang="en-GB" dirty="0"/>
+              <a:t>In memory</a:t>
+            </a:r>
+          </a:p>
+          <a:p>
+            <a:pPr lvl="1"/>
+            <a:r>
+              <a:rPr lang="en-GB" dirty="0"/>
+              <a:t>Relational database thru JPA</a:t>
+            </a:r>
+          </a:p>
+          <a:p>
+            <a:pPr lvl="1"/>
+            <a:r>
+              <a:rPr lang="en-GB" dirty="0"/>
+              <a:t>Relational database thru </a:t>
+            </a:r>
+            <a:r>
+              <a:rPr lang="en-GB" dirty="0" err="1"/>
+              <a:t>SpringData</a:t>
+            </a:r>
+            <a:endParaRPr lang="en-GB" dirty="0"/>
+          </a:p>
+          <a:p>
+            <a:r>
+              <a:rPr lang="en-GB" dirty="0"/>
+              <a:t>Hide persistence details from rest of the code</a:t>
+            </a:r>
+          </a:p>
+          <a:p>
+            <a:pPr lvl="1"/>
+            <a:r>
+              <a:rPr lang="en-GB" dirty="0"/>
+              <a:t>Interfaces</a:t>
+            </a:r>
+          </a:p>
+          <a:p>
+            <a:pPr lvl="1"/>
+            <a:r>
+              <a:rPr lang="en-GB" dirty="0" smtClean="0"/>
+              <a:t>Dependency injection or Factories </a:t>
+            </a:r>
+            <a:endParaRPr lang="en-GB" dirty="0"/>
+          </a:p>
+        </p:txBody>
+      </p:sp>
+      <p:sp>
+        <p:nvSpPr>
+          <p:cNvPr id="5" name="Slide Number Placeholder 4"/>
           <p:cNvSpPr>
             <a:spLocks noGrp="1"/>
           </p:cNvSpPr>
@@ -6802,6 +6541,60 @@
               <a:rPr lang="pt-PT" smtClean="0"/>
               <a:pPr/>
               <a:t>18</a:t>
+            </a:fld>
+            <a:endParaRPr lang="pt-PT"/>
+          </a:p>
+        </p:txBody>
+      </p:sp>
+    </p:spTree>
+    <p:extLst>
+      <p:ext uri="{BB962C8B-B14F-4D97-AF65-F5344CB8AC3E}">
+        <p14:creationId xmlns:p14="http://schemas.microsoft.com/office/powerpoint/2010/main" val="1703766327"/>
+      </p:ext>
+    </p:extLst>
+  </p:cSld>
+  <p:clrMapOvr>
+    <a:masterClrMapping/>
+  </p:clrMapOvr>
+</p:sld>
+</file>
+
+<file path=ppt/slides/slide19.xml><?xml version="1.0" encoding="utf-8"?>
+<p:sld xmlns:a="http://schemas.openxmlformats.org/drawingml/2006/main" xmlns:r="http://schemas.openxmlformats.org/officeDocument/2006/relationships" xmlns:p="http://schemas.openxmlformats.org/presentationml/2006/main">
+  <p:cSld>
+    <p:spTree>
+      <p:nvGrpSpPr>
+        <p:cNvPr id="1" name=""/>
+        <p:cNvGrpSpPr/>
+        <p:nvPr/>
+      </p:nvGrpSpPr>
+      <p:grpSpPr>
+        <a:xfrm>
+          <a:off x="0" y="0"/>
+          <a:ext cx="0" cy="0"/>
+          <a:chOff x="0" y="0"/>
+          <a:chExt cx="0" cy="0"/>
+        </a:xfrm>
+      </p:grpSpPr>
+      <p:sp>
+        <p:nvSpPr>
+          <p:cNvPr id="4" name="Slide Number Placeholder 3"/>
+          <p:cNvSpPr>
+            <a:spLocks noGrp="1"/>
+          </p:cNvSpPr>
+          <p:nvPr>
+            <p:ph type="sldNum" sz="quarter" idx="12"/>
+          </p:nvPr>
+        </p:nvSpPr>
+        <p:spPr/>
+        <p:txBody>
+          <a:bodyPr/>
+          <a:lstStyle/>
+          <a:p>
+            <a:fld id="{024A9932-4E76-455F-8E1A-2CC10C89B014}" type="slidenum">
+              <a:rPr lang="pt-PT" smtClean="0"/>
+              <a:pPr/>
+              <a:t>19</a:t>
             </a:fld>
             <a:endParaRPr lang="pt-PT"/>
           </a:p>
@@ -6844,7 +6637,7 @@
 </p:sld>
 </file>
 
-<file path=ppt/slides/slide19.xml><?xml version="1.0" encoding="utf-8"?>
+<file path=ppt/slides/slide2.xml><?xml version="1.0" encoding="utf-8"?>
 <p:sld xmlns:a="http://schemas.openxmlformats.org/drawingml/2006/main" xmlns:r="http://schemas.openxmlformats.org/officeDocument/2006/relationships" xmlns:p="http://schemas.openxmlformats.org/presentationml/2006/main">
   <p:cSld>
     <p:spTree>
@@ -6873,6 +6666,148 @@
         </p:nvSpPr>
         <p:spPr/>
         <p:txBody>
+          <a:bodyPr/>
+          <a:lstStyle/>
+          <a:p>
+            <a:r>
+              <a:rPr lang="en-GB" dirty="0" smtClean="0"/>
+              <a:t>What it is</a:t>
+            </a:r>
+            <a:endParaRPr lang="en-US" dirty="0"/>
+          </a:p>
+        </p:txBody>
+      </p:sp>
+      <p:sp>
+        <p:nvSpPr>
+          <p:cNvPr id="3" name="Content Placeholder 2"/>
+          <p:cNvSpPr>
+            <a:spLocks noGrp="1"/>
+          </p:cNvSpPr>
+          <p:nvPr>
+            <p:ph idx="1"/>
+          </p:nvPr>
+        </p:nvSpPr>
+        <p:spPr/>
+        <p:txBody>
+          <a:bodyPr/>
+          <a:lstStyle/>
+          <a:p>
+            <a:r>
+              <a:rPr lang="en-GB" dirty="0" smtClean="0"/>
+              <a:t>Standard application framework developed in the scope of the course unit “</a:t>
+            </a:r>
+            <a:r>
+              <a:rPr lang="en-GB" dirty="0" err="1" smtClean="0"/>
+              <a:t>Engenharia</a:t>
+            </a:r>
+            <a:r>
+              <a:rPr lang="en-GB" dirty="0" smtClean="0"/>
+              <a:t> de </a:t>
+            </a:r>
+            <a:r>
+              <a:rPr lang="en-GB" dirty="0" err="1" smtClean="0"/>
+              <a:t>Aplicações</a:t>
+            </a:r>
+            <a:r>
+              <a:rPr lang="en-GB" dirty="0" smtClean="0"/>
+              <a:t>” at </a:t>
+            </a:r>
+            <a:r>
+              <a:rPr lang="en-GB" dirty="0" err="1" smtClean="0"/>
+              <a:t>Instituto</a:t>
+            </a:r>
+            <a:r>
+              <a:rPr lang="en-GB" dirty="0" smtClean="0"/>
+              <a:t> Superior de </a:t>
+            </a:r>
+            <a:r>
+              <a:rPr lang="en-GB" dirty="0" err="1" smtClean="0"/>
+              <a:t>Engenharia</a:t>
+            </a:r>
+            <a:r>
+              <a:rPr lang="en-GB" dirty="0" smtClean="0"/>
+              <a:t> do Porto </a:t>
+            </a:r>
+            <a:r>
+              <a:rPr lang="en-GB" dirty="0" smtClean="0">
+                <a:hlinkClick r:id="rId2"/>
+              </a:rPr>
+              <a:t>http://www.isep.ipp.pt</a:t>
+            </a:r>
+            <a:r>
+              <a:rPr lang="en-GB" dirty="0" smtClean="0"/>
+              <a:t> </a:t>
+            </a:r>
+            <a:endParaRPr lang="en-US" dirty="0"/>
+          </a:p>
+        </p:txBody>
+      </p:sp>
+      <p:sp>
+        <p:nvSpPr>
+          <p:cNvPr id="4" name="Slide Number Placeholder 3"/>
+          <p:cNvSpPr>
+            <a:spLocks noGrp="1"/>
+          </p:cNvSpPr>
+          <p:nvPr>
+            <p:ph type="sldNum" sz="quarter" idx="12"/>
+          </p:nvPr>
+        </p:nvSpPr>
+        <p:spPr/>
+        <p:txBody>
+          <a:bodyPr/>
+          <a:lstStyle/>
+          <a:p>
+            <a:fld id="{024A9932-4E76-455F-8E1A-2CC10C89B014}" type="slidenum">
+              <a:rPr lang="pt-PT" smtClean="0"/>
+              <a:pPr/>
+              <a:t>2</a:t>
+            </a:fld>
+            <a:endParaRPr lang="pt-PT"/>
+          </a:p>
+        </p:txBody>
+      </p:sp>
+    </p:spTree>
+    <p:extLst>
+      <p:ext uri="{BB962C8B-B14F-4D97-AF65-F5344CB8AC3E}">
+        <p14:creationId xmlns:p14="http://schemas.microsoft.com/office/powerpoint/2010/main" val="1881727189"/>
+      </p:ext>
+    </p:extLst>
+  </p:cSld>
+  <p:clrMapOvr>
+    <a:masterClrMapping/>
+  </p:clrMapOvr>
+</p:sld>
+</file>
+
+<file path=ppt/slides/slide20.xml><?xml version="1.0" encoding="utf-8"?>
+<p:sld xmlns:a="http://schemas.openxmlformats.org/drawingml/2006/main" xmlns:r="http://schemas.openxmlformats.org/officeDocument/2006/relationships" xmlns:p="http://schemas.openxmlformats.org/presentationml/2006/main">
+  <p:cSld>
+    <p:spTree>
+      <p:nvGrpSpPr>
+        <p:cNvPr id="1" name=""/>
+        <p:cNvGrpSpPr/>
+        <p:nvPr/>
+      </p:nvGrpSpPr>
+      <p:grpSpPr>
+        <a:xfrm>
+          <a:off x="0" y="0"/>
+          <a:ext cx="0" cy="0"/>
+          <a:chOff x="0" y="0"/>
+          <a:chExt cx="0" cy="0"/>
+        </a:xfrm>
+      </p:grpSpPr>
+      <p:sp>
+        <p:nvSpPr>
+          <p:cNvPr id="2" name="Title 1"/>
+          <p:cNvSpPr>
+            <a:spLocks noGrp="1"/>
+          </p:cNvSpPr>
+          <p:nvPr>
+            <p:ph type="title"/>
+          </p:nvPr>
+        </p:nvSpPr>
+        <p:spPr/>
+        <p:txBody>
           <a:bodyPr>
             <a:normAutofit/>
           </a:bodyPr>
@@ -6904,7 +6839,7 @@
             <a:fld id="{024A9932-4E76-455F-8E1A-2CC10C89B014}" type="slidenum">
               <a:rPr lang="pt-PT" smtClean="0"/>
               <a:pPr/>
-              <a:t>19</a:t>
+              <a:t>20</a:t>
             </a:fld>
             <a:endParaRPr lang="pt-PT"/>
           </a:p>
@@ -7024,265 +6959,6 @@
 </p:sld>
 </file>
 
-<file path=ppt/slides/slide2.xml><?xml version="1.0" encoding="utf-8"?>
-<p:sld xmlns:a="http://schemas.openxmlformats.org/drawingml/2006/main" xmlns:r="http://schemas.openxmlformats.org/officeDocument/2006/relationships" xmlns:p="http://schemas.openxmlformats.org/presentationml/2006/main">
-  <p:cSld>
-    <p:spTree>
-      <p:nvGrpSpPr>
-        <p:cNvPr id="1" name=""/>
-        <p:cNvGrpSpPr/>
-        <p:nvPr/>
-      </p:nvGrpSpPr>
-      <p:grpSpPr>
-        <a:xfrm>
-          <a:off x="0" y="0"/>
-          <a:ext cx="0" cy="0"/>
-          <a:chOff x="0" y="0"/>
-          <a:chExt cx="0" cy="0"/>
-        </a:xfrm>
-      </p:grpSpPr>
-      <p:sp>
-        <p:nvSpPr>
-          <p:cNvPr id="2" name="Title 1"/>
-          <p:cNvSpPr>
-            <a:spLocks noGrp="1"/>
-          </p:cNvSpPr>
-          <p:nvPr>
-            <p:ph type="title"/>
-          </p:nvPr>
-        </p:nvSpPr>
-        <p:spPr/>
-        <p:txBody>
-          <a:bodyPr/>
-          <a:lstStyle/>
-          <a:p>
-            <a:r>
-              <a:rPr lang="en-GB" dirty="0" smtClean="0"/>
-              <a:t>What it is</a:t>
-            </a:r>
-            <a:endParaRPr lang="en-US" dirty="0"/>
-          </a:p>
-        </p:txBody>
-      </p:sp>
-      <p:sp>
-        <p:nvSpPr>
-          <p:cNvPr id="3" name="Content Placeholder 2"/>
-          <p:cNvSpPr>
-            <a:spLocks noGrp="1"/>
-          </p:cNvSpPr>
-          <p:nvPr>
-            <p:ph idx="1"/>
-          </p:nvPr>
-        </p:nvSpPr>
-        <p:spPr/>
-        <p:txBody>
-          <a:bodyPr/>
-          <a:lstStyle/>
-          <a:p>
-            <a:r>
-              <a:rPr lang="en-GB" dirty="0" smtClean="0"/>
-              <a:t>Standard application framework developed in the scope of the course unit “</a:t>
-            </a:r>
-            <a:r>
-              <a:rPr lang="en-GB" dirty="0" err="1" smtClean="0"/>
-              <a:t>Engenharia</a:t>
-            </a:r>
-            <a:r>
-              <a:rPr lang="en-GB" dirty="0" smtClean="0"/>
-              <a:t> de </a:t>
-            </a:r>
-            <a:r>
-              <a:rPr lang="en-GB" dirty="0" err="1" smtClean="0"/>
-              <a:t>Aplicações</a:t>
-            </a:r>
-            <a:r>
-              <a:rPr lang="en-GB" dirty="0" smtClean="0"/>
-              <a:t>” at </a:t>
-            </a:r>
-            <a:r>
-              <a:rPr lang="en-GB" dirty="0" err="1" smtClean="0"/>
-              <a:t>Instituto</a:t>
-            </a:r>
-            <a:r>
-              <a:rPr lang="en-GB" dirty="0" smtClean="0"/>
-              <a:t> Superior de </a:t>
-            </a:r>
-            <a:r>
-              <a:rPr lang="en-GB" dirty="0" err="1" smtClean="0"/>
-              <a:t>Engenharia</a:t>
-            </a:r>
-            <a:r>
-              <a:rPr lang="en-GB" dirty="0" smtClean="0"/>
-              <a:t> do Porto </a:t>
-            </a:r>
-            <a:r>
-              <a:rPr lang="en-GB" dirty="0" smtClean="0">
-                <a:hlinkClick r:id="rId2"/>
-              </a:rPr>
-              <a:t>http://www.isep.ipp.pt</a:t>
-            </a:r>
-            <a:r>
-              <a:rPr lang="en-GB" dirty="0" smtClean="0"/>
-              <a:t> </a:t>
-            </a:r>
-            <a:endParaRPr lang="en-US" dirty="0"/>
-          </a:p>
-        </p:txBody>
-      </p:sp>
-      <p:sp>
-        <p:nvSpPr>
-          <p:cNvPr id="4" name="Slide Number Placeholder 3"/>
-          <p:cNvSpPr>
-            <a:spLocks noGrp="1"/>
-          </p:cNvSpPr>
-          <p:nvPr>
-            <p:ph type="sldNum" sz="quarter" idx="12"/>
-          </p:nvPr>
-        </p:nvSpPr>
-        <p:spPr/>
-        <p:txBody>
-          <a:bodyPr/>
-          <a:lstStyle/>
-          <a:p>
-            <a:fld id="{024A9932-4E76-455F-8E1A-2CC10C89B014}" type="slidenum">
-              <a:rPr lang="pt-PT" smtClean="0"/>
-              <a:pPr/>
-              <a:t>2</a:t>
-            </a:fld>
-            <a:endParaRPr lang="pt-PT"/>
-          </a:p>
-        </p:txBody>
-      </p:sp>
-    </p:spTree>
-    <p:extLst>
-      <p:ext uri="{BB962C8B-B14F-4D97-AF65-F5344CB8AC3E}">
-        <p14:creationId xmlns:p14="http://schemas.microsoft.com/office/powerpoint/2010/main" val="1881727189"/>
-      </p:ext>
-    </p:extLst>
-  </p:cSld>
-  <p:clrMapOvr>
-    <a:masterClrMapping/>
-  </p:clrMapOvr>
-</p:sld>
-</file>
-
-<file path=ppt/slides/slide20.xml><?xml version="1.0" encoding="utf-8"?>
-<p:sld xmlns:a="http://schemas.openxmlformats.org/drawingml/2006/main" xmlns:r="http://schemas.openxmlformats.org/officeDocument/2006/relationships" xmlns:p="http://schemas.openxmlformats.org/presentationml/2006/main">
-  <p:cSld>
-    <p:spTree>
-      <p:nvGrpSpPr>
-        <p:cNvPr id="1" name=""/>
-        <p:cNvGrpSpPr/>
-        <p:nvPr/>
-      </p:nvGrpSpPr>
-      <p:grpSpPr>
-        <a:xfrm>
-          <a:off x="0" y="0"/>
-          <a:ext cx="0" cy="0"/>
-          <a:chOff x="0" y="0"/>
-          <a:chExt cx="0" cy="0"/>
-        </a:xfrm>
-      </p:grpSpPr>
-      <p:sp>
-        <p:nvSpPr>
-          <p:cNvPr id="2" name="Title 1"/>
-          <p:cNvSpPr>
-            <a:spLocks noGrp="1"/>
-          </p:cNvSpPr>
-          <p:nvPr>
-            <p:ph type="title"/>
-          </p:nvPr>
-        </p:nvSpPr>
-        <p:spPr/>
-        <p:txBody>
-          <a:bodyPr/>
-          <a:lstStyle/>
-          <a:p>
-            <a:r>
-              <a:rPr lang="en-GB" dirty="0"/>
-              <a:t>In memory Repositories</a:t>
-            </a:r>
-            <a:endParaRPr lang="en-US" dirty="0"/>
-          </a:p>
-        </p:txBody>
-      </p:sp>
-      <p:sp>
-        <p:nvSpPr>
-          <p:cNvPr id="3" name="Content Placeholder 2"/>
-          <p:cNvSpPr>
-            <a:spLocks noGrp="1"/>
-          </p:cNvSpPr>
-          <p:nvPr>
-            <p:ph idx="1"/>
-          </p:nvPr>
-        </p:nvSpPr>
-        <p:spPr/>
-        <p:txBody>
-          <a:bodyPr/>
-          <a:lstStyle/>
-          <a:p>
-            <a:r>
-              <a:rPr lang="en-GB" dirty="0" err="1"/>
-              <a:t>InMemoryBaseRepository</a:t>
-            </a:r>
-            <a:endParaRPr lang="en-GB" dirty="0"/>
-          </a:p>
-          <a:p>
-            <a:r>
-              <a:rPr lang="en-GB" dirty="0" err="1"/>
-              <a:t>InMemoryBaseRepositorywithLongPK</a:t>
-            </a:r>
-            <a:endParaRPr lang="en-GB" dirty="0"/>
-          </a:p>
-          <a:p>
-            <a:endParaRPr lang="en-GB" dirty="0"/>
-          </a:p>
-          <a:p>
-            <a:r>
-              <a:rPr lang="en-GB" b="1" dirty="0"/>
-              <a:t>For pedagogical testing purposes only!</a:t>
-            </a:r>
-            <a:endParaRPr lang="en-US" b="1" dirty="0"/>
-          </a:p>
-        </p:txBody>
-      </p:sp>
-      <p:sp>
-        <p:nvSpPr>
-          <p:cNvPr id="5" name="Slide Number Placeholder 4"/>
-          <p:cNvSpPr>
-            <a:spLocks noGrp="1"/>
-          </p:cNvSpPr>
-          <p:nvPr>
-            <p:ph type="sldNum" sz="quarter" idx="12"/>
-          </p:nvPr>
-        </p:nvSpPr>
-        <p:spPr/>
-        <p:txBody>
-          <a:bodyPr/>
-          <a:lstStyle/>
-          <a:p>
-            <a:fld id="{024A9932-4E76-455F-8E1A-2CC10C89B014}" type="slidenum">
-              <a:rPr lang="pt-PT" smtClean="0"/>
-              <a:pPr/>
-              <a:t>20</a:t>
-            </a:fld>
-            <a:endParaRPr lang="pt-PT"/>
-          </a:p>
-        </p:txBody>
-      </p:sp>
-    </p:spTree>
-    <p:extLst>
-      <p:ext uri="{BB962C8B-B14F-4D97-AF65-F5344CB8AC3E}">
-        <p14:creationId xmlns:p14="http://schemas.microsoft.com/office/powerpoint/2010/main" val="1746043456"/>
-      </p:ext>
-    </p:extLst>
-  </p:cSld>
-  <p:clrMapOvr>
-    <a:masterClrMapping/>
-  </p:clrMapOvr>
-</p:sld>
-</file>
-
 <file path=ppt/slides/slide21.xml><?xml version="1.0" encoding="utf-8"?>
 <p:sld xmlns:a="http://schemas.openxmlformats.org/drawingml/2006/main" xmlns:r="http://schemas.openxmlformats.org/officeDocument/2006/relationships" xmlns:p="http://schemas.openxmlformats.org/presentationml/2006/main">
   <p:cSld>
@@ -7317,7 +6993,7 @@
           <a:p>
             <a:r>
               <a:rPr lang="en-GB" dirty="0"/>
-              <a:t>JPA Repositories</a:t>
+              <a:t>In memory Repositories</a:t>
             </a:r>
             <a:endParaRPr lang="en-US" dirty="0"/>
           </a:p>
@@ -7335,69 +7011,31 @@
         </p:nvSpPr>
         <p:spPr/>
         <p:txBody>
-          <a:bodyPr>
-            <a:normAutofit fontScale="77500" lnSpcReduction="20000"/>
-          </a:bodyPr>
+          <a:bodyPr/>
           <a:lstStyle/>
           <a:p>
             <a:r>
               <a:rPr lang="en-GB" dirty="0" err="1"/>
-              <a:t>JpaBaseRepository</a:t>
+              <a:t>InMemoryBaseRepository</a:t>
             </a:r>
             <a:endParaRPr lang="en-GB" dirty="0"/>
           </a:p>
           <a:p>
-            <a:pPr lvl="1"/>
-            <a:r>
-              <a:rPr lang="en-GB" dirty="0"/>
-              <a:t>Generic repository implementation that expects the entity manager factory to be injected by a container, e.g., web server</a:t>
-            </a:r>
-          </a:p>
-          <a:p>
             <a:r>
               <a:rPr lang="en-GB" dirty="0" err="1"/>
-              <a:t>JpaNotRunningInContainerBaseRepository</a:t>
+              <a:t>InMemoryBaseRepositorywithLongPK</a:t>
             </a:r>
             <a:endParaRPr lang="en-GB" dirty="0"/>
           </a:p>
           <a:p>
-            <a:pPr lvl="1"/>
-            <a:r>
-              <a:rPr lang="en-GB" dirty="0"/>
-              <a:t>For scenarios where the code is not running in a container but transaction is managed by the outside, e.g., controller</a:t>
-            </a:r>
-          </a:p>
-          <a:p>
-            <a:r>
-              <a:rPr lang="en-GB" dirty="0" err="1"/>
-              <a:t>JpaTransactionalBaseRepository</a:t>
-            </a:r>
             <a:endParaRPr lang="en-GB" dirty="0"/>
           </a:p>
           <a:p>
-            <a:pPr lvl="1"/>
-            <a:r>
-              <a:rPr lang="en-GB" dirty="0"/>
-              <a:t>For scenarios not running in a container but transactions are created and committed by each repository method; the connection is also closed automatically in each method.</a:t>
-            </a:r>
-          </a:p>
-          <a:p>
-            <a:r>
-              <a:rPr lang="en-GB" dirty="0" err="1"/>
-              <a:t>JpaAutoTxRepository</a:t>
-            </a:r>
-            <a:endParaRPr lang="en-GB" dirty="0"/>
-          </a:p>
-          <a:p>
-            <a:pPr lvl="1"/>
-            <a:r>
-              <a:rPr lang="en-GB" dirty="0"/>
-              <a:t>Dual behaviour to either have outside transactional control or explicit transaction in each method</a:t>
-            </a:r>
-          </a:p>
-          <a:p>
-            <a:pPr lvl="1"/>
-            <a:endParaRPr lang="en-US" dirty="0"/>
+            <a:r>
+              <a:rPr lang="en-GB" b="1" dirty="0"/>
+              <a:t>For pedagogical testing purposes only!</a:t>
+            </a:r>
+            <a:endParaRPr lang="en-US" b="1" dirty="0"/>
           </a:p>
         </p:txBody>
       </p:sp>
@@ -7428,7 +7066,7 @@
     </p:spTree>
     <p:extLst>
       <p:ext uri="{BB962C8B-B14F-4D97-AF65-F5344CB8AC3E}">
-        <p14:creationId xmlns:p14="http://schemas.microsoft.com/office/powerpoint/2010/main" val="3449136498"/>
+        <p14:creationId xmlns:p14="http://schemas.microsoft.com/office/powerpoint/2010/main" val="1746043456"/>
       </p:ext>
     </p:extLst>
   </p:cSld>
@@ -7471,8 +7109,8 @@
           <a:lstStyle/>
           <a:p>
             <a:r>
-              <a:rPr lang="en-GB" dirty="0" smtClean="0"/>
-              <a:t>Spring Data JPA repositories</a:t>
+              <a:rPr lang="en-GB" dirty="0"/>
+              <a:t>JPA Repositories</a:t>
             </a:r>
             <a:endParaRPr lang="en-US" dirty="0"/>
           </a:p>
@@ -7490,16 +7128,75 @@
         </p:nvSpPr>
         <p:spPr/>
         <p:txBody>
-          <a:bodyPr/>
-          <a:lstStyle/>
-          <a:p>
-            <a:endParaRPr lang="en-US"/>
-          </a:p>
-        </p:txBody>
-      </p:sp>
-      <p:sp>
-        <p:nvSpPr>
-          <p:cNvPr id="4" name="Slide Number Placeholder 3"/>
+          <a:bodyPr>
+            <a:normAutofit fontScale="77500" lnSpcReduction="20000"/>
+          </a:bodyPr>
+          <a:lstStyle/>
+          <a:p>
+            <a:r>
+              <a:rPr lang="en-GB" dirty="0" err="1"/>
+              <a:t>JpaBaseRepository</a:t>
+            </a:r>
+            <a:endParaRPr lang="en-GB" dirty="0"/>
+          </a:p>
+          <a:p>
+            <a:pPr lvl="1"/>
+            <a:r>
+              <a:rPr lang="en-GB" dirty="0"/>
+              <a:t>Generic repository implementation that expects the entity manager factory to be injected by a container, e.g., web server</a:t>
+            </a:r>
+          </a:p>
+          <a:p>
+            <a:r>
+              <a:rPr lang="en-GB" dirty="0" err="1"/>
+              <a:t>JpaNotRunningInContainerBaseRepository</a:t>
+            </a:r>
+            <a:endParaRPr lang="en-GB" dirty="0"/>
+          </a:p>
+          <a:p>
+            <a:pPr lvl="1"/>
+            <a:r>
+              <a:rPr lang="en-GB" dirty="0"/>
+              <a:t>For scenarios where the code is not running in a container but transaction is managed by the outside, e.g., controller</a:t>
+            </a:r>
+          </a:p>
+          <a:p>
+            <a:r>
+              <a:rPr lang="en-GB" dirty="0" err="1"/>
+              <a:t>JpaTransactionalBaseRepository</a:t>
+            </a:r>
+            <a:endParaRPr lang="en-GB" dirty="0"/>
+          </a:p>
+          <a:p>
+            <a:pPr lvl="1"/>
+            <a:r>
+              <a:rPr lang="en-GB" dirty="0"/>
+              <a:t>For scenarios not running in a container but transactions are created and committed by each repository method; the connection is also closed automatically in each method.</a:t>
+            </a:r>
+          </a:p>
+          <a:p>
+            <a:r>
+              <a:rPr lang="en-GB" dirty="0" err="1"/>
+              <a:t>JpaAutoTxRepository</a:t>
+            </a:r>
+            <a:endParaRPr lang="en-GB" dirty="0"/>
+          </a:p>
+          <a:p>
+            <a:pPr lvl="1"/>
+            <a:r>
+              <a:rPr lang="en-GB" dirty="0"/>
+              <a:t>Dual behaviour to either have outside transactional control or explicit transaction in each method</a:t>
+            </a:r>
+          </a:p>
+          <a:p>
+            <a:pPr lvl="1"/>
+            <a:endParaRPr lang="en-US" dirty="0"/>
+          </a:p>
+        </p:txBody>
+      </p:sp>
+      <p:sp>
+        <p:nvSpPr>
+          <p:cNvPr id="5" name="Slide Number Placeholder 4"/>
           <p:cNvSpPr>
             <a:spLocks noGrp="1"/>
           </p:cNvSpPr>
@@ -7524,7 +7221,7 @@
     </p:spTree>
     <p:extLst>
       <p:ext uri="{BB962C8B-B14F-4D97-AF65-F5344CB8AC3E}">
-        <p14:creationId xmlns:p14="http://schemas.microsoft.com/office/powerpoint/2010/main" val="3679903379"/>
+        <p14:creationId xmlns:p14="http://schemas.microsoft.com/office/powerpoint/2010/main" val="3449136498"/>
       </p:ext>
     </p:extLst>
   </p:cSld>
@@ -7567,15 +7264,35 @@
           <a:lstStyle/>
           <a:p>
             <a:r>
-              <a:rPr lang="en-GB" dirty="0"/>
-              <a:t>Resources </a:t>
-            </a:r>
-          </a:p>
-        </p:txBody>
-      </p:sp>
-      <p:sp>
-        <p:nvSpPr>
-          <p:cNvPr id="5" name="Slide Number Placeholder 4"/>
+              <a:rPr lang="en-GB" dirty="0" smtClean="0"/>
+              <a:t>Spring Data JPA repositories</a:t>
+            </a:r>
+            <a:endParaRPr lang="en-US" dirty="0"/>
+          </a:p>
+        </p:txBody>
+      </p:sp>
+      <p:sp>
+        <p:nvSpPr>
+          <p:cNvPr id="3" name="Content Placeholder 2"/>
+          <p:cNvSpPr>
+            <a:spLocks noGrp="1"/>
+          </p:cNvSpPr>
+          <p:nvPr>
+            <p:ph idx="1"/>
+          </p:nvPr>
+        </p:nvSpPr>
+        <p:spPr/>
+        <p:txBody>
+          <a:bodyPr/>
+          <a:lstStyle/>
+          <a:p>
+            <a:endParaRPr lang="en-US"/>
+          </a:p>
+        </p:txBody>
+      </p:sp>
+      <p:sp>
+        <p:nvSpPr>
+          <p:cNvPr id="4" name="Slide Number Placeholder 3"/>
           <p:cNvSpPr>
             <a:spLocks noGrp="1"/>
           </p:cNvSpPr>
@@ -7592,6 +7309,82 @@
               <a:rPr lang="pt-PT" smtClean="0"/>
               <a:pPr/>
               <a:t>23</a:t>
+            </a:fld>
+            <a:endParaRPr lang="pt-PT"/>
+          </a:p>
+        </p:txBody>
+      </p:sp>
+    </p:spTree>
+    <p:extLst>
+      <p:ext uri="{BB962C8B-B14F-4D97-AF65-F5344CB8AC3E}">
+        <p14:creationId xmlns:p14="http://schemas.microsoft.com/office/powerpoint/2010/main" val="3679903379"/>
+      </p:ext>
+    </p:extLst>
+  </p:cSld>
+  <p:clrMapOvr>
+    <a:masterClrMapping/>
+  </p:clrMapOvr>
+</p:sld>
+</file>
+
+<file path=ppt/slides/slide24.xml><?xml version="1.0" encoding="utf-8"?>
+<p:sld xmlns:a="http://schemas.openxmlformats.org/drawingml/2006/main" xmlns:r="http://schemas.openxmlformats.org/officeDocument/2006/relationships" xmlns:p="http://schemas.openxmlformats.org/presentationml/2006/main">
+  <p:cSld>
+    <p:spTree>
+      <p:nvGrpSpPr>
+        <p:cNvPr id="1" name=""/>
+        <p:cNvGrpSpPr/>
+        <p:nvPr/>
+      </p:nvGrpSpPr>
+      <p:grpSpPr>
+        <a:xfrm>
+          <a:off x="0" y="0"/>
+          <a:ext cx="0" cy="0"/>
+          <a:chOff x="0" y="0"/>
+          <a:chExt cx="0" cy="0"/>
+        </a:xfrm>
+      </p:grpSpPr>
+      <p:sp>
+        <p:nvSpPr>
+          <p:cNvPr id="2" name="Title 1"/>
+          <p:cNvSpPr>
+            <a:spLocks noGrp="1"/>
+          </p:cNvSpPr>
+          <p:nvPr>
+            <p:ph type="title"/>
+          </p:nvPr>
+        </p:nvSpPr>
+        <p:spPr/>
+        <p:txBody>
+          <a:bodyPr/>
+          <a:lstStyle/>
+          <a:p>
+            <a:r>
+              <a:rPr lang="en-GB" dirty="0"/>
+              <a:t>Resources </a:t>
+            </a:r>
+          </a:p>
+        </p:txBody>
+      </p:sp>
+      <p:sp>
+        <p:nvSpPr>
+          <p:cNvPr id="5" name="Slide Number Placeholder 4"/>
+          <p:cNvSpPr>
+            <a:spLocks noGrp="1"/>
+          </p:cNvSpPr>
+          <p:nvPr>
+            <p:ph type="sldNum" sz="quarter" idx="12"/>
+          </p:nvPr>
+        </p:nvSpPr>
+        <p:spPr/>
+        <p:txBody>
+          <a:bodyPr/>
+          <a:lstStyle/>
+          <a:p>
+            <a:fld id="{024A9932-4E76-455F-8E1A-2CC10C89B014}" type="slidenum">
+              <a:rPr lang="pt-PT" smtClean="0"/>
+              <a:pPr/>
+              <a:t>24</a:t>
             </a:fld>
             <a:endParaRPr lang="pt-PT"/>
           </a:p>
@@ -7754,104 +7547,6 @@
 </p:sld>
 </file>
 
-<file path=ppt/slides/slide24.xml><?xml version="1.0" encoding="utf-8"?>
-<p:sld xmlns:a="http://schemas.openxmlformats.org/drawingml/2006/main" xmlns:r="http://schemas.openxmlformats.org/officeDocument/2006/relationships" xmlns:p="http://schemas.openxmlformats.org/presentationml/2006/main">
-  <p:cSld>
-    <p:spTree>
-      <p:nvGrpSpPr>
-        <p:cNvPr id="1" name=""/>
-        <p:cNvGrpSpPr/>
-        <p:nvPr/>
-      </p:nvGrpSpPr>
-      <p:grpSpPr>
-        <a:xfrm>
-          <a:off x="0" y="0"/>
-          <a:ext cx="0" cy="0"/>
-          <a:chOff x="0" y="0"/>
-          <a:chExt cx="0" cy="0"/>
-        </a:xfrm>
-      </p:grpSpPr>
-      <p:sp>
-        <p:nvSpPr>
-          <p:cNvPr id="6" name="Title 5"/>
-          <p:cNvSpPr>
-            <a:spLocks noGrp="1"/>
-          </p:cNvSpPr>
-          <p:nvPr>
-            <p:ph type="title"/>
-          </p:nvPr>
-        </p:nvSpPr>
-        <p:spPr/>
-        <p:txBody>
-          <a:bodyPr>
-            <a:normAutofit/>
-          </a:bodyPr>
-          <a:lstStyle/>
-          <a:p>
-            <a:r>
-              <a:rPr lang="en-GB" dirty="0" smtClean="0"/>
-              <a:t>applicationContext.xml</a:t>
-            </a:r>
-            <a:endParaRPr lang="en-US" dirty="0"/>
-          </a:p>
-        </p:txBody>
-      </p:sp>
-      <p:sp>
-        <p:nvSpPr>
-          <p:cNvPr id="7" name="Content Placeholder 6"/>
-          <p:cNvSpPr>
-            <a:spLocks noGrp="1"/>
-          </p:cNvSpPr>
-          <p:nvPr>
-            <p:ph idx="1"/>
-          </p:nvPr>
-        </p:nvSpPr>
-        <p:spPr/>
-        <p:txBody>
-          <a:bodyPr/>
-          <a:lstStyle/>
-          <a:p>
-            <a:endParaRPr lang="en-US"/>
-          </a:p>
-        </p:txBody>
-      </p:sp>
-      <p:sp>
-        <p:nvSpPr>
-          <p:cNvPr id="5" name="Slide Number Placeholder 4"/>
-          <p:cNvSpPr>
-            <a:spLocks noGrp="1"/>
-          </p:cNvSpPr>
-          <p:nvPr>
-            <p:ph type="sldNum" sz="quarter" idx="12"/>
-          </p:nvPr>
-        </p:nvSpPr>
-        <p:spPr/>
-        <p:txBody>
-          <a:bodyPr/>
-          <a:lstStyle/>
-          <a:p>
-            <a:fld id="{024A9932-4E76-455F-8E1A-2CC10C89B014}" type="slidenum">
-              <a:rPr lang="pt-PT" smtClean="0"/>
-              <a:pPr/>
-              <a:t>24</a:t>
-            </a:fld>
-            <a:endParaRPr lang="pt-PT"/>
-          </a:p>
-        </p:txBody>
-      </p:sp>
-    </p:spTree>
-    <p:extLst>
-      <p:ext uri="{BB962C8B-B14F-4D97-AF65-F5344CB8AC3E}">
-        <p14:creationId xmlns:p14="http://schemas.microsoft.com/office/powerpoint/2010/main" val="1017614504"/>
-      </p:ext>
-    </p:extLst>
-  </p:cSld>
-  <p:clrMapOvr>
-    <a:masterClrMapping/>
-  </p:clrMapOvr>
-</p:sld>
-</file>
-
 <file path=ppt/slides/slide25.xml><?xml version="1.0" encoding="utf-8"?>
 <p:sld xmlns:a="http://schemas.openxmlformats.org/drawingml/2006/main" xmlns:r="http://schemas.openxmlformats.org/officeDocument/2006/relationships" xmlns:p="http://schemas.openxmlformats.org/presentationml/2006/main">
   <p:cSld>
@@ -7882,13 +7577,13 @@
         <p:spPr/>
         <p:txBody>
           <a:bodyPr>
-            <a:normAutofit fontScale="90000"/>
+            <a:normAutofit/>
           </a:bodyPr>
           <a:lstStyle/>
           <a:p>
             <a:r>
               <a:rPr lang="en-GB" dirty="0" smtClean="0"/>
-              <a:t>applicationContext-persistence.xml</a:t>
+              <a:t>applicationContext.xml</a:t>
             </a:r>
             <a:endParaRPr lang="en-US" dirty="0"/>
           </a:p>
@@ -7940,7 +7635,7 @@
     </p:spTree>
     <p:extLst>
       <p:ext uri="{BB962C8B-B14F-4D97-AF65-F5344CB8AC3E}">
-        <p14:creationId xmlns:p14="http://schemas.microsoft.com/office/powerpoint/2010/main" val="1907279577"/>
+        <p14:creationId xmlns:p14="http://schemas.microsoft.com/office/powerpoint/2010/main" val="1017614504"/>
       </p:ext>
     </p:extLst>
   </p:cSld>
@@ -7969,7 +7664,7 @@
       </p:grpSpPr>
       <p:sp>
         <p:nvSpPr>
-          <p:cNvPr id="2" name="Title 1"/>
+          <p:cNvPr id="6" name="Title 5"/>
           <p:cNvSpPr>
             <a:spLocks noGrp="1"/>
           </p:cNvSpPr>
@@ -7979,12 +7674,14 @@
         </p:nvSpPr>
         <p:spPr/>
         <p:txBody>
-          <a:bodyPr/>
+          <a:bodyPr>
+            <a:normAutofit fontScale="90000"/>
+          </a:bodyPr>
           <a:lstStyle/>
           <a:p>
             <a:r>
               <a:rPr lang="en-GB" dirty="0" smtClean="0"/>
-              <a:t>Transaction control</a:t>
+              <a:t>applicationContext-persistence.xml</a:t>
             </a:r>
             <a:endParaRPr lang="en-US" dirty="0"/>
           </a:p>
@@ -7992,7 +7689,7 @@
       </p:sp>
       <p:sp>
         <p:nvSpPr>
-          <p:cNvPr id="3" name="Content Placeholder 2"/>
+          <p:cNvPr id="7" name="Content Placeholder 6"/>
           <p:cNvSpPr>
             <a:spLocks noGrp="1"/>
           </p:cNvSpPr>
@@ -8005,26 +7702,13 @@
           <a:bodyPr/>
           <a:lstStyle/>
           <a:p>
-            <a:r>
-              <a:rPr lang="en-GB" dirty="0" smtClean="0"/>
-              <a:t>Preferably use a container and managed transaction context, e.g., spring</a:t>
-            </a:r>
-          </a:p>
-          <a:p>
-            <a:endParaRPr lang="en-GB" dirty="0"/>
-          </a:p>
-          <a:p>
-            <a:r>
-              <a:rPr lang="en-GB" dirty="0" smtClean="0"/>
-              <a:t>Optionally control the transaction yourself</a:t>
-            </a:r>
-            <a:endParaRPr lang="en-US" dirty="0"/>
-          </a:p>
-        </p:txBody>
-      </p:sp>
-      <p:sp>
-        <p:nvSpPr>
-          <p:cNvPr id="4" name="Slide Number Placeholder 3"/>
+            <a:endParaRPr lang="en-US"/>
+          </a:p>
+        </p:txBody>
+      </p:sp>
+      <p:sp>
+        <p:nvSpPr>
+          <p:cNvPr id="5" name="Slide Number Placeholder 4"/>
           <p:cNvSpPr>
             <a:spLocks noGrp="1"/>
           </p:cNvSpPr>
@@ -8049,7 +7733,7 @@
     </p:spTree>
     <p:extLst>
       <p:ext uri="{BB962C8B-B14F-4D97-AF65-F5344CB8AC3E}">
-        <p14:creationId xmlns:p14="http://schemas.microsoft.com/office/powerpoint/2010/main" val="3792329237"/>
+        <p14:creationId xmlns:p14="http://schemas.microsoft.com/office/powerpoint/2010/main" val="1907279577"/>
       </p:ext>
     </p:extLst>
   </p:cSld>
@@ -8093,9 +7777,9 @@
           <a:p>
             <a:r>
               <a:rPr lang="en-GB" dirty="0" smtClean="0"/>
-              <a:t>Transaction control #1</a:t>
-            </a:r>
-            <a:endParaRPr lang="pt-PT" dirty="0"/>
+              <a:t>Transaction control</a:t>
+            </a:r>
+            <a:endParaRPr lang="en-US" dirty="0"/>
           </a:p>
         </p:txBody>
       </p:sp>
@@ -8115,35 +7799,19 @@
           <a:lstStyle/>
           <a:p>
             <a:r>
-              <a:rPr lang="pt-PT" b="1" dirty="0" smtClean="0"/>
-              <a:t>Managed repositories</a:t>
-            </a:r>
-            <a:r>
-              <a:rPr lang="pt-PT" dirty="0" smtClean="0"/>
-              <a:t>, e.g., Spring </a:t>
-            </a:r>
-            <a:r>
-              <a:rPr lang="pt-PT" dirty="0"/>
-              <a:t>Framework</a:t>
-            </a:r>
-          </a:p>
-          <a:p>
-            <a:pPr lvl="1"/>
-            <a:r>
-              <a:rPr lang="pt-PT" dirty="0"/>
-              <a:t>Spring will load the repositories</a:t>
-            </a:r>
-          </a:p>
-          <a:p>
-            <a:pPr lvl="1"/>
-            <a:r>
-              <a:rPr lang="pt-PT" dirty="0"/>
-              <a:t>Spring will control the transactional context</a:t>
-            </a:r>
-          </a:p>
-          <a:p>
-            <a:pPr lvl="1"/>
-            <a:endParaRPr lang="pt-PT" dirty="0"/>
+              <a:rPr lang="en-GB" dirty="0" smtClean="0"/>
+              <a:t>Preferably use a container and managed transaction context, e.g., spring</a:t>
+            </a:r>
+          </a:p>
+          <a:p>
+            <a:endParaRPr lang="en-GB" dirty="0"/>
+          </a:p>
+          <a:p>
+            <a:r>
+              <a:rPr lang="en-GB" dirty="0" smtClean="0"/>
+              <a:t>Optionally control the transaction yourself</a:t>
+            </a:r>
+            <a:endParaRPr lang="en-US" dirty="0"/>
           </a:p>
         </p:txBody>
       </p:sp>
@@ -8174,16 +7842,13 @@
     </p:spTree>
     <p:extLst>
       <p:ext uri="{BB962C8B-B14F-4D97-AF65-F5344CB8AC3E}">
-        <p14:creationId xmlns:p14="http://schemas.microsoft.com/office/powerpoint/2010/main" val="2754409186"/>
+        <p14:creationId xmlns:p14="http://schemas.microsoft.com/office/powerpoint/2010/main" val="3792329237"/>
       </p:ext>
     </p:extLst>
   </p:cSld>
   <p:clrMapOvr>
     <a:masterClrMapping/>
   </p:clrMapOvr>
-  <p:transition spd="med">
-    <p:fade/>
-  </p:transition>
 </p:sld>
 </file>
 
@@ -8216,15 +7881,62 @@
         </p:nvSpPr>
         <p:spPr/>
         <p:txBody>
-          <a:bodyPr>
-            <a:noAutofit/>
-          </a:bodyPr>
-          <a:lstStyle/>
-          <a:p>
-            <a:r>
-              <a:rPr lang="pt-PT" sz="2800" dirty="0"/>
-              <a:t>All JPA repositories extend JpaBaseRepository to use spring transactional control</a:t>
-            </a:r>
+          <a:bodyPr/>
+          <a:lstStyle/>
+          <a:p>
+            <a:r>
+              <a:rPr lang="en-GB" dirty="0" smtClean="0"/>
+              <a:t>Transaction control #1</a:t>
+            </a:r>
+            <a:endParaRPr lang="pt-PT" dirty="0"/>
+          </a:p>
+        </p:txBody>
+      </p:sp>
+      <p:sp>
+        <p:nvSpPr>
+          <p:cNvPr id="3" name="Content Placeholder 2"/>
+          <p:cNvSpPr>
+            <a:spLocks noGrp="1"/>
+          </p:cNvSpPr>
+          <p:nvPr>
+            <p:ph idx="1"/>
+          </p:nvPr>
+        </p:nvSpPr>
+        <p:spPr/>
+        <p:txBody>
+          <a:bodyPr/>
+          <a:lstStyle/>
+          <a:p>
+            <a:r>
+              <a:rPr lang="pt-PT" b="1" dirty="0" smtClean="0"/>
+              <a:t>Managed repositories</a:t>
+            </a:r>
+            <a:r>
+              <a:rPr lang="pt-PT" dirty="0" smtClean="0"/>
+              <a:t>, e.g., Spring </a:t>
+            </a:r>
+            <a:r>
+              <a:rPr lang="pt-PT" dirty="0"/>
+              <a:t>Framework</a:t>
+            </a:r>
+          </a:p>
+          <a:p>
+            <a:pPr lvl="1"/>
+            <a:r>
+              <a:rPr lang="pt-PT" dirty="0"/>
+              <a:t>Spring will load the repositories</a:t>
+            </a:r>
+          </a:p>
+          <a:p>
+            <a:pPr lvl="1"/>
+            <a:r>
+              <a:rPr lang="pt-PT" dirty="0"/>
+              <a:t>Spring will control the transactional context</a:t>
+            </a:r>
+          </a:p>
+          <a:p>
+            <a:pPr lvl="1"/>
+            <a:endParaRPr lang="pt-PT" dirty="0"/>
           </a:p>
         </p:txBody>
       </p:sp>
@@ -8247,6 +7959,87 @@
               <a:rPr lang="pt-PT" smtClean="0"/>
               <a:pPr/>
               <a:t>28</a:t>
+            </a:fld>
+            <a:endParaRPr lang="pt-PT"/>
+          </a:p>
+        </p:txBody>
+      </p:sp>
+    </p:spTree>
+    <p:extLst>
+      <p:ext uri="{BB962C8B-B14F-4D97-AF65-F5344CB8AC3E}">
+        <p14:creationId xmlns:p14="http://schemas.microsoft.com/office/powerpoint/2010/main" val="2754409186"/>
+      </p:ext>
+    </p:extLst>
+  </p:cSld>
+  <p:clrMapOvr>
+    <a:masterClrMapping/>
+  </p:clrMapOvr>
+  <p:transition spd="med">
+    <p:fade/>
+  </p:transition>
+</p:sld>
+</file>
+
+<file path=ppt/slides/slide29.xml><?xml version="1.0" encoding="utf-8"?>
+<p:sld xmlns:a="http://schemas.openxmlformats.org/drawingml/2006/main" xmlns:r="http://schemas.openxmlformats.org/officeDocument/2006/relationships" xmlns:p="http://schemas.openxmlformats.org/presentationml/2006/main">
+  <p:cSld>
+    <p:spTree>
+      <p:nvGrpSpPr>
+        <p:cNvPr id="1" name=""/>
+        <p:cNvGrpSpPr/>
+        <p:nvPr/>
+      </p:nvGrpSpPr>
+      <p:grpSpPr>
+        <a:xfrm>
+          <a:off x="0" y="0"/>
+          <a:ext cx="0" cy="0"/>
+          <a:chOff x="0" y="0"/>
+          <a:chExt cx="0" cy="0"/>
+        </a:xfrm>
+      </p:grpSpPr>
+      <p:sp>
+        <p:nvSpPr>
+          <p:cNvPr id="2" name="Title 1"/>
+          <p:cNvSpPr>
+            <a:spLocks noGrp="1"/>
+          </p:cNvSpPr>
+          <p:nvPr>
+            <p:ph type="title"/>
+          </p:nvPr>
+        </p:nvSpPr>
+        <p:spPr/>
+        <p:txBody>
+          <a:bodyPr>
+            <a:noAutofit/>
+          </a:bodyPr>
+          <a:lstStyle/>
+          <a:p>
+            <a:r>
+              <a:rPr lang="pt-PT" sz="2800" dirty="0"/>
+              <a:t>All JPA repositories extend JpaBaseRepository to use spring transactional control</a:t>
+            </a:r>
+          </a:p>
+        </p:txBody>
+      </p:sp>
+      <p:sp>
+        <p:nvSpPr>
+          <p:cNvPr id="4" name="Slide Number Placeholder 3"/>
+          <p:cNvSpPr>
+            <a:spLocks noGrp="1"/>
+          </p:cNvSpPr>
+          <p:nvPr>
+            <p:ph type="sldNum" sz="quarter" idx="12"/>
+          </p:nvPr>
+        </p:nvSpPr>
+        <p:spPr/>
+        <p:txBody>
+          <a:bodyPr/>
+          <a:lstStyle/>
+          <a:p>
+            <a:fld id="{024A9932-4E76-455F-8E1A-2CC10C89B014}" type="slidenum">
+              <a:rPr lang="pt-PT" smtClean="0"/>
+              <a:pPr/>
+              <a:t>29</a:t>
             </a:fld>
             <a:endParaRPr lang="pt-PT"/>
           </a:p>
@@ -8416,7 +8209,7 @@
 </p:sld>
 </file>
 
-<file path=ppt/slides/slide29.xml><?xml version="1.0" encoding="utf-8"?>
+<file path=ppt/slides/slide3.xml><?xml version="1.0" encoding="utf-8"?>
 <p:sld xmlns:a="http://schemas.openxmlformats.org/drawingml/2006/main" xmlns:r="http://schemas.openxmlformats.org/officeDocument/2006/relationships" xmlns:p="http://schemas.openxmlformats.org/presentationml/2006/main">
   <p:cSld>
     <p:spTree>
@@ -8449,8 +8242,88 @@
           <a:lstStyle/>
           <a:p>
             <a:r>
+              <a:rPr lang="en-GB" dirty="0" smtClean="0"/>
+              <a:t>Components </a:t>
+            </a:r>
+            <a:endParaRPr lang="en-US" dirty="0"/>
+          </a:p>
+        </p:txBody>
+      </p:sp>
+      <p:sp>
+        <p:nvSpPr>
+          <p:cNvPr id="3" name="Content Placeholder 2"/>
+          <p:cNvSpPr>
+            <a:spLocks noGrp="1"/>
+          </p:cNvSpPr>
+          <p:nvPr>
+            <p:ph idx="1"/>
+          </p:nvPr>
+        </p:nvSpPr>
+        <p:spPr/>
+        <p:txBody>
+          <a:bodyPr/>
+          <a:lstStyle/>
+          <a:p>
+            <a:r>
+              <a:rPr lang="en-GB" dirty="0" smtClean="0"/>
+              <a:t>Core</a:t>
+            </a:r>
+          </a:p>
+          <a:p>
+            <a:pPr lvl="1"/>
+            <a:r>
               <a:rPr lang="en-GB" dirty="0"/>
-              <a:t>Spring Transactional control</a:t>
+              <a:t>Domain driven design</a:t>
+            </a:r>
+          </a:p>
+          <a:p>
+            <a:pPr lvl="1"/>
+            <a:r>
+              <a:rPr lang="en-GB" dirty="0" smtClean="0"/>
+              <a:t>Persistence</a:t>
+            </a:r>
+          </a:p>
+          <a:p>
+            <a:pPr lvl="1"/>
+            <a:r>
+              <a:rPr lang="en-GB" dirty="0" smtClean="0"/>
+              <a:t>Utilities</a:t>
+            </a:r>
+            <a:endParaRPr lang="en-GB" dirty="0"/>
+          </a:p>
+          <a:p>
+            <a:pPr lvl="1"/>
+            <a:r>
+              <a:rPr lang="en-GB" dirty="0" smtClean="0"/>
+              <a:t>Simple Console Presentation framework</a:t>
+            </a:r>
+          </a:p>
+          <a:p>
+            <a:r>
+              <a:rPr lang="en-GB" dirty="0" smtClean="0"/>
+              <a:t>Infrastructure </a:t>
+            </a:r>
+            <a:r>
+              <a:rPr lang="en-GB" dirty="0" err="1" smtClean="0"/>
+              <a:t>Authz</a:t>
+            </a:r>
+            <a:endParaRPr lang="en-GB" dirty="0" smtClean="0"/>
+          </a:p>
+          <a:p>
+            <a:r>
+              <a:rPr lang="en-GB" dirty="0"/>
+              <a:t>Infrastructure </a:t>
+            </a:r>
+            <a:r>
+              <a:rPr lang="en-GB" dirty="0" smtClean="0"/>
+              <a:t>Pub/Sub</a:t>
+            </a:r>
+          </a:p>
+          <a:p>
+            <a:pPr lvl="1"/>
+            <a:r>
+              <a:rPr lang="en-GB" dirty="0" smtClean="0"/>
+              <a:t>Event publishing and dispatching</a:t>
             </a:r>
             <a:endParaRPr lang="en-US" dirty="0"/>
           </a:p>
@@ -8474,7 +8347,84 @@
             <a:fld id="{024A9932-4E76-455F-8E1A-2CC10C89B014}" type="slidenum">
               <a:rPr lang="pt-PT" smtClean="0"/>
               <a:pPr/>
-              <a:t>29</a:t>
+              <a:t>3</a:t>
+            </a:fld>
+            <a:endParaRPr lang="pt-PT"/>
+          </a:p>
+        </p:txBody>
+      </p:sp>
+    </p:spTree>
+    <p:extLst>
+      <p:ext uri="{BB962C8B-B14F-4D97-AF65-F5344CB8AC3E}">
+        <p14:creationId xmlns:p14="http://schemas.microsoft.com/office/powerpoint/2010/main" val="3205579399"/>
+      </p:ext>
+    </p:extLst>
+  </p:cSld>
+  <p:clrMapOvr>
+    <a:masterClrMapping/>
+  </p:clrMapOvr>
+</p:sld>
+</file>
+
+<file path=ppt/slides/slide30.xml><?xml version="1.0" encoding="utf-8"?>
+<p:sld xmlns:a="http://schemas.openxmlformats.org/drawingml/2006/main" xmlns:r="http://schemas.openxmlformats.org/officeDocument/2006/relationships" xmlns:p="http://schemas.openxmlformats.org/presentationml/2006/main">
+  <p:cSld>
+    <p:spTree>
+      <p:nvGrpSpPr>
+        <p:cNvPr id="1" name=""/>
+        <p:cNvGrpSpPr/>
+        <p:nvPr/>
+      </p:nvGrpSpPr>
+      <p:grpSpPr>
+        <a:xfrm>
+          <a:off x="0" y="0"/>
+          <a:ext cx="0" cy="0"/>
+          <a:chOff x="0" y="0"/>
+          <a:chExt cx="0" cy="0"/>
+        </a:xfrm>
+      </p:grpSpPr>
+      <p:sp>
+        <p:nvSpPr>
+          <p:cNvPr id="2" name="Title 1"/>
+          <p:cNvSpPr>
+            <a:spLocks noGrp="1"/>
+          </p:cNvSpPr>
+          <p:nvPr>
+            <p:ph type="title"/>
+          </p:nvPr>
+        </p:nvSpPr>
+        <p:spPr/>
+        <p:txBody>
+          <a:bodyPr/>
+          <a:lstStyle/>
+          <a:p>
+            <a:r>
+              <a:rPr lang="en-GB" dirty="0"/>
+              <a:t>Spring Transactional control</a:t>
+            </a:r>
+            <a:endParaRPr lang="en-US" dirty="0"/>
+          </a:p>
+        </p:txBody>
+      </p:sp>
+      <p:sp>
+        <p:nvSpPr>
+          <p:cNvPr id="4" name="Slide Number Placeholder 3"/>
+          <p:cNvSpPr>
+            <a:spLocks noGrp="1"/>
+          </p:cNvSpPr>
+          <p:nvPr>
+            <p:ph type="sldNum" sz="quarter" idx="12"/>
+          </p:nvPr>
+        </p:nvSpPr>
+        <p:spPr/>
+        <p:txBody>
+          <a:bodyPr/>
+          <a:lstStyle/>
+          <a:p>
+            <a:fld id="{024A9932-4E76-455F-8E1A-2CC10C89B014}" type="slidenum">
+              <a:rPr lang="pt-PT" smtClean="0"/>
+              <a:pPr/>
+              <a:t>30</a:t>
             </a:fld>
             <a:endParaRPr lang="pt-PT"/>
           </a:p>
@@ -8601,7 +8551,7 @@
 </p:sld>
 </file>
 
-<file path=ppt/slides/slide3.xml><?xml version="1.0" encoding="utf-8"?>
+<file path=ppt/slides/slide31.xml><?xml version="1.0" encoding="utf-8"?>
 <p:sld xmlns:a="http://schemas.openxmlformats.org/drawingml/2006/main" xmlns:r="http://schemas.openxmlformats.org/officeDocument/2006/relationships" xmlns:p="http://schemas.openxmlformats.org/presentationml/2006/main">
   <p:cSld>
     <p:spTree>
@@ -8634,88 +8584,12 @@
           <a:lstStyle/>
           <a:p>
             <a:r>
-              <a:rPr lang="en-GB" dirty="0" smtClean="0"/>
-              <a:t>Components </a:t>
-            </a:r>
-            <a:endParaRPr lang="en-US" dirty="0"/>
-          </a:p>
-        </p:txBody>
-      </p:sp>
-      <p:sp>
-        <p:nvSpPr>
-          <p:cNvPr id="3" name="Content Placeholder 2"/>
-          <p:cNvSpPr>
-            <a:spLocks noGrp="1"/>
-          </p:cNvSpPr>
-          <p:nvPr>
-            <p:ph idx="1"/>
-          </p:nvPr>
-        </p:nvSpPr>
-        <p:spPr/>
-        <p:txBody>
-          <a:bodyPr/>
-          <a:lstStyle/>
-          <a:p>
-            <a:r>
-              <a:rPr lang="en-GB" dirty="0" smtClean="0"/>
-              <a:t>Core</a:t>
-            </a:r>
-          </a:p>
-          <a:p>
-            <a:pPr lvl="1"/>
+              <a:rPr lang="en-GB" dirty="0" err="1"/>
+              <a:t>SpringData</a:t>
+            </a:r>
             <a:r>
               <a:rPr lang="en-GB" dirty="0"/>
-              <a:t>Domain driven design</a:t>
-            </a:r>
-          </a:p>
-          <a:p>
-            <a:pPr lvl="1"/>
-            <a:r>
-              <a:rPr lang="en-GB" dirty="0" smtClean="0"/>
-              <a:t>Persistence</a:t>
-            </a:r>
-          </a:p>
-          <a:p>
-            <a:pPr lvl="1"/>
-            <a:r>
-              <a:rPr lang="en-GB" dirty="0" smtClean="0"/>
-              <a:t>Utilities</a:t>
-            </a:r>
-            <a:endParaRPr lang="en-GB" dirty="0"/>
-          </a:p>
-          <a:p>
-            <a:pPr lvl="1"/>
-            <a:r>
-              <a:rPr lang="en-GB" dirty="0" smtClean="0"/>
-              <a:t>Simple Console Presentation framework</a:t>
-            </a:r>
-          </a:p>
-          <a:p>
-            <a:r>
-              <a:rPr lang="en-GB" dirty="0" smtClean="0"/>
-              <a:t>Infrastructure </a:t>
-            </a:r>
-            <a:r>
-              <a:rPr lang="en-GB" dirty="0" err="1" smtClean="0"/>
-              <a:t>Authz</a:t>
-            </a:r>
-            <a:endParaRPr lang="en-GB" dirty="0" smtClean="0"/>
-          </a:p>
-          <a:p>
-            <a:r>
-              <a:rPr lang="en-GB" dirty="0"/>
-              <a:t>Infrastructure </a:t>
-            </a:r>
-            <a:r>
-              <a:rPr lang="en-GB" dirty="0" smtClean="0"/>
-              <a:t>Pub/Sub</a:t>
-            </a:r>
-          </a:p>
-          <a:p>
-            <a:pPr lvl="1"/>
-            <a:r>
-              <a:rPr lang="en-GB" dirty="0" smtClean="0"/>
-              <a:t>Event publishing and dispatching</a:t>
+              <a:t> repositories (1)</a:t>
             </a:r>
             <a:endParaRPr lang="en-US" dirty="0"/>
           </a:p>
@@ -8739,88 +8613,7 @@
             <a:fld id="{024A9932-4E76-455F-8E1A-2CC10C89B014}" type="slidenum">
               <a:rPr lang="pt-PT" smtClean="0"/>
               <a:pPr/>
-              <a:t>3</a:t>
-            </a:fld>
-            <a:endParaRPr lang="pt-PT"/>
-          </a:p>
-        </p:txBody>
-      </p:sp>
-    </p:spTree>
-    <p:extLst>
-      <p:ext uri="{BB962C8B-B14F-4D97-AF65-F5344CB8AC3E}">
-        <p14:creationId xmlns:p14="http://schemas.microsoft.com/office/powerpoint/2010/main" val="3205579399"/>
-      </p:ext>
-    </p:extLst>
-  </p:cSld>
-  <p:clrMapOvr>
-    <a:masterClrMapping/>
-  </p:clrMapOvr>
-</p:sld>
-</file>
-
-<file path=ppt/slides/slide30.xml><?xml version="1.0" encoding="utf-8"?>
-<p:sld xmlns:a="http://schemas.openxmlformats.org/drawingml/2006/main" xmlns:r="http://schemas.openxmlformats.org/officeDocument/2006/relationships" xmlns:p="http://schemas.openxmlformats.org/presentationml/2006/main">
-  <p:cSld>
-    <p:spTree>
-      <p:nvGrpSpPr>
-        <p:cNvPr id="1" name=""/>
-        <p:cNvGrpSpPr/>
-        <p:nvPr/>
-      </p:nvGrpSpPr>
-      <p:grpSpPr>
-        <a:xfrm>
-          <a:off x="0" y="0"/>
-          <a:ext cx="0" cy="0"/>
-          <a:chOff x="0" y="0"/>
-          <a:chExt cx="0" cy="0"/>
-        </a:xfrm>
-      </p:grpSpPr>
-      <p:sp>
-        <p:nvSpPr>
-          <p:cNvPr id="2" name="Title 1"/>
-          <p:cNvSpPr>
-            <a:spLocks noGrp="1"/>
-          </p:cNvSpPr>
-          <p:nvPr>
-            <p:ph type="title"/>
-          </p:nvPr>
-        </p:nvSpPr>
-        <p:spPr/>
-        <p:txBody>
-          <a:bodyPr/>
-          <a:lstStyle/>
-          <a:p>
-            <a:r>
-              <a:rPr lang="en-GB" dirty="0" err="1"/>
-              <a:t>SpringData</a:t>
-            </a:r>
-            <a:r>
-              <a:rPr lang="en-GB" dirty="0"/>
-              <a:t> repositories (1)</a:t>
-            </a:r>
-            <a:endParaRPr lang="en-US" dirty="0"/>
-          </a:p>
-        </p:txBody>
-      </p:sp>
-      <p:sp>
-        <p:nvSpPr>
-          <p:cNvPr id="4" name="Slide Number Placeholder 3"/>
-          <p:cNvSpPr>
-            <a:spLocks noGrp="1"/>
-          </p:cNvSpPr>
-          <p:nvPr>
-            <p:ph type="sldNum" sz="quarter" idx="12"/>
-          </p:nvPr>
-        </p:nvSpPr>
-        <p:spPr/>
-        <p:txBody>
-          <a:bodyPr/>
-          <a:lstStyle/>
-          <a:p>
-            <a:fld id="{024A9932-4E76-455F-8E1A-2CC10C89B014}" type="slidenum">
-              <a:rPr lang="pt-PT" smtClean="0"/>
-              <a:pPr/>
-              <a:t>30</a:t>
+              <a:t>31</a:t>
             </a:fld>
             <a:endParaRPr lang="pt-PT"/>
           </a:p>
@@ -8947,7 +8740,7 @@
 </p:sld>
 </file>
 
-<file path=ppt/slides/slide31.xml><?xml version="1.0" encoding="utf-8"?>
+<file path=ppt/slides/slide32.xml><?xml version="1.0" encoding="utf-8"?>
 <p:sld xmlns:a="http://schemas.openxmlformats.org/drawingml/2006/main" xmlns:r="http://schemas.openxmlformats.org/officeDocument/2006/relationships" xmlns:p="http://schemas.openxmlformats.org/presentationml/2006/main">
   <p:cSld>
     <p:spTree>
@@ -9009,7 +8802,7 @@
             <a:fld id="{024A9932-4E76-455F-8E1A-2CC10C89B014}" type="slidenum">
               <a:rPr lang="pt-PT" smtClean="0"/>
               <a:pPr/>
-              <a:t>31</a:t>
+              <a:t>32</a:t>
             </a:fld>
             <a:endParaRPr lang="pt-PT"/>
           </a:p>
@@ -9102,110 +8895,6 @@
 </p:sld>
 </file>
 
-<file path=ppt/slides/slide32.xml><?xml version="1.0" encoding="utf-8"?>
-<p:sld xmlns:a="http://schemas.openxmlformats.org/drawingml/2006/main" xmlns:r="http://schemas.openxmlformats.org/officeDocument/2006/relationships" xmlns:p="http://schemas.openxmlformats.org/presentationml/2006/main">
-  <p:cSld>
-    <p:spTree>
-      <p:nvGrpSpPr>
-        <p:cNvPr id="1" name=""/>
-        <p:cNvGrpSpPr/>
-        <p:nvPr/>
-      </p:nvGrpSpPr>
-      <p:grpSpPr>
-        <a:xfrm>
-          <a:off x="0" y="0"/>
-          <a:ext cx="0" cy="0"/>
-          <a:chOff x="0" y="0"/>
-          <a:chExt cx="0" cy="0"/>
-        </a:xfrm>
-      </p:grpSpPr>
-      <p:sp>
-        <p:nvSpPr>
-          <p:cNvPr id="2" name="Title 1"/>
-          <p:cNvSpPr>
-            <a:spLocks noGrp="1"/>
-          </p:cNvSpPr>
-          <p:nvPr>
-            <p:ph type="title"/>
-          </p:nvPr>
-        </p:nvSpPr>
-        <p:spPr/>
-        <p:txBody>
-          <a:bodyPr/>
-          <a:lstStyle/>
-          <a:p>
-            <a:r>
-              <a:rPr lang="en-GB" dirty="0" smtClean="0"/>
-              <a:t>Transaction control #2</a:t>
-            </a:r>
-            <a:endParaRPr lang="en-US" dirty="0"/>
-          </a:p>
-        </p:txBody>
-      </p:sp>
-      <p:sp>
-        <p:nvSpPr>
-          <p:cNvPr id="3" name="Content Placeholder 2"/>
-          <p:cNvSpPr>
-            <a:spLocks noGrp="1"/>
-          </p:cNvSpPr>
-          <p:nvPr>
-            <p:ph idx="1"/>
-          </p:nvPr>
-        </p:nvSpPr>
-        <p:spPr/>
-        <p:txBody>
-          <a:bodyPr/>
-          <a:lstStyle/>
-          <a:p>
-            <a:r>
-              <a:rPr lang="en-GB" b="1" dirty="0" smtClean="0"/>
-              <a:t>Control the transaction yourself </a:t>
-            </a:r>
-            <a:r>
-              <a:rPr lang="en-GB" dirty="0" smtClean="0"/>
-              <a:t> using helper classes in the persistence package</a:t>
-            </a:r>
-            <a:endParaRPr lang="en-US" b="1" dirty="0"/>
-          </a:p>
-        </p:txBody>
-      </p:sp>
-      <p:sp>
-        <p:nvSpPr>
-          <p:cNvPr id="4" name="Slide Number Placeholder 3"/>
-          <p:cNvSpPr>
-            <a:spLocks noGrp="1"/>
-          </p:cNvSpPr>
-          <p:nvPr>
-            <p:ph type="sldNum" sz="quarter" idx="12"/>
-          </p:nvPr>
-        </p:nvSpPr>
-        <p:spPr/>
-        <p:txBody>
-          <a:bodyPr/>
-          <a:lstStyle/>
-          <a:p>
-            <a:fld id="{024A9932-4E76-455F-8E1A-2CC10C89B014}" type="slidenum">
-              <a:rPr lang="pt-PT" smtClean="0"/>
-              <a:pPr/>
-              <a:t>32</a:t>
-            </a:fld>
-            <a:endParaRPr lang="pt-PT"/>
-          </a:p>
-        </p:txBody>
-      </p:sp>
-    </p:spTree>
-    <p:extLst>
-      <p:ext uri="{BB962C8B-B14F-4D97-AF65-F5344CB8AC3E}">
-        <p14:creationId xmlns:p14="http://schemas.microsoft.com/office/powerpoint/2010/main" val="3563145965"/>
-      </p:ext>
-    </p:extLst>
-  </p:cSld>
-  <p:clrMapOvr>
-    <a:masterClrMapping/>
-  </p:clrMapOvr>
-</p:sld>
-</file>
-
 <file path=ppt/slides/slide33.xml><?xml version="1.0" encoding="utf-8"?>
 <p:sld xmlns:a="http://schemas.openxmlformats.org/drawingml/2006/main" xmlns:r="http://schemas.openxmlformats.org/officeDocument/2006/relationships" xmlns:p="http://schemas.openxmlformats.org/presentationml/2006/main">
   <p:cSld>
@@ -9235,16 +8924,41 @@
         </p:nvSpPr>
         <p:spPr/>
         <p:txBody>
-          <a:bodyPr>
-            <a:normAutofit fontScale="90000"/>
-          </a:bodyPr>
-          <a:lstStyle/>
-          <a:p>
-            <a:r>
-              <a:rPr lang="en-GB" dirty="0"/>
-              <a:t>Full transaction control by the repository</a:t>
-            </a:r>
-            <a:endParaRPr lang="pt-PT" dirty="0"/>
+          <a:bodyPr/>
+          <a:lstStyle/>
+          <a:p>
+            <a:r>
+              <a:rPr lang="en-GB" dirty="0" smtClean="0"/>
+              <a:t>Transaction control #2</a:t>
+            </a:r>
+            <a:endParaRPr lang="en-US" dirty="0"/>
+          </a:p>
+        </p:txBody>
+      </p:sp>
+      <p:sp>
+        <p:nvSpPr>
+          <p:cNvPr id="3" name="Content Placeholder 2"/>
+          <p:cNvSpPr>
+            <a:spLocks noGrp="1"/>
+          </p:cNvSpPr>
+          <p:nvPr>
+            <p:ph idx="1"/>
+          </p:nvPr>
+        </p:nvSpPr>
+        <p:spPr/>
+        <p:txBody>
+          <a:bodyPr/>
+          <a:lstStyle/>
+          <a:p>
+            <a:r>
+              <a:rPr lang="en-GB" b="1" dirty="0" smtClean="0"/>
+              <a:t>Control the transaction yourself </a:t>
+            </a:r>
+            <a:r>
+              <a:rPr lang="en-GB" dirty="0" smtClean="0"/>
+              <a:t> using helper classes in the persistence package</a:t>
+            </a:r>
+            <a:endParaRPr lang="en-US" b="1" dirty="0"/>
           </a:p>
         </p:txBody>
       </p:sp>
@@ -9267,6 +8981,85 @@
               <a:rPr lang="pt-PT" smtClean="0"/>
               <a:pPr/>
               <a:t>33</a:t>
+            </a:fld>
+            <a:endParaRPr lang="pt-PT"/>
+          </a:p>
+        </p:txBody>
+      </p:sp>
+    </p:spTree>
+    <p:extLst>
+      <p:ext uri="{BB962C8B-B14F-4D97-AF65-F5344CB8AC3E}">
+        <p14:creationId xmlns:p14="http://schemas.microsoft.com/office/powerpoint/2010/main" val="3563145965"/>
+      </p:ext>
+    </p:extLst>
+  </p:cSld>
+  <p:clrMapOvr>
+    <a:masterClrMapping/>
+  </p:clrMapOvr>
+</p:sld>
+</file>
+
+<file path=ppt/slides/slide34.xml><?xml version="1.0" encoding="utf-8"?>
+<p:sld xmlns:a="http://schemas.openxmlformats.org/drawingml/2006/main" xmlns:r="http://schemas.openxmlformats.org/officeDocument/2006/relationships" xmlns:p="http://schemas.openxmlformats.org/presentationml/2006/main">
+  <p:cSld>
+    <p:spTree>
+      <p:nvGrpSpPr>
+        <p:cNvPr id="1" name=""/>
+        <p:cNvGrpSpPr/>
+        <p:nvPr/>
+      </p:nvGrpSpPr>
+      <p:grpSpPr>
+        <a:xfrm>
+          <a:off x="0" y="0"/>
+          <a:ext cx="0" cy="0"/>
+          <a:chOff x="0" y="0"/>
+          <a:chExt cx="0" cy="0"/>
+        </a:xfrm>
+      </p:grpSpPr>
+      <p:sp>
+        <p:nvSpPr>
+          <p:cNvPr id="2" name="Title 1"/>
+          <p:cNvSpPr>
+            <a:spLocks noGrp="1"/>
+          </p:cNvSpPr>
+          <p:nvPr>
+            <p:ph type="title"/>
+          </p:nvPr>
+        </p:nvSpPr>
+        <p:spPr/>
+        <p:txBody>
+          <a:bodyPr>
+            <a:normAutofit fontScale="90000"/>
+          </a:bodyPr>
+          <a:lstStyle/>
+          <a:p>
+            <a:r>
+              <a:rPr lang="en-GB" dirty="0"/>
+              <a:t>Full transaction control by the repository</a:t>
+            </a:r>
+            <a:endParaRPr lang="pt-PT" dirty="0"/>
+          </a:p>
+        </p:txBody>
+      </p:sp>
+      <p:sp>
+        <p:nvSpPr>
+          <p:cNvPr id="4" name="Slide Number Placeholder 3"/>
+          <p:cNvSpPr>
+            <a:spLocks noGrp="1"/>
+          </p:cNvSpPr>
+          <p:nvPr>
+            <p:ph type="sldNum" sz="quarter" idx="12"/>
+          </p:nvPr>
+        </p:nvSpPr>
+        <p:spPr/>
+        <p:txBody>
+          <a:bodyPr/>
+          <a:lstStyle/>
+          <a:p>
+            <a:fld id="{024A9932-4E76-455F-8E1A-2CC10C89B014}" type="slidenum">
+              <a:rPr lang="pt-PT" smtClean="0"/>
+              <a:pPr/>
+              <a:t>34</a:t>
             </a:fld>
             <a:endParaRPr lang="pt-PT"/>
           </a:p>
@@ -9353,134 +9146,6 @@
 </p:sld>
 </file>
 
-<file path=ppt/slides/slide34.xml><?xml version="1.0" encoding="utf-8"?>
-<p:sld xmlns:a="http://schemas.openxmlformats.org/drawingml/2006/main" xmlns:r="http://schemas.openxmlformats.org/officeDocument/2006/relationships" xmlns:p="http://schemas.openxmlformats.org/presentationml/2006/main">
-  <p:cSld>
-    <p:spTree>
-      <p:nvGrpSpPr>
-        <p:cNvPr id="1" name=""/>
-        <p:cNvGrpSpPr/>
-        <p:nvPr/>
-      </p:nvGrpSpPr>
-      <p:grpSpPr>
-        <a:xfrm>
-          <a:off x="0" y="0"/>
-          <a:ext cx="0" cy="0"/>
-          <a:chOff x="0" y="0"/>
-          <a:chExt cx="0" cy="0"/>
-        </a:xfrm>
-      </p:grpSpPr>
-      <p:sp>
-        <p:nvSpPr>
-          <p:cNvPr id="2" name="Title 1"/>
-          <p:cNvSpPr>
-            <a:spLocks noGrp="1"/>
-          </p:cNvSpPr>
-          <p:nvPr>
-            <p:ph type="title"/>
-          </p:nvPr>
-        </p:nvSpPr>
-        <p:spPr/>
-        <p:txBody>
-          <a:bodyPr>
-            <a:normAutofit fontScale="90000"/>
-          </a:bodyPr>
-          <a:lstStyle/>
-          <a:p>
-            <a:r>
-              <a:rPr lang="en-GB" dirty="0"/>
-              <a:t>Transaction control outside of the repository (1)</a:t>
-            </a:r>
-            <a:endParaRPr lang="pt-PT" dirty="0"/>
-          </a:p>
-        </p:txBody>
-      </p:sp>
-      <p:sp>
-        <p:nvSpPr>
-          <p:cNvPr id="3" name="Content Placeholder 2"/>
-          <p:cNvSpPr>
-            <a:spLocks noGrp="1"/>
-          </p:cNvSpPr>
-          <p:nvPr>
-            <p:ph idx="1"/>
-          </p:nvPr>
-        </p:nvSpPr>
-        <p:spPr/>
-        <p:txBody>
-          <a:bodyPr/>
-          <a:lstStyle/>
-          <a:p>
-            <a:r>
-              <a:rPr lang="pt-PT" dirty="0"/>
-              <a:t>Accepting a signup request needs to</a:t>
-            </a:r>
-          </a:p>
-          <a:p>
-            <a:pPr lvl="1"/>
-            <a:r>
-              <a:rPr lang="pt-PT" dirty="0"/>
-              <a:t>Create a system user</a:t>
-            </a:r>
-          </a:p>
-          <a:p>
-            <a:pPr lvl="1"/>
-            <a:r>
-              <a:rPr lang="pt-PT" dirty="0"/>
-              <a:t>Create a cafeteria user</a:t>
-            </a:r>
-          </a:p>
-          <a:p>
-            <a:pPr lvl="1"/>
-            <a:r>
-              <a:rPr lang="pt-PT" dirty="0"/>
-              <a:t>Change the status of the signup request</a:t>
-            </a:r>
-          </a:p>
-          <a:p>
-            <a:r>
-              <a:rPr lang="pt-PT" dirty="0"/>
-              <a:t>Three different aggregates!</a:t>
-            </a:r>
-          </a:p>
-        </p:txBody>
-      </p:sp>
-      <p:sp>
-        <p:nvSpPr>
-          <p:cNvPr id="4" name="Slide Number Placeholder 3"/>
-          <p:cNvSpPr>
-            <a:spLocks noGrp="1"/>
-          </p:cNvSpPr>
-          <p:nvPr>
-            <p:ph type="sldNum" sz="quarter" idx="12"/>
-          </p:nvPr>
-        </p:nvSpPr>
-        <p:spPr/>
-        <p:txBody>
-          <a:bodyPr/>
-          <a:lstStyle/>
-          <a:p>
-            <a:fld id="{024A9932-4E76-455F-8E1A-2CC10C89B014}" type="slidenum">
-              <a:rPr lang="pt-PT" smtClean="0"/>
-              <a:pPr/>
-              <a:t>34</a:t>
-            </a:fld>
-            <a:endParaRPr lang="pt-PT"/>
-          </a:p>
-        </p:txBody>
-      </p:sp>
-    </p:spTree>
-    <p:extLst>
-      <p:ext uri="{BB962C8B-B14F-4D97-AF65-F5344CB8AC3E}">
-        <p14:creationId xmlns:p14="http://schemas.microsoft.com/office/powerpoint/2010/main" val="348772272"/>
-      </p:ext>
-    </p:extLst>
-  </p:cSld>
-  <p:clrMapOvr>
-    <a:masterClrMapping/>
-  </p:clrMapOvr>
-</p:sld>
-</file>
-
 <file path=ppt/slides/slide35.xml><?xml version="1.0" encoding="utf-8"?>
 <p:sld xmlns:a="http://schemas.openxmlformats.org/drawingml/2006/main" xmlns:r="http://schemas.openxmlformats.org/officeDocument/2006/relationships" xmlns:p="http://schemas.openxmlformats.org/presentationml/2006/main">
   <p:cSld>
@@ -9517,13 +9182,58 @@
           <a:p>
             <a:r>
               <a:rPr lang="en-GB" dirty="0"/>
-              <a:t>Transaction control (2): use </a:t>
-            </a:r>
-            <a:r>
-              <a:rPr lang="en-GB" dirty="0" err="1"/>
-              <a:t>JpaAutoTxRepository</a:t>
+              <a:t>Transaction control outside of the repository (1)</a:t>
             </a:r>
             <a:endParaRPr lang="pt-PT" dirty="0"/>
+          </a:p>
+        </p:txBody>
+      </p:sp>
+      <p:sp>
+        <p:nvSpPr>
+          <p:cNvPr id="3" name="Content Placeholder 2"/>
+          <p:cNvSpPr>
+            <a:spLocks noGrp="1"/>
+          </p:cNvSpPr>
+          <p:nvPr>
+            <p:ph idx="1"/>
+          </p:nvPr>
+        </p:nvSpPr>
+        <p:spPr/>
+        <p:txBody>
+          <a:bodyPr/>
+          <a:lstStyle/>
+          <a:p>
+            <a:r>
+              <a:rPr lang="pt-PT" dirty="0"/>
+              <a:t>Accepting a signup request needs to</a:t>
+            </a:r>
+          </a:p>
+          <a:p>
+            <a:pPr lvl="1"/>
+            <a:r>
+              <a:rPr lang="pt-PT" dirty="0"/>
+              <a:t>Create a system user</a:t>
+            </a:r>
+          </a:p>
+          <a:p>
+            <a:pPr lvl="1"/>
+            <a:r>
+              <a:rPr lang="pt-PT" dirty="0"/>
+              <a:t>Create a cafeteria user</a:t>
+            </a:r>
+          </a:p>
+          <a:p>
+            <a:pPr lvl="1"/>
+            <a:r>
+              <a:rPr lang="pt-PT" dirty="0"/>
+              <a:t>Change the status of the signup request</a:t>
+            </a:r>
+          </a:p>
+          <a:p>
+            <a:r>
+              <a:rPr lang="pt-PT" dirty="0"/>
+              <a:t>Three different aggregates!</a:t>
+            </a:r>
           </a:p>
         </p:txBody>
       </p:sp>
@@ -9546,6 +9256,89 @@
               <a:rPr lang="pt-PT" smtClean="0"/>
               <a:pPr/>
               <a:t>35</a:t>
+            </a:fld>
+            <a:endParaRPr lang="pt-PT"/>
+          </a:p>
+        </p:txBody>
+      </p:sp>
+    </p:spTree>
+    <p:extLst>
+      <p:ext uri="{BB962C8B-B14F-4D97-AF65-F5344CB8AC3E}">
+        <p14:creationId xmlns:p14="http://schemas.microsoft.com/office/powerpoint/2010/main" val="348772272"/>
+      </p:ext>
+    </p:extLst>
+  </p:cSld>
+  <p:clrMapOvr>
+    <a:masterClrMapping/>
+  </p:clrMapOvr>
+</p:sld>
+</file>
+
+<file path=ppt/slides/slide36.xml><?xml version="1.0" encoding="utf-8"?>
+<p:sld xmlns:a="http://schemas.openxmlformats.org/drawingml/2006/main" xmlns:r="http://schemas.openxmlformats.org/officeDocument/2006/relationships" xmlns:p="http://schemas.openxmlformats.org/presentationml/2006/main">
+  <p:cSld>
+    <p:spTree>
+      <p:nvGrpSpPr>
+        <p:cNvPr id="1" name=""/>
+        <p:cNvGrpSpPr/>
+        <p:nvPr/>
+      </p:nvGrpSpPr>
+      <p:grpSpPr>
+        <a:xfrm>
+          <a:off x="0" y="0"/>
+          <a:ext cx="0" cy="0"/>
+          <a:chOff x="0" y="0"/>
+          <a:chExt cx="0" cy="0"/>
+        </a:xfrm>
+      </p:grpSpPr>
+      <p:sp>
+        <p:nvSpPr>
+          <p:cNvPr id="2" name="Title 1"/>
+          <p:cNvSpPr>
+            <a:spLocks noGrp="1"/>
+          </p:cNvSpPr>
+          <p:nvPr>
+            <p:ph type="title"/>
+          </p:nvPr>
+        </p:nvSpPr>
+        <p:spPr/>
+        <p:txBody>
+          <a:bodyPr>
+            <a:normAutofit fontScale="90000"/>
+          </a:bodyPr>
+          <a:lstStyle/>
+          <a:p>
+            <a:r>
+              <a:rPr lang="en-GB" dirty="0"/>
+              <a:t>Transaction control (2): use </a:t>
+            </a:r>
+            <a:r>
+              <a:rPr lang="en-GB" dirty="0" err="1"/>
+              <a:t>JpaAutoTxRepository</a:t>
+            </a:r>
+            <a:endParaRPr lang="pt-PT" dirty="0"/>
+          </a:p>
+        </p:txBody>
+      </p:sp>
+      <p:sp>
+        <p:nvSpPr>
+          <p:cNvPr id="4" name="Slide Number Placeholder 3"/>
+          <p:cNvSpPr>
+            <a:spLocks noGrp="1"/>
+          </p:cNvSpPr>
+          <p:nvPr>
+            <p:ph type="sldNum" sz="quarter" idx="12"/>
+          </p:nvPr>
+        </p:nvSpPr>
+        <p:spPr/>
+        <p:txBody>
+          <a:bodyPr/>
+          <a:lstStyle/>
+          <a:p>
+            <a:fld id="{024A9932-4E76-455F-8E1A-2CC10C89B014}" type="slidenum">
+              <a:rPr lang="pt-PT" smtClean="0"/>
+              <a:pPr/>
+              <a:t>36</a:t>
             </a:fld>
             <a:endParaRPr lang="pt-PT"/>
           </a:p>
@@ -9666,7 +9459,7 @@
 </p:sld>
 </file>
 
-<file path=ppt/slides/slide36.xml><?xml version="1.0" encoding="utf-8"?>
+<file path=ppt/slides/slide37.xml><?xml version="1.0" encoding="utf-8"?>
 <p:sld xmlns:a="http://schemas.openxmlformats.org/drawingml/2006/main" xmlns:r="http://schemas.openxmlformats.org/officeDocument/2006/relationships" xmlns:p="http://schemas.openxmlformats.org/presentationml/2006/main">
   <p:cSld>
     <p:spTree>
@@ -9726,7 +9519,7 @@
             <a:fld id="{024A9932-4E76-455F-8E1A-2CC10C89B014}" type="slidenum">
               <a:rPr lang="pt-PT" smtClean="0"/>
               <a:pPr/>
-              <a:t>36</a:t>
+              <a:t>37</a:t>
             </a:fld>
             <a:endParaRPr lang="pt-PT"/>
           </a:p>
@@ -9779,7 +9572,7 @@
 </p:sld>
 </file>
 
-<file path=ppt/slides/slide37.xml><?xml version="1.0" encoding="utf-8"?>
+<file path=ppt/slides/slide38.xml><?xml version="1.0" encoding="utf-8"?>
 <p:sld xmlns:a="http://schemas.openxmlformats.org/drawingml/2006/main" xmlns:r="http://schemas.openxmlformats.org/officeDocument/2006/relationships" xmlns:p="http://schemas.openxmlformats.org/presentationml/2006/main">
   <p:cSld>
     <p:spTree>
@@ -9839,7 +9632,7 @@
             <a:fld id="{024A9932-4E76-455F-8E1A-2CC10C89B014}" type="slidenum">
               <a:rPr lang="pt-PT" smtClean="0"/>
               <a:pPr/>
-              <a:t>37</a:t>
+              <a:t>38</a:t>
             </a:fld>
             <a:endParaRPr lang="pt-PT"/>
           </a:p>
@@ -9892,106 +9685,6 @@
 </p:sld>
 </file>
 
-<file path=ppt/slides/slide38.xml><?xml version="1.0" encoding="utf-8"?>
-<p:sld xmlns:a="http://schemas.openxmlformats.org/drawingml/2006/main" xmlns:r="http://schemas.openxmlformats.org/officeDocument/2006/relationships" xmlns:p="http://schemas.openxmlformats.org/presentationml/2006/main">
-  <p:cSld>
-    <p:spTree>
-      <p:nvGrpSpPr>
-        <p:cNvPr id="1" name=""/>
-        <p:cNvGrpSpPr/>
-        <p:nvPr/>
-      </p:nvGrpSpPr>
-      <p:grpSpPr>
-        <a:xfrm>
-          <a:off x="0" y="0"/>
-          <a:ext cx="0" cy="0"/>
-          <a:chOff x="0" y="0"/>
-          <a:chExt cx="0" cy="0"/>
-        </a:xfrm>
-      </p:grpSpPr>
-      <p:sp>
-        <p:nvSpPr>
-          <p:cNvPr id="3" name="Title 2"/>
-          <p:cNvSpPr>
-            <a:spLocks noGrp="1"/>
-          </p:cNvSpPr>
-          <p:nvPr>
-            <p:ph type="title"/>
-          </p:nvPr>
-        </p:nvSpPr>
-        <p:spPr/>
-        <p:txBody>
-          <a:bodyPr/>
-          <a:lstStyle/>
-          <a:p>
-            <a:r>
-              <a:rPr lang="en-GB" dirty="0" smtClean="0"/>
-              <a:t>Infrastructure </a:t>
-            </a:r>
-            <a:r>
-              <a:rPr lang="en-GB" dirty="0" err="1" smtClean="0"/>
-              <a:t>Authz</a:t>
-            </a:r>
-            <a:endParaRPr lang="en-US" dirty="0"/>
-          </a:p>
-        </p:txBody>
-      </p:sp>
-      <p:sp>
-        <p:nvSpPr>
-          <p:cNvPr id="4" name="Text Placeholder 3"/>
-          <p:cNvSpPr>
-            <a:spLocks noGrp="1"/>
-          </p:cNvSpPr>
-          <p:nvPr>
-            <p:ph type="body" idx="1"/>
-          </p:nvPr>
-        </p:nvSpPr>
-        <p:spPr/>
-        <p:txBody>
-          <a:bodyPr/>
-          <a:lstStyle/>
-          <a:p>
-            <a:endParaRPr lang="en-US"/>
-          </a:p>
-        </p:txBody>
-      </p:sp>
-      <p:sp>
-        <p:nvSpPr>
-          <p:cNvPr id="2" name="Slide Number Placeholder 1"/>
-          <p:cNvSpPr>
-            <a:spLocks noGrp="1"/>
-          </p:cNvSpPr>
-          <p:nvPr>
-            <p:ph type="sldNum" sz="quarter" idx="12"/>
-          </p:nvPr>
-        </p:nvSpPr>
-        <p:spPr/>
-        <p:txBody>
-          <a:bodyPr/>
-          <a:lstStyle/>
-          <a:p>
-            <a:fld id="{024A9932-4E76-455F-8E1A-2CC10C89B014}" type="slidenum">
-              <a:rPr lang="pt-PT" smtClean="0"/>
-              <a:pPr/>
-              <a:t>38</a:t>
-            </a:fld>
-            <a:endParaRPr lang="pt-PT"/>
-          </a:p>
-        </p:txBody>
-      </p:sp>
-    </p:spTree>
-    <p:extLst>
-      <p:ext uri="{BB962C8B-B14F-4D97-AF65-F5344CB8AC3E}">
-        <p14:creationId xmlns:p14="http://schemas.microsoft.com/office/powerpoint/2010/main" val="4178914156"/>
-      </p:ext>
-    </p:extLst>
-  </p:cSld>
-  <p:clrMapOvr>
-    <a:masterClrMapping/>
-  </p:clrMapOvr>
-</p:sld>
-</file>
-
 <file path=ppt/slides/slide39.xml><?xml version="1.0" encoding="utf-8"?>
 <p:sld xmlns:a="http://schemas.openxmlformats.org/drawingml/2006/main" xmlns:r="http://schemas.openxmlformats.org/officeDocument/2006/relationships" xmlns:p="http://schemas.openxmlformats.org/presentationml/2006/main">
   <p:cSld>
@@ -10011,7 +9704,7 @@
       </p:grpSpPr>
       <p:sp>
         <p:nvSpPr>
-          <p:cNvPr id="2" name="Title 1"/>
+          <p:cNvPr id="3" name="Title 2"/>
           <p:cNvSpPr>
             <a:spLocks noGrp="1"/>
           </p:cNvSpPr>
@@ -10025,8 +9718,12 @@
           <a:lstStyle/>
           <a:p>
             <a:r>
-              <a:rPr lang="en-GB" dirty="0"/>
-              <a:t>User model</a:t>
+              <a:rPr lang="en-GB" dirty="0" smtClean="0"/>
+              <a:t>Infrastructure </a:t>
+            </a:r>
+            <a:r>
+              <a:rPr lang="en-GB" dirty="0" err="1" smtClean="0"/>
+              <a:t>Authz</a:t>
             </a:r>
             <a:endParaRPr lang="en-US" dirty="0"/>
           </a:p>
@@ -10034,7 +9731,26 @@
       </p:sp>
       <p:sp>
         <p:nvSpPr>
-          <p:cNvPr id="4" name="Slide Number Placeholder 3"/>
+          <p:cNvPr id="4" name="Text Placeholder 3"/>
+          <p:cNvSpPr>
+            <a:spLocks noGrp="1"/>
+          </p:cNvSpPr>
+          <p:nvPr>
+            <p:ph type="body" idx="1"/>
+          </p:nvPr>
+        </p:nvSpPr>
+        <p:spPr/>
+        <p:txBody>
+          <a:bodyPr/>
+          <a:lstStyle/>
+          <a:p>
+            <a:endParaRPr lang="en-US"/>
+          </a:p>
+        </p:txBody>
+      </p:sp>
+      <p:sp>
+        <p:nvSpPr>
+          <p:cNvPr id="2" name="Slide Number Placeholder 1"/>
           <p:cNvSpPr>
             <a:spLocks noGrp="1"/>
           </p:cNvSpPr>
@@ -10051,6 +9767,211 @@
               <a:rPr lang="pt-PT" smtClean="0"/>
               <a:pPr/>
               <a:t>39</a:t>
+            </a:fld>
+            <a:endParaRPr lang="pt-PT"/>
+          </a:p>
+        </p:txBody>
+      </p:sp>
+    </p:spTree>
+    <p:extLst>
+      <p:ext uri="{BB962C8B-B14F-4D97-AF65-F5344CB8AC3E}">
+        <p14:creationId xmlns:p14="http://schemas.microsoft.com/office/powerpoint/2010/main" val="4178914156"/>
+      </p:ext>
+    </p:extLst>
+  </p:cSld>
+  <p:clrMapOvr>
+    <a:masterClrMapping/>
+  </p:clrMapOvr>
+</p:sld>
+</file>
+
+<file path=ppt/slides/slide4.xml><?xml version="1.0" encoding="utf-8"?>
+<p:sld xmlns:a="http://schemas.openxmlformats.org/drawingml/2006/main" xmlns:r="http://schemas.openxmlformats.org/officeDocument/2006/relationships" xmlns:p="http://schemas.openxmlformats.org/presentationml/2006/main">
+  <p:cSld>
+    <p:spTree>
+      <p:nvGrpSpPr>
+        <p:cNvPr id="1" name=""/>
+        <p:cNvGrpSpPr/>
+        <p:nvPr/>
+      </p:nvGrpSpPr>
+      <p:grpSpPr>
+        <a:xfrm>
+          <a:off x="0" y="0"/>
+          <a:ext cx="0" cy="0"/>
+          <a:chOff x="0" y="0"/>
+          <a:chExt cx="0" cy="0"/>
+        </a:xfrm>
+      </p:grpSpPr>
+      <p:sp>
+        <p:nvSpPr>
+          <p:cNvPr id="2" name="Title 1"/>
+          <p:cNvSpPr>
+            <a:spLocks noGrp="1"/>
+          </p:cNvSpPr>
+          <p:nvPr>
+            <p:ph type="title"/>
+          </p:nvPr>
+        </p:nvSpPr>
+        <p:spPr/>
+        <p:txBody>
+          <a:bodyPr/>
+          <a:lstStyle/>
+          <a:p>
+            <a:r>
+              <a:rPr lang="en-GB" dirty="0" smtClean="0"/>
+              <a:t>Dependencies</a:t>
+            </a:r>
+            <a:endParaRPr lang="en-US" dirty="0"/>
+          </a:p>
+        </p:txBody>
+      </p:sp>
+      <p:sp>
+        <p:nvSpPr>
+          <p:cNvPr id="3" name="Content Placeholder 2"/>
+          <p:cNvSpPr>
+            <a:spLocks noGrp="1"/>
+          </p:cNvSpPr>
+          <p:nvPr>
+            <p:ph idx="1"/>
+          </p:nvPr>
+        </p:nvSpPr>
+        <p:spPr/>
+        <p:txBody>
+          <a:bodyPr/>
+          <a:lstStyle/>
+          <a:p>
+            <a:r>
+              <a:rPr lang="en-GB" dirty="0" smtClean="0"/>
+              <a:t>Java 1.8+</a:t>
+            </a:r>
+          </a:p>
+          <a:p>
+            <a:r>
+              <a:rPr lang="en-GB" dirty="0" smtClean="0"/>
+              <a:t>Apache </a:t>
+            </a:r>
+            <a:r>
+              <a:rPr lang="en-GB" dirty="0" smtClean="0"/>
+              <a:t>Commons Logging</a:t>
+            </a:r>
+          </a:p>
+          <a:p>
+            <a:r>
+              <a:rPr lang="en-GB" dirty="0" smtClean="0"/>
+              <a:t>JPA</a:t>
+            </a:r>
+          </a:p>
+          <a:p>
+            <a:r>
+              <a:rPr lang="en-GB" dirty="0" smtClean="0"/>
+              <a:t>Spring Data JPA</a:t>
+            </a:r>
+          </a:p>
+          <a:p>
+            <a:r>
+              <a:rPr lang="en-GB" dirty="0" smtClean="0"/>
+              <a:t>Spring Framework dependency injection</a:t>
+            </a:r>
+            <a:endParaRPr lang="en-US" dirty="0"/>
+          </a:p>
+        </p:txBody>
+      </p:sp>
+      <p:sp>
+        <p:nvSpPr>
+          <p:cNvPr id="4" name="Slide Number Placeholder 3"/>
+          <p:cNvSpPr>
+            <a:spLocks noGrp="1"/>
+          </p:cNvSpPr>
+          <p:nvPr>
+            <p:ph type="sldNum" sz="quarter" idx="12"/>
+          </p:nvPr>
+        </p:nvSpPr>
+        <p:spPr/>
+        <p:txBody>
+          <a:bodyPr/>
+          <a:lstStyle/>
+          <a:p>
+            <a:fld id="{024A9932-4E76-455F-8E1A-2CC10C89B014}" type="slidenum">
+              <a:rPr lang="pt-PT" smtClean="0"/>
+              <a:pPr/>
+              <a:t>4</a:t>
+            </a:fld>
+            <a:endParaRPr lang="pt-PT"/>
+          </a:p>
+        </p:txBody>
+      </p:sp>
+    </p:spTree>
+    <p:extLst>
+      <p:ext uri="{BB962C8B-B14F-4D97-AF65-F5344CB8AC3E}">
+        <p14:creationId xmlns:p14="http://schemas.microsoft.com/office/powerpoint/2010/main" val="2447458527"/>
+      </p:ext>
+    </p:extLst>
+  </p:cSld>
+  <p:clrMapOvr>
+    <a:masterClrMapping/>
+  </p:clrMapOvr>
+</p:sld>
+</file>
+
+<file path=ppt/slides/slide40.xml><?xml version="1.0" encoding="utf-8"?>
+<p:sld xmlns:a="http://schemas.openxmlformats.org/drawingml/2006/main" xmlns:r="http://schemas.openxmlformats.org/officeDocument/2006/relationships" xmlns:p="http://schemas.openxmlformats.org/presentationml/2006/main">
+  <p:cSld>
+    <p:spTree>
+      <p:nvGrpSpPr>
+        <p:cNvPr id="1" name=""/>
+        <p:cNvGrpSpPr/>
+        <p:nvPr/>
+      </p:nvGrpSpPr>
+      <p:grpSpPr>
+        <a:xfrm>
+          <a:off x="0" y="0"/>
+          <a:ext cx="0" cy="0"/>
+          <a:chOff x="0" y="0"/>
+          <a:chExt cx="0" cy="0"/>
+        </a:xfrm>
+      </p:grpSpPr>
+      <p:sp>
+        <p:nvSpPr>
+          <p:cNvPr id="2" name="Title 1"/>
+          <p:cNvSpPr>
+            <a:spLocks noGrp="1"/>
+          </p:cNvSpPr>
+          <p:nvPr>
+            <p:ph type="title"/>
+          </p:nvPr>
+        </p:nvSpPr>
+        <p:spPr/>
+        <p:txBody>
+          <a:bodyPr/>
+          <a:lstStyle/>
+          <a:p>
+            <a:r>
+              <a:rPr lang="en-GB" dirty="0"/>
+              <a:t>User model</a:t>
+            </a:r>
+            <a:endParaRPr lang="en-US" dirty="0"/>
+          </a:p>
+        </p:txBody>
+      </p:sp>
+      <p:sp>
+        <p:nvSpPr>
+          <p:cNvPr id="4" name="Slide Number Placeholder 3"/>
+          <p:cNvSpPr>
+            <a:spLocks noGrp="1"/>
+          </p:cNvSpPr>
+          <p:nvPr>
+            <p:ph type="sldNum" sz="quarter" idx="12"/>
+          </p:nvPr>
+        </p:nvSpPr>
+        <p:spPr/>
+        <p:txBody>
+          <a:bodyPr/>
+          <a:lstStyle/>
+          <a:p>
+            <a:fld id="{024A9932-4E76-455F-8E1A-2CC10C89B014}" type="slidenum">
+              <a:rPr lang="pt-PT" smtClean="0"/>
+              <a:pPr/>
+              <a:t>40</a:t>
             </a:fld>
             <a:endParaRPr lang="pt-PT"/>
           </a:p>
@@ -10126,459 +10047,6 @@
 </p:sld>
 </file>
 
-<file path=ppt/slides/slide4.xml><?xml version="1.0" encoding="utf-8"?>
-<p:sld xmlns:a="http://schemas.openxmlformats.org/drawingml/2006/main" xmlns:r="http://schemas.openxmlformats.org/officeDocument/2006/relationships" xmlns:p="http://schemas.openxmlformats.org/presentationml/2006/main">
-  <p:cSld>
-    <p:spTree>
-      <p:nvGrpSpPr>
-        <p:cNvPr id="1" name=""/>
-        <p:cNvGrpSpPr/>
-        <p:nvPr/>
-      </p:nvGrpSpPr>
-      <p:grpSpPr>
-        <a:xfrm>
-          <a:off x="0" y="0"/>
-          <a:ext cx="0" cy="0"/>
-          <a:chOff x="0" y="0"/>
-          <a:chExt cx="0" cy="0"/>
-        </a:xfrm>
-      </p:grpSpPr>
-      <p:sp>
-        <p:nvSpPr>
-          <p:cNvPr id="2" name="Title 1"/>
-          <p:cNvSpPr>
-            <a:spLocks noGrp="1"/>
-          </p:cNvSpPr>
-          <p:nvPr>
-            <p:ph type="title"/>
-          </p:nvPr>
-        </p:nvSpPr>
-        <p:spPr/>
-        <p:txBody>
-          <a:bodyPr/>
-          <a:lstStyle/>
-          <a:p>
-            <a:r>
-              <a:rPr lang="en-GB" dirty="0" smtClean="0"/>
-              <a:t>Dependencies</a:t>
-            </a:r>
-            <a:endParaRPr lang="en-US" dirty="0"/>
-          </a:p>
-        </p:txBody>
-      </p:sp>
-      <p:sp>
-        <p:nvSpPr>
-          <p:cNvPr id="3" name="Content Placeholder 2"/>
-          <p:cNvSpPr>
-            <a:spLocks noGrp="1"/>
-          </p:cNvSpPr>
-          <p:nvPr>
-            <p:ph idx="1"/>
-          </p:nvPr>
-        </p:nvSpPr>
-        <p:spPr/>
-        <p:txBody>
-          <a:bodyPr/>
-          <a:lstStyle/>
-          <a:p>
-            <a:r>
-              <a:rPr lang="en-GB" dirty="0" smtClean="0"/>
-              <a:t>Apache Commons Logging</a:t>
-            </a:r>
-          </a:p>
-          <a:p>
-            <a:r>
-              <a:rPr lang="en-GB" dirty="0" smtClean="0"/>
-              <a:t>JPA</a:t>
-            </a:r>
-          </a:p>
-          <a:p>
-            <a:r>
-              <a:rPr lang="en-GB" dirty="0" smtClean="0"/>
-              <a:t>Spring Data JPA</a:t>
-            </a:r>
-          </a:p>
-          <a:p>
-            <a:r>
-              <a:rPr lang="en-GB" dirty="0" smtClean="0"/>
-              <a:t>Spring Framework dependency injection</a:t>
-            </a:r>
-            <a:endParaRPr lang="en-US" dirty="0"/>
-          </a:p>
-        </p:txBody>
-      </p:sp>
-      <p:sp>
-        <p:nvSpPr>
-          <p:cNvPr id="4" name="Slide Number Placeholder 3"/>
-          <p:cNvSpPr>
-            <a:spLocks noGrp="1"/>
-          </p:cNvSpPr>
-          <p:nvPr>
-            <p:ph type="sldNum" sz="quarter" idx="12"/>
-          </p:nvPr>
-        </p:nvSpPr>
-        <p:spPr/>
-        <p:txBody>
-          <a:bodyPr/>
-          <a:lstStyle/>
-          <a:p>
-            <a:fld id="{024A9932-4E76-455F-8E1A-2CC10C89B014}" type="slidenum">
-              <a:rPr lang="pt-PT" smtClean="0"/>
-              <a:pPr/>
-              <a:t>4</a:t>
-            </a:fld>
-            <a:endParaRPr lang="pt-PT"/>
-          </a:p>
-        </p:txBody>
-      </p:sp>
-    </p:spTree>
-    <p:extLst>
-      <p:ext uri="{BB962C8B-B14F-4D97-AF65-F5344CB8AC3E}">
-        <p14:creationId xmlns:p14="http://schemas.microsoft.com/office/powerpoint/2010/main" val="2447458527"/>
-      </p:ext>
-    </p:extLst>
-  </p:cSld>
-  <p:clrMapOvr>
-    <a:masterClrMapping/>
-  </p:clrMapOvr>
-</p:sld>
-</file>
-
-<file path=ppt/slides/slide40.xml><?xml version="1.0" encoding="utf-8"?>
-<p:sld xmlns:a="http://schemas.openxmlformats.org/drawingml/2006/main" xmlns:r="http://schemas.openxmlformats.org/officeDocument/2006/relationships" xmlns:p="http://schemas.openxmlformats.org/presentationml/2006/main">
-  <p:cSld>
-    <p:spTree>
-      <p:nvGrpSpPr>
-        <p:cNvPr id="1" name=""/>
-        <p:cNvGrpSpPr/>
-        <p:nvPr/>
-      </p:nvGrpSpPr>
-      <p:grpSpPr>
-        <a:xfrm>
-          <a:off x="0" y="0"/>
-          <a:ext cx="0" cy="0"/>
-          <a:chOff x="0" y="0"/>
-          <a:chExt cx="0" cy="0"/>
-        </a:xfrm>
-      </p:grpSpPr>
-      <p:sp>
-        <p:nvSpPr>
-          <p:cNvPr id="2" name="Title 1"/>
-          <p:cNvSpPr>
-            <a:spLocks noGrp="1"/>
-          </p:cNvSpPr>
-          <p:nvPr>
-            <p:ph type="title"/>
-          </p:nvPr>
-        </p:nvSpPr>
-        <p:spPr/>
-        <p:txBody>
-          <a:bodyPr/>
-          <a:lstStyle/>
-          <a:p>
-            <a:r>
-              <a:rPr lang="en-GB" dirty="0"/>
-              <a:t>Domain invariants</a:t>
-            </a:r>
-          </a:p>
-        </p:txBody>
-      </p:sp>
-      <p:sp>
-        <p:nvSpPr>
-          <p:cNvPr id="3" name="Content Placeholder 2"/>
-          <p:cNvSpPr>
-            <a:spLocks noGrp="1"/>
-          </p:cNvSpPr>
-          <p:nvPr>
-            <p:ph idx="1"/>
-          </p:nvPr>
-        </p:nvSpPr>
-        <p:spPr/>
-        <p:style>
-          <a:lnRef idx="1">
-            <a:schemeClr val="accent2"/>
-          </a:lnRef>
-          <a:fillRef idx="2">
-            <a:schemeClr val="accent2"/>
-          </a:fillRef>
-          <a:effectRef idx="1">
-            <a:schemeClr val="accent2"/>
-          </a:effectRef>
-          <a:fontRef idx="minor">
-            <a:schemeClr val="dk1"/>
-          </a:fontRef>
-        </p:style>
-        <p:txBody>
-          <a:bodyPr>
-            <a:noAutofit/>
-          </a:bodyPr>
-          <a:lstStyle/>
-          <a:p>
-            <a:pPr marL="118872" indent="0">
-              <a:buNone/>
-            </a:pPr>
-            <a:endParaRPr lang="en-GB" sz="1600" dirty="0">
-              <a:latin typeface="Courier New" panose="02070309020205020404" pitchFamily="49" charset="0"/>
-              <a:cs typeface="Courier New" panose="02070309020205020404" pitchFamily="49" charset="0"/>
-            </a:endParaRPr>
-          </a:p>
-          <a:p>
-            <a:pPr marL="118872" indent="0">
-              <a:buNone/>
-            </a:pPr>
-            <a:r>
-              <a:rPr lang="en-GB" sz="1600" dirty="0">
-                <a:latin typeface="Courier New" panose="02070309020205020404" pitchFamily="49" charset="0"/>
-                <a:cs typeface="Courier New" panose="02070309020205020404" pitchFamily="49" charset="0"/>
-              </a:rPr>
-              <a:t>@Test</a:t>
-            </a:r>
-          </a:p>
-          <a:p>
-            <a:pPr marL="118872" indent="0">
-              <a:buNone/>
-            </a:pPr>
-            <a:r>
-              <a:rPr lang="en-GB" sz="1600" dirty="0">
-                <a:latin typeface="Courier New" panose="02070309020205020404" pitchFamily="49" charset="0"/>
-                <a:cs typeface="Courier New" panose="02070309020205020404" pitchFamily="49" charset="0"/>
-              </a:rPr>
-              <a:t>public void ensurePasswordHasAtLeastOneDigitAnd6CharactersLong() {</a:t>
-            </a:r>
-          </a:p>
-          <a:p>
-            <a:pPr marL="118872" indent="0">
-              <a:buNone/>
-            </a:pPr>
-            <a:r>
-              <a:rPr lang="en-GB" sz="1600" dirty="0">
-                <a:latin typeface="Courier New" panose="02070309020205020404" pitchFamily="49" charset="0"/>
-                <a:cs typeface="Courier New" panose="02070309020205020404" pitchFamily="49" charset="0"/>
-              </a:rPr>
-              <a:t>	new Password("abcdefgh1");</a:t>
-            </a:r>
-          </a:p>
-          <a:p>
-            <a:pPr marL="118872" indent="0">
-              <a:buNone/>
-            </a:pPr>
-            <a:r>
-              <a:rPr lang="en-GB" sz="1600" dirty="0">
-                <a:latin typeface="Courier New" panose="02070309020205020404" pitchFamily="49" charset="0"/>
-                <a:cs typeface="Courier New" panose="02070309020205020404" pitchFamily="49" charset="0"/>
-              </a:rPr>
-              <a:t>}</a:t>
-            </a:r>
-          </a:p>
-          <a:p>
-            <a:pPr marL="118872" indent="0">
-              <a:buNone/>
-            </a:pPr>
-            <a:endParaRPr lang="en-GB" sz="1600" dirty="0">
-              <a:latin typeface="Courier New" panose="02070309020205020404" pitchFamily="49" charset="0"/>
-              <a:cs typeface="Courier New" panose="02070309020205020404" pitchFamily="49" charset="0"/>
-            </a:endParaRPr>
-          </a:p>
-          <a:p>
-            <a:pPr marL="118872" indent="0">
-              <a:buNone/>
-            </a:pPr>
-            <a:r>
-              <a:rPr lang="en-GB" sz="1600" dirty="0">
-                <a:latin typeface="Courier New" panose="02070309020205020404" pitchFamily="49" charset="0"/>
-                <a:cs typeface="Courier New" panose="02070309020205020404" pitchFamily="49" charset="0"/>
-              </a:rPr>
-              <a:t>@Test(expected = </a:t>
-            </a:r>
-            <a:r>
-              <a:rPr lang="en-GB" sz="1600" dirty="0" err="1">
-                <a:latin typeface="Courier New" panose="02070309020205020404" pitchFamily="49" charset="0"/>
-                <a:cs typeface="Courier New" panose="02070309020205020404" pitchFamily="49" charset="0"/>
-              </a:rPr>
-              <a:t>IllegalArgumentException.class</a:t>
-            </a:r>
-            <a:r>
-              <a:rPr lang="en-GB" sz="1600" dirty="0">
-                <a:latin typeface="Courier New" panose="02070309020205020404" pitchFamily="49" charset="0"/>
-                <a:cs typeface="Courier New" panose="02070309020205020404" pitchFamily="49" charset="0"/>
-              </a:rPr>
-              <a:t>)</a:t>
-            </a:r>
-          </a:p>
-          <a:p>
-            <a:pPr marL="118872" indent="0">
-              <a:buNone/>
-            </a:pPr>
-            <a:r>
-              <a:rPr lang="en-GB" sz="1600" dirty="0">
-                <a:latin typeface="Courier New" panose="02070309020205020404" pitchFamily="49" charset="0"/>
-                <a:cs typeface="Courier New" panose="02070309020205020404" pitchFamily="49" charset="0"/>
-              </a:rPr>
-              <a:t>public void ensurePasswordsSmallerThan6CharactersAreNotAllowed() {</a:t>
-            </a:r>
-          </a:p>
-          <a:p>
-            <a:pPr marL="118872" indent="0">
-              <a:buNone/>
-            </a:pPr>
-            <a:r>
-              <a:rPr lang="en-GB" sz="1600" dirty="0">
-                <a:latin typeface="Courier New" panose="02070309020205020404" pitchFamily="49" charset="0"/>
-                <a:cs typeface="Courier New" panose="02070309020205020404" pitchFamily="49" charset="0"/>
-              </a:rPr>
-              <a:t>	new Password("ab1c");</a:t>
-            </a:r>
-          </a:p>
-          <a:p>
-            <a:pPr marL="118872" indent="0">
-              <a:buNone/>
-            </a:pPr>
-            <a:r>
-              <a:rPr lang="en-GB" sz="1600" dirty="0">
-                <a:latin typeface="Courier New" panose="02070309020205020404" pitchFamily="49" charset="0"/>
-                <a:cs typeface="Courier New" panose="02070309020205020404" pitchFamily="49" charset="0"/>
-              </a:rPr>
-              <a:t>}</a:t>
-            </a:r>
-          </a:p>
-          <a:p>
-            <a:pPr marL="118872" indent="0">
-              <a:buNone/>
-            </a:pPr>
-            <a:endParaRPr lang="en-GB" sz="1600" dirty="0">
-              <a:latin typeface="Courier New" panose="02070309020205020404" pitchFamily="49" charset="0"/>
-              <a:cs typeface="Courier New" panose="02070309020205020404" pitchFamily="49" charset="0"/>
-            </a:endParaRPr>
-          </a:p>
-          <a:p>
-            <a:pPr marL="118872" indent="0">
-              <a:buNone/>
-            </a:pPr>
-            <a:r>
-              <a:rPr lang="en-GB" sz="1600" dirty="0">
-                <a:latin typeface="Courier New" panose="02070309020205020404" pitchFamily="49" charset="0"/>
-                <a:cs typeface="Courier New" panose="02070309020205020404" pitchFamily="49" charset="0"/>
-              </a:rPr>
-              <a:t>@Test(expected = </a:t>
-            </a:r>
-            <a:r>
-              <a:rPr lang="en-GB" sz="1600" dirty="0" err="1">
-                <a:latin typeface="Courier New" panose="02070309020205020404" pitchFamily="49" charset="0"/>
-                <a:cs typeface="Courier New" panose="02070309020205020404" pitchFamily="49" charset="0"/>
-              </a:rPr>
-              <a:t>IllegalArgumentException.class</a:t>
-            </a:r>
-            <a:r>
-              <a:rPr lang="en-GB" sz="1600" dirty="0">
-                <a:latin typeface="Courier New" panose="02070309020205020404" pitchFamily="49" charset="0"/>
-                <a:cs typeface="Courier New" panose="02070309020205020404" pitchFamily="49" charset="0"/>
-              </a:rPr>
-              <a:t>)</a:t>
-            </a:r>
-          </a:p>
-          <a:p>
-            <a:pPr marL="118872" indent="0">
-              <a:buNone/>
-            </a:pPr>
-            <a:r>
-              <a:rPr lang="en-GB" sz="1600" dirty="0">
-                <a:latin typeface="Courier New" panose="02070309020205020404" pitchFamily="49" charset="0"/>
-                <a:cs typeface="Courier New" panose="02070309020205020404" pitchFamily="49" charset="0"/>
-              </a:rPr>
-              <a:t>public void </a:t>
-            </a:r>
-            <a:r>
-              <a:rPr lang="en-GB" sz="1600" dirty="0" err="1">
-                <a:latin typeface="Courier New" panose="02070309020205020404" pitchFamily="49" charset="0"/>
-                <a:cs typeface="Courier New" panose="02070309020205020404" pitchFamily="49" charset="0"/>
-              </a:rPr>
-              <a:t>ensurePasswordsWithoutDigitsAreNotAllowed</a:t>
-            </a:r>
-            <a:r>
-              <a:rPr lang="en-GB" sz="1600" dirty="0">
-                <a:latin typeface="Courier New" panose="02070309020205020404" pitchFamily="49" charset="0"/>
-                <a:cs typeface="Courier New" panose="02070309020205020404" pitchFamily="49" charset="0"/>
-              </a:rPr>
-              <a:t>() {</a:t>
-            </a:r>
-          </a:p>
-          <a:p>
-            <a:pPr marL="118872" indent="0">
-              <a:buNone/>
-            </a:pPr>
-            <a:r>
-              <a:rPr lang="en-GB" sz="1600" dirty="0">
-                <a:latin typeface="Courier New" panose="02070309020205020404" pitchFamily="49" charset="0"/>
-                <a:cs typeface="Courier New" panose="02070309020205020404" pitchFamily="49" charset="0"/>
-              </a:rPr>
-              <a:t>	new Password("</a:t>
-            </a:r>
-            <a:r>
-              <a:rPr lang="en-GB" sz="1600" dirty="0" err="1">
-                <a:latin typeface="Courier New" panose="02070309020205020404" pitchFamily="49" charset="0"/>
-                <a:cs typeface="Courier New" panose="02070309020205020404" pitchFamily="49" charset="0"/>
-              </a:rPr>
-              <a:t>abcdefgh</a:t>
-            </a:r>
-            <a:r>
-              <a:rPr lang="en-GB" sz="1600" dirty="0">
-                <a:latin typeface="Courier New" panose="02070309020205020404" pitchFamily="49" charset="0"/>
-                <a:cs typeface="Courier New" panose="02070309020205020404" pitchFamily="49" charset="0"/>
-              </a:rPr>
-              <a:t>");</a:t>
-            </a:r>
-          </a:p>
-          <a:p>
-            <a:pPr marL="118872" indent="0">
-              <a:buNone/>
-            </a:pPr>
-            <a:r>
-              <a:rPr lang="en-GB" sz="1600" dirty="0">
-                <a:latin typeface="Courier New" panose="02070309020205020404" pitchFamily="49" charset="0"/>
-                <a:cs typeface="Courier New" panose="02070309020205020404" pitchFamily="49" charset="0"/>
-              </a:rPr>
-              <a:t>}</a:t>
-            </a:r>
-          </a:p>
-        </p:txBody>
-      </p:sp>
-      <p:sp>
-        <p:nvSpPr>
-          <p:cNvPr id="5" name="Slide Number Placeholder 4"/>
-          <p:cNvSpPr>
-            <a:spLocks noGrp="1"/>
-          </p:cNvSpPr>
-          <p:nvPr>
-            <p:ph type="sldNum" sz="quarter" idx="12"/>
-          </p:nvPr>
-        </p:nvSpPr>
-        <p:spPr/>
-        <p:txBody>
-          <a:bodyPr/>
-          <a:lstStyle/>
-          <a:p>
-            <a:fld id="{024A9932-4E76-455F-8E1A-2CC10C89B014}" type="slidenum">
-              <a:rPr lang="pt-PT" smtClean="0"/>
-              <a:pPr/>
-              <a:t>40</a:t>
-            </a:fld>
-            <a:endParaRPr lang="pt-PT"/>
-          </a:p>
-        </p:txBody>
-      </p:sp>
-    </p:spTree>
-    <p:extLst>
-      <p:ext uri="{BB962C8B-B14F-4D97-AF65-F5344CB8AC3E}">
-        <p14:creationId xmlns:p14="http://schemas.microsoft.com/office/powerpoint/2010/main" val="1968312242"/>
-      </p:ext>
-    </p:extLst>
-  </p:cSld>
-  <p:clrMapOvr>
-    <a:masterClrMapping/>
-  </p:clrMapOvr>
-</p:sld>
-</file>
-
 <file path=ppt/slides/slide41.xml><?xml version="1.0" encoding="utf-8"?>
 <p:sld xmlns:a="http://schemas.openxmlformats.org/drawingml/2006/main" xmlns:r="http://schemas.openxmlformats.org/officeDocument/2006/relationships" xmlns:p="http://schemas.openxmlformats.org/presentationml/2006/main">
   <p:cSld>
@@ -10613,7 +10081,7 @@
           <a:p>
             <a:r>
               <a:rPr lang="en-GB" dirty="0"/>
-              <a:t>Domain</a:t>
+              <a:t>Domain invariants</a:t>
             </a:r>
           </a:p>
         </p:txBody>
@@ -10652,152 +10120,53 @@
             <a:pPr marL="118872" indent="0">
               <a:buNone/>
             </a:pPr>
-            <a:r>
-              <a:rPr lang="en-GB" sz="1400" dirty="0">
+            <a:endParaRPr lang="en-GB" sz="1600" dirty="0">
+              <a:latin typeface="Courier New" panose="02070309020205020404" pitchFamily="49" charset="0"/>
+              <a:cs typeface="Courier New" panose="02070309020205020404" pitchFamily="49" charset="0"/>
+            </a:endParaRPr>
+          </a:p>
+          <a:p>
+            <a:pPr marL="118872" indent="0">
+              <a:buNone/>
+            </a:pPr>
+            <a:r>
+              <a:rPr lang="en-GB" sz="1600" dirty="0">
                 <a:latin typeface="Courier New" panose="02070309020205020404" pitchFamily="49" charset="0"/>
                 <a:cs typeface="Courier New" panose="02070309020205020404" pitchFamily="49" charset="0"/>
               </a:rPr>
-              <a:t>public class Password {</a:t>
+              <a:t>@Test</a:t>
             </a:r>
           </a:p>
           <a:p>
             <a:pPr marL="118872" indent="0">
               <a:buNone/>
             </a:pPr>
-            <a:endParaRPr lang="en-GB" sz="1400" dirty="0">
-              <a:latin typeface="Courier New" panose="02070309020205020404" pitchFamily="49" charset="0"/>
-              <a:cs typeface="Courier New" panose="02070309020205020404" pitchFamily="49" charset="0"/>
-            </a:endParaRPr>
+            <a:r>
+              <a:rPr lang="en-GB" sz="1600" dirty="0">
+                <a:latin typeface="Courier New" panose="02070309020205020404" pitchFamily="49" charset="0"/>
+                <a:cs typeface="Courier New" panose="02070309020205020404" pitchFamily="49" charset="0"/>
+              </a:rPr>
+              <a:t>public void ensurePasswordHasAtLeastOneDigitAnd6CharactersLong() {</a:t>
+            </a:r>
           </a:p>
           <a:p>
             <a:pPr marL="118872" indent="0">
               <a:buNone/>
             </a:pPr>
             <a:r>
-              <a:rPr lang="en-GB" sz="1400" dirty="0">
+              <a:rPr lang="en-GB" sz="1600" dirty="0">
                 <a:latin typeface="Courier New" panose="02070309020205020404" pitchFamily="49" charset="0"/>
                 <a:cs typeface="Courier New" panose="02070309020205020404" pitchFamily="49" charset="0"/>
               </a:rPr>
-              <a:t>…</a:t>
+              <a:t>	new Password("abcdefgh1");</a:t>
             </a:r>
           </a:p>
           <a:p>
             <a:pPr marL="118872" indent="0">
               <a:buNone/>
             </a:pPr>
-            <a:endParaRPr lang="en-GB" sz="1400" dirty="0">
-              <a:latin typeface="Courier New" panose="02070309020205020404" pitchFamily="49" charset="0"/>
-              <a:cs typeface="Courier New" panose="02070309020205020404" pitchFamily="49" charset="0"/>
-            </a:endParaRPr>
-          </a:p>
-          <a:p>
-            <a:pPr marL="118872" indent="0">
-              <a:buNone/>
-            </a:pPr>
-            <a:r>
-              <a:rPr lang="en-GB" sz="1400" dirty="0">
-                <a:latin typeface="Courier New" panose="02070309020205020404" pitchFamily="49" charset="0"/>
-                <a:cs typeface="Courier New" panose="02070309020205020404" pitchFamily="49" charset="0"/>
-              </a:rPr>
-              <a:t>public Password(String password) {</a:t>
-            </a:r>
-          </a:p>
-          <a:p>
-            <a:pPr marL="118872" indent="0">
-              <a:buNone/>
-            </a:pPr>
-            <a:r>
-              <a:rPr lang="en-GB" sz="1400" dirty="0">
-                <a:latin typeface="Courier New" panose="02070309020205020404" pitchFamily="49" charset="0"/>
-                <a:cs typeface="Courier New" panose="02070309020205020404" pitchFamily="49" charset="0"/>
-              </a:rPr>
-              <a:t>	if (!</a:t>
-            </a:r>
-            <a:r>
-              <a:rPr lang="en-GB" sz="1400" dirty="0" err="1">
-                <a:latin typeface="Courier New" panose="02070309020205020404" pitchFamily="49" charset="0"/>
-                <a:cs typeface="Courier New" panose="02070309020205020404" pitchFamily="49" charset="0"/>
-              </a:rPr>
-              <a:t>meetsMinimumRequirements</a:t>
-            </a:r>
-            <a:r>
-              <a:rPr lang="en-GB" sz="1400" dirty="0">
-                <a:latin typeface="Courier New" panose="02070309020205020404" pitchFamily="49" charset="0"/>
-                <a:cs typeface="Courier New" panose="02070309020205020404" pitchFamily="49" charset="0"/>
-              </a:rPr>
-              <a:t>(password)) {</a:t>
-            </a:r>
-          </a:p>
-          <a:p>
-            <a:pPr marL="118872" indent="0">
-              <a:buNone/>
-            </a:pPr>
-            <a:r>
-              <a:rPr lang="en-GB" sz="1400" dirty="0">
-                <a:latin typeface="Courier New" panose="02070309020205020404" pitchFamily="49" charset="0"/>
-                <a:cs typeface="Courier New" panose="02070309020205020404" pitchFamily="49" charset="0"/>
-              </a:rPr>
-              <a:t>	    throw new </a:t>
-            </a:r>
-            <a:r>
-              <a:rPr lang="en-GB" sz="1400" dirty="0" err="1">
-                <a:latin typeface="Courier New" panose="02070309020205020404" pitchFamily="49" charset="0"/>
-                <a:cs typeface="Courier New" panose="02070309020205020404" pitchFamily="49" charset="0"/>
-              </a:rPr>
-              <a:t>IllegalStateException</a:t>
-            </a:r>
-            <a:r>
-              <a:rPr lang="en-GB" sz="1400" dirty="0">
-                <a:latin typeface="Courier New" panose="02070309020205020404" pitchFamily="49" charset="0"/>
-                <a:cs typeface="Courier New" panose="02070309020205020404" pitchFamily="49" charset="0"/>
-              </a:rPr>
-              <a:t>();</a:t>
-            </a:r>
-          </a:p>
-          <a:p>
-            <a:pPr marL="118872" indent="0">
-              <a:buNone/>
-            </a:pPr>
-            <a:r>
-              <a:rPr lang="en-GB" sz="1400" dirty="0">
-                <a:latin typeface="Courier New" panose="02070309020205020404" pitchFamily="49" charset="0"/>
-                <a:cs typeface="Courier New" panose="02070309020205020404" pitchFamily="49" charset="0"/>
-              </a:rPr>
-              <a:t>	}</a:t>
-            </a:r>
-          </a:p>
-          <a:p>
-            <a:pPr marL="118872" indent="0">
-              <a:buNone/>
-            </a:pPr>
-            <a:r>
-              <a:rPr lang="en-GB" sz="1400" dirty="0">
-                <a:latin typeface="Courier New" panose="02070309020205020404" pitchFamily="49" charset="0"/>
-                <a:cs typeface="Courier New" panose="02070309020205020404" pitchFamily="49" charset="0"/>
-              </a:rPr>
-              <a:t>	</a:t>
-            </a:r>
-            <a:r>
-              <a:rPr lang="en-GB" sz="1400" dirty="0" err="1">
-                <a:latin typeface="Courier New" panose="02070309020205020404" pitchFamily="49" charset="0"/>
-                <a:cs typeface="Courier New" panose="02070309020205020404" pitchFamily="49" charset="0"/>
-              </a:rPr>
-              <a:t>thePassword</a:t>
-            </a:r>
-            <a:r>
-              <a:rPr lang="en-GB" sz="1400" dirty="0">
-                <a:latin typeface="Courier New" panose="02070309020205020404" pitchFamily="49" charset="0"/>
-                <a:cs typeface="Courier New" panose="02070309020205020404" pitchFamily="49" charset="0"/>
-              </a:rPr>
-              <a:t> = password;</a:t>
-            </a:r>
-          </a:p>
-          <a:p>
-            <a:pPr marL="118872" indent="0">
-              <a:buNone/>
-            </a:pPr>
-            <a:r>
-              <a:rPr lang="en-GB" sz="1400" dirty="0">
+            <a:r>
+              <a:rPr lang="en-GB" sz="1600" dirty="0">
                 <a:latin typeface="Courier New" panose="02070309020205020404" pitchFamily="49" charset="0"/>
                 <a:cs typeface="Courier New" panose="02070309020205020404" pitchFamily="49" charset="0"/>
               </a:rPr>
@@ -10808,7 +10177,7 @@
             <a:pPr marL="118872" indent="0">
               <a:buNone/>
             </a:pPr>
-            <a:endParaRPr lang="en-GB" sz="1400" dirty="0">
+            <a:endParaRPr lang="en-GB" sz="1600" dirty="0">
               <a:latin typeface="Courier New" panose="02070309020205020404" pitchFamily="49" charset="0"/>
               <a:cs typeface="Courier New" panose="02070309020205020404" pitchFamily="49" charset="0"/>
             </a:endParaRPr>
@@ -10818,39 +10187,49 @@
               <a:buNone/>
             </a:pPr>
             <a:r>
-              <a:rPr lang="en-GB" sz="1400" dirty="0">
+              <a:rPr lang="en-GB" sz="1600" dirty="0">
                 <a:latin typeface="Courier New" panose="02070309020205020404" pitchFamily="49" charset="0"/>
                 <a:cs typeface="Courier New" panose="02070309020205020404" pitchFamily="49" charset="0"/>
               </a:rPr>
-              <a:t>private </a:t>
-            </a:r>
-            <a:r>
-              <a:rPr lang="en-GB" sz="1400" dirty="0" err="1">
+              <a:t>@Test(expected = </a:t>
+            </a:r>
+            <a:r>
+              <a:rPr lang="en-GB" sz="1600" dirty="0" err="1">
                 <a:latin typeface="Courier New" panose="02070309020205020404" pitchFamily="49" charset="0"/>
                 <a:cs typeface="Courier New" panose="02070309020205020404" pitchFamily="49" charset="0"/>
               </a:rPr>
-              <a:t>boolean</a:t>
-            </a:r>
-            <a:r>
-              <a:rPr lang="en-GB" sz="1400" dirty="0">
+              <a:t>IllegalArgumentException.class</a:t>
+            </a:r>
+            <a:r>
+              <a:rPr lang="en-GB" sz="1600" dirty="0">
                 <a:latin typeface="Courier New" panose="02070309020205020404" pitchFamily="49" charset="0"/>
                 <a:cs typeface="Courier New" panose="02070309020205020404" pitchFamily="49" charset="0"/>
               </a:rPr>
-              <a:t> </a:t>
-            </a:r>
-            <a:r>
-              <a:rPr lang="en-GB" sz="1400" dirty="0" err="1">
+              <a:t>)</a:t>
+            </a:r>
+          </a:p>
+          <a:p>
+            <a:pPr marL="118872" indent="0">
+              <a:buNone/>
+            </a:pPr>
+            <a:r>
+              <a:rPr lang="en-GB" sz="1600" dirty="0">
                 <a:latin typeface="Courier New" panose="02070309020205020404" pitchFamily="49" charset="0"/>
                 <a:cs typeface="Courier New" panose="02070309020205020404" pitchFamily="49" charset="0"/>
               </a:rPr>
-              <a:t>meetsMinimumRequirements</a:t>
-            </a:r>
-            <a:r>
-              <a:rPr lang="en-GB" sz="1400" dirty="0">
+              <a:t>public void ensurePasswordsSmallerThan6CharactersAreNotAllowed() {</a:t>
+            </a:r>
+          </a:p>
+          <a:p>
+            <a:pPr marL="118872" indent="0">
+              <a:buNone/>
+            </a:pPr>
+            <a:r>
+              <a:rPr lang="en-GB" sz="1600" dirty="0">
                 <a:latin typeface="Courier New" panose="02070309020205020404" pitchFamily="49" charset="0"/>
                 <a:cs typeface="Courier New" panose="02070309020205020404" pitchFamily="49" charset="0"/>
               </a:rPr>
-              <a:t>(String password) {</a:t>
+              <a:t>	new Password("ab1c");</a:t>
             </a:r>
           </a:p>
           <a:p>
@@ -10858,25 +10237,46 @@
               <a:buNone/>
             </a:pPr>
             <a:r>
-              <a:rPr lang="en-GB" sz="1400" dirty="0">
+              <a:rPr lang="en-GB" sz="1600" dirty="0">
                 <a:latin typeface="Courier New" panose="02070309020205020404" pitchFamily="49" charset="0"/>
                 <a:cs typeface="Courier New" panose="02070309020205020404" pitchFamily="49" charset="0"/>
               </a:rPr>
-              <a:t>	if (</a:t>
-            </a:r>
-            <a:r>
-              <a:rPr lang="en-GB" sz="1400" dirty="0" err="1">
+              <a:t>}</a:t>
+            </a:r>
+          </a:p>
+          <a:p>
+            <a:pPr marL="118872" indent="0">
+              <a:buNone/>
+            </a:pPr>
+            <a:endParaRPr lang="en-GB" sz="1600" dirty="0">
+              <a:latin typeface="Courier New" panose="02070309020205020404" pitchFamily="49" charset="0"/>
+              <a:cs typeface="Courier New" panose="02070309020205020404" pitchFamily="49" charset="0"/>
+            </a:endParaRPr>
+          </a:p>
+          <a:p>
+            <a:pPr marL="118872" indent="0">
+              <a:buNone/>
+            </a:pPr>
+            <a:r>
+              <a:rPr lang="en-GB" sz="1600" dirty="0">
                 <a:latin typeface="Courier New" panose="02070309020205020404" pitchFamily="49" charset="0"/>
                 <a:cs typeface="Courier New" panose="02070309020205020404" pitchFamily="49" charset="0"/>
               </a:rPr>
-              <a:t>Strings.isNullOrEmpty</a:t>
-            </a:r>
-            <a:r>
-              <a:rPr lang="en-GB" sz="1400" dirty="0">
+              <a:t>@Test(expected = </a:t>
+            </a:r>
+            <a:r>
+              <a:rPr lang="en-GB" sz="1600" dirty="0" err="1">
                 <a:latin typeface="Courier New" panose="02070309020205020404" pitchFamily="49" charset="0"/>
                 <a:cs typeface="Courier New" panose="02070309020205020404" pitchFamily="49" charset="0"/>
               </a:rPr>
-              <a:t>(password)</a:t>
+              <a:t>IllegalArgumentException.class</a:t>
+            </a:r>
+            <a:r>
+              <a:rPr lang="en-GB" sz="1600" dirty="0">
+                <a:latin typeface="Courier New" panose="02070309020205020404" pitchFamily="49" charset="0"/>
+                <a:cs typeface="Courier New" panose="02070309020205020404" pitchFamily="49" charset="0"/>
+              </a:rPr>
+              <a:t>)</a:t>
             </a:r>
           </a:p>
           <a:p>
@@ -10884,25 +10284,25 @@
               <a:buNone/>
             </a:pPr>
             <a:r>
-              <a:rPr lang="en-GB" sz="1400" dirty="0">
+              <a:rPr lang="en-GB" sz="1600" dirty="0">
                 <a:latin typeface="Courier New" panose="02070309020205020404" pitchFamily="49" charset="0"/>
                 <a:cs typeface="Courier New" panose="02070309020205020404" pitchFamily="49" charset="0"/>
               </a:rPr>
-              <a:t>	|| </a:t>
-            </a:r>
-            <a:r>
-              <a:rPr lang="en-GB" sz="1400" dirty="0" err="1">
+              <a:t>public void </a:t>
+            </a:r>
+            <a:r>
+              <a:rPr lang="en-GB" sz="1600" dirty="0" err="1">
                 <a:latin typeface="Courier New" panose="02070309020205020404" pitchFamily="49" charset="0"/>
                 <a:cs typeface="Courier New" panose="02070309020205020404" pitchFamily="49" charset="0"/>
               </a:rPr>
-              <a:t>password.length</a:t>
-            </a:r>
-            <a:r>
-              <a:rPr lang="en-GB" sz="1400" dirty="0">
+              <a:t>ensurePasswordsWithoutDigitsAreNotAllowed</a:t>
+            </a:r>
+            <a:r>
+              <a:rPr lang="en-GB" sz="1600" dirty="0">
                 <a:latin typeface="Courier New" panose="02070309020205020404" pitchFamily="49" charset="0"/>
                 <a:cs typeface="Courier New" panose="02070309020205020404" pitchFamily="49" charset="0"/>
               </a:rPr>
-              <a:t>() &lt; 6)</a:t>
+              <a:t>() {</a:t>
             </a:r>
           </a:p>
           <a:p>
@@ -10910,25 +10310,25 @@
               <a:buNone/>
             </a:pPr>
             <a:r>
-              <a:rPr lang="en-GB" sz="1400" dirty="0">
+              <a:rPr lang="en-GB" sz="1600" dirty="0">
                 <a:latin typeface="Courier New" panose="02070309020205020404" pitchFamily="49" charset="0"/>
                 <a:cs typeface="Courier New" panose="02070309020205020404" pitchFamily="49" charset="0"/>
               </a:rPr>
-              <a:t>	|| !</a:t>
-            </a:r>
-            <a:r>
-              <a:rPr lang="en-GB" sz="1400" dirty="0" err="1">
+              <a:t>	new Password("</a:t>
+            </a:r>
+            <a:r>
+              <a:rPr lang="en-GB" sz="1600" dirty="0" err="1">
                 <a:latin typeface="Courier New" panose="02070309020205020404" pitchFamily="49" charset="0"/>
                 <a:cs typeface="Courier New" panose="02070309020205020404" pitchFamily="49" charset="0"/>
               </a:rPr>
-              <a:t>Strings.containsDigit</a:t>
-            </a:r>
-            <a:r>
-              <a:rPr lang="en-GB" sz="1400" dirty="0">
+              <a:t>abcdefgh</a:t>
+            </a:r>
+            <a:r>
+              <a:rPr lang="en-GB" sz="1600" dirty="0">
                 <a:latin typeface="Courier New" panose="02070309020205020404" pitchFamily="49" charset="0"/>
                 <a:cs typeface="Courier New" panose="02070309020205020404" pitchFamily="49" charset="0"/>
               </a:rPr>
-              <a:t>(password)) </a:t>
+              <a:t>");</a:t>
             </a:r>
           </a:p>
           <a:p>
@@ -10936,64 +10336,7 @@
               <a:buNone/>
             </a:pPr>
             <a:r>
-              <a:rPr lang="en-GB" sz="1400" dirty="0">
-                <a:latin typeface="Courier New" panose="02070309020205020404" pitchFamily="49" charset="0"/>
-                <a:cs typeface="Courier New" panose="02070309020205020404" pitchFamily="49" charset="0"/>
-              </a:rPr>
-              <a:t>	{</a:t>
-            </a:r>
-          </a:p>
-          <a:p>
-            <a:pPr marL="118872" indent="0">
-              <a:buNone/>
-            </a:pPr>
-            <a:r>
-              <a:rPr lang="en-GB" sz="1400" dirty="0">
-                <a:latin typeface="Courier New" panose="02070309020205020404" pitchFamily="49" charset="0"/>
-                <a:cs typeface="Courier New" panose="02070309020205020404" pitchFamily="49" charset="0"/>
-              </a:rPr>
-              <a:t>	    return false;</a:t>
-            </a:r>
-          </a:p>
-          <a:p>
-            <a:pPr marL="118872" indent="0">
-              <a:buNone/>
-            </a:pPr>
-            <a:r>
-              <a:rPr lang="en-GB" sz="1400" dirty="0">
-                <a:latin typeface="Courier New" panose="02070309020205020404" pitchFamily="49" charset="0"/>
-                <a:cs typeface="Courier New" panose="02070309020205020404" pitchFamily="49" charset="0"/>
-              </a:rPr>
-              <a:t>	}</a:t>
-            </a:r>
-          </a:p>
-          <a:p>
-            <a:pPr marL="118872" indent="0">
-              <a:buNone/>
-            </a:pPr>
-            <a:endParaRPr lang="en-GB" sz="1400" dirty="0">
-              <a:latin typeface="Courier New" panose="02070309020205020404" pitchFamily="49" charset="0"/>
-              <a:cs typeface="Courier New" panose="02070309020205020404" pitchFamily="49" charset="0"/>
-            </a:endParaRPr>
-          </a:p>
-          <a:p>
-            <a:pPr marL="118872" indent="0">
-              <a:buNone/>
-            </a:pPr>
-            <a:r>
-              <a:rPr lang="en-GB" sz="1400" dirty="0">
-                <a:latin typeface="Courier New" panose="02070309020205020404" pitchFamily="49" charset="0"/>
-                <a:cs typeface="Courier New" panose="02070309020205020404" pitchFamily="49" charset="0"/>
-              </a:rPr>
-              <a:t>	return true;</a:t>
-            </a:r>
-          </a:p>
-          <a:p>
-            <a:pPr marL="118872" indent="0">
-              <a:buNone/>
-            </a:pPr>
-            <a:r>
-              <a:rPr lang="en-GB" sz="1400" dirty="0">
+              <a:rPr lang="en-GB" sz="1600" dirty="0">
                 <a:latin typeface="Courier New" panose="02070309020205020404" pitchFamily="49" charset="0"/>
                 <a:cs typeface="Courier New" panose="02070309020205020404" pitchFamily="49" charset="0"/>
               </a:rPr>
@@ -11029,16 +10372,13 @@
     </p:spTree>
     <p:extLst>
       <p:ext uri="{BB962C8B-B14F-4D97-AF65-F5344CB8AC3E}">
-        <p14:creationId xmlns:p14="http://schemas.microsoft.com/office/powerpoint/2010/main" val="208134332"/>
+        <p14:creationId xmlns:p14="http://schemas.microsoft.com/office/powerpoint/2010/main" val="1968312242"/>
       </p:ext>
     </p:extLst>
   </p:cSld>
   <p:clrMapOvr>
     <a:masterClrMapping/>
   </p:clrMapOvr>
-  <p:transition spd="med">
-    <p:fade/>
-  </p:transition>
 </p:sld>
 </file>
 
@@ -11061,7 +10401,7 @@
       </p:grpSpPr>
       <p:sp>
         <p:nvSpPr>
-          <p:cNvPr id="5" name="Title 4"/>
+          <p:cNvPr id="2" name="Title 1"/>
           <p:cNvSpPr>
             <a:spLocks noGrp="1"/>
           </p:cNvSpPr>
@@ -11075,35 +10415,399 @@
           <a:lstStyle/>
           <a:p>
             <a:r>
-              <a:rPr lang="en-GB" dirty="0" smtClean="0"/>
-              <a:t>Infrastructure Pub/Sub</a:t>
-            </a:r>
-            <a:endParaRPr lang="en-US" dirty="0"/>
-          </a:p>
-        </p:txBody>
-      </p:sp>
-      <p:sp>
-        <p:nvSpPr>
-          <p:cNvPr id="6" name="Text Placeholder 5"/>
-          <p:cNvSpPr>
-            <a:spLocks noGrp="1"/>
-          </p:cNvSpPr>
-          <p:nvPr>
-            <p:ph type="body" idx="1"/>
-          </p:nvPr>
-        </p:nvSpPr>
-        <p:spPr/>
-        <p:txBody>
-          <a:bodyPr/>
-          <a:lstStyle/>
-          <a:p>
-            <a:endParaRPr lang="en-US"/>
-          </a:p>
-        </p:txBody>
-      </p:sp>
-      <p:sp>
-        <p:nvSpPr>
-          <p:cNvPr id="4" name="Slide Number Placeholder 3"/>
+              <a:rPr lang="en-GB" dirty="0"/>
+              <a:t>Domain</a:t>
+            </a:r>
+          </a:p>
+        </p:txBody>
+      </p:sp>
+      <p:sp>
+        <p:nvSpPr>
+          <p:cNvPr id="3" name="Content Placeholder 2"/>
+          <p:cNvSpPr>
+            <a:spLocks noGrp="1"/>
+          </p:cNvSpPr>
+          <p:nvPr>
+            <p:ph idx="1"/>
+          </p:nvPr>
+        </p:nvSpPr>
+        <p:spPr/>
+        <p:style>
+          <a:lnRef idx="1">
+            <a:schemeClr val="accent2"/>
+          </a:lnRef>
+          <a:fillRef idx="2">
+            <a:schemeClr val="accent2"/>
+          </a:fillRef>
+          <a:effectRef idx="1">
+            <a:schemeClr val="accent2"/>
+          </a:effectRef>
+          <a:fontRef idx="minor">
+            <a:schemeClr val="dk1"/>
+          </a:fontRef>
+        </p:style>
+        <p:txBody>
+          <a:bodyPr>
+            <a:noAutofit/>
+          </a:bodyPr>
+          <a:lstStyle/>
+          <a:p>
+            <a:pPr marL="118872" indent="0">
+              <a:buNone/>
+            </a:pPr>
+            <a:r>
+              <a:rPr lang="en-GB" sz="1400" dirty="0">
+                <a:latin typeface="Courier New" panose="02070309020205020404" pitchFamily="49" charset="0"/>
+                <a:cs typeface="Courier New" panose="02070309020205020404" pitchFamily="49" charset="0"/>
+              </a:rPr>
+              <a:t>public class Password {</a:t>
+            </a:r>
+          </a:p>
+          <a:p>
+            <a:pPr marL="118872" indent="0">
+              <a:buNone/>
+            </a:pPr>
+            <a:endParaRPr lang="en-GB" sz="1400" dirty="0">
+              <a:latin typeface="Courier New" panose="02070309020205020404" pitchFamily="49" charset="0"/>
+              <a:cs typeface="Courier New" panose="02070309020205020404" pitchFamily="49" charset="0"/>
+            </a:endParaRPr>
+          </a:p>
+          <a:p>
+            <a:pPr marL="118872" indent="0">
+              <a:buNone/>
+            </a:pPr>
+            <a:r>
+              <a:rPr lang="en-GB" sz="1400" dirty="0">
+                <a:latin typeface="Courier New" panose="02070309020205020404" pitchFamily="49" charset="0"/>
+                <a:cs typeface="Courier New" panose="02070309020205020404" pitchFamily="49" charset="0"/>
+              </a:rPr>
+              <a:t>…</a:t>
+            </a:r>
+          </a:p>
+          <a:p>
+            <a:pPr marL="118872" indent="0">
+              <a:buNone/>
+            </a:pPr>
+            <a:endParaRPr lang="en-GB" sz="1400" dirty="0">
+              <a:latin typeface="Courier New" panose="02070309020205020404" pitchFamily="49" charset="0"/>
+              <a:cs typeface="Courier New" panose="02070309020205020404" pitchFamily="49" charset="0"/>
+            </a:endParaRPr>
+          </a:p>
+          <a:p>
+            <a:pPr marL="118872" indent="0">
+              <a:buNone/>
+            </a:pPr>
+            <a:r>
+              <a:rPr lang="en-GB" sz="1400" dirty="0">
+                <a:latin typeface="Courier New" panose="02070309020205020404" pitchFamily="49" charset="0"/>
+                <a:cs typeface="Courier New" panose="02070309020205020404" pitchFamily="49" charset="0"/>
+              </a:rPr>
+              <a:t>public Password(String password) {</a:t>
+            </a:r>
+          </a:p>
+          <a:p>
+            <a:pPr marL="118872" indent="0">
+              <a:buNone/>
+            </a:pPr>
+            <a:r>
+              <a:rPr lang="en-GB" sz="1400" dirty="0">
+                <a:latin typeface="Courier New" panose="02070309020205020404" pitchFamily="49" charset="0"/>
+                <a:cs typeface="Courier New" panose="02070309020205020404" pitchFamily="49" charset="0"/>
+              </a:rPr>
+              <a:t>	if (!</a:t>
+            </a:r>
+            <a:r>
+              <a:rPr lang="en-GB" sz="1400" dirty="0" err="1">
+                <a:latin typeface="Courier New" panose="02070309020205020404" pitchFamily="49" charset="0"/>
+                <a:cs typeface="Courier New" panose="02070309020205020404" pitchFamily="49" charset="0"/>
+              </a:rPr>
+              <a:t>meetsMinimumRequirements</a:t>
+            </a:r>
+            <a:r>
+              <a:rPr lang="en-GB" sz="1400" dirty="0">
+                <a:latin typeface="Courier New" panose="02070309020205020404" pitchFamily="49" charset="0"/>
+                <a:cs typeface="Courier New" panose="02070309020205020404" pitchFamily="49" charset="0"/>
+              </a:rPr>
+              <a:t>(password)) {</a:t>
+            </a:r>
+          </a:p>
+          <a:p>
+            <a:pPr marL="118872" indent="0">
+              <a:buNone/>
+            </a:pPr>
+            <a:r>
+              <a:rPr lang="en-GB" sz="1400" dirty="0">
+                <a:latin typeface="Courier New" panose="02070309020205020404" pitchFamily="49" charset="0"/>
+                <a:cs typeface="Courier New" panose="02070309020205020404" pitchFamily="49" charset="0"/>
+              </a:rPr>
+              <a:t>	    throw new </a:t>
+            </a:r>
+            <a:r>
+              <a:rPr lang="en-GB" sz="1400" dirty="0" err="1">
+                <a:latin typeface="Courier New" panose="02070309020205020404" pitchFamily="49" charset="0"/>
+                <a:cs typeface="Courier New" panose="02070309020205020404" pitchFamily="49" charset="0"/>
+              </a:rPr>
+              <a:t>IllegalStateException</a:t>
+            </a:r>
+            <a:r>
+              <a:rPr lang="en-GB" sz="1400" dirty="0">
+                <a:latin typeface="Courier New" panose="02070309020205020404" pitchFamily="49" charset="0"/>
+                <a:cs typeface="Courier New" panose="02070309020205020404" pitchFamily="49" charset="0"/>
+              </a:rPr>
+              <a:t>();</a:t>
+            </a:r>
+          </a:p>
+          <a:p>
+            <a:pPr marL="118872" indent="0">
+              <a:buNone/>
+            </a:pPr>
+            <a:r>
+              <a:rPr lang="en-GB" sz="1400" dirty="0">
+                <a:latin typeface="Courier New" panose="02070309020205020404" pitchFamily="49" charset="0"/>
+                <a:cs typeface="Courier New" panose="02070309020205020404" pitchFamily="49" charset="0"/>
+              </a:rPr>
+              <a:t>	}</a:t>
+            </a:r>
+          </a:p>
+          <a:p>
+            <a:pPr marL="118872" indent="0">
+              <a:buNone/>
+            </a:pPr>
+            <a:r>
+              <a:rPr lang="en-GB" sz="1400" dirty="0">
+                <a:latin typeface="Courier New" panose="02070309020205020404" pitchFamily="49" charset="0"/>
+                <a:cs typeface="Courier New" panose="02070309020205020404" pitchFamily="49" charset="0"/>
+              </a:rPr>
+              <a:t>	</a:t>
+            </a:r>
+            <a:r>
+              <a:rPr lang="en-GB" sz="1400" dirty="0" err="1">
+                <a:latin typeface="Courier New" panose="02070309020205020404" pitchFamily="49" charset="0"/>
+                <a:cs typeface="Courier New" panose="02070309020205020404" pitchFamily="49" charset="0"/>
+              </a:rPr>
+              <a:t>thePassword</a:t>
+            </a:r>
+            <a:r>
+              <a:rPr lang="en-GB" sz="1400" dirty="0">
+                <a:latin typeface="Courier New" panose="02070309020205020404" pitchFamily="49" charset="0"/>
+                <a:cs typeface="Courier New" panose="02070309020205020404" pitchFamily="49" charset="0"/>
+              </a:rPr>
+              <a:t> = password;</a:t>
+            </a:r>
+          </a:p>
+          <a:p>
+            <a:pPr marL="118872" indent="0">
+              <a:buNone/>
+            </a:pPr>
+            <a:r>
+              <a:rPr lang="en-GB" sz="1400" dirty="0">
+                <a:latin typeface="Courier New" panose="02070309020205020404" pitchFamily="49" charset="0"/>
+                <a:cs typeface="Courier New" panose="02070309020205020404" pitchFamily="49" charset="0"/>
+              </a:rPr>
+              <a:t>}</a:t>
+            </a:r>
+          </a:p>
+          <a:p>
+            <a:pPr marL="118872" indent="0">
+              <a:buNone/>
+            </a:pPr>
+            <a:endParaRPr lang="en-GB" sz="1400" dirty="0">
+              <a:latin typeface="Courier New" panose="02070309020205020404" pitchFamily="49" charset="0"/>
+              <a:cs typeface="Courier New" panose="02070309020205020404" pitchFamily="49" charset="0"/>
+            </a:endParaRPr>
+          </a:p>
+          <a:p>
+            <a:pPr marL="118872" indent="0">
+              <a:buNone/>
+            </a:pPr>
+            <a:r>
+              <a:rPr lang="en-GB" sz="1400" dirty="0">
+                <a:latin typeface="Courier New" panose="02070309020205020404" pitchFamily="49" charset="0"/>
+                <a:cs typeface="Courier New" panose="02070309020205020404" pitchFamily="49" charset="0"/>
+              </a:rPr>
+              <a:t>private </a:t>
+            </a:r>
+            <a:r>
+              <a:rPr lang="en-GB" sz="1400" dirty="0" err="1">
+                <a:latin typeface="Courier New" panose="02070309020205020404" pitchFamily="49" charset="0"/>
+                <a:cs typeface="Courier New" panose="02070309020205020404" pitchFamily="49" charset="0"/>
+              </a:rPr>
+              <a:t>boolean</a:t>
+            </a:r>
+            <a:r>
+              <a:rPr lang="en-GB" sz="1400" dirty="0">
+                <a:latin typeface="Courier New" panose="02070309020205020404" pitchFamily="49" charset="0"/>
+                <a:cs typeface="Courier New" panose="02070309020205020404" pitchFamily="49" charset="0"/>
+              </a:rPr>
+              <a:t> </a:t>
+            </a:r>
+            <a:r>
+              <a:rPr lang="en-GB" sz="1400" dirty="0" err="1">
+                <a:latin typeface="Courier New" panose="02070309020205020404" pitchFamily="49" charset="0"/>
+                <a:cs typeface="Courier New" panose="02070309020205020404" pitchFamily="49" charset="0"/>
+              </a:rPr>
+              <a:t>meetsMinimumRequirements</a:t>
+            </a:r>
+            <a:r>
+              <a:rPr lang="en-GB" sz="1400" dirty="0">
+                <a:latin typeface="Courier New" panose="02070309020205020404" pitchFamily="49" charset="0"/>
+                <a:cs typeface="Courier New" panose="02070309020205020404" pitchFamily="49" charset="0"/>
+              </a:rPr>
+              <a:t>(String password) {</a:t>
+            </a:r>
+          </a:p>
+          <a:p>
+            <a:pPr marL="118872" indent="0">
+              <a:buNone/>
+            </a:pPr>
+            <a:r>
+              <a:rPr lang="en-GB" sz="1400" dirty="0">
+                <a:latin typeface="Courier New" panose="02070309020205020404" pitchFamily="49" charset="0"/>
+                <a:cs typeface="Courier New" panose="02070309020205020404" pitchFamily="49" charset="0"/>
+              </a:rPr>
+              <a:t>	if (</a:t>
+            </a:r>
+            <a:r>
+              <a:rPr lang="en-GB" sz="1400" dirty="0" err="1">
+                <a:latin typeface="Courier New" panose="02070309020205020404" pitchFamily="49" charset="0"/>
+                <a:cs typeface="Courier New" panose="02070309020205020404" pitchFamily="49" charset="0"/>
+              </a:rPr>
+              <a:t>Strings.isNullOrEmpty</a:t>
+            </a:r>
+            <a:r>
+              <a:rPr lang="en-GB" sz="1400" dirty="0">
+                <a:latin typeface="Courier New" panose="02070309020205020404" pitchFamily="49" charset="0"/>
+                <a:cs typeface="Courier New" panose="02070309020205020404" pitchFamily="49" charset="0"/>
+              </a:rPr>
+              <a:t>(password)</a:t>
+            </a:r>
+          </a:p>
+          <a:p>
+            <a:pPr marL="118872" indent="0">
+              <a:buNone/>
+            </a:pPr>
+            <a:r>
+              <a:rPr lang="en-GB" sz="1400" dirty="0">
+                <a:latin typeface="Courier New" panose="02070309020205020404" pitchFamily="49" charset="0"/>
+                <a:cs typeface="Courier New" panose="02070309020205020404" pitchFamily="49" charset="0"/>
+              </a:rPr>
+              <a:t>	|| </a:t>
+            </a:r>
+            <a:r>
+              <a:rPr lang="en-GB" sz="1400" dirty="0" err="1">
+                <a:latin typeface="Courier New" panose="02070309020205020404" pitchFamily="49" charset="0"/>
+                <a:cs typeface="Courier New" panose="02070309020205020404" pitchFamily="49" charset="0"/>
+              </a:rPr>
+              <a:t>password.length</a:t>
+            </a:r>
+            <a:r>
+              <a:rPr lang="en-GB" sz="1400" dirty="0">
+                <a:latin typeface="Courier New" panose="02070309020205020404" pitchFamily="49" charset="0"/>
+                <a:cs typeface="Courier New" panose="02070309020205020404" pitchFamily="49" charset="0"/>
+              </a:rPr>
+              <a:t>() &lt; 6)</a:t>
+            </a:r>
+          </a:p>
+          <a:p>
+            <a:pPr marL="118872" indent="0">
+              <a:buNone/>
+            </a:pPr>
+            <a:r>
+              <a:rPr lang="en-GB" sz="1400" dirty="0">
+                <a:latin typeface="Courier New" panose="02070309020205020404" pitchFamily="49" charset="0"/>
+                <a:cs typeface="Courier New" panose="02070309020205020404" pitchFamily="49" charset="0"/>
+              </a:rPr>
+              <a:t>	|| !</a:t>
+            </a:r>
+            <a:r>
+              <a:rPr lang="en-GB" sz="1400" dirty="0" err="1">
+                <a:latin typeface="Courier New" panose="02070309020205020404" pitchFamily="49" charset="0"/>
+                <a:cs typeface="Courier New" panose="02070309020205020404" pitchFamily="49" charset="0"/>
+              </a:rPr>
+              <a:t>Strings.containsDigit</a:t>
+            </a:r>
+            <a:r>
+              <a:rPr lang="en-GB" sz="1400" dirty="0">
+                <a:latin typeface="Courier New" panose="02070309020205020404" pitchFamily="49" charset="0"/>
+                <a:cs typeface="Courier New" panose="02070309020205020404" pitchFamily="49" charset="0"/>
+              </a:rPr>
+              <a:t>(password)) </a:t>
+            </a:r>
+          </a:p>
+          <a:p>
+            <a:pPr marL="118872" indent="0">
+              <a:buNone/>
+            </a:pPr>
+            <a:r>
+              <a:rPr lang="en-GB" sz="1400" dirty="0">
+                <a:latin typeface="Courier New" panose="02070309020205020404" pitchFamily="49" charset="0"/>
+                <a:cs typeface="Courier New" panose="02070309020205020404" pitchFamily="49" charset="0"/>
+              </a:rPr>
+              <a:t>	{</a:t>
+            </a:r>
+          </a:p>
+          <a:p>
+            <a:pPr marL="118872" indent="0">
+              <a:buNone/>
+            </a:pPr>
+            <a:r>
+              <a:rPr lang="en-GB" sz="1400" dirty="0">
+                <a:latin typeface="Courier New" panose="02070309020205020404" pitchFamily="49" charset="0"/>
+                <a:cs typeface="Courier New" panose="02070309020205020404" pitchFamily="49" charset="0"/>
+              </a:rPr>
+              <a:t>	    return false;</a:t>
+            </a:r>
+          </a:p>
+          <a:p>
+            <a:pPr marL="118872" indent="0">
+              <a:buNone/>
+            </a:pPr>
+            <a:r>
+              <a:rPr lang="en-GB" sz="1400" dirty="0">
+                <a:latin typeface="Courier New" panose="02070309020205020404" pitchFamily="49" charset="0"/>
+                <a:cs typeface="Courier New" panose="02070309020205020404" pitchFamily="49" charset="0"/>
+              </a:rPr>
+              <a:t>	}</a:t>
+            </a:r>
+          </a:p>
+          <a:p>
+            <a:pPr marL="118872" indent="0">
+              <a:buNone/>
+            </a:pPr>
+            <a:endParaRPr lang="en-GB" sz="1400" dirty="0">
+              <a:latin typeface="Courier New" panose="02070309020205020404" pitchFamily="49" charset="0"/>
+              <a:cs typeface="Courier New" panose="02070309020205020404" pitchFamily="49" charset="0"/>
+            </a:endParaRPr>
+          </a:p>
+          <a:p>
+            <a:pPr marL="118872" indent="0">
+              <a:buNone/>
+            </a:pPr>
+            <a:r>
+              <a:rPr lang="en-GB" sz="1400" dirty="0">
+                <a:latin typeface="Courier New" panose="02070309020205020404" pitchFamily="49" charset="0"/>
+                <a:cs typeface="Courier New" panose="02070309020205020404" pitchFamily="49" charset="0"/>
+              </a:rPr>
+              <a:t>	return true;</a:t>
+            </a:r>
+          </a:p>
+          <a:p>
+            <a:pPr marL="118872" indent="0">
+              <a:buNone/>
+            </a:pPr>
+            <a:r>
+              <a:rPr lang="en-GB" sz="1400" dirty="0">
+                <a:latin typeface="Courier New" panose="02070309020205020404" pitchFamily="49" charset="0"/>
+                <a:cs typeface="Courier New" panose="02070309020205020404" pitchFamily="49" charset="0"/>
+              </a:rPr>
+              <a:t>}</a:t>
+            </a:r>
+          </a:p>
+        </p:txBody>
+      </p:sp>
+      <p:sp>
+        <p:nvSpPr>
+          <p:cNvPr id="5" name="Slide Number Placeholder 4"/>
           <p:cNvSpPr>
             <a:spLocks noGrp="1"/>
           </p:cNvSpPr>
@@ -11128,13 +10832,16 @@
     </p:spTree>
     <p:extLst>
       <p:ext uri="{BB962C8B-B14F-4D97-AF65-F5344CB8AC3E}">
-        <p14:creationId xmlns:p14="http://schemas.microsoft.com/office/powerpoint/2010/main" val="477722368"/>
+        <p14:creationId xmlns:p14="http://schemas.microsoft.com/office/powerpoint/2010/main" val="208134332"/>
       </p:ext>
     </p:extLst>
   </p:cSld>
   <p:clrMapOvr>
     <a:masterClrMapping/>
   </p:clrMapOvr>
+  <p:transition spd="med">
+    <p:fade/>
+  </p:transition>
 </p:sld>
 </file>
 
@@ -11170,18 +10877,22 @@
           <a:bodyPr/>
           <a:lstStyle/>
           <a:p>
-            <a:endParaRPr lang="en-US"/>
-          </a:p>
-        </p:txBody>
-      </p:sp>
-      <p:sp>
-        <p:nvSpPr>
-          <p:cNvPr id="6" name="Content Placeholder 5"/>
-          <p:cNvSpPr>
-            <a:spLocks noGrp="1"/>
-          </p:cNvSpPr>
-          <p:nvPr>
-            <p:ph idx="1"/>
+            <a:r>
+              <a:rPr lang="en-GB" dirty="0" smtClean="0"/>
+              <a:t>Infrastructure Pub/Sub</a:t>
+            </a:r>
+            <a:endParaRPr lang="en-US" dirty="0"/>
+          </a:p>
+        </p:txBody>
+      </p:sp>
+      <p:sp>
+        <p:nvSpPr>
+          <p:cNvPr id="6" name="Text Placeholder 5"/>
+          <p:cNvSpPr>
+            <a:spLocks noGrp="1"/>
+          </p:cNvSpPr>
+          <p:nvPr>
+            <p:ph type="body" idx="1"/>
           </p:nvPr>
         </p:nvSpPr>
         <p:spPr/>
@@ -11220,7 +10931,7 @@
     </p:spTree>
     <p:extLst>
       <p:ext uri="{BB962C8B-B14F-4D97-AF65-F5344CB8AC3E}">
-        <p14:creationId xmlns:p14="http://schemas.microsoft.com/office/powerpoint/2010/main" val="709132927"/>
+        <p14:creationId xmlns:p14="http://schemas.microsoft.com/office/powerpoint/2010/main" val="477722368"/>
       </p:ext>
     </p:extLst>
   </p:cSld>
@@ -11249,7 +10960,7 @@
       </p:grpSpPr>
       <p:sp>
         <p:nvSpPr>
-          <p:cNvPr id="2" name="Title 1"/>
+          <p:cNvPr id="5" name="Title 4"/>
           <p:cNvSpPr>
             <a:spLocks noGrp="1"/>
           </p:cNvSpPr>
@@ -11262,40 +10973,29 @@
           <a:bodyPr/>
           <a:lstStyle/>
           <a:p>
-            <a:r>
-              <a:rPr lang="en-GB" dirty="0" smtClean="0"/>
-              <a:t>Abstract service</a:t>
-            </a:r>
-            <a:endParaRPr lang="en-US" dirty="0"/>
-          </a:p>
-        </p:txBody>
-      </p:sp>
-      <p:pic>
-        <p:nvPicPr>
-          <p:cNvPr id="5" name="Content Placeholder 4"/>
-          <p:cNvPicPr>
-            <a:picLocks noGrp="1" noChangeAspect="1"/>
-          </p:cNvPicPr>
+            <a:endParaRPr lang="en-US"/>
+          </a:p>
+        </p:txBody>
+      </p:sp>
+      <p:sp>
+        <p:nvSpPr>
+          <p:cNvPr id="6" name="Content Placeholder 5"/>
+          <p:cNvSpPr>
+            <a:spLocks noGrp="1"/>
+          </p:cNvSpPr>
           <p:nvPr>
             <p:ph idx="1"/>
           </p:nvPr>
-        </p:nvPicPr>
-        <p:blipFill>
-          <a:blip r:embed="rId2"/>
-          <a:stretch>
-            <a:fillRect/>
-          </a:stretch>
-        </p:blipFill>
-        <p:spPr>
-          <a:xfrm>
-            <a:off x="1674829" y="1774825"/>
-            <a:ext cx="5794342" cy="4625975"/>
-          </a:xfrm>
-          <a:prstGeom prst="rect">
-            <a:avLst/>
-          </a:prstGeom>
-        </p:spPr>
-      </p:pic>
+        </p:nvSpPr>
+        <p:spPr/>
+        <p:txBody>
+          <a:bodyPr/>
+          <a:lstStyle/>
+          <a:p>
+            <a:endParaRPr lang="en-US"/>
+          </a:p>
+        </p:txBody>
+      </p:sp>
       <p:sp>
         <p:nvSpPr>
           <p:cNvPr id="4" name="Slide Number Placeholder 3"/>
@@ -11323,7 +11023,7 @@
     </p:spTree>
     <p:extLst>
       <p:ext uri="{BB962C8B-B14F-4D97-AF65-F5344CB8AC3E}">
-        <p14:creationId xmlns:p14="http://schemas.microsoft.com/office/powerpoint/2010/main" val="1783994502"/>
+        <p14:creationId xmlns:p14="http://schemas.microsoft.com/office/powerpoint/2010/main" val="709132927"/>
       </p:ext>
     </p:extLst>
   </p:cSld>
@@ -11367,7 +11067,7 @@
           <a:p>
             <a:r>
               <a:rPr lang="en-GB" dirty="0" smtClean="0"/>
-              <a:t>In Process</a:t>
+              <a:t>Abstract service</a:t>
             </a:r>
             <a:endParaRPr lang="en-US" dirty="0"/>
           </a:p>
@@ -11391,8 +11091,8 @@
         </p:blipFill>
         <p:spPr>
           <a:xfrm>
-            <a:off x="1123950" y="1958975"/>
-            <a:ext cx="6896100" cy="4257675"/>
+            <a:off x="1674829" y="1774825"/>
+            <a:ext cx="5794342" cy="4625975"/>
           </a:xfrm>
           <a:prstGeom prst="rect">
             <a:avLst/>
@@ -11426,7 +11126,7 @@
     </p:spTree>
     <p:extLst>
       <p:ext uri="{BB962C8B-B14F-4D97-AF65-F5344CB8AC3E}">
-        <p14:creationId xmlns:p14="http://schemas.microsoft.com/office/powerpoint/2010/main" val="3197191611"/>
+        <p14:creationId xmlns:p14="http://schemas.microsoft.com/office/powerpoint/2010/main" val="1783994502"/>
       </p:ext>
     </p:extLst>
   </p:cSld>
@@ -11476,45 +11176,32 @@
           </a:p>
         </p:txBody>
       </p:sp>
-      <p:sp>
-        <p:nvSpPr>
-          <p:cNvPr id="3" name="Content Placeholder 2"/>
-          <p:cNvSpPr>
-            <a:spLocks noGrp="1"/>
-          </p:cNvSpPr>
+      <p:pic>
+        <p:nvPicPr>
+          <p:cNvPr id="5" name="Content Placeholder 4"/>
+          <p:cNvPicPr>
+            <a:picLocks noGrp="1" noChangeAspect="1"/>
+          </p:cNvPicPr>
           <p:nvPr>
             <p:ph idx="1"/>
           </p:nvPr>
-        </p:nvSpPr>
-        <p:spPr/>
-        <p:txBody>
-          <a:bodyPr/>
-          <a:lstStyle/>
-          <a:p>
-            <a:r>
-              <a:rPr lang="en-GB" dirty="0" smtClean="0"/>
-              <a:t>Client code uses </a:t>
-            </a:r>
-            <a:r>
-              <a:rPr lang="en-GB" dirty="0" err="1" smtClean="0"/>
-              <a:t>InProcessEventPublisher</a:t>
-            </a:r>
-            <a:r>
-              <a:rPr lang="en-GB" dirty="0" smtClean="0"/>
-              <a:t> or </a:t>
-            </a:r>
-            <a:r>
-              <a:rPr lang="en-GB" dirty="0" err="1" smtClean="0"/>
-              <a:t>InProcessEventDispatcher</a:t>
-            </a:r>
-            <a:r>
-              <a:rPr lang="en-GB" dirty="0" smtClean="0"/>
-              <a:t> via static instance() method or via dependency injection </a:t>
-            </a:r>
-            <a:endParaRPr lang="en-US" dirty="0"/>
-          </a:p>
-        </p:txBody>
-      </p:sp>
+        </p:nvPicPr>
+        <p:blipFill>
+          <a:blip r:embed="rId2"/>
+          <a:stretch>
+            <a:fillRect/>
+          </a:stretch>
+        </p:blipFill>
+        <p:spPr>
+          <a:xfrm>
+            <a:off x="1123950" y="1958975"/>
+            <a:ext cx="6896100" cy="4257675"/>
+          </a:xfrm>
+          <a:prstGeom prst="rect">
+            <a:avLst/>
+          </a:prstGeom>
+        </p:spPr>
+      </p:pic>
       <p:sp>
         <p:nvSpPr>
           <p:cNvPr id="4" name="Slide Number Placeholder 3"/>
@@ -11542,20 +11229,13 @@
     </p:spTree>
     <p:extLst>
       <p:ext uri="{BB962C8B-B14F-4D97-AF65-F5344CB8AC3E}">
-        <p14:creationId xmlns:p14="http://schemas.microsoft.com/office/powerpoint/2010/main" val="1984569913"/>
+        <p14:creationId xmlns:p14="http://schemas.microsoft.com/office/powerpoint/2010/main" val="3197191611"/>
       </p:ext>
     </p:extLst>
   </p:cSld>
   <p:clrMapOvr>
     <a:masterClrMapping/>
   </p:clrMapOvr>
-  <p:timing>
-    <p:tnLst>
-      <p:par>
-        <p:cTn id="1" dur="indefinite" restart="never" nodeType="tmRoot"/>
-      </p:par>
-    </p:tnLst>
-  </p:timing>
 </p:sld>
 </file>
 
@@ -11578,6 +11258,68 @@
       </p:grpSpPr>
       <p:sp>
         <p:nvSpPr>
+          <p:cNvPr id="2" name="Title 1"/>
+          <p:cNvSpPr>
+            <a:spLocks noGrp="1"/>
+          </p:cNvSpPr>
+          <p:nvPr>
+            <p:ph type="title"/>
+          </p:nvPr>
+        </p:nvSpPr>
+        <p:spPr/>
+        <p:txBody>
+          <a:bodyPr/>
+          <a:lstStyle/>
+          <a:p>
+            <a:r>
+              <a:rPr lang="en-GB" dirty="0" smtClean="0"/>
+              <a:t>In Process</a:t>
+            </a:r>
+            <a:endParaRPr lang="en-US" dirty="0"/>
+          </a:p>
+        </p:txBody>
+      </p:sp>
+      <p:sp>
+        <p:nvSpPr>
+          <p:cNvPr id="3" name="Content Placeholder 2"/>
+          <p:cNvSpPr>
+            <a:spLocks noGrp="1"/>
+          </p:cNvSpPr>
+          <p:nvPr>
+            <p:ph idx="1"/>
+          </p:nvPr>
+        </p:nvSpPr>
+        <p:spPr/>
+        <p:txBody>
+          <a:bodyPr/>
+          <a:lstStyle/>
+          <a:p>
+            <a:r>
+              <a:rPr lang="en-GB" dirty="0" smtClean="0"/>
+              <a:t>Client code uses </a:t>
+            </a:r>
+            <a:r>
+              <a:rPr lang="en-GB" dirty="0" err="1" smtClean="0"/>
+              <a:t>InProcessEventPublisher</a:t>
+            </a:r>
+            <a:r>
+              <a:rPr lang="en-GB" dirty="0" smtClean="0"/>
+              <a:t> or </a:t>
+            </a:r>
+            <a:r>
+              <a:rPr lang="en-GB" dirty="0" err="1" smtClean="0"/>
+              <a:t>InProcessEventDispatcher</a:t>
+            </a:r>
+            <a:r>
+              <a:rPr lang="en-GB" dirty="0" smtClean="0"/>
+              <a:t> via static instance() method or via dependency injection </a:t>
+            </a:r>
+            <a:endParaRPr lang="en-US" dirty="0"/>
+          </a:p>
+        </p:txBody>
+      </p:sp>
+      <p:sp>
+        <p:nvSpPr>
           <p:cNvPr id="4" name="Slide Number Placeholder 3"/>
           <p:cNvSpPr>
             <a:spLocks noGrp="1"/>
@@ -11600,90 +11342,10 @@
           </a:p>
         </p:txBody>
       </p:sp>
-      <p:pic>
-        <p:nvPicPr>
-          <p:cNvPr id="5" name="Content Placeholder 4"/>
-          <p:cNvPicPr>
-            <a:picLocks noGrp="1" noChangeAspect="1"/>
-          </p:cNvPicPr>
-          <p:nvPr>
-            <p:ph idx="4294967295"/>
-          </p:nvPr>
-        </p:nvPicPr>
-        <p:blipFill>
-          <a:blip r:embed="rId2"/>
-          <a:stretch>
-            <a:fillRect/>
-          </a:stretch>
-        </p:blipFill>
-        <p:spPr>
-          <a:xfrm>
-            <a:off x="571500" y="-41275"/>
-            <a:ext cx="8572500" cy="6899275"/>
-          </a:xfrm>
-          <a:prstGeom prst="rect">
-            <a:avLst/>
-          </a:prstGeom>
-        </p:spPr>
-      </p:pic>
-      <p:sp>
-        <p:nvSpPr>
-          <p:cNvPr id="2" name="Title 1"/>
-          <p:cNvSpPr>
-            <a:spLocks noGrp="1"/>
-          </p:cNvSpPr>
-          <p:nvPr>
-            <p:ph type="title" idx="4294967295"/>
-          </p:nvPr>
-        </p:nvSpPr>
-        <p:spPr>
-          <a:xfrm>
-            <a:off x="0" y="8620"/>
-            <a:ext cx="8229600" cy="1252538"/>
-          </a:xfrm>
-        </p:spPr>
-        <p:txBody>
-          <a:bodyPr/>
-          <a:lstStyle/>
-          <a:p>
-            <a:r>
-              <a:rPr lang="en-GB" dirty="0" smtClean="0">
-                <a:ln w="22225">
-                  <a:solidFill>
-                    <a:schemeClr val="accent2"/>
-                  </a:solidFill>
-                  <a:prstDash val="solid"/>
-                </a:ln>
-                <a:solidFill>
-                  <a:schemeClr val="accent2">
-                    <a:lumMod val="40000"/>
-                    <a:lumOff val="60000"/>
-                  </a:schemeClr>
-                </a:solidFill>
-              </a:rPr>
-              <a:t>Simple Persistent</a:t>
-            </a:r>
-            <a:endParaRPr lang="en-US" dirty="0">
-              <a:ln w="22225">
-                <a:solidFill>
-                  <a:schemeClr val="accent2"/>
-                </a:solidFill>
-                <a:prstDash val="solid"/>
-              </a:ln>
-              <a:solidFill>
-                <a:schemeClr val="accent2">
-                  <a:lumMod val="40000"/>
-                  <a:lumOff val="60000"/>
-                </a:schemeClr>
-              </a:solidFill>
-            </a:endParaRPr>
-          </a:p>
-        </p:txBody>
-      </p:sp>
     </p:spTree>
     <p:extLst>
       <p:ext uri="{BB962C8B-B14F-4D97-AF65-F5344CB8AC3E}">
-        <p14:creationId xmlns:p14="http://schemas.microsoft.com/office/powerpoint/2010/main" val="3159413259"/>
+        <p14:creationId xmlns:p14="http://schemas.microsoft.com/office/powerpoint/2010/main" val="1984569913"/>
       </p:ext>
     </p:extLst>
   </p:cSld>
@@ -11719,60 +11381,6 @@
       </p:grpSpPr>
       <p:sp>
         <p:nvSpPr>
-          <p:cNvPr id="2" name="Title 1"/>
-          <p:cNvSpPr>
-            <a:spLocks noGrp="1"/>
-          </p:cNvSpPr>
-          <p:nvPr>
-            <p:ph type="title"/>
-          </p:nvPr>
-        </p:nvSpPr>
-        <p:spPr/>
-        <p:txBody>
-          <a:bodyPr/>
-          <a:lstStyle/>
-          <a:p>
-            <a:r>
-              <a:rPr lang="en-GB" dirty="0" smtClean="0"/>
-              <a:t>Simple Persistent</a:t>
-            </a:r>
-            <a:endParaRPr lang="en-US" dirty="0"/>
-          </a:p>
-        </p:txBody>
-      </p:sp>
-      <p:sp>
-        <p:nvSpPr>
-          <p:cNvPr id="3" name="Content Placeholder 2"/>
-          <p:cNvSpPr>
-            <a:spLocks noGrp="1"/>
-          </p:cNvSpPr>
-          <p:nvPr>
-            <p:ph idx="1"/>
-          </p:nvPr>
-        </p:nvSpPr>
-        <p:spPr/>
-        <p:txBody>
-          <a:bodyPr/>
-          <a:lstStyle/>
-          <a:p>
-            <a:r>
-              <a:rPr lang="en-GB" dirty="0" smtClean="0"/>
-              <a:t>Use only via dependency injection</a:t>
-            </a:r>
-          </a:p>
-          <a:p>
-            <a:r>
-              <a:rPr lang="en-GB" dirty="0" smtClean="0"/>
-              <a:t>Domain entities must be registered in persistence.xml</a:t>
-            </a:r>
-          </a:p>
-          <a:p>
-            <a:endParaRPr lang="en-US" dirty="0"/>
-          </a:p>
-        </p:txBody>
-      </p:sp>
-      <p:sp>
-        <p:nvSpPr>
           <p:cNvPr id="4" name="Slide Number Placeholder 3"/>
           <p:cNvSpPr>
             <a:spLocks noGrp="1"/>
@@ -11795,10 +11403,90 @@
           </a:p>
         </p:txBody>
       </p:sp>
+      <p:pic>
+        <p:nvPicPr>
+          <p:cNvPr id="5" name="Content Placeholder 4"/>
+          <p:cNvPicPr>
+            <a:picLocks noGrp="1" noChangeAspect="1"/>
+          </p:cNvPicPr>
+          <p:nvPr>
+            <p:ph idx="4294967295"/>
+          </p:nvPr>
+        </p:nvPicPr>
+        <p:blipFill>
+          <a:blip r:embed="rId2"/>
+          <a:stretch>
+            <a:fillRect/>
+          </a:stretch>
+        </p:blipFill>
+        <p:spPr>
+          <a:xfrm>
+            <a:off x="571500" y="-41275"/>
+            <a:ext cx="8572500" cy="6899275"/>
+          </a:xfrm>
+          <a:prstGeom prst="rect">
+            <a:avLst/>
+          </a:prstGeom>
+        </p:spPr>
+      </p:pic>
+      <p:sp>
+        <p:nvSpPr>
+          <p:cNvPr id="2" name="Title 1"/>
+          <p:cNvSpPr>
+            <a:spLocks noGrp="1"/>
+          </p:cNvSpPr>
+          <p:nvPr>
+            <p:ph type="title" idx="4294967295"/>
+          </p:nvPr>
+        </p:nvSpPr>
+        <p:spPr>
+          <a:xfrm>
+            <a:off x="0" y="8620"/>
+            <a:ext cx="8229600" cy="1252538"/>
+          </a:xfrm>
+        </p:spPr>
+        <p:txBody>
+          <a:bodyPr/>
+          <a:lstStyle/>
+          <a:p>
+            <a:r>
+              <a:rPr lang="en-GB" dirty="0" smtClean="0">
+                <a:ln w="22225">
+                  <a:solidFill>
+                    <a:schemeClr val="accent2"/>
+                  </a:solidFill>
+                  <a:prstDash val="solid"/>
+                </a:ln>
+                <a:solidFill>
+                  <a:schemeClr val="accent2">
+                    <a:lumMod val="40000"/>
+                    <a:lumOff val="60000"/>
+                  </a:schemeClr>
+                </a:solidFill>
+              </a:rPr>
+              <a:t>Simple Persistent</a:t>
+            </a:r>
+            <a:endParaRPr lang="en-US" dirty="0">
+              <a:ln w="22225">
+                <a:solidFill>
+                  <a:schemeClr val="accent2"/>
+                </a:solidFill>
+                <a:prstDash val="solid"/>
+              </a:ln>
+              <a:solidFill>
+                <a:schemeClr val="accent2">
+                  <a:lumMod val="40000"/>
+                  <a:lumOff val="60000"/>
+                </a:schemeClr>
+              </a:solidFill>
+            </a:endParaRPr>
+          </a:p>
+        </p:txBody>
+      </p:sp>
     </p:spTree>
     <p:extLst>
       <p:ext uri="{BB962C8B-B14F-4D97-AF65-F5344CB8AC3E}">
-        <p14:creationId xmlns:p14="http://schemas.microsoft.com/office/powerpoint/2010/main" val="3162552291"/>
+        <p14:creationId xmlns:p14="http://schemas.microsoft.com/office/powerpoint/2010/main" val="3159413259"/>
       </p:ext>
     </p:extLst>
   </p:cSld>
@@ -11834,7 +11522,7 @@
       </p:grpSpPr>
       <p:sp>
         <p:nvSpPr>
-          <p:cNvPr id="5" name="Title 4"/>
+          <p:cNvPr id="2" name="Title 1"/>
           <p:cNvSpPr>
             <a:spLocks noGrp="1"/>
           </p:cNvSpPr>
@@ -11847,26 +11535,42 @@
           <a:bodyPr/>
           <a:lstStyle/>
           <a:p>
-            <a:endParaRPr lang="en-US"/>
-          </a:p>
-        </p:txBody>
-      </p:sp>
-      <p:sp>
-        <p:nvSpPr>
-          <p:cNvPr id="6" name="Text Placeholder 5"/>
-          <p:cNvSpPr>
-            <a:spLocks noGrp="1"/>
-          </p:cNvSpPr>
-          <p:nvPr>
-            <p:ph type="body" idx="1"/>
-          </p:nvPr>
-        </p:nvSpPr>
-        <p:spPr/>
-        <p:txBody>
-          <a:bodyPr/>
-          <a:lstStyle/>
-          <a:p>
-            <a:endParaRPr lang="en-US"/>
+            <a:r>
+              <a:rPr lang="en-GB" dirty="0" smtClean="0"/>
+              <a:t>Simple Persistent</a:t>
+            </a:r>
+            <a:endParaRPr lang="en-US" dirty="0"/>
+          </a:p>
+        </p:txBody>
+      </p:sp>
+      <p:sp>
+        <p:nvSpPr>
+          <p:cNvPr id="3" name="Content Placeholder 2"/>
+          <p:cNvSpPr>
+            <a:spLocks noGrp="1"/>
+          </p:cNvSpPr>
+          <p:nvPr>
+            <p:ph idx="1"/>
+          </p:nvPr>
+        </p:nvSpPr>
+        <p:spPr/>
+        <p:txBody>
+          <a:bodyPr/>
+          <a:lstStyle/>
+          <a:p>
+            <a:r>
+              <a:rPr lang="en-GB" dirty="0" smtClean="0"/>
+              <a:t>Use only via dependency injection</a:t>
+            </a:r>
+          </a:p>
+          <a:p>
+            <a:r>
+              <a:rPr lang="en-GB" dirty="0" smtClean="0"/>
+              <a:t>Domain entities must be registered in persistence.xml</a:t>
+            </a:r>
+          </a:p>
+          <a:p>
+            <a:endParaRPr lang="en-US" dirty="0"/>
           </a:p>
         </p:txBody>
       </p:sp>
@@ -11897,13 +11601,20 @@
     </p:spTree>
     <p:extLst>
       <p:ext uri="{BB962C8B-B14F-4D97-AF65-F5344CB8AC3E}">
-        <p14:creationId xmlns:p14="http://schemas.microsoft.com/office/powerpoint/2010/main" val="3437654254"/>
+        <p14:creationId xmlns:p14="http://schemas.microsoft.com/office/powerpoint/2010/main" val="3162552291"/>
       </p:ext>
     </p:extLst>
   </p:cSld>
   <p:clrMapOvr>
     <a:masterClrMapping/>
   </p:clrMapOvr>
+  <p:timing>
+    <p:tnLst>
+      <p:par>
+        <p:cTn id="1" dur="indefinite" restart="never" nodeType="tmRoot"/>
+      </p:par>
+    </p:tnLst>
+  </p:timing>
 </p:sld>
 </file>
 
@@ -12004,6 +11715,13 @@
   <p:clrMapOvr>
     <a:masterClrMapping/>
   </p:clrMapOvr>
+  <p:timing>
+    <p:tnLst>
+      <p:par>
+        <p:cTn id="1" dur="indefinite" restart="never" nodeType="tmRoot"/>
+      </p:par>
+    </p:tnLst>
+  </p:timing>
 </p:sld>
 </file>
 
@@ -12026,7 +11744,7 @@
       </p:grpSpPr>
       <p:sp>
         <p:nvSpPr>
-          <p:cNvPr id="3" name="Title 2"/>
+          <p:cNvPr id="5" name="Title 4"/>
           <p:cNvSpPr>
             <a:spLocks noGrp="1"/>
           </p:cNvSpPr>
@@ -12039,99 +11757,32 @@
           <a:bodyPr/>
           <a:lstStyle/>
           <a:p>
-            <a:r>
-              <a:rPr lang="en-GB" dirty="0"/>
-              <a:t>Build</a:t>
-            </a:r>
-            <a:endParaRPr lang="en-US" dirty="0"/>
-          </a:p>
-        </p:txBody>
-      </p:sp>
-      <p:sp>
-        <p:nvSpPr>
-          <p:cNvPr id="4" name="Content Placeholder 3"/>
-          <p:cNvSpPr>
-            <a:spLocks noGrp="1"/>
-          </p:cNvSpPr>
-          <p:nvPr>
-            <p:ph idx="1"/>
-          </p:nvPr>
-        </p:nvSpPr>
-        <p:spPr/>
-        <p:txBody>
-          <a:bodyPr/>
-          <a:lstStyle/>
-          <a:p>
-            <a:r>
-              <a:rPr lang="en-GB" dirty="0"/>
-              <a:t>Maven</a:t>
-            </a:r>
-          </a:p>
-          <a:p>
-            <a:pPr lvl="1"/>
-            <a:r>
-              <a:rPr lang="en-GB" dirty="0"/>
-              <a:t>Dependency manager</a:t>
-            </a:r>
-          </a:p>
-          <a:p>
-            <a:pPr lvl="1"/>
-            <a:r>
-              <a:rPr lang="en-GB" dirty="0" err="1"/>
-              <a:t>Artifact</a:t>
-            </a:r>
-            <a:r>
-              <a:rPr lang="en-GB" dirty="0"/>
-              <a:t> (jar) repository </a:t>
-            </a:r>
-          </a:p>
-          <a:p>
-            <a:pPr lvl="1"/>
-            <a:r>
-              <a:rPr lang="en-GB" dirty="0"/>
-              <a:t>Build automation</a:t>
-            </a:r>
-          </a:p>
-          <a:p>
-            <a:pPr lvl="1"/>
-            <a:r>
-              <a:rPr lang="en-GB" dirty="0"/>
-              <a:t>Other tasks, e.g., deploy, run</a:t>
-            </a:r>
-          </a:p>
-          <a:p>
-            <a:r>
-              <a:rPr lang="en-GB" dirty="0"/>
-              <a:t>Works for Eclipse, </a:t>
-            </a:r>
-            <a:r>
-              <a:rPr lang="en-GB" dirty="0" err="1"/>
-              <a:t>InteliJ</a:t>
-            </a:r>
-            <a:r>
-              <a:rPr lang="en-GB" dirty="0"/>
-              <a:t>, </a:t>
-            </a:r>
-            <a:r>
-              <a:rPr lang="en-GB" dirty="0" err="1"/>
-              <a:t>Netbeans</a:t>
-            </a:r>
-            <a:endParaRPr lang="en-GB" dirty="0"/>
-          </a:p>
-          <a:p>
-            <a:r>
-              <a:rPr lang="en-GB" dirty="0"/>
-              <a:t>Pom.xml</a:t>
-            </a:r>
-          </a:p>
-          <a:p>
-            <a:endParaRPr lang="en-US" dirty="0"/>
-          </a:p>
-        </p:txBody>
-      </p:sp>
-      <p:sp>
-        <p:nvSpPr>
-          <p:cNvPr id="2" name="Slide Number Placeholder 1"/>
+            <a:endParaRPr lang="en-US"/>
+          </a:p>
+        </p:txBody>
+      </p:sp>
+      <p:sp>
+        <p:nvSpPr>
+          <p:cNvPr id="6" name="Text Placeholder 5"/>
+          <p:cNvSpPr>
+            <a:spLocks noGrp="1"/>
+          </p:cNvSpPr>
+          <p:nvPr>
+            <p:ph type="body" idx="1"/>
+          </p:nvPr>
+        </p:nvSpPr>
+        <p:spPr/>
+        <p:txBody>
+          <a:bodyPr/>
+          <a:lstStyle/>
+          <a:p>
+            <a:endParaRPr lang="en-US"/>
+          </a:p>
+        </p:txBody>
+      </p:sp>
+      <p:sp>
+        <p:nvSpPr>
+          <p:cNvPr id="4" name="Slide Number Placeholder 3"/>
           <p:cNvSpPr>
             <a:spLocks noGrp="1"/>
           </p:cNvSpPr>
@@ -12156,7 +11807,7 @@
     </p:spTree>
     <p:extLst>
       <p:ext uri="{BB962C8B-B14F-4D97-AF65-F5344CB8AC3E}">
-        <p14:creationId xmlns:p14="http://schemas.microsoft.com/office/powerpoint/2010/main" val="3878863745"/>
+        <p14:creationId xmlns:p14="http://schemas.microsoft.com/office/powerpoint/2010/main" val="3437654254"/>
       </p:ext>
     </p:extLst>
   </p:cSld>
@@ -12185,7 +11836,7 @@
       </p:grpSpPr>
       <p:sp>
         <p:nvSpPr>
-          <p:cNvPr id="2" name="Title 1"/>
+          <p:cNvPr id="3" name="Title 2"/>
           <p:cNvSpPr>
             <a:spLocks noGrp="1"/>
           </p:cNvSpPr>
@@ -12198,13 +11849,17 @@
           <a:bodyPr/>
           <a:lstStyle/>
           <a:p>
-            <a:endParaRPr lang="en-US"/>
-          </a:p>
-        </p:txBody>
-      </p:sp>
-      <p:sp>
-        <p:nvSpPr>
-          <p:cNvPr id="3" name="Content Placeholder 2"/>
+            <a:r>
+              <a:rPr lang="en-GB" dirty="0"/>
+              <a:t>Build</a:t>
+            </a:r>
+            <a:endParaRPr lang="en-US" dirty="0"/>
+          </a:p>
+        </p:txBody>
+      </p:sp>
+      <p:sp>
+        <p:nvSpPr>
+          <p:cNvPr id="4" name="Content Placeholder 3"/>
           <p:cNvSpPr>
             <a:spLocks noGrp="1"/>
           </p:cNvSpPr>
@@ -12217,13 +11872,76 @@
           <a:bodyPr/>
           <a:lstStyle/>
           <a:p>
-            <a:endParaRPr lang="en-US"/>
-          </a:p>
-        </p:txBody>
-      </p:sp>
-      <p:sp>
-        <p:nvSpPr>
-          <p:cNvPr id="4" name="Slide Number Placeholder 3"/>
+            <a:r>
+              <a:rPr lang="en-GB" dirty="0"/>
+              <a:t>Maven</a:t>
+            </a:r>
+          </a:p>
+          <a:p>
+            <a:pPr lvl="1"/>
+            <a:r>
+              <a:rPr lang="en-GB" dirty="0"/>
+              <a:t>Dependency manager</a:t>
+            </a:r>
+          </a:p>
+          <a:p>
+            <a:pPr lvl="1"/>
+            <a:r>
+              <a:rPr lang="en-GB" dirty="0" err="1"/>
+              <a:t>Artifact</a:t>
+            </a:r>
+            <a:r>
+              <a:rPr lang="en-GB" dirty="0"/>
+              <a:t> (jar) repository </a:t>
+            </a:r>
+          </a:p>
+          <a:p>
+            <a:pPr lvl="1"/>
+            <a:r>
+              <a:rPr lang="en-GB" dirty="0"/>
+              <a:t>Build automation</a:t>
+            </a:r>
+          </a:p>
+          <a:p>
+            <a:pPr lvl="1"/>
+            <a:r>
+              <a:rPr lang="en-GB" dirty="0"/>
+              <a:t>Other tasks, e.g., deploy, run</a:t>
+            </a:r>
+          </a:p>
+          <a:p>
+            <a:r>
+              <a:rPr lang="en-GB" dirty="0"/>
+              <a:t>Works for Eclipse, </a:t>
+            </a:r>
+            <a:r>
+              <a:rPr lang="en-GB" dirty="0" err="1"/>
+              <a:t>InteliJ</a:t>
+            </a:r>
+            <a:r>
+              <a:rPr lang="en-GB" dirty="0"/>
+              <a:t>, </a:t>
+            </a:r>
+            <a:r>
+              <a:rPr lang="en-GB" dirty="0" err="1"/>
+              <a:t>Netbeans</a:t>
+            </a:r>
+            <a:endParaRPr lang="en-GB" dirty="0"/>
+          </a:p>
+          <a:p>
+            <a:r>
+              <a:rPr lang="en-GB" dirty="0"/>
+              <a:t>Pom.xml</a:t>
+            </a:r>
+          </a:p>
+          <a:p>
+            <a:endParaRPr lang="en-US" dirty="0"/>
+          </a:p>
+        </p:txBody>
+      </p:sp>
+      <p:sp>
+        <p:nvSpPr>
+          <p:cNvPr id="2" name="Slide Number Placeholder 1"/>
           <p:cNvSpPr>
             <a:spLocks noGrp="1"/>
           </p:cNvSpPr>
@@ -12240,6 +11958,98 @@
               <a:rPr lang="pt-PT" smtClean="0"/>
               <a:pPr/>
               <a:t>51</a:t>
+            </a:fld>
+            <a:endParaRPr lang="pt-PT"/>
+          </a:p>
+        </p:txBody>
+      </p:sp>
+    </p:spTree>
+    <p:extLst>
+      <p:ext uri="{BB962C8B-B14F-4D97-AF65-F5344CB8AC3E}">
+        <p14:creationId xmlns:p14="http://schemas.microsoft.com/office/powerpoint/2010/main" val="3878863745"/>
+      </p:ext>
+    </p:extLst>
+  </p:cSld>
+  <p:clrMapOvr>
+    <a:masterClrMapping/>
+  </p:clrMapOvr>
+</p:sld>
+</file>
+
+<file path=ppt/slides/slide52.xml><?xml version="1.0" encoding="utf-8"?>
+<p:sld xmlns:a="http://schemas.openxmlformats.org/drawingml/2006/main" xmlns:r="http://schemas.openxmlformats.org/officeDocument/2006/relationships" xmlns:p="http://schemas.openxmlformats.org/presentationml/2006/main">
+  <p:cSld>
+    <p:spTree>
+      <p:nvGrpSpPr>
+        <p:cNvPr id="1" name=""/>
+        <p:cNvGrpSpPr/>
+        <p:nvPr/>
+      </p:nvGrpSpPr>
+      <p:grpSpPr>
+        <a:xfrm>
+          <a:off x="0" y="0"/>
+          <a:ext cx="0" cy="0"/>
+          <a:chOff x="0" y="0"/>
+          <a:chExt cx="0" cy="0"/>
+        </a:xfrm>
+      </p:grpSpPr>
+      <p:sp>
+        <p:nvSpPr>
+          <p:cNvPr id="2" name="Title 1"/>
+          <p:cNvSpPr>
+            <a:spLocks noGrp="1"/>
+          </p:cNvSpPr>
+          <p:nvPr>
+            <p:ph type="title"/>
+          </p:nvPr>
+        </p:nvSpPr>
+        <p:spPr/>
+        <p:txBody>
+          <a:bodyPr/>
+          <a:lstStyle/>
+          <a:p>
+            <a:endParaRPr lang="en-US"/>
+          </a:p>
+        </p:txBody>
+      </p:sp>
+      <p:sp>
+        <p:nvSpPr>
+          <p:cNvPr id="3" name="Content Placeholder 2"/>
+          <p:cNvSpPr>
+            <a:spLocks noGrp="1"/>
+          </p:cNvSpPr>
+          <p:nvPr>
+            <p:ph idx="1"/>
+          </p:nvPr>
+        </p:nvSpPr>
+        <p:spPr/>
+        <p:txBody>
+          <a:bodyPr/>
+          <a:lstStyle/>
+          <a:p>
+            <a:endParaRPr lang="en-US"/>
+          </a:p>
+        </p:txBody>
+      </p:sp>
+      <p:sp>
+        <p:nvSpPr>
+          <p:cNvPr id="4" name="Slide Number Placeholder 3"/>
+          <p:cNvSpPr>
+            <a:spLocks noGrp="1"/>
+          </p:cNvSpPr>
+          <p:nvPr>
+            <p:ph type="sldNum" sz="quarter" idx="12"/>
+          </p:nvPr>
+        </p:nvSpPr>
+        <p:spPr/>
+        <p:txBody>
+          <a:bodyPr/>
+          <a:lstStyle/>
+          <a:p>
+            <a:fld id="{024A9932-4E76-455F-8E1A-2CC10C89B014}" type="slidenum">
+              <a:rPr lang="pt-PT" smtClean="0"/>
+              <a:pPr/>
+              <a:t>52</a:t>
             </a:fld>
             <a:endParaRPr lang="pt-PT"/>
           </a:p>
@@ -12282,7 +12092,7 @@
 </p:sld>
 </file>
 
-<file path=ppt/slides/slide52.xml><?xml version="1.0" encoding="utf-8"?>
+<file path=ppt/slides/slide53.xml><?xml version="1.0" encoding="utf-8"?>
 <p:sld xmlns:a="http://schemas.openxmlformats.org/drawingml/2006/main" xmlns:r="http://schemas.openxmlformats.org/officeDocument/2006/relationships" xmlns:p="http://schemas.openxmlformats.org/presentationml/2006/main">
   <p:cSld>
     <p:spTree>
@@ -12358,7 +12168,7 @@
             <a:fld id="{024A9932-4E76-455F-8E1A-2CC10C89B014}" type="slidenum">
               <a:rPr lang="pt-PT" smtClean="0"/>
               <a:pPr/>
-              <a:t>52</a:t>
+              <a:t>53</a:t>
             </a:fld>
             <a:endParaRPr lang="pt-PT"/>
           </a:p>
@@ -12457,8 +12267,49 @@
           <a:lstStyle/>
           <a:p>
             <a:r>
+              <a:rPr lang="en-GB" dirty="0" smtClean="0"/>
+              <a:t>DDD </a:t>
+            </a:r>
+            <a:r>
               <a:rPr lang="en-GB" dirty="0"/>
-              <a:t>Domain objects</a:t>
+              <a:t>pattern interfaces</a:t>
+            </a:r>
+          </a:p>
+          <a:p>
+            <a:pPr lvl="1"/>
+            <a:r>
+              <a:rPr lang="en-GB" dirty="0" err="1"/>
+              <a:t>ValueObject</a:t>
+            </a:r>
+            <a:endParaRPr lang="en-GB" dirty="0"/>
+          </a:p>
+          <a:p>
+            <a:pPr lvl="1"/>
+            <a:r>
+              <a:rPr lang="en-GB" dirty="0" err="1"/>
+              <a:t>DomainEntity</a:t>
+            </a:r>
+            <a:endParaRPr lang="en-GB" dirty="0"/>
+          </a:p>
+          <a:p>
+            <a:pPr lvl="1"/>
+            <a:r>
+              <a:rPr lang="en-GB" dirty="0" err="1"/>
+              <a:t>AggregateRoot</a:t>
+            </a:r>
+            <a:endParaRPr lang="en-GB" dirty="0"/>
+          </a:p>
+          <a:p>
+            <a:endParaRPr lang="en-GB" dirty="0" smtClean="0"/>
+          </a:p>
+          <a:p>
+            <a:r>
+              <a:rPr lang="en-GB" dirty="0" smtClean="0"/>
+              <a:t>Domain </a:t>
+            </a:r>
+            <a:r>
+              <a:rPr lang="en-GB" dirty="0"/>
+              <a:t>objects</a:t>
             </a:r>
           </a:p>
           <a:p>
@@ -12479,43 +12330,18 @@
             <a:pPr lvl="1"/>
             <a:r>
               <a:rPr lang="en-GB" dirty="0"/>
-              <a:t>Time period</a:t>
-            </a:r>
-          </a:p>
-          <a:p>
-            <a:endParaRPr lang="en-GB" dirty="0" smtClean="0"/>
-          </a:p>
-          <a:p>
+              <a:t>Time </a:t>
+            </a:r>
             <a:r>
               <a:rPr lang="en-GB" dirty="0" smtClean="0"/>
-              <a:t>DDD </a:t>
-            </a:r>
-            <a:r>
-              <a:rPr lang="en-GB" dirty="0"/>
-              <a:t>pattern interfaces</a:t>
+              <a:t>period</a:t>
             </a:r>
           </a:p>
           <a:p>
             <a:pPr lvl="1"/>
             <a:r>
-              <a:rPr lang="en-GB" dirty="0" err="1"/>
-              <a:t>ValueObject</a:t>
-            </a:r>
-            <a:endParaRPr lang="en-GB" dirty="0"/>
-          </a:p>
-          <a:p>
-            <a:pPr lvl="1"/>
-            <a:r>
-              <a:rPr lang="en-GB" dirty="0" err="1"/>
-              <a:t>DomainEntity</a:t>
-            </a:r>
-            <a:endParaRPr lang="en-GB" dirty="0"/>
-          </a:p>
-          <a:p>
-            <a:pPr lvl="1"/>
-            <a:r>
-              <a:rPr lang="en-GB" dirty="0" err="1"/>
-              <a:t>AggregateRoot</a:t>
+              <a:rPr lang="en-GB" dirty="0" smtClean="0"/>
+              <a:t>…</a:t>
             </a:r>
             <a:endParaRPr lang="en-GB" dirty="0"/>
           </a:p>
@@ -12566,26 +12392,35 @@
       </p:sp>
       <p:pic>
         <p:nvPicPr>
-          <p:cNvPr id="7" name="Picture 6"/>
+          <p:cNvPr id="6" name="Picture 5"/>
           <p:cNvPicPr>
             <a:picLocks noChangeAspect="1"/>
           </p:cNvPicPr>
           <p:nvPr/>
         </p:nvPicPr>
-        <p:blipFill>
+        <p:blipFill rotWithShape="1">
           <a:blip r:embed="rId3"/>
-          <a:stretch>
-            <a:fillRect/>
-          </a:stretch>
+          <a:srcRect b="12201"/>
+          <a:stretch/>
         </p:blipFill>
         <p:spPr>
           <a:xfrm>
-            <a:off x="4724400" y="817244"/>
-            <a:ext cx="4419600" cy="5934075"/>
+            <a:off x="4914266" y="376464"/>
+            <a:ext cx="3506468" cy="6021288"/>
           </a:xfrm>
           <a:prstGeom prst="rect">
             <a:avLst/>
           </a:prstGeom>
+          <a:ln>
+            <a:noFill/>
+          </a:ln>
+          <a:effectLst>
+            <a:outerShdw blurRad="292100" dist="139700" dir="2700000" algn="tl" rotWithShape="0">
+              <a:srgbClr val="333333">
+                <a:alpha val="65000"/>
+              </a:srgbClr>
+            </a:outerShdw>
+          </a:effectLst>
         </p:spPr>
       </p:pic>
     </p:spTree>
@@ -12598,6 +12433,13 @@
   <p:clrMapOvr>
     <a:masterClrMapping/>
   </p:clrMapOvr>
+  <p:timing>
+    <p:tnLst>
+      <p:par>
+        <p:cTn id="1" dur="indefinite" restart="never" nodeType="tmRoot"/>
+      </p:par>
+    </p:tnLst>
+  </p:timing>
 </p:sld>
 </file>
 
@@ -12635,7 +12477,7 @@
           <a:p>
             <a:r>
               <a:rPr lang="en-GB" dirty="0" smtClean="0"/>
-              <a:t>Standard patterns</a:t>
+              <a:t>Common patterns</a:t>
             </a:r>
             <a:endParaRPr lang="en-US" dirty="0"/>
           </a:p>
@@ -12658,15 +12500,22 @@
           <a:p>
             <a:r>
               <a:rPr lang="en-GB" dirty="0" smtClean="0"/>
-              <a:t>Actions, </a:t>
-            </a:r>
+              <a:t>Actions</a:t>
+            </a:r>
+          </a:p>
+          <a:p>
+            <a:pPr lvl="1"/>
             <a:r>
               <a:rPr lang="en-GB" dirty="0" err="1" smtClean="0"/>
               <a:t>a.k.a</a:t>
             </a:r>
             <a:r>
               <a:rPr lang="en-GB" dirty="0" smtClean="0"/>
-              <a:t> Command</a:t>
+              <a:t> </a:t>
+            </a:r>
+            <a:r>
+              <a:rPr lang="en-GB" dirty="0" smtClean="0"/>
+              <a:t>Command</a:t>
             </a:r>
           </a:p>
           <a:p>
@@ -12714,6 +12563,40 @@
           </a:p>
         </p:txBody>
       </p:sp>
+      <p:pic>
+        <p:nvPicPr>
+          <p:cNvPr id="4" name="Picture 3"/>
+          <p:cNvPicPr>
+            <a:picLocks noChangeAspect="1"/>
+          </p:cNvPicPr>
+          <p:nvPr/>
+        </p:nvPicPr>
+        <p:blipFill>
+          <a:blip r:embed="rId2"/>
+          <a:stretch>
+            <a:fillRect/>
+          </a:stretch>
+        </p:blipFill>
+        <p:spPr>
+          <a:xfrm>
+            <a:off x="5060574" y="0"/>
+            <a:ext cx="4099510" cy="6898545"/>
+          </a:xfrm>
+          <a:prstGeom prst="rect">
+            <a:avLst/>
+          </a:prstGeom>
+          <a:ln>
+            <a:noFill/>
+          </a:ln>
+          <a:effectLst>
+            <a:outerShdw blurRad="292100" dist="139700" dir="2700000" algn="tl" rotWithShape="0">
+              <a:srgbClr val="333333">
+                <a:alpha val="65000"/>
+              </a:srgbClr>
+            </a:outerShdw>
+          </a:effectLst>
+        </p:spPr>
+      </p:pic>
     </p:spTree>
     <p:extLst>
       <p:ext uri="{BB962C8B-B14F-4D97-AF65-F5344CB8AC3E}">
@@ -12724,6 +12607,13 @@
   <p:clrMapOvr>
     <a:masterClrMapping/>
   </p:clrMapOvr>
+  <p:timing>
+    <p:tnLst>
+      <p:par>
+        <p:cTn id="1" dur="indefinite" restart="never" nodeType="tmRoot"/>
+      </p:par>
+    </p:tnLst>
+  </p:timing>
 </p:sld>
 </file>
 
@@ -12780,7 +12670,7 @@
         <p:spPr/>
         <p:txBody>
           <a:bodyPr>
-            <a:normAutofit/>
+            <a:normAutofit lnSpcReduction="10000"/>
           </a:bodyPr>
           <a:lstStyle/>
           <a:p>
@@ -12841,35 +12731,72 @@
         <p:spPr/>
         <p:txBody>
           <a:bodyPr>
-            <a:normAutofit/>
+            <a:normAutofit lnSpcReduction="10000"/>
           </a:bodyPr>
           <a:lstStyle/>
           <a:p>
             <a:r>
-              <a:rPr lang="en-GB" dirty="0"/>
-              <a:t>Math</a:t>
-            </a:r>
+              <a:rPr lang="en-GB" dirty="0" smtClean="0"/>
+              <a:t>Arrays</a:t>
+            </a:r>
+          </a:p>
+          <a:p>
+            <a:r>
+              <a:rPr lang="en-GB" dirty="0" smtClean="0"/>
+              <a:t>Collections</a:t>
+            </a:r>
+          </a:p>
+          <a:p>
+            <a:r>
+              <a:rPr lang="en-GB" dirty="0" err="1" smtClean="0"/>
+              <a:t>Comparables</a:t>
+            </a:r>
+            <a:endParaRPr lang="en-GB" dirty="0" smtClean="0"/>
+          </a:p>
+          <a:p>
+            <a:endParaRPr lang="en-GB" dirty="0"/>
+          </a:p>
+          <a:p>
+            <a:r>
+              <a:rPr lang="en-GB" dirty="0" err="1" smtClean="0"/>
+              <a:t>HashCoder</a:t>
+            </a:r>
+            <a:endParaRPr lang="en-GB" dirty="0" smtClean="0"/>
           </a:p>
           <a:p>
             <a:pPr lvl="1"/>
             <a:r>
-              <a:rPr lang="en-GB" dirty="0"/>
-              <a:t>Sample math utility</a:t>
-            </a:r>
-          </a:p>
-          <a:p>
-            <a:r>
               <a:rPr lang="en-GB" dirty="0" smtClean="0"/>
-              <a:t>Strings</a:t>
-            </a:r>
+              <a:t>Simplifies generation oh a class’ hash code</a:t>
+            </a:r>
+            <a:endParaRPr lang="en-GB" dirty="0" smtClean="0"/>
+          </a:p>
+          <a:p>
             <a:endParaRPr lang="en-GB" dirty="0"/>
           </a:p>
           <a:p>
+            <a:r>
+              <a:rPr lang="en-GB" dirty="0" err="1" smtClean="0"/>
+              <a:t>NumberGenerator</a:t>
+            </a:r>
+            <a:endParaRPr lang="en-GB" dirty="0" smtClean="0"/>
+          </a:p>
+          <a:p>
             <a:pPr lvl="1"/>
             <a:r>
-              <a:rPr lang="en-GB" dirty="0"/>
-              <a:t>String manipulation</a:t>
-            </a:r>
+              <a:rPr lang="en-GB" dirty="0" smtClean="0"/>
+              <a:t>Simple API for Java Random class</a:t>
+            </a:r>
+            <a:endParaRPr lang="en-GB" dirty="0"/>
+          </a:p>
+          <a:p>
+            <a:endParaRPr lang="en-GB" dirty="0" smtClean="0"/>
+          </a:p>
+          <a:p>
+            <a:endParaRPr lang="en-GB" dirty="0"/>
+          </a:p>
+          <a:p>
+            <a:endParaRPr lang="en-GB" dirty="0"/>
           </a:p>
         </p:txBody>
       </p:sp>
@@ -12943,9 +12870,98 @@
           <a:lstStyle/>
           <a:p>
             <a:r>
+              <a:rPr lang="en-GB" dirty="0" smtClean="0"/>
+              <a:t>Utilities</a:t>
+            </a:r>
+            <a:endParaRPr lang="en-GB" dirty="0"/>
+          </a:p>
+        </p:txBody>
+      </p:sp>
+      <p:sp>
+        <p:nvSpPr>
+          <p:cNvPr id="3" name="Content Placeholder 2"/>
+          <p:cNvSpPr>
+            <a:spLocks noGrp="1"/>
+          </p:cNvSpPr>
+          <p:nvPr>
+            <p:ph sz="half" idx="1"/>
+          </p:nvPr>
+        </p:nvSpPr>
+        <p:spPr/>
+        <p:txBody>
+          <a:bodyPr>
+            <a:normAutofit fontScale="92500" lnSpcReduction="10000"/>
+          </a:bodyPr>
+          <a:lstStyle/>
+          <a:p>
+            <a:r>
               <a:rPr lang="en-GB" dirty="0"/>
-              <a:t>Presentation</a:t>
-            </a:r>
+              <a:t>Strings</a:t>
+            </a:r>
+          </a:p>
+          <a:p>
+            <a:pPr lvl="1"/>
+            <a:r>
+              <a:rPr lang="en-GB" dirty="0"/>
+              <a:t>String manipulation</a:t>
+            </a:r>
+          </a:p>
+          <a:p>
+            <a:r>
+              <a:rPr lang="en-GB" dirty="0" err="1" smtClean="0"/>
+              <a:t>StringMixin</a:t>
+            </a:r>
+            <a:endParaRPr lang="en-GB" dirty="0" smtClean="0"/>
+          </a:p>
+          <a:p>
+            <a:pPr lvl="1"/>
+            <a:endParaRPr lang="en-GB" dirty="0" smtClean="0"/>
+          </a:p>
+          <a:p>
+            <a:r>
+              <a:rPr lang="en-GB" dirty="0"/>
+              <a:t>Math</a:t>
+            </a:r>
+          </a:p>
+          <a:p>
+            <a:pPr lvl="1"/>
+            <a:r>
+              <a:rPr lang="en-GB" dirty="0"/>
+              <a:t>Sample math utility</a:t>
+            </a:r>
+          </a:p>
+          <a:p>
+            <a:pPr lvl="1"/>
+            <a:endParaRPr lang="en-GB" dirty="0" smtClean="0"/>
+          </a:p>
+          <a:p>
+            <a:r>
+              <a:rPr lang="en-GB" dirty="0" err="1" smtClean="0"/>
+              <a:t>StringPredicates</a:t>
+            </a:r>
+            <a:endParaRPr lang="en-GB" dirty="0" smtClean="0"/>
+          </a:p>
+          <a:p>
+            <a:pPr lvl="1"/>
+            <a:r>
+              <a:rPr lang="en-GB" dirty="0" smtClean="0"/>
+              <a:t>Predicates to test strings</a:t>
+            </a:r>
+          </a:p>
+          <a:p>
+            <a:r>
+              <a:rPr lang="en-GB" dirty="0" err="1" smtClean="0"/>
+              <a:t>NumberPredicates</a:t>
+            </a:r>
+            <a:endParaRPr lang="en-GB" dirty="0" smtClean="0"/>
+          </a:p>
+          <a:p>
+            <a:pPr lvl="1"/>
+            <a:r>
+              <a:rPr lang="en-GB" dirty="0" smtClean="0"/>
+              <a:t>Predicates to test primitive numbers</a:t>
+            </a:r>
+            <a:endParaRPr lang="en-GB" dirty="0"/>
           </a:p>
         </p:txBody>
       </p:sp>
@@ -12961,10 +12977,60 @@
         </p:nvSpPr>
         <p:spPr/>
         <p:txBody>
-          <a:bodyPr/>
-          <a:lstStyle/>
-          <a:p>
-            <a:endParaRPr lang="en-GB"/>
+          <a:bodyPr>
+            <a:normAutofit fontScale="92500" lnSpcReduction="10000"/>
+          </a:bodyPr>
+          <a:lstStyle/>
+          <a:p>
+            <a:r>
+              <a:rPr lang="en-GB" dirty="0" err="1" smtClean="0"/>
+              <a:t>PreConditions</a:t>
+            </a:r>
+            <a:endParaRPr lang="en-GB" dirty="0" smtClean="0"/>
+          </a:p>
+          <a:p>
+            <a:pPr lvl="1"/>
+            <a:r>
+              <a:rPr lang="en-GB" sz="2000" dirty="0" smtClean="0"/>
+              <a:t>Validates pre conditions on methods, usually the method’s parameters</a:t>
+            </a:r>
+          </a:p>
+          <a:p>
+            <a:pPr lvl="1"/>
+            <a:r>
+              <a:rPr lang="en-GB" sz="2000" dirty="0" smtClean="0"/>
+              <a:t>Throws </a:t>
+            </a:r>
+            <a:r>
+              <a:rPr lang="en-GB" sz="2000" dirty="0" err="1" smtClean="0"/>
+              <a:t>InvalidArgumentException</a:t>
+            </a:r>
+            <a:endParaRPr lang="en-GB" sz="2000" dirty="0" smtClean="0"/>
+          </a:p>
+          <a:p>
+            <a:r>
+              <a:rPr lang="en-GB" dirty="0" smtClean="0"/>
+              <a:t>Invariants</a:t>
+            </a:r>
+          </a:p>
+          <a:p>
+            <a:pPr lvl="1"/>
+            <a:r>
+              <a:rPr lang="en-GB" sz="2000" dirty="0" smtClean="0"/>
+              <a:t>Validates internal consistency of an object</a:t>
+            </a:r>
+          </a:p>
+          <a:p>
+            <a:pPr lvl="1"/>
+            <a:r>
+              <a:rPr lang="en-GB" sz="2000" dirty="0" smtClean="0"/>
+              <a:t>Throws </a:t>
+            </a:r>
+            <a:r>
+              <a:rPr lang="en-GB" sz="2000" dirty="0" err="1" smtClean="0"/>
+              <a:t>InvalidStateException</a:t>
+            </a:r>
+            <a:endParaRPr lang="en-GB" sz="2000" dirty="0"/>
           </a:p>
         </p:txBody>
       </p:sp>
@@ -12992,58 +13058,10 @@
           </a:p>
         </p:txBody>
       </p:sp>
-      <p:pic>
-        <p:nvPicPr>
-          <p:cNvPr id="8" name="Picture 7"/>
-          <p:cNvPicPr>
-            <a:picLocks noChangeAspect="1"/>
-          </p:cNvPicPr>
-          <p:nvPr/>
-        </p:nvPicPr>
-        <p:blipFill>
-          <a:blip r:embed="rId3"/>
-          <a:stretch>
-            <a:fillRect/>
-          </a:stretch>
-        </p:blipFill>
-        <p:spPr>
-          <a:xfrm>
-            <a:off x="4663853" y="-166127"/>
-            <a:ext cx="4400550" cy="7000875"/>
-          </a:xfrm>
-          <a:prstGeom prst="rect">
-            <a:avLst/>
-          </a:prstGeom>
-        </p:spPr>
-      </p:pic>
-      <p:pic>
-        <p:nvPicPr>
-          <p:cNvPr id="9" name="Picture 8"/>
-          <p:cNvPicPr>
-            <a:picLocks noChangeAspect="1"/>
-          </p:cNvPicPr>
-          <p:nvPr/>
-        </p:nvPicPr>
-        <p:blipFill>
-          <a:blip r:embed="rId4"/>
-          <a:stretch>
-            <a:fillRect/>
-          </a:stretch>
-        </p:blipFill>
-        <p:spPr>
-          <a:xfrm>
-            <a:off x="431540" y="1376772"/>
-            <a:ext cx="3636404" cy="5458939"/>
-          </a:xfrm>
-          <a:prstGeom prst="rect">
-            <a:avLst/>
-          </a:prstGeom>
-        </p:spPr>
-      </p:pic>
     </p:spTree>
     <p:extLst>
       <p:ext uri="{BB962C8B-B14F-4D97-AF65-F5344CB8AC3E}">
-        <p14:creationId xmlns:p14="http://schemas.microsoft.com/office/powerpoint/2010/main" val="1368000890"/>
+        <p14:creationId xmlns:p14="http://schemas.microsoft.com/office/powerpoint/2010/main" val="2868182870"/>
       </p:ext>
     </p:extLst>
   </p:cSld>

--- a/documentation/eapli.framework-Tech-Description.pptx
+++ b/documentation/eapli.framework-Tech-Description.pptx
@@ -5,10 +5,10 @@
     <p:sldMasterId id="2147483900" r:id="rId1"/>
   </p:sldMasterIdLst>
   <p:notesMasterIdLst>
-    <p:notesMasterId r:id="rId55"/>
+    <p:notesMasterId r:id="rId57"/>
   </p:notesMasterIdLst>
   <p:handoutMasterIdLst>
-    <p:handoutMasterId r:id="rId56"/>
+    <p:handoutMasterId r:id="rId58"/>
   </p:handoutMasterIdLst>
   <p:sldIdLst>
     <p:sldId id="367" r:id="rId2"/>
@@ -28,42 +28,44 @@
     <p:sldId id="415" r:id="rId16"/>
     <p:sldId id="377" r:id="rId17"/>
     <p:sldId id="378" r:id="rId18"/>
-    <p:sldId id="434" r:id="rId19"/>
-    <p:sldId id="435" r:id="rId20"/>
-    <p:sldId id="436" r:id="rId21"/>
-    <p:sldId id="379" r:id="rId22"/>
-    <p:sldId id="380" r:id="rId23"/>
-    <p:sldId id="423" r:id="rId24"/>
-    <p:sldId id="430" r:id="rId25"/>
-    <p:sldId id="433" r:id="rId26"/>
-    <p:sldId id="431" r:id="rId27"/>
-    <p:sldId id="422" r:id="rId28"/>
-    <p:sldId id="424" r:id="rId29"/>
-    <p:sldId id="425" r:id="rId30"/>
-    <p:sldId id="426" r:id="rId31"/>
-    <p:sldId id="427" r:id="rId32"/>
-    <p:sldId id="428" r:id="rId33"/>
-    <p:sldId id="429" r:id="rId34"/>
-    <p:sldId id="399" r:id="rId35"/>
-    <p:sldId id="400" r:id="rId36"/>
-    <p:sldId id="409" r:id="rId37"/>
-    <p:sldId id="410" r:id="rId38"/>
-    <p:sldId id="411" r:id="rId39"/>
-    <p:sldId id="413" r:id="rId40"/>
-    <p:sldId id="347" r:id="rId41"/>
-    <p:sldId id="368" r:id="rId42"/>
-    <p:sldId id="335" r:id="rId43"/>
-    <p:sldId id="420" r:id="rId44"/>
-    <p:sldId id="439" r:id="rId45"/>
-    <p:sldId id="421" r:id="rId46"/>
-    <p:sldId id="437" r:id="rId47"/>
-    <p:sldId id="440" r:id="rId48"/>
-    <p:sldId id="438" r:id="rId49"/>
-    <p:sldId id="441" r:id="rId50"/>
-    <p:sldId id="414" r:id="rId51"/>
-    <p:sldId id="350" r:id="rId52"/>
-    <p:sldId id="351" r:id="rId53"/>
-    <p:sldId id="337" r:id="rId54"/>
+    <p:sldId id="444" r:id="rId19"/>
+    <p:sldId id="443" r:id="rId20"/>
+    <p:sldId id="434" r:id="rId21"/>
+    <p:sldId id="435" r:id="rId22"/>
+    <p:sldId id="436" r:id="rId23"/>
+    <p:sldId id="379" r:id="rId24"/>
+    <p:sldId id="380" r:id="rId25"/>
+    <p:sldId id="423" r:id="rId26"/>
+    <p:sldId id="430" r:id="rId27"/>
+    <p:sldId id="433" r:id="rId28"/>
+    <p:sldId id="431" r:id="rId29"/>
+    <p:sldId id="422" r:id="rId30"/>
+    <p:sldId id="424" r:id="rId31"/>
+    <p:sldId id="425" r:id="rId32"/>
+    <p:sldId id="426" r:id="rId33"/>
+    <p:sldId id="427" r:id="rId34"/>
+    <p:sldId id="428" r:id="rId35"/>
+    <p:sldId id="429" r:id="rId36"/>
+    <p:sldId id="399" r:id="rId37"/>
+    <p:sldId id="400" r:id="rId38"/>
+    <p:sldId id="409" r:id="rId39"/>
+    <p:sldId id="410" r:id="rId40"/>
+    <p:sldId id="411" r:id="rId41"/>
+    <p:sldId id="413" r:id="rId42"/>
+    <p:sldId id="347" r:id="rId43"/>
+    <p:sldId id="368" r:id="rId44"/>
+    <p:sldId id="335" r:id="rId45"/>
+    <p:sldId id="420" r:id="rId46"/>
+    <p:sldId id="439" r:id="rId47"/>
+    <p:sldId id="421" r:id="rId48"/>
+    <p:sldId id="437" r:id="rId49"/>
+    <p:sldId id="440" r:id="rId50"/>
+    <p:sldId id="438" r:id="rId51"/>
+    <p:sldId id="441" r:id="rId52"/>
+    <p:sldId id="414" r:id="rId53"/>
+    <p:sldId id="350" r:id="rId54"/>
+    <p:sldId id="351" r:id="rId55"/>
+    <p:sldId id="337" r:id="rId56"/>
   </p:sldIdLst>
   <p:sldSz cx="9144000" cy="6858000" type="screen4x3"/>
   <p:notesSz cx="10234613" cy="7099300"/>
@@ -288,7 +290,7 @@
             <a:fld id="{DF9BBED1-C878-4044-B70F-841416CAC1AE}" type="datetimeFigureOut">
               <a:rPr lang="en-US" smtClean="0"/>
               <a:pPr/>
-              <a:t>6/14/2018</a:t>
+              <a:t>2/25/2019</a:t>
             </a:fld>
             <a:endParaRPr lang="en-US"/>
           </a:p>
@@ -455,7 +457,7 @@
             <a:fld id="{754636F6-6535-4DFB-8291-07E7DDBE6239}" type="datetimeFigureOut">
               <a:rPr lang="pt-PT" smtClean="0"/>
               <a:pPr/>
-              <a:t>14/06/2018</a:t>
+              <a:t>25/02/2019</a:t>
             </a:fld>
             <a:endParaRPr lang="pt-PT"/>
           </a:p>
@@ -1305,7 +1307,7 @@
             <a:fld id="{54F76911-F589-44E9-8155-61F0472246BF}" type="slidenum">
               <a:rPr lang="pt-PT" smtClean="0"/>
               <a:pPr/>
-              <a:t>18</a:t>
+              <a:t>20</a:t>
             </a:fld>
             <a:endParaRPr lang="pt-PT"/>
           </a:p>
@@ -1439,7 +1441,7 @@
             <a:fld id="{54F76911-F589-44E9-8155-61F0472246BF}" type="slidenum">
               <a:rPr lang="pt-PT" smtClean="0"/>
               <a:pPr/>
-              <a:t>19</a:t>
+              <a:t>21</a:t>
             </a:fld>
             <a:endParaRPr lang="pt-PT"/>
           </a:p>
@@ -1524,7 +1526,7 @@
             <a:fld id="{54F76911-F589-44E9-8155-61F0472246BF}" type="slidenum">
               <a:rPr lang="pt-PT" smtClean="0"/>
               <a:pPr/>
-              <a:t>24</a:t>
+              <a:t>26</a:t>
             </a:fld>
             <a:endParaRPr lang="pt-PT"/>
           </a:p>
@@ -1685,7 +1687,7 @@
             <a:fld id="{54F76911-F589-44E9-8155-61F0472246BF}" type="slidenum">
               <a:rPr lang="pt-PT" smtClean="0"/>
               <a:pPr/>
-              <a:t>42</a:t>
+              <a:t>44</a:t>
             </a:fld>
             <a:endParaRPr lang="pt-PT"/>
           </a:p>
@@ -1949,7 +1951,7 @@
             <a:fld id="{1A3222AE-4D74-4601-B435-B179E428ACD9}" type="datetime1">
               <a:rPr lang="pt-PT" smtClean="0"/>
               <a:pPr/>
-              <a:t>14/06/2018</a:t>
+              <a:t>25/02/2019</a:t>
             </a:fld>
             <a:endParaRPr lang="pt-PT"/>
           </a:p>
@@ -2167,7 +2169,7 @@
             <a:fld id="{03643B1D-A57E-46BD-9617-845A2C51AEF7}" type="datetime1">
               <a:rPr lang="pt-PT" smtClean="0"/>
               <a:pPr/>
-              <a:t>14/06/2018</a:t>
+              <a:t>25/02/2019</a:t>
             </a:fld>
             <a:endParaRPr lang="pt-PT"/>
           </a:p>
@@ -2441,7 +2443,7 @@
             <a:fld id="{03643B1D-A57E-46BD-9617-845A2C51AEF7}" type="datetime1">
               <a:rPr lang="pt-PT" smtClean="0"/>
               <a:pPr/>
-              <a:t>14/06/2018</a:t>
+              <a:t>25/02/2019</a:t>
             </a:fld>
             <a:endParaRPr lang="pt-PT"/>
           </a:p>
@@ -2618,7 +2620,7 @@
             <a:fld id="{03643B1D-A57E-46BD-9617-845A2C51AEF7}" type="datetime1">
               <a:rPr lang="pt-PT" smtClean="0"/>
               <a:pPr/>
-              <a:t>14/06/2018</a:t>
+              <a:t>25/02/2019</a:t>
             </a:fld>
             <a:endParaRPr lang="pt-PT"/>
           </a:p>
@@ -2974,7 +2976,7 @@
             <a:fld id="{03643B1D-A57E-46BD-9617-845A2C51AEF7}" type="datetime1">
               <a:rPr lang="pt-PT" smtClean="0"/>
               <a:pPr/>
-              <a:t>14/06/2018</a:t>
+              <a:t>25/02/2019</a:t>
             </a:fld>
             <a:endParaRPr lang="pt-PT"/>
           </a:p>
@@ -3261,7 +3263,7 @@
             <a:fld id="{03643B1D-A57E-46BD-9617-845A2C51AEF7}" type="datetime1">
               <a:rPr lang="pt-PT" smtClean="0"/>
               <a:pPr/>
-              <a:t>14/06/2018</a:t>
+              <a:t>25/02/2019</a:t>
             </a:fld>
             <a:endParaRPr lang="pt-PT"/>
           </a:p>
@@ -3685,7 +3687,7 @@
             <a:fld id="{03643B1D-A57E-46BD-9617-845A2C51AEF7}" type="datetime1">
               <a:rPr lang="pt-PT" smtClean="0"/>
               <a:pPr/>
-              <a:t>14/06/2018</a:t>
+              <a:t>25/02/2019</a:t>
             </a:fld>
             <a:endParaRPr lang="pt-PT"/>
           </a:p>
@@ -3800,7 +3802,7 @@
             <a:fld id="{03643B1D-A57E-46BD-9617-845A2C51AEF7}" type="datetime1">
               <a:rPr lang="pt-PT" smtClean="0"/>
               <a:pPr/>
-              <a:t>14/06/2018</a:t>
+              <a:t>25/02/2019</a:t>
             </a:fld>
             <a:endParaRPr lang="pt-PT"/>
           </a:p>
@@ -3893,7 +3895,7 @@
             <a:fld id="{03643B1D-A57E-46BD-9617-845A2C51AEF7}" type="datetime1">
               <a:rPr lang="pt-PT" smtClean="0"/>
               <a:pPr/>
-              <a:t>14/06/2018</a:t>
+              <a:t>25/02/2019</a:t>
             </a:fld>
             <a:endParaRPr lang="pt-PT"/>
           </a:p>
@@ -4173,7 +4175,7 @@
             <a:fld id="{03643B1D-A57E-46BD-9617-845A2C51AEF7}" type="datetime1">
               <a:rPr lang="pt-PT" smtClean="0"/>
               <a:pPr/>
-              <a:t>14/06/2018</a:t>
+              <a:t>25/02/2019</a:t>
             </a:fld>
             <a:endParaRPr lang="pt-PT"/>
           </a:p>
@@ -4537,7 +4539,7 @@
             <a:fld id="{03643B1D-A57E-46BD-9617-845A2C51AEF7}" type="datetime1">
               <a:rPr lang="pt-PT" smtClean="0"/>
               <a:pPr/>
-              <a:t>14/06/2018</a:t>
+              <a:t>25/02/2019</a:t>
             </a:fld>
             <a:endParaRPr lang="pt-PT"/>
           </a:p>
@@ -4963,7 +4965,7 @@
             <a:fld id="{03643B1D-A57E-46BD-9617-845A2C51AEF7}" type="datetime1">
               <a:rPr lang="pt-PT" smtClean="0"/>
               <a:pPr/>
-              <a:t>14/06/2018</a:t>
+              <a:t>25/02/2019</a:t>
             </a:fld>
             <a:endParaRPr lang="pt-PT"/>
           </a:p>
@@ -5623,13 +5625,8 @@
           <a:p>
             <a:r>
               <a:rPr lang="en-GB" dirty="0"/>
-              <a:t>P</a:t>
-            </a:r>
-            <a:r>
-              <a:rPr lang="en-GB" dirty="0" smtClean="0"/>
-              <a:t>resentation</a:t>
-            </a:r>
-            <a:endParaRPr lang="en-GB" dirty="0"/>
+              <a:t>Presentation</a:t>
+            </a:r>
           </a:p>
         </p:txBody>
       </p:sp>
@@ -6041,11 +6038,7 @@
           <a:p>
             <a:r>
               <a:rPr lang="en-GB" dirty="0"/>
-              <a:t>C</a:t>
-            </a:r>
-            <a:r>
-              <a:rPr lang="en-GB" dirty="0" smtClean="0"/>
-              <a:t>ore</a:t>
+              <a:t>Core</a:t>
             </a:r>
             <a:endParaRPr lang="en-US" dirty="0"/>
           </a:p>
@@ -6067,7 +6060,7 @@
           <a:lstStyle/>
           <a:p>
             <a:r>
-              <a:rPr lang="en-GB" dirty="0" smtClean="0"/>
+              <a:rPr lang="en-GB" dirty="0"/>
               <a:t>Persistence </a:t>
             </a:r>
             <a:endParaRPr lang="en-US" dirty="0"/>
@@ -6144,68 +6137,66 @@
           <a:lstStyle/>
           <a:p>
             <a:r>
-              <a:rPr lang="en-GB" dirty="0" smtClean="0"/>
+              <a:rPr lang="en-GB" dirty="0"/>
               <a:t>Persistence</a:t>
             </a:r>
+          </a:p>
+        </p:txBody>
+      </p:sp>
+      <p:sp>
+        <p:nvSpPr>
+          <p:cNvPr id="3" name="Content Placeholder 2"/>
+          <p:cNvSpPr>
+            <a:spLocks noGrp="1"/>
+          </p:cNvSpPr>
+          <p:nvPr>
+            <p:ph sz="half" idx="1"/>
+          </p:nvPr>
+        </p:nvSpPr>
+        <p:spPr/>
+        <p:txBody>
+          <a:bodyPr/>
+          <a:lstStyle/>
+          <a:p>
+            <a:r>
+              <a:rPr lang="en-GB" dirty="0"/>
+              <a:t>Persistence</a:t>
+            </a:r>
+          </a:p>
+          <a:p>
+            <a:pPr lvl="1"/>
+            <a:r>
+              <a:rPr lang="en-GB" dirty="0"/>
+              <a:t>Repository interfaces</a:t>
+            </a:r>
+          </a:p>
+          <a:p>
+            <a:r>
+              <a:rPr lang="en-GB" dirty="0"/>
+              <a:t>Implementations</a:t>
+            </a:r>
+          </a:p>
+          <a:p>
+            <a:pPr lvl="1"/>
+            <a:r>
+              <a:rPr lang="en-GB" dirty="0"/>
+              <a:t>JPA</a:t>
+            </a:r>
+          </a:p>
+          <a:p>
+            <a:pPr lvl="1"/>
+            <a:r>
+              <a:rPr lang="en-GB" dirty="0" err="1"/>
+              <a:t>InMemory</a:t>
+            </a:r>
             <a:endParaRPr lang="en-GB" dirty="0"/>
           </a:p>
-        </p:txBody>
-      </p:sp>
-      <p:sp>
-        <p:nvSpPr>
-          <p:cNvPr id="3" name="Content Placeholder 2"/>
-          <p:cNvSpPr>
-            <a:spLocks noGrp="1"/>
-          </p:cNvSpPr>
-          <p:nvPr>
-            <p:ph sz="half" idx="1"/>
-          </p:nvPr>
-        </p:nvSpPr>
-        <p:spPr/>
-        <p:txBody>
-          <a:bodyPr/>
-          <a:lstStyle/>
-          <a:p>
-            <a:r>
-              <a:rPr lang="en-GB" dirty="0"/>
-              <a:t>Persistence</a:t>
-            </a:r>
-          </a:p>
           <a:p>
             <a:pPr lvl="1"/>
             <a:r>
               <a:rPr lang="en-GB" dirty="0"/>
-              <a:t>Repository interfaces</a:t>
-            </a:r>
-          </a:p>
-          <a:p>
-            <a:r>
-              <a:rPr lang="en-GB" dirty="0"/>
-              <a:t>Implementations</a:t>
-            </a:r>
-          </a:p>
-          <a:p>
-            <a:pPr lvl="1"/>
-            <a:r>
-              <a:rPr lang="en-GB" dirty="0"/>
-              <a:t>JPA</a:t>
-            </a:r>
-          </a:p>
-          <a:p>
-            <a:pPr lvl="1"/>
-            <a:r>
-              <a:rPr lang="en-GB" dirty="0" err="1" smtClean="0"/>
-              <a:t>InMemory</a:t>
-            </a:r>
-            <a:endParaRPr lang="en-GB" dirty="0" smtClean="0"/>
-          </a:p>
-          <a:p>
-            <a:pPr lvl="1"/>
-            <a:r>
-              <a:rPr lang="en-GB" dirty="0" smtClean="0"/>
               <a:t>Spring Data JPA</a:t>
             </a:r>
-            <a:endParaRPr lang="en-GB" dirty="0"/>
           </a:p>
         </p:txBody>
       </p:sp>
@@ -6425,106 +6416,13 @@
       </p:grpSpPr>
       <p:sp>
         <p:nvSpPr>
-          <p:cNvPr id="6" name="Title 5"/>
-          <p:cNvSpPr>
-            <a:spLocks noGrp="1"/>
-          </p:cNvSpPr>
-          <p:nvPr>
-            <p:ph type="title"/>
-          </p:nvPr>
-        </p:nvSpPr>
-        <p:spPr/>
-        <p:txBody>
-          <a:bodyPr/>
-          <a:lstStyle/>
-          <a:p>
-            <a:r>
-              <a:rPr lang="en-GB" dirty="0"/>
-              <a:t>Persistence</a:t>
-            </a:r>
-          </a:p>
-        </p:txBody>
-      </p:sp>
-      <p:sp>
-        <p:nvSpPr>
-          <p:cNvPr id="7" name="Content Placeholder 6"/>
-          <p:cNvSpPr>
-            <a:spLocks noGrp="1"/>
-          </p:cNvSpPr>
-          <p:nvPr>
-            <p:ph idx="1"/>
-          </p:nvPr>
-        </p:nvSpPr>
-        <p:spPr/>
-        <p:txBody>
-          <a:bodyPr>
-            <a:normAutofit lnSpcReduction="10000"/>
-          </a:bodyPr>
-          <a:lstStyle/>
-          <a:p>
-            <a:r>
-              <a:rPr lang="en-GB" dirty="0"/>
-              <a:t>Controller needs to access the repositories</a:t>
-            </a:r>
-          </a:p>
-          <a:p>
-            <a:r>
-              <a:rPr lang="en-GB" dirty="0"/>
-              <a:t>But we have three repository implementations</a:t>
-            </a:r>
-          </a:p>
-          <a:p>
-            <a:pPr lvl="1"/>
-            <a:r>
-              <a:rPr lang="en-GB" dirty="0"/>
-              <a:t>In memory</a:t>
-            </a:r>
-          </a:p>
-          <a:p>
-            <a:pPr lvl="1"/>
-            <a:r>
-              <a:rPr lang="en-GB" dirty="0"/>
-              <a:t>Relational database thru JPA</a:t>
-            </a:r>
-          </a:p>
-          <a:p>
-            <a:pPr lvl="1"/>
-            <a:r>
-              <a:rPr lang="en-GB" dirty="0"/>
-              <a:t>Relational database thru </a:t>
-            </a:r>
-            <a:r>
-              <a:rPr lang="en-GB" dirty="0" err="1"/>
-              <a:t>SpringData</a:t>
-            </a:r>
-            <a:endParaRPr lang="en-GB" dirty="0"/>
-          </a:p>
-          <a:p>
-            <a:r>
-              <a:rPr lang="en-GB" dirty="0"/>
-              <a:t>Hide persistence details from rest of the code</a:t>
-            </a:r>
-          </a:p>
-          <a:p>
-            <a:pPr lvl="1"/>
-            <a:r>
-              <a:rPr lang="en-GB" dirty="0"/>
-              <a:t>Interfaces</a:t>
-            </a:r>
-          </a:p>
-          <a:p>
-            <a:pPr lvl="1"/>
-            <a:r>
-              <a:rPr lang="en-GB" dirty="0" smtClean="0"/>
-              <a:t>Dependency injection or Factories </a:t>
-            </a:r>
-            <a:endParaRPr lang="en-GB" dirty="0"/>
-          </a:p>
-        </p:txBody>
-      </p:sp>
-      <p:sp>
-        <p:nvSpPr>
-          <p:cNvPr id="5" name="Slide Number Placeholder 4"/>
+          <p:cNvPr id="4" name="Slide Number Placeholder 3">
+            <a:extLst>
+              <a:ext uri="{FF2B5EF4-FFF2-40B4-BE49-F238E27FC236}">
+                <a16:creationId xmlns:a16="http://schemas.microsoft.com/office/drawing/2014/main" id="{E0D9B018-F17E-4F2D-9186-89B9F295BEA9}"/>
+              </a:ext>
+            </a:extLst>
+          </p:cNvPr>
           <p:cNvSpPr>
             <a:spLocks noGrp="1"/>
           </p:cNvSpPr>
@@ -6546,10 +6444,143 @@
           </a:p>
         </p:txBody>
       </p:sp>
+      <p:pic>
+        <p:nvPicPr>
+          <p:cNvPr id="6" name="Content Placeholder 5" descr="A screenshot of a cell phone&#10;&#10;Description automatically generated">
+            <a:extLst>
+              <a:ext uri="{FF2B5EF4-FFF2-40B4-BE49-F238E27FC236}">
+                <a16:creationId xmlns:a16="http://schemas.microsoft.com/office/drawing/2014/main" id="{5BB0C27D-AE00-4567-8F81-788604A6FAAE}"/>
+              </a:ext>
+            </a:extLst>
+          </p:cNvPr>
+          <p:cNvPicPr>
+            <a:picLocks noGrp="1" noChangeAspect="1"/>
+          </p:cNvPicPr>
+          <p:nvPr>
+            <p:ph idx="4294967295"/>
+          </p:nvPr>
+        </p:nvPicPr>
+        <p:blipFill rotWithShape="1">
+          <a:blip r:embed="rId2">
+            <a:extLst>
+              <a:ext uri="{28A0092B-C50C-407E-A947-70E740481C1C}">
+                <a14:useLocalDpi xmlns:a14="http://schemas.microsoft.com/office/drawing/2010/main" val="0"/>
+              </a:ext>
+            </a:extLst>
+          </a:blip>
+          <a:srcRect b="18514"/>
+          <a:stretch/>
+        </p:blipFill>
+        <p:spPr>
+          <a:xfrm>
+            <a:off x="-1" y="0"/>
+            <a:ext cx="6007439" cy="6857999"/>
+          </a:xfrm>
+          <a:prstGeom prst="rect">
+            <a:avLst/>
+          </a:prstGeom>
+          <a:solidFill>
+            <a:srgbClr val="FFFFFF">
+              <a:shade val="85000"/>
+            </a:srgbClr>
+          </a:solidFill>
+          <a:ln w="88900" cap="sq">
+            <a:solidFill>
+              <a:srgbClr val="FFFFFF"/>
+            </a:solidFill>
+            <a:miter lim="800000"/>
+          </a:ln>
+          <a:effectLst>
+            <a:outerShdw blurRad="55000" dist="18000" dir="5400000" algn="tl" rotWithShape="0">
+              <a:srgbClr val="000000">
+                <a:alpha val="40000"/>
+              </a:srgbClr>
+            </a:outerShdw>
+          </a:effectLst>
+          <a:scene3d>
+            <a:camera prst="orthographicFront"/>
+            <a:lightRig rig="twoPt" dir="t">
+              <a:rot lat="0" lon="0" rev="7200000"/>
+            </a:lightRig>
+          </a:scene3d>
+          <a:sp3d>
+            <a:bevelT w="25400" h="19050"/>
+            <a:contourClr>
+              <a:srgbClr val="FFFFFF"/>
+            </a:contourClr>
+          </a:sp3d>
+        </p:spPr>
+      </p:pic>
+      <p:pic>
+        <p:nvPicPr>
+          <p:cNvPr id="7" name="Picture 6" descr="A screenshot of a cell phone&#10;&#10;Description automatically generated">
+            <a:extLst>
+              <a:ext uri="{FF2B5EF4-FFF2-40B4-BE49-F238E27FC236}">
+                <a16:creationId xmlns:a16="http://schemas.microsoft.com/office/drawing/2014/main" id="{943E3325-147D-40DA-BB73-6C6BDCA69ADE}"/>
+              </a:ext>
+            </a:extLst>
+          </p:cNvPr>
+          <p:cNvPicPr>
+            <a:picLocks noChangeAspect="1"/>
+          </p:cNvPicPr>
+          <p:nvPr/>
+        </p:nvPicPr>
+        <p:blipFill>
+          <a:blip r:embed="rId3">
+            <a:extLst>
+              <a:ext uri="{28A0092B-C50C-407E-A947-70E740481C1C}">
+                <a14:useLocalDpi xmlns:a14="http://schemas.microsoft.com/office/drawing/2010/main" val="0"/>
+              </a:ext>
+            </a:extLst>
+          </a:blip>
+          <a:stretch>
+            <a:fillRect/>
+          </a:stretch>
+        </p:blipFill>
+        <p:spPr>
+          <a:xfrm>
+            <a:off x="6552220" y="2205675"/>
+            <a:ext cx="2134580" cy="2588576"/>
+          </a:xfrm>
+          <a:prstGeom prst="rect">
+            <a:avLst/>
+          </a:prstGeom>
+          <a:solidFill>
+            <a:srgbClr val="FFFFFF">
+              <a:shade val="85000"/>
+            </a:srgbClr>
+          </a:solidFill>
+          <a:ln w="88900" cap="sq">
+            <a:solidFill>
+              <a:srgbClr val="FFFFFF"/>
+            </a:solidFill>
+            <a:miter lim="800000"/>
+          </a:ln>
+          <a:effectLst>
+            <a:outerShdw blurRad="55000" dist="18000" dir="5400000" algn="tl" rotWithShape="0">
+              <a:srgbClr val="000000">
+                <a:alpha val="40000"/>
+              </a:srgbClr>
+            </a:outerShdw>
+          </a:effectLst>
+          <a:scene3d>
+            <a:camera prst="orthographicFront"/>
+            <a:lightRig rig="twoPt" dir="t">
+              <a:rot lat="0" lon="0" rev="7200000"/>
+            </a:lightRig>
+          </a:scene3d>
+          <a:sp3d>
+            <a:bevelT w="25400" h="19050"/>
+            <a:contourClr>
+              <a:srgbClr val="FFFFFF"/>
+            </a:contourClr>
+          </a:sp3d>
+        </p:spPr>
+      </p:pic>
     </p:spTree>
     <p:extLst>
       <p:ext uri="{BB962C8B-B14F-4D97-AF65-F5344CB8AC3E}">
-        <p14:creationId xmlns:p14="http://schemas.microsoft.com/office/powerpoint/2010/main" val="1703766327"/>
+        <p14:creationId xmlns:p14="http://schemas.microsoft.com/office/powerpoint/2010/main" val="2896551522"/>
       </p:ext>
     </p:extLst>
   </p:cSld>
@@ -6560,6 +6591,129 @@
 </file>
 
 <file path=ppt/slides/slide19.xml><?xml version="1.0" encoding="utf-8"?>
+<p:sld xmlns:a="http://schemas.openxmlformats.org/drawingml/2006/main" xmlns:r="http://schemas.openxmlformats.org/officeDocument/2006/relationships" xmlns:p="http://schemas.openxmlformats.org/presentationml/2006/main" show="0">
+  <p:cSld>
+    <p:spTree>
+      <p:nvGrpSpPr>
+        <p:cNvPr id="1" name=""/>
+        <p:cNvGrpSpPr/>
+        <p:nvPr/>
+      </p:nvGrpSpPr>
+      <p:grpSpPr>
+        <a:xfrm>
+          <a:off x="0" y="0"/>
+          <a:ext cx="0" cy="0"/>
+          <a:chOff x="0" y="0"/>
+          <a:chExt cx="0" cy="0"/>
+        </a:xfrm>
+      </p:grpSpPr>
+      <p:sp>
+        <p:nvSpPr>
+          <p:cNvPr id="2" name="Title 1">
+            <a:extLst>
+              <a:ext uri="{FF2B5EF4-FFF2-40B4-BE49-F238E27FC236}">
+                <a16:creationId xmlns:a16="http://schemas.microsoft.com/office/drawing/2014/main" id="{B17AF113-467E-4548-9A21-B26EA56B45EB}"/>
+              </a:ext>
+            </a:extLst>
+          </p:cNvPr>
+          <p:cNvSpPr>
+            <a:spLocks noGrp="1"/>
+          </p:cNvSpPr>
+          <p:nvPr>
+            <p:ph type="title"/>
+          </p:nvPr>
+        </p:nvSpPr>
+        <p:spPr/>
+        <p:txBody>
+          <a:bodyPr/>
+          <a:lstStyle/>
+          <a:p>
+            <a:endParaRPr lang="pt-PT"/>
+          </a:p>
+        </p:txBody>
+      </p:sp>
+      <p:pic>
+        <p:nvPicPr>
+          <p:cNvPr id="6" name="Content Placeholder 5" descr="A screenshot of a map&#10;&#10;Description automatically generated">
+            <a:extLst>
+              <a:ext uri="{FF2B5EF4-FFF2-40B4-BE49-F238E27FC236}">
+                <a16:creationId xmlns:a16="http://schemas.microsoft.com/office/drawing/2014/main" id="{432C80CB-4453-43C7-AD68-28D9351AD7A6}"/>
+              </a:ext>
+            </a:extLst>
+          </p:cNvPr>
+          <p:cNvPicPr>
+            <a:picLocks noGrp="1" noChangeAspect="1"/>
+          </p:cNvPicPr>
+          <p:nvPr>
+            <p:ph idx="1"/>
+          </p:nvPr>
+        </p:nvPicPr>
+        <p:blipFill>
+          <a:blip r:embed="rId2">
+            <a:extLst>
+              <a:ext uri="{28A0092B-C50C-407E-A947-70E740481C1C}">
+                <a14:useLocalDpi xmlns:a14="http://schemas.microsoft.com/office/drawing/2010/main" val="0"/>
+              </a:ext>
+            </a:extLst>
+          </a:blip>
+          <a:stretch>
+            <a:fillRect/>
+          </a:stretch>
+        </p:blipFill>
+        <p:spPr>
+          <a:xfrm>
+            <a:off x="457200" y="1698626"/>
+            <a:ext cx="7917837" cy="4625975"/>
+          </a:xfrm>
+        </p:spPr>
+      </p:pic>
+      <p:sp>
+        <p:nvSpPr>
+          <p:cNvPr id="4" name="Slide Number Placeholder 3">
+            <a:extLst>
+              <a:ext uri="{FF2B5EF4-FFF2-40B4-BE49-F238E27FC236}">
+                <a16:creationId xmlns:a16="http://schemas.microsoft.com/office/drawing/2014/main" id="{F4F420F3-2C07-4FBF-AFBB-C7545706F582}"/>
+              </a:ext>
+            </a:extLst>
+          </p:cNvPr>
+          <p:cNvSpPr>
+            <a:spLocks noGrp="1"/>
+          </p:cNvSpPr>
+          <p:nvPr>
+            <p:ph type="sldNum" sz="quarter" idx="12"/>
+          </p:nvPr>
+        </p:nvSpPr>
+        <p:spPr/>
+        <p:txBody>
+          <a:bodyPr/>
+          <a:lstStyle/>
+          <a:p>
+            <a:fld id="{024A9932-4E76-455F-8E1A-2CC10C89B014}" type="slidenum">
+              <a:rPr lang="pt-PT" smtClean="0"/>
+              <a:pPr/>
+              <a:t>19</a:t>
+            </a:fld>
+            <a:endParaRPr lang="pt-PT"/>
+          </a:p>
+        </p:txBody>
+      </p:sp>
+    </p:spTree>
+    <p:extLst>
+      <p:ext uri="{BB962C8B-B14F-4D97-AF65-F5344CB8AC3E}">
+        <p14:creationId xmlns:p14="http://schemas.microsoft.com/office/powerpoint/2010/main" val="1471026656"/>
+      </p:ext>
+    </p:extLst>
+  </p:cSld>
+  <p:clrMapOvr>
+    <a:masterClrMapping/>
+  </p:clrMapOvr>
+  <p:transition spd="med">
+    <p:fade/>
+  </p:transition>
+</p:sld>
+</file>
+
+<file path=ppt/slides/slide2.xml><?xml version="1.0" encoding="utf-8"?>
 <p:sld xmlns:a="http://schemas.openxmlformats.org/drawingml/2006/main" xmlns:r="http://schemas.openxmlformats.org/officeDocument/2006/relationships" xmlns:p="http://schemas.openxmlformats.org/presentationml/2006/main">
   <p:cSld>
     <p:spTree>
@@ -6578,6 +6732,94 @@
       </p:grpSpPr>
       <p:sp>
         <p:nvSpPr>
+          <p:cNvPr id="2" name="Title 1"/>
+          <p:cNvSpPr>
+            <a:spLocks noGrp="1"/>
+          </p:cNvSpPr>
+          <p:nvPr>
+            <p:ph type="title"/>
+          </p:nvPr>
+        </p:nvSpPr>
+        <p:spPr/>
+        <p:txBody>
+          <a:bodyPr/>
+          <a:lstStyle/>
+          <a:p>
+            <a:r>
+              <a:rPr lang="en-GB" dirty="0"/>
+              <a:t>What it is</a:t>
+            </a:r>
+            <a:endParaRPr lang="en-US" dirty="0"/>
+          </a:p>
+        </p:txBody>
+      </p:sp>
+      <p:sp>
+        <p:nvSpPr>
+          <p:cNvPr id="3" name="Content Placeholder 2"/>
+          <p:cNvSpPr>
+            <a:spLocks noGrp="1"/>
+          </p:cNvSpPr>
+          <p:nvPr>
+            <p:ph idx="1"/>
+          </p:nvPr>
+        </p:nvSpPr>
+        <p:spPr/>
+        <p:txBody>
+          <a:bodyPr/>
+          <a:lstStyle/>
+          <a:p>
+            <a:r>
+              <a:rPr lang="en-GB" dirty="0"/>
+              <a:t>Standard application framework developed in the scope of the course unit “</a:t>
+            </a:r>
+            <a:r>
+              <a:rPr lang="en-GB" dirty="0" err="1"/>
+              <a:t>Engenharia</a:t>
+            </a:r>
+            <a:r>
+              <a:rPr lang="en-GB" dirty="0"/>
+              <a:t> de </a:t>
+            </a:r>
+            <a:r>
+              <a:rPr lang="en-GB" dirty="0" err="1"/>
+              <a:t>Aplicações</a:t>
+            </a:r>
+            <a:r>
+              <a:rPr lang="en-GB" dirty="0"/>
+              <a:t>” at </a:t>
+            </a:r>
+            <a:r>
+              <a:rPr lang="en-GB" dirty="0" err="1"/>
+              <a:t>Instituto</a:t>
+            </a:r>
+            <a:r>
+              <a:rPr lang="en-GB" dirty="0"/>
+              <a:t> Superior de </a:t>
+            </a:r>
+            <a:r>
+              <a:rPr lang="en-GB" dirty="0" err="1"/>
+              <a:t>Engenharia</a:t>
+            </a:r>
+            <a:r>
+              <a:rPr lang="en-GB" dirty="0"/>
+              <a:t> do Porto </a:t>
+            </a:r>
+            <a:r>
+              <a:rPr lang="en-GB" dirty="0">
+                <a:hlinkClick r:id="rId2"/>
+              </a:rPr>
+              <a:t>http://www.isep.ipp.pt</a:t>
+            </a:r>
+            <a:r>
+              <a:rPr lang="en-GB" dirty="0"/>
+              <a:t> </a:t>
+            </a:r>
+            <a:endParaRPr lang="en-US" dirty="0"/>
+          </a:p>
+        </p:txBody>
+      </p:sp>
+      <p:sp>
+        <p:nvSpPr>
           <p:cNvPr id="4" name="Slide Number Placeholder 3"/>
           <p:cNvSpPr>
             <a:spLocks noGrp="1"/>
@@ -6594,7 +6836,213 @@
             <a:fld id="{024A9932-4E76-455F-8E1A-2CC10C89B014}" type="slidenum">
               <a:rPr lang="pt-PT" smtClean="0"/>
               <a:pPr/>
-              <a:t>19</a:t>
+              <a:t>2</a:t>
+            </a:fld>
+            <a:endParaRPr lang="pt-PT"/>
+          </a:p>
+        </p:txBody>
+      </p:sp>
+    </p:spTree>
+    <p:extLst>
+      <p:ext uri="{BB962C8B-B14F-4D97-AF65-F5344CB8AC3E}">
+        <p14:creationId xmlns:p14="http://schemas.microsoft.com/office/powerpoint/2010/main" val="1881727189"/>
+      </p:ext>
+    </p:extLst>
+  </p:cSld>
+  <p:clrMapOvr>
+    <a:masterClrMapping/>
+  </p:clrMapOvr>
+</p:sld>
+</file>
+
+<file path=ppt/slides/slide20.xml><?xml version="1.0" encoding="utf-8"?>
+<p:sld xmlns:a="http://schemas.openxmlformats.org/drawingml/2006/main" xmlns:r="http://schemas.openxmlformats.org/officeDocument/2006/relationships" xmlns:p="http://schemas.openxmlformats.org/presentationml/2006/main">
+  <p:cSld>
+    <p:spTree>
+      <p:nvGrpSpPr>
+        <p:cNvPr id="1" name=""/>
+        <p:cNvGrpSpPr/>
+        <p:nvPr/>
+      </p:nvGrpSpPr>
+      <p:grpSpPr>
+        <a:xfrm>
+          <a:off x="0" y="0"/>
+          <a:ext cx="0" cy="0"/>
+          <a:chOff x="0" y="0"/>
+          <a:chExt cx="0" cy="0"/>
+        </a:xfrm>
+      </p:grpSpPr>
+      <p:sp>
+        <p:nvSpPr>
+          <p:cNvPr id="6" name="Title 5"/>
+          <p:cNvSpPr>
+            <a:spLocks noGrp="1"/>
+          </p:cNvSpPr>
+          <p:nvPr>
+            <p:ph type="title"/>
+          </p:nvPr>
+        </p:nvSpPr>
+        <p:spPr/>
+        <p:txBody>
+          <a:bodyPr/>
+          <a:lstStyle/>
+          <a:p>
+            <a:r>
+              <a:rPr lang="en-GB" dirty="0"/>
+              <a:t>Persistence</a:t>
+            </a:r>
+          </a:p>
+        </p:txBody>
+      </p:sp>
+      <p:sp>
+        <p:nvSpPr>
+          <p:cNvPr id="7" name="Content Placeholder 6"/>
+          <p:cNvSpPr>
+            <a:spLocks noGrp="1"/>
+          </p:cNvSpPr>
+          <p:nvPr>
+            <p:ph idx="1"/>
+          </p:nvPr>
+        </p:nvSpPr>
+        <p:spPr/>
+        <p:txBody>
+          <a:bodyPr>
+            <a:normAutofit lnSpcReduction="10000"/>
+          </a:bodyPr>
+          <a:lstStyle/>
+          <a:p>
+            <a:r>
+              <a:rPr lang="en-GB" dirty="0"/>
+              <a:t>Controller needs to access the repositories</a:t>
+            </a:r>
+          </a:p>
+          <a:p>
+            <a:r>
+              <a:rPr lang="en-GB" dirty="0"/>
+              <a:t>But we have three repository implementations</a:t>
+            </a:r>
+          </a:p>
+          <a:p>
+            <a:pPr lvl="1"/>
+            <a:r>
+              <a:rPr lang="en-GB" dirty="0"/>
+              <a:t>In memory</a:t>
+            </a:r>
+          </a:p>
+          <a:p>
+            <a:pPr lvl="1"/>
+            <a:r>
+              <a:rPr lang="en-GB" dirty="0"/>
+              <a:t>Relational database thru JPA</a:t>
+            </a:r>
+          </a:p>
+          <a:p>
+            <a:pPr lvl="1"/>
+            <a:r>
+              <a:rPr lang="en-GB" dirty="0"/>
+              <a:t>Relational database thru </a:t>
+            </a:r>
+            <a:r>
+              <a:rPr lang="en-GB" dirty="0" err="1"/>
+              <a:t>SpringData</a:t>
+            </a:r>
+            <a:endParaRPr lang="en-GB" dirty="0"/>
+          </a:p>
+          <a:p>
+            <a:r>
+              <a:rPr lang="en-GB" dirty="0"/>
+              <a:t>Hide persistence details from rest of the code</a:t>
+            </a:r>
+          </a:p>
+          <a:p>
+            <a:pPr lvl="1"/>
+            <a:r>
+              <a:rPr lang="en-GB" dirty="0"/>
+              <a:t>Interfaces</a:t>
+            </a:r>
+          </a:p>
+          <a:p>
+            <a:pPr lvl="1"/>
+            <a:r>
+              <a:rPr lang="en-GB" dirty="0"/>
+              <a:t>Dependency injection or Factories </a:t>
+            </a:r>
+          </a:p>
+        </p:txBody>
+      </p:sp>
+      <p:sp>
+        <p:nvSpPr>
+          <p:cNvPr id="5" name="Slide Number Placeholder 4"/>
+          <p:cNvSpPr>
+            <a:spLocks noGrp="1"/>
+          </p:cNvSpPr>
+          <p:nvPr>
+            <p:ph type="sldNum" sz="quarter" idx="12"/>
+          </p:nvPr>
+        </p:nvSpPr>
+        <p:spPr/>
+        <p:txBody>
+          <a:bodyPr/>
+          <a:lstStyle/>
+          <a:p>
+            <a:fld id="{024A9932-4E76-455F-8E1A-2CC10C89B014}" type="slidenum">
+              <a:rPr lang="pt-PT" smtClean="0"/>
+              <a:pPr/>
+              <a:t>20</a:t>
+            </a:fld>
+            <a:endParaRPr lang="pt-PT"/>
+          </a:p>
+        </p:txBody>
+      </p:sp>
+    </p:spTree>
+    <p:extLst>
+      <p:ext uri="{BB962C8B-B14F-4D97-AF65-F5344CB8AC3E}">
+        <p14:creationId xmlns:p14="http://schemas.microsoft.com/office/powerpoint/2010/main" val="1703766327"/>
+      </p:ext>
+    </p:extLst>
+  </p:cSld>
+  <p:clrMapOvr>
+    <a:masterClrMapping/>
+  </p:clrMapOvr>
+</p:sld>
+</file>
+
+<file path=ppt/slides/slide21.xml><?xml version="1.0" encoding="utf-8"?>
+<p:sld xmlns:a="http://schemas.openxmlformats.org/drawingml/2006/main" xmlns:r="http://schemas.openxmlformats.org/officeDocument/2006/relationships" xmlns:p="http://schemas.openxmlformats.org/presentationml/2006/main">
+  <p:cSld>
+    <p:spTree>
+      <p:nvGrpSpPr>
+        <p:cNvPr id="1" name=""/>
+        <p:cNvGrpSpPr/>
+        <p:nvPr/>
+      </p:nvGrpSpPr>
+      <p:grpSpPr>
+        <a:xfrm>
+          <a:off x="0" y="0"/>
+          <a:ext cx="0" cy="0"/>
+          <a:chOff x="0" y="0"/>
+          <a:chExt cx="0" cy="0"/>
+        </a:xfrm>
+      </p:grpSpPr>
+      <p:sp>
+        <p:nvSpPr>
+          <p:cNvPr id="4" name="Slide Number Placeholder 3"/>
+          <p:cNvSpPr>
+            <a:spLocks noGrp="1"/>
+          </p:cNvSpPr>
+          <p:nvPr>
+            <p:ph type="sldNum" sz="quarter" idx="12"/>
+          </p:nvPr>
+        </p:nvSpPr>
+        <p:spPr/>
+        <p:txBody>
+          <a:bodyPr/>
+          <a:lstStyle/>
+          <a:p>
+            <a:fld id="{024A9932-4E76-455F-8E1A-2CC10C89B014}" type="slidenum">
+              <a:rPr lang="pt-PT" smtClean="0"/>
+              <a:pPr/>
+              <a:t>21</a:t>
             </a:fld>
             <a:endParaRPr lang="pt-PT"/>
           </a:p>
@@ -6637,7 +7085,7 @@
 </p:sld>
 </file>
 
-<file path=ppt/slides/slide2.xml><?xml version="1.0" encoding="utf-8"?>
+<file path=ppt/slides/slide22.xml><?xml version="1.0" encoding="utf-8"?>
 <p:sld xmlns:a="http://schemas.openxmlformats.org/drawingml/2006/main" xmlns:r="http://schemas.openxmlformats.org/officeDocument/2006/relationships" xmlns:p="http://schemas.openxmlformats.org/presentationml/2006/main">
   <p:cSld>
     <p:spTree>
@@ -6666,79 +7114,16 @@
         </p:nvSpPr>
         <p:spPr/>
         <p:txBody>
-          <a:bodyPr/>
-          <a:lstStyle/>
-          <a:p>
-            <a:r>
-              <a:rPr lang="en-GB" dirty="0" smtClean="0"/>
-              <a:t>What it is</a:t>
-            </a:r>
-            <a:endParaRPr lang="en-US" dirty="0"/>
-          </a:p>
-        </p:txBody>
-      </p:sp>
-      <p:sp>
-        <p:nvSpPr>
-          <p:cNvPr id="3" name="Content Placeholder 2"/>
-          <p:cNvSpPr>
-            <a:spLocks noGrp="1"/>
-          </p:cNvSpPr>
-          <p:nvPr>
-            <p:ph idx="1"/>
-          </p:nvPr>
-        </p:nvSpPr>
-        <p:spPr/>
-        <p:txBody>
-          <a:bodyPr/>
-          <a:lstStyle/>
-          <a:p>
-            <a:r>
-              <a:rPr lang="en-GB" dirty="0" smtClean="0"/>
-              <a:t>Standard application framework developed in the scope of the course unit “</a:t>
-            </a:r>
-            <a:r>
-              <a:rPr lang="en-GB" dirty="0" err="1" smtClean="0"/>
-              <a:t>Engenharia</a:t>
-            </a:r>
-            <a:r>
-              <a:rPr lang="en-GB" dirty="0" smtClean="0"/>
-              <a:t> de </a:t>
-            </a:r>
-            <a:r>
-              <a:rPr lang="en-GB" dirty="0" err="1" smtClean="0"/>
-              <a:t>Aplicações</a:t>
-            </a:r>
-            <a:r>
-              <a:rPr lang="en-GB" dirty="0" smtClean="0"/>
-              <a:t>” at </a:t>
-            </a:r>
-            <a:r>
-              <a:rPr lang="en-GB" dirty="0" err="1" smtClean="0"/>
-              <a:t>Instituto</a:t>
-            </a:r>
-            <a:r>
-              <a:rPr lang="en-GB" dirty="0" smtClean="0"/>
-              <a:t> Superior de </a:t>
-            </a:r>
-            <a:r>
-              <a:rPr lang="en-GB" dirty="0" err="1" smtClean="0"/>
-              <a:t>Engenharia</a:t>
-            </a:r>
-            <a:r>
-              <a:rPr lang="en-GB" dirty="0" smtClean="0"/>
-              <a:t> do Porto </a:t>
-            </a:r>
-            <a:r>
-              <a:rPr lang="en-GB" dirty="0" smtClean="0">
-                <a:hlinkClick r:id="rId2"/>
-              </a:rPr>
-              <a:t>http://www.isep.ipp.pt</a:t>
-            </a:r>
-            <a:r>
-              <a:rPr lang="en-GB" dirty="0" smtClean="0"/>
-              <a:t> </a:t>
-            </a:r>
-            <a:endParaRPr lang="en-US" dirty="0"/>
+          <a:bodyPr>
+            <a:normAutofit/>
+          </a:bodyPr>
+          <a:lstStyle/>
+          <a:p>
+            <a:r>
+              <a:rPr lang="en-GB" dirty="0"/>
+              <a:t>Example</a:t>
+            </a:r>
+            <a:endParaRPr lang="pt-PT" dirty="0"/>
           </a:p>
         </p:txBody>
       </p:sp>
@@ -6760,86 +7145,7 @@
             <a:fld id="{024A9932-4E76-455F-8E1A-2CC10C89B014}" type="slidenum">
               <a:rPr lang="pt-PT" smtClean="0"/>
               <a:pPr/>
-              <a:t>2</a:t>
-            </a:fld>
-            <a:endParaRPr lang="pt-PT"/>
-          </a:p>
-        </p:txBody>
-      </p:sp>
-    </p:spTree>
-    <p:extLst>
-      <p:ext uri="{BB962C8B-B14F-4D97-AF65-F5344CB8AC3E}">
-        <p14:creationId xmlns:p14="http://schemas.microsoft.com/office/powerpoint/2010/main" val="1881727189"/>
-      </p:ext>
-    </p:extLst>
-  </p:cSld>
-  <p:clrMapOvr>
-    <a:masterClrMapping/>
-  </p:clrMapOvr>
-</p:sld>
-</file>
-
-<file path=ppt/slides/slide20.xml><?xml version="1.0" encoding="utf-8"?>
-<p:sld xmlns:a="http://schemas.openxmlformats.org/drawingml/2006/main" xmlns:r="http://schemas.openxmlformats.org/officeDocument/2006/relationships" xmlns:p="http://schemas.openxmlformats.org/presentationml/2006/main">
-  <p:cSld>
-    <p:spTree>
-      <p:nvGrpSpPr>
-        <p:cNvPr id="1" name=""/>
-        <p:cNvGrpSpPr/>
-        <p:nvPr/>
-      </p:nvGrpSpPr>
-      <p:grpSpPr>
-        <a:xfrm>
-          <a:off x="0" y="0"/>
-          <a:ext cx="0" cy="0"/>
-          <a:chOff x="0" y="0"/>
-          <a:chExt cx="0" cy="0"/>
-        </a:xfrm>
-      </p:grpSpPr>
-      <p:sp>
-        <p:nvSpPr>
-          <p:cNvPr id="2" name="Title 1"/>
-          <p:cNvSpPr>
-            <a:spLocks noGrp="1"/>
-          </p:cNvSpPr>
-          <p:nvPr>
-            <p:ph type="title"/>
-          </p:nvPr>
-        </p:nvSpPr>
-        <p:spPr/>
-        <p:txBody>
-          <a:bodyPr>
-            <a:normAutofit/>
-          </a:bodyPr>
-          <a:lstStyle/>
-          <a:p>
-            <a:r>
-              <a:rPr lang="en-GB" dirty="0"/>
-              <a:t>Example</a:t>
-            </a:r>
-            <a:endParaRPr lang="pt-PT" dirty="0"/>
-          </a:p>
-        </p:txBody>
-      </p:sp>
-      <p:sp>
-        <p:nvSpPr>
-          <p:cNvPr id="4" name="Slide Number Placeholder 3"/>
-          <p:cNvSpPr>
-            <a:spLocks noGrp="1"/>
-          </p:cNvSpPr>
-          <p:nvPr>
-            <p:ph type="sldNum" sz="quarter" idx="12"/>
-          </p:nvPr>
-        </p:nvSpPr>
-        <p:spPr/>
-        <p:txBody>
-          <a:bodyPr/>
-          <a:lstStyle/>
-          <a:p>
-            <a:fld id="{024A9932-4E76-455F-8E1A-2CC10C89B014}" type="slidenum">
-              <a:rPr lang="pt-PT" smtClean="0"/>
-              <a:pPr/>
-              <a:t>20</a:t>
+              <a:t>22</a:t>
             </a:fld>
             <a:endParaRPr lang="pt-PT"/>
           </a:p>
@@ -6959,278 +7265,6 @@
 </p:sld>
 </file>
 
-<file path=ppt/slides/slide21.xml><?xml version="1.0" encoding="utf-8"?>
-<p:sld xmlns:a="http://schemas.openxmlformats.org/drawingml/2006/main" xmlns:r="http://schemas.openxmlformats.org/officeDocument/2006/relationships" xmlns:p="http://schemas.openxmlformats.org/presentationml/2006/main">
-  <p:cSld>
-    <p:spTree>
-      <p:nvGrpSpPr>
-        <p:cNvPr id="1" name=""/>
-        <p:cNvGrpSpPr/>
-        <p:nvPr/>
-      </p:nvGrpSpPr>
-      <p:grpSpPr>
-        <a:xfrm>
-          <a:off x="0" y="0"/>
-          <a:ext cx="0" cy="0"/>
-          <a:chOff x="0" y="0"/>
-          <a:chExt cx="0" cy="0"/>
-        </a:xfrm>
-      </p:grpSpPr>
-      <p:sp>
-        <p:nvSpPr>
-          <p:cNvPr id="2" name="Title 1"/>
-          <p:cNvSpPr>
-            <a:spLocks noGrp="1"/>
-          </p:cNvSpPr>
-          <p:nvPr>
-            <p:ph type="title"/>
-          </p:nvPr>
-        </p:nvSpPr>
-        <p:spPr/>
-        <p:txBody>
-          <a:bodyPr/>
-          <a:lstStyle/>
-          <a:p>
-            <a:r>
-              <a:rPr lang="en-GB" dirty="0"/>
-              <a:t>In memory Repositories</a:t>
-            </a:r>
-            <a:endParaRPr lang="en-US" dirty="0"/>
-          </a:p>
-        </p:txBody>
-      </p:sp>
-      <p:sp>
-        <p:nvSpPr>
-          <p:cNvPr id="3" name="Content Placeholder 2"/>
-          <p:cNvSpPr>
-            <a:spLocks noGrp="1"/>
-          </p:cNvSpPr>
-          <p:nvPr>
-            <p:ph idx="1"/>
-          </p:nvPr>
-        </p:nvSpPr>
-        <p:spPr/>
-        <p:txBody>
-          <a:bodyPr/>
-          <a:lstStyle/>
-          <a:p>
-            <a:r>
-              <a:rPr lang="en-GB" dirty="0" err="1"/>
-              <a:t>InMemoryBaseRepository</a:t>
-            </a:r>
-            <a:endParaRPr lang="en-GB" dirty="0"/>
-          </a:p>
-          <a:p>
-            <a:r>
-              <a:rPr lang="en-GB" dirty="0" err="1"/>
-              <a:t>InMemoryBaseRepositorywithLongPK</a:t>
-            </a:r>
-            <a:endParaRPr lang="en-GB" dirty="0"/>
-          </a:p>
-          <a:p>
-            <a:endParaRPr lang="en-GB" dirty="0"/>
-          </a:p>
-          <a:p>
-            <a:r>
-              <a:rPr lang="en-GB" b="1" dirty="0"/>
-              <a:t>For pedagogical testing purposes only!</a:t>
-            </a:r>
-            <a:endParaRPr lang="en-US" b="1" dirty="0"/>
-          </a:p>
-        </p:txBody>
-      </p:sp>
-      <p:sp>
-        <p:nvSpPr>
-          <p:cNvPr id="5" name="Slide Number Placeholder 4"/>
-          <p:cNvSpPr>
-            <a:spLocks noGrp="1"/>
-          </p:cNvSpPr>
-          <p:nvPr>
-            <p:ph type="sldNum" sz="quarter" idx="12"/>
-          </p:nvPr>
-        </p:nvSpPr>
-        <p:spPr/>
-        <p:txBody>
-          <a:bodyPr/>
-          <a:lstStyle/>
-          <a:p>
-            <a:fld id="{024A9932-4E76-455F-8E1A-2CC10C89B014}" type="slidenum">
-              <a:rPr lang="pt-PT" smtClean="0"/>
-              <a:pPr/>
-              <a:t>21</a:t>
-            </a:fld>
-            <a:endParaRPr lang="pt-PT"/>
-          </a:p>
-        </p:txBody>
-      </p:sp>
-    </p:spTree>
-    <p:extLst>
-      <p:ext uri="{BB962C8B-B14F-4D97-AF65-F5344CB8AC3E}">
-        <p14:creationId xmlns:p14="http://schemas.microsoft.com/office/powerpoint/2010/main" val="1746043456"/>
-      </p:ext>
-    </p:extLst>
-  </p:cSld>
-  <p:clrMapOvr>
-    <a:masterClrMapping/>
-  </p:clrMapOvr>
-</p:sld>
-</file>
-
-<file path=ppt/slides/slide22.xml><?xml version="1.0" encoding="utf-8"?>
-<p:sld xmlns:a="http://schemas.openxmlformats.org/drawingml/2006/main" xmlns:r="http://schemas.openxmlformats.org/officeDocument/2006/relationships" xmlns:p="http://schemas.openxmlformats.org/presentationml/2006/main">
-  <p:cSld>
-    <p:spTree>
-      <p:nvGrpSpPr>
-        <p:cNvPr id="1" name=""/>
-        <p:cNvGrpSpPr/>
-        <p:nvPr/>
-      </p:nvGrpSpPr>
-      <p:grpSpPr>
-        <a:xfrm>
-          <a:off x="0" y="0"/>
-          <a:ext cx="0" cy="0"/>
-          <a:chOff x="0" y="0"/>
-          <a:chExt cx="0" cy="0"/>
-        </a:xfrm>
-      </p:grpSpPr>
-      <p:sp>
-        <p:nvSpPr>
-          <p:cNvPr id="2" name="Title 1"/>
-          <p:cNvSpPr>
-            <a:spLocks noGrp="1"/>
-          </p:cNvSpPr>
-          <p:nvPr>
-            <p:ph type="title"/>
-          </p:nvPr>
-        </p:nvSpPr>
-        <p:spPr/>
-        <p:txBody>
-          <a:bodyPr/>
-          <a:lstStyle/>
-          <a:p>
-            <a:r>
-              <a:rPr lang="en-GB" dirty="0"/>
-              <a:t>JPA Repositories</a:t>
-            </a:r>
-            <a:endParaRPr lang="en-US" dirty="0"/>
-          </a:p>
-        </p:txBody>
-      </p:sp>
-      <p:sp>
-        <p:nvSpPr>
-          <p:cNvPr id="3" name="Content Placeholder 2"/>
-          <p:cNvSpPr>
-            <a:spLocks noGrp="1"/>
-          </p:cNvSpPr>
-          <p:nvPr>
-            <p:ph idx="1"/>
-          </p:nvPr>
-        </p:nvSpPr>
-        <p:spPr/>
-        <p:txBody>
-          <a:bodyPr>
-            <a:normAutofit fontScale="77500" lnSpcReduction="20000"/>
-          </a:bodyPr>
-          <a:lstStyle/>
-          <a:p>
-            <a:r>
-              <a:rPr lang="en-GB" dirty="0" err="1"/>
-              <a:t>JpaBaseRepository</a:t>
-            </a:r>
-            <a:endParaRPr lang="en-GB" dirty="0"/>
-          </a:p>
-          <a:p>
-            <a:pPr lvl="1"/>
-            <a:r>
-              <a:rPr lang="en-GB" dirty="0"/>
-              <a:t>Generic repository implementation that expects the entity manager factory to be injected by a container, e.g., web server</a:t>
-            </a:r>
-          </a:p>
-          <a:p>
-            <a:r>
-              <a:rPr lang="en-GB" dirty="0" err="1"/>
-              <a:t>JpaNotRunningInContainerBaseRepository</a:t>
-            </a:r>
-            <a:endParaRPr lang="en-GB" dirty="0"/>
-          </a:p>
-          <a:p>
-            <a:pPr lvl="1"/>
-            <a:r>
-              <a:rPr lang="en-GB" dirty="0"/>
-              <a:t>For scenarios where the code is not running in a container but transaction is managed by the outside, e.g., controller</a:t>
-            </a:r>
-          </a:p>
-          <a:p>
-            <a:r>
-              <a:rPr lang="en-GB" dirty="0" err="1"/>
-              <a:t>JpaTransactionalBaseRepository</a:t>
-            </a:r>
-            <a:endParaRPr lang="en-GB" dirty="0"/>
-          </a:p>
-          <a:p>
-            <a:pPr lvl="1"/>
-            <a:r>
-              <a:rPr lang="en-GB" dirty="0"/>
-              <a:t>For scenarios not running in a container but transactions are created and committed by each repository method; the connection is also closed automatically in each method.</a:t>
-            </a:r>
-          </a:p>
-          <a:p>
-            <a:r>
-              <a:rPr lang="en-GB" dirty="0" err="1"/>
-              <a:t>JpaAutoTxRepository</a:t>
-            </a:r>
-            <a:endParaRPr lang="en-GB" dirty="0"/>
-          </a:p>
-          <a:p>
-            <a:pPr lvl="1"/>
-            <a:r>
-              <a:rPr lang="en-GB" dirty="0"/>
-              <a:t>Dual behaviour to either have outside transactional control or explicit transaction in each method</a:t>
-            </a:r>
-          </a:p>
-          <a:p>
-            <a:pPr lvl="1"/>
-            <a:endParaRPr lang="en-US" dirty="0"/>
-          </a:p>
-        </p:txBody>
-      </p:sp>
-      <p:sp>
-        <p:nvSpPr>
-          <p:cNvPr id="5" name="Slide Number Placeholder 4"/>
-          <p:cNvSpPr>
-            <a:spLocks noGrp="1"/>
-          </p:cNvSpPr>
-          <p:nvPr>
-            <p:ph type="sldNum" sz="quarter" idx="12"/>
-          </p:nvPr>
-        </p:nvSpPr>
-        <p:spPr/>
-        <p:txBody>
-          <a:bodyPr/>
-          <a:lstStyle/>
-          <a:p>
-            <a:fld id="{024A9932-4E76-455F-8E1A-2CC10C89B014}" type="slidenum">
-              <a:rPr lang="pt-PT" smtClean="0"/>
-              <a:pPr/>
-              <a:t>22</a:t>
-            </a:fld>
-            <a:endParaRPr lang="pt-PT"/>
-          </a:p>
-        </p:txBody>
-      </p:sp>
-    </p:spTree>
-    <p:extLst>
-      <p:ext uri="{BB962C8B-B14F-4D97-AF65-F5344CB8AC3E}">
-        <p14:creationId xmlns:p14="http://schemas.microsoft.com/office/powerpoint/2010/main" val="3449136498"/>
-      </p:ext>
-    </p:extLst>
-  </p:cSld>
-  <p:clrMapOvr>
-    <a:masterClrMapping/>
-  </p:clrMapOvr>
-</p:sld>
-</file>
-
 <file path=ppt/slides/slide23.xml><?xml version="1.0" encoding="utf-8"?>
 <p:sld xmlns:a="http://schemas.openxmlformats.org/drawingml/2006/main" xmlns:r="http://schemas.openxmlformats.org/officeDocument/2006/relationships" xmlns:p="http://schemas.openxmlformats.org/presentationml/2006/main">
   <p:cSld>
@@ -7264,8 +7298,8 @@
           <a:lstStyle/>
           <a:p>
             <a:r>
-              <a:rPr lang="en-GB" dirty="0" smtClean="0"/>
-              <a:t>Spring Data JPA repositories</a:t>
+              <a:rPr lang="en-GB" dirty="0"/>
+              <a:t>In memory Repositories</a:t>
             </a:r>
             <a:endParaRPr lang="en-US" dirty="0"/>
           </a:p>
@@ -7286,13 +7320,34 @@
           <a:bodyPr/>
           <a:lstStyle/>
           <a:p>
-            <a:endParaRPr lang="en-US"/>
-          </a:p>
-        </p:txBody>
-      </p:sp>
-      <p:sp>
-        <p:nvSpPr>
-          <p:cNvPr id="4" name="Slide Number Placeholder 3"/>
+            <a:r>
+              <a:rPr lang="en-GB" dirty="0" err="1"/>
+              <a:t>InMemoryBaseRepository</a:t>
+            </a:r>
+            <a:endParaRPr lang="en-GB" dirty="0"/>
+          </a:p>
+          <a:p>
+            <a:r>
+              <a:rPr lang="en-GB" dirty="0" err="1"/>
+              <a:t>InMemoryBaseRepositorywithLongPK</a:t>
+            </a:r>
+            <a:endParaRPr lang="en-GB" dirty="0"/>
+          </a:p>
+          <a:p>
+            <a:endParaRPr lang="en-GB" dirty="0"/>
+          </a:p>
+          <a:p>
+            <a:r>
+              <a:rPr lang="en-GB" b="1" dirty="0"/>
+              <a:t>For pedagogical testing purposes only!</a:t>
+            </a:r>
+            <a:endParaRPr lang="en-US" b="1" dirty="0"/>
+          </a:p>
+        </p:txBody>
+      </p:sp>
+      <p:sp>
+        <p:nvSpPr>
+          <p:cNvPr id="5" name="Slide Number Placeholder 4"/>
           <p:cNvSpPr>
             <a:spLocks noGrp="1"/>
           </p:cNvSpPr>
@@ -7317,7 +7372,7 @@
     </p:spTree>
     <p:extLst>
       <p:ext uri="{BB962C8B-B14F-4D97-AF65-F5344CB8AC3E}">
-        <p14:creationId xmlns:p14="http://schemas.microsoft.com/office/powerpoint/2010/main" val="3679903379"/>
+        <p14:creationId xmlns:p14="http://schemas.microsoft.com/office/powerpoint/2010/main" val="1746043456"/>
       </p:ext>
     </p:extLst>
   </p:cSld>
@@ -7361,8 +7416,87 @@
           <a:p>
             <a:r>
               <a:rPr lang="en-GB" dirty="0"/>
-              <a:t>Resources </a:t>
-            </a:r>
+              <a:t>JPA Repositories</a:t>
+            </a:r>
+            <a:endParaRPr lang="en-US" dirty="0"/>
+          </a:p>
+        </p:txBody>
+      </p:sp>
+      <p:sp>
+        <p:nvSpPr>
+          <p:cNvPr id="3" name="Content Placeholder 2"/>
+          <p:cNvSpPr>
+            <a:spLocks noGrp="1"/>
+          </p:cNvSpPr>
+          <p:nvPr>
+            <p:ph idx="1"/>
+          </p:nvPr>
+        </p:nvSpPr>
+        <p:spPr/>
+        <p:txBody>
+          <a:bodyPr>
+            <a:normAutofit fontScale="77500" lnSpcReduction="20000"/>
+          </a:bodyPr>
+          <a:lstStyle/>
+          <a:p>
+            <a:r>
+              <a:rPr lang="en-GB" dirty="0" err="1"/>
+              <a:t>JpaBaseRepository</a:t>
+            </a:r>
+            <a:endParaRPr lang="en-GB" dirty="0"/>
+          </a:p>
+          <a:p>
+            <a:pPr lvl="1"/>
+            <a:r>
+              <a:rPr lang="en-GB" dirty="0"/>
+              <a:t>Generic repository implementation that expects the entity manager factory to be injected by a container, e.g., web server</a:t>
+            </a:r>
+          </a:p>
+          <a:p>
+            <a:r>
+              <a:rPr lang="en-GB" dirty="0" err="1"/>
+              <a:t>JpaNotRunningInContainerBaseRepository</a:t>
+            </a:r>
+            <a:endParaRPr lang="en-GB" dirty="0"/>
+          </a:p>
+          <a:p>
+            <a:pPr lvl="1"/>
+            <a:r>
+              <a:rPr lang="en-GB" dirty="0"/>
+              <a:t>For scenarios where the code is not running in a container but transaction is managed by the outside, e.g., controller</a:t>
+            </a:r>
+          </a:p>
+          <a:p>
+            <a:r>
+              <a:rPr lang="en-GB" dirty="0" err="1"/>
+              <a:t>JpaTransactionalBaseRepository</a:t>
+            </a:r>
+            <a:endParaRPr lang="en-GB" dirty="0"/>
+          </a:p>
+          <a:p>
+            <a:pPr lvl="1"/>
+            <a:r>
+              <a:rPr lang="en-GB" dirty="0"/>
+              <a:t>For scenarios not running in a container but transactions are created and committed by each repository method; the connection is also closed automatically in each method.</a:t>
+            </a:r>
+          </a:p>
+          <a:p>
+            <a:r>
+              <a:rPr lang="en-GB" dirty="0" err="1"/>
+              <a:t>JpaAutoTxRepository</a:t>
+            </a:r>
+            <a:endParaRPr lang="en-GB" dirty="0"/>
+          </a:p>
+          <a:p>
+            <a:pPr lvl="1"/>
+            <a:r>
+              <a:rPr lang="en-GB" dirty="0"/>
+              <a:t>Dual behaviour to either have outside transactional control or explicit transaction in each method</a:t>
+            </a:r>
+          </a:p>
+          <a:p>
+            <a:pPr lvl="1"/>
+            <a:endParaRPr lang="en-US" dirty="0"/>
           </a:p>
         </p:txBody>
       </p:sp>
@@ -7385,6 +7519,178 @@
               <a:rPr lang="pt-PT" smtClean="0"/>
               <a:pPr/>
               <a:t>24</a:t>
+            </a:fld>
+            <a:endParaRPr lang="pt-PT"/>
+          </a:p>
+        </p:txBody>
+      </p:sp>
+    </p:spTree>
+    <p:extLst>
+      <p:ext uri="{BB962C8B-B14F-4D97-AF65-F5344CB8AC3E}">
+        <p14:creationId xmlns:p14="http://schemas.microsoft.com/office/powerpoint/2010/main" val="3449136498"/>
+      </p:ext>
+    </p:extLst>
+  </p:cSld>
+  <p:clrMapOvr>
+    <a:masterClrMapping/>
+  </p:clrMapOvr>
+</p:sld>
+</file>
+
+<file path=ppt/slides/slide25.xml><?xml version="1.0" encoding="utf-8"?>
+<p:sld xmlns:a="http://schemas.openxmlformats.org/drawingml/2006/main" xmlns:r="http://schemas.openxmlformats.org/officeDocument/2006/relationships" xmlns:p="http://schemas.openxmlformats.org/presentationml/2006/main">
+  <p:cSld>
+    <p:spTree>
+      <p:nvGrpSpPr>
+        <p:cNvPr id="1" name=""/>
+        <p:cNvGrpSpPr/>
+        <p:nvPr/>
+      </p:nvGrpSpPr>
+      <p:grpSpPr>
+        <a:xfrm>
+          <a:off x="0" y="0"/>
+          <a:ext cx="0" cy="0"/>
+          <a:chOff x="0" y="0"/>
+          <a:chExt cx="0" cy="0"/>
+        </a:xfrm>
+      </p:grpSpPr>
+      <p:sp>
+        <p:nvSpPr>
+          <p:cNvPr id="2" name="Title 1"/>
+          <p:cNvSpPr>
+            <a:spLocks noGrp="1"/>
+          </p:cNvSpPr>
+          <p:nvPr>
+            <p:ph type="title"/>
+          </p:nvPr>
+        </p:nvSpPr>
+        <p:spPr/>
+        <p:txBody>
+          <a:bodyPr/>
+          <a:lstStyle/>
+          <a:p>
+            <a:r>
+              <a:rPr lang="en-GB" dirty="0"/>
+              <a:t>Spring Data JPA repositories</a:t>
+            </a:r>
+            <a:endParaRPr lang="en-US" dirty="0"/>
+          </a:p>
+        </p:txBody>
+      </p:sp>
+      <p:sp>
+        <p:nvSpPr>
+          <p:cNvPr id="3" name="Content Placeholder 2"/>
+          <p:cNvSpPr>
+            <a:spLocks noGrp="1"/>
+          </p:cNvSpPr>
+          <p:nvPr>
+            <p:ph idx="1"/>
+          </p:nvPr>
+        </p:nvSpPr>
+        <p:spPr/>
+        <p:txBody>
+          <a:bodyPr/>
+          <a:lstStyle/>
+          <a:p>
+            <a:endParaRPr lang="en-US"/>
+          </a:p>
+        </p:txBody>
+      </p:sp>
+      <p:sp>
+        <p:nvSpPr>
+          <p:cNvPr id="4" name="Slide Number Placeholder 3"/>
+          <p:cNvSpPr>
+            <a:spLocks noGrp="1"/>
+          </p:cNvSpPr>
+          <p:nvPr>
+            <p:ph type="sldNum" sz="quarter" idx="12"/>
+          </p:nvPr>
+        </p:nvSpPr>
+        <p:spPr/>
+        <p:txBody>
+          <a:bodyPr/>
+          <a:lstStyle/>
+          <a:p>
+            <a:fld id="{024A9932-4E76-455F-8E1A-2CC10C89B014}" type="slidenum">
+              <a:rPr lang="pt-PT" smtClean="0"/>
+              <a:pPr/>
+              <a:t>25</a:t>
+            </a:fld>
+            <a:endParaRPr lang="pt-PT"/>
+          </a:p>
+        </p:txBody>
+      </p:sp>
+    </p:spTree>
+    <p:extLst>
+      <p:ext uri="{BB962C8B-B14F-4D97-AF65-F5344CB8AC3E}">
+        <p14:creationId xmlns:p14="http://schemas.microsoft.com/office/powerpoint/2010/main" val="3679903379"/>
+      </p:ext>
+    </p:extLst>
+  </p:cSld>
+  <p:clrMapOvr>
+    <a:masterClrMapping/>
+  </p:clrMapOvr>
+</p:sld>
+</file>
+
+<file path=ppt/slides/slide26.xml><?xml version="1.0" encoding="utf-8"?>
+<p:sld xmlns:a="http://schemas.openxmlformats.org/drawingml/2006/main" xmlns:r="http://schemas.openxmlformats.org/officeDocument/2006/relationships" xmlns:p="http://schemas.openxmlformats.org/presentationml/2006/main">
+  <p:cSld>
+    <p:spTree>
+      <p:nvGrpSpPr>
+        <p:cNvPr id="1" name=""/>
+        <p:cNvGrpSpPr/>
+        <p:nvPr/>
+      </p:nvGrpSpPr>
+      <p:grpSpPr>
+        <a:xfrm>
+          <a:off x="0" y="0"/>
+          <a:ext cx="0" cy="0"/>
+          <a:chOff x="0" y="0"/>
+          <a:chExt cx="0" cy="0"/>
+        </a:xfrm>
+      </p:grpSpPr>
+      <p:sp>
+        <p:nvSpPr>
+          <p:cNvPr id="2" name="Title 1"/>
+          <p:cNvSpPr>
+            <a:spLocks noGrp="1"/>
+          </p:cNvSpPr>
+          <p:nvPr>
+            <p:ph type="title"/>
+          </p:nvPr>
+        </p:nvSpPr>
+        <p:spPr/>
+        <p:txBody>
+          <a:bodyPr/>
+          <a:lstStyle/>
+          <a:p>
+            <a:r>
+              <a:rPr lang="en-GB" dirty="0"/>
+              <a:t>Resources </a:t>
+            </a:r>
+          </a:p>
+        </p:txBody>
+      </p:sp>
+      <p:sp>
+        <p:nvSpPr>
+          <p:cNvPr id="5" name="Slide Number Placeholder 4"/>
+          <p:cNvSpPr>
+            <a:spLocks noGrp="1"/>
+          </p:cNvSpPr>
+          <p:nvPr>
+            <p:ph type="sldNum" sz="quarter" idx="12"/>
+          </p:nvPr>
+        </p:nvSpPr>
+        <p:spPr/>
+        <p:txBody>
+          <a:bodyPr/>
+          <a:lstStyle/>
+          <a:p>
+            <a:fld id="{024A9932-4E76-455F-8E1A-2CC10C89B014}" type="slidenum">
+              <a:rPr lang="pt-PT" smtClean="0"/>
+              <a:pPr/>
+              <a:t>26</a:t>
             </a:fld>
             <a:endParaRPr lang="pt-PT"/>
           </a:p>
@@ -7547,202 +7853,6 @@
 </p:sld>
 </file>
 
-<file path=ppt/slides/slide25.xml><?xml version="1.0" encoding="utf-8"?>
-<p:sld xmlns:a="http://schemas.openxmlformats.org/drawingml/2006/main" xmlns:r="http://schemas.openxmlformats.org/officeDocument/2006/relationships" xmlns:p="http://schemas.openxmlformats.org/presentationml/2006/main">
-  <p:cSld>
-    <p:spTree>
-      <p:nvGrpSpPr>
-        <p:cNvPr id="1" name=""/>
-        <p:cNvGrpSpPr/>
-        <p:nvPr/>
-      </p:nvGrpSpPr>
-      <p:grpSpPr>
-        <a:xfrm>
-          <a:off x="0" y="0"/>
-          <a:ext cx="0" cy="0"/>
-          <a:chOff x="0" y="0"/>
-          <a:chExt cx="0" cy="0"/>
-        </a:xfrm>
-      </p:grpSpPr>
-      <p:sp>
-        <p:nvSpPr>
-          <p:cNvPr id="6" name="Title 5"/>
-          <p:cNvSpPr>
-            <a:spLocks noGrp="1"/>
-          </p:cNvSpPr>
-          <p:nvPr>
-            <p:ph type="title"/>
-          </p:nvPr>
-        </p:nvSpPr>
-        <p:spPr/>
-        <p:txBody>
-          <a:bodyPr>
-            <a:normAutofit/>
-          </a:bodyPr>
-          <a:lstStyle/>
-          <a:p>
-            <a:r>
-              <a:rPr lang="en-GB" dirty="0" smtClean="0"/>
-              <a:t>applicationContext.xml</a:t>
-            </a:r>
-            <a:endParaRPr lang="en-US" dirty="0"/>
-          </a:p>
-        </p:txBody>
-      </p:sp>
-      <p:sp>
-        <p:nvSpPr>
-          <p:cNvPr id="7" name="Content Placeholder 6"/>
-          <p:cNvSpPr>
-            <a:spLocks noGrp="1"/>
-          </p:cNvSpPr>
-          <p:nvPr>
-            <p:ph idx="1"/>
-          </p:nvPr>
-        </p:nvSpPr>
-        <p:spPr/>
-        <p:txBody>
-          <a:bodyPr/>
-          <a:lstStyle/>
-          <a:p>
-            <a:endParaRPr lang="en-US"/>
-          </a:p>
-        </p:txBody>
-      </p:sp>
-      <p:sp>
-        <p:nvSpPr>
-          <p:cNvPr id="5" name="Slide Number Placeholder 4"/>
-          <p:cNvSpPr>
-            <a:spLocks noGrp="1"/>
-          </p:cNvSpPr>
-          <p:nvPr>
-            <p:ph type="sldNum" sz="quarter" idx="12"/>
-          </p:nvPr>
-        </p:nvSpPr>
-        <p:spPr/>
-        <p:txBody>
-          <a:bodyPr/>
-          <a:lstStyle/>
-          <a:p>
-            <a:fld id="{024A9932-4E76-455F-8E1A-2CC10C89B014}" type="slidenum">
-              <a:rPr lang="pt-PT" smtClean="0"/>
-              <a:pPr/>
-              <a:t>25</a:t>
-            </a:fld>
-            <a:endParaRPr lang="pt-PT"/>
-          </a:p>
-        </p:txBody>
-      </p:sp>
-    </p:spTree>
-    <p:extLst>
-      <p:ext uri="{BB962C8B-B14F-4D97-AF65-F5344CB8AC3E}">
-        <p14:creationId xmlns:p14="http://schemas.microsoft.com/office/powerpoint/2010/main" val="1017614504"/>
-      </p:ext>
-    </p:extLst>
-  </p:cSld>
-  <p:clrMapOvr>
-    <a:masterClrMapping/>
-  </p:clrMapOvr>
-</p:sld>
-</file>
-
-<file path=ppt/slides/slide26.xml><?xml version="1.0" encoding="utf-8"?>
-<p:sld xmlns:a="http://schemas.openxmlformats.org/drawingml/2006/main" xmlns:r="http://schemas.openxmlformats.org/officeDocument/2006/relationships" xmlns:p="http://schemas.openxmlformats.org/presentationml/2006/main">
-  <p:cSld>
-    <p:spTree>
-      <p:nvGrpSpPr>
-        <p:cNvPr id="1" name=""/>
-        <p:cNvGrpSpPr/>
-        <p:nvPr/>
-      </p:nvGrpSpPr>
-      <p:grpSpPr>
-        <a:xfrm>
-          <a:off x="0" y="0"/>
-          <a:ext cx="0" cy="0"/>
-          <a:chOff x="0" y="0"/>
-          <a:chExt cx="0" cy="0"/>
-        </a:xfrm>
-      </p:grpSpPr>
-      <p:sp>
-        <p:nvSpPr>
-          <p:cNvPr id="6" name="Title 5"/>
-          <p:cNvSpPr>
-            <a:spLocks noGrp="1"/>
-          </p:cNvSpPr>
-          <p:nvPr>
-            <p:ph type="title"/>
-          </p:nvPr>
-        </p:nvSpPr>
-        <p:spPr/>
-        <p:txBody>
-          <a:bodyPr>
-            <a:normAutofit fontScale="90000"/>
-          </a:bodyPr>
-          <a:lstStyle/>
-          <a:p>
-            <a:r>
-              <a:rPr lang="en-GB" dirty="0" smtClean="0"/>
-              <a:t>applicationContext-persistence.xml</a:t>
-            </a:r>
-            <a:endParaRPr lang="en-US" dirty="0"/>
-          </a:p>
-        </p:txBody>
-      </p:sp>
-      <p:sp>
-        <p:nvSpPr>
-          <p:cNvPr id="7" name="Content Placeholder 6"/>
-          <p:cNvSpPr>
-            <a:spLocks noGrp="1"/>
-          </p:cNvSpPr>
-          <p:nvPr>
-            <p:ph idx="1"/>
-          </p:nvPr>
-        </p:nvSpPr>
-        <p:spPr/>
-        <p:txBody>
-          <a:bodyPr/>
-          <a:lstStyle/>
-          <a:p>
-            <a:endParaRPr lang="en-US"/>
-          </a:p>
-        </p:txBody>
-      </p:sp>
-      <p:sp>
-        <p:nvSpPr>
-          <p:cNvPr id="5" name="Slide Number Placeholder 4"/>
-          <p:cNvSpPr>
-            <a:spLocks noGrp="1"/>
-          </p:cNvSpPr>
-          <p:nvPr>
-            <p:ph type="sldNum" sz="quarter" idx="12"/>
-          </p:nvPr>
-        </p:nvSpPr>
-        <p:spPr/>
-        <p:txBody>
-          <a:bodyPr/>
-          <a:lstStyle/>
-          <a:p>
-            <a:fld id="{024A9932-4E76-455F-8E1A-2CC10C89B014}" type="slidenum">
-              <a:rPr lang="pt-PT" smtClean="0"/>
-              <a:pPr/>
-              <a:t>26</a:t>
-            </a:fld>
-            <a:endParaRPr lang="pt-PT"/>
-          </a:p>
-        </p:txBody>
-      </p:sp>
-    </p:spTree>
-    <p:extLst>
-      <p:ext uri="{BB962C8B-B14F-4D97-AF65-F5344CB8AC3E}">
-        <p14:creationId xmlns:p14="http://schemas.microsoft.com/office/powerpoint/2010/main" val="1907279577"/>
-      </p:ext>
-    </p:extLst>
-  </p:cSld>
-  <p:clrMapOvr>
-    <a:masterClrMapping/>
-  </p:clrMapOvr>
-</p:sld>
-</file>
-
 <file path=ppt/slides/slide27.xml><?xml version="1.0" encoding="utf-8"?>
 <p:sld xmlns:a="http://schemas.openxmlformats.org/drawingml/2006/main" xmlns:r="http://schemas.openxmlformats.org/officeDocument/2006/relationships" xmlns:p="http://schemas.openxmlformats.org/presentationml/2006/main">
   <p:cSld>
@@ -7762,7 +7872,7 @@
       </p:grpSpPr>
       <p:sp>
         <p:nvSpPr>
-          <p:cNvPr id="2" name="Title 1"/>
+          <p:cNvPr id="6" name="Title 5"/>
           <p:cNvSpPr>
             <a:spLocks noGrp="1"/>
           </p:cNvSpPr>
@@ -7772,12 +7882,14 @@
         </p:nvSpPr>
         <p:spPr/>
         <p:txBody>
-          <a:bodyPr/>
-          <a:lstStyle/>
-          <a:p>
-            <a:r>
-              <a:rPr lang="en-GB" dirty="0" smtClean="0"/>
-              <a:t>Transaction control</a:t>
+          <a:bodyPr>
+            <a:normAutofit/>
+          </a:bodyPr>
+          <a:lstStyle/>
+          <a:p>
+            <a:r>
+              <a:rPr lang="en-GB" dirty="0"/>
+              <a:t>applicationContext.xml</a:t>
             </a:r>
             <a:endParaRPr lang="en-US" dirty="0"/>
           </a:p>
@@ -7785,7 +7897,7 @@
       </p:sp>
       <p:sp>
         <p:nvSpPr>
-          <p:cNvPr id="3" name="Content Placeholder 2"/>
+          <p:cNvPr id="7" name="Content Placeholder 6"/>
           <p:cNvSpPr>
             <a:spLocks noGrp="1"/>
           </p:cNvSpPr>
@@ -7798,26 +7910,13 @@
           <a:bodyPr/>
           <a:lstStyle/>
           <a:p>
-            <a:r>
-              <a:rPr lang="en-GB" dirty="0" smtClean="0"/>
-              <a:t>Preferably use a container and managed transaction context, e.g., spring</a:t>
-            </a:r>
-          </a:p>
-          <a:p>
-            <a:endParaRPr lang="en-GB" dirty="0"/>
-          </a:p>
-          <a:p>
-            <a:r>
-              <a:rPr lang="en-GB" dirty="0" smtClean="0"/>
-              <a:t>Optionally control the transaction yourself</a:t>
-            </a:r>
-            <a:endParaRPr lang="en-US" dirty="0"/>
-          </a:p>
-        </p:txBody>
-      </p:sp>
-      <p:sp>
-        <p:nvSpPr>
-          <p:cNvPr id="4" name="Slide Number Placeholder 3"/>
+            <a:endParaRPr lang="en-US"/>
+          </a:p>
+        </p:txBody>
+      </p:sp>
+      <p:sp>
+        <p:nvSpPr>
+          <p:cNvPr id="5" name="Slide Number Placeholder 4"/>
           <p:cNvSpPr>
             <a:spLocks noGrp="1"/>
           </p:cNvSpPr>
@@ -7842,7 +7941,7 @@
     </p:spTree>
     <p:extLst>
       <p:ext uri="{BB962C8B-B14F-4D97-AF65-F5344CB8AC3E}">
-        <p14:creationId xmlns:p14="http://schemas.microsoft.com/office/powerpoint/2010/main" val="3792329237"/>
+        <p14:creationId xmlns:p14="http://schemas.microsoft.com/office/powerpoint/2010/main" val="1017614504"/>
       </p:ext>
     </p:extLst>
   </p:cSld>
@@ -7871,7 +7970,7 @@
       </p:grpSpPr>
       <p:sp>
         <p:nvSpPr>
-          <p:cNvPr id="2" name="Title 1"/>
+          <p:cNvPr id="6" name="Title 5"/>
           <p:cNvSpPr>
             <a:spLocks noGrp="1"/>
           </p:cNvSpPr>
@@ -7881,20 +7980,22 @@
         </p:nvSpPr>
         <p:spPr/>
         <p:txBody>
-          <a:bodyPr/>
-          <a:lstStyle/>
-          <a:p>
-            <a:r>
-              <a:rPr lang="en-GB" dirty="0" smtClean="0"/>
-              <a:t>Transaction control #1</a:t>
-            </a:r>
-            <a:endParaRPr lang="pt-PT" dirty="0"/>
-          </a:p>
-        </p:txBody>
-      </p:sp>
-      <p:sp>
-        <p:nvSpPr>
-          <p:cNvPr id="3" name="Content Placeholder 2"/>
+          <a:bodyPr>
+            <a:normAutofit fontScale="90000"/>
+          </a:bodyPr>
+          <a:lstStyle/>
+          <a:p>
+            <a:r>
+              <a:rPr lang="en-GB" dirty="0"/>
+              <a:t>applicationContext-persistence.xml</a:t>
+            </a:r>
+            <a:endParaRPr lang="en-US" dirty="0"/>
+          </a:p>
+        </p:txBody>
+      </p:sp>
+      <p:sp>
+        <p:nvSpPr>
+          <p:cNvPr id="7" name="Content Placeholder 6"/>
           <p:cNvSpPr>
             <a:spLocks noGrp="1"/>
           </p:cNvSpPr>
@@ -7907,42 +8008,13 @@
           <a:bodyPr/>
           <a:lstStyle/>
           <a:p>
-            <a:r>
-              <a:rPr lang="pt-PT" b="1" dirty="0" smtClean="0"/>
-              <a:t>Managed repositories</a:t>
-            </a:r>
-            <a:r>
-              <a:rPr lang="pt-PT" dirty="0" smtClean="0"/>
-              <a:t>, e.g., Spring </a:t>
-            </a:r>
-            <a:r>
-              <a:rPr lang="pt-PT" dirty="0"/>
-              <a:t>Framework</a:t>
-            </a:r>
-          </a:p>
-          <a:p>
-            <a:pPr lvl="1"/>
-            <a:r>
-              <a:rPr lang="pt-PT" dirty="0"/>
-              <a:t>Spring will load the repositories</a:t>
-            </a:r>
-          </a:p>
-          <a:p>
-            <a:pPr lvl="1"/>
-            <a:r>
-              <a:rPr lang="pt-PT" dirty="0"/>
-              <a:t>Spring will control the transactional context</a:t>
-            </a:r>
-          </a:p>
-          <a:p>
-            <a:pPr lvl="1"/>
-            <a:endParaRPr lang="pt-PT" dirty="0"/>
-          </a:p>
-        </p:txBody>
-      </p:sp>
-      <p:sp>
-        <p:nvSpPr>
-          <p:cNvPr id="4" name="Slide Number Placeholder 3"/>
+            <a:endParaRPr lang="en-US"/>
+          </a:p>
+        </p:txBody>
+      </p:sp>
+      <p:sp>
+        <p:nvSpPr>
+          <p:cNvPr id="5" name="Slide Number Placeholder 4"/>
           <p:cNvSpPr>
             <a:spLocks noGrp="1"/>
           </p:cNvSpPr>
@@ -7967,16 +8039,13 @@
     </p:spTree>
     <p:extLst>
       <p:ext uri="{BB962C8B-B14F-4D97-AF65-F5344CB8AC3E}">
-        <p14:creationId xmlns:p14="http://schemas.microsoft.com/office/powerpoint/2010/main" val="2754409186"/>
+        <p14:creationId xmlns:p14="http://schemas.microsoft.com/office/powerpoint/2010/main" val="1907279577"/>
       </p:ext>
     </p:extLst>
   </p:cSld>
   <p:clrMapOvr>
     <a:masterClrMapping/>
   </p:clrMapOvr>
-  <p:transition spd="med">
-    <p:fade/>
-  </p:transition>
 </p:sld>
 </file>
 
@@ -8009,15 +8078,46 @@
         </p:nvSpPr>
         <p:spPr/>
         <p:txBody>
-          <a:bodyPr>
-            <a:noAutofit/>
-          </a:bodyPr>
-          <a:lstStyle/>
-          <a:p>
-            <a:r>
-              <a:rPr lang="pt-PT" sz="2800" dirty="0"/>
-              <a:t>All JPA repositories extend JpaBaseRepository to use spring transactional control</a:t>
-            </a:r>
+          <a:bodyPr/>
+          <a:lstStyle/>
+          <a:p>
+            <a:r>
+              <a:rPr lang="en-GB" dirty="0"/>
+              <a:t>Transaction control</a:t>
+            </a:r>
+            <a:endParaRPr lang="en-US" dirty="0"/>
+          </a:p>
+        </p:txBody>
+      </p:sp>
+      <p:sp>
+        <p:nvSpPr>
+          <p:cNvPr id="3" name="Content Placeholder 2"/>
+          <p:cNvSpPr>
+            <a:spLocks noGrp="1"/>
+          </p:cNvSpPr>
+          <p:nvPr>
+            <p:ph idx="1"/>
+          </p:nvPr>
+        </p:nvSpPr>
+        <p:spPr/>
+        <p:txBody>
+          <a:bodyPr/>
+          <a:lstStyle/>
+          <a:p>
+            <a:r>
+              <a:rPr lang="en-GB" dirty="0"/>
+              <a:t>Preferably use a container and managed transaction context, e.g., spring</a:t>
+            </a:r>
+          </a:p>
+          <a:p>
+            <a:endParaRPr lang="en-GB" dirty="0"/>
+          </a:p>
+          <a:p>
+            <a:r>
+              <a:rPr lang="en-GB" dirty="0"/>
+              <a:t>Optionally control the transaction yourself</a:t>
+            </a:r>
+            <a:endParaRPr lang="en-US" dirty="0"/>
           </a:p>
         </p:txBody>
       </p:sp>
@@ -8040,6 +8140,360 @@
               <a:rPr lang="pt-PT" smtClean="0"/>
               <a:pPr/>
               <a:t>29</a:t>
+            </a:fld>
+            <a:endParaRPr lang="pt-PT"/>
+          </a:p>
+        </p:txBody>
+      </p:sp>
+    </p:spTree>
+    <p:extLst>
+      <p:ext uri="{BB962C8B-B14F-4D97-AF65-F5344CB8AC3E}">
+        <p14:creationId xmlns:p14="http://schemas.microsoft.com/office/powerpoint/2010/main" val="3792329237"/>
+      </p:ext>
+    </p:extLst>
+  </p:cSld>
+  <p:clrMapOvr>
+    <a:masterClrMapping/>
+  </p:clrMapOvr>
+</p:sld>
+</file>
+
+<file path=ppt/slides/slide3.xml><?xml version="1.0" encoding="utf-8"?>
+<p:sld xmlns:a="http://schemas.openxmlformats.org/drawingml/2006/main" xmlns:r="http://schemas.openxmlformats.org/officeDocument/2006/relationships" xmlns:p="http://schemas.openxmlformats.org/presentationml/2006/main">
+  <p:cSld>
+    <p:spTree>
+      <p:nvGrpSpPr>
+        <p:cNvPr id="1" name=""/>
+        <p:cNvGrpSpPr/>
+        <p:nvPr/>
+      </p:nvGrpSpPr>
+      <p:grpSpPr>
+        <a:xfrm>
+          <a:off x="0" y="0"/>
+          <a:ext cx="0" cy="0"/>
+          <a:chOff x="0" y="0"/>
+          <a:chExt cx="0" cy="0"/>
+        </a:xfrm>
+      </p:grpSpPr>
+      <p:sp>
+        <p:nvSpPr>
+          <p:cNvPr id="2" name="Title 1"/>
+          <p:cNvSpPr>
+            <a:spLocks noGrp="1"/>
+          </p:cNvSpPr>
+          <p:nvPr>
+            <p:ph type="title"/>
+          </p:nvPr>
+        </p:nvSpPr>
+        <p:spPr/>
+        <p:txBody>
+          <a:bodyPr/>
+          <a:lstStyle/>
+          <a:p>
+            <a:r>
+              <a:rPr lang="en-GB" dirty="0"/>
+              <a:t>Components </a:t>
+            </a:r>
+            <a:endParaRPr lang="en-US" dirty="0"/>
+          </a:p>
+        </p:txBody>
+      </p:sp>
+      <p:sp>
+        <p:nvSpPr>
+          <p:cNvPr id="3" name="Content Placeholder 2"/>
+          <p:cNvSpPr>
+            <a:spLocks noGrp="1"/>
+          </p:cNvSpPr>
+          <p:nvPr>
+            <p:ph idx="1"/>
+          </p:nvPr>
+        </p:nvSpPr>
+        <p:spPr/>
+        <p:txBody>
+          <a:bodyPr/>
+          <a:lstStyle/>
+          <a:p>
+            <a:r>
+              <a:rPr lang="en-GB" dirty="0"/>
+              <a:t>Core</a:t>
+            </a:r>
+          </a:p>
+          <a:p>
+            <a:pPr lvl="1"/>
+            <a:r>
+              <a:rPr lang="en-GB" dirty="0"/>
+              <a:t>Domain driven design</a:t>
+            </a:r>
+          </a:p>
+          <a:p>
+            <a:pPr lvl="1"/>
+            <a:r>
+              <a:rPr lang="en-GB" dirty="0"/>
+              <a:t>Persistence</a:t>
+            </a:r>
+          </a:p>
+          <a:p>
+            <a:pPr lvl="1"/>
+            <a:r>
+              <a:rPr lang="en-GB" dirty="0"/>
+              <a:t>Utilities</a:t>
+            </a:r>
+          </a:p>
+          <a:p>
+            <a:pPr lvl="1"/>
+            <a:r>
+              <a:rPr lang="en-GB" dirty="0"/>
+              <a:t>Simple Console Presentation framework</a:t>
+            </a:r>
+          </a:p>
+          <a:p>
+            <a:r>
+              <a:rPr lang="en-GB" dirty="0"/>
+              <a:t>Infrastructure </a:t>
+            </a:r>
+            <a:r>
+              <a:rPr lang="en-GB" dirty="0" err="1"/>
+              <a:t>Authz</a:t>
+            </a:r>
+            <a:endParaRPr lang="en-GB" dirty="0"/>
+          </a:p>
+          <a:p>
+            <a:r>
+              <a:rPr lang="en-GB" dirty="0"/>
+              <a:t>Infrastructure Pub/Sub</a:t>
+            </a:r>
+          </a:p>
+          <a:p>
+            <a:pPr lvl="1"/>
+            <a:r>
+              <a:rPr lang="en-GB" dirty="0"/>
+              <a:t>Event publishing and dispatching</a:t>
+            </a:r>
+            <a:endParaRPr lang="en-US" dirty="0"/>
+          </a:p>
+        </p:txBody>
+      </p:sp>
+      <p:sp>
+        <p:nvSpPr>
+          <p:cNvPr id="4" name="Slide Number Placeholder 3"/>
+          <p:cNvSpPr>
+            <a:spLocks noGrp="1"/>
+          </p:cNvSpPr>
+          <p:nvPr>
+            <p:ph type="sldNum" sz="quarter" idx="12"/>
+          </p:nvPr>
+        </p:nvSpPr>
+        <p:spPr/>
+        <p:txBody>
+          <a:bodyPr/>
+          <a:lstStyle/>
+          <a:p>
+            <a:fld id="{024A9932-4E76-455F-8E1A-2CC10C89B014}" type="slidenum">
+              <a:rPr lang="pt-PT" smtClean="0"/>
+              <a:pPr/>
+              <a:t>3</a:t>
+            </a:fld>
+            <a:endParaRPr lang="pt-PT"/>
+          </a:p>
+        </p:txBody>
+      </p:sp>
+    </p:spTree>
+    <p:extLst>
+      <p:ext uri="{BB962C8B-B14F-4D97-AF65-F5344CB8AC3E}">
+        <p14:creationId xmlns:p14="http://schemas.microsoft.com/office/powerpoint/2010/main" val="3205579399"/>
+      </p:ext>
+    </p:extLst>
+  </p:cSld>
+  <p:clrMapOvr>
+    <a:masterClrMapping/>
+  </p:clrMapOvr>
+</p:sld>
+</file>
+
+<file path=ppt/slides/slide30.xml><?xml version="1.0" encoding="utf-8"?>
+<p:sld xmlns:a="http://schemas.openxmlformats.org/drawingml/2006/main" xmlns:r="http://schemas.openxmlformats.org/officeDocument/2006/relationships" xmlns:p="http://schemas.openxmlformats.org/presentationml/2006/main">
+  <p:cSld>
+    <p:spTree>
+      <p:nvGrpSpPr>
+        <p:cNvPr id="1" name=""/>
+        <p:cNvGrpSpPr/>
+        <p:nvPr/>
+      </p:nvGrpSpPr>
+      <p:grpSpPr>
+        <a:xfrm>
+          <a:off x="0" y="0"/>
+          <a:ext cx="0" cy="0"/>
+          <a:chOff x="0" y="0"/>
+          <a:chExt cx="0" cy="0"/>
+        </a:xfrm>
+      </p:grpSpPr>
+      <p:sp>
+        <p:nvSpPr>
+          <p:cNvPr id="2" name="Title 1"/>
+          <p:cNvSpPr>
+            <a:spLocks noGrp="1"/>
+          </p:cNvSpPr>
+          <p:nvPr>
+            <p:ph type="title"/>
+          </p:nvPr>
+        </p:nvSpPr>
+        <p:spPr/>
+        <p:txBody>
+          <a:bodyPr/>
+          <a:lstStyle/>
+          <a:p>
+            <a:r>
+              <a:rPr lang="en-GB" dirty="0"/>
+              <a:t>Transaction control #1</a:t>
+            </a:r>
+            <a:endParaRPr lang="pt-PT" dirty="0"/>
+          </a:p>
+        </p:txBody>
+      </p:sp>
+      <p:sp>
+        <p:nvSpPr>
+          <p:cNvPr id="3" name="Content Placeholder 2"/>
+          <p:cNvSpPr>
+            <a:spLocks noGrp="1"/>
+          </p:cNvSpPr>
+          <p:nvPr>
+            <p:ph idx="1"/>
+          </p:nvPr>
+        </p:nvSpPr>
+        <p:spPr/>
+        <p:txBody>
+          <a:bodyPr/>
+          <a:lstStyle/>
+          <a:p>
+            <a:r>
+              <a:rPr lang="pt-PT" b="1" dirty="0"/>
+              <a:t>Managed repositories</a:t>
+            </a:r>
+            <a:r>
+              <a:rPr lang="pt-PT" dirty="0"/>
+              <a:t>, e.g., Spring Framework</a:t>
+            </a:r>
+          </a:p>
+          <a:p>
+            <a:pPr lvl="1"/>
+            <a:r>
+              <a:rPr lang="pt-PT" dirty="0"/>
+              <a:t>Spring will load the repositories</a:t>
+            </a:r>
+          </a:p>
+          <a:p>
+            <a:pPr lvl="1"/>
+            <a:r>
+              <a:rPr lang="pt-PT" dirty="0"/>
+              <a:t>Spring will control the transactional context</a:t>
+            </a:r>
+          </a:p>
+          <a:p>
+            <a:pPr lvl="1"/>
+            <a:endParaRPr lang="pt-PT" dirty="0"/>
+          </a:p>
+        </p:txBody>
+      </p:sp>
+      <p:sp>
+        <p:nvSpPr>
+          <p:cNvPr id="4" name="Slide Number Placeholder 3"/>
+          <p:cNvSpPr>
+            <a:spLocks noGrp="1"/>
+          </p:cNvSpPr>
+          <p:nvPr>
+            <p:ph type="sldNum" sz="quarter" idx="12"/>
+          </p:nvPr>
+        </p:nvSpPr>
+        <p:spPr/>
+        <p:txBody>
+          <a:bodyPr/>
+          <a:lstStyle/>
+          <a:p>
+            <a:fld id="{024A9932-4E76-455F-8E1A-2CC10C89B014}" type="slidenum">
+              <a:rPr lang="pt-PT" smtClean="0"/>
+              <a:pPr/>
+              <a:t>30</a:t>
+            </a:fld>
+            <a:endParaRPr lang="pt-PT"/>
+          </a:p>
+        </p:txBody>
+      </p:sp>
+    </p:spTree>
+    <p:extLst>
+      <p:ext uri="{BB962C8B-B14F-4D97-AF65-F5344CB8AC3E}">
+        <p14:creationId xmlns:p14="http://schemas.microsoft.com/office/powerpoint/2010/main" val="2754409186"/>
+      </p:ext>
+    </p:extLst>
+  </p:cSld>
+  <p:clrMapOvr>
+    <a:masterClrMapping/>
+  </p:clrMapOvr>
+  <p:transition spd="med">
+    <p:fade/>
+  </p:transition>
+</p:sld>
+</file>
+
+<file path=ppt/slides/slide31.xml><?xml version="1.0" encoding="utf-8"?>
+<p:sld xmlns:a="http://schemas.openxmlformats.org/drawingml/2006/main" xmlns:r="http://schemas.openxmlformats.org/officeDocument/2006/relationships" xmlns:p="http://schemas.openxmlformats.org/presentationml/2006/main">
+  <p:cSld>
+    <p:spTree>
+      <p:nvGrpSpPr>
+        <p:cNvPr id="1" name=""/>
+        <p:cNvGrpSpPr/>
+        <p:nvPr/>
+      </p:nvGrpSpPr>
+      <p:grpSpPr>
+        <a:xfrm>
+          <a:off x="0" y="0"/>
+          <a:ext cx="0" cy="0"/>
+          <a:chOff x="0" y="0"/>
+          <a:chExt cx="0" cy="0"/>
+        </a:xfrm>
+      </p:grpSpPr>
+      <p:sp>
+        <p:nvSpPr>
+          <p:cNvPr id="2" name="Title 1"/>
+          <p:cNvSpPr>
+            <a:spLocks noGrp="1"/>
+          </p:cNvSpPr>
+          <p:nvPr>
+            <p:ph type="title"/>
+          </p:nvPr>
+        </p:nvSpPr>
+        <p:spPr/>
+        <p:txBody>
+          <a:bodyPr>
+            <a:noAutofit/>
+          </a:bodyPr>
+          <a:lstStyle/>
+          <a:p>
+            <a:r>
+              <a:rPr lang="pt-PT" sz="2800" dirty="0"/>
+              <a:t>All JPA repositories extend JpaBaseRepository to use spring transactional control</a:t>
+            </a:r>
+          </a:p>
+        </p:txBody>
+      </p:sp>
+      <p:sp>
+        <p:nvSpPr>
+          <p:cNvPr id="4" name="Slide Number Placeholder 3"/>
+          <p:cNvSpPr>
+            <a:spLocks noGrp="1"/>
+          </p:cNvSpPr>
+          <p:nvPr>
+            <p:ph type="sldNum" sz="quarter" idx="12"/>
+          </p:nvPr>
+        </p:nvSpPr>
+        <p:spPr/>
+        <p:txBody>
+          <a:bodyPr/>
+          <a:lstStyle/>
+          <a:p>
+            <a:fld id="{024A9932-4E76-455F-8E1A-2CC10C89B014}" type="slidenum">
+              <a:rPr lang="pt-PT" smtClean="0"/>
+              <a:pPr/>
+              <a:t>31</a:t>
             </a:fld>
             <a:endParaRPr lang="pt-PT"/>
           </a:p>
@@ -8209,7 +8663,7 @@
 </p:sld>
 </file>
 
-<file path=ppt/slides/slide3.xml><?xml version="1.0" encoding="utf-8"?>
+<file path=ppt/slides/slide32.xml><?xml version="1.0" encoding="utf-8"?>
 <p:sld xmlns:a="http://schemas.openxmlformats.org/drawingml/2006/main" xmlns:r="http://schemas.openxmlformats.org/officeDocument/2006/relationships" xmlns:p="http://schemas.openxmlformats.org/presentationml/2006/main">
   <p:cSld>
     <p:spTree>
@@ -8242,88 +8696,8 @@
           <a:lstStyle/>
           <a:p>
             <a:r>
-              <a:rPr lang="en-GB" dirty="0" smtClean="0"/>
-              <a:t>Components </a:t>
-            </a:r>
-            <a:endParaRPr lang="en-US" dirty="0"/>
-          </a:p>
-        </p:txBody>
-      </p:sp>
-      <p:sp>
-        <p:nvSpPr>
-          <p:cNvPr id="3" name="Content Placeholder 2"/>
-          <p:cNvSpPr>
-            <a:spLocks noGrp="1"/>
-          </p:cNvSpPr>
-          <p:nvPr>
-            <p:ph idx="1"/>
-          </p:nvPr>
-        </p:nvSpPr>
-        <p:spPr/>
-        <p:txBody>
-          <a:bodyPr/>
-          <a:lstStyle/>
-          <a:p>
-            <a:r>
-              <a:rPr lang="en-GB" dirty="0" smtClean="0"/>
-              <a:t>Core</a:t>
-            </a:r>
-          </a:p>
-          <a:p>
-            <a:pPr lvl="1"/>
-            <a:r>
-              <a:rPr lang="en-GB" dirty="0"/>
-              <a:t>Domain driven design</a:t>
-            </a:r>
-          </a:p>
-          <a:p>
-            <a:pPr lvl="1"/>
-            <a:r>
-              <a:rPr lang="en-GB" dirty="0" smtClean="0"/>
-              <a:t>Persistence</a:t>
-            </a:r>
-          </a:p>
-          <a:p>
-            <a:pPr lvl="1"/>
-            <a:r>
-              <a:rPr lang="en-GB" dirty="0" smtClean="0"/>
-              <a:t>Utilities</a:t>
-            </a:r>
-            <a:endParaRPr lang="en-GB" dirty="0"/>
-          </a:p>
-          <a:p>
-            <a:pPr lvl="1"/>
-            <a:r>
-              <a:rPr lang="en-GB" dirty="0" smtClean="0"/>
-              <a:t>Simple Console Presentation framework</a:t>
-            </a:r>
-          </a:p>
-          <a:p>
-            <a:r>
-              <a:rPr lang="en-GB" dirty="0" smtClean="0"/>
-              <a:t>Infrastructure </a:t>
-            </a:r>
-            <a:r>
-              <a:rPr lang="en-GB" dirty="0" err="1" smtClean="0"/>
-              <a:t>Authz</a:t>
-            </a:r>
-            <a:endParaRPr lang="en-GB" dirty="0" smtClean="0"/>
-          </a:p>
-          <a:p>
-            <a:r>
-              <a:rPr lang="en-GB" dirty="0"/>
-              <a:t>Infrastructure </a:t>
-            </a:r>
-            <a:r>
-              <a:rPr lang="en-GB" dirty="0" smtClean="0"/>
-              <a:t>Pub/Sub</a:t>
-            </a:r>
-          </a:p>
-          <a:p>
-            <a:pPr lvl="1"/>
-            <a:r>
-              <a:rPr lang="en-GB" dirty="0" smtClean="0"/>
-              <a:t>Event publishing and dispatching</a:t>
+              <a:rPr lang="en-GB" dirty="0"/>
+              <a:t>Spring Transactional control</a:t>
             </a:r>
             <a:endParaRPr lang="en-US" dirty="0"/>
           </a:p>
@@ -8347,84 +8721,7 @@
             <a:fld id="{024A9932-4E76-455F-8E1A-2CC10C89B014}" type="slidenum">
               <a:rPr lang="pt-PT" smtClean="0"/>
               <a:pPr/>
-              <a:t>3</a:t>
-            </a:fld>
-            <a:endParaRPr lang="pt-PT"/>
-          </a:p>
-        </p:txBody>
-      </p:sp>
-    </p:spTree>
-    <p:extLst>
-      <p:ext uri="{BB962C8B-B14F-4D97-AF65-F5344CB8AC3E}">
-        <p14:creationId xmlns:p14="http://schemas.microsoft.com/office/powerpoint/2010/main" val="3205579399"/>
-      </p:ext>
-    </p:extLst>
-  </p:cSld>
-  <p:clrMapOvr>
-    <a:masterClrMapping/>
-  </p:clrMapOvr>
-</p:sld>
-</file>
-
-<file path=ppt/slides/slide30.xml><?xml version="1.0" encoding="utf-8"?>
-<p:sld xmlns:a="http://schemas.openxmlformats.org/drawingml/2006/main" xmlns:r="http://schemas.openxmlformats.org/officeDocument/2006/relationships" xmlns:p="http://schemas.openxmlformats.org/presentationml/2006/main">
-  <p:cSld>
-    <p:spTree>
-      <p:nvGrpSpPr>
-        <p:cNvPr id="1" name=""/>
-        <p:cNvGrpSpPr/>
-        <p:nvPr/>
-      </p:nvGrpSpPr>
-      <p:grpSpPr>
-        <a:xfrm>
-          <a:off x="0" y="0"/>
-          <a:ext cx="0" cy="0"/>
-          <a:chOff x="0" y="0"/>
-          <a:chExt cx="0" cy="0"/>
-        </a:xfrm>
-      </p:grpSpPr>
-      <p:sp>
-        <p:nvSpPr>
-          <p:cNvPr id="2" name="Title 1"/>
-          <p:cNvSpPr>
-            <a:spLocks noGrp="1"/>
-          </p:cNvSpPr>
-          <p:nvPr>
-            <p:ph type="title"/>
-          </p:nvPr>
-        </p:nvSpPr>
-        <p:spPr/>
-        <p:txBody>
-          <a:bodyPr/>
-          <a:lstStyle/>
-          <a:p>
-            <a:r>
-              <a:rPr lang="en-GB" dirty="0"/>
-              <a:t>Spring Transactional control</a:t>
-            </a:r>
-            <a:endParaRPr lang="en-US" dirty="0"/>
-          </a:p>
-        </p:txBody>
-      </p:sp>
-      <p:sp>
-        <p:nvSpPr>
-          <p:cNvPr id="4" name="Slide Number Placeholder 3"/>
-          <p:cNvSpPr>
-            <a:spLocks noGrp="1"/>
-          </p:cNvSpPr>
-          <p:nvPr>
-            <p:ph type="sldNum" sz="quarter" idx="12"/>
-          </p:nvPr>
-        </p:nvSpPr>
-        <p:spPr/>
-        <p:txBody>
-          <a:bodyPr/>
-          <a:lstStyle/>
-          <a:p>
-            <a:fld id="{024A9932-4E76-455F-8E1A-2CC10C89B014}" type="slidenum">
-              <a:rPr lang="pt-PT" smtClean="0"/>
-              <a:pPr/>
-              <a:t>30</a:t>
+              <a:t>32</a:t>
             </a:fld>
             <a:endParaRPr lang="pt-PT"/>
           </a:p>
@@ -8551,7 +8848,7 @@
 </p:sld>
 </file>
 
-<file path=ppt/slides/slide31.xml><?xml version="1.0" encoding="utf-8"?>
+<file path=ppt/slides/slide33.xml><?xml version="1.0" encoding="utf-8"?>
 <p:sld xmlns:a="http://schemas.openxmlformats.org/drawingml/2006/main" xmlns:r="http://schemas.openxmlformats.org/officeDocument/2006/relationships" xmlns:p="http://schemas.openxmlformats.org/presentationml/2006/main">
   <p:cSld>
     <p:spTree>
@@ -8613,7 +8910,7 @@
             <a:fld id="{024A9932-4E76-455F-8E1A-2CC10C89B014}" type="slidenum">
               <a:rPr lang="pt-PT" smtClean="0"/>
               <a:pPr/>
-              <a:t>31</a:t>
+              <a:t>33</a:t>
             </a:fld>
             <a:endParaRPr lang="pt-PT"/>
           </a:p>
@@ -8740,7 +9037,7 @@
 </p:sld>
 </file>
 
-<file path=ppt/slides/slide32.xml><?xml version="1.0" encoding="utf-8"?>
+<file path=ppt/slides/slide34.xml><?xml version="1.0" encoding="utf-8"?>
 <p:sld xmlns:a="http://schemas.openxmlformats.org/drawingml/2006/main" xmlns:r="http://schemas.openxmlformats.org/officeDocument/2006/relationships" xmlns:p="http://schemas.openxmlformats.org/presentationml/2006/main">
   <p:cSld>
     <p:spTree>
@@ -8802,7 +9099,7 @@
             <a:fld id="{024A9932-4E76-455F-8E1A-2CC10C89B014}" type="slidenum">
               <a:rPr lang="pt-PT" smtClean="0"/>
               <a:pPr/>
-              <a:t>32</a:t>
+              <a:t>34</a:t>
             </a:fld>
             <a:endParaRPr lang="pt-PT"/>
           </a:p>
@@ -8895,7 +9192,7 @@
 </p:sld>
 </file>
 
-<file path=ppt/slides/slide33.xml><?xml version="1.0" encoding="utf-8"?>
+<file path=ppt/slides/slide35.xml><?xml version="1.0" encoding="utf-8"?>
 <p:sld xmlns:a="http://schemas.openxmlformats.org/drawingml/2006/main" xmlns:r="http://schemas.openxmlformats.org/officeDocument/2006/relationships" xmlns:p="http://schemas.openxmlformats.org/presentationml/2006/main">
   <p:cSld>
     <p:spTree>
@@ -8928,7 +9225,7 @@
           <a:lstStyle/>
           <a:p>
             <a:r>
-              <a:rPr lang="en-GB" dirty="0" smtClean="0"/>
+              <a:rPr lang="en-GB" dirty="0"/>
               <a:t>Transaction control #2</a:t>
             </a:r>
             <a:endParaRPr lang="en-US" dirty="0"/>
@@ -8951,11 +9248,11 @@
           <a:lstStyle/>
           <a:p>
             <a:r>
-              <a:rPr lang="en-GB" b="1" dirty="0" smtClean="0"/>
+              <a:rPr lang="en-GB" b="1" dirty="0"/>
               <a:t>Control the transaction yourself </a:t>
             </a:r>
             <a:r>
-              <a:rPr lang="en-GB" dirty="0" smtClean="0"/>
+              <a:rPr lang="en-GB" dirty="0"/>
               <a:t> using helper classes in the persistence package</a:t>
             </a:r>
             <a:endParaRPr lang="en-US" b="1" dirty="0"/>
@@ -8980,7 +9277,7 @@
             <a:fld id="{024A9932-4E76-455F-8E1A-2CC10C89B014}" type="slidenum">
               <a:rPr lang="pt-PT" smtClean="0"/>
               <a:pPr/>
-              <a:t>33</a:t>
+              <a:t>35</a:t>
             </a:fld>
             <a:endParaRPr lang="pt-PT"/>
           </a:p>
@@ -8999,7 +9296,7 @@
 </p:sld>
 </file>
 
-<file path=ppt/slides/slide34.xml><?xml version="1.0" encoding="utf-8"?>
+<file path=ppt/slides/slide36.xml><?xml version="1.0" encoding="utf-8"?>
 <p:sld xmlns:a="http://schemas.openxmlformats.org/drawingml/2006/main" xmlns:r="http://schemas.openxmlformats.org/officeDocument/2006/relationships" xmlns:p="http://schemas.openxmlformats.org/presentationml/2006/main">
   <p:cSld>
     <p:spTree>
@@ -9059,7 +9356,7 @@
             <a:fld id="{024A9932-4E76-455F-8E1A-2CC10C89B014}" type="slidenum">
               <a:rPr lang="pt-PT" smtClean="0"/>
               <a:pPr/>
-              <a:t>34</a:t>
+              <a:t>36</a:t>
             </a:fld>
             <a:endParaRPr lang="pt-PT"/>
           </a:p>
@@ -9146,7 +9443,7 @@
 </p:sld>
 </file>
 
-<file path=ppt/slides/slide35.xml><?xml version="1.0" encoding="utf-8"?>
+<file path=ppt/slides/slide37.xml><?xml version="1.0" encoding="utf-8"?>
 <p:sld xmlns:a="http://schemas.openxmlformats.org/drawingml/2006/main" xmlns:r="http://schemas.openxmlformats.org/officeDocument/2006/relationships" xmlns:p="http://schemas.openxmlformats.org/presentationml/2006/main">
   <p:cSld>
     <p:spTree>
@@ -9255,7 +9552,7 @@
             <a:fld id="{024A9932-4E76-455F-8E1A-2CC10C89B014}" type="slidenum">
               <a:rPr lang="pt-PT" smtClean="0"/>
               <a:pPr/>
-              <a:t>35</a:t>
+              <a:t>37</a:t>
             </a:fld>
             <a:endParaRPr lang="pt-PT"/>
           </a:p>
@@ -9274,7 +9571,7 @@
 </p:sld>
 </file>
 
-<file path=ppt/slides/slide36.xml><?xml version="1.0" encoding="utf-8"?>
+<file path=ppt/slides/slide38.xml><?xml version="1.0" encoding="utf-8"?>
 <p:sld xmlns:a="http://schemas.openxmlformats.org/drawingml/2006/main" xmlns:r="http://schemas.openxmlformats.org/officeDocument/2006/relationships" xmlns:p="http://schemas.openxmlformats.org/presentationml/2006/main">
   <p:cSld>
     <p:spTree>
@@ -9338,7 +9635,7 @@
             <a:fld id="{024A9932-4E76-455F-8E1A-2CC10C89B014}" type="slidenum">
               <a:rPr lang="pt-PT" smtClean="0"/>
               <a:pPr/>
-              <a:t>36</a:t>
+              <a:t>38</a:t>
             </a:fld>
             <a:endParaRPr lang="pt-PT"/>
           </a:p>
@@ -9459,7 +9756,7 @@
 </p:sld>
 </file>
 
-<file path=ppt/slides/slide37.xml><?xml version="1.0" encoding="utf-8"?>
+<file path=ppt/slides/slide39.xml><?xml version="1.0" encoding="utf-8"?>
 <p:sld xmlns:a="http://schemas.openxmlformats.org/drawingml/2006/main" xmlns:r="http://schemas.openxmlformats.org/officeDocument/2006/relationships" xmlns:p="http://schemas.openxmlformats.org/presentationml/2006/main">
   <p:cSld>
     <p:spTree>
@@ -9519,7 +9816,7 @@
             <a:fld id="{024A9932-4E76-455F-8E1A-2CC10C89B014}" type="slidenum">
               <a:rPr lang="pt-PT" smtClean="0"/>
               <a:pPr/>
-              <a:t>37</a:t>
+              <a:t>39</a:t>
             </a:fld>
             <a:endParaRPr lang="pt-PT"/>
           </a:p>
@@ -9572,7 +9869,7 @@
 </p:sld>
 </file>
 
-<file path=ppt/slides/slide38.xml><?xml version="1.0" encoding="utf-8"?>
+<file path=ppt/slides/slide4.xml><?xml version="1.0" encoding="utf-8"?>
 <p:sld xmlns:a="http://schemas.openxmlformats.org/drawingml/2006/main" xmlns:r="http://schemas.openxmlformats.org/officeDocument/2006/relationships" xmlns:p="http://schemas.openxmlformats.org/presentationml/2006/main">
   <p:cSld>
     <p:spTree>
@@ -9601,6 +9898,130 @@
         </p:nvSpPr>
         <p:spPr/>
         <p:txBody>
+          <a:bodyPr/>
+          <a:lstStyle/>
+          <a:p>
+            <a:r>
+              <a:rPr lang="en-GB" dirty="0"/>
+              <a:t>Dependencies</a:t>
+            </a:r>
+            <a:endParaRPr lang="en-US" dirty="0"/>
+          </a:p>
+        </p:txBody>
+      </p:sp>
+      <p:sp>
+        <p:nvSpPr>
+          <p:cNvPr id="3" name="Content Placeholder 2"/>
+          <p:cNvSpPr>
+            <a:spLocks noGrp="1"/>
+          </p:cNvSpPr>
+          <p:nvPr>
+            <p:ph idx="1"/>
+          </p:nvPr>
+        </p:nvSpPr>
+        <p:spPr/>
+        <p:txBody>
+          <a:bodyPr/>
+          <a:lstStyle/>
+          <a:p>
+            <a:r>
+              <a:rPr lang="en-GB" dirty="0"/>
+              <a:t>Java 1.8+</a:t>
+            </a:r>
+          </a:p>
+          <a:p>
+            <a:r>
+              <a:rPr lang="en-GB" dirty="0"/>
+              <a:t>Apache Commons Logging</a:t>
+            </a:r>
+          </a:p>
+          <a:p>
+            <a:r>
+              <a:rPr lang="en-GB" dirty="0"/>
+              <a:t>JPA</a:t>
+            </a:r>
+          </a:p>
+          <a:p>
+            <a:r>
+              <a:rPr lang="en-GB" dirty="0"/>
+              <a:t>Spring Data JPA</a:t>
+            </a:r>
+          </a:p>
+          <a:p>
+            <a:r>
+              <a:rPr lang="en-GB" dirty="0"/>
+              <a:t>Spring Framework dependency injection</a:t>
+            </a:r>
+            <a:endParaRPr lang="en-US" dirty="0"/>
+          </a:p>
+        </p:txBody>
+      </p:sp>
+      <p:sp>
+        <p:nvSpPr>
+          <p:cNvPr id="4" name="Slide Number Placeholder 3"/>
+          <p:cNvSpPr>
+            <a:spLocks noGrp="1"/>
+          </p:cNvSpPr>
+          <p:nvPr>
+            <p:ph type="sldNum" sz="quarter" idx="12"/>
+          </p:nvPr>
+        </p:nvSpPr>
+        <p:spPr/>
+        <p:txBody>
+          <a:bodyPr/>
+          <a:lstStyle/>
+          <a:p>
+            <a:fld id="{024A9932-4E76-455F-8E1A-2CC10C89B014}" type="slidenum">
+              <a:rPr lang="pt-PT" smtClean="0"/>
+              <a:pPr/>
+              <a:t>4</a:t>
+            </a:fld>
+            <a:endParaRPr lang="pt-PT"/>
+          </a:p>
+        </p:txBody>
+      </p:sp>
+    </p:spTree>
+    <p:extLst>
+      <p:ext uri="{BB962C8B-B14F-4D97-AF65-F5344CB8AC3E}">
+        <p14:creationId xmlns:p14="http://schemas.microsoft.com/office/powerpoint/2010/main" val="2447458527"/>
+      </p:ext>
+    </p:extLst>
+  </p:cSld>
+  <p:clrMapOvr>
+    <a:masterClrMapping/>
+  </p:clrMapOvr>
+</p:sld>
+</file>
+
+<file path=ppt/slides/slide40.xml><?xml version="1.0" encoding="utf-8"?>
+<p:sld xmlns:a="http://schemas.openxmlformats.org/drawingml/2006/main" xmlns:r="http://schemas.openxmlformats.org/officeDocument/2006/relationships" xmlns:p="http://schemas.openxmlformats.org/presentationml/2006/main">
+  <p:cSld>
+    <p:spTree>
+      <p:nvGrpSpPr>
+        <p:cNvPr id="1" name=""/>
+        <p:cNvGrpSpPr/>
+        <p:nvPr/>
+      </p:nvGrpSpPr>
+      <p:grpSpPr>
+        <a:xfrm>
+          <a:off x="0" y="0"/>
+          <a:ext cx="0" cy="0"/>
+          <a:chOff x="0" y="0"/>
+          <a:chExt cx="0" cy="0"/>
+        </a:xfrm>
+      </p:grpSpPr>
+      <p:sp>
+        <p:nvSpPr>
+          <p:cNvPr id="2" name="Title 1"/>
+          <p:cNvSpPr>
+            <a:spLocks noGrp="1"/>
+          </p:cNvSpPr>
+          <p:nvPr>
+            <p:ph type="title"/>
+          </p:nvPr>
+        </p:nvSpPr>
+        <p:spPr/>
+        <p:txBody>
           <a:bodyPr>
             <a:normAutofit fontScale="90000"/>
           </a:bodyPr>
@@ -9632,7 +10053,7 @@
             <a:fld id="{024A9932-4E76-455F-8E1A-2CC10C89B014}" type="slidenum">
               <a:rPr lang="pt-PT" smtClean="0"/>
               <a:pPr/>
-              <a:t>38</a:t>
+              <a:t>40</a:t>
             </a:fld>
             <a:endParaRPr lang="pt-PT"/>
           </a:p>
@@ -9685,7 +10106,7 @@
 </p:sld>
 </file>
 
-<file path=ppt/slides/slide39.xml><?xml version="1.0" encoding="utf-8"?>
+<file path=ppt/slides/slide41.xml><?xml version="1.0" encoding="utf-8"?>
 <p:sld xmlns:a="http://schemas.openxmlformats.org/drawingml/2006/main" xmlns:r="http://schemas.openxmlformats.org/officeDocument/2006/relationships" xmlns:p="http://schemas.openxmlformats.org/presentationml/2006/main">
   <p:cSld>
     <p:spTree>
@@ -9718,11 +10139,11 @@
           <a:lstStyle/>
           <a:p>
             <a:r>
-              <a:rPr lang="en-GB" dirty="0" smtClean="0"/>
+              <a:rPr lang="en-GB" dirty="0"/>
               <a:t>Infrastructure </a:t>
             </a:r>
             <a:r>
-              <a:rPr lang="en-GB" dirty="0" err="1" smtClean="0"/>
+              <a:rPr lang="en-GB" dirty="0" err="1"/>
               <a:t>Authz</a:t>
             </a:r>
             <a:endParaRPr lang="en-US" dirty="0"/>
@@ -9766,7 +10187,7 @@
             <a:fld id="{024A9932-4E76-455F-8E1A-2CC10C89B014}" type="slidenum">
               <a:rPr lang="pt-PT" smtClean="0"/>
               <a:pPr/>
-              <a:t>39</a:t>
+              <a:t>41</a:t>
             </a:fld>
             <a:endParaRPr lang="pt-PT"/>
           </a:p>
@@ -9785,7 +10206,7 @@
 </p:sld>
 </file>
 
-<file path=ppt/slides/slide4.xml><?xml version="1.0" encoding="utf-8"?>
+<file path=ppt/slides/slide42.xml><?xml version="1.0" encoding="utf-8"?>
 <p:sld xmlns:a="http://schemas.openxmlformats.org/drawingml/2006/main" xmlns:r="http://schemas.openxmlformats.org/officeDocument/2006/relationships" xmlns:p="http://schemas.openxmlformats.org/presentationml/2006/main">
   <p:cSld>
     <p:spTree>
@@ -9818,59 +10239,8 @@
           <a:lstStyle/>
           <a:p>
             <a:r>
-              <a:rPr lang="en-GB" dirty="0" smtClean="0"/>
-              <a:t>Dependencies</a:t>
-            </a:r>
-            <a:endParaRPr lang="en-US" dirty="0"/>
-          </a:p>
-        </p:txBody>
-      </p:sp>
-      <p:sp>
-        <p:nvSpPr>
-          <p:cNvPr id="3" name="Content Placeholder 2"/>
-          <p:cNvSpPr>
-            <a:spLocks noGrp="1"/>
-          </p:cNvSpPr>
-          <p:nvPr>
-            <p:ph idx="1"/>
-          </p:nvPr>
-        </p:nvSpPr>
-        <p:spPr/>
-        <p:txBody>
-          <a:bodyPr/>
-          <a:lstStyle/>
-          <a:p>
-            <a:r>
-              <a:rPr lang="en-GB" dirty="0" smtClean="0"/>
-              <a:t>Java 1.8+</a:t>
-            </a:r>
-          </a:p>
-          <a:p>
-            <a:r>
-              <a:rPr lang="en-GB" dirty="0" smtClean="0"/>
-              <a:t>Apache </a:t>
-            </a:r>
-            <a:r>
-              <a:rPr lang="en-GB" dirty="0" smtClean="0"/>
-              <a:t>Commons Logging</a:t>
-            </a:r>
-          </a:p>
-          <a:p>
-            <a:r>
-              <a:rPr lang="en-GB" dirty="0" smtClean="0"/>
-              <a:t>JPA</a:t>
-            </a:r>
-          </a:p>
-          <a:p>
-            <a:r>
-              <a:rPr lang="en-GB" dirty="0" smtClean="0"/>
-              <a:t>Spring Data JPA</a:t>
-            </a:r>
-          </a:p>
-          <a:p>
-            <a:r>
-              <a:rPr lang="en-GB" dirty="0" smtClean="0"/>
-              <a:t>Spring Framework dependency injection</a:t>
+              <a:rPr lang="en-GB" dirty="0"/>
+              <a:t>User model</a:t>
             </a:r>
             <a:endParaRPr lang="en-US" dirty="0"/>
           </a:p>
@@ -9894,84 +10264,7 @@
             <a:fld id="{024A9932-4E76-455F-8E1A-2CC10C89B014}" type="slidenum">
               <a:rPr lang="pt-PT" smtClean="0"/>
               <a:pPr/>
-              <a:t>4</a:t>
-            </a:fld>
-            <a:endParaRPr lang="pt-PT"/>
-          </a:p>
-        </p:txBody>
-      </p:sp>
-    </p:spTree>
-    <p:extLst>
-      <p:ext uri="{BB962C8B-B14F-4D97-AF65-F5344CB8AC3E}">
-        <p14:creationId xmlns:p14="http://schemas.microsoft.com/office/powerpoint/2010/main" val="2447458527"/>
-      </p:ext>
-    </p:extLst>
-  </p:cSld>
-  <p:clrMapOvr>
-    <a:masterClrMapping/>
-  </p:clrMapOvr>
-</p:sld>
-</file>
-
-<file path=ppt/slides/slide40.xml><?xml version="1.0" encoding="utf-8"?>
-<p:sld xmlns:a="http://schemas.openxmlformats.org/drawingml/2006/main" xmlns:r="http://schemas.openxmlformats.org/officeDocument/2006/relationships" xmlns:p="http://schemas.openxmlformats.org/presentationml/2006/main">
-  <p:cSld>
-    <p:spTree>
-      <p:nvGrpSpPr>
-        <p:cNvPr id="1" name=""/>
-        <p:cNvGrpSpPr/>
-        <p:nvPr/>
-      </p:nvGrpSpPr>
-      <p:grpSpPr>
-        <a:xfrm>
-          <a:off x="0" y="0"/>
-          <a:ext cx="0" cy="0"/>
-          <a:chOff x="0" y="0"/>
-          <a:chExt cx="0" cy="0"/>
-        </a:xfrm>
-      </p:grpSpPr>
-      <p:sp>
-        <p:nvSpPr>
-          <p:cNvPr id="2" name="Title 1"/>
-          <p:cNvSpPr>
-            <a:spLocks noGrp="1"/>
-          </p:cNvSpPr>
-          <p:nvPr>
-            <p:ph type="title"/>
-          </p:nvPr>
-        </p:nvSpPr>
-        <p:spPr/>
-        <p:txBody>
-          <a:bodyPr/>
-          <a:lstStyle/>
-          <a:p>
-            <a:r>
-              <a:rPr lang="en-GB" dirty="0"/>
-              <a:t>User model</a:t>
-            </a:r>
-            <a:endParaRPr lang="en-US" dirty="0"/>
-          </a:p>
-        </p:txBody>
-      </p:sp>
-      <p:sp>
-        <p:nvSpPr>
-          <p:cNvPr id="4" name="Slide Number Placeholder 3"/>
-          <p:cNvSpPr>
-            <a:spLocks noGrp="1"/>
-          </p:cNvSpPr>
-          <p:nvPr>
-            <p:ph type="sldNum" sz="quarter" idx="12"/>
-          </p:nvPr>
-        </p:nvSpPr>
-        <p:spPr/>
-        <p:txBody>
-          <a:bodyPr/>
-          <a:lstStyle/>
-          <a:p>
-            <a:fld id="{024A9932-4E76-455F-8E1A-2CC10C89B014}" type="slidenum">
-              <a:rPr lang="pt-PT" smtClean="0"/>
-              <a:pPr/>
-              <a:t>40</a:t>
+              <a:t>42</a:t>
             </a:fld>
             <a:endParaRPr lang="pt-PT"/>
           </a:p>
@@ -10047,804 +10340,6 @@
 </p:sld>
 </file>
 
-<file path=ppt/slides/slide41.xml><?xml version="1.0" encoding="utf-8"?>
-<p:sld xmlns:a="http://schemas.openxmlformats.org/drawingml/2006/main" xmlns:r="http://schemas.openxmlformats.org/officeDocument/2006/relationships" xmlns:p="http://schemas.openxmlformats.org/presentationml/2006/main">
-  <p:cSld>
-    <p:spTree>
-      <p:nvGrpSpPr>
-        <p:cNvPr id="1" name=""/>
-        <p:cNvGrpSpPr/>
-        <p:nvPr/>
-      </p:nvGrpSpPr>
-      <p:grpSpPr>
-        <a:xfrm>
-          <a:off x="0" y="0"/>
-          <a:ext cx="0" cy="0"/>
-          <a:chOff x="0" y="0"/>
-          <a:chExt cx="0" cy="0"/>
-        </a:xfrm>
-      </p:grpSpPr>
-      <p:sp>
-        <p:nvSpPr>
-          <p:cNvPr id="2" name="Title 1"/>
-          <p:cNvSpPr>
-            <a:spLocks noGrp="1"/>
-          </p:cNvSpPr>
-          <p:nvPr>
-            <p:ph type="title"/>
-          </p:nvPr>
-        </p:nvSpPr>
-        <p:spPr/>
-        <p:txBody>
-          <a:bodyPr/>
-          <a:lstStyle/>
-          <a:p>
-            <a:r>
-              <a:rPr lang="en-GB" dirty="0"/>
-              <a:t>Domain invariants</a:t>
-            </a:r>
-          </a:p>
-        </p:txBody>
-      </p:sp>
-      <p:sp>
-        <p:nvSpPr>
-          <p:cNvPr id="3" name="Content Placeholder 2"/>
-          <p:cNvSpPr>
-            <a:spLocks noGrp="1"/>
-          </p:cNvSpPr>
-          <p:nvPr>
-            <p:ph idx="1"/>
-          </p:nvPr>
-        </p:nvSpPr>
-        <p:spPr/>
-        <p:style>
-          <a:lnRef idx="1">
-            <a:schemeClr val="accent2"/>
-          </a:lnRef>
-          <a:fillRef idx="2">
-            <a:schemeClr val="accent2"/>
-          </a:fillRef>
-          <a:effectRef idx="1">
-            <a:schemeClr val="accent2"/>
-          </a:effectRef>
-          <a:fontRef idx="minor">
-            <a:schemeClr val="dk1"/>
-          </a:fontRef>
-        </p:style>
-        <p:txBody>
-          <a:bodyPr>
-            <a:noAutofit/>
-          </a:bodyPr>
-          <a:lstStyle/>
-          <a:p>
-            <a:pPr marL="118872" indent="0">
-              <a:buNone/>
-            </a:pPr>
-            <a:endParaRPr lang="en-GB" sz="1600" dirty="0">
-              <a:latin typeface="Courier New" panose="02070309020205020404" pitchFamily="49" charset="0"/>
-              <a:cs typeface="Courier New" panose="02070309020205020404" pitchFamily="49" charset="0"/>
-            </a:endParaRPr>
-          </a:p>
-          <a:p>
-            <a:pPr marL="118872" indent="0">
-              <a:buNone/>
-            </a:pPr>
-            <a:r>
-              <a:rPr lang="en-GB" sz="1600" dirty="0">
-                <a:latin typeface="Courier New" panose="02070309020205020404" pitchFamily="49" charset="0"/>
-                <a:cs typeface="Courier New" panose="02070309020205020404" pitchFamily="49" charset="0"/>
-              </a:rPr>
-              <a:t>@Test</a:t>
-            </a:r>
-          </a:p>
-          <a:p>
-            <a:pPr marL="118872" indent="0">
-              <a:buNone/>
-            </a:pPr>
-            <a:r>
-              <a:rPr lang="en-GB" sz="1600" dirty="0">
-                <a:latin typeface="Courier New" panose="02070309020205020404" pitchFamily="49" charset="0"/>
-                <a:cs typeface="Courier New" panose="02070309020205020404" pitchFamily="49" charset="0"/>
-              </a:rPr>
-              <a:t>public void ensurePasswordHasAtLeastOneDigitAnd6CharactersLong() {</a:t>
-            </a:r>
-          </a:p>
-          <a:p>
-            <a:pPr marL="118872" indent="0">
-              <a:buNone/>
-            </a:pPr>
-            <a:r>
-              <a:rPr lang="en-GB" sz="1600" dirty="0">
-                <a:latin typeface="Courier New" panose="02070309020205020404" pitchFamily="49" charset="0"/>
-                <a:cs typeface="Courier New" panose="02070309020205020404" pitchFamily="49" charset="0"/>
-              </a:rPr>
-              <a:t>	new Password("abcdefgh1");</a:t>
-            </a:r>
-          </a:p>
-          <a:p>
-            <a:pPr marL="118872" indent="0">
-              <a:buNone/>
-            </a:pPr>
-            <a:r>
-              <a:rPr lang="en-GB" sz="1600" dirty="0">
-                <a:latin typeface="Courier New" panose="02070309020205020404" pitchFamily="49" charset="0"/>
-                <a:cs typeface="Courier New" panose="02070309020205020404" pitchFamily="49" charset="0"/>
-              </a:rPr>
-              <a:t>}</a:t>
-            </a:r>
-          </a:p>
-          <a:p>
-            <a:pPr marL="118872" indent="0">
-              <a:buNone/>
-            </a:pPr>
-            <a:endParaRPr lang="en-GB" sz="1600" dirty="0">
-              <a:latin typeface="Courier New" panose="02070309020205020404" pitchFamily="49" charset="0"/>
-              <a:cs typeface="Courier New" panose="02070309020205020404" pitchFamily="49" charset="0"/>
-            </a:endParaRPr>
-          </a:p>
-          <a:p>
-            <a:pPr marL="118872" indent="0">
-              <a:buNone/>
-            </a:pPr>
-            <a:r>
-              <a:rPr lang="en-GB" sz="1600" dirty="0">
-                <a:latin typeface="Courier New" panose="02070309020205020404" pitchFamily="49" charset="0"/>
-                <a:cs typeface="Courier New" panose="02070309020205020404" pitchFamily="49" charset="0"/>
-              </a:rPr>
-              <a:t>@Test(expected = </a:t>
-            </a:r>
-            <a:r>
-              <a:rPr lang="en-GB" sz="1600" dirty="0" err="1">
-                <a:latin typeface="Courier New" panose="02070309020205020404" pitchFamily="49" charset="0"/>
-                <a:cs typeface="Courier New" panose="02070309020205020404" pitchFamily="49" charset="0"/>
-              </a:rPr>
-              <a:t>IllegalArgumentException.class</a:t>
-            </a:r>
-            <a:r>
-              <a:rPr lang="en-GB" sz="1600" dirty="0">
-                <a:latin typeface="Courier New" panose="02070309020205020404" pitchFamily="49" charset="0"/>
-                <a:cs typeface="Courier New" panose="02070309020205020404" pitchFamily="49" charset="0"/>
-              </a:rPr>
-              <a:t>)</a:t>
-            </a:r>
-          </a:p>
-          <a:p>
-            <a:pPr marL="118872" indent="0">
-              <a:buNone/>
-            </a:pPr>
-            <a:r>
-              <a:rPr lang="en-GB" sz="1600" dirty="0">
-                <a:latin typeface="Courier New" panose="02070309020205020404" pitchFamily="49" charset="0"/>
-                <a:cs typeface="Courier New" panose="02070309020205020404" pitchFamily="49" charset="0"/>
-              </a:rPr>
-              <a:t>public void ensurePasswordsSmallerThan6CharactersAreNotAllowed() {</a:t>
-            </a:r>
-          </a:p>
-          <a:p>
-            <a:pPr marL="118872" indent="0">
-              <a:buNone/>
-            </a:pPr>
-            <a:r>
-              <a:rPr lang="en-GB" sz="1600" dirty="0">
-                <a:latin typeface="Courier New" panose="02070309020205020404" pitchFamily="49" charset="0"/>
-                <a:cs typeface="Courier New" panose="02070309020205020404" pitchFamily="49" charset="0"/>
-              </a:rPr>
-              <a:t>	new Password("ab1c");</a:t>
-            </a:r>
-          </a:p>
-          <a:p>
-            <a:pPr marL="118872" indent="0">
-              <a:buNone/>
-            </a:pPr>
-            <a:r>
-              <a:rPr lang="en-GB" sz="1600" dirty="0">
-                <a:latin typeface="Courier New" panose="02070309020205020404" pitchFamily="49" charset="0"/>
-                <a:cs typeface="Courier New" panose="02070309020205020404" pitchFamily="49" charset="0"/>
-              </a:rPr>
-              <a:t>}</a:t>
-            </a:r>
-          </a:p>
-          <a:p>
-            <a:pPr marL="118872" indent="0">
-              <a:buNone/>
-            </a:pPr>
-            <a:endParaRPr lang="en-GB" sz="1600" dirty="0">
-              <a:latin typeface="Courier New" panose="02070309020205020404" pitchFamily="49" charset="0"/>
-              <a:cs typeface="Courier New" panose="02070309020205020404" pitchFamily="49" charset="0"/>
-            </a:endParaRPr>
-          </a:p>
-          <a:p>
-            <a:pPr marL="118872" indent="0">
-              <a:buNone/>
-            </a:pPr>
-            <a:r>
-              <a:rPr lang="en-GB" sz="1600" dirty="0">
-                <a:latin typeface="Courier New" panose="02070309020205020404" pitchFamily="49" charset="0"/>
-                <a:cs typeface="Courier New" panose="02070309020205020404" pitchFamily="49" charset="0"/>
-              </a:rPr>
-              <a:t>@Test(expected = </a:t>
-            </a:r>
-            <a:r>
-              <a:rPr lang="en-GB" sz="1600" dirty="0" err="1">
-                <a:latin typeface="Courier New" panose="02070309020205020404" pitchFamily="49" charset="0"/>
-                <a:cs typeface="Courier New" panose="02070309020205020404" pitchFamily="49" charset="0"/>
-              </a:rPr>
-              <a:t>IllegalArgumentException.class</a:t>
-            </a:r>
-            <a:r>
-              <a:rPr lang="en-GB" sz="1600" dirty="0">
-                <a:latin typeface="Courier New" panose="02070309020205020404" pitchFamily="49" charset="0"/>
-                <a:cs typeface="Courier New" panose="02070309020205020404" pitchFamily="49" charset="0"/>
-              </a:rPr>
-              <a:t>)</a:t>
-            </a:r>
-          </a:p>
-          <a:p>
-            <a:pPr marL="118872" indent="0">
-              <a:buNone/>
-            </a:pPr>
-            <a:r>
-              <a:rPr lang="en-GB" sz="1600" dirty="0">
-                <a:latin typeface="Courier New" panose="02070309020205020404" pitchFamily="49" charset="0"/>
-                <a:cs typeface="Courier New" panose="02070309020205020404" pitchFamily="49" charset="0"/>
-              </a:rPr>
-              <a:t>public void </a:t>
-            </a:r>
-            <a:r>
-              <a:rPr lang="en-GB" sz="1600" dirty="0" err="1">
-                <a:latin typeface="Courier New" panose="02070309020205020404" pitchFamily="49" charset="0"/>
-                <a:cs typeface="Courier New" panose="02070309020205020404" pitchFamily="49" charset="0"/>
-              </a:rPr>
-              <a:t>ensurePasswordsWithoutDigitsAreNotAllowed</a:t>
-            </a:r>
-            <a:r>
-              <a:rPr lang="en-GB" sz="1600" dirty="0">
-                <a:latin typeface="Courier New" panose="02070309020205020404" pitchFamily="49" charset="0"/>
-                <a:cs typeface="Courier New" panose="02070309020205020404" pitchFamily="49" charset="0"/>
-              </a:rPr>
-              <a:t>() {</a:t>
-            </a:r>
-          </a:p>
-          <a:p>
-            <a:pPr marL="118872" indent="0">
-              <a:buNone/>
-            </a:pPr>
-            <a:r>
-              <a:rPr lang="en-GB" sz="1600" dirty="0">
-                <a:latin typeface="Courier New" panose="02070309020205020404" pitchFamily="49" charset="0"/>
-                <a:cs typeface="Courier New" panose="02070309020205020404" pitchFamily="49" charset="0"/>
-              </a:rPr>
-              <a:t>	new Password("</a:t>
-            </a:r>
-            <a:r>
-              <a:rPr lang="en-GB" sz="1600" dirty="0" err="1">
-                <a:latin typeface="Courier New" panose="02070309020205020404" pitchFamily="49" charset="0"/>
-                <a:cs typeface="Courier New" panose="02070309020205020404" pitchFamily="49" charset="0"/>
-              </a:rPr>
-              <a:t>abcdefgh</a:t>
-            </a:r>
-            <a:r>
-              <a:rPr lang="en-GB" sz="1600" dirty="0">
-                <a:latin typeface="Courier New" panose="02070309020205020404" pitchFamily="49" charset="0"/>
-                <a:cs typeface="Courier New" panose="02070309020205020404" pitchFamily="49" charset="0"/>
-              </a:rPr>
-              <a:t>");</a:t>
-            </a:r>
-          </a:p>
-          <a:p>
-            <a:pPr marL="118872" indent="0">
-              <a:buNone/>
-            </a:pPr>
-            <a:r>
-              <a:rPr lang="en-GB" sz="1600" dirty="0">
-                <a:latin typeface="Courier New" panose="02070309020205020404" pitchFamily="49" charset="0"/>
-                <a:cs typeface="Courier New" panose="02070309020205020404" pitchFamily="49" charset="0"/>
-              </a:rPr>
-              <a:t>}</a:t>
-            </a:r>
-          </a:p>
-        </p:txBody>
-      </p:sp>
-      <p:sp>
-        <p:nvSpPr>
-          <p:cNvPr id="5" name="Slide Number Placeholder 4"/>
-          <p:cNvSpPr>
-            <a:spLocks noGrp="1"/>
-          </p:cNvSpPr>
-          <p:nvPr>
-            <p:ph type="sldNum" sz="quarter" idx="12"/>
-          </p:nvPr>
-        </p:nvSpPr>
-        <p:spPr/>
-        <p:txBody>
-          <a:bodyPr/>
-          <a:lstStyle/>
-          <a:p>
-            <a:fld id="{024A9932-4E76-455F-8E1A-2CC10C89B014}" type="slidenum">
-              <a:rPr lang="pt-PT" smtClean="0"/>
-              <a:pPr/>
-              <a:t>41</a:t>
-            </a:fld>
-            <a:endParaRPr lang="pt-PT"/>
-          </a:p>
-        </p:txBody>
-      </p:sp>
-    </p:spTree>
-    <p:extLst>
-      <p:ext uri="{BB962C8B-B14F-4D97-AF65-F5344CB8AC3E}">
-        <p14:creationId xmlns:p14="http://schemas.microsoft.com/office/powerpoint/2010/main" val="1968312242"/>
-      </p:ext>
-    </p:extLst>
-  </p:cSld>
-  <p:clrMapOvr>
-    <a:masterClrMapping/>
-  </p:clrMapOvr>
-</p:sld>
-</file>
-
-<file path=ppt/slides/slide42.xml><?xml version="1.0" encoding="utf-8"?>
-<p:sld xmlns:a="http://schemas.openxmlformats.org/drawingml/2006/main" xmlns:r="http://schemas.openxmlformats.org/officeDocument/2006/relationships" xmlns:p="http://schemas.openxmlformats.org/presentationml/2006/main">
-  <p:cSld>
-    <p:spTree>
-      <p:nvGrpSpPr>
-        <p:cNvPr id="1" name=""/>
-        <p:cNvGrpSpPr/>
-        <p:nvPr/>
-      </p:nvGrpSpPr>
-      <p:grpSpPr>
-        <a:xfrm>
-          <a:off x="0" y="0"/>
-          <a:ext cx="0" cy="0"/>
-          <a:chOff x="0" y="0"/>
-          <a:chExt cx="0" cy="0"/>
-        </a:xfrm>
-      </p:grpSpPr>
-      <p:sp>
-        <p:nvSpPr>
-          <p:cNvPr id="2" name="Title 1"/>
-          <p:cNvSpPr>
-            <a:spLocks noGrp="1"/>
-          </p:cNvSpPr>
-          <p:nvPr>
-            <p:ph type="title"/>
-          </p:nvPr>
-        </p:nvSpPr>
-        <p:spPr/>
-        <p:txBody>
-          <a:bodyPr/>
-          <a:lstStyle/>
-          <a:p>
-            <a:r>
-              <a:rPr lang="en-GB" dirty="0"/>
-              <a:t>Domain</a:t>
-            </a:r>
-          </a:p>
-        </p:txBody>
-      </p:sp>
-      <p:sp>
-        <p:nvSpPr>
-          <p:cNvPr id="3" name="Content Placeholder 2"/>
-          <p:cNvSpPr>
-            <a:spLocks noGrp="1"/>
-          </p:cNvSpPr>
-          <p:nvPr>
-            <p:ph idx="1"/>
-          </p:nvPr>
-        </p:nvSpPr>
-        <p:spPr/>
-        <p:style>
-          <a:lnRef idx="1">
-            <a:schemeClr val="accent2"/>
-          </a:lnRef>
-          <a:fillRef idx="2">
-            <a:schemeClr val="accent2"/>
-          </a:fillRef>
-          <a:effectRef idx="1">
-            <a:schemeClr val="accent2"/>
-          </a:effectRef>
-          <a:fontRef idx="minor">
-            <a:schemeClr val="dk1"/>
-          </a:fontRef>
-        </p:style>
-        <p:txBody>
-          <a:bodyPr>
-            <a:noAutofit/>
-          </a:bodyPr>
-          <a:lstStyle/>
-          <a:p>
-            <a:pPr marL="118872" indent="0">
-              <a:buNone/>
-            </a:pPr>
-            <a:r>
-              <a:rPr lang="en-GB" sz="1400" dirty="0">
-                <a:latin typeface="Courier New" panose="02070309020205020404" pitchFamily="49" charset="0"/>
-                <a:cs typeface="Courier New" panose="02070309020205020404" pitchFamily="49" charset="0"/>
-              </a:rPr>
-              <a:t>public class Password {</a:t>
-            </a:r>
-          </a:p>
-          <a:p>
-            <a:pPr marL="118872" indent="0">
-              <a:buNone/>
-            </a:pPr>
-            <a:endParaRPr lang="en-GB" sz="1400" dirty="0">
-              <a:latin typeface="Courier New" panose="02070309020205020404" pitchFamily="49" charset="0"/>
-              <a:cs typeface="Courier New" panose="02070309020205020404" pitchFamily="49" charset="0"/>
-            </a:endParaRPr>
-          </a:p>
-          <a:p>
-            <a:pPr marL="118872" indent="0">
-              <a:buNone/>
-            </a:pPr>
-            <a:r>
-              <a:rPr lang="en-GB" sz="1400" dirty="0">
-                <a:latin typeface="Courier New" panose="02070309020205020404" pitchFamily="49" charset="0"/>
-                <a:cs typeface="Courier New" panose="02070309020205020404" pitchFamily="49" charset="0"/>
-              </a:rPr>
-              <a:t>…</a:t>
-            </a:r>
-          </a:p>
-          <a:p>
-            <a:pPr marL="118872" indent="0">
-              <a:buNone/>
-            </a:pPr>
-            <a:endParaRPr lang="en-GB" sz="1400" dirty="0">
-              <a:latin typeface="Courier New" panose="02070309020205020404" pitchFamily="49" charset="0"/>
-              <a:cs typeface="Courier New" panose="02070309020205020404" pitchFamily="49" charset="0"/>
-            </a:endParaRPr>
-          </a:p>
-          <a:p>
-            <a:pPr marL="118872" indent="0">
-              <a:buNone/>
-            </a:pPr>
-            <a:r>
-              <a:rPr lang="en-GB" sz="1400" dirty="0">
-                <a:latin typeface="Courier New" panose="02070309020205020404" pitchFamily="49" charset="0"/>
-                <a:cs typeface="Courier New" panose="02070309020205020404" pitchFamily="49" charset="0"/>
-              </a:rPr>
-              <a:t>public Password(String password) {</a:t>
-            </a:r>
-          </a:p>
-          <a:p>
-            <a:pPr marL="118872" indent="0">
-              <a:buNone/>
-            </a:pPr>
-            <a:r>
-              <a:rPr lang="en-GB" sz="1400" dirty="0">
-                <a:latin typeface="Courier New" panose="02070309020205020404" pitchFamily="49" charset="0"/>
-                <a:cs typeface="Courier New" panose="02070309020205020404" pitchFamily="49" charset="0"/>
-              </a:rPr>
-              <a:t>	if (!</a:t>
-            </a:r>
-            <a:r>
-              <a:rPr lang="en-GB" sz="1400" dirty="0" err="1">
-                <a:latin typeface="Courier New" panose="02070309020205020404" pitchFamily="49" charset="0"/>
-                <a:cs typeface="Courier New" panose="02070309020205020404" pitchFamily="49" charset="0"/>
-              </a:rPr>
-              <a:t>meetsMinimumRequirements</a:t>
-            </a:r>
-            <a:r>
-              <a:rPr lang="en-GB" sz="1400" dirty="0">
-                <a:latin typeface="Courier New" panose="02070309020205020404" pitchFamily="49" charset="0"/>
-                <a:cs typeface="Courier New" panose="02070309020205020404" pitchFamily="49" charset="0"/>
-              </a:rPr>
-              <a:t>(password)) {</a:t>
-            </a:r>
-          </a:p>
-          <a:p>
-            <a:pPr marL="118872" indent="0">
-              <a:buNone/>
-            </a:pPr>
-            <a:r>
-              <a:rPr lang="en-GB" sz="1400" dirty="0">
-                <a:latin typeface="Courier New" panose="02070309020205020404" pitchFamily="49" charset="0"/>
-                <a:cs typeface="Courier New" panose="02070309020205020404" pitchFamily="49" charset="0"/>
-              </a:rPr>
-              <a:t>	    throw new </a:t>
-            </a:r>
-            <a:r>
-              <a:rPr lang="en-GB" sz="1400" dirty="0" err="1">
-                <a:latin typeface="Courier New" panose="02070309020205020404" pitchFamily="49" charset="0"/>
-                <a:cs typeface="Courier New" panose="02070309020205020404" pitchFamily="49" charset="0"/>
-              </a:rPr>
-              <a:t>IllegalStateException</a:t>
-            </a:r>
-            <a:r>
-              <a:rPr lang="en-GB" sz="1400" dirty="0">
-                <a:latin typeface="Courier New" panose="02070309020205020404" pitchFamily="49" charset="0"/>
-                <a:cs typeface="Courier New" panose="02070309020205020404" pitchFamily="49" charset="0"/>
-              </a:rPr>
-              <a:t>();</a:t>
-            </a:r>
-          </a:p>
-          <a:p>
-            <a:pPr marL="118872" indent="0">
-              <a:buNone/>
-            </a:pPr>
-            <a:r>
-              <a:rPr lang="en-GB" sz="1400" dirty="0">
-                <a:latin typeface="Courier New" panose="02070309020205020404" pitchFamily="49" charset="0"/>
-                <a:cs typeface="Courier New" panose="02070309020205020404" pitchFamily="49" charset="0"/>
-              </a:rPr>
-              <a:t>	}</a:t>
-            </a:r>
-          </a:p>
-          <a:p>
-            <a:pPr marL="118872" indent="0">
-              <a:buNone/>
-            </a:pPr>
-            <a:r>
-              <a:rPr lang="en-GB" sz="1400" dirty="0">
-                <a:latin typeface="Courier New" panose="02070309020205020404" pitchFamily="49" charset="0"/>
-                <a:cs typeface="Courier New" panose="02070309020205020404" pitchFamily="49" charset="0"/>
-              </a:rPr>
-              <a:t>	</a:t>
-            </a:r>
-            <a:r>
-              <a:rPr lang="en-GB" sz="1400" dirty="0" err="1">
-                <a:latin typeface="Courier New" panose="02070309020205020404" pitchFamily="49" charset="0"/>
-                <a:cs typeface="Courier New" panose="02070309020205020404" pitchFamily="49" charset="0"/>
-              </a:rPr>
-              <a:t>thePassword</a:t>
-            </a:r>
-            <a:r>
-              <a:rPr lang="en-GB" sz="1400" dirty="0">
-                <a:latin typeface="Courier New" panose="02070309020205020404" pitchFamily="49" charset="0"/>
-                <a:cs typeface="Courier New" panose="02070309020205020404" pitchFamily="49" charset="0"/>
-              </a:rPr>
-              <a:t> = password;</a:t>
-            </a:r>
-          </a:p>
-          <a:p>
-            <a:pPr marL="118872" indent="0">
-              <a:buNone/>
-            </a:pPr>
-            <a:r>
-              <a:rPr lang="en-GB" sz="1400" dirty="0">
-                <a:latin typeface="Courier New" panose="02070309020205020404" pitchFamily="49" charset="0"/>
-                <a:cs typeface="Courier New" panose="02070309020205020404" pitchFamily="49" charset="0"/>
-              </a:rPr>
-              <a:t>}</a:t>
-            </a:r>
-          </a:p>
-          <a:p>
-            <a:pPr marL="118872" indent="0">
-              <a:buNone/>
-            </a:pPr>
-            <a:endParaRPr lang="en-GB" sz="1400" dirty="0">
-              <a:latin typeface="Courier New" panose="02070309020205020404" pitchFamily="49" charset="0"/>
-              <a:cs typeface="Courier New" panose="02070309020205020404" pitchFamily="49" charset="0"/>
-            </a:endParaRPr>
-          </a:p>
-          <a:p>
-            <a:pPr marL="118872" indent="0">
-              <a:buNone/>
-            </a:pPr>
-            <a:r>
-              <a:rPr lang="en-GB" sz="1400" dirty="0">
-                <a:latin typeface="Courier New" panose="02070309020205020404" pitchFamily="49" charset="0"/>
-                <a:cs typeface="Courier New" panose="02070309020205020404" pitchFamily="49" charset="0"/>
-              </a:rPr>
-              <a:t>private </a:t>
-            </a:r>
-            <a:r>
-              <a:rPr lang="en-GB" sz="1400" dirty="0" err="1">
-                <a:latin typeface="Courier New" panose="02070309020205020404" pitchFamily="49" charset="0"/>
-                <a:cs typeface="Courier New" panose="02070309020205020404" pitchFamily="49" charset="0"/>
-              </a:rPr>
-              <a:t>boolean</a:t>
-            </a:r>
-            <a:r>
-              <a:rPr lang="en-GB" sz="1400" dirty="0">
-                <a:latin typeface="Courier New" panose="02070309020205020404" pitchFamily="49" charset="0"/>
-                <a:cs typeface="Courier New" panose="02070309020205020404" pitchFamily="49" charset="0"/>
-              </a:rPr>
-              <a:t> </a:t>
-            </a:r>
-            <a:r>
-              <a:rPr lang="en-GB" sz="1400" dirty="0" err="1">
-                <a:latin typeface="Courier New" panose="02070309020205020404" pitchFamily="49" charset="0"/>
-                <a:cs typeface="Courier New" panose="02070309020205020404" pitchFamily="49" charset="0"/>
-              </a:rPr>
-              <a:t>meetsMinimumRequirements</a:t>
-            </a:r>
-            <a:r>
-              <a:rPr lang="en-GB" sz="1400" dirty="0">
-                <a:latin typeface="Courier New" panose="02070309020205020404" pitchFamily="49" charset="0"/>
-                <a:cs typeface="Courier New" panose="02070309020205020404" pitchFamily="49" charset="0"/>
-              </a:rPr>
-              <a:t>(String password) {</a:t>
-            </a:r>
-          </a:p>
-          <a:p>
-            <a:pPr marL="118872" indent="0">
-              <a:buNone/>
-            </a:pPr>
-            <a:r>
-              <a:rPr lang="en-GB" sz="1400" dirty="0">
-                <a:latin typeface="Courier New" panose="02070309020205020404" pitchFamily="49" charset="0"/>
-                <a:cs typeface="Courier New" panose="02070309020205020404" pitchFamily="49" charset="0"/>
-              </a:rPr>
-              <a:t>	if (</a:t>
-            </a:r>
-            <a:r>
-              <a:rPr lang="en-GB" sz="1400" dirty="0" err="1">
-                <a:latin typeface="Courier New" panose="02070309020205020404" pitchFamily="49" charset="0"/>
-                <a:cs typeface="Courier New" panose="02070309020205020404" pitchFamily="49" charset="0"/>
-              </a:rPr>
-              <a:t>Strings.isNullOrEmpty</a:t>
-            </a:r>
-            <a:r>
-              <a:rPr lang="en-GB" sz="1400" dirty="0">
-                <a:latin typeface="Courier New" panose="02070309020205020404" pitchFamily="49" charset="0"/>
-                <a:cs typeface="Courier New" panose="02070309020205020404" pitchFamily="49" charset="0"/>
-              </a:rPr>
-              <a:t>(password)</a:t>
-            </a:r>
-          </a:p>
-          <a:p>
-            <a:pPr marL="118872" indent="0">
-              <a:buNone/>
-            </a:pPr>
-            <a:r>
-              <a:rPr lang="en-GB" sz="1400" dirty="0">
-                <a:latin typeface="Courier New" panose="02070309020205020404" pitchFamily="49" charset="0"/>
-                <a:cs typeface="Courier New" panose="02070309020205020404" pitchFamily="49" charset="0"/>
-              </a:rPr>
-              <a:t>	|| </a:t>
-            </a:r>
-            <a:r>
-              <a:rPr lang="en-GB" sz="1400" dirty="0" err="1">
-                <a:latin typeface="Courier New" panose="02070309020205020404" pitchFamily="49" charset="0"/>
-                <a:cs typeface="Courier New" panose="02070309020205020404" pitchFamily="49" charset="0"/>
-              </a:rPr>
-              <a:t>password.length</a:t>
-            </a:r>
-            <a:r>
-              <a:rPr lang="en-GB" sz="1400" dirty="0">
-                <a:latin typeface="Courier New" panose="02070309020205020404" pitchFamily="49" charset="0"/>
-                <a:cs typeface="Courier New" panose="02070309020205020404" pitchFamily="49" charset="0"/>
-              </a:rPr>
-              <a:t>() &lt; 6)</a:t>
-            </a:r>
-          </a:p>
-          <a:p>
-            <a:pPr marL="118872" indent="0">
-              <a:buNone/>
-            </a:pPr>
-            <a:r>
-              <a:rPr lang="en-GB" sz="1400" dirty="0">
-                <a:latin typeface="Courier New" panose="02070309020205020404" pitchFamily="49" charset="0"/>
-                <a:cs typeface="Courier New" panose="02070309020205020404" pitchFamily="49" charset="0"/>
-              </a:rPr>
-              <a:t>	|| !</a:t>
-            </a:r>
-            <a:r>
-              <a:rPr lang="en-GB" sz="1400" dirty="0" err="1">
-                <a:latin typeface="Courier New" panose="02070309020205020404" pitchFamily="49" charset="0"/>
-                <a:cs typeface="Courier New" panose="02070309020205020404" pitchFamily="49" charset="0"/>
-              </a:rPr>
-              <a:t>Strings.containsDigit</a:t>
-            </a:r>
-            <a:r>
-              <a:rPr lang="en-GB" sz="1400" dirty="0">
-                <a:latin typeface="Courier New" panose="02070309020205020404" pitchFamily="49" charset="0"/>
-                <a:cs typeface="Courier New" panose="02070309020205020404" pitchFamily="49" charset="0"/>
-              </a:rPr>
-              <a:t>(password)) </a:t>
-            </a:r>
-          </a:p>
-          <a:p>
-            <a:pPr marL="118872" indent="0">
-              <a:buNone/>
-            </a:pPr>
-            <a:r>
-              <a:rPr lang="en-GB" sz="1400" dirty="0">
-                <a:latin typeface="Courier New" panose="02070309020205020404" pitchFamily="49" charset="0"/>
-                <a:cs typeface="Courier New" panose="02070309020205020404" pitchFamily="49" charset="0"/>
-              </a:rPr>
-              <a:t>	{</a:t>
-            </a:r>
-          </a:p>
-          <a:p>
-            <a:pPr marL="118872" indent="0">
-              <a:buNone/>
-            </a:pPr>
-            <a:r>
-              <a:rPr lang="en-GB" sz="1400" dirty="0">
-                <a:latin typeface="Courier New" panose="02070309020205020404" pitchFamily="49" charset="0"/>
-                <a:cs typeface="Courier New" panose="02070309020205020404" pitchFamily="49" charset="0"/>
-              </a:rPr>
-              <a:t>	    return false;</a:t>
-            </a:r>
-          </a:p>
-          <a:p>
-            <a:pPr marL="118872" indent="0">
-              <a:buNone/>
-            </a:pPr>
-            <a:r>
-              <a:rPr lang="en-GB" sz="1400" dirty="0">
-                <a:latin typeface="Courier New" panose="02070309020205020404" pitchFamily="49" charset="0"/>
-                <a:cs typeface="Courier New" panose="02070309020205020404" pitchFamily="49" charset="0"/>
-              </a:rPr>
-              <a:t>	}</a:t>
-            </a:r>
-          </a:p>
-          <a:p>
-            <a:pPr marL="118872" indent="0">
-              <a:buNone/>
-            </a:pPr>
-            <a:endParaRPr lang="en-GB" sz="1400" dirty="0">
-              <a:latin typeface="Courier New" panose="02070309020205020404" pitchFamily="49" charset="0"/>
-              <a:cs typeface="Courier New" panose="02070309020205020404" pitchFamily="49" charset="0"/>
-            </a:endParaRPr>
-          </a:p>
-          <a:p>
-            <a:pPr marL="118872" indent="0">
-              <a:buNone/>
-            </a:pPr>
-            <a:r>
-              <a:rPr lang="en-GB" sz="1400" dirty="0">
-                <a:latin typeface="Courier New" panose="02070309020205020404" pitchFamily="49" charset="0"/>
-                <a:cs typeface="Courier New" panose="02070309020205020404" pitchFamily="49" charset="0"/>
-              </a:rPr>
-              <a:t>	return true;</a:t>
-            </a:r>
-          </a:p>
-          <a:p>
-            <a:pPr marL="118872" indent="0">
-              <a:buNone/>
-            </a:pPr>
-            <a:r>
-              <a:rPr lang="en-GB" sz="1400" dirty="0">
-                <a:latin typeface="Courier New" panose="02070309020205020404" pitchFamily="49" charset="0"/>
-                <a:cs typeface="Courier New" panose="02070309020205020404" pitchFamily="49" charset="0"/>
-              </a:rPr>
-              <a:t>}</a:t>
-            </a:r>
-          </a:p>
-        </p:txBody>
-      </p:sp>
-      <p:sp>
-        <p:nvSpPr>
-          <p:cNvPr id="5" name="Slide Number Placeholder 4"/>
-          <p:cNvSpPr>
-            <a:spLocks noGrp="1"/>
-          </p:cNvSpPr>
-          <p:nvPr>
-            <p:ph type="sldNum" sz="quarter" idx="12"/>
-          </p:nvPr>
-        </p:nvSpPr>
-        <p:spPr/>
-        <p:txBody>
-          <a:bodyPr/>
-          <a:lstStyle/>
-          <a:p>
-            <a:fld id="{024A9932-4E76-455F-8E1A-2CC10C89B014}" type="slidenum">
-              <a:rPr lang="pt-PT" smtClean="0"/>
-              <a:pPr/>
-              <a:t>42</a:t>
-            </a:fld>
-            <a:endParaRPr lang="pt-PT"/>
-          </a:p>
-        </p:txBody>
-      </p:sp>
-    </p:spTree>
-    <p:extLst>
-      <p:ext uri="{BB962C8B-B14F-4D97-AF65-F5344CB8AC3E}">
-        <p14:creationId xmlns:p14="http://schemas.microsoft.com/office/powerpoint/2010/main" val="208134332"/>
-      </p:ext>
-    </p:extLst>
-  </p:cSld>
-  <p:clrMapOvr>
-    <a:masterClrMapping/>
-  </p:clrMapOvr>
-  <p:transition spd="med">
-    <p:fade/>
-  </p:transition>
-</p:sld>
-</file>
-
 <file path=ppt/slides/slide43.xml><?xml version="1.0" encoding="utf-8"?>
 <p:sld xmlns:a="http://schemas.openxmlformats.org/drawingml/2006/main" xmlns:r="http://schemas.openxmlformats.org/officeDocument/2006/relationships" xmlns:p="http://schemas.openxmlformats.org/presentationml/2006/main">
   <p:cSld>
@@ -10864,7 +10359,7 @@
       </p:grpSpPr>
       <p:sp>
         <p:nvSpPr>
-          <p:cNvPr id="5" name="Title 4"/>
+          <p:cNvPr id="2" name="Title 1"/>
           <p:cNvSpPr>
             <a:spLocks noGrp="1"/>
           </p:cNvSpPr>
@@ -10878,35 +10373,274 @@
           <a:lstStyle/>
           <a:p>
             <a:r>
-              <a:rPr lang="en-GB" dirty="0" smtClean="0"/>
-              <a:t>Infrastructure Pub/Sub</a:t>
-            </a:r>
-            <a:endParaRPr lang="en-US" dirty="0"/>
-          </a:p>
-        </p:txBody>
-      </p:sp>
-      <p:sp>
-        <p:nvSpPr>
-          <p:cNvPr id="6" name="Text Placeholder 5"/>
-          <p:cNvSpPr>
-            <a:spLocks noGrp="1"/>
-          </p:cNvSpPr>
-          <p:nvPr>
-            <p:ph type="body" idx="1"/>
-          </p:nvPr>
-        </p:nvSpPr>
-        <p:spPr/>
-        <p:txBody>
-          <a:bodyPr/>
-          <a:lstStyle/>
-          <a:p>
-            <a:endParaRPr lang="en-US"/>
-          </a:p>
-        </p:txBody>
-      </p:sp>
-      <p:sp>
-        <p:nvSpPr>
-          <p:cNvPr id="4" name="Slide Number Placeholder 3"/>
+              <a:rPr lang="en-GB" dirty="0"/>
+              <a:t>Domain invariants</a:t>
+            </a:r>
+          </a:p>
+        </p:txBody>
+      </p:sp>
+      <p:sp>
+        <p:nvSpPr>
+          <p:cNvPr id="3" name="Content Placeholder 2"/>
+          <p:cNvSpPr>
+            <a:spLocks noGrp="1"/>
+          </p:cNvSpPr>
+          <p:nvPr>
+            <p:ph idx="1"/>
+          </p:nvPr>
+        </p:nvSpPr>
+        <p:spPr/>
+        <p:style>
+          <a:lnRef idx="1">
+            <a:schemeClr val="accent2"/>
+          </a:lnRef>
+          <a:fillRef idx="2">
+            <a:schemeClr val="accent2"/>
+          </a:fillRef>
+          <a:effectRef idx="1">
+            <a:schemeClr val="accent2"/>
+          </a:effectRef>
+          <a:fontRef idx="minor">
+            <a:schemeClr val="dk1"/>
+          </a:fontRef>
+        </p:style>
+        <p:txBody>
+          <a:bodyPr>
+            <a:noAutofit/>
+          </a:bodyPr>
+          <a:lstStyle/>
+          <a:p>
+            <a:pPr marL="118872" indent="0">
+              <a:buNone/>
+            </a:pPr>
+            <a:endParaRPr lang="en-GB" sz="1600" dirty="0">
+              <a:latin typeface="Courier New" panose="02070309020205020404" pitchFamily="49" charset="0"/>
+              <a:cs typeface="Courier New" panose="02070309020205020404" pitchFamily="49" charset="0"/>
+            </a:endParaRPr>
+          </a:p>
+          <a:p>
+            <a:pPr marL="118872" indent="0">
+              <a:buNone/>
+            </a:pPr>
+            <a:r>
+              <a:rPr lang="en-GB" sz="1600" dirty="0">
+                <a:latin typeface="Courier New" panose="02070309020205020404" pitchFamily="49" charset="0"/>
+                <a:cs typeface="Courier New" panose="02070309020205020404" pitchFamily="49" charset="0"/>
+              </a:rPr>
+              <a:t>@Test</a:t>
+            </a:r>
+          </a:p>
+          <a:p>
+            <a:pPr marL="118872" indent="0">
+              <a:buNone/>
+            </a:pPr>
+            <a:r>
+              <a:rPr lang="en-GB" sz="1600" dirty="0">
+                <a:latin typeface="Courier New" panose="02070309020205020404" pitchFamily="49" charset="0"/>
+                <a:cs typeface="Courier New" panose="02070309020205020404" pitchFamily="49" charset="0"/>
+              </a:rPr>
+              <a:t>public void ensurePasswordHasAtLeastOneDigitAnd6CharactersLong() {</a:t>
+            </a:r>
+          </a:p>
+          <a:p>
+            <a:pPr marL="118872" indent="0">
+              <a:buNone/>
+            </a:pPr>
+            <a:r>
+              <a:rPr lang="en-GB" sz="1600" dirty="0">
+                <a:latin typeface="Courier New" panose="02070309020205020404" pitchFamily="49" charset="0"/>
+                <a:cs typeface="Courier New" panose="02070309020205020404" pitchFamily="49" charset="0"/>
+              </a:rPr>
+              <a:t>	new Password("abcdefgh1");</a:t>
+            </a:r>
+          </a:p>
+          <a:p>
+            <a:pPr marL="118872" indent="0">
+              <a:buNone/>
+            </a:pPr>
+            <a:r>
+              <a:rPr lang="en-GB" sz="1600" dirty="0">
+                <a:latin typeface="Courier New" panose="02070309020205020404" pitchFamily="49" charset="0"/>
+                <a:cs typeface="Courier New" panose="02070309020205020404" pitchFamily="49" charset="0"/>
+              </a:rPr>
+              <a:t>}</a:t>
+            </a:r>
+          </a:p>
+          <a:p>
+            <a:pPr marL="118872" indent="0">
+              <a:buNone/>
+            </a:pPr>
+            <a:endParaRPr lang="en-GB" sz="1600" dirty="0">
+              <a:latin typeface="Courier New" panose="02070309020205020404" pitchFamily="49" charset="0"/>
+              <a:cs typeface="Courier New" panose="02070309020205020404" pitchFamily="49" charset="0"/>
+            </a:endParaRPr>
+          </a:p>
+          <a:p>
+            <a:pPr marL="118872" indent="0">
+              <a:buNone/>
+            </a:pPr>
+            <a:r>
+              <a:rPr lang="en-GB" sz="1600" dirty="0">
+                <a:latin typeface="Courier New" panose="02070309020205020404" pitchFamily="49" charset="0"/>
+                <a:cs typeface="Courier New" panose="02070309020205020404" pitchFamily="49" charset="0"/>
+              </a:rPr>
+              <a:t>@Test(expected = </a:t>
+            </a:r>
+            <a:r>
+              <a:rPr lang="en-GB" sz="1600" dirty="0" err="1">
+                <a:latin typeface="Courier New" panose="02070309020205020404" pitchFamily="49" charset="0"/>
+                <a:cs typeface="Courier New" panose="02070309020205020404" pitchFamily="49" charset="0"/>
+              </a:rPr>
+              <a:t>IllegalArgumentException.class</a:t>
+            </a:r>
+            <a:r>
+              <a:rPr lang="en-GB" sz="1600" dirty="0">
+                <a:latin typeface="Courier New" panose="02070309020205020404" pitchFamily="49" charset="0"/>
+                <a:cs typeface="Courier New" panose="02070309020205020404" pitchFamily="49" charset="0"/>
+              </a:rPr>
+              <a:t>)</a:t>
+            </a:r>
+          </a:p>
+          <a:p>
+            <a:pPr marL="118872" indent="0">
+              <a:buNone/>
+            </a:pPr>
+            <a:r>
+              <a:rPr lang="en-GB" sz="1600" dirty="0">
+                <a:latin typeface="Courier New" panose="02070309020205020404" pitchFamily="49" charset="0"/>
+                <a:cs typeface="Courier New" panose="02070309020205020404" pitchFamily="49" charset="0"/>
+              </a:rPr>
+              <a:t>public void ensurePasswordsSmallerThan6CharactersAreNotAllowed() {</a:t>
+            </a:r>
+          </a:p>
+          <a:p>
+            <a:pPr marL="118872" indent="0">
+              <a:buNone/>
+            </a:pPr>
+            <a:r>
+              <a:rPr lang="en-GB" sz="1600" dirty="0">
+                <a:latin typeface="Courier New" panose="02070309020205020404" pitchFamily="49" charset="0"/>
+                <a:cs typeface="Courier New" panose="02070309020205020404" pitchFamily="49" charset="0"/>
+              </a:rPr>
+              <a:t>	new Password("ab1c");</a:t>
+            </a:r>
+          </a:p>
+          <a:p>
+            <a:pPr marL="118872" indent="0">
+              <a:buNone/>
+            </a:pPr>
+            <a:r>
+              <a:rPr lang="en-GB" sz="1600" dirty="0">
+                <a:latin typeface="Courier New" panose="02070309020205020404" pitchFamily="49" charset="0"/>
+                <a:cs typeface="Courier New" panose="02070309020205020404" pitchFamily="49" charset="0"/>
+              </a:rPr>
+              <a:t>}</a:t>
+            </a:r>
+          </a:p>
+          <a:p>
+            <a:pPr marL="118872" indent="0">
+              <a:buNone/>
+            </a:pPr>
+            <a:endParaRPr lang="en-GB" sz="1600" dirty="0">
+              <a:latin typeface="Courier New" panose="02070309020205020404" pitchFamily="49" charset="0"/>
+              <a:cs typeface="Courier New" panose="02070309020205020404" pitchFamily="49" charset="0"/>
+            </a:endParaRPr>
+          </a:p>
+          <a:p>
+            <a:pPr marL="118872" indent="0">
+              <a:buNone/>
+            </a:pPr>
+            <a:r>
+              <a:rPr lang="en-GB" sz="1600" dirty="0">
+                <a:latin typeface="Courier New" panose="02070309020205020404" pitchFamily="49" charset="0"/>
+                <a:cs typeface="Courier New" panose="02070309020205020404" pitchFamily="49" charset="0"/>
+              </a:rPr>
+              <a:t>@Test(expected = </a:t>
+            </a:r>
+            <a:r>
+              <a:rPr lang="en-GB" sz="1600" dirty="0" err="1">
+                <a:latin typeface="Courier New" panose="02070309020205020404" pitchFamily="49" charset="0"/>
+                <a:cs typeface="Courier New" panose="02070309020205020404" pitchFamily="49" charset="0"/>
+              </a:rPr>
+              <a:t>IllegalArgumentException.class</a:t>
+            </a:r>
+            <a:r>
+              <a:rPr lang="en-GB" sz="1600" dirty="0">
+                <a:latin typeface="Courier New" panose="02070309020205020404" pitchFamily="49" charset="0"/>
+                <a:cs typeface="Courier New" panose="02070309020205020404" pitchFamily="49" charset="0"/>
+              </a:rPr>
+              <a:t>)</a:t>
+            </a:r>
+          </a:p>
+          <a:p>
+            <a:pPr marL="118872" indent="0">
+              <a:buNone/>
+            </a:pPr>
+            <a:r>
+              <a:rPr lang="en-GB" sz="1600" dirty="0">
+                <a:latin typeface="Courier New" panose="02070309020205020404" pitchFamily="49" charset="0"/>
+                <a:cs typeface="Courier New" panose="02070309020205020404" pitchFamily="49" charset="0"/>
+              </a:rPr>
+              <a:t>public void </a:t>
+            </a:r>
+            <a:r>
+              <a:rPr lang="en-GB" sz="1600" dirty="0" err="1">
+                <a:latin typeface="Courier New" panose="02070309020205020404" pitchFamily="49" charset="0"/>
+                <a:cs typeface="Courier New" panose="02070309020205020404" pitchFamily="49" charset="0"/>
+              </a:rPr>
+              <a:t>ensurePasswordsWithoutDigitsAreNotAllowed</a:t>
+            </a:r>
+            <a:r>
+              <a:rPr lang="en-GB" sz="1600" dirty="0">
+                <a:latin typeface="Courier New" panose="02070309020205020404" pitchFamily="49" charset="0"/>
+                <a:cs typeface="Courier New" panose="02070309020205020404" pitchFamily="49" charset="0"/>
+              </a:rPr>
+              <a:t>() {</a:t>
+            </a:r>
+          </a:p>
+          <a:p>
+            <a:pPr marL="118872" indent="0">
+              <a:buNone/>
+            </a:pPr>
+            <a:r>
+              <a:rPr lang="en-GB" sz="1600" dirty="0">
+                <a:latin typeface="Courier New" panose="02070309020205020404" pitchFamily="49" charset="0"/>
+                <a:cs typeface="Courier New" panose="02070309020205020404" pitchFamily="49" charset="0"/>
+              </a:rPr>
+              <a:t>	new Password("</a:t>
+            </a:r>
+            <a:r>
+              <a:rPr lang="en-GB" sz="1600" dirty="0" err="1">
+                <a:latin typeface="Courier New" panose="02070309020205020404" pitchFamily="49" charset="0"/>
+                <a:cs typeface="Courier New" panose="02070309020205020404" pitchFamily="49" charset="0"/>
+              </a:rPr>
+              <a:t>abcdefgh</a:t>
+            </a:r>
+            <a:r>
+              <a:rPr lang="en-GB" sz="1600" dirty="0">
+                <a:latin typeface="Courier New" panose="02070309020205020404" pitchFamily="49" charset="0"/>
+                <a:cs typeface="Courier New" panose="02070309020205020404" pitchFamily="49" charset="0"/>
+              </a:rPr>
+              <a:t>");</a:t>
+            </a:r>
+          </a:p>
+          <a:p>
+            <a:pPr marL="118872" indent="0">
+              <a:buNone/>
+            </a:pPr>
+            <a:r>
+              <a:rPr lang="en-GB" sz="1600" dirty="0">
+                <a:latin typeface="Courier New" panose="02070309020205020404" pitchFamily="49" charset="0"/>
+                <a:cs typeface="Courier New" panose="02070309020205020404" pitchFamily="49" charset="0"/>
+              </a:rPr>
+              <a:t>}</a:t>
+            </a:r>
+          </a:p>
+        </p:txBody>
+      </p:sp>
+      <p:sp>
+        <p:nvSpPr>
+          <p:cNvPr id="5" name="Slide Number Placeholder 4"/>
           <p:cNvSpPr>
             <a:spLocks noGrp="1"/>
           </p:cNvSpPr>
@@ -10931,7 +10665,7 @@
     </p:spTree>
     <p:extLst>
       <p:ext uri="{BB962C8B-B14F-4D97-AF65-F5344CB8AC3E}">
-        <p14:creationId xmlns:p14="http://schemas.microsoft.com/office/powerpoint/2010/main" val="477722368"/>
+        <p14:creationId xmlns:p14="http://schemas.microsoft.com/office/powerpoint/2010/main" val="1968312242"/>
       </p:ext>
     </p:extLst>
   </p:cSld>
@@ -10960,7 +10694,7 @@
       </p:grpSpPr>
       <p:sp>
         <p:nvSpPr>
-          <p:cNvPr id="5" name="Title 4"/>
+          <p:cNvPr id="2" name="Title 1"/>
           <p:cNvSpPr>
             <a:spLocks noGrp="1"/>
           </p:cNvSpPr>
@@ -10973,13 +10707,16 @@
           <a:bodyPr/>
           <a:lstStyle/>
           <a:p>
-            <a:endParaRPr lang="en-US"/>
-          </a:p>
-        </p:txBody>
-      </p:sp>
-      <p:sp>
-        <p:nvSpPr>
-          <p:cNvPr id="6" name="Content Placeholder 5"/>
+            <a:r>
+              <a:rPr lang="en-GB" dirty="0"/>
+              <a:t>Domain</a:t>
+            </a:r>
+          </a:p>
+        </p:txBody>
+      </p:sp>
+      <p:sp>
+        <p:nvSpPr>
+          <p:cNvPr id="3" name="Content Placeholder 2"/>
           <p:cNvSpPr>
             <a:spLocks noGrp="1"/>
           </p:cNvSpPr>
@@ -10988,17 +10725,382 @@
           </p:nvPr>
         </p:nvSpPr>
         <p:spPr/>
-        <p:txBody>
-          <a:bodyPr/>
-          <a:lstStyle/>
-          <a:p>
-            <a:endParaRPr lang="en-US"/>
-          </a:p>
-        </p:txBody>
-      </p:sp>
-      <p:sp>
-        <p:nvSpPr>
-          <p:cNvPr id="4" name="Slide Number Placeholder 3"/>
+        <p:style>
+          <a:lnRef idx="1">
+            <a:schemeClr val="accent2"/>
+          </a:lnRef>
+          <a:fillRef idx="2">
+            <a:schemeClr val="accent2"/>
+          </a:fillRef>
+          <a:effectRef idx="1">
+            <a:schemeClr val="accent2"/>
+          </a:effectRef>
+          <a:fontRef idx="minor">
+            <a:schemeClr val="dk1"/>
+          </a:fontRef>
+        </p:style>
+        <p:txBody>
+          <a:bodyPr>
+            <a:noAutofit/>
+          </a:bodyPr>
+          <a:lstStyle/>
+          <a:p>
+            <a:pPr marL="118872" indent="0">
+              <a:buNone/>
+            </a:pPr>
+            <a:r>
+              <a:rPr lang="en-GB" sz="1400" dirty="0">
+                <a:latin typeface="Courier New" panose="02070309020205020404" pitchFamily="49" charset="0"/>
+                <a:cs typeface="Courier New" panose="02070309020205020404" pitchFamily="49" charset="0"/>
+              </a:rPr>
+              <a:t>public class Password {</a:t>
+            </a:r>
+          </a:p>
+          <a:p>
+            <a:pPr marL="118872" indent="0">
+              <a:buNone/>
+            </a:pPr>
+            <a:endParaRPr lang="en-GB" sz="1400" dirty="0">
+              <a:latin typeface="Courier New" panose="02070309020205020404" pitchFamily="49" charset="0"/>
+              <a:cs typeface="Courier New" panose="02070309020205020404" pitchFamily="49" charset="0"/>
+            </a:endParaRPr>
+          </a:p>
+          <a:p>
+            <a:pPr marL="118872" indent="0">
+              <a:buNone/>
+            </a:pPr>
+            <a:r>
+              <a:rPr lang="en-GB" sz="1400" dirty="0">
+                <a:latin typeface="Courier New" panose="02070309020205020404" pitchFamily="49" charset="0"/>
+                <a:cs typeface="Courier New" panose="02070309020205020404" pitchFamily="49" charset="0"/>
+              </a:rPr>
+              <a:t>…</a:t>
+            </a:r>
+          </a:p>
+          <a:p>
+            <a:pPr marL="118872" indent="0">
+              <a:buNone/>
+            </a:pPr>
+            <a:endParaRPr lang="en-GB" sz="1400" dirty="0">
+              <a:latin typeface="Courier New" panose="02070309020205020404" pitchFamily="49" charset="0"/>
+              <a:cs typeface="Courier New" panose="02070309020205020404" pitchFamily="49" charset="0"/>
+            </a:endParaRPr>
+          </a:p>
+          <a:p>
+            <a:pPr marL="118872" indent="0">
+              <a:buNone/>
+            </a:pPr>
+            <a:r>
+              <a:rPr lang="en-GB" sz="1400" dirty="0">
+                <a:latin typeface="Courier New" panose="02070309020205020404" pitchFamily="49" charset="0"/>
+                <a:cs typeface="Courier New" panose="02070309020205020404" pitchFamily="49" charset="0"/>
+              </a:rPr>
+              <a:t>public Password(String password) {</a:t>
+            </a:r>
+          </a:p>
+          <a:p>
+            <a:pPr marL="118872" indent="0">
+              <a:buNone/>
+            </a:pPr>
+            <a:r>
+              <a:rPr lang="en-GB" sz="1400" dirty="0">
+                <a:latin typeface="Courier New" panose="02070309020205020404" pitchFamily="49" charset="0"/>
+                <a:cs typeface="Courier New" panose="02070309020205020404" pitchFamily="49" charset="0"/>
+              </a:rPr>
+              <a:t>	if (!</a:t>
+            </a:r>
+            <a:r>
+              <a:rPr lang="en-GB" sz="1400" dirty="0" err="1">
+                <a:latin typeface="Courier New" panose="02070309020205020404" pitchFamily="49" charset="0"/>
+                <a:cs typeface="Courier New" panose="02070309020205020404" pitchFamily="49" charset="0"/>
+              </a:rPr>
+              <a:t>meetsMinimumRequirements</a:t>
+            </a:r>
+            <a:r>
+              <a:rPr lang="en-GB" sz="1400" dirty="0">
+                <a:latin typeface="Courier New" panose="02070309020205020404" pitchFamily="49" charset="0"/>
+                <a:cs typeface="Courier New" panose="02070309020205020404" pitchFamily="49" charset="0"/>
+              </a:rPr>
+              <a:t>(password)) {</a:t>
+            </a:r>
+          </a:p>
+          <a:p>
+            <a:pPr marL="118872" indent="0">
+              <a:buNone/>
+            </a:pPr>
+            <a:r>
+              <a:rPr lang="en-GB" sz="1400" dirty="0">
+                <a:latin typeface="Courier New" panose="02070309020205020404" pitchFamily="49" charset="0"/>
+                <a:cs typeface="Courier New" panose="02070309020205020404" pitchFamily="49" charset="0"/>
+              </a:rPr>
+              <a:t>	    throw new </a:t>
+            </a:r>
+            <a:r>
+              <a:rPr lang="en-GB" sz="1400" dirty="0" err="1">
+                <a:latin typeface="Courier New" panose="02070309020205020404" pitchFamily="49" charset="0"/>
+                <a:cs typeface="Courier New" panose="02070309020205020404" pitchFamily="49" charset="0"/>
+              </a:rPr>
+              <a:t>IllegalStateException</a:t>
+            </a:r>
+            <a:r>
+              <a:rPr lang="en-GB" sz="1400" dirty="0">
+                <a:latin typeface="Courier New" panose="02070309020205020404" pitchFamily="49" charset="0"/>
+                <a:cs typeface="Courier New" panose="02070309020205020404" pitchFamily="49" charset="0"/>
+              </a:rPr>
+              <a:t>();</a:t>
+            </a:r>
+          </a:p>
+          <a:p>
+            <a:pPr marL="118872" indent="0">
+              <a:buNone/>
+            </a:pPr>
+            <a:r>
+              <a:rPr lang="en-GB" sz="1400" dirty="0">
+                <a:latin typeface="Courier New" panose="02070309020205020404" pitchFamily="49" charset="0"/>
+                <a:cs typeface="Courier New" panose="02070309020205020404" pitchFamily="49" charset="0"/>
+              </a:rPr>
+              <a:t>	}</a:t>
+            </a:r>
+          </a:p>
+          <a:p>
+            <a:pPr marL="118872" indent="0">
+              <a:buNone/>
+            </a:pPr>
+            <a:r>
+              <a:rPr lang="en-GB" sz="1400" dirty="0">
+                <a:latin typeface="Courier New" panose="02070309020205020404" pitchFamily="49" charset="0"/>
+                <a:cs typeface="Courier New" panose="02070309020205020404" pitchFamily="49" charset="0"/>
+              </a:rPr>
+              <a:t>	</a:t>
+            </a:r>
+            <a:r>
+              <a:rPr lang="en-GB" sz="1400" dirty="0" err="1">
+                <a:latin typeface="Courier New" panose="02070309020205020404" pitchFamily="49" charset="0"/>
+                <a:cs typeface="Courier New" panose="02070309020205020404" pitchFamily="49" charset="0"/>
+              </a:rPr>
+              <a:t>thePassword</a:t>
+            </a:r>
+            <a:r>
+              <a:rPr lang="en-GB" sz="1400" dirty="0">
+                <a:latin typeface="Courier New" panose="02070309020205020404" pitchFamily="49" charset="0"/>
+                <a:cs typeface="Courier New" panose="02070309020205020404" pitchFamily="49" charset="0"/>
+              </a:rPr>
+              <a:t> = password;</a:t>
+            </a:r>
+          </a:p>
+          <a:p>
+            <a:pPr marL="118872" indent="0">
+              <a:buNone/>
+            </a:pPr>
+            <a:r>
+              <a:rPr lang="en-GB" sz="1400" dirty="0">
+                <a:latin typeface="Courier New" panose="02070309020205020404" pitchFamily="49" charset="0"/>
+                <a:cs typeface="Courier New" panose="02070309020205020404" pitchFamily="49" charset="0"/>
+              </a:rPr>
+              <a:t>}</a:t>
+            </a:r>
+          </a:p>
+          <a:p>
+            <a:pPr marL="118872" indent="0">
+              <a:buNone/>
+            </a:pPr>
+            <a:endParaRPr lang="en-GB" sz="1400" dirty="0">
+              <a:latin typeface="Courier New" panose="02070309020205020404" pitchFamily="49" charset="0"/>
+              <a:cs typeface="Courier New" panose="02070309020205020404" pitchFamily="49" charset="0"/>
+            </a:endParaRPr>
+          </a:p>
+          <a:p>
+            <a:pPr marL="118872" indent="0">
+              <a:buNone/>
+            </a:pPr>
+            <a:r>
+              <a:rPr lang="en-GB" sz="1400" dirty="0">
+                <a:latin typeface="Courier New" panose="02070309020205020404" pitchFamily="49" charset="0"/>
+                <a:cs typeface="Courier New" panose="02070309020205020404" pitchFamily="49" charset="0"/>
+              </a:rPr>
+              <a:t>private </a:t>
+            </a:r>
+            <a:r>
+              <a:rPr lang="en-GB" sz="1400" dirty="0" err="1">
+                <a:latin typeface="Courier New" panose="02070309020205020404" pitchFamily="49" charset="0"/>
+                <a:cs typeface="Courier New" panose="02070309020205020404" pitchFamily="49" charset="0"/>
+              </a:rPr>
+              <a:t>boolean</a:t>
+            </a:r>
+            <a:r>
+              <a:rPr lang="en-GB" sz="1400" dirty="0">
+                <a:latin typeface="Courier New" panose="02070309020205020404" pitchFamily="49" charset="0"/>
+                <a:cs typeface="Courier New" panose="02070309020205020404" pitchFamily="49" charset="0"/>
+              </a:rPr>
+              <a:t> </a:t>
+            </a:r>
+            <a:r>
+              <a:rPr lang="en-GB" sz="1400" dirty="0" err="1">
+                <a:latin typeface="Courier New" panose="02070309020205020404" pitchFamily="49" charset="0"/>
+                <a:cs typeface="Courier New" panose="02070309020205020404" pitchFamily="49" charset="0"/>
+              </a:rPr>
+              <a:t>meetsMinimumRequirements</a:t>
+            </a:r>
+            <a:r>
+              <a:rPr lang="en-GB" sz="1400" dirty="0">
+                <a:latin typeface="Courier New" panose="02070309020205020404" pitchFamily="49" charset="0"/>
+                <a:cs typeface="Courier New" panose="02070309020205020404" pitchFamily="49" charset="0"/>
+              </a:rPr>
+              <a:t>(String password) {</a:t>
+            </a:r>
+          </a:p>
+          <a:p>
+            <a:pPr marL="118872" indent="0">
+              <a:buNone/>
+            </a:pPr>
+            <a:r>
+              <a:rPr lang="en-GB" sz="1400" dirty="0">
+                <a:latin typeface="Courier New" panose="02070309020205020404" pitchFamily="49" charset="0"/>
+                <a:cs typeface="Courier New" panose="02070309020205020404" pitchFamily="49" charset="0"/>
+              </a:rPr>
+              <a:t>	if (</a:t>
+            </a:r>
+            <a:r>
+              <a:rPr lang="en-GB" sz="1400" dirty="0" err="1">
+                <a:latin typeface="Courier New" panose="02070309020205020404" pitchFamily="49" charset="0"/>
+                <a:cs typeface="Courier New" panose="02070309020205020404" pitchFamily="49" charset="0"/>
+              </a:rPr>
+              <a:t>Strings.isNullOrEmpty</a:t>
+            </a:r>
+            <a:r>
+              <a:rPr lang="en-GB" sz="1400" dirty="0">
+                <a:latin typeface="Courier New" panose="02070309020205020404" pitchFamily="49" charset="0"/>
+                <a:cs typeface="Courier New" panose="02070309020205020404" pitchFamily="49" charset="0"/>
+              </a:rPr>
+              <a:t>(password)</a:t>
+            </a:r>
+          </a:p>
+          <a:p>
+            <a:pPr marL="118872" indent="0">
+              <a:buNone/>
+            </a:pPr>
+            <a:r>
+              <a:rPr lang="en-GB" sz="1400" dirty="0">
+                <a:latin typeface="Courier New" panose="02070309020205020404" pitchFamily="49" charset="0"/>
+                <a:cs typeface="Courier New" panose="02070309020205020404" pitchFamily="49" charset="0"/>
+              </a:rPr>
+              <a:t>	|| </a:t>
+            </a:r>
+            <a:r>
+              <a:rPr lang="en-GB" sz="1400" dirty="0" err="1">
+                <a:latin typeface="Courier New" panose="02070309020205020404" pitchFamily="49" charset="0"/>
+                <a:cs typeface="Courier New" panose="02070309020205020404" pitchFamily="49" charset="0"/>
+              </a:rPr>
+              <a:t>password.length</a:t>
+            </a:r>
+            <a:r>
+              <a:rPr lang="en-GB" sz="1400" dirty="0">
+                <a:latin typeface="Courier New" panose="02070309020205020404" pitchFamily="49" charset="0"/>
+                <a:cs typeface="Courier New" panose="02070309020205020404" pitchFamily="49" charset="0"/>
+              </a:rPr>
+              <a:t>() &lt; 6)</a:t>
+            </a:r>
+          </a:p>
+          <a:p>
+            <a:pPr marL="118872" indent="0">
+              <a:buNone/>
+            </a:pPr>
+            <a:r>
+              <a:rPr lang="en-GB" sz="1400" dirty="0">
+                <a:latin typeface="Courier New" panose="02070309020205020404" pitchFamily="49" charset="0"/>
+                <a:cs typeface="Courier New" panose="02070309020205020404" pitchFamily="49" charset="0"/>
+              </a:rPr>
+              <a:t>	|| !</a:t>
+            </a:r>
+            <a:r>
+              <a:rPr lang="en-GB" sz="1400" dirty="0" err="1">
+                <a:latin typeface="Courier New" panose="02070309020205020404" pitchFamily="49" charset="0"/>
+                <a:cs typeface="Courier New" panose="02070309020205020404" pitchFamily="49" charset="0"/>
+              </a:rPr>
+              <a:t>Strings.containsDigit</a:t>
+            </a:r>
+            <a:r>
+              <a:rPr lang="en-GB" sz="1400" dirty="0">
+                <a:latin typeface="Courier New" panose="02070309020205020404" pitchFamily="49" charset="0"/>
+                <a:cs typeface="Courier New" panose="02070309020205020404" pitchFamily="49" charset="0"/>
+              </a:rPr>
+              <a:t>(password)) </a:t>
+            </a:r>
+          </a:p>
+          <a:p>
+            <a:pPr marL="118872" indent="0">
+              <a:buNone/>
+            </a:pPr>
+            <a:r>
+              <a:rPr lang="en-GB" sz="1400" dirty="0">
+                <a:latin typeface="Courier New" panose="02070309020205020404" pitchFamily="49" charset="0"/>
+                <a:cs typeface="Courier New" panose="02070309020205020404" pitchFamily="49" charset="0"/>
+              </a:rPr>
+              <a:t>	{</a:t>
+            </a:r>
+          </a:p>
+          <a:p>
+            <a:pPr marL="118872" indent="0">
+              <a:buNone/>
+            </a:pPr>
+            <a:r>
+              <a:rPr lang="en-GB" sz="1400" dirty="0">
+                <a:latin typeface="Courier New" panose="02070309020205020404" pitchFamily="49" charset="0"/>
+                <a:cs typeface="Courier New" panose="02070309020205020404" pitchFamily="49" charset="0"/>
+              </a:rPr>
+              <a:t>	    return false;</a:t>
+            </a:r>
+          </a:p>
+          <a:p>
+            <a:pPr marL="118872" indent="0">
+              <a:buNone/>
+            </a:pPr>
+            <a:r>
+              <a:rPr lang="en-GB" sz="1400" dirty="0">
+                <a:latin typeface="Courier New" panose="02070309020205020404" pitchFamily="49" charset="0"/>
+                <a:cs typeface="Courier New" panose="02070309020205020404" pitchFamily="49" charset="0"/>
+              </a:rPr>
+              <a:t>	}</a:t>
+            </a:r>
+          </a:p>
+          <a:p>
+            <a:pPr marL="118872" indent="0">
+              <a:buNone/>
+            </a:pPr>
+            <a:endParaRPr lang="en-GB" sz="1400" dirty="0">
+              <a:latin typeface="Courier New" panose="02070309020205020404" pitchFamily="49" charset="0"/>
+              <a:cs typeface="Courier New" panose="02070309020205020404" pitchFamily="49" charset="0"/>
+            </a:endParaRPr>
+          </a:p>
+          <a:p>
+            <a:pPr marL="118872" indent="0">
+              <a:buNone/>
+            </a:pPr>
+            <a:r>
+              <a:rPr lang="en-GB" sz="1400" dirty="0">
+                <a:latin typeface="Courier New" panose="02070309020205020404" pitchFamily="49" charset="0"/>
+                <a:cs typeface="Courier New" panose="02070309020205020404" pitchFamily="49" charset="0"/>
+              </a:rPr>
+              <a:t>	return true;</a:t>
+            </a:r>
+          </a:p>
+          <a:p>
+            <a:pPr marL="118872" indent="0">
+              <a:buNone/>
+            </a:pPr>
+            <a:r>
+              <a:rPr lang="en-GB" sz="1400" dirty="0">
+                <a:latin typeface="Courier New" panose="02070309020205020404" pitchFamily="49" charset="0"/>
+                <a:cs typeface="Courier New" panose="02070309020205020404" pitchFamily="49" charset="0"/>
+              </a:rPr>
+              <a:t>}</a:t>
+            </a:r>
+          </a:p>
+        </p:txBody>
+      </p:sp>
+      <p:sp>
+        <p:nvSpPr>
+          <p:cNvPr id="5" name="Slide Number Placeholder 4"/>
           <p:cNvSpPr>
             <a:spLocks noGrp="1"/>
           </p:cNvSpPr>
@@ -11023,13 +11125,16 @@
     </p:spTree>
     <p:extLst>
       <p:ext uri="{BB962C8B-B14F-4D97-AF65-F5344CB8AC3E}">
-        <p14:creationId xmlns:p14="http://schemas.microsoft.com/office/powerpoint/2010/main" val="709132927"/>
+        <p14:creationId xmlns:p14="http://schemas.microsoft.com/office/powerpoint/2010/main" val="208134332"/>
       </p:ext>
     </p:extLst>
   </p:cSld>
   <p:clrMapOvr>
     <a:masterClrMapping/>
   </p:clrMapOvr>
+  <p:transition spd="med">
+    <p:fade/>
+  </p:transition>
 </p:sld>
 </file>
 
@@ -11052,7 +11157,7 @@
       </p:grpSpPr>
       <p:sp>
         <p:nvSpPr>
-          <p:cNvPr id="2" name="Title 1"/>
+          <p:cNvPr id="5" name="Title 4"/>
           <p:cNvSpPr>
             <a:spLocks noGrp="1"/>
           </p:cNvSpPr>
@@ -11066,39 +11171,32 @@
           <a:lstStyle/>
           <a:p>
             <a:r>
-              <a:rPr lang="en-GB" dirty="0" smtClean="0"/>
-              <a:t>Abstract service</a:t>
+              <a:rPr lang="en-GB" dirty="0"/>
+              <a:t>Infrastructure Pub/Sub</a:t>
             </a:r>
             <a:endParaRPr lang="en-US" dirty="0"/>
           </a:p>
         </p:txBody>
       </p:sp>
-      <p:pic>
-        <p:nvPicPr>
-          <p:cNvPr id="5" name="Content Placeholder 4"/>
-          <p:cNvPicPr>
-            <a:picLocks noGrp="1" noChangeAspect="1"/>
-          </p:cNvPicPr>
-          <p:nvPr>
-            <p:ph idx="1"/>
-          </p:nvPr>
-        </p:nvPicPr>
-        <p:blipFill>
-          <a:blip r:embed="rId2"/>
-          <a:stretch>
-            <a:fillRect/>
-          </a:stretch>
-        </p:blipFill>
-        <p:spPr>
-          <a:xfrm>
-            <a:off x="1674829" y="1774825"/>
-            <a:ext cx="5794342" cy="4625975"/>
-          </a:xfrm>
-          <a:prstGeom prst="rect">
-            <a:avLst/>
-          </a:prstGeom>
-        </p:spPr>
-      </p:pic>
+      <p:sp>
+        <p:nvSpPr>
+          <p:cNvPr id="6" name="Text Placeholder 5"/>
+          <p:cNvSpPr>
+            <a:spLocks noGrp="1"/>
+          </p:cNvSpPr>
+          <p:nvPr>
+            <p:ph type="body" idx="1"/>
+          </p:nvPr>
+        </p:nvSpPr>
+        <p:spPr/>
+        <p:txBody>
+          <a:bodyPr/>
+          <a:lstStyle/>
+          <a:p>
+            <a:endParaRPr lang="en-US"/>
+          </a:p>
+        </p:txBody>
+      </p:sp>
       <p:sp>
         <p:nvSpPr>
           <p:cNvPr id="4" name="Slide Number Placeholder 3"/>
@@ -11126,7 +11224,7 @@
     </p:spTree>
     <p:extLst>
       <p:ext uri="{BB962C8B-B14F-4D97-AF65-F5344CB8AC3E}">
-        <p14:creationId xmlns:p14="http://schemas.microsoft.com/office/powerpoint/2010/main" val="1783994502"/>
+        <p14:creationId xmlns:p14="http://schemas.microsoft.com/office/powerpoint/2010/main" val="477722368"/>
       </p:ext>
     </p:extLst>
   </p:cSld>
@@ -11155,7 +11253,7 @@
       </p:grpSpPr>
       <p:sp>
         <p:nvSpPr>
-          <p:cNvPr id="2" name="Title 1"/>
+          <p:cNvPr id="5" name="Title 4"/>
           <p:cNvSpPr>
             <a:spLocks noGrp="1"/>
           </p:cNvSpPr>
@@ -11168,40 +11266,29 @@
           <a:bodyPr/>
           <a:lstStyle/>
           <a:p>
-            <a:r>
-              <a:rPr lang="en-GB" dirty="0" smtClean="0"/>
-              <a:t>In Process</a:t>
-            </a:r>
-            <a:endParaRPr lang="en-US" dirty="0"/>
-          </a:p>
-        </p:txBody>
-      </p:sp>
-      <p:pic>
-        <p:nvPicPr>
-          <p:cNvPr id="5" name="Content Placeholder 4"/>
-          <p:cNvPicPr>
-            <a:picLocks noGrp="1" noChangeAspect="1"/>
-          </p:cNvPicPr>
+            <a:endParaRPr lang="en-US"/>
+          </a:p>
+        </p:txBody>
+      </p:sp>
+      <p:sp>
+        <p:nvSpPr>
+          <p:cNvPr id="6" name="Content Placeholder 5"/>
+          <p:cNvSpPr>
+            <a:spLocks noGrp="1"/>
+          </p:cNvSpPr>
           <p:nvPr>
             <p:ph idx="1"/>
           </p:nvPr>
-        </p:nvPicPr>
-        <p:blipFill>
-          <a:blip r:embed="rId2"/>
-          <a:stretch>
-            <a:fillRect/>
-          </a:stretch>
-        </p:blipFill>
-        <p:spPr>
-          <a:xfrm>
-            <a:off x="1123950" y="1958975"/>
-            <a:ext cx="6896100" cy="4257675"/>
-          </a:xfrm>
-          <a:prstGeom prst="rect">
-            <a:avLst/>
-          </a:prstGeom>
-        </p:spPr>
-      </p:pic>
+        </p:nvSpPr>
+        <p:spPr/>
+        <p:txBody>
+          <a:bodyPr/>
+          <a:lstStyle/>
+          <a:p>
+            <a:endParaRPr lang="en-US"/>
+          </a:p>
+        </p:txBody>
+      </p:sp>
       <p:sp>
         <p:nvSpPr>
           <p:cNvPr id="4" name="Slide Number Placeholder 3"/>
@@ -11229,7 +11316,7 @@
     </p:spTree>
     <p:extLst>
       <p:ext uri="{BB962C8B-B14F-4D97-AF65-F5344CB8AC3E}">
-        <p14:creationId xmlns:p14="http://schemas.microsoft.com/office/powerpoint/2010/main" val="3197191611"/>
+        <p14:creationId xmlns:p14="http://schemas.microsoft.com/office/powerpoint/2010/main" val="709132927"/>
       </p:ext>
     </p:extLst>
   </p:cSld>
@@ -11272,52 +11359,39 @@
           <a:lstStyle/>
           <a:p>
             <a:r>
-              <a:rPr lang="en-GB" dirty="0" smtClean="0"/>
-              <a:t>In Process</a:t>
+              <a:rPr lang="en-GB" dirty="0"/>
+              <a:t>Abstract service</a:t>
             </a:r>
             <a:endParaRPr lang="en-US" dirty="0"/>
           </a:p>
         </p:txBody>
       </p:sp>
-      <p:sp>
-        <p:nvSpPr>
-          <p:cNvPr id="3" name="Content Placeholder 2"/>
-          <p:cNvSpPr>
-            <a:spLocks noGrp="1"/>
-          </p:cNvSpPr>
+      <p:pic>
+        <p:nvPicPr>
+          <p:cNvPr id="5" name="Content Placeholder 4"/>
+          <p:cNvPicPr>
+            <a:picLocks noGrp="1" noChangeAspect="1"/>
+          </p:cNvPicPr>
           <p:nvPr>
             <p:ph idx="1"/>
           </p:nvPr>
-        </p:nvSpPr>
-        <p:spPr/>
-        <p:txBody>
-          <a:bodyPr/>
-          <a:lstStyle/>
-          <a:p>
-            <a:r>
-              <a:rPr lang="en-GB" dirty="0" smtClean="0"/>
-              <a:t>Client code uses </a:t>
-            </a:r>
-            <a:r>
-              <a:rPr lang="en-GB" dirty="0" err="1" smtClean="0"/>
-              <a:t>InProcessEventPublisher</a:t>
-            </a:r>
-            <a:r>
-              <a:rPr lang="en-GB" dirty="0" smtClean="0"/>
-              <a:t> or </a:t>
-            </a:r>
-            <a:r>
-              <a:rPr lang="en-GB" dirty="0" err="1" smtClean="0"/>
-              <a:t>InProcessEventDispatcher</a:t>
-            </a:r>
-            <a:r>
-              <a:rPr lang="en-GB" dirty="0" smtClean="0"/>
-              <a:t> via static instance() method or via dependency injection </a:t>
-            </a:r>
-            <a:endParaRPr lang="en-US" dirty="0"/>
-          </a:p>
-        </p:txBody>
-      </p:sp>
+        </p:nvPicPr>
+        <p:blipFill>
+          <a:blip r:embed="rId2"/>
+          <a:stretch>
+            <a:fillRect/>
+          </a:stretch>
+        </p:blipFill>
+        <p:spPr>
+          <a:xfrm>
+            <a:off x="1674829" y="1774825"/>
+            <a:ext cx="5794342" cy="4625975"/>
+          </a:xfrm>
+          <a:prstGeom prst="rect">
+            <a:avLst/>
+          </a:prstGeom>
+        </p:spPr>
+      </p:pic>
       <p:sp>
         <p:nvSpPr>
           <p:cNvPr id="4" name="Slide Number Placeholder 3"/>
@@ -11345,20 +11419,13 @@
     </p:spTree>
     <p:extLst>
       <p:ext uri="{BB962C8B-B14F-4D97-AF65-F5344CB8AC3E}">
-        <p14:creationId xmlns:p14="http://schemas.microsoft.com/office/powerpoint/2010/main" val="1984569913"/>
+        <p14:creationId xmlns:p14="http://schemas.microsoft.com/office/powerpoint/2010/main" val="1783994502"/>
       </p:ext>
     </p:extLst>
   </p:cSld>
   <p:clrMapOvr>
     <a:masterClrMapping/>
   </p:clrMapOvr>
-  <p:timing>
-    <p:tnLst>
-      <p:par>
-        <p:cTn id="1" dur="indefinite" restart="never" nodeType="tmRoot"/>
-      </p:par>
-    </p:tnLst>
-  </p:timing>
 </p:sld>
 </file>
 
@@ -11381,25 +11448,24 @@
       </p:grpSpPr>
       <p:sp>
         <p:nvSpPr>
-          <p:cNvPr id="4" name="Slide Number Placeholder 3"/>
-          <p:cNvSpPr>
-            <a:spLocks noGrp="1"/>
-          </p:cNvSpPr>
-          <p:nvPr>
-            <p:ph type="sldNum" sz="quarter" idx="12"/>
-          </p:nvPr>
-        </p:nvSpPr>
-        <p:spPr/>
-        <p:txBody>
-          <a:bodyPr/>
-          <a:lstStyle/>
-          <a:p>
-            <a:fld id="{024A9932-4E76-455F-8E1A-2CC10C89B014}" type="slidenum">
-              <a:rPr lang="pt-PT" smtClean="0"/>
-              <a:pPr/>
-              <a:t>48</a:t>
-            </a:fld>
-            <a:endParaRPr lang="pt-PT"/>
+          <p:cNvPr id="2" name="Title 1"/>
+          <p:cNvSpPr>
+            <a:spLocks noGrp="1"/>
+          </p:cNvSpPr>
+          <p:nvPr>
+            <p:ph type="title"/>
+          </p:nvPr>
+        </p:nvSpPr>
+        <p:spPr/>
+        <p:txBody>
+          <a:bodyPr/>
+          <a:lstStyle/>
+          <a:p>
+            <a:r>
+              <a:rPr lang="en-GB" dirty="0"/>
+              <a:t>In Process</a:t>
+            </a:r>
+            <a:endParaRPr lang="en-US" dirty="0"/>
           </a:p>
         </p:txBody>
       </p:sp>
@@ -11410,7 +11476,7 @@
             <a:picLocks noGrp="1" noChangeAspect="1"/>
           </p:cNvPicPr>
           <p:nvPr>
-            <p:ph idx="4294967295"/>
+            <p:ph idx="1"/>
           </p:nvPr>
         </p:nvPicPr>
         <p:blipFill>
@@ -11421,8 +11487,8 @@
         </p:blipFill>
         <p:spPr>
           <a:xfrm>
-            <a:off x="571500" y="-41275"/>
-            <a:ext cx="8572500" cy="6899275"/>
+            <a:off x="1123950" y="1958975"/>
+            <a:ext cx="6896100" cy="4257675"/>
           </a:xfrm>
           <a:prstGeom prst="rect">
             <a:avLst/>
@@ -11431,75 +11497,38 @@
       </p:pic>
       <p:sp>
         <p:nvSpPr>
-          <p:cNvPr id="2" name="Title 1"/>
-          <p:cNvSpPr>
-            <a:spLocks noGrp="1"/>
-          </p:cNvSpPr>
-          <p:nvPr>
-            <p:ph type="title" idx="4294967295"/>
-          </p:nvPr>
-        </p:nvSpPr>
-        <p:spPr>
-          <a:xfrm>
-            <a:off x="0" y="8620"/>
-            <a:ext cx="8229600" cy="1252538"/>
-          </a:xfrm>
-        </p:spPr>
-        <p:txBody>
-          <a:bodyPr/>
-          <a:lstStyle/>
-          <a:p>
-            <a:r>
-              <a:rPr lang="en-GB" dirty="0" smtClean="0">
-                <a:ln w="22225">
-                  <a:solidFill>
-                    <a:schemeClr val="accent2"/>
-                  </a:solidFill>
-                  <a:prstDash val="solid"/>
-                </a:ln>
-                <a:solidFill>
-                  <a:schemeClr val="accent2">
-                    <a:lumMod val="40000"/>
-                    <a:lumOff val="60000"/>
-                  </a:schemeClr>
-                </a:solidFill>
-              </a:rPr>
-              <a:t>Simple Persistent</a:t>
-            </a:r>
-            <a:endParaRPr lang="en-US" dirty="0">
-              <a:ln w="22225">
-                <a:solidFill>
-                  <a:schemeClr val="accent2"/>
-                </a:solidFill>
-                <a:prstDash val="solid"/>
-              </a:ln>
-              <a:solidFill>
-                <a:schemeClr val="accent2">
-                  <a:lumMod val="40000"/>
-                  <a:lumOff val="60000"/>
-                </a:schemeClr>
-              </a:solidFill>
-            </a:endParaRPr>
+          <p:cNvPr id="4" name="Slide Number Placeholder 3"/>
+          <p:cNvSpPr>
+            <a:spLocks noGrp="1"/>
+          </p:cNvSpPr>
+          <p:nvPr>
+            <p:ph type="sldNum" sz="quarter" idx="12"/>
+          </p:nvPr>
+        </p:nvSpPr>
+        <p:spPr/>
+        <p:txBody>
+          <a:bodyPr/>
+          <a:lstStyle/>
+          <a:p>
+            <a:fld id="{024A9932-4E76-455F-8E1A-2CC10C89B014}" type="slidenum">
+              <a:rPr lang="pt-PT" smtClean="0"/>
+              <a:pPr/>
+              <a:t>48</a:t>
+            </a:fld>
+            <a:endParaRPr lang="pt-PT"/>
           </a:p>
         </p:txBody>
       </p:sp>
     </p:spTree>
     <p:extLst>
       <p:ext uri="{BB962C8B-B14F-4D97-AF65-F5344CB8AC3E}">
-        <p14:creationId xmlns:p14="http://schemas.microsoft.com/office/powerpoint/2010/main" val="3159413259"/>
+        <p14:creationId xmlns:p14="http://schemas.microsoft.com/office/powerpoint/2010/main" val="3197191611"/>
       </p:ext>
     </p:extLst>
   </p:cSld>
   <p:clrMapOvr>
     <a:masterClrMapping/>
   </p:clrMapOvr>
-  <p:timing>
-    <p:tnLst>
-      <p:par>
-        <p:cTn id="1" dur="indefinite" restart="never" nodeType="tmRoot"/>
-      </p:par>
-    </p:tnLst>
-  </p:timing>
 </p:sld>
 </file>
 
@@ -11536,8 +11565,8 @@
           <a:lstStyle/>
           <a:p>
             <a:r>
-              <a:rPr lang="en-GB" dirty="0" smtClean="0"/>
-              <a:t>Simple Persistent</a:t>
+              <a:rPr lang="en-GB" dirty="0"/>
+              <a:t>In Process</a:t>
             </a:r>
             <a:endParaRPr lang="en-US" dirty="0"/>
           </a:p>
@@ -11559,17 +11588,25 @@
           <a:lstStyle/>
           <a:p>
             <a:r>
-              <a:rPr lang="en-GB" dirty="0" smtClean="0"/>
-              <a:t>Use only via dependency injection</a:t>
-            </a:r>
-          </a:p>
-          <a:p>
-            <a:r>
-              <a:rPr lang="en-GB" dirty="0" smtClean="0"/>
-              <a:t>Domain entities must be registered in persistence.xml</a:t>
-            </a:r>
-          </a:p>
-          <a:p>
+              <a:rPr lang="en-GB" dirty="0"/>
+              <a:t>Client code uses </a:t>
+            </a:r>
+            <a:r>
+              <a:rPr lang="en-GB" dirty="0" err="1"/>
+              <a:t>InProcessEventPublisher</a:t>
+            </a:r>
+            <a:r>
+              <a:rPr lang="en-GB" dirty="0"/>
+              <a:t> or </a:t>
+            </a:r>
+            <a:r>
+              <a:rPr lang="en-GB" dirty="0" err="1"/>
+              <a:t>InProcessEventDispatcher</a:t>
+            </a:r>
+            <a:r>
+              <a:rPr lang="en-GB" dirty="0"/>
+              <a:t> via static instance() method or via dependency injection </a:t>
+            </a:r>
             <a:endParaRPr lang="en-US" dirty="0"/>
           </a:p>
         </p:txBody>
@@ -11601,20 +11638,13 @@
     </p:spTree>
     <p:extLst>
       <p:ext uri="{BB962C8B-B14F-4D97-AF65-F5344CB8AC3E}">
-        <p14:creationId xmlns:p14="http://schemas.microsoft.com/office/powerpoint/2010/main" val="3162552291"/>
+        <p14:creationId xmlns:p14="http://schemas.microsoft.com/office/powerpoint/2010/main" val="1984569913"/>
       </p:ext>
     </p:extLst>
   </p:cSld>
   <p:clrMapOvr>
     <a:masterClrMapping/>
   </p:clrMapOvr>
-  <p:timing>
-    <p:tnLst>
-      <p:par>
-        <p:cTn id="1" dur="indefinite" restart="never" nodeType="tmRoot"/>
-      </p:par>
-    </p:tnLst>
-  </p:timing>
 </p:sld>
 </file>
 
@@ -11652,11 +11682,7 @@
           <a:p>
             <a:r>
               <a:rPr lang="en-GB" dirty="0"/>
-              <a:t>C</a:t>
-            </a:r>
-            <a:r>
-              <a:rPr lang="en-GB" dirty="0" smtClean="0"/>
-              <a:t>ore</a:t>
+              <a:t>Core</a:t>
             </a:r>
             <a:endParaRPr lang="en-US" dirty="0"/>
           </a:p>
@@ -11715,13 +11741,6 @@
   <p:clrMapOvr>
     <a:masterClrMapping/>
   </p:clrMapOvr>
-  <p:timing>
-    <p:tnLst>
-      <p:par>
-        <p:cTn id="1" dur="indefinite" restart="never" nodeType="tmRoot"/>
-      </p:par>
-    </p:tnLst>
-  </p:timing>
 </p:sld>
 </file>
 
@@ -11744,44 +11763,6 @@
       </p:grpSpPr>
       <p:sp>
         <p:nvSpPr>
-          <p:cNvPr id="5" name="Title 4"/>
-          <p:cNvSpPr>
-            <a:spLocks noGrp="1"/>
-          </p:cNvSpPr>
-          <p:nvPr>
-            <p:ph type="title"/>
-          </p:nvPr>
-        </p:nvSpPr>
-        <p:spPr/>
-        <p:txBody>
-          <a:bodyPr/>
-          <a:lstStyle/>
-          <a:p>
-            <a:endParaRPr lang="en-US"/>
-          </a:p>
-        </p:txBody>
-      </p:sp>
-      <p:sp>
-        <p:nvSpPr>
-          <p:cNvPr id="6" name="Text Placeholder 5"/>
-          <p:cNvSpPr>
-            <a:spLocks noGrp="1"/>
-          </p:cNvSpPr>
-          <p:nvPr>
-            <p:ph type="body" idx="1"/>
-          </p:nvPr>
-        </p:nvSpPr>
-        <p:spPr/>
-        <p:txBody>
-          <a:bodyPr/>
-          <a:lstStyle/>
-          <a:p>
-            <a:endParaRPr lang="en-US"/>
-          </a:p>
-        </p:txBody>
-      </p:sp>
-      <p:sp>
-        <p:nvSpPr>
           <p:cNvPr id="4" name="Slide Number Placeholder 3"/>
           <p:cNvSpPr>
             <a:spLocks noGrp="1"/>
@@ -11804,10 +11785,90 @@
           </a:p>
         </p:txBody>
       </p:sp>
+      <p:pic>
+        <p:nvPicPr>
+          <p:cNvPr id="5" name="Content Placeholder 4"/>
+          <p:cNvPicPr>
+            <a:picLocks noGrp="1" noChangeAspect="1"/>
+          </p:cNvPicPr>
+          <p:nvPr>
+            <p:ph idx="4294967295"/>
+          </p:nvPr>
+        </p:nvPicPr>
+        <p:blipFill>
+          <a:blip r:embed="rId2"/>
+          <a:stretch>
+            <a:fillRect/>
+          </a:stretch>
+        </p:blipFill>
+        <p:spPr>
+          <a:xfrm>
+            <a:off x="571500" y="-41275"/>
+            <a:ext cx="8572500" cy="6899275"/>
+          </a:xfrm>
+          <a:prstGeom prst="rect">
+            <a:avLst/>
+          </a:prstGeom>
+        </p:spPr>
+      </p:pic>
+      <p:sp>
+        <p:nvSpPr>
+          <p:cNvPr id="2" name="Title 1"/>
+          <p:cNvSpPr>
+            <a:spLocks noGrp="1"/>
+          </p:cNvSpPr>
+          <p:nvPr>
+            <p:ph type="title" idx="4294967295"/>
+          </p:nvPr>
+        </p:nvSpPr>
+        <p:spPr>
+          <a:xfrm>
+            <a:off x="0" y="8620"/>
+            <a:ext cx="8229600" cy="1252538"/>
+          </a:xfrm>
+        </p:spPr>
+        <p:txBody>
+          <a:bodyPr/>
+          <a:lstStyle/>
+          <a:p>
+            <a:r>
+              <a:rPr lang="en-GB" dirty="0">
+                <a:ln w="22225">
+                  <a:solidFill>
+                    <a:schemeClr val="accent2"/>
+                  </a:solidFill>
+                  <a:prstDash val="solid"/>
+                </a:ln>
+                <a:solidFill>
+                  <a:schemeClr val="accent2">
+                    <a:lumMod val="40000"/>
+                    <a:lumOff val="60000"/>
+                  </a:schemeClr>
+                </a:solidFill>
+              </a:rPr>
+              <a:t>Simple Persistent</a:t>
+            </a:r>
+            <a:endParaRPr lang="en-US" dirty="0">
+              <a:ln w="22225">
+                <a:solidFill>
+                  <a:schemeClr val="accent2"/>
+                </a:solidFill>
+                <a:prstDash val="solid"/>
+              </a:ln>
+              <a:solidFill>
+                <a:schemeClr val="accent2">
+                  <a:lumMod val="40000"/>
+                  <a:lumOff val="60000"/>
+                </a:schemeClr>
+              </a:solidFill>
+            </a:endParaRPr>
+          </a:p>
+        </p:txBody>
+      </p:sp>
     </p:spTree>
     <p:extLst>
       <p:ext uri="{BB962C8B-B14F-4D97-AF65-F5344CB8AC3E}">
-        <p14:creationId xmlns:p14="http://schemas.microsoft.com/office/powerpoint/2010/main" val="3437654254"/>
+        <p14:creationId xmlns:p14="http://schemas.microsoft.com/office/powerpoint/2010/main" val="3159413259"/>
       </p:ext>
     </p:extLst>
   </p:cSld>
@@ -11836,7 +11897,7 @@
       </p:grpSpPr>
       <p:sp>
         <p:nvSpPr>
-          <p:cNvPr id="3" name="Title 2"/>
+          <p:cNvPr id="2" name="Title 1"/>
           <p:cNvSpPr>
             <a:spLocks noGrp="1"/>
           </p:cNvSpPr>
@@ -11851,7 +11912,7 @@
           <a:p>
             <a:r>
               <a:rPr lang="en-GB" dirty="0"/>
-              <a:t>Build</a:t>
+              <a:t>Simple Persistent</a:t>
             </a:r>
             <a:endParaRPr lang="en-US" dirty="0"/>
           </a:p>
@@ -11859,7 +11920,7 @@
       </p:sp>
       <p:sp>
         <p:nvSpPr>
-          <p:cNvPr id="4" name="Content Placeholder 3"/>
+          <p:cNvPr id="3" name="Content Placeholder 2"/>
           <p:cNvSpPr>
             <a:spLocks noGrp="1"/>
           </p:cNvSpPr>
@@ -11874,64 +11935,13 @@
           <a:p>
             <a:r>
               <a:rPr lang="en-GB" dirty="0"/>
-              <a:t>Maven</a:t>
-            </a:r>
-          </a:p>
-          <a:p>
-            <a:pPr lvl="1"/>
-            <a:r>
-              <a:rPr lang="en-GB" dirty="0"/>
-              <a:t>Dependency manager</a:t>
-            </a:r>
-          </a:p>
-          <a:p>
-            <a:pPr lvl="1"/>
-            <a:r>
-              <a:rPr lang="en-GB" dirty="0" err="1"/>
-              <a:t>Artifact</a:t>
-            </a:r>
-            <a:r>
-              <a:rPr lang="en-GB" dirty="0"/>
-              <a:t> (jar) repository </a:t>
-            </a:r>
-          </a:p>
-          <a:p>
-            <a:pPr lvl="1"/>
-            <a:r>
-              <a:rPr lang="en-GB" dirty="0"/>
-              <a:t>Build automation</a:t>
-            </a:r>
-          </a:p>
-          <a:p>
-            <a:pPr lvl="1"/>
-            <a:r>
-              <a:rPr lang="en-GB" dirty="0"/>
-              <a:t>Other tasks, e.g., deploy, run</a:t>
-            </a:r>
-          </a:p>
-          <a:p>
-            <a:r>
-              <a:rPr lang="en-GB" dirty="0"/>
-              <a:t>Works for Eclipse, </a:t>
-            </a:r>
-            <a:r>
-              <a:rPr lang="en-GB" dirty="0" err="1"/>
-              <a:t>InteliJ</a:t>
-            </a:r>
-            <a:r>
-              <a:rPr lang="en-GB" dirty="0"/>
-              <a:t>, </a:t>
-            </a:r>
-            <a:r>
-              <a:rPr lang="en-GB" dirty="0" err="1"/>
-              <a:t>Netbeans</a:t>
-            </a:r>
-            <a:endParaRPr lang="en-GB" dirty="0"/>
-          </a:p>
-          <a:p>
-            <a:r>
-              <a:rPr lang="en-GB" dirty="0"/>
-              <a:t>Pom.xml</a:t>
+              <a:t>Use only via dependency injection</a:t>
+            </a:r>
+          </a:p>
+          <a:p>
+            <a:r>
+              <a:rPr lang="en-GB" dirty="0"/>
+              <a:t>Domain entities must be registered in persistence.xml</a:t>
             </a:r>
           </a:p>
           <a:p>
@@ -11941,7 +11951,7 @@
       </p:sp>
       <p:sp>
         <p:nvSpPr>
-          <p:cNvPr id="2" name="Slide Number Placeholder 1"/>
+          <p:cNvPr id="4" name="Slide Number Placeholder 3"/>
           <p:cNvSpPr>
             <a:spLocks noGrp="1"/>
           </p:cNvSpPr>
@@ -11966,7 +11976,7 @@
     </p:spTree>
     <p:extLst>
       <p:ext uri="{BB962C8B-B14F-4D97-AF65-F5344CB8AC3E}">
-        <p14:creationId xmlns:p14="http://schemas.microsoft.com/office/powerpoint/2010/main" val="3878863745"/>
+        <p14:creationId xmlns:p14="http://schemas.microsoft.com/office/powerpoint/2010/main" val="3162552291"/>
       </p:ext>
     </p:extLst>
   </p:cSld>
@@ -11995,7 +12005,7 @@
       </p:grpSpPr>
       <p:sp>
         <p:nvSpPr>
-          <p:cNvPr id="2" name="Title 1"/>
+          <p:cNvPr id="5" name="Title 4"/>
           <p:cNvSpPr>
             <a:spLocks noGrp="1"/>
           </p:cNvSpPr>
@@ -12014,12 +12024,12 @@
       </p:sp>
       <p:sp>
         <p:nvSpPr>
-          <p:cNvPr id="3" name="Content Placeholder 2"/>
-          <p:cNvSpPr>
-            <a:spLocks noGrp="1"/>
-          </p:cNvSpPr>
-          <p:nvPr>
-            <p:ph idx="1"/>
+          <p:cNvPr id="6" name="Text Placeholder 5"/>
+          <p:cNvSpPr>
+            <a:spLocks noGrp="1"/>
+          </p:cNvSpPr>
+          <p:nvPr>
+            <p:ph type="body" idx="1"/>
           </p:nvPr>
         </p:nvSpPr>
         <p:spPr/>
@@ -12050,6 +12060,257 @@
               <a:rPr lang="pt-PT" smtClean="0"/>
               <a:pPr/>
               <a:t>52</a:t>
+            </a:fld>
+            <a:endParaRPr lang="pt-PT"/>
+          </a:p>
+        </p:txBody>
+      </p:sp>
+    </p:spTree>
+    <p:extLst>
+      <p:ext uri="{BB962C8B-B14F-4D97-AF65-F5344CB8AC3E}">
+        <p14:creationId xmlns:p14="http://schemas.microsoft.com/office/powerpoint/2010/main" val="3437654254"/>
+      </p:ext>
+    </p:extLst>
+  </p:cSld>
+  <p:clrMapOvr>
+    <a:masterClrMapping/>
+  </p:clrMapOvr>
+</p:sld>
+</file>
+
+<file path=ppt/slides/slide53.xml><?xml version="1.0" encoding="utf-8"?>
+<p:sld xmlns:a="http://schemas.openxmlformats.org/drawingml/2006/main" xmlns:r="http://schemas.openxmlformats.org/officeDocument/2006/relationships" xmlns:p="http://schemas.openxmlformats.org/presentationml/2006/main">
+  <p:cSld>
+    <p:spTree>
+      <p:nvGrpSpPr>
+        <p:cNvPr id="1" name=""/>
+        <p:cNvGrpSpPr/>
+        <p:nvPr/>
+      </p:nvGrpSpPr>
+      <p:grpSpPr>
+        <a:xfrm>
+          <a:off x="0" y="0"/>
+          <a:ext cx="0" cy="0"/>
+          <a:chOff x="0" y="0"/>
+          <a:chExt cx="0" cy="0"/>
+        </a:xfrm>
+      </p:grpSpPr>
+      <p:sp>
+        <p:nvSpPr>
+          <p:cNvPr id="3" name="Title 2"/>
+          <p:cNvSpPr>
+            <a:spLocks noGrp="1"/>
+          </p:cNvSpPr>
+          <p:nvPr>
+            <p:ph type="title"/>
+          </p:nvPr>
+        </p:nvSpPr>
+        <p:spPr/>
+        <p:txBody>
+          <a:bodyPr/>
+          <a:lstStyle/>
+          <a:p>
+            <a:r>
+              <a:rPr lang="en-GB" dirty="0"/>
+              <a:t>Build</a:t>
+            </a:r>
+            <a:endParaRPr lang="en-US" dirty="0"/>
+          </a:p>
+        </p:txBody>
+      </p:sp>
+      <p:sp>
+        <p:nvSpPr>
+          <p:cNvPr id="4" name="Content Placeholder 3"/>
+          <p:cNvSpPr>
+            <a:spLocks noGrp="1"/>
+          </p:cNvSpPr>
+          <p:nvPr>
+            <p:ph idx="1"/>
+          </p:nvPr>
+        </p:nvSpPr>
+        <p:spPr/>
+        <p:txBody>
+          <a:bodyPr/>
+          <a:lstStyle/>
+          <a:p>
+            <a:r>
+              <a:rPr lang="en-GB" dirty="0"/>
+              <a:t>Maven</a:t>
+            </a:r>
+          </a:p>
+          <a:p>
+            <a:pPr lvl="1"/>
+            <a:r>
+              <a:rPr lang="en-GB" dirty="0"/>
+              <a:t>Dependency manager</a:t>
+            </a:r>
+          </a:p>
+          <a:p>
+            <a:pPr lvl="1"/>
+            <a:r>
+              <a:rPr lang="en-GB" dirty="0" err="1"/>
+              <a:t>Artifact</a:t>
+            </a:r>
+            <a:r>
+              <a:rPr lang="en-GB" dirty="0"/>
+              <a:t> (jar) repository </a:t>
+            </a:r>
+          </a:p>
+          <a:p>
+            <a:pPr lvl="1"/>
+            <a:r>
+              <a:rPr lang="en-GB" dirty="0"/>
+              <a:t>Build automation</a:t>
+            </a:r>
+          </a:p>
+          <a:p>
+            <a:pPr lvl="1"/>
+            <a:r>
+              <a:rPr lang="en-GB" dirty="0"/>
+              <a:t>Other tasks, e.g., deploy, run</a:t>
+            </a:r>
+          </a:p>
+          <a:p>
+            <a:r>
+              <a:rPr lang="en-GB" dirty="0"/>
+              <a:t>Works for Eclipse, </a:t>
+            </a:r>
+            <a:r>
+              <a:rPr lang="en-GB" dirty="0" err="1"/>
+              <a:t>InteliJ</a:t>
+            </a:r>
+            <a:r>
+              <a:rPr lang="en-GB" dirty="0"/>
+              <a:t>, </a:t>
+            </a:r>
+            <a:r>
+              <a:rPr lang="en-GB" dirty="0" err="1"/>
+              <a:t>Netbeans</a:t>
+            </a:r>
+            <a:endParaRPr lang="en-GB" dirty="0"/>
+          </a:p>
+          <a:p>
+            <a:r>
+              <a:rPr lang="en-GB" dirty="0"/>
+              <a:t>Pom.xml</a:t>
+            </a:r>
+          </a:p>
+          <a:p>
+            <a:endParaRPr lang="en-US" dirty="0"/>
+          </a:p>
+        </p:txBody>
+      </p:sp>
+      <p:sp>
+        <p:nvSpPr>
+          <p:cNvPr id="2" name="Slide Number Placeholder 1"/>
+          <p:cNvSpPr>
+            <a:spLocks noGrp="1"/>
+          </p:cNvSpPr>
+          <p:nvPr>
+            <p:ph type="sldNum" sz="quarter" idx="12"/>
+          </p:nvPr>
+        </p:nvSpPr>
+        <p:spPr/>
+        <p:txBody>
+          <a:bodyPr/>
+          <a:lstStyle/>
+          <a:p>
+            <a:fld id="{024A9932-4E76-455F-8E1A-2CC10C89B014}" type="slidenum">
+              <a:rPr lang="pt-PT" smtClean="0"/>
+              <a:pPr/>
+              <a:t>53</a:t>
+            </a:fld>
+            <a:endParaRPr lang="pt-PT"/>
+          </a:p>
+        </p:txBody>
+      </p:sp>
+    </p:spTree>
+    <p:extLst>
+      <p:ext uri="{BB962C8B-B14F-4D97-AF65-F5344CB8AC3E}">
+        <p14:creationId xmlns:p14="http://schemas.microsoft.com/office/powerpoint/2010/main" val="3878863745"/>
+      </p:ext>
+    </p:extLst>
+  </p:cSld>
+  <p:clrMapOvr>
+    <a:masterClrMapping/>
+  </p:clrMapOvr>
+</p:sld>
+</file>
+
+<file path=ppt/slides/slide54.xml><?xml version="1.0" encoding="utf-8"?>
+<p:sld xmlns:a="http://schemas.openxmlformats.org/drawingml/2006/main" xmlns:r="http://schemas.openxmlformats.org/officeDocument/2006/relationships" xmlns:p="http://schemas.openxmlformats.org/presentationml/2006/main">
+  <p:cSld>
+    <p:spTree>
+      <p:nvGrpSpPr>
+        <p:cNvPr id="1" name=""/>
+        <p:cNvGrpSpPr/>
+        <p:nvPr/>
+      </p:nvGrpSpPr>
+      <p:grpSpPr>
+        <a:xfrm>
+          <a:off x="0" y="0"/>
+          <a:ext cx="0" cy="0"/>
+          <a:chOff x="0" y="0"/>
+          <a:chExt cx="0" cy="0"/>
+        </a:xfrm>
+      </p:grpSpPr>
+      <p:sp>
+        <p:nvSpPr>
+          <p:cNvPr id="2" name="Title 1"/>
+          <p:cNvSpPr>
+            <a:spLocks noGrp="1"/>
+          </p:cNvSpPr>
+          <p:nvPr>
+            <p:ph type="title"/>
+          </p:nvPr>
+        </p:nvSpPr>
+        <p:spPr/>
+        <p:txBody>
+          <a:bodyPr/>
+          <a:lstStyle/>
+          <a:p>
+            <a:endParaRPr lang="en-US"/>
+          </a:p>
+        </p:txBody>
+      </p:sp>
+      <p:sp>
+        <p:nvSpPr>
+          <p:cNvPr id="3" name="Content Placeholder 2"/>
+          <p:cNvSpPr>
+            <a:spLocks noGrp="1"/>
+          </p:cNvSpPr>
+          <p:nvPr>
+            <p:ph idx="1"/>
+          </p:nvPr>
+        </p:nvSpPr>
+        <p:spPr/>
+        <p:txBody>
+          <a:bodyPr/>
+          <a:lstStyle/>
+          <a:p>
+            <a:endParaRPr lang="en-US"/>
+          </a:p>
+        </p:txBody>
+      </p:sp>
+      <p:sp>
+        <p:nvSpPr>
+          <p:cNvPr id="4" name="Slide Number Placeholder 3"/>
+          <p:cNvSpPr>
+            <a:spLocks noGrp="1"/>
+          </p:cNvSpPr>
+          <p:nvPr>
+            <p:ph type="sldNum" sz="quarter" idx="12"/>
+          </p:nvPr>
+        </p:nvSpPr>
+        <p:spPr/>
+        <p:txBody>
+          <a:bodyPr/>
+          <a:lstStyle/>
+          <a:p>
+            <a:fld id="{024A9932-4E76-455F-8E1A-2CC10C89B014}" type="slidenum">
+              <a:rPr lang="pt-PT" smtClean="0"/>
+              <a:pPr/>
+              <a:t>54</a:t>
             </a:fld>
             <a:endParaRPr lang="pt-PT"/>
           </a:p>
@@ -12092,7 +12353,7 @@
 </p:sld>
 </file>
 
-<file path=ppt/slides/slide53.xml><?xml version="1.0" encoding="utf-8"?>
+<file path=ppt/slides/slide55.xml><?xml version="1.0" encoding="utf-8"?>
 <p:sld xmlns:a="http://schemas.openxmlformats.org/drawingml/2006/main" xmlns:r="http://schemas.openxmlformats.org/officeDocument/2006/relationships" xmlns:p="http://schemas.openxmlformats.org/presentationml/2006/main">
   <p:cSld>
     <p:spTree>
@@ -12168,7 +12429,7 @@
             <a:fld id="{024A9932-4E76-455F-8E1A-2CC10C89B014}" type="slidenum">
               <a:rPr lang="pt-PT" smtClean="0"/>
               <a:pPr/>
-              <a:t>53</a:t>
+              <a:t>55</a:t>
             </a:fld>
             <a:endParaRPr lang="pt-PT"/>
           </a:p>
@@ -12244,10 +12505,9 @@
           <a:lstStyle/>
           <a:p>
             <a:r>
-              <a:rPr lang="en-GB" dirty="0" smtClean="0"/>
+              <a:rPr lang="en-GB" dirty="0"/>
               <a:t>DDD</a:t>
             </a:r>
-            <a:endParaRPr lang="en-GB" dirty="0"/>
           </a:p>
         </p:txBody>
       </p:sp>
@@ -12267,12 +12527,8 @@
           <a:lstStyle/>
           <a:p>
             <a:r>
-              <a:rPr lang="en-GB" dirty="0" smtClean="0"/>
-              <a:t>DDD </a:t>
-            </a:r>
-            <a:r>
-              <a:rPr lang="en-GB" dirty="0"/>
-              <a:t>pattern interfaces</a:t>
+              <a:rPr lang="en-GB" dirty="0"/>
+              <a:t>DDD pattern interfaces</a:t>
             </a:r>
           </a:p>
           <a:p>
@@ -12300,16 +12556,12 @@
             <a:endParaRPr lang="en-GB" dirty="0"/>
           </a:p>
           <a:p>
-            <a:endParaRPr lang="en-GB" dirty="0" smtClean="0"/>
-          </a:p>
-          <a:p>
-            <a:r>
-              <a:rPr lang="en-GB" dirty="0" smtClean="0"/>
-              <a:t>Domain </a:t>
-            </a:r>
-            <a:r>
-              <a:rPr lang="en-GB" dirty="0"/>
-              <a:t>objects</a:t>
+            <a:endParaRPr lang="en-GB" dirty="0"/>
+          </a:p>
+          <a:p>
+            <a:r>
+              <a:rPr lang="en-GB" dirty="0"/>
+              <a:t>Domain objects</a:t>
             </a:r>
           </a:p>
           <a:p>
@@ -12330,20 +12582,15 @@
             <a:pPr lvl="1"/>
             <a:r>
               <a:rPr lang="en-GB" dirty="0"/>
-              <a:t>Time </a:t>
-            </a:r>
-            <a:r>
-              <a:rPr lang="en-GB" dirty="0" smtClean="0"/>
-              <a:t>period</a:t>
+              <a:t>Time period</a:t>
             </a:r>
           </a:p>
           <a:p>
             <a:pPr lvl="1"/>
             <a:r>
-              <a:rPr lang="en-GB" dirty="0" smtClean="0"/>
+              <a:rPr lang="en-GB" dirty="0"/>
               <a:t>…</a:t>
             </a:r>
-            <a:endParaRPr lang="en-GB" dirty="0"/>
           </a:p>
         </p:txBody>
       </p:sp>
@@ -12433,13 +12680,6 @@
   <p:clrMapOvr>
     <a:masterClrMapping/>
   </p:clrMapOvr>
-  <p:timing>
-    <p:tnLst>
-      <p:par>
-        <p:cTn id="1" dur="indefinite" restart="never" nodeType="tmRoot"/>
-      </p:par>
-    </p:tnLst>
-  </p:timing>
 </p:sld>
 </file>
 
@@ -12476,7 +12716,7 @@
           <a:lstStyle/>
           <a:p>
             <a:r>
-              <a:rPr lang="en-GB" dirty="0" smtClean="0"/>
+              <a:rPr lang="en-GB" dirty="0"/>
               <a:t>Common patterns</a:t>
             </a:r>
             <a:endParaRPr lang="en-US" dirty="0"/>
@@ -12499,40 +12739,36 @@
           <a:lstStyle/>
           <a:p>
             <a:r>
-              <a:rPr lang="en-GB" dirty="0" smtClean="0"/>
+              <a:rPr lang="en-GB" dirty="0"/>
               <a:t>Actions</a:t>
             </a:r>
           </a:p>
           <a:p>
             <a:pPr lvl="1"/>
             <a:r>
-              <a:rPr lang="en-GB" dirty="0" err="1" smtClean="0"/>
+              <a:rPr lang="en-GB" dirty="0" err="1"/>
               <a:t>a.k.a</a:t>
             </a:r>
             <a:r>
-              <a:rPr lang="en-GB" dirty="0" smtClean="0"/>
-              <a:t> </a:t>
-            </a:r>
-            <a:r>
-              <a:rPr lang="en-GB" dirty="0" smtClean="0"/>
-              <a:t>Command</a:t>
-            </a:r>
-          </a:p>
-          <a:p>
-            <a:r>
-              <a:rPr lang="en-GB" dirty="0" smtClean="0"/>
+              <a:rPr lang="en-GB" dirty="0"/>
+              <a:t> Command</a:t>
+            </a:r>
+          </a:p>
+          <a:p>
+            <a:r>
+              <a:rPr lang="en-GB" dirty="0"/>
               <a:t>Memento</a:t>
             </a:r>
           </a:p>
           <a:p>
             <a:r>
-              <a:rPr lang="en-GB" dirty="0" smtClean="0"/>
+              <a:rPr lang="en-GB" dirty="0"/>
               <a:t>Visitor</a:t>
             </a:r>
           </a:p>
           <a:p>
             <a:r>
-              <a:rPr lang="en-GB" dirty="0" smtClean="0"/>
+              <a:rPr lang="en-GB" dirty="0"/>
               <a:t>DTO</a:t>
             </a:r>
             <a:endParaRPr lang="en-US" dirty="0"/>
@@ -12607,13 +12843,6 @@
   <p:clrMapOvr>
     <a:masterClrMapping/>
   </p:clrMapOvr>
-  <p:timing>
-    <p:tnLst>
-      <p:par>
-        <p:cTn id="1" dur="indefinite" restart="never" nodeType="tmRoot"/>
-      </p:par>
-    </p:tnLst>
-  </p:timing>
 </p:sld>
 </file>
 
@@ -12650,10 +12879,9 @@
           <a:lstStyle/>
           <a:p>
             <a:r>
-              <a:rPr lang="en-GB" dirty="0" smtClean="0"/>
+              <a:rPr lang="en-GB" dirty="0"/>
               <a:t>Utilities</a:t>
             </a:r>
-            <a:endParaRPr lang="en-GB" dirty="0"/>
           </a:p>
         </p:txBody>
       </p:sp>
@@ -12736,61 +12964,59 @@
           <a:lstStyle/>
           <a:p>
             <a:r>
-              <a:rPr lang="en-GB" dirty="0" smtClean="0"/>
+              <a:rPr lang="en-GB" dirty="0"/>
               <a:t>Arrays</a:t>
             </a:r>
           </a:p>
           <a:p>
             <a:r>
-              <a:rPr lang="en-GB" dirty="0" smtClean="0"/>
+              <a:rPr lang="en-GB" dirty="0"/>
               <a:t>Collections</a:t>
             </a:r>
           </a:p>
           <a:p>
             <a:r>
-              <a:rPr lang="en-GB" dirty="0" err="1" smtClean="0"/>
+              <a:rPr lang="en-GB" dirty="0" err="1"/>
               <a:t>Comparables</a:t>
             </a:r>
-            <a:endParaRPr lang="en-GB" dirty="0" smtClean="0"/>
-          </a:p>
-          <a:p>
             <a:endParaRPr lang="en-GB" dirty="0"/>
           </a:p>
           <a:p>
-            <a:r>
-              <a:rPr lang="en-GB" dirty="0" err="1" smtClean="0"/>
+            <a:endParaRPr lang="en-GB" dirty="0"/>
+          </a:p>
+          <a:p>
+            <a:r>
+              <a:rPr lang="en-GB" dirty="0" err="1"/>
               <a:t>HashCoder</a:t>
             </a:r>
-            <a:endParaRPr lang="en-GB" dirty="0" smtClean="0"/>
+            <a:endParaRPr lang="en-GB" dirty="0"/>
           </a:p>
           <a:p>
             <a:pPr lvl="1"/>
             <a:r>
-              <a:rPr lang="en-GB" dirty="0" smtClean="0"/>
+              <a:rPr lang="en-GB" dirty="0"/>
               <a:t>Simplifies generation oh a class’ hash code</a:t>
             </a:r>
-            <a:endParaRPr lang="en-GB" dirty="0" smtClean="0"/>
           </a:p>
           <a:p>
             <a:endParaRPr lang="en-GB" dirty="0"/>
           </a:p>
           <a:p>
             <a:r>
-              <a:rPr lang="en-GB" dirty="0" err="1" smtClean="0"/>
+              <a:rPr lang="en-GB" dirty="0" err="1"/>
               <a:t>NumberGenerator</a:t>
             </a:r>
-            <a:endParaRPr lang="en-GB" dirty="0" smtClean="0"/>
+            <a:endParaRPr lang="en-GB" dirty="0"/>
           </a:p>
           <a:p>
             <a:pPr lvl="1"/>
             <a:r>
-              <a:rPr lang="en-GB" dirty="0" smtClean="0"/>
+              <a:rPr lang="en-GB" dirty="0"/>
               <a:t>Simple API for Java Random class</a:t>
             </a:r>
+          </a:p>
+          <a:p>
             <a:endParaRPr lang="en-GB" dirty="0"/>
-          </a:p>
-          <a:p>
-            <a:endParaRPr lang="en-GB" dirty="0" smtClean="0"/>
           </a:p>
           <a:p>
             <a:endParaRPr lang="en-GB" dirty="0"/>
@@ -12870,10 +13096,9 @@
           <a:lstStyle/>
           <a:p>
             <a:r>
-              <a:rPr lang="en-GB" dirty="0" smtClean="0"/>
+              <a:rPr lang="en-GB" dirty="0"/>
               <a:t>Utilities</a:t>
             </a:r>
-            <a:endParaRPr lang="en-GB" dirty="0"/>
           </a:p>
         </p:txBody>
       </p:sp>
@@ -12908,14 +13133,14 @@
           </a:p>
           <a:p>
             <a:r>
-              <a:rPr lang="en-GB" dirty="0" err="1" smtClean="0"/>
+              <a:rPr lang="en-GB" dirty="0" err="1"/>
               <a:t>StringMixin</a:t>
             </a:r>
-            <a:endParaRPr lang="en-GB" dirty="0" smtClean="0"/>
+            <a:endParaRPr lang="en-GB" dirty="0"/>
           </a:p>
           <a:p>
             <a:pPr lvl="1"/>
-            <a:endParaRPr lang="en-GB" dirty="0" smtClean="0"/>
+            <a:endParaRPr lang="en-GB" dirty="0"/>
           </a:p>
           <a:p>
             <a:r>
@@ -12932,36 +13157,35 @@
           </a:p>
           <a:p>
             <a:pPr lvl="1"/>
-            <a:endParaRPr lang="en-GB" dirty="0" smtClean="0"/>
-          </a:p>
-          <a:p>
-            <a:r>
-              <a:rPr lang="en-GB" dirty="0" err="1" smtClean="0"/>
+            <a:endParaRPr lang="en-GB" dirty="0"/>
+          </a:p>
+          <a:p>
+            <a:r>
+              <a:rPr lang="en-GB" dirty="0" err="1"/>
               <a:t>StringPredicates</a:t>
             </a:r>
-            <a:endParaRPr lang="en-GB" dirty="0" smtClean="0"/>
+            <a:endParaRPr lang="en-GB" dirty="0"/>
           </a:p>
           <a:p>
             <a:pPr lvl="1"/>
             <a:r>
-              <a:rPr lang="en-GB" dirty="0" smtClean="0"/>
+              <a:rPr lang="en-GB" dirty="0"/>
               <a:t>Predicates to test strings</a:t>
             </a:r>
           </a:p>
           <a:p>
             <a:r>
-              <a:rPr lang="en-GB" dirty="0" err="1" smtClean="0"/>
+              <a:rPr lang="en-GB" dirty="0" err="1"/>
               <a:t>NumberPredicates</a:t>
             </a:r>
-            <a:endParaRPr lang="en-GB" dirty="0" smtClean="0"/>
+            <a:endParaRPr lang="en-GB" dirty="0"/>
           </a:p>
           <a:p>
             <a:pPr lvl="1"/>
             <a:r>
-              <a:rPr lang="en-GB" dirty="0" smtClean="0"/>
+              <a:rPr lang="en-GB" dirty="0"/>
               <a:t>Predicates to test primitive numbers</a:t>
             </a:r>
-            <a:endParaRPr lang="en-GB" dirty="0"/>
           </a:p>
         </p:txBody>
       </p:sp>
@@ -12983,51 +13207,51 @@
           <a:lstStyle/>
           <a:p>
             <a:r>
-              <a:rPr lang="en-GB" dirty="0" err="1" smtClean="0"/>
+              <a:rPr lang="en-GB" dirty="0" err="1"/>
               <a:t>PreConditions</a:t>
             </a:r>
-            <a:endParaRPr lang="en-GB" dirty="0" smtClean="0"/>
+            <a:endParaRPr lang="en-GB" dirty="0"/>
           </a:p>
           <a:p>
             <a:pPr lvl="1"/>
             <a:r>
-              <a:rPr lang="en-GB" sz="2000" dirty="0" smtClean="0"/>
+              <a:rPr lang="en-GB" sz="2000" dirty="0"/>
               <a:t>Validates pre conditions on methods, usually the method’s parameters</a:t>
             </a:r>
           </a:p>
           <a:p>
             <a:pPr lvl="1"/>
             <a:r>
-              <a:rPr lang="en-GB" sz="2000" dirty="0" smtClean="0"/>
+              <a:rPr lang="en-GB" sz="2000" dirty="0"/>
               <a:t>Throws </a:t>
             </a:r>
             <a:r>
-              <a:rPr lang="en-GB" sz="2000" dirty="0" err="1" smtClean="0"/>
+              <a:rPr lang="en-GB" sz="2000" dirty="0" err="1"/>
               <a:t>InvalidArgumentException</a:t>
             </a:r>
-            <a:endParaRPr lang="en-GB" sz="2000" dirty="0" smtClean="0"/>
-          </a:p>
-          <a:p>
-            <a:r>
-              <a:rPr lang="en-GB" dirty="0" smtClean="0"/>
+            <a:endParaRPr lang="en-GB" sz="2000" dirty="0"/>
+          </a:p>
+          <a:p>
+            <a:r>
+              <a:rPr lang="en-GB" dirty="0"/>
               <a:t>Invariants</a:t>
             </a:r>
           </a:p>
           <a:p>
             <a:pPr lvl="1"/>
             <a:r>
-              <a:rPr lang="en-GB" sz="2000" dirty="0" smtClean="0"/>
+              <a:rPr lang="en-GB" sz="2000" dirty="0"/>
               <a:t>Validates internal consistency of an object</a:t>
             </a:r>
           </a:p>
           <a:p>
             <a:pPr lvl="1"/>
             <a:r>
-              <a:rPr lang="en-GB" sz="2000" dirty="0" smtClean="0"/>
+              <a:rPr lang="en-GB" sz="2000" dirty="0"/>
               <a:t>Throws </a:t>
             </a:r>
             <a:r>
-              <a:rPr lang="en-GB" sz="2000" dirty="0" err="1" smtClean="0"/>
+              <a:rPr lang="en-GB" sz="2000" dirty="0" err="1"/>
               <a:t>InvalidStateException</a:t>
             </a:r>
             <a:endParaRPr lang="en-GB" sz="2000" dirty="0"/>

--- a/documentation/eapli.framework-Tech-Description.pptx
+++ b/documentation/eapli.framework-Tech-Description.pptx
@@ -16,8 +16,8 @@
     <p:sldId id="418" r:id="rId4"/>
     <p:sldId id="419" r:id="rId5"/>
     <p:sldId id="412" r:id="rId6"/>
-    <p:sldId id="376" r:id="rId7"/>
-    <p:sldId id="432" r:id="rId8"/>
+    <p:sldId id="445" r:id="rId7"/>
+    <p:sldId id="446" r:id="rId8"/>
     <p:sldId id="375" r:id="rId9"/>
     <p:sldId id="442" r:id="rId10"/>
     <p:sldId id="381" r:id="rId11"/>
@@ -290,7 +290,7 @@
             <a:fld id="{DF9BBED1-C878-4044-B70F-841416CAC1AE}" type="datetimeFigureOut">
               <a:rPr lang="en-US" smtClean="0"/>
               <a:pPr/>
-              <a:t>2/25/2019</a:t>
+              <a:t>3/18/2019</a:t>
             </a:fld>
             <a:endParaRPr lang="en-US"/>
           </a:p>
@@ -457,7 +457,7 @@
             <a:fld id="{754636F6-6535-4DFB-8291-07E7DDBE6239}" type="datetimeFigureOut">
               <a:rPr lang="pt-PT" smtClean="0"/>
               <a:pPr/>
-              <a:t>25/02/2019</a:t>
+              <a:t>18/03/2019</a:t>
             </a:fld>
             <a:endParaRPr lang="pt-PT"/>
           </a:p>
@@ -1951,7 +1951,7 @@
             <a:fld id="{1A3222AE-4D74-4601-B435-B179E428ACD9}" type="datetime1">
               <a:rPr lang="pt-PT" smtClean="0"/>
               <a:pPr/>
-              <a:t>25/02/2019</a:t>
+              <a:t>18/03/2019</a:t>
             </a:fld>
             <a:endParaRPr lang="pt-PT"/>
           </a:p>
@@ -2169,7 +2169,7 @@
             <a:fld id="{03643B1D-A57E-46BD-9617-845A2C51AEF7}" type="datetime1">
               <a:rPr lang="pt-PT" smtClean="0"/>
               <a:pPr/>
-              <a:t>25/02/2019</a:t>
+              <a:t>18/03/2019</a:t>
             </a:fld>
             <a:endParaRPr lang="pt-PT"/>
           </a:p>
@@ -2443,7 +2443,7 @@
             <a:fld id="{03643B1D-A57E-46BD-9617-845A2C51AEF7}" type="datetime1">
               <a:rPr lang="pt-PT" smtClean="0"/>
               <a:pPr/>
-              <a:t>25/02/2019</a:t>
+              <a:t>18/03/2019</a:t>
             </a:fld>
             <a:endParaRPr lang="pt-PT"/>
           </a:p>
@@ -2620,7 +2620,7 @@
             <a:fld id="{03643B1D-A57E-46BD-9617-845A2C51AEF7}" type="datetime1">
               <a:rPr lang="pt-PT" smtClean="0"/>
               <a:pPr/>
-              <a:t>25/02/2019</a:t>
+              <a:t>18/03/2019</a:t>
             </a:fld>
             <a:endParaRPr lang="pt-PT"/>
           </a:p>
@@ -2976,7 +2976,7 @@
             <a:fld id="{03643B1D-A57E-46BD-9617-845A2C51AEF7}" type="datetime1">
               <a:rPr lang="pt-PT" smtClean="0"/>
               <a:pPr/>
-              <a:t>25/02/2019</a:t>
+              <a:t>18/03/2019</a:t>
             </a:fld>
             <a:endParaRPr lang="pt-PT"/>
           </a:p>
@@ -3263,7 +3263,7 @@
             <a:fld id="{03643B1D-A57E-46BD-9617-845A2C51AEF7}" type="datetime1">
               <a:rPr lang="pt-PT" smtClean="0"/>
               <a:pPr/>
-              <a:t>25/02/2019</a:t>
+              <a:t>18/03/2019</a:t>
             </a:fld>
             <a:endParaRPr lang="pt-PT"/>
           </a:p>
@@ -3687,7 +3687,7 @@
             <a:fld id="{03643B1D-A57E-46BD-9617-845A2C51AEF7}" type="datetime1">
               <a:rPr lang="pt-PT" smtClean="0"/>
               <a:pPr/>
-              <a:t>25/02/2019</a:t>
+              <a:t>18/03/2019</a:t>
             </a:fld>
             <a:endParaRPr lang="pt-PT"/>
           </a:p>
@@ -3802,7 +3802,7 @@
             <a:fld id="{03643B1D-A57E-46BD-9617-845A2C51AEF7}" type="datetime1">
               <a:rPr lang="pt-PT" smtClean="0"/>
               <a:pPr/>
-              <a:t>25/02/2019</a:t>
+              <a:t>18/03/2019</a:t>
             </a:fld>
             <a:endParaRPr lang="pt-PT"/>
           </a:p>
@@ -3895,7 +3895,7 @@
             <a:fld id="{03643B1D-A57E-46BD-9617-845A2C51AEF7}" type="datetime1">
               <a:rPr lang="pt-PT" smtClean="0"/>
               <a:pPr/>
-              <a:t>25/02/2019</a:t>
+              <a:t>18/03/2019</a:t>
             </a:fld>
             <a:endParaRPr lang="pt-PT"/>
           </a:p>
@@ -4175,7 +4175,7 @@
             <a:fld id="{03643B1D-A57E-46BD-9617-845A2C51AEF7}" type="datetime1">
               <a:rPr lang="pt-PT" smtClean="0"/>
               <a:pPr/>
-              <a:t>25/02/2019</a:t>
+              <a:t>18/03/2019</a:t>
             </a:fld>
             <a:endParaRPr lang="pt-PT"/>
           </a:p>
@@ -4539,7 +4539,7 @@
             <a:fld id="{03643B1D-A57E-46BD-9617-845A2C51AEF7}" type="datetime1">
               <a:rPr lang="pt-PT" smtClean="0"/>
               <a:pPr/>
-              <a:t>25/02/2019</a:t>
+              <a:t>18/03/2019</a:t>
             </a:fld>
             <a:endParaRPr lang="pt-PT"/>
           </a:p>
@@ -4965,7 +4965,7 @@
             <a:fld id="{03643B1D-A57E-46BD-9617-845A2C51AEF7}" type="datetime1">
               <a:rPr lang="pt-PT" smtClean="0"/>
               <a:pPr/>
-              <a:t>25/02/2019</a:t>
+              <a:t>18/03/2019</a:t>
             </a:fld>
             <a:endParaRPr lang="pt-PT"/>
           </a:p>
@@ -12596,25 +12596,6 @@
       </p:sp>
       <p:sp>
         <p:nvSpPr>
-          <p:cNvPr id="4" name="Content Placeholder 3"/>
-          <p:cNvSpPr>
-            <a:spLocks noGrp="1"/>
-          </p:cNvSpPr>
-          <p:nvPr>
-            <p:ph sz="half" idx="2"/>
-          </p:nvPr>
-        </p:nvSpPr>
-        <p:spPr/>
-        <p:txBody>
-          <a:bodyPr/>
-          <a:lstStyle/>
-          <a:p>
-            <a:endParaRPr lang="en-GB"/>
-          </a:p>
-        </p:txBody>
-      </p:sp>
-      <p:sp>
-        <p:nvSpPr>
           <p:cNvPr id="5" name="Slide Number Placeholder 4"/>
           <p:cNvSpPr>
             <a:spLocks noGrp="1"/>
@@ -12639,21 +12620,28 @@
       </p:sp>
       <p:pic>
         <p:nvPicPr>
-          <p:cNvPr id="6" name="Picture 5"/>
+          <p:cNvPr id="7" name="Picture 6">
+            <a:extLst>
+              <a:ext uri="{FF2B5EF4-FFF2-40B4-BE49-F238E27FC236}">
+                <a16:creationId xmlns:a16="http://schemas.microsoft.com/office/drawing/2014/main" id="{A815CBF1-F6D3-44B1-A754-F452DB2377AC}"/>
+              </a:ext>
+            </a:extLst>
+          </p:cNvPr>
           <p:cNvPicPr>
             <a:picLocks noChangeAspect="1"/>
           </p:cNvPicPr>
           <p:nvPr/>
         </p:nvPicPr>
-        <p:blipFill rotWithShape="1">
+        <p:blipFill>
           <a:blip r:embed="rId3"/>
-          <a:srcRect b="12201"/>
-          <a:stretch/>
+          <a:stretch>
+            <a:fillRect/>
+          </a:stretch>
         </p:blipFill>
         <p:spPr>
           <a:xfrm>
-            <a:off x="4914266" y="376464"/>
-            <a:ext cx="3506468" cy="6021288"/>
+            <a:off x="4896036" y="188640"/>
+            <a:ext cx="3780420" cy="6606735"/>
           </a:xfrm>
           <a:prstGeom prst="rect">
             <a:avLst/>
@@ -12673,7 +12661,7 @@
     </p:spTree>
     <p:extLst>
       <p:ext uri="{BB962C8B-B14F-4D97-AF65-F5344CB8AC3E}">
-        <p14:creationId xmlns:p14="http://schemas.microsoft.com/office/powerpoint/2010/main" val="4030979938"/>
+        <p14:creationId xmlns:p14="http://schemas.microsoft.com/office/powerpoint/2010/main" val="2543624431"/>
       </p:ext>
     </p:extLst>
   </p:cSld>
@@ -12801,22 +12789,27 @@
       </p:sp>
       <p:pic>
         <p:nvPicPr>
-          <p:cNvPr id="4" name="Picture 3"/>
+          <p:cNvPr id="2" name="Picture 1">
+            <a:extLst>
+              <a:ext uri="{FF2B5EF4-FFF2-40B4-BE49-F238E27FC236}">
+                <a16:creationId xmlns:a16="http://schemas.microsoft.com/office/drawing/2014/main" id="{782F783B-EC76-42E8-A7D7-BF6895623C31}"/>
+              </a:ext>
+            </a:extLst>
+          </p:cNvPr>
           <p:cNvPicPr>
             <a:picLocks noChangeAspect="1"/>
           </p:cNvPicPr>
           <p:nvPr/>
         </p:nvPicPr>
-        <p:blipFill>
+        <p:blipFill rotWithShape="1">
           <a:blip r:embed="rId2"/>
-          <a:stretch>
-            <a:fillRect/>
-          </a:stretch>
+          <a:srcRect b="26901"/>
+          <a:stretch/>
         </p:blipFill>
         <p:spPr>
           <a:xfrm>
-            <a:off x="5060574" y="0"/>
-            <a:ext cx="4099510" cy="6898545"/>
+            <a:off x="5100099" y="1408176"/>
+            <a:ext cx="3471229" cy="5013176"/>
           </a:xfrm>
           <a:prstGeom prst="rect">
             <a:avLst/>
@@ -12836,7 +12829,7 @@
     </p:spTree>
     <p:extLst>
       <p:ext uri="{BB962C8B-B14F-4D97-AF65-F5344CB8AC3E}">
-        <p14:creationId xmlns:p14="http://schemas.microsoft.com/office/powerpoint/2010/main" val="2931379580"/>
+        <p14:creationId xmlns:p14="http://schemas.microsoft.com/office/powerpoint/2010/main" val="453729414"/>
       </p:ext>
     </p:extLst>
   </p:cSld>

--- a/documentation/eapli.framework-Tech-Description.pptx
+++ b/documentation/eapli.framework-Tech-Description.pptx
@@ -5,10 +5,10 @@
     <p:sldMasterId id="2147483900" r:id="rId1"/>
   </p:sldMasterIdLst>
   <p:notesMasterIdLst>
-    <p:notesMasterId r:id="rId57"/>
+    <p:notesMasterId r:id="rId58"/>
   </p:notesMasterIdLst>
   <p:handoutMasterIdLst>
-    <p:handoutMasterId r:id="rId58"/>
+    <p:handoutMasterId r:id="rId59"/>
   </p:handoutMasterIdLst>
   <p:sldIdLst>
     <p:sldId id="367" r:id="rId2"/>
@@ -20,52 +20,53 @@
     <p:sldId id="446" r:id="rId8"/>
     <p:sldId id="375" r:id="rId9"/>
     <p:sldId id="442" r:id="rId10"/>
-    <p:sldId id="381" r:id="rId11"/>
-    <p:sldId id="382" r:id="rId12"/>
-    <p:sldId id="383" r:id="rId13"/>
-    <p:sldId id="384" r:id="rId14"/>
-    <p:sldId id="385" r:id="rId15"/>
-    <p:sldId id="415" r:id="rId16"/>
-    <p:sldId id="377" r:id="rId17"/>
-    <p:sldId id="378" r:id="rId18"/>
-    <p:sldId id="444" r:id="rId19"/>
-    <p:sldId id="443" r:id="rId20"/>
-    <p:sldId id="434" r:id="rId21"/>
-    <p:sldId id="435" r:id="rId22"/>
-    <p:sldId id="436" r:id="rId23"/>
-    <p:sldId id="379" r:id="rId24"/>
-    <p:sldId id="380" r:id="rId25"/>
-    <p:sldId id="423" r:id="rId26"/>
-    <p:sldId id="430" r:id="rId27"/>
-    <p:sldId id="433" r:id="rId28"/>
-    <p:sldId id="431" r:id="rId29"/>
-    <p:sldId id="422" r:id="rId30"/>
-    <p:sldId id="424" r:id="rId31"/>
-    <p:sldId id="425" r:id="rId32"/>
-    <p:sldId id="426" r:id="rId33"/>
-    <p:sldId id="427" r:id="rId34"/>
-    <p:sldId id="428" r:id="rId35"/>
-    <p:sldId id="429" r:id="rId36"/>
-    <p:sldId id="399" r:id="rId37"/>
-    <p:sldId id="400" r:id="rId38"/>
-    <p:sldId id="409" r:id="rId39"/>
-    <p:sldId id="410" r:id="rId40"/>
-    <p:sldId id="411" r:id="rId41"/>
-    <p:sldId id="413" r:id="rId42"/>
-    <p:sldId id="347" r:id="rId43"/>
-    <p:sldId id="368" r:id="rId44"/>
-    <p:sldId id="335" r:id="rId45"/>
-    <p:sldId id="420" r:id="rId46"/>
-    <p:sldId id="439" r:id="rId47"/>
-    <p:sldId id="421" r:id="rId48"/>
-    <p:sldId id="437" r:id="rId49"/>
-    <p:sldId id="440" r:id="rId50"/>
-    <p:sldId id="438" r:id="rId51"/>
-    <p:sldId id="441" r:id="rId52"/>
-    <p:sldId id="414" r:id="rId53"/>
-    <p:sldId id="350" r:id="rId54"/>
-    <p:sldId id="351" r:id="rId55"/>
-    <p:sldId id="337" r:id="rId56"/>
+    <p:sldId id="447" r:id="rId11"/>
+    <p:sldId id="381" r:id="rId12"/>
+    <p:sldId id="382" r:id="rId13"/>
+    <p:sldId id="383" r:id="rId14"/>
+    <p:sldId id="384" r:id="rId15"/>
+    <p:sldId id="385" r:id="rId16"/>
+    <p:sldId id="415" r:id="rId17"/>
+    <p:sldId id="377" r:id="rId18"/>
+    <p:sldId id="378" r:id="rId19"/>
+    <p:sldId id="444" r:id="rId20"/>
+    <p:sldId id="443" r:id="rId21"/>
+    <p:sldId id="434" r:id="rId22"/>
+    <p:sldId id="435" r:id="rId23"/>
+    <p:sldId id="436" r:id="rId24"/>
+    <p:sldId id="379" r:id="rId25"/>
+    <p:sldId id="380" r:id="rId26"/>
+    <p:sldId id="423" r:id="rId27"/>
+    <p:sldId id="430" r:id="rId28"/>
+    <p:sldId id="433" r:id="rId29"/>
+    <p:sldId id="431" r:id="rId30"/>
+    <p:sldId id="422" r:id="rId31"/>
+    <p:sldId id="424" r:id="rId32"/>
+    <p:sldId id="425" r:id="rId33"/>
+    <p:sldId id="426" r:id="rId34"/>
+    <p:sldId id="427" r:id="rId35"/>
+    <p:sldId id="428" r:id="rId36"/>
+    <p:sldId id="429" r:id="rId37"/>
+    <p:sldId id="399" r:id="rId38"/>
+    <p:sldId id="400" r:id="rId39"/>
+    <p:sldId id="409" r:id="rId40"/>
+    <p:sldId id="410" r:id="rId41"/>
+    <p:sldId id="411" r:id="rId42"/>
+    <p:sldId id="413" r:id="rId43"/>
+    <p:sldId id="347" r:id="rId44"/>
+    <p:sldId id="368" r:id="rId45"/>
+    <p:sldId id="335" r:id="rId46"/>
+    <p:sldId id="420" r:id="rId47"/>
+    <p:sldId id="439" r:id="rId48"/>
+    <p:sldId id="421" r:id="rId49"/>
+    <p:sldId id="437" r:id="rId50"/>
+    <p:sldId id="440" r:id="rId51"/>
+    <p:sldId id="438" r:id="rId52"/>
+    <p:sldId id="441" r:id="rId53"/>
+    <p:sldId id="414" r:id="rId54"/>
+    <p:sldId id="350" r:id="rId55"/>
+    <p:sldId id="351" r:id="rId56"/>
+    <p:sldId id="337" r:id="rId57"/>
   </p:sldIdLst>
   <p:sldSz cx="9144000" cy="6858000" type="screen4x3"/>
   <p:notesSz cx="10234613" cy="7099300"/>
@@ -290,7 +291,7 @@
             <a:fld id="{DF9BBED1-C878-4044-B70F-841416CAC1AE}" type="datetimeFigureOut">
               <a:rPr lang="en-US" smtClean="0"/>
               <a:pPr/>
-              <a:t>3/18/2019</a:t>
+              <a:t>4/24/2019</a:t>
             </a:fld>
             <a:endParaRPr lang="en-US"/>
           </a:p>
@@ -457,7 +458,7 @@
             <a:fld id="{754636F6-6535-4DFB-8291-07E7DDBE6239}" type="datetimeFigureOut">
               <a:rPr lang="pt-PT" smtClean="0"/>
               <a:pPr/>
-              <a:t>18/03/2019</a:t>
+              <a:t>24-04-2019</a:t>
             </a:fld>
             <a:endParaRPr lang="pt-PT"/>
           </a:p>
@@ -879,7 +880,7 @@
             <a:fld id="{54F76911-F589-44E9-8155-61F0472246BF}" type="slidenum">
               <a:rPr lang="pt-PT" smtClean="0"/>
               <a:pPr/>
-              <a:t>10</a:t>
+              <a:t>11</a:t>
             </a:fld>
             <a:endParaRPr lang="pt-PT"/>
           </a:p>
@@ -1136,7 +1137,7 @@
             <a:fld id="{54F76911-F589-44E9-8155-61F0472246BF}" type="slidenum">
               <a:rPr lang="pt-PT" smtClean="0"/>
               <a:pPr/>
-              <a:t>16</a:t>
+              <a:t>17</a:t>
             </a:fld>
             <a:endParaRPr lang="pt-PT"/>
           </a:p>
@@ -1307,7 +1308,7 @@
             <a:fld id="{54F76911-F589-44E9-8155-61F0472246BF}" type="slidenum">
               <a:rPr lang="pt-PT" smtClean="0"/>
               <a:pPr/>
-              <a:t>20</a:t>
+              <a:t>21</a:t>
             </a:fld>
             <a:endParaRPr lang="pt-PT"/>
           </a:p>
@@ -1441,7 +1442,7 @@
             <a:fld id="{54F76911-F589-44E9-8155-61F0472246BF}" type="slidenum">
               <a:rPr lang="pt-PT" smtClean="0"/>
               <a:pPr/>
-              <a:t>21</a:t>
+              <a:t>22</a:t>
             </a:fld>
             <a:endParaRPr lang="pt-PT"/>
           </a:p>
@@ -1526,7 +1527,7 @@
             <a:fld id="{54F76911-F589-44E9-8155-61F0472246BF}" type="slidenum">
               <a:rPr lang="pt-PT" smtClean="0"/>
               <a:pPr/>
-              <a:t>26</a:t>
+              <a:t>27</a:t>
             </a:fld>
             <a:endParaRPr lang="pt-PT"/>
           </a:p>
@@ -1687,7 +1688,7 @@
             <a:fld id="{54F76911-F589-44E9-8155-61F0472246BF}" type="slidenum">
               <a:rPr lang="pt-PT" smtClean="0"/>
               <a:pPr/>
-              <a:t>44</a:t>
+              <a:t>45</a:t>
             </a:fld>
             <a:endParaRPr lang="pt-PT"/>
           </a:p>
@@ -1951,7 +1952,7 @@
             <a:fld id="{1A3222AE-4D74-4601-B435-B179E428ACD9}" type="datetime1">
               <a:rPr lang="pt-PT" smtClean="0"/>
               <a:pPr/>
-              <a:t>18/03/2019</a:t>
+              <a:t>24-04-2019</a:t>
             </a:fld>
             <a:endParaRPr lang="pt-PT"/>
           </a:p>
@@ -2169,7 +2170,7 @@
             <a:fld id="{03643B1D-A57E-46BD-9617-845A2C51AEF7}" type="datetime1">
               <a:rPr lang="pt-PT" smtClean="0"/>
               <a:pPr/>
-              <a:t>18/03/2019</a:t>
+              <a:t>24-04-2019</a:t>
             </a:fld>
             <a:endParaRPr lang="pt-PT"/>
           </a:p>
@@ -2443,7 +2444,7 @@
             <a:fld id="{03643B1D-A57E-46BD-9617-845A2C51AEF7}" type="datetime1">
               <a:rPr lang="pt-PT" smtClean="0"/>
               <a:pPr/>
-              <a:t>18/03/2019</a:t>
+              <a:t>24-04-2019</a:t>
             </a:fld>
             <a:endParaRPr lang="pt-PT"/>
           </a:p>
@@ -2620,7 +2621,7 @@
             <a:fld id="{03643B1D-A57E-46BD-9617-845A2C51AEF7}" type="datetime1">
               <a:rPr lang="pt-PT" smtClean="0"/>
               <a:pPr/>
-              <a:t>18/03/2019</a:t>
+              <a:t>24-04-2019</a:t>
             </a:fld>
             <a:endParaRPr lang="pt-PT"/>
           </a:p>
@@ -2976,7 +2977,7 @@
             <a:fld id="{03643B1D-A57E-46BD-9617-845A2C51AEF7}" type="datetime1">
               <a:rPr lang="pt-PT" smtClean="0"/>
               <a:pPr/>
-              <a:t>18/03/2019</a:t>
+              <a:t>24-04-2019</a:t>
             </a:fld>
             <a:endParaRPr lang="pt-PT"/>
           </a:p>
@@ -3263,7 +3264,7 @@
             <a:fld id="{03643B1D-A57E-46BD-9617-845A2C51AEF7}" type="datetime1">
               <a:rPr lang="pt-PT" smtClean="0"/>
               <a:pPr/>
-              <a:t>18/03/2019</a:t>
+              <a:t>24-04-2019</a:t>
             </a:fld>
             <a:endParaRPr lang="pt-PT"/>
           </a:p>
@@ -3687,7 +3688,7 @@
             <a:fld id="{03643B1D-A57E-46BD-9617-845A2C51AEF7}" type="datetime1">
               <a:rPr lang="pt-PT" smtClean="0"/>
               <a:pPr/>
-              <a:t>18/03/2019</a:t>
+              <a:t>24-04-2019</a:t>
             </a:fld>
             <a:endParaRPr lang="pt-PT"/>
           </a:p>
@@ -3802,7 +3803,7 @@
             <a:fld id="{03643B1D-A57E-46BD-9617-845A2C51AEF7}" type="datetime1">
               <a:rPr lang="pt-PT" smtClean="0"/>
               <a:pPr/>
-              <a:t>18/03/2019</a:t>
+              <a:t>24-04-2019</a:t>
             </a:fld>
             <a:endParaRPr lang="pt-PT"/>
           </a:p>
@@ -3895,7 +3896,7 @@
             <a:fld id="{03643B1D-A57E-46BD-9617-845A2C51AEF7}" type="datetime1">
               <a:rPr lang="pt-PT" smtClean="0"/>
               <a:pPr/>
-              <a:t>18/03/2019</a:t>
+              <a:t>24-04-2019</a:t>
             </a:fld>
             <a:endParaRPr lang="pt-PT"/>
           </a:p>
@@ -4175,7 +4176,7 @@
             <a:fld id="{03643B1D-A57E-46BD-9617-845A2C51AEF7}" type="datetime1">
               <a:rPr lang="pt-PT" smtClean="0"/>
               <a:pPr/>
-              <a:t>18/03/2019</a:t>
+              <a:t>24-04-2019</a:t>
             </a:fld>
             <a:endParaRPr lang="pt-PT"/>
           </a:p>
@@ -4539,7 +4540,7 @@
             <a:fld id="{03643B1D-A57E-46BD-9617-845A2C51AEF7}" type="datetime1">
               <a:rPr lang="pt-PT" smtClean="0"/>
               <a:pPr/>
-              <a:t>18/03/2019</a:t>
+              <a:t>24-04-2019</a:t>
             </a:fld>
             <a:endParaRPr lang="pt-PT"/>
           </a:p>
@@ -4965,7 +4966,7 @@
             <a:fld id="{03643B1D-A57E-46BD-9617-845A2C51AEF7}" type="datetime1">
               <a:rPr lang="pt-PT" smtClean="0"/>
               <a:pPr/>
-              <a:t>18/03/2019</a:t>
+              <a:t>24-04-2019</a:t>
             </a:fld>
             <a:endParaRPr lang="pt-PT"/>
           </a:p>
@@ -5474,6 +5475,106 @@
       </p:grpSpPr>
       <p:sp>
         <p:nvSpPr>
+          <p:cNvPr id="6" name="Title 5"/>
+          <p:cNvSpPr>
+            <a:spLocks noGrp="1"/>
+          </p:cNvSpPr>
+          <p:nvPr>
+            <p:ph type="title"/>
+          </p:nvPr>
+        </p:nvSpPr>
+        <p:spPr/>
+        <p:txBody>
+          <a:bodyPr/>
+          <a:lstStyle/>
+          <a:p>
+            <a:r>
+              <a:rPr lang="en-GB" dirty="0"/>
+              <a:t>Core</a:t>
+            </a:r>
+            <a:endParaRPr lang="en-US" dirty="0"/>
+          </a:p>
+        </p:txBody>
+      </p:sp>
+      <p:sp>
+        <p:nvSpPr>
+          <p:cNvPr id="7" name="Text Placeholder 6"/>
+          <p:cNvSpPr>
+            <a:spLocks noGrp="1"/>
+          </p:cNvSpPr>
+          <p:nvPr>
+            <p:ph type="body" idx="1"/>
+          </p:nvPr>
+        </p:nvSpPr>
+        <p:spPr/>
+        <p:txBody>
+          <a:bodyPr/>
+          <a:lstStyle/>
+          <a:p>
+            <a:r>
+              <a:rPr lang="en-GB" dirty="0" smtClean="0"/>
+              <a:t>Presentation</a:t>
+            </a:r>
+            <a:endParaRPr lang="en-US" dirty="0"/>
+          </a:p>
+        </p:txBody>
+      </p:sp>
+      <p:sp>
+        <p:nvSpPr>
+          <p:cNvPr id="5" name="Slide Number Placeholder 4"/>
+          <p:cNvSpPr>
+            <a:spLocks noGrp="1"/>
+          </p:cNvSpPr>
+          <p:nvPr>
+            <p:ph type="sldNum" sz="quarter" idx="12"/>
+          </p:nvPr>
+        </p:nvSpPr>
+        <p:spPr/>
+        <p:txBody>
+          <a:bodyPr/>
+          <a:lstStyle/>
+          <a:p>
+            <a:fld id="{024A9932-4E76-455F-8E1A-2CC10C89B014}" type="slidenum">
+              <a:rPr lang="pt-PT" smtClean="0"/>
+              <a:pPr/>
+              <a:t>10</a:t>
+            </a:fld>
+            <a:endParaRPr lang="pt-PT"/>
+          </a:p>
+        </p:txBody>
+      </p:sp>
+    </p:spTree>
+    <p:extLst>
+      <p:ext uri="{BB962C8B-B14F-4D97-AF65-F5344CB8AC3E}">
+        <p14:creationId xmlns:p14="http://schemas.microsoft.com/office/powerpoint/2010/main" val="1672780773"/>
+      </p:ext>
+    </p:extLst>
+  </p:cSld>
+  <p:clrMapOvr>
+    <a:masterClrMapping/>
+  </p:clrMapOvr>
+</p:sld>
+</file>
+
+<file path=ppt/slides/slide11.xml><?xml version="1.0" encoding="utf-8"?>
+<p:sld xmlns:a="http://schemas.openxmlformats.org/drawingml/2006/main" xmlns:r="http://schemas.openxmlformats.org/officeDocument/2006/relationships" xmlns:p="http://schemas.openxmlformats.org/presentationml/2006/main">
+  <p:cSld>
+    <p:spTree>
+      <p:nvGrpSpPr>
+        <p:cNvPr id="1" name=""/>
+        <p:cNvGrpSpPr/>
+        <p:nvPr/>
+      </p:nvGrpSpPr>
+      <p:grpSpPr>
+        <a:xfrm>
+          <a:off x="0" y="0"/>
+          <a:ext cx="0" cy="0"/>
+          <a:chOff x="0" y="0"/>
+          <a:chExt cx="0" cy="0"/>
+        </a:xfrm>
+      </p:grpSpPr>
+      <p:sp>
+        <p:nvSpPr>
           <p:cNvPr id="2" name="Title 1"/>
           <p:cNvSpPr>
             <a:spLocks noGrp="1"/>
@@ -5548,7 +5649,7 @@
             <a:fld id="{024A9932-4E76-455F-8E1A-2CC10C89B014}" type="slidenum">
               <a:rPr lang="pt-PT" smtClean="0"/>
               <a:pPr/>
-              <a:t>10</a:t>
+              <a:t>11</a:t>
             </a:fld>
             <a:endParaRPr lang="pt-PT"/>
           </a:p>
@@ -5591,7 +5692,7 @@
 </p:sld>
 </file>
 
-<file path=ppt/slides/slide11.xml><?xml version="1.0" encoding="utf-8"?>
+<file path=ppt/slides/slide12.xml><?xml version="1.0" encoding="utf-8"?>
 <p:sld xmlns:a="http://schemas.openxmlformats.org/drawingml/2006/main" xmlns:r="http://schemas.openxmlformats.org/officeDocument/2006/relationships" xmlns:p="http://schemas.openxmlformats.org/presentationml/2006/main">
   <p:cSld>
     <p:spTree>
@@ -5648,7 +5749,7 @@
             <a:fld id="{024A9932-4E76-455F-8E1A-2CC10C89B014}" type="slidenum">
               <a:rPr lang="pt-PT" smtClean="0"/>
               <a:pPr/>
-              <a:t>11</a:t>
+              <a:t>12</a:t>
             </a:fld>
             <a:endParaRPr lang="pt-PT"/>
           </a:p>
@@ -5694,7 +5795,7 @@
 </p:sld>
 </file>
 
-<file path=ppt/slides/slide12.xml><?xml version="1.0" encoding="utf-8"?>
+<file path=ppt/slides/slide13.xml><?xml version="1.0" encoding="utf-8"?>
 <p:sld xmlns:a="http://schemas.openxmlformats.org/drawingml/2006/main" xmlns:r="http://schemas.openxmlformats.org/officeDocument/2006/relationships" xmlns:p="http://schemas.openxmlformats.org/presentationml/2006/main">
   <p:cSld>
     <p:spTree>
@@ -5729,7 +5830,7 @@
             <a:fld id="{024A9932-4E76-455F-8E1A-2CC10C89B014}" type="slidenum">
               <a:rPr lang="pt-PT" smtClean="0"/>
               <a:pPr/>
-              <a:t>12</a:t>
+              <a:t>13</a:t>
             </a:fld>
             <a:endParaRPr lang="pt-PT"/>
           </a:p>
@@ -5795,7 +5896,7 @@
 </p:sld>
 </file>
 
-<file path=ppt/slides/slide13.xml><?xml version="1.0" encoding="utf-8"?>
+<file path=ppt/slides/slide14.xml><?xml version="1.0" encoding="utf-8"?>
 <p:sld xmlns:a="http://schemas.openxmlformats.org/drawingml/2006/main" xmlns:r="http://schemas.openxmlformats.org/officeDocument/2006/relationships" xmlns:p="http://schemas.openxmlformats.org/presentationml/2006/main">
   <p:cSld>
     <p:spTree>
@@ -5830,7 +5931,7 @@
             <a:fld id="{024A9932-4E76-455F-8E1A-2CC10C89B014}" type="slidenum">
               <a:rPr lang="pt-PT" smtClean="0"/>
               <a:pPr/>
-              <a:t>13</a:t>
+              <a:t>14</a:t>
             </a:fld>
             <a:endParaRPr lang="pt-PT"/>
           </a:p>
@@ -5872,7 +5973,7 @@
 </p:sld>
 </file>
 
-<file path=ppt/slides/slide14.xml><?xml version="1.0" encoding="utf-8"?>
+<file path=ppt/slides/slide15.xml><?xml version="1.0" encoding="utf-8"?>
 <p:sld xmlns:a="http://schemas.openxmlformats.org/drawingml/2006/main" xmlns:r="http://schemas.openxmlformats.org/officeDocument/2006/relationships" xmlns:p="http://schemas.openxmlformats.org/presentationml/2006/main">
   <p:cSld>
     <p:spTree>
@@ -5907,7 +6008,7 @@
             <a:fld id="{024A9932-4E76-455F-8E1A-2CC10C89B014}" type="slidenum">
               <a:rPr lang="pt-PT" smtClean="0"/>
               <a:pPr/>
-              <a:t>14</a:t>
+              <a:t>15</a:t>
             </a:fld>
             <a:endParaRPr lang="pt-PT"/>
           </a:p>
@@ -6004,106 +6105,6 @@
 </p:sld>
 </file>
 
-<file path=ppt/slides/slide15.xml><?xml version="1.0" encoding="utf-8"?>
-<p:sld xmlns:a="http://schemas.openxmlformats.org/drawingml/2006/main" xmlns:r="http://schemas.openxmlformats.org/officeDocument/2006/relationships" xmlns:p="http://schemas.openxmlformats.org/presentationml/2006/main">
-  <p:cSld>
-    <p:spTree>
-      <p:nvGrpSpPr>
-        <p:cNvPr id="1" name=""/>
-        <p:cNvGrpSpPr/>
-        <p:nvPr/>
-      </p:nvGrpSpPr>
-      <p:grpSpPr>
-        <a:xfrm>
-          <a:off x="0" y="0"/>
-          <a:ext cx="0" cy="0"/>
-          <a:chOff x="0" y="0"/>
-          <a:chExt cx="0" cy="0"/>
-        </a:xfrm>
-      </p:grpSpPr>
-      <p:sp>
-        <p:nvSpPr>
-          <p:cNvPr id="6" name="Title 5"/>
-          <p:cNvSpPr>
-            <a:spLocks noGrp="1"/>
-          </p:cNvSpPr>
-          <p:nvPr>
-            <p:ph type="title"/>
-          </p:nvPr>
-        </p:nvSpPr>
-        <p:spPr/>
-        <p:txBody>
-          <a:bodyPr/>
-          <a:lstStyle/>
-          <a:p>
-            <a:r>
-              <a:rPr lang="en-GB" dirty="0"/>
-              <a:t>Core</a:t>
-            </a:r>
-            <a:endParaRPr lang="en-US" dirty="0"/>
-          </a:p>
-        </p:txBody>
-      </p:sp>
-      <p:sp>
-        <p:nvSpPr>
-          <p:cNvPr id="7" name="Text Placeholder 6"/>
-          <p:cNvSpPr>
-            <a:spLocks noGrp="1"/>
-          </p:cNvSpPr>
-          <p:nvPr>
-            <p:ph type="body" idx="1"/>
-          </p:nvPr>
-        </p:nvSpPr>
-        <p:spPr/>
-        <p:txBody>
-          <a:bodyPr/>
-          <a:lstStyle/>
-          <a:p>
-            <a:r>
-              <a:rPr lang="en-GB" dirty="0"/>
-              <a:t>Persistence </a:t>
-            </a:r>
-            <a:endParaRPr lang="en-US" dirty="0"/>
-          </a:p>
-        </p:txBody>
-      </p:sp>
-      <p:sp>
-        <p:nvSpPr>
-          <p:cNvPr id="5" name="Slide Number Placeholder 4"/>
-          <p:cNvSpPr>
-            <a:spLocks noGrp="1"/>
-          </p:cNvSpPr>
-          <p:nvPr>
-            <p:ph type="sldNum" sz="quarter" idx="12"/>
-          </p:nvPr>
-        </p:nvSpPr>
-        <p:spPr/>
-        <p:txBody>
-          <a:bodyPr/>
-          <a:lstStyle/>
-          <a:p>
-            <a:fld id="{024A9932-4E76-455F-8E1A-2CC10C89B014}" type="slidenum">
-              <a:rPr lang="pt-PT" smtClean="0"/>
-              <a:pPr/>
-              <a:t>15</a:t>
-            </a:fld>
-            <a:endParaRPr lang="pt-PT"/>
-          </a:p>
-        </p:txBody>
-      </p:sp>
-    </p:spTree>
-    <p:extLst>
-      <p:ext uri="{BB962C8B-B14F-4D97-AF65-F5344CB8AC3E}">
-        <p14:creationId xmlns:p14="http://schemas.microsoft.com/office/powerpoint/2010/main" val="2371246310"/>
-      </p:ext>
-    </p:extLst>
-  </p:cSld>
-  <p:clrMapOvr>
-    <a:masterClrMapping/>
-  </p:clrMapOvr>
-</p:sld>
-</file>
-
 <file path=ppt/slides/slide16.xml><?xml version="1.0" encoding="utf-8"?>
 <p:sld xmlns:a="http://schemas.openxmlformats.org/drawingml/2006/main" xmlns:r="http://schemas.openxmlformats.org/officeDocument/2006/relationships" xmlns:p="http://schemas.openxmlformats.org/presentationml/2006/main">
   <p:cSld>
@@ -6123,7 +6124,7 @@
       </p:grpSpPr>
       <p:sp>
         <p:nvSpPr>
-          <p:cNvPr id="2" name="Title 1"/>
+          <p:cNvPr id="6" name="Title 5"/>
           <p:cNvSpPr>
             <a:spLocks noGrp="1"/>
           </p:cNvSpPr>
@@ -6138,84 +6139,32 @@
           <a:p>
             <a:r>
               <a:rPr lang="en-GB" dirty="0"/>
-              <a:t>Persistence</a:t>
-            </a:r>
-          </a:p>
-        </p:txBody>
-      </p:sp>
-      <p:sp>
-        <p:nvSpPr>
-          <p:cNvPr id="3" name="Content Placeholder 2"/>
-          <p:cNvSpPr>
-            <a:spLocks noGrp="1"/>
-          </p:cNvSpPr>
-          <p:nvPr>
-            <p:ph sz="half" idx="1"/>
-          </p:nvPr>
-        </p:nvSpPr>
-        <p:spPr/>
-        <p:txBody>
-          <a:bodyPr/>
-          <a:lstStyle/>
-          <a:p>
-            <a:r>
-              <a:rPr lang="en-GB" dirty="0"/>
-              <a:t>Persistence</a:t>
-            </a:r>
-          </a:p>
-          <a:p>
-            <a:pPr lvl="1"/>
-            <a:r>
-              <a:rPr lang="en-GB" dirty="0"/>
-              <a:t>Repository interfaces</a:t>
-            </a:r>
-          </a:p>
-          <a:p>
-            <a:r>
-              <a:rPr lang="en-GB" dirty="0"/>
-              <a:t>Implementations</a:t>
-            </a:r>
-          </a:p>
-          <a:p>
-            <a:pPr lvl="1"/>
-            <a:r>
-              <a:rPr lang="en-GB" dirty="0"/>
-              <a:t>JPA</a:t>
-            </a:r>
-          </a:p>
-          <a:p>
-            <a:pPr lvl="1"/>
-            <a:r>
-              <a:rPr lang="en-GB" dirty="0" err="1"/>
-              <a:t>InMemory</a:t>
-            </a:r>
-            <a:endParaRPr lang="en-GB" dirty="0"/>
-          </a:p>
-          <a:p>
-            <a:pPr lvl="1"/>
-            <a:r>
-              <a:rPr lang="en-GB" dirty="0"/>
-              <a:t>Spring Data JPA</a:t>
-            </a:r>
-          </a:p>
-        </p:txBody>
-      </p:sp>
-      <p:sp>
-        <p:nvSpPr>
-          <p:cNvPr id="4" name="Content Placeholder 3"/>
-          <p:cNvSpPr>
-            <a:spLocks noGrp="1"/>
-          </p:cNvSpPr>
-          <p:nvPr>
-            <p:ph sz="half" idx="2"/>
-          </p:nvPr>
-        </p:nvSpPr>
-        <p:spPr/>
-        <p:txBody>
-          <a:bodyPr/>
-          <a:lstStyle/>
-          <a:p>
-            <a:endParaRPr lang="en-GB"/>
+              <a:t>Core</a:t>
+            </a:r>
+            <a:endParaRPr lang="en-US" dirty="0"/>
+          </a:p>
+        </p:txBody>
+      </p:sp>
+      <p:sp>
+        <p:nvSpPr>
+          <p:cNvPr id="7" name="Text Placeholder 6"/>
+          <p:cNvSpPr>
+            <a:spLocks noGrp="1"/>
+          </p:cNvSpPr>
+          <p:nvPr>
+            <p:ph type="body" idx="1"/>
+          </p:nvPr>
+        </p:nvSpPr>
+        <p:spPr/>
+        <p:txBody>
+          <a:bodyPr/>
+          <a:lstStyle/>
+          <a:p>
+            <a:r>
+              <a:rPr lang="en-GB" dirty="0"/>
+              <a:t>Persistence </a:t>
+            </a:r>
+            <a:endParaRPr lang="en-US" dirty="0"/>
           </a:p>
         </p:txBody>
       </p:sp>
@@ -6238,6 +6187,158 @@
               <a:rPr lang="pt-PT" smtClean="0"/>
               <a:pPr/>
               <a:t>16</a:t>
+            </a:fld>
+            <a:endParaRPr lang="pt-PT"/>
+          </a:p>
+        </p:txBody>
+      </p:sp>
+    </p:spTree>
+    <p:extLst>
+      <p:ext uri="{BB962C8B-B14F-4D97-AF65-F5344CB8AC3E}">
+        <p14:creationId xmlns:p14="http://schemas.microsoft.com/office/powerpoint/2010/main" val="2371246310"/>
+      </p:ext>
+    </p:extLst>
+  </p:cSld>
+  <p:clrMapOvr>
+    <a:masterClrMapping/>
+  </p:clrMapOvr>
+</p:sld>
+</file>
+
+<file path=ppt/slides/slide17.xml><?xml version="1.0" encoding="utf-8"?>
+<p:sld xmlns:a="http://schemas.openxmlformats.org/drawingml/2006/main" xmlns:r="http://schemas.openxmlformats.org/officeDocument/2006/relationships" xmlns:p="http://schemas.openxmlformats.org/presentationml/2006/main">
+  <p:cSld>
+    <p:spTree>
+      <p:nvGrpSpPr>
+        <p:cNvPr id="1" name=""/>
+        <p:cNvGrpSpPr/>
+        <p:nvPr/>
+      </p:nvGrpSpPr>
+      <p:grpSpPr>
+        <a:xfrm>
+          <a:off x="0" y="0"/>
+          <a:ext cx="0" cy="0"/>
+          <a:chOff x="0" y="0"/>
+          <a:chExt cx="0" cy="0"/>
+        </a:xfrm>
+      </p:grpSpPr>
+      <p:sp>
+        <p:nvSpPr>
+          <p:cNvPr id="2" name="Title 1"/>
+          <p:cNvSpPr>
+            <a:spLocks noGrp="1"/>
+          </p:cNvSpPr>
+          <p:nvPr>
+            <p:ph type="title"/>
+          </p:nvPr>
+        </p:nvSpPr>
+        <p:spPr/>
+        <p:txBody>
+          <a:bodyPr/>
+          <a:lstStyle/>
+          <a:p>
+            <a:r>
+              <a:rPr lang="en-GB" dirty="0"/>
+              <a:t>Persistence</a:t>
+            </a:r>
+          </a:p>
+        </p:txBody>
+      </p:sp>
+      <p:sp>
+        <p:nvSpPr>
+          <p:cNvPr id="3" name="Content Placeholder 2"/>
+          <p:cNvSpPr>
+            <a:spLocks noGrp="1"/>
+          </p:cNvSpPr>
+          <p:nvPr>
+            <p:ph sz="half" idx="1"/>
+          </p:nvPr>
+        </p:nvSpPr>
+        <p:spPr/>
+        <p:txBody>
+          <a:bodyPr/>
+          <a:lstStyle/>
+          <a:p>
+            <a:r>
+              <a:rPr lang="en-GB" dirty="0"/>
+              <a:t>Persistence</a:t>
+            </a:r>
+          </a:p>
+          <a:p>
+            <a:pPr lvl="1"/>
+            <a:r>
+              <a:rPr lang="en-GB" dirty="0"/>
+              <a:t>Repository interfaces</a:t>
+            </a:r>
+          </a:p>
+          <a:p>
+            <a:r>
+              <a:rPr lang="en-GB" dirty="0"/>
+              <a:t>Implementations</a:t>
+            </a:r>
+          </a:p>
+          <a:p>
+            <a:pPr lvl="1"/>
+            <a:r>
+              <a:rPr lang="en-GB" dirty="0"/>
+              <a:t>JPA</a:t>
+            </a:r>
+          </a:p>
+          <a:p>
+            <a:pPr lvl="1"/>
+            <a:r>
+              <a:rPr lang="en-GB" dirty="0" err="1"/>
+              <a:t>InMemory</a:t>
+            </a:r>
+            <a:endParaRPr lang="en-GB" dirty="0"/>
+          </a:p>
+          <a:p>
+            <a:pPr lvl="1"/>
+            <a:r>
+              <a:rPr lang="en-GB" dirty="0"/>
+              <a:t>Spring Data JPA</a:t>
+            </a:r>
+          </a:p>
+        </p:txBody>
+      </p:sp>
+      <p:sp>
+        <p:nvSpPr>
+          <p:cNvPr id="4" name="Content Placeholder 3"/>
+          <p:cNvSpPr>
+            <a:spLocks noGrp="1"/>
+          </p:cNvSpPr>
+          <p:nvPr>
+            <p:ph sz="half" idx="2"/>
+          </p:nvPr>
+        </p:nvSpPr>
+        <p:spPr/>
+        <p:txBody>
+          <a:bodyPr/>
+          <a:lstStyle/>
+          <a:p>
+            <a:endParaRPr lang="en-GB"/>
+          </a:p>
+        </p:txBody>
+      </p:sp>
+      <p:sp>
+        <p:nvSpPr>
+          <p:cNvPr id="5" name="Slide Number Placeholder 4"/>
+          <p:cNvSpPr>
+            <a:spLocks noGrp="1"/>
+          </p:cNvSpPr>
+          <p:nvPr>
+            <p:ph type="sldNum" sz="quarter" idx="12"/>
+          </p:nvPr>
+        </p:nvSpPr>
+        <p:spPr/>
+        <p:txBody>
+          <a:bodyPr/>
+          <a:lstStyle/>
+          <a:p>
+            <a:fld id="{024A9932-4E76-455F-8E1A-2CC10C89B014}" type="slidenum">
+              <a:rPr lang="pt-PT" smtClean="0"/>
+              <a:pPr/>
+              <a:t>17</a:t>
             </a:fld>
             <a:endParaRPr lang="pt-PT"/>
           </a:p>
@@ -6280,123 +6381,6 @@
 </p:sld>
 </file>
 
-<file path=ppt/slides/slide17.xml><?xml version="1.0" encoding="utf-8"?>
-<p:sld xmlns:a="http://schemas.openxmlformats.org/drawingml/2006/main" xmlns:r="http://schemas.openxmlformats.org/officeDocument/2006/relationships" xmlns:p="http://schemas.openxmlformats.org/presentationml/2006/main">
-  <p:cSld>
-    <p:spTree>
-      <p:nvGrpSpPr>
-        <p:cNvPr id="1" name=""/>
-        <p:cNvGrpSpPr/>
-        <p:nvPr/>
-      </p:nvGrpSpPr>
-      <p:grpSpPr>
-        <a:xfrm>
-          <a:off x="0" y="0"/>
-          <a:ext cx="0" cy="0"/>
-          <a:chOff x="0" y="0"/>
-          <a:chExt cx="0" cy="0"/>
-        </a:xfrm>
-      </p:grpSpPr>
-      <p:sp>
-        <p:nvSpPr>
-          <p:cNvPr id="2" name="Title 1"/>
-          <p:cNvSpPr>
-            <a:spLocks noGrp="1"/>
-          </p:cNvSpPr>
-          <p:nvPr>
-            <p:ph type="title"/>
-          </p:nvPr>
-        </p:nvSpPr>
-        <p:spPr/>
-        <p:txBody>
-          <a:bodyPr/>
-          <a:lstStyle/>
-          <a:p>
-            <a:r>
-              <a:rPr lang="en-GB" dirty="0"/>
-              <a:t>Repositories</a:t>
-            </a:r>
-            <a:endParaRPr lang="en-US" dirty="0"/>
-          </a:p>
-        </p:txBody>
-      </p:sp>
-      <p:sp>
-        <p:nvSpPr>
-          <p:cNvPr id="3" name="Content Placeholder 2"/>
-          <p:cNvSpPr>
-            <a:spLocks noGrp="1"/>
-          </p:cNvSpPr>
-          <p:nvPr>
-            <p:ph idx="1"/>
-          </p:nvPr>
-        </p:nvSpPr>
-        <p:spPr/>
-        <p:txBody>
-          <a:bodyPr/>
-          <a:lstStyle/>
-          <a:p>
-            <a:r>
-              <a:rPr lang="en-GB" dirty="0" err="1"/>
-              <a:t>DataRepository</a:t>
-            </a:r>
-            <a:endParaRPr lang="en-GB" dirty="0"/>
-          </a:p>
-          <a:p>
-            <a:r>
-              <a:rPr lang="en-GB" dirty="0" err="1"/>
-              <a:t>TransactionalContext</a:t>
-            </a:r>
-            <a:endParaRPr lang="en-GB" dirty="0"/>
-          </a:p>
-          <a:p>
-            <a:endParaRPr lang="en-GB" dirty="0"/>
-          </a:p>
-          <a:p>
-            <a:r>
-              <a:rPr lang="en-GB" dirty="0"/>
-              <a:t>Interfaces for describing repository functionalities and transactions</a:t>
-            </a:r>
-            <a:endParaRPr lang="en-US" dirty="0"/>
-          </a:p>
-        </p:txBody>
-      </p:sp>
-      <p:sp>
-        <p:nvSpPr>
-          <p:cNvPr id="5" name="Slide Number Placeholder 4"/>
-          <p:cNvSpPr>
-            <a:spLocks noGrp="1"/>
-          </p:cNvSpPr>
-          <p:nvPr>
-            <p:ph type="sldNum" sz="quarter" idx="12"/>
-          </p:nvPr>
-        </p:nvSpPr>
-        <p:spPr/>
-        <p:txBody>
-          <a:bodyPr/>
-          <a:lstStyle/>
-          <a:p>
-            <a:fld id="{024A9932-4E76-455F-8E1A-2CC10C89B014}" type="slidenum">
-              <a:rPr lang="pt-PT" smtClean="0"/>
-              <a:pPr/>
-              <a:t>17</a:t>
-            </a:fld>
-            <a:endParaRPr lang="pt-PT"/>
-          </a:p>
-        </p:txBody>
-      </p:sp>
-    </p:spTree>
-    <p:extLst>
-      <p:ext uri="{BB962C8B-B14F-4D97-AF65-F5344CB8AC3E}">
-        <p14:creationId xmlns:p14="http://schemas.microsoft.com/office/powerpoint/2010/main" val="4047766332"/>
-      </p:ext>
-    </p:extLst>
-  </p:cSld>
-  <p:clrMapOvr>
-    <a:masterClrMapping/>
-  </p:clrMapOvr>
-</p:sld>
-</file>
-
 <file path=ppt/slides/slide18.xml><?xml version="1.0" encoding="utf-8"?>
 <p:sld xmlns:a="http://schemas.openxmlformats.org/drawingml/2006/main" xmlns:r="http://schemas.openxmlformats.org/officeDocument/2006/relationships" xmlns:p="http://schemas.openxmlformats.org/presentationml/2006/main">
   <p:cSld>
@@ -6416,13 +6400,70 @@
       </p:grpSpPr>
       <p:sp>
         <p:nvSpPr>
-          <p:cNvPr id="4" name="Slide Number Placeholder 3">
-            <a:extLst>
-              <a:ext uri="{FF2B5EF4-FFF2-40B4-BE49-F238E27FC236}">
-                <a16:creationId xmlns:a16="http://schemas.microsoft.com/office/drawing/2014/main" id="{E0D9B018-F17E-4F2D-9186-89B9F295BEA9}"/>
-              </a:ext>
-            </a:extLst>
-          </p:cNvPr>
+          <p:cNvPr id="2" name="Title 1"/>
+          <p:cNvSpPr>
+            <a:spLocks noGrp="1"/>
+          </p:cNvSpPr>
+          <p:nvPr>
+            <p:ph type="title"/>
+          </p:nvPr>
+        </p:nvSpPr>
+        <p:spPr/>
+        <p:txBody>
+          <a:bodyPr/>
+          <a:lstStyle/>
+          <a:p>
+            <a:r>
+              <a:rPr lang="en-GB" dirty="0"/>
+              <a:t>Repositories</a:t>
+            </a:r>
+            <a:endParaRPr lang="en-US" dirty="0"/>
+          </a:p>
+        </p:txBody>
+      </p:sp>
+      <p:sp>
+        <p:nvSpPr>
+          <p:cNvPr id="3" name="Content Placeholder 2"/>
+          <p:cNvSpPr>
+            <a:spLocks noGrp="1"/>
+          </p:cNvSpPr>
+          <p:nvPr>
+            <p:ph idx="1"/>
+          </p:nvPr>
+        </p:nvSpPr>
+        <p:spPr/>
+        <p:txBody>
+          <a:bodyPr/>
+          <a:lstStyle/>
+          <a:p>
+            <a:r>
+              <a:rPr lang="en-GB" dirty="0" err="1"/>
+              <a:t>DataRepository</a:t>
+            </a:r>
+            <a:endParaRPr lang="en-GB" dirty="0"/>
+          </a:p>
+          <a:p>
+            <a:r>
+              <a:rPr lang="en-GB" dirty="0" err="1"/>
+              <a:t>TransactionalContext</a:t>
+            </a:r>
+            <a:endParaRPr lang="en-GB" dirty="0"/>
+          </a:p>
+          <a:p>
+            <a:endParaRPr lang="en-GB" dirty="0"/>
+          </a:p>
+          <a:p>
+            <a:r>
+              <a:rPr lang="en-GB" dirty="0"/>
+              <a:t>Interfaces for describing repository functionalities and transactions</a:t>
+            </a:r>
+            <a:endParaRPr lang="en-US" dirty="0"/>
+          </a:p>
+        </p:txBody>
+      </p:sp>
+      <p:sp>
+        <p:nvSpPr>
+          <p:cNvPr id="5" name="Slide Number Placeholder 4"/>
           <p:cNvSpPr>
             <a:spLocks noGrp="1"/>
           </p:cNvSpPr>
@@ -6444,12 +6485,72 @@
           </a:p>
         </p:txBody>
       </p:sp>
+    </p:spTree>
+    <p:extLst>
+      <p:ext uri="{BB962C8B-B14F-4D97-AF65-F5344CB8AC3E}">
+        <p14:creationId xmlns:p14="http://schemas.microsoft.com/office/powerpoint/2010/main" val="4047766332"/>
+      </p:ext>
+    </p:extLst>
+  </p:cSld>
+  <p:clrMapOvr>
+    <a:masterClrMapping/>
+  </p:clrMapOvr>
+</p:sld>
+</file>
+
+<file path=ppt/slides/slide19.xml><?xml version="1.0" encoding="utf-8"?>
+<p:sld xmlns:a="http://schemas.openxmlformats.org/drawingml/2006/main" xmlns:r="http://schemas.openxmlformats.org/officeDocument/2006/relationships" xmlns:p="http://schemas.openxmlformats.org/presentationml/2006/main">
+  <p:cSld>
+    <p:spTree>
+      <p:nvGrpSpPr>
+        <p:cNvPr id="1" name=""/>
+        <p:cNvGrpSpPr/>
+        <p:nvPr/>
+      </p:nvGrpSpPr>
+      <p:grpSpPr>
+        <a:xfrm>
+          <a:off x="0" y="0"/>
+          <a:ext cx="0" cy="0"/>
+          <a:chOff x="0" y="0"/>
+          <a:chExt cx="0" cy="0"/>
+        </a:xfrm>
+      </p:grpSpPr>
+      <p:sp>
+        <p:nvSpPr>
+          <p:cNvPr id="4" name="Slide Number Placeholder 3">
+            <a:extLst>
+              <a:ext uri="{FF2B5EF4-FFF2-40B4-BE49-F238E27FC236}">
+                <a16:creationId xmlns:a16="http://schemas.microsoft.com/office/drawing/2014/main" xmlns="" id="{E0D9B018-F17E-4F2D-9186-89B9F295BEA9}"/>
+              </a:ext>
+            </a:extLst>
+          </p:cNvPr>
+          <p:cNvSpPr>
+            <a:spLocks noGrp="1"/>
+          </p:cNvSpPr>
+          <p:nvPr>
+            <p:ph type="sldNum" sz="quarter" idx="12"/>
+          </p:nvPr>
+        </p:nvSpPr>
+        <p:spPr/>
+        <p:txBody>
+          <a:bodyPr/>
+          <a:lstStyle/>
+          <a:p>
+            <a:fld id="{024A9932-4E76-455F-8E1A-2CC10C89B014}" type="slidenum">
+              <a:rPr lang="pt-PT" smtClean="0"/>
+              <a:pPr/>
+              <a:t>19</a:t>
+            </a:fld>
+            <a:endParaRPr lang="pt-PT"/>
+          </a:p>
+        </p:txBody>
+      </p:sp>
       <p:pic>
         <p:nvPicPr>
           <p:cNvPr id="6" name="Content Placeholder 5" descr="A screenshot of a cell phone&#10;&#10;Description automatically generated">
             <a:extLst>
               <a:ext uri="{FF2B5EF4-FFF2-40B4-BE49-F238E27FC236}">
-                <a16:creationId xmlns:a16="http://schemas.microsoft.com/office/drawing/2014/main" id="{5BB0C27D-AE00-4567-8F81-788604A6FAAE}"/>
+                <a16:creationId xmlns:a16="http://schemas.microsoft.com/office/drawing/2014/main" xmlns="" id="{5BB0C27D-AE00-4567-8F81-788604A6FAAE}"/>
               </a:ext>
             </a:extLst>
           </p:cNvPr>
@@ -6516,7 +6617,7 @@
           <p:cNvPr id="7" name="Picture 6" descr="A screenshot of a cell phone&#10;&#10;Description automatically generated">
             <a:extLst>
               <a:ext uri="{FF2B5EF4-FFF2-40B4-BE49-F238E27FC236}">
-                <a16:creationId xmlns:a16="http://schemas.microsoft.com/office/drawing/2014/main" id="{943E3325-147D-40DA-BB73-6C6BDCA69ADE}"/>
+                <a16:creationId xmlns:a16="http://schemas.microsoft.com/office/drawing/2014/main" xmlns="" id="{943E3325-147D-40DA-BB73-6C6BDCA69ADE}"/>
               </a:ext>
             </a:extLst>
           </p:cNvPr>
@@ -6590,7 +6691,149 @@
 </p:sld>
 </file>
 
-<file path=ppt/slides/slide19.xml><?xml version="1.0" encoding="utf-8"?>
+<file path=ppt/slides/slide2.xml><?xml version="1.0" encoding="utf-8"?>
+<p:sld xmlns:a="http://schemas.openxmlformats.org/drawingml/2006/main" xmlns:r="http://schemas.openxmlformats.org/officeDocument/2006/relationships" xmlns:p="http://schemas.openxmlformats.org/presentationml/2006/main">
+  <p:cSld>
+    <p:spTree>
+      <p:nvGrpSpPr>
+        <p:cNvPr id="1" name=""/>
+        <p:cNvGrpSpPr/>
+        <p:nvPr/>
+      </p:nvGrpSpPr>
+      <p:grpSpPr>
+        <a:xfrm>
+          <a:off x="0" y="0"/>
+          <a:ext cx="0" cy="0"/>
+          <a:chOff x="0" y="0"/>
+          <a:chExt cx="0" cy="0"/>
+        </a:xfrm>
+      </p:grpSpPr>
+      <p:sp>
+        <p:nvSpPr>
+          <p:cNvPr id="2" name="Title 1"/>
+          <p:cNvSpPr>
+            <a:spLocks noGrp="1"/>
+          </p:cNvSpPr>
+          <p:nvPr>
+            <p:ph type="title"/>
+          </p:nvPr>
+        </p:nvSpPr>
+        <p:spPr/>
+        <p:txBody>
+          <a:bodyPr/>
+          <a:lstStyle/>
+          <a:p>
+            <a:r>
+              <a:rPr lang="en-GB" dirty="0"/>
+              <a:t>What it is</a:t>
+            </a:r>
+            <a:endParaRPr lang="en-US" dirty="0"/>
+          </a:p>
+        </p:txBody>
+      </p:sp>
+      <p:sp>
+        <p:nvSpPr>
+          <p:cNvPr id="3" name="Content Placeholder 2"/>
+          <p:cNvSpPr>
+            <a:spLocks noGrp="1"/>
+          </p:cNvSpPr>
+          <p:nvPr>
+            <p:ph idx="1"/>
+          </p:nvPr>
+        </p:nvSpPr>
+        <p:spPr/>
+        <p:txBody>
+          <a:bodyPr/>
+          <a:lstStyle/>
+          <a:p>
+            <a:r>
+              <a:rPr lang="en-GB" dirty="0"/>
+              <a:t>Standard application framework developed in the scope of the course unit “</a:t>
+            </a:r>
+            <a:r>
+              <a:rPr lang="en-GB" dirty="0" err="1"/>
+              <a:t>Engenharia</a:t>
+            </a:r>
+            <a:r>
+              <a:rPr lang="en-GB" dirty="0"/>
+              <a:t> de </a:t>
+            </a:r>
+            <a:r>
+              <a:rPr lang="en-GB" dirty="0" err="1"/>
+              <a:t>Aplicações</a:t>
+            </a:r>
+            <a:r>
+              <a:rPr lang="en-GB" dirty="0"/>
+              <a:t>” at </a:t>
+            </a:r>
+            <a:r>
+              <a:rPr lang="en-GB" dirty="0" err="1"/>
+              <a:t>Instituto</a:t>
+            </a:r>
+            <a:r>
+              <a:rPr lang="en-GB" dirty="0"/>
+              <a:t> Superior de </a:t>
+            </a:r>
+            <a:r>
+              <a:rPr lang="en-GB" dirty="0" err="1"/>
+              <a:t>Engenharia</a:t>
+            </a:r>
+            <a:r>
+              <a:rPr lang="en-GB" dirty="0"/>
+              <a:t> do Porto </a:t>
+            </a:r>
+            <a:r>
+              <a:rPr lang="en-GB" dirty="0">
+                <a:hlinkClick r:id="rId2"/>
+              </a:rPr>
+              <a:t>http://www.isep.ipp.pt</a:t>
+            </a:r>
+            <a:r>
+              <a:rPr lang="en-GB" dirty="0"/>
+              <a:t> </a:t>
+            </a:r>
+            <a:endParaRPr lang="en-US" dirty="0"/>
+          </a:p>
+        </p:txBody>
+      </p:sp>
+      <p:sp>
+        <p:nvSpPr>
+          <p:cNvPr id="4" name="Slide Number Placeholder 3"/>
+          <p:cNvSpPr>
+            <a:spLocks noGrp="1"/>
+          </p:cNvSpPr>
+          <p:nvPr>
+            <p:ph type="sldNum" sz="quarter" idx="12"/>
+          </p:nvPr>
+        </p:nvSpPr>
+        <p:spPr/>
+        <p:txBody>
+          <a:bodyPr/>
+          <a:lstStyle/>
+          <a:p>
+            <a:fld id="{024A9932-4E76-455F-8E1A-2CC10C89B014}" type="slidenum">
+              <a:rPr lang="pt-PT" smtClean="0"/>
+              <a:pPr/>
+              <a:t>2</a:t>
+            </a:fld>
+            <a:endParaRPr lang="pt-PT"/>
+          </a:p>
+        </p:txBody>
+      </p:sp>
+    </p:spTree>
+    <p:extLst>
+      <p:ext uri="{BB962C8B-B14F-4D97-AF65-F5344CB8AC3E}">
+        <p14:creationId xmlns:p14="http://schemas.microsoft.com/office/powerpoint/2010/main" val="1881727189"/>
+      </p:ext>
+    </p:extLst>
+  </p:cSld>
+  <p:clrMapOvr>
+    <a:masterClrMapping/>
+  </p:clrMapOvr>
+</p:sld>
+</file>
+
+<file path=ppt/slides/slide20.xml><?xml version="1.0" encoding="utf-8"?>
 <p:sld xmlns:a="http://schemas.openxmlformats.org/drawingml/2006/main" xmlns:r="http://schemas.openxmlformats.org/officeDocument/2006/relationships" xmlns:p="http://schemas.openxmlformats.org/presentationml/2006/main" show="0">
   <p:cSld>
     <p:spTree>
@@ -6612,7 +6855,7 @@
           <p:cNvPr id="2" name="Title 1">
             <a:extLst>
               <a:ext uri="{FF2B5EF4-FFF2-40B4-BE49-F238E27FC236}">
-                <a16:creationId xmlns:a16="http://schemas.microsoft.com/office/drawing/2014/main" id="{B17AF113-467E-4548-9A21-B26EA56B45EB}"/>
+                <a16:creationId xmlns:a16="http://schemas.microsoft.com/office/drawing/2014/main" xmlns="" id="{B17AF113-467E-4548-9A21-B26EA56B45EB}"/>
               </a:ext>
             </a:extLst>
           </p:cNvPr>
@@ -6637,7 +6880,7 @@
           <p:cNvPr id="6" name="Content Placeholder 5" descr="A screenshot of a map&#10;&#10;Description automatically generated">
             <a:extLst>
               <a:ext uri="{FF2B5EF4-FFF2-40B4-BE49-F238E27FC236}">
-                <a16:creationId xmlns:a16="http://schemas.microsoft.com/office/drawing/2014/main" id="{432C80CB-4453-43C7-AD68-28D9351AD7A6}"/>
+                <a16:creationId xmlns:a16="http://schemas.microsoft.com/office/drawing/2014/main" xmlns="" id="{432C80CB-4453-43C7-AD68-28D9351AD7A6}"/>
               </a:ext>
             </a:extLst>
           </p:cNvPr>
@@ -6672,7 +6915,7 @@
           <p:cNvPr id="4" name="Slide Number Placeholder 3">
             <a:extLst>
               <a:ext uri="{FF2B5EF4-FFF2-40B4-BE49-F238E27FC236}">
-                <a16:creationId xmlns:a16="http://schemas.microsoft.com/office/drawing/2014/main" id="{F4F420F3-2C07-4FBF-AFBB-C7545706F582}"/>
+                <a16:creationId xmlns:a16="http://schemas.microsoft.com/office/drawing/2014/main" xmlns="" id="{F4F420F3-2C07-4FBF-AFBB-C7545706F582}"/>
               </a:ext>
             </a:extLst>
           </p:cNvPr>
@@ -6691,7 +6934,7 @@
             <a:fld id="{024A9932-4E76-455F-8E1A-2CC10C89B014}" type="slidenum">
               <a:rPr lang="pt-PT" smtClean="0"/>
               <a:pPr/>
-              <a:t>19</a:t>
+              <a:t>20</a:t>
             </a:fld>
             <a:endParaRPr lang="pt-PT"/>
           </a:p>
@@ -6710,300 +6953,6 @@
   <p:transition spd="med">
     <p:fade/>
   </p:transition>
-</p:sld>
-</file>
-
-<file path=ppt/slides/slide2.xml><?xml version="1.0" encoding="utf-8"?>
-<p:sld xmlns:a="http://schemas.openxmlformats.org/drawingml/2006/main" xmlns:r="http://schemas.openxmlformats.org/officeDocument/2006/relationships" xmlns:p="http://schemas.openxmlformats.org/presentationml/2006/main">
-  <p:cSld>
-    <p:spTree>
-      <p:nvGrpSpPr>
-        <p:cNvPr id="1" name=""/>
-        <p:cNvGrpSpPr/>
-        <p:nvPr/>
-      </p:nvGrpSpPr>
-      <p:grpSpPr>
-        <a:xfrm>
-          <a:off x="0" y="0"/>
-          <a:ext cx="0" cy="0"/>
-          <a:chOff x="0" y="0"/>
-          <a:chExt cx="0" cy="0"/>
-        </a:xfrm>
-      </p:grpSpPr>
-      <p:sp>
-        <p:nvSpPr>
-          <p:cNvPr id="2" name="Title 1"/>
-          <p:cNvSpPr>
-            <a:spLocks noGrp="1"/>
-          </p:cNvSpPr>
-          <p:nvPr>
-            <p:ph type="title"/>
-          </p:nvPr>
-        </p:nvSpPr>
-        <p:spPr/>
-        <p:txBody>
-          <a:bodyPr/>
-          <a:lstStyle/>
-          <a:p>
-            <a:r>
-              <a:rPr lang="en-GB" dirty="0"/>
-              <a:t>What it is</a:t>
-            </a:r>
-            <a:endParaRPr lang="en-US" dirty="0"/>
-          </a:p>
-        </p:txBody>
-      </p:sp>
-      <p:sp>
-        <p:nvSpPr>
-          <p:cNvPr id="3" name="Content Placeholder 2"/>
-          <p:cNvSpPr>
-            <a:spLocks noGrp="1"/>
-          </p:cNvSpPr>
-          <p:nvPr>
-            <p:ph idx="1"/>
-          </p:nvPr>
-        </p:nvSpPr>
-        <p:spPr/>
-        <p:txBody>
-          <a:bodyPr/>
-          <a:lstStyle/>
-          <a:p>
-            <a:r>
-              <a:rPr lang="en-GB" dirty="0"/>
-              <a:t>Standard application framework developed in the scope of the course unit “</a:t>
-            </a:r>
-            <a:r>
-              <a:rPr lang="en-GB" dirty="0" err="1"/>
-              <a:t>Engenharia</a:t>
-            </a:r>
-            <a:r>
-              <a:rPr lang="en-GB" dirty="0"/>
-              <a:t> de </a:t>
-            </a:r>
-            <a:r>
-              <a:rPr lang="en-GB" dirty="0" err="1"/>
-              <a:t>Aplicações</a:t>
-            </a:r>
-            <a:r>
-              <a:rPr lang="en-GB" dirty="0"/>
-              <a:t>” at </a:t>
-            </a:r>
-            <a:r>
-              <a:rPr lang="en-GB" dirty="0" err="1"/>
-              <a:t>Instituto</a:t>
-            </a:r>
-            <a:r>
-              <a:rPr lang="en-GB" dirty="0"/>
-              <a:t> Superior de </a:t>
-            </a:r>
-            <a:r>
-              <a:rPr lang="en-GB" dirty="0" err="1"/>
-              <a:t>Engenharia</a:t>
-            </a:r>
-            <a:r>
-              <a:rPr lang="en-GB" dirty="0"/>
-              <a:t> do Porto </a:t>
-            </a:r>
-            <a:r>
-              <a:rPr lang="en-GB" dirty="0">
-                <a:hlinkClick r:id="rId2"/>
-              </a:rPr>
-              <a:t>http://www.isep.ipp.pt</a:t>
-            </a:r>
-            <a:r>
-              <a:rPr lang="en-GB" dirty="0"/>
-              <a:t> </a:t>
-            </a:r>
-            <a:endParaRPr lang="en-US" dirty="0"/>
-          </a:p>
-        </p:txBody>
-      </p:sp>
-      <p:sp>
-        <p:nvSpPr>
-          <p:cNvPr id="4" name="Slide Number Placeholder 3"/>
-          <p:cNvSpPr>
-            <a:spLocks noGrp="1"/>
-          </p:cNvSpPr>
-          <p:nvPr>
-            <p:ph type="sldNum" sz="quarter" idx="12"/>
-          </p:nvPr>
-        </p:nvSpPr>
-        <p:spPr/>
-        <p:txBody>
-          <a:bodyPr/>
-          <a:lstStyle/>
-          <a:p>
-            <a:fld id="{024A9932-4E76-455F-8E1A-2CC10C89B014}" type="slidenum">
-              <a:rPr lang="pt-PT" smtClean="0"/>
-              <a:pPr/>
-              <a:t>2</a:t>
-            </a:fld>
-            <a:endParaRPr lang="pt-PT"/>
-          </a:p>
-        </p:txBody>
-      </p:sp>
-    </p:spTree>
-    <p:extLst>
-      <p:ext uri="{BB962C8B-B14F-4D97-AF65-F5344CB8AC3E}">
-        <p14:creationId xmlns:p14="http://schemas.microsoft.com/office/powerpoint/2010/main" val="1881727189"/>
-      </p:ext>
-    </p:extLst>
-  </p:cSld>
-  <p:clrMapOvr>
-    <a:masterClrMapping/>
-  </p:clrMapOvr>
-</p:sld>
-</file>
-
-<file path=ppt/slides/slide20.xml><?xml version="1.0" encoding="utf-8"?>
-<p:sld xmlns:a="http://schemas.openxmlformats.org/drawingml/2006/main" xmlns:r="http://schemas.openxmlformats.org/officeDocument/2006/relationships" xmlns:p="http://schemas.openxmlformats.org/presentationml/2006/main">
-  <p:cSld>
-    <p:spTree>
-      <p:nvGrpSpPr>
-        <p:cNvPr id="1" name=""/>
-        <p:cNvGrpSpPr/>
-        <p:nvPr/>
-      </p:nvGrpSpPr>
-      <p:grpSpPr>
-        <a:xfrm>
-          <a:off x="0" y="0"/>
-          <a:ext cx="0" cy="0"/>
-          <a:chOff x="0" y="0"/>
-          <a:chExt cx="0" cy="0"/>
-        </a:xfrm>
-      </p:grpSpPr>
-      <p:sp>
-        <p:nvSpPr>
-          <p:cNvPr id="6" name="Title 5"/>
-          <p:cNvSpPr>
-            <a:spLocks noGrp="1"/>
-          </p:cNvSpPr>
-          <p:nvPr>
-            <p:ph type="title"/>
-          </p:nvPr>
-        </p:nvSpPr>
-        <p:spPr/>
-        <p:txBody>
-          <a:bodyPr/>
-          <a:lstStyle/>
-          <a:p>
-            <a:r>
-              <a:rPr lang="en-GB" dirty="0"/>
-              <a:t>Persistence</a:t>
-            </a:r>
-          </a:p>
-        </p:txBody>
-      </p:sp>
-      <p:sp>
-        <p:nvSpPr>
-          <p:cNvPr id="7" name="Content Placeholder 6"/>
-          <p:cNvSpPr>
-            <a:spLocks noGrp="1"/>
-          </p:cNvSpPr>
-          <p:nvPr>
-            <p:ph idx="1"/>
-          </p:nvPr>
-        </p:nvSpPr>
-        <p:spPr/>
-        <p:txBody>
-          <a:bodyPr>
-            <a:normAutofit lnSpcReduction="10000"/>
-          </a:bodyPr>
-          <a:lstStyle/>
-          <a:p>
-            <a:r>
-              <a:rPr lang="en-GB" dirty="0"/>
-              <a:t>Controller needs to access the repositories</a:t>
-            </a:r>
-          </a:p>
-          <a:p>
-            <a:r>
-              <a:rPr lang="en-GB" dirty="0"/>
-              <a:t>But we have three repository implementations</a:t>
-            </a:r>
-          </a:p>
-          <a:p>
-            <a:pPr lvl="1"/>
-            <a:r>
-              <a:rPr lang="en-GB" dirty="0"/>
-              <a:t>In memory</a:t>
-            </a:r>
-          </a:p>
-          <a:p>
-            <a:pPr lvl="1"/>
-            <a:r>
-              <a:rPr lang="en-GB" dirty="0"/>
-              <a:t>Relational database thru JPA</a:t>
-            </a:r>
-          </a:p>
-          <a:p>
-            <a:pPr lvl="1"/>
-            <a:r>
-              <a:rPr lang="en-GB" dirty="0"/>
-              <a:t>Relational database thru </a:t>
-            </a:r>
-            <a:r>
-              <a:rPr lang="en-GB" dirty="0" err="1"/>
-              <a:t>SpringData</a:t>
-            </a:r>
-            <a:endParaRPr lang="en-GB" dirty="0"/>
-          </a:p>
-          <a:p>
-            <a:r>
-              <a:rPr lang="en-GB" dirty="0"/>
-              <a:t>Hide persistence details from rest of the code</a:t>
-            </a:r>
-          </a:p>
-          <a:p>
-            <a:pPr lvl="1"/>
-            <a:r>
-              <a:rPr lang="en-GB" dirty="0"/>
-              <a:t>Interfaces</a:t>
-            </a:r>
-          </a:p>
-          <a:p>
-            <a:pPr lvl="1"/>
-            <a:r>
-              <a:rPr lang="en-GB" dirty="0"/>
-              <a:t>Dependency injection or Factories </a:t>
-            </a:r>
-          </a:p>
-        </p:txBody>
-      </p:sp>
-      <p:sp>
-        <p:nvSpPr>
-          <p:cNvPr id="5" name="Slide Number Placeholder 4"/>
-          <p:cNvSpPr>
-            <a:spLocks noGrp="1"/>
-          </p:cNvSpPr>
-          <p:nvPr>
-            <p:ph type="sldNum" sz="quarter" idx="12"/>
-          </p:nvPr>
-        </p:nvSpPr>
-        <p:spPr/>
-        <p:txBody>
-          <a:bodyPr/>
-          <a:lstStyle/>
-          <a:p>
-            <a:fld id="{024A9932-4E76-455F-8E1A-2CC10C89B014}" type="slidenum">
-              <a:rPr lang="pt-PT" smtClean="0"/>
-              <a:pPr/>
-              <a:t>20</a:t>
-            </a:fld>
-            <a:endParaRPr lang="pt-PT"/>
-          </a:p>
-        </p:txBody>
-      </p:sp>
-    </p:spTree>
-    <p:extLst>
-      <p:ext uri="{BB962C8B-B14F-4D97-AF65-F5344CB8AC3E}">
-        <p14:creationId xmlns:p14="http://schemas.microsoft.com/office/powerpoint/2010/main" val="1703766327"/>
-      </p:ext>
-    </p:extLst>
-  </p:cSld>
-  <p:clrMapOvr>
-    <a:masterClrMapping/>
-  </p:clrMapOvr>
 </p:sld>
 </file>
 
@@ -7026,7 +6975,105 @@
       </p:grpSpPr>
       <p:sp>
         <p:nvSpPr>
-          <p:cNvPr id="4" name="Slide Number Placeholder 3"/>
+          <p:cNvPr id="6" name="Title 5"/>
+          <p:cNvSpPr>
+            <a:spLocks noGrp="1"/>
+          </p:cNvSpPr>
+          <p:nvPr>
+            <p:ph type="title"/>
+          </p:nvPr>
+        </p:nvSpPr>
+        <p:spPr/>
+        <p:txBody>
+          <a:bodyPr/>
+          <a:lstStyle/>
+          <a:p>
+            <a:r>
+              <a:rPr lang="en-GB" dirty="0"/>
+              <a:t>Persistence</a:t>
+            </a:r>
+          </a:p>
+        </p:txBody>
+      </p:sp>
+      <p:sp>
+        <p:nvSpPr>
+          <p:cNvPr id="7" name="Content Placeholder 6"/>
+          <p:cNvSpPr>
+            <a:spLocks noGrp="1"/>
+          </p:cNvSpPr>
+          <p:nvPr>
+            <p:ph idx="1"/>
+          </p:nvPr>
+        </p:nvSpPr>
+        <p:spPr/>
+        <p:txBody>
+          <a:bodyPr>
+            <a:normAutofit lnSpcReduction="10000"/>
+          </a:bodyPr>
+          <a:lstStyle/>
+          <a:p>
+            <a:r>
+              <a:rPr lang="en-GB" dirty="0"/>
+              <a:t>Controller needs to access the repositories</a:t>
+            </a:r>
+          </a:p>
+          <a:p>
+            <a:r>
+              <a:rPr lang="en-GB" dirty="0"/>
+              <a:t>But we have three repository implementations</a:t>
+            </a:r>
+          </a:p>
+          <a:p>
+            <a:pPr lvl="1"/>
+            <a:r>
+              <a:rPr lang="en-GB" dirty="0"/>
+              <a:t>In memory</a:t>
+            </a:r>
+          </a:p>
+          <a:p>
+            <a:pPr lvl="1"/>
+            <a:r>
+              <a:rPr lang="en-GB" dirty="0"/>
+              <a:t>Relational database thru JPA</a:t>
+            </a:r>
+          </a:p>
+          <a:p>
+            <a:pPr lvl="1"/>
+            <a:r>
+              <a:rPr lang="en-GB" dirty="0"/>
+              <a:t>Relational database thru </a:t>
+            </a:r>
+            <a:r>
+              <a:rPr lang="en-GB" dirty="0" err="1"/>
+              <a:t>SpringData</a:t>
+            </a:r>
+            <a:endParaRPr lang="en-GB" dirty="0"/>
+          </a:p>
+          <a:p>
+            <a:r>
+              <a:rPr lang="en-GB" dirty="0"/>
+              <a:t>Hide persistence details from rest of the code</a:t>
+            </a:r>
+          </a:p>
+          <a:p>
+            <a:pPr lvl="1"/>
+            <a:r>
+              <a:rPr lang="en-GB" dirty="0"/>
+              <a:t>Interfaces</a:t>
+            </a:r>
+          </a:p>
+          <a:p>
+            <a:pPr lvl="1"/>
+            <a:r>
+              <a:rPr lang="en-GB" dirty="0"/>
+              <a:t>Dependency injection or Factories </a:t>
+            </a:r>
+          </a:p>
+        </p:txBody>
+      </p:sp>
+      <p:sp>
+        <p:nvSpPr>
+          <p:cNvPr id="5" name="Slide Number Placeholder 4"/>
           <p:cNvSpPr>
             <a:spLocks noGrp="1"/>
           </p:cNvSpPr>
@@ -7043,6 +7090,60 @@
               <a:rPr lang="pt-PT" smtClean="0"/>
               <a:pPr/>
               <a:t>21</a:t>
+            </a:fld>
+            <a:endParaRPr lang="pt-PT"/>
+          </a:p>
+        </p:txBody>
+      </p:sp>
+    </p:spTree>
+    <p:extLst>
+      <p:ext uri="{BB962C8B-B14F-4D97-AF65-F5344CB8AC3E}">
+        <p14:creationId xmlns:p14="http://schemas.microsoft.com/office/powerpoint/2010/main" val="1703766327"/>
+      </p:ext>
+    </p:extLst>
+  </p:cSld>
+  <p:clrMapOvr>
+    <a:masterClrMapping/>
+  </p:clrMapOvr>
+</p:sld>
+</file>
+
+<file path=ppt/slides/slide22.xml><?xml version="1.0" encoding="utf-8"?>
+<p:sld xmlns:a="http://schemas.openxmlformats.org/drawingml/2006/main" xmlns:r="http://schemas.openxmlformats.org/officeDocument/2006/relationships" xmlns:p="http://schemas.openxmlformats.org/presentationml/2006/main">
+  <p:cSld>
+    <p:spTree>
+      <p:nvGrpSpPr>
+        <p:cNvPr id="1" name=""/>
+        <p:cNvGrpSpPr/>
+        <p:nvPr/>
+      </p:nvGrpSpPr>
+      <p:grpSpPr>
+        <a:xfrm>
+          <a:off x="0" y="0"/>
+          <a:ext cx="0" cy="0"/>
+          <a:chOff x="0" y="0"/>
+          <a:chExt cx="0" cy="0"/>
+        </a:xfrm>
+      </p:grpSpPr>
+      <p:sp>
+        <p:nvSpPr>
+          <p:cNvPr id="4" name="Slide Number Placeholder 3"/>
+          <p:cNvSpPr>
+            <a:spLocks noGrp="1"/>
+          </p:cNvSpPr>
+          <p:nvPr>
+            <p:ph type="sldNum" sz="quarter" idx="12"/>
+          </p:nvPr>
+        </p:nvSpPr>
+        <p:spPr/>
+        <p:txBody>
+          <a:bodyPr/>
+          <a:lstStyle/>
+          <a:p>
+            <a:fld id="{024A9932-4E76-455F-8E1A-2CC10C89B014}" type="slidenum">
+              <a:rPr lang="pt-PT" smtClean="0"/>
+              <a:pPr/>
+              <a:t>22</a:t>
             </a:fld>
             <a:endParaRPr lang="pt-PT"/>
           </a:p>
@@ -7085,7 +7186,7 @@
 </p:sld>
 </file>
 
-<file path=ppt/slides/slide22.xml><?xml version="1.0" encoding="utf-8"?>
+<file path=ppt/slides/slide23.xml><?xml version="1.0" encoding="utf-8"?>
 <p:sld xmlns:a="http://schemas.openxmlformats.org/drawingml/2006/main" xmlns:r="http://schemas.openxmlformats.org/officeDocument/2006/relationships" xmlns:p="http://schemas.openxmlformats.org/presentationml/2006/main">
   <p:cSld>
     <p:spTree>
@@ -7145,7 +7246,7 @@
             <a:fld id="{024A9932-4E76-455F-8E1A-2CC10C89B014}" type="slidenum">
               <a:rPr lang="pt-PT" smtClean="0"/>
               <a:pPr/>
-              <a:t>22</a:t>
+              <a:t>23</a:t>
             </a:fld>
             <a:endParaRPr lang="pt-PT"/>
           </a:p>
@@ -7265,123 +7366,6 @@
 </p:sld>
 </file>
 
-<file path=ppt/slides/slide23.xml><?xml version="1.0" encoding="utf-8"?>
-<p:sld xmlns:a="http://schemas.openxmlformats.org/drawingml/2006/main" xmlns:r="http://schemas.openxmlformats.org/officeDocument/2006/relationships" xmlns:p="http://schemas.openxmlformats.org/presentationml/2006/main">
-  <p:cSld>
-    <p:spTree>
-      <p:nvGrpSpPr>
-        <p:cNvPr id="1" name=""/>
-        <p:cNvGrpSpPr/>
-        <p:nvPr/>
-      </p:nvGrpSpPr>
-      <p:grpSpPr>
-        <a:xfrm>
-          <a:off x="0" y="0"/>
-          <a:ext cx="0" cy="0"/>
-          <a:chOff x="0" y="0"/>
-          <a:chExt cx="0" cy="0"/>
-        </a:xfrm>
-      </p:grpSpPr>
-      <p:sp>
-        <p:nvSpPr>
-          <p:cNvPr id="2" name="Title 1"/>
-          <p:cNvSpPr>
-            <a:spLocks noGrp="1"/>
-          </p:cNvSpPr>
-          <p:nvPr>
-            <p:ph type="title"/>
-          </p:nvPr>
-        </p:nvSpPr>
-        <p:spPr/>
-        <p:txBody>
-          <a:bodyPr/>
-          <a:lstStyle/>
-          <a:p>
-            <a:r>
-              <a:rPr lang="en-GB" dirty="0"/>
-              <a:t>In memory Repositories</a:t>
-            </a:r>
-            <a:endParaRPr lang="en-US" dirty="0"/>
-          </a:p>
-        </p:txBody>
-      </p:sp>
-      <p:sp>
-        <p:nvSpPr>
-          <p:cNvPr id="3" name="Content Placeholder 2"/>
-          <p:cNvSpPr>
-            <a:spLocks noGrp="1"/>
-          </p:cNvSpPr>
-          <p:nvPr>
-            <p:ph idx="1"/>
-          </p:nvPr>
-        </p:nvSpPr>
-        <p:spPr/>
-        <p:txBody>
-          <a:bodyPr/>
-          <a:lstStyle/>
-          <a:p>
-            <a:r>
-              <a:rPr lang="en-GB" dirty="0" err="1"/>
-              <a:t>InMemoryBaseRepository</a:t>
-            </a:r>
-            <a:endParaRPr lang="en-GB" dirty="0"/>
-          </a:p>
-          <a:p>
-            <a:r>
-              <a:rPr lang="en-GB" dirty="0" err="1"/>
-              <a:t>InMemoryBaseRepositorywithLongPK</a:t>
-            </a:r>
-            <a:endParaRPr lang="en-GB" dirty="0"/>
-          </a:p>
-          <a:p>
-            <a:endParaRPr lang="en-GB" dirty="0"/>
-          </a:p>
-          <a:p>
-            <a:r>
-              <a:rPr lang="en-GB" b="1" dirty="0"/>
-              <a:t>For pedagogical testing purposes only!</a:t>
-            </a:r>
-            <a:endParaRPr lang="en-US" b="1" dirty="0"/>
-          </a:p>
-        </p:txBody>
-      </p:sp>
-      <p:sp>
-        <p:nvSpPr>
-          <p:cNvPr id="5" name="Slide Number Placeholder 4"/>
-          <p:cNvSpPr>
-            <a:spLocks noGrp="1"/>
-          </p:cNvSpPr>
-          <p:nvPr>
-            <p:ph type="sldNum" sz="quarter" idx="12"/>
-          </p:nvPr>
-        </p:nvSpPr>
-        <p:spPr/>
-        <p:txBody>
-          <a:bodyPr/>
-          <a:lstStyle/>
-          <a:p>
-            <a:fld id="{024A9932-4E76-455F-8E1A-2CC10C89B014}" type="slidenum">
-              <a:rPr lang="pt-PT" smtClean="0"/>
-              <a:pPr/>
-              <a:t>23</a:t>
-            </a:fld>
-            <a:endParaRPr lang="pt-PT"/>
-          </a:p>
-        </p:txBody>
-      </p:sp>
-    </p:spTree>
-    <p:extLst>
-      <p:ext uri="{BB962C8B-B14F-4D97-AF65-F5344CB8AC3E}">
-        <p14:creationId xmlns:p14="http://schemas.microsoft.com/office/powerpoint/2010/main" val="1746043456"/>
-      </p:ext>
-    </p:extLst>
-  </p:cSld>
-  <p:clrMapOvr>
-    <a:masterClrMapping/>
-  </p:clrMapOvr>
-</p:sld>
-</file>
-
 <file path=ppt/slides/slide24.xml><?xml version="1.0" encoding="utf-8"?>
 <p:sld xmlns:a="http://schemas.openxmlformats.org/drawingml/2006/main" xmlns:r="http://schemas.openxmlformats.org/officeDocument/2006/relationships" xmlns:p="http://schemas.openxmlformats.org/presentationml/2006/main">
   <p:cSld>
@@ -7416,7 +7400,7 @@
           <a:p>
             <a:r>
               <a:rPr lang="en-GB" dirty="0"/>
-              <a:t>JPA Repositories</a:t>
+              <a:t>In memory Repositories</a:t>
             </a:r>
             <a:endParaRPr lang="en-US" dirty="0"/>
           </a:p>
@@ -7434,69 +7418,31 @@
         </p:nvSpPr>
         <p:spPr/>
         <p:txBody>
-          <a:bodyPr>
-            <a:normAutofit fontScale="77500" lnSpcReduction="20000"/>
-          </a:bodyPr>
+          <a:bodyPr/>
           <a:lstStyle/>
           <a:p>
             <a:r>
               <a:rPr lang="en-GB" dirty="0" err="1"/>
-              <a:t>JpaBaseRepository</a:t>
+              <a:t>InMemoryBaseRepository</a:t>
             </a:r>
             <a:endParaRPr lang="en-GB" dirty="0"/>
           </a:p>
           <a:p>
-            <a:pPr lvl="1"/>
-            <a:r>
-              <a:rPr lang="en-GB" dirty="0"/>
-              <a:t>Generic repository implementation that expects the entity manager factory to be injected by a container, e.g., web server</a:t>
-            </a:r>
-          </a:p>
-          <a:p>
             <a:r>
               <a:rPr lang="en-GB" dirty="0" err="1"/>
-              <a:t>JpaNotRunningInContainerBaseRepository</a:t>
+              <a:t>InMemoryBaseRepositorywithLongPK</a:t>
             </a:r>
             <a:endParaRPr lang="en-GB" dirty="0"/>
           </a:p>
           <a:p>
-            <a:pPr lvl="1"/>
-            <a:r>
-              <a:rPr lang="en-GB" dirty="0"/>
-              <a:t>For scenarios where the code is not running in a container but transaction is managed by the outside, e.g., controller</a:t>
-            </a:r>
-          </a:p>
-          <a:p>
-            <a:r>
-              <a:rPr lang="en-GB" dirty="0" err="1"/>
-              <a:t>JpaTransactionalBaseRepository</a:t>
-            </a:r>
             <a:endParaRPr lang="en-GB" dirty="0"/>
           </a:p>
           <a:p>
-            <a:pPr lvl="1"/>
-            <a:r>
-              <a:rPr lang="en-GB" dirty="0"/>
-              <a:t>For scenarios not running in a container but transactions are created and committed by each repository method; the connection is also closed automatically in each method.</a:t>
-            </a:r>
-          </a:p>
-          <a:p>
-            <a:r>
-              <a:rPr lang="en-GB" dirty="0" err="1"/>
-              <a:t>JpaAutoTxRepository</a:t>
-            </a:r>
-            <a:endParaRPr lang="en-GB" dirty="0"/>
-          </a:p>
-          <a:p>
-            <a:pPr lvl="1"/>
-            <a:r>
-              <a:rPr lang="en-GB" dirty="0"/>
-              <a:t>Dual behaviour to either have outside transactional control or explicit transaction in each method</a:t>
-            </a:r>
-          </a:p>
-          <a:p>
-            <a:pPr lvl="1"/>
-            <a:endParaRPr lang="en-US" dirty="0"/>
+            <a:r>
+              <a:rPr lang="en-GB" b="1" dirty="0"/>
+              <a:t>For pedagogical testing purposes only!</a:t>
+            </a:r>
+            <a:endParaRPr lang="en-US" b="1" dirty="0"/>
           </a:p>
         </p:txBody>
       </p:sp>
@@ -7527,7 +7473,7 @@
     </p:spTree>
     <p:extLst>
       <p:ext uri="{BB962C8B-B14F-4D97-AF65-F5344CB8AC3E}">
-        <p14:creationId xmlns:p14="http://schemas.microsoft.com/office/powerpoint/2010/main" val="3449136498"/>
+        <p14:creationId xmlns:p14="http://schemas.microsoft.com/office/powerpoint/2010/main" val="1746043456"/>
       </p:ext>
     </p:extLst>
   </p:cSld>
@@ -7571,7 +7517,7 @@
           <a:p>
             <a:r>
               <a:rPr lang="en-GB" dirty="0"/>
-              <a:t>Spring Data JPA repositories</a:t>
+              <a:t>JPA Repositories</a:t>
             </a:r>
             <a:endParaRPr lang="en-US" dirty="0"/>
           </a:p>
@@ -7589,16 +7535,75 @@
         </p:nvSpPr>
         <p:spPr/>
         <p:txBody>
-          <a:bodyPr/>
-          <a:lstStyle/>
-          <a:p>
-            <a:endParaRPr lang="en-US"/>
-          </a:p>
-        </p:txBody>
-      </p:sp>
-      <p:sp>
-        <p:nvSpPr>
-          <p:cNvPr id="4" name="Slide Number Placeholder 3"/>
+          <a:bodyPr>
+            <a:normAutofit fontScale="77500" lnSpcReduction="20000"/>
+          </a:bodyPr>
+          <a:lstStyle/>
+          <a:p>
+            <a:r>
+              <a:rPr lang="en-GB" dirty="0" err="1"/>
+              <a:t>JpaBaseRepository</a:t>
+            </a:r>
+            <a:endParaRPr lang="en-GB" dirty="0"/>
+          </a:p>
+          <a:p>
+            <a:pPr lvl="1"/>
+            <a:r>
+              <a:rPr lang="en-GB" dirty="0"/>
+              <a:t>Generic repository implementation that expects the entity manager factory to be injected by a container, e.g., web server</a:t>
+            </a:r>
+          </a:p>
+          <a:p>
+            <a:r>
+              <a:rPr lang="en-GB" dirty="0" err="1"/>
+              <a:t>JpaNotRunningInContainerBaseRepository</a:t>
+            </a:r>
+            <a:endParaRPr lang="en-GB" dirty="0"/>
+          </a:p>
+          <a:p>
+            <a:pPr lvl="1"/>
+            <a:r>
+              <a:rPr lang="en-GB" dirty="0"/>
+              <a:t>For scenarios where the code is not running in a container but transaction is managed by the outside, e.g., controller</a:t>
+            </a:r>
+          </a:p>
+          <a:p>
+            <a:r>
+              <a:rPr lang="en-GB" dirty="0" err="1"/>
+              <a:t>JpaTransactionalBaseRepository</a:t>
+            </a:r>
+            <a:endParaRPr lang="en-GB" dirty="0"/>
+          </a:p>
+          <a:p>
+            <a:pPr lvl="1"/>
+            <a:r>
+              <a:rPr lang="en-GB" dirty="0"/>
+              <a:t>For scenarios not running in a container but transactions are created and committed by each repository method; the connection is also closed automatically in each method.</a:t>
+            </a:r>
+          </a:p>
+          <a:p>
+            <a:r>
+              <a:rPr lang="en-GB" dirty="0" err="1"/>
+              <a:t>JpaAutoTxRepository</a:t>
+            </a:r>
+            <a:endParaRPr lang="en-GB" dirty="0"/>
+          </a:p>
+          <a:p>
+            <a:pPr lvl="1"/>
+            <a:r>
+              <a:rPr lang="en-GB" dirty="0"/>
+              <a:t>Dual behaviour to either have outside transactional control or explicit transaction in each method</a:t>
+            </a:r>
+          </a:p>
+          <a:p>
+            <a:pPr lvl="1"/>
+            <a:endParaRPr lang="en-US" dirty="0"/>
+          </a:p>
+        </p:txBody>
+      </p:sp>
+      <p:sp>
+        <p:nvSpPr>
+          <p:cNvPr id="5" name="Slide Number Placeholder 4"/>
           <p:cNvSpPr>
             <a:spLocks noGrp="1"/>
           </p:cNvSpPr>
@@ -7623,7 +7628,7 @@
     </p:spTree>
     <p:extLst>
       <p:ext uri="{BB962C8B-B14F-4D97-AF65-F5344CB8AC3E}">
-        <p14:creationId xmlns:p14="http://schemas.microsoft.com/office/powerpoint/2010/main" val="3679903379"/>
+        <p14:creationId xmlns:p14="http://schemas.microsoft.com/office/powerpoint/2010/main" val="3449136498"/>
       </p:ext>
     </p:extLst>
   </p:cSld>
@@ -7667,14 +7672,34 @@
           <a:p>
             <a:r>
               <a:rPr lang="en-GB" dirty="0"/>
-              <a:t>Resources </a:t>
-            </a:r>
-          </a:p>
-        </p:txBody>
-      </p:sp>
-      <p:sp>
-        <p:nvSpPr>
-          <p:cNvPr id="5" name="Slide Number Placeholder 4"/>
+              <a:t>Spring Data JPA repositories</a:t>
+            </a:r>
+            <a:endParaRPr lang="en-US" dirty="0"/>
+          </a:p>
+        </p:txBody>
+      </p:sp>
+      <p:sp>
+        <p:nvSpPr>
+          <p:cNvPr id="3" name="Content Placeholder 2"/>
+          <p:cNvSpPr>
+            <a:spLocks noGrp="1"/>
+          </p:cNvSpPr>
+          <p:nvPr>
+            <p:ph idx="1"/>
+          </p:nvPr>
+        </p:nvSpPr>
+        <p:spPr/>
+        <p:txBody>
+          <a:bodyPr/>
+          <a:lstStyle/>
+          <a:p>
+            <a:endParaRPr lang="en-US"/>
+          </a:p>
+        </p:txBody>
+      </p:sp>
+      <p:sp>
+        <p:nvSpPr>
+          <p:cNvPr id="4" name="Slide Number Placeholder 3"/>
           <p:cNvSpPr>
             <a:spLocks noGrp="1"/>
           </p:cNvSpPr>
@@ -7691,6 +7716,82 @@
               <a:rPr lang="pt-PT" smtClean="0"/>
               <a:pPr/>
               <a:t>26</a:t>
+            </a:fld>
+            <a:endParaRPr lang="pt-PT"/>
+          </a:p>
+        </p:txBody>
+      </p:sp>
+    </p:spTree>
+    <p:extLst>
+      <p:ext uri="{BB962C8B-B14F-4D97-AF65-F5344CB8AC3E}">
+        <p14:creationId xmlns:p14="http://schemas.microsoft.com/office/powerpoint/2010/main" val="3679903379"/>
+      </p:ext>
+    </p:extLst>
+  </p:cSld>
+  <p:clrMapOvr>
+    <a:masterClrMapping/>
+  </p:clrMapOvr>
+</p:sld>
+</file>
+
+<file path=ppt/slides/slide27.xml><?xml version="1.0" encoding="utf-8"?>
+<p:sld xmlns:a="http://schemas.openxmlformats.org/drawingml/2006/main" xmlns:r="http://schemas.openxmlformats.org/officeDocument/2006/relationships" xmlns:p="http://schemas.openxmlformats.org/presentationml/2006/main">
+  <p:cSld>
+    <p:spTree>
+      <p:nvGrpSpPr>
+        <p:cNvPr id="1" name=""/>
+        <p:cNvGrpSpPr/>
+        <p:nvPr/>
+      </p:nvGrpSpPr>
+      <p:grpSpPr>
+        <a:xfrm>
+          <a:off x="0" y="0"/>
+          <a:ext cx="0" cy="0"/>
+          <a:chOff x="0" y="0"/>
+          <a:chExt cx="0" cy="0"/>
+        </a:xfrm>
+      </p:grpSpPr>
+      <p:sp>
+        <p:nvSpPr>
+          <p:cNvPr id="2" name="Title 1"/>
+          <p:cNvSpPr>
+            <a:spLocks noGrp="1"/>
+          </p:cNvSpPr>
+          <p:nvPr>
+            <p:ph type="title"/>
+          </p:nvPr>
+        </p:nvSpPr>
+        <p:spPr/>
+        <p:txBody>
+          <a:bodyPr/>
+          <a:lstStyle/>
+          <a:p>
+            <a:r>
+              <a:rPr lang="en-GB" dirty="0"/>
+              <a:t>Resources </a:t>
+            </a:r>
+          </a:p>
+        </p:txBody>
+      </p:sp>
+      <p:sp>
+        <p:nvSpPr>
+          <p:cNvPr id="5" name="Slide Number Placeholder 4"/>
+          <p:cNvSpPr>
+            <a:spLocks noGrp="1"/>
+          </p:cNvSpPr>
+          <p:nvPr>
+            <p:ph type="sldNum" sz="quarter" idx="12"/>
+          </p:nvPr>
+        </p:nvSpPr>
+        <p:spPr/>
+        <p:txBody>
+          <a:bodyPr/>
+          <a:lstStyle/>
+          <a:p>
+            <a:fld id="{024A9932-4E76-455F-8E1A-2CC10C89B014}" type="slidenum">
+              <a:rPr lang="pt-PT" smtClean="0"/>
+              <a:pPr/>
+              <a:t>27</a:t>
             </a:fld>
             <a:endParaRPr lang="pt-PT"/>
           </a:p>
@@ -7853,104 +7954,6 @@
 </p:sld>
 </file>
 
-<file path=ppt/slides/slide27.xml><?xml version="1.0" encoding="utf-8"?>
-<p:sld xmlns:a="http://schemas.openxmlformats.org/drawingml/2006/main" xmlns:r="http://schemas.openxmlformats.org/officeDocument/2006/relationships" xmlns:p="http://schemas.openxmlformats.org/presentationml/2006/main">
-  <p:cSld>
-    <p:spTree>
-      <p:nvGrpSpPr>
-        <p:cNvPr id="1" name=""/>
-        <p:cNvGrpSpPr/>
-        <p:nvPr/>
-      </p:nvGrpSpPr>
-      <p:grpSpPr>
-        <a:xfrm>
-          <a:off x="0" y="0"/>
-          <a:ext cx="0" cy="0"/>
-          <a:chOff x="0" y="0"/>
-          <a:chExt cx="0" cy="0"/>
-        </a:xfrm>
-      </p:grpSpPr>
-      <p:sp>
-        <p:nvSpPr>
-          <p:cNvPr id="6" name="Title 5"/>
-          <p:cNvSpPr>
-            <a:spLocks noGrp="1"/>
-          </p:cNvSpPr>
-          <p:nvPr>
-            <p:ph type="title"/>
-          </p:nvPr>
-        </p:nvSpPr>
-        <p:spPr/>
-        <p:txBody>
-          <a:bodyPr>
-            <a:normAutofit/>
-          </a:bodyPr>
-          <a:lstStyle/>
-          <a:p>
-            <a:r>
-              <a:rPr lang="en-GB" dirty="0"/>
-              <a:t>applicationContext.xml</a:t>
-            </a:r>
-            <a:endParaRPr lang="en-US" dirty="0"/>
-          </a:p>
-        </p:txBody>
-      </p:sp>
-      <p:sp>
-        <p:nvSpPr>
-          <p:cNvPr id="7" name="Content Placeholder 6"/>
-          <p:cNvSpPr>
-            <a:spLocks noGrp="1"/>
-          </p:cNvSpPr>
-          <p:nvPr>
-            <p:ph idx="1"/>
-          </p:nvPr>
-        </p:nvSpPr>
-        <p:spPr/>
-        <p:txBody>
-          <a:bodyPr/>
-          <a:lstStyle/>
-          <a:p>
-            <a:endParaRPr lang="en-US"/>
-          </a:p>
-        </p:txBody>
-      </p:sp>
-      <p:sp>
-        <p:nvSpPr>
-          <p:cNvPr id="5" name="Slide Number Placeholder 4"/>
-          <p:cNvSpPr>
-            <a:spLocks noGrp="1"/>
-          </p:cNvSpPr>
-          <p:nvPr>
-            <p:ph type="sldNum" sz="quarter" idx="12"/>
-          </p:nvPr>
-        </p:nvSpPr>
-        <p:spPr/>
-        <p:txBody>
-          <a:bodyPr/>
-          <a:lstStyle/>
-          <a:p>
-            <a:fld id="{024A9932-4E76-455F-8E1A-2CC10C89B014}" type="slidenum">
-              <a:rPr lang="pt-PT" smtClean="0"/>
-              <a:pPr/>
-              <a:t>27</a:t>
-            </a:fld>
-            <a:endParaRPr lang="pt-PT"/>
-          </a:p>
-        </p:txBody>
-      </p:sp>
-    </p:spTree>
-    <p:extLst>
-      <p:ext uri="{BB962C8B-B14F-4D97-AF65-F5344CB8AC3E}">
-        <p14:creationId xmlns:p14="http://schemas.microsoft.com/office/powerpoint/2010/main" val="1017614504"/>
-      </p:ext>
-    </p:extLst>
-  </p:cSld>
-  <p:clrMapOvr>
-    <a:masterClrMapping/>
-  </p:clrMapOvr>
-</p:sld>
-</file>
-
 <file path=ppt/slides/slide28.xml><?xml version="1.0" encoding="utf-8"?>
 <p:sld xmlns:a="http://schemas.openxmlformats.org/drawingml/2006/main" xmlns:r="http://schemas.openxmlformats.org/officeDocument/2006/relationships" xmlns:p="http://schemas.openxmlformats.org/presentationml/2006/main">
   <p:cSld>
@@ -7981,13 +7984,13 @@
         <p:spPr/>
         <p:txBody>
           <a:bodyPr>
-            <a:normAutofit fontScale="90000"/>
+            <a:normAutofit/>
           </a:bodyPr>
           <a:lstStyle/>
           <a:p>
             <a:r>
               <a:rPr lang="en-GB" dirty="0"/>
-              <a:t>applicationContext-persistence.xml</a:t>
+              <a:t>applicationContext.xml</a:t>
             </a:r>
             <a:endParaRPr lang="en-US" dirty="0"/>
           </a:p>
@@ -8039,7 +8042,7 @@
     </p:spTree>
     <p:extLst>
       <p:ext uri="{BB962C8B-B14F-4D97-AF65-F5344CB8AC3E}">
-        <p14:creationId xmlns:p14="http://schemas.microsoft.com/office/powerpoint/2010/main" val="1907279577"/>
+        <p14:creationId xmlns:p14="http://schemas.microsoft.com/office/powerpoint/2010/main" val="1017614504"/>
       </p:ext>
     </p:extLst>
   </p:cSld>
@@ -8068,7 +8071,7 @@
       </p:grpSpPr>
       <p:sp>
         <p:nvSpPr>
-          <p:cNvPr id="2" name="Title 1"/>
+          <p:cNvPr id="6" name="Title 5"/>
           <p:cNvSpPr>
             <a:spLocks noGrp="1"/>
           </p:cNvSpPr>
@@ -8078,12 +8081,14 @@
         </p:nvSpPr>
         <p:spPr/>
         <p:txBody>
-          <a:bodyPr/>
-          <a:lstStyle/>
-          <a:p>
-            <a:r>
-              <a:rPr lang="en-GB" dirty="0"/>
-              <a:t>Transaction control</a:t>
+          <a:bodyPr>
+            <a:normAutofit fontScale="90000"/>
+          </a:bodyPr>
+          <a:lstStyle/>
+          <a:p>
+            <a:r>
+              <a:rPr lang="en-GB" dirty="0"/>
+              <a:t>applicationContext-persistence.xml</a:t>
             </a:r>
             <a:endParaRPr lang="en-US" dirty="0"/>
           </a:p>
@@ -8091,7 +8096,7 @@
       </p:sp>
       <p:sp>
         <p:nvSpPr>
-          <p:cNvPr id="3" name="Content Placeholder 2"/>
+          <p:cNvPr id="7" name="Content Placeholder 6"/>
           <p:cNvSpPr>
             <a:spLocks noGrp="1"/>
           </p:cNvSpPr>
@@ -8104,26 +8109,13 @@
           <a:bodyPr/>
           <a:lstStyle/>
           <a:p>
-            <a:r>
-              <a:rPr lang="en-GB" dirty="0"/>
-              <a:t>Preferably use a container and managed transaction context, e.g., spring</a:t>
-            </a:r>
-          </a:p>
-          <a:p>
-            <a:endParaRPr lang="en-GB" dirty="0"/>
-          </a:p>
-          <a:p>
-            <a:r>
-              <a:rPr lang="en-GB" dirty="0"/>
-              <a:t>Optionally control the transaction yourself</a:t>
-            </a:r>
-            <a:endParaRPr lang="en-US" dirty="0"/>
-          </a:p>
-        </p:txBody>
-      </p:sp>
-      <p:sp>
-        <p:nvSpPr>
-          <p:cNvPr id="4" name="Slide Number Placeholder 3"/>
+            <a:endParaRPr lang="en-US"/>
+          </a:p>
+        </p:txBody>
+      </p:sp>
+      <p:sp>
+        <p:nvSpPr>
+          <p:cNvPr id="5" name="Slide Number Placeholder 4"/>
           <p:cNvSpPr>
             <a:spLocks noGrp="1"/>
           </p:cNvSpPr>
@@ -8148,7 +8140,7 @@
     </p:spTree>
     <p:extLst>
       <p:ext uri="{BB962C8B-B14F-4D97-AF65-F5344CB8AC3E}">
-        <p14:creationId xmlns:p14="http://schemas.microsoft.com/office/powerpoint/2010/main" val="3792329237"/>
+        <p14:creationId xmlns:p14="http://schemas.microsoft.com/office/powerpoint/2010/main" val="1907279577"/>
       </p:ext>
     </p:extLst>
   </p:cSld>
@@ -8344,9 +8336,9 @@
           <a:p>
             <a:r>
               <a:rPr lang="en-GB" dirty="0"/>
-              <a:t>Transaction control #1</a:t>
-            </a:r>
-            <a:endParaRPr lang="pt-PT" dirty="0"/>
+              <a:t>Transaction control</a:t>
+            </a:r>
+            <a:endParaRPr lang="en-US" dirty="0"/>
           </a:p>
         </p:txBody>
       </p:sp>
@@ -8366,31 +8358,19 @@
           <a:lstStyle/>
           <a:p>
             <a:r>
-              <a:rPr lang="pt-PT" b="1" dirty="0"/>
-              <a:t>Managed repositories</a:t>
-            </a:r>
-            <a:r>
-              <a:rPr lang="pt-PT" dirty="0"/>
-              <a:t>, e.g., Spring Framework</a:t>
-            </a:r>
-          </a:p>
-          <a:p>
-            <a:pPr lvl="1"/>
-            <a:r>
-              <a:rPr lang="pt-PT" dirty="0"/>
-              <a:t>Spring will load the repositories</a:t>
-            </a:r>
-          </a:p>
-          <a:p>
-            <a:pPr lvl="1"/>
-            <a:r>
-              <a:rPr lang="pt-PT" dirty="0"/>
-              <a:t>Spring will control the transactional context</a:t>
-            </a:r>
-          </a:p>
-          <a:p>
-            <a:pPr lvl="1"/>
-            <a:endParaRPr lang="pt-PT" dirty="0"/>
+              <a:rPr lang="en-GB" dirty="0"/>
+              <a:t>Preferably use a container and managed transaction context, e.g., spring</a:t>
+            </a:r>
+          </a:p>
+          <a:p>
+            <a:endParaRPr lang="en-GB" dirty="0"/>
+          </a:p>
+          <a:p>
+            <a:r>
+              <a:rPr lang="en-GB" dirty="0"/>
+              <a:t>Optionally control the transaction yourself</a:t>
+            </a:r>
+            <a:endParaRPr lang="en-US" dirty="0"/>
           </a:p>
         </p:txBody>
       </p:sp>
@@ -8421,16 +8401,13 @@
     </p:spTree>
     <p:extLst>
       <p:ext uri="{BB962C8B-B14F-4D97-AF65-F5344CB8AC3E}">
-        <p14:creationId xmlns:p14="http://schemas.microsoft.com/office/powerpoint/2010/main" val="2754409186"/>
+        <p14:creationId xmlns:p14="http://schemas.microsoft.com/office/powerpoint/2010/main" val="3792329237"/>
       </p:ext>
     </p:extLst>
   </p:cSld>
   <p:clrMapOvr>
     <a:masterClrMapping/>
   </p:clrMapOvr>
-  <p:transition spd="med">
-    <p:fade/>
-  </p:transition>
 </p:sld>
 </file>
 
@@ -8463,15 +8440,58 @@
         </p:nvSpPr>
         <p:spPr/>
         <p:txBody>
-          <a:bodyPr>
-            <a:noAutofit/>
-          </a:bodyPr>
-          <a:lstStyle/>
-          <a:p>
-            <a:r>
-              <a:rPr lang="pt-PT" sz="2800" dirty="0"/>
-              <a:t>All JPA repositories extend JpaBaseRepository to use spring transactional control</a:t>
-            </a:r>
+          <a:bodyPr/>
+          <a:lstStyle/>
+          <a:p>
+            <a:r>
+              <a:rPr lang="en-GB" dirty="0"/>
+              <a:t>Transaction control #1</a:t>
+            </a:r>
+            <a:endParaRPr lang="pt-PT" dirty="0"/>
+          </a:p>
+        </p:txBody>
+      </p:sp>
+      <p:sp>
+        <p:nvSpPr>
+          <p:cNvPr id="3" name="Content Placeholder 2"/>
+          <p:cNvSpPr>
+            <a:spLocks noGrp="1"/>
+          </p:cNvSpPr>
+          <p:nvPr>
+            <p:ph idx="1"/>
+          </p:nvPr>
+        </p:nvSpPr>
+        <p:spPr/>
+        <p:txBody>
+          <a:bodyPr/>
+          <a:lstStyle/>
+          <a:p>
+            <a:r>
+              <a:rPr lang="pt-PT" b="1" dirty="0"/>
+              <a:t>Managed repositories</a:t>
+            </a:r>
+            <a:r>
+              <a:rPr lang="pt-PT" dirty="0"/>
+              <a:t>, e.g., Spring Framework</a:t>
+            </a:r>
+          </a:p>
+          <a:p>
+            <a:pPr lvl="1"/>
+            <a:r>
+              <a:rPr lang="pt-PT" dirty="0"/>
+              <a:t>Spring will load the repositories</a:t>
+            </a:r>
+          </a:p>
+          <a:p>
+            <a:pPr lvl="1"/>
+            <a:r>
+              <a:rPr lang="pt-PT" dirty="0"/>
+              <a:t>Spring will control the transactional context</a:t>
+            </a:r>
+          </a:p>
+          <a:p>
+            <a:pPr lvl="1"/>
+            <a:endParaRPr lang="pt-PT" dirty="0"/>
           </a:p>
         </p:txBody>
       </p:sp>
@@ -8494,6 +8514,87 @@
               <a:rPr lang="pt-PT" smtClean="0"/>
               <a:pPr/>
               <a:t>31</a:t>
+            </a:fld>
+            <a:endParaRPr lang="pt-PT"/>
+          </a:p>
+        </p:txBody>
+      </p:sp>
+    </p:spTree>
+    <p:extLst>
+      <p:ext uri="{BB962C8B-B14F-4D97-AF65-F5344CB8AC3E}">
+        <p14:creationId xmlns:p14="http://schemas.microsoft.com/office/powerpoint/2010/main" val="2754409186"/>
+      </p:ext>
+    </p:extLst>
+  </p:cSld>
+  <p:clrMapOvr>
+    <a:masterClrMapping/>
+  </p:clrMapOvr>
+  <p:transition spd="med">
+    <p:fade/>
+  </p:transition>
+</p:sld>
+</file>
+
+<file path=ppt/slides/slide32.xml><?xml version="1.0" encoding="utf-8"?>
+<p:sld xmlns:a="http://schemas.openxmlformats.org/drawingml/2006/main" xmlns:r="http://schemas.openxmlformats.org/officeDocument/2006/relationships" xmlns:p="http://schemas.openxmlformats.org/presentationml/2006/main">
+  <p:cSld>
+    <p:spTree>
+      <p:nvGrpSpPr>
+        <p:cNvPr id="1" name=""/>
+        <p:cNvGrpSpPr/>
+        <p:nvPr/>
+      </p:nvGrpSpPr>
+      <p:grpSpPr>
+        <a:xfrm>
+          <a:off x="0" y="0"/>
+          <a:ext cx="0" cy="0"/>
+          <a:chOff x="0" y="0"/>
+          <a:chExt cx="0" cy="0"/>
+        </a:xfrm>
+      </p:grpSpPr>
+      <p:sp>
+        <p:nvSpPr>
+          <p:cNvPr id="2" name="Title 1"/>
+          <p:cNvSpPr>
+            <a:spLocks noGrp="1"/>
+          </p:cNvSpPr>
+          <p:nvPr>
+            <p:ph type="title"/>
+          </p:nvPr>
+        </p:nvSpPr>
+        <p:spPr/>
+        <p:txBody>
+          <a:bodyPr>
+            <a:noAutofit/>
+          </a:bodyPr>
+          <a:lstStyle/>
+          <a:p>
+            <a:r>
+              <a:rPr lang="pt-PT" sz="2800" dirty="0"/>
+              <a:t>All JPA repositories extend JpaBaseRepository to use spring transactional control</a:t>
+            </a:r>
+          </a:p>
+        </p:txBody>
+      </p:sp>
+      <p:sp>
+        <p:nvSpPr>
+          <p:cNvPr id="4" name="Slide Number Placeholder 3"/>
+          <p:cNvSpPr>
+            <a:spLocks noGrp="1"/>
+          </p:cNvSpPr>
+          <p:nvPr>
+            <p:ph type="sldNum" sz="quarter" idx="12"/>
+          </p:nvPr>
+        </p:nvSpPr>
+        <p:spPr/>
+        <p:txBody>
+          <a:bodyPr/>
+          <a:lstStyle/>
+          <a:p>
+            <a:fld id="{024A9932-4E76-455F-8E1A-2CC10C89B014}" type="slidenum">
+              <a:rPr lang="pt-PT" smtClean="0"/>
+              <a:pPr/>
+              <a:t>32</a:t>
             </a:fld>
             <a:endParaRPr lang="pt-PT"/>
           </a:p>
@@ -8663,7 +8764,7 @@
 </p:sld>
 </file>
 
-<file path=ppt/slides/slide32.xml><?xml version="1.0" encoding="utf-8"?>
+<file path=ppt/slides/slide33.xml><?xml version="1.0" encoding="utf-8"?>
 <p:sld xmlns:a="http://schemas.openxmlformats.org/drawingml/2006/main" xmlns:r="http://schemas.openxmlformats.org/officeDocument/2006/relationships" xmlns:p="http://schemas.openxmlformats.org/presentationml/2006/main">
   <p:cSld>
     <p:spTree>
@@ -8721,7 +8822,7 @@
             <a:fld id="{024A9932-4E76-455F-8E1A-2CC10C89B014}" type="slidenum">
               <a:rPr lang="pt-PT" smtClean="0"/>
               <a:pPr/>
-              <a:t>32</a:t>
+              <a:t>33</a:t>
             </a:fld>
             <a:endParaRPr lang="pt-PT"/>
           </a:p>
@@ -8848,7 +8949,7 @@
 </p:sld>
 </file>
 
-<file path=ppt/slides/slide33.xml><?xml version="1.0" encoding="utf-8"?>
+<file path=ppt/slides/slide34.xml><?xml version="1.0" encoding="utf-8"?>
 <p:sld xmlns:a="http://schemas.openxmlformats.org/drawingml/2006/main" xmlns:r="http://schemas.openxmlformats.org/officeDocument/2006/relationships" xmlns:p="http://schemas.openxmlformats.org/presentationml/2006/main">
   <p:cSld>
     <p:spTree>
@@ -8910,7 +9011,7 @@
             <a:fld id="{024A9932-4E76-455F-8E1A-2CC10C89B014}" type="slidenum">
               <a:rPr lang="pt-PT" smtClean="0"/>
               <a:pPr/>
-              <a:t>33</a:t>
+              <a:t>34</a:t>
             </a:fld>
             <a:endParaRPr lang="pt-PT"/>
           </a:p>
@@ -9037,7 +9138,7 @@
 </p:sld>
 </file>
 
-<file path=ppt/slides/slide34.xml><?xml version="1.0" encoding="utf-8"?>
+<file path=ppt/slides/slide35.xml><?xml version="1.0" encoding="utf-8"?>
 <p:sld xmlns:a="http://schemas.openxmlformats.org/drawingml/2006/main" xmlns:r="http://schemas.openxmlformats.org/officeDocument/2006/relationships" xmlns:p="http://schemas.openxmlformats.org/presentationml/2006/main">
   <p:cSld>
     <p:spTree>
@@ -9099,7 +9200,7 @@
             <a:fld id="{024A9932-4E76-455F-8E1A-2CC10C89B014}" type="slidenum">
               <a:rPr lang="pt-PT" smtClean="0"/>
               <a:pPr/>
-              <a:t>34</a:t>
+              <a:t>35</a:t>
             </a:fld>
             <a:endParaRPr lang="pt-PT"/>
           </a:p>
@@ -9192,110 +9293,6 @@
 </p:sld>
 </file>
 
-<file path=ppt/slides/slide35.xml><?xml version="1.0" encoding="utf-8"?>
-<p:sld xmlns:a="http://schemas.openxmlformats.org/drawingml/2006/main" xmlns:r="http://schemas.openxmlformats.org/officeDocument/2006/relationships" xmlns:p="http://schemas.openxmlformats.org/presentationml/2006/main">
-  <p:cSld>
-    <p:spTree>
-      <p:nvGrpSpPr>
-        <p:cNvPr id="1" name=""/>
-        <p:cNvGrpSpPr/>
-        <p:nvPr/>
-      </p:nvGrpSpPr>
-      <p:grpSpPr>
-        <a:xfrm>
-          <a:off x="0" y="0"/>
-          <a:ext cx="0" cy="0"/>
-          <a:chOff x="0" y="0"/>
-          <a:chExt cx="0" cy="0"/>
-        </a:xfrm>
-      </p:grpSpPr>
-      <p:sp>
-        <p:nvSpPr>
-          <p:cNvPr id="2" name="Title 1"/>
-          <p:cNvSpPr>
-            <a:spLocks noGrp="1"/>
-          </p:cNvSpPr>
-          <p:nvPr>
-            <p:ph type="title"/>
-          </p:nvPr>
-        </p:nvSpPr>
-        <p:spPr/>
-        <p:txBody>
-          <a:bodyPr/>
-          <a:lstStyle/>
-          <a:p>
-            <a:r>
-              <a:rPr lang="en-GB" dirty="0"/>
-              <a:t>Transaction control #2</a:t>
-            </a:r>
-            <a:endParaRPr lang="en-US" dirty="0"/>
-          </a:p>
-        </p:txBody>
-      </p:sp>
-      <p:sp>
-        <p:nvSpPr>
-          <p:cNvPr id="3" name="Content Placeholder 2"/>
-          <p:cNvSpPr>
-            <a:spLocks noGrp="1"/>
-          </p:cNvSpPr>
-          <p:nvPr>
-            <p:ph idx="1"/>
-          </p:nvPr>
-        </p:nvSpPr>
-        <p:spPr/>
-        <p:txBody>
-          <a:bodyPr/>
-          <a:lstStyle/>
-          <a:p>
-            <a:r>
-              <a:rPr lang="en-GB" b="1" dirty="0"/>
-              <a:t>Control the transaction yourself </a:t>
-            </a:r>
-            <a:r>
-              <a:rPr lang="en-GB" dirty="0"/>
-              <a:t> using helper classes in the persistence package</a:t>
-            </a:r>
-            <a:endParaRPr lang="en-US" b="1" dirty="0"/>
-          </a:p>
-        </p:txBody>
-      </p:sp>
-      <p:sp>
-        <p:nvSpPr>
-          <p:cNvPr id="4" name="Slide Number Placeholder 3"/>
-          <p:cNvSpPr>
-            <a:spLocks noGrp="1"/>
-          </p:cNvSpPr>
-          <p:nvPr>
-            <p:ph type="sldNum" sz="quarter" idx="12"/>
-          </p:nvPr>
-        </p:nvSpPr>
-        <p:spPr/>
-        <p:txBody>
-          <a:bodyPr/>
-          <a:lstStyle/>
-          <a:p>
-            <a:fld id="{024A9932-4E76-455F-8E1A-2CC10C89B014}" type="slidenum">
-              <a:rPr lang="pt-PT" smtClean="0"/>
-              <a:pPr/>
-              <a:t>35</a:t>
-            </a:fld>
-            <a:endParaRPr lang="pt-PT"/>
-          </a:p>
-        </p:txBody>
-      </p:sp>
-    </p:spTree>
-    <p:extLst>
-      <p:ext uri="{BB962C8B-B14F-4D97-AF65-F5344CB8AC3E}">
-        <p14:creationId xmlns:p14="http://schemas.microsoft.com/office/powerpoint/2010/main" val="3563145965"/>
-      </p:ext>
-    </p:extLst>
-  </p:cSld>
-  <p:clrMapOvr>
-    <a:masterClrMapping/>
-  </p:clrMapOvr>
-</p:sld>
-</file>
-
 <file path=ppt/slides/slide36.xml><?xml version="1.0" encoding="utf-8"?>
 <p:sld xmlns:a="http://schemas.openxmlformats.org/drawingml/2006/main" xmlns:r="http://schemas.openxmlformats.org/officeDocument/2006/relationships" xmlns:p="http://schemas.openxmlformats.org/presentationml/2006/main">
   <p:cSld>
@@ -9325,16 +9322,41 @@
         </p:nvSpPr>
         <p:spPr/>
         <p:txBody>
-          <a:bodyPr>
-            <a:normAutofit fontScale="90000"/>
-          </a:bodyPr>
-          <a:lstStyle/>
-          <a:p>
-            <a:r>
-              <a:rPr lang="en-GB" dirty="0"/>
-              <a:t>Full transaction control by the repository</a:t>
-            </a:r>
-            <a:endParaRPr lang="pt-PT" dirty="0"/>
+          <a:bodyPr/>
+          <a:lstStyle/>
+          <a:p>
+            <a:r>
+              <a:rPr lang="en-GB" dirty="0"/>
+              <a:t>Transaction control #2</a:t>
+            </a:r>
+            <a:endParaRPr lang="en-US" dirty="0"/>
+          </a:p>
+        </p:txBody>
+      </p:sp>
+      <p:sp>
+        <p:nvSpPr>
+          <p:cNvPr id="3" name="Content Placeholder 2"/>
+          <p:cNvSpPr>
+            <a:spLocks noGrp="1"/>
+          </p:cNvSpPr>
+          <p:nvPr>
+            <p:ph idx="1"/>
+          </p:nvPr>
+        </p:nvSpPr>
+        <p:spPr/>
+        <p:txBody>
+          <a:bodyPr/>
+          <a:lstStyle/>
+          <a:p>
+            <a:r>
+              <a:rPr lang="en-GB" b="1" dirty="0"/>
+              <a:t>Control the transaction yourself </a:t>
+            </a:r>
+            <a:r>
+              <a:rPr lang="en-GB" dirty="0"/>
+              <a:t> using helper classes in the persistence package</a:t>
+            </a:r>
+            <a:endParaRPr lang="en-US" b="1" dirty="0"/>
           </a:p>
         </p:txBody>
       </p:sp>
@@ -9357,6 +9379,85 @@
               <a:rPr lang="pt-PT" smtClean="0"/>
               <a:pPr/>
               <a:t>36</a:t>
+            </a:fld>
+            <a:endParaRPr lang="pt-PT"/>
+          </a:p>
+        </p:txBody>
+      </p:sp>
+    </p:spTree>
+    <p:extLst>
+      <p:ext uri="{BB962C8B-B14F-4D97-AF65-F5344CB8AC3E}">
+        <p14:creationId xmlns:p14="http://schemas.microsoft.com/office/powerpoint/2010/main" val="3563145965"/>
+      </p:ext>
+    </p:extLst>
+  </p:cSld>
+  <p:clrMapOvr>
+    <a:masterClrMapping/>
+  </p:clrMapOvr>
+</p:sld>
+</file>
+
+<file path=ppt/slides/slide37.xml><?xml version="1.0" encoding="utf-8"?>
+<p:sld xmlns:a="http://schemas.openxmlformats.org/drawingml/2006/main" xmlns:r="http://schemas.openxmlformats.org/officeDocument/2006/relationships" xmlns:p="http://schemas.openxmlformats.org/presentationml/2006/main">
+  <p:cSld>
+    <p:spTree>
+      <p:nvGrpSpPr>
+        <p:cNvPr id="1" name=""/>
+        <p:cNvGrpSpPr/>
+        <p:nvPr/>
+      </p:nvGrpSpPr>
+      <p:grpSpPr>
+        <a:xfrm>
+          <a:off x="0" y="0"/>
+          <a:ext cx="0" cy="0"/>
+          <a:chOff x="0" y="0"/>
+          <a:chExt cx="0" cy="0"/>
+        </a:xfrm>
+      </p:grpSpPr>
+      <p:sp>
+        <p:nvSpPr>
+          <p:cNvPr id="2" name="Title 1"/>
+          <p:cNvSpPr>
+            <a:spLocks noGrp="1"/>
+          </p:cNvSpPr>
+          <p:nvPr>
+            <p:ph type="title"/>
+          </p:nvPr>
+        </p:nvSpPr>
+        <p:spPr/>
+        <p:txBody>
+          <a:bodyPr>
+            <a:normAutofit fontScale="90000"/>
+          </a:bodyPr>
+          <a:lstStyle/>
+          <a:p>
+            <a:r>
+              <a:rPr lang="en-GB" dirty="0"/>
+              <a:t>Full transaction control by the repository</a:t>
+            </a:r>
+            <a:endParaRPr lang="pt-PT" dirty="0"/>
+          </a:p>
+        </p:txBody>
+      </p:sp>
+      <p:sp>
+        <p:nvSpPr>
+          <p:cNvPr id="4" name="Slide Number Placeholder 3"/>
+          <p:cNvSpPr>
+            <a:spLocks noGrp="1"/>
+          </p:cNvSpPr>
+          <p:nvPr>
+            <p:ph type="sldNum" sz="quarter" idx="12"/>
+          </p:nvPr>
+        </p:nvSpPr>
+        <p:spPr/>
+        <p:txBody>
+          <a:bodyPr/>
+          <a:lstStyle/>
+          <a:p>
+            <a:fld id="{024A9932-4E76-455F-8E1A-2CC10C89B014}" type="slidenum">
+              <a:rPr lang="pt-PT" smtClean="0"/>
+              <a:pPr/>
+              <a:t>37</a:t>
             </a:fld>
             <a:endParaRPr lang="pt-PT"/>
           </a:p>
@@ -9443,134 +9544,6 @@
 </p:sld>
 </file>
 
-<file path=ppt/slides/slide37.xml><?xml version="1.0" encoding="utf-8"?>
-<p:sld xmlns:a="http://schemas.openxmlformats.org/drawingml/2006/main" xmlns:r="http://schemas.openxmlformats.org/officeDocument/2006/relationships" xmlns:p="http://schemas.openxmlformats.org/presentationml/2006/main">
-  <p:cSld>
-    <p:spTree>
-      <p:nvGrpSpPr>
-        <p:cNvPr id="1" name=""/>
-        <p:cNvGrpSpPr/>
-        <p:nvPr/>
-      </p:nvGrpSpPr>
-      <p:grpSpPr>
-        <a:xfrm>
-          <a:off x="0" y="0"/>
-          <a:ext cx="0" cy="0"/>
-          <a:chOff x="0" y="0"/>
-          <a:chExt cx="0" cy="0"/>
-        </a:xfrm>
-      </p:grpSpPr>
-      <p:sp>
-        <p:nvSpPr>
-          <p:cNvPr id="2" name="Title 1"/>
-          <p:cNvSpPr>
-            <a:spLocks noGrp="1"/>
-          </p:cNvSpPr>
-          <p:nvPr>
-            <p:ph type="title"/>
-          </p:nvPr>
-        </p:nvSpPr>
-        <p:spPr/>
-        <p:txBody>
-          <a:bodyPr>
-            <a:normAutofit fontScale="90000"/>
-          </a:bodyPr>
-          <a:lstStyle/>
-          <a:p>
-            <a:r>
-              <a:rPr lang="en-GB" dirty="0"/>
-              <a:t>Transaction control outside of the repository (1)</a:t>
-            </a:r>
-            <a:endParaRPr lang="pt-PT" dirty="0"/>
-          </a:p>
-        </p:txBody>
-      </p:sp>
-      <p:sp>
-        <p:nvSpPr>
-          <p:cNvPr id="3" name="Content Placeholder 2"/>
-          <p:cNvSpPr>
-            <a:spLocks noGrp="1"/>
-          </p:cNvSpPr>
-          <p:nvPr>
-            <p:ph idx="1"/>
-          </p:nvPr>
-        </p:nvSpPr>
-        <p:spPr/>
-        <p:txBody>
-          <a:bodyPr/>
-          <a:lstStyle/>
-          <a:p>
-            <a:r>
-              <a:rPr lang="pt-PT" dirty="0"/>
-              <a:t>Accepting a signup request needs to</a:t>
-            </a:r>
-          </a:p>
-          <a:p>
-            <a:pPr lvl="1"/>
-            <a:r>
-              <a:rPr lang="pt-PT" dirty="0"/>
-              <a:t>Create a system user</a:t>
-            </a:r>
-          </a:p>
-          <a:p>
-            <a:pPr lvl="1"/>
-            <a:r>
-              <a:rPr lang="pt-PT" dirty="0"/>
-              <a:t>Create a cafeteria user</a:t>
-            </a:r>
-          </a:p>
-          <a:p>
-            <a:pPr lvl="1"/>
-            <a:r>
-              <a:rPr lang="pt-PT" dirty="0"/>
-              <a:t>Change the status of the signup request</a:t>
-            </a:r>
-          </a:p>
-          <a:p>
-            <a:r>
-              <a:rPr lang="pt-PT" dirty="0"/>
-              <a:t>Three different aggregates!</a:t>
-            </a:r>
-          </a:p>
-        </p:txBody>
-      </p:sp>
-      <p:sp>
-        <p:nvSpPr>
-          <p:cNvPr id="4" name="Slide Number Placeholder 3"/>
-          <p:cNvSpPr>
-            <a:spLocks noGrp="1"/>
-          </p:cNvSpPr>
-          <p:nvPr>
-            <p:ph type="sldNum" sz="quarter" idx="12"/>
-          </p:nvPr>
-        </p:nvSpPr>
-        <p:spPr/>
-        <p:txBody>
-          <a:bodyPr/>
-          <a:lstStyle/>
-          <a:p>
-            <a:fld id="{024A9932-4E76-455F-8E1A-2CC10C89B014}" type="slidenum">
-              <a:rPr lang="pt-PT" smtClean="0"/>
-              <a:pPr/>
-              <a:t>37</a:t>
-            </a:fld>
-            <a:endParaRPr lang="pt-PT"/>
-          </a:p>
-        </p:txBody>
-      </p:sp>
-    </p:spTree>
-    <p:extLst>
-      <p:ext uri="{BB962C8B-B14F-4D97-AF65-F5344CB8AC3E}">
-        <p14:creationId xmlns:p14="http://schemas.microsoft.com/office/powerpoint/2010/main" val="348772272"/>
-      </p:ext>
-    </p:extLst>
-  </p:cSld>
-  <p:clrMapOvr>
-    <a:masterClrMapping/>
-  </p:clrMapOvr>
-</p:sld>
-</file>
-
 <file path=ppt/slides/slide38.xml><?xml version="1.0" encoding="utf-8"?>
 <p:sld xmlns:a="http://schemas.openxmlformats.org/drawingml/2006/main" xmlns:r="http://schemas.openxmlformats.org/officeDocument/2006/relationships" xmlns:p="http://schemas.openxmlformats.org/presentationml/2006/main">
   <p:cSld>
@@ -9607,13 +9580,58 @@
           <a:p>
             <a:r>
               <a:rPr lang="en-GB" dirty="0"/>
-              <a:t>Transaction control (2): use </a:t>
-            </a:r>
-            <a:r>
-              <a:rPr lang="en-GB" dirty="0" err="1"/>
-              <a:t>JpaAutoTxRepository</a:t>
+              <a:t>Transaction control outside of the repository (1)</a:t>
             </a:r>
             <a:endParaRPr lang="pt-PT" dirty="0"/>
+          </a:p>
+        </p:txBody>
+      </p:sp>
+      <p:sp>
+        <p:nvSpPr>
+          <p:cNvPr id="3" name="Content Placeholder 2"/>
+          <p:cNvSpPr>
+            <a:spLocks noGrp="1"/>
+          </p:cNvSpPr>
+          <p:nvPr>
+            <p:ph idx="1"/>
+          </p:nvPr>
+        </p:nvSpPr>
+        <p:spPr/>
+        <p:txBody>
+          <a:bodyPr/>
+          <a:lstStyle/>
+          <a:p>
+            <a:r>
+              <a:rPr lang="pt-PT" dirty="0"/>
+              <a:t>Accepting a signup request needs to</a:t>
+            </a:r>
+          </a:p>
+          <a:p>
+            <a:pPr lvl="1"/>
+            <a:r>
+              <a:rPr lang="pt-PT" dirty="0"/>
+              <a:t>Create a system user</a:t>
+            </a:r>
+          </a:p>
+          <a:p>
+            <a:pPr lvl="1"/>
+            <a:r>
+              <a:rPr lang="pt-PT" dirty="0"/>
+              <a:t>Create a cafeteria user</a:t>
+            </a:r>
+          </a:p>
+          <a:p>
+            <a:pPr lvl="1"/>
+            <a:r>
+              <a:rPr lang="pt-PT" dirty="0"/>
+              <a:t>Change the status of the signup request</a:t>
+            </a:r>
+          </a:p>
+          <a:p>
+            <a:r>
+              <a:rPr lang="pt-PT" dirty="0"/>
+              <a:t>Three different aggregates!</a:t>
+            </a:r>
           </a:p>
         </p:txBody>
       </p:sp>
@@ -9636,6 +9654,89 @@
               <a:rPr lang="pt-PT" smtClean="0"/>
               <a:pPr/>
               <a:t>38</a:t>
+            </a:fld>
+            <a:endParaRPr lang="pt-PT"/>
+          </a:p>
+        </p:txBody>
+      </p:sp>
+    </p:spTree>
+    <p:extLst>
+      <p:ext uri="{BB962C8B-B14F-4D97-AF65-F5344CB8AC3E}">
+        <p14:creationId xmlns:p14="http://schemas.microsoft.com/office/powerpoint/2010/main" val="348772272"/>
+      </p:ext>
+    </p:extLst>
+  </p:cSld>
+  <p:clrMapOvr>
+    <a:masterClrMapping/>
+  </p:clrMapOvr>
+</p:sld>
+</file>
+
+<file path=ppt/slides/slide39.xml><?xml version="1.0" encoding="utf-8"?>
+<p:sld xmlns:a="http://schemas.openxmlformats.org/drawingml/2006/main" xmlns:r="http://schemas.openxmlformats.org/officeDocument/2006/relationships" xmlns:p="http://schemas.openxmlformats.org/presentationml/2006/main">
+  <p:cSld>
+    <p:spTree>
+      <p:nvGrpSpPr>
+        <p:cNvPr id="1" name=""/>
+        <p:cNvGrpSpPr/>
+        <p:nvPr/>
+      </p:nvGrpSpPr>
+      <p:grpSpPr>
+        <a:xfrm>
+          <a:off x="0" y="0"/>
+          <a:ext cx="0" cy="0"/>
+          <a:chOff x="0" y="0"/>
+          <a:chExt cx="0" cy="0"/>
+        </a:xfrm>
+      </p:grpSpPr>
+      <p:sp>
+        <p:nvSpPr>
+          <p:cNvPr id="2" name="Title 1"/>
+          <p:cNvSpPr>
+            <a:spLocks noGrp="1"/>
+          </p:cNvSpPr>
+          <p:nvPr>
+            <p:ph type="title"/>
+          </p:nvPr>
+        </p:nvSpPr>
+        <p:spPr/>
+        <p:txBody>
+          <a:bodyPr>
+            <a:normAutofit fontScale="90000"/>
+          </a:bodyPr>
+          <a:lstStyle/>
+          <a:p>
+            <a:r>
+              <a:rPr lang="en-GB" dirty="0"/>
+              <a:t>Transaction control (2): use </a:t>
+            </a:r>
+            <a:r>
+              <a:rPr lang="en-GB" dirty="0" err="1"/>
+              <a:t>JpaAutoTxRepository</a:t>
+            </a:r>
+            <a:endParaRPr lang="pt-PT" dirty="0"/>
+          </a:p>
+        </p:txBody>
+      </p:sp>
+      <p:sp>
+        <p:nvSpPr>
+          <p:cNvPr id="4" name="Slide Number Placeholder 3"/>
+          <p:cNvSpPr>
+            <a:spLocks noGrp="1"/>
+          </p:cNvSpPr>
+          <p:nvPr>
+            <p:ph type="sldNum" sz="quarter" idx="12"/>
+          </p:nvPr>
+        </p:nvSpPr>
+        <p:spPr/>
+        <p:txBody>
+          <a:bodyPr/>
+          <a:lstStyle/>
+          <a:p>
+            <a:fld id="{024A9932-4E76-455F-8E1A-2CC10C89B014}" type="slidenum">
+              <a:rPr lang="pt-PT" smtClean="0"/>
+              <a:pPr/>
+              <a:t>39</a:t>
             </a:fld>
             <a:endParaRPr lang="pt-PT"/>
           </a:p>
@@ -9756,7 +9857,7 @@
 </p:sld>
 </file>
 
-<file path=ppt/slides/slide39.xml><?xml version="1.0" encoding="utf-8"?>
+<file path=ppt/slides/slide4.xml><?xml version="1.0" encoding="utf-8"?>
 <p:sld xmlns:a="http://schemas.openxmlformats.org/drawingml/2006/main" xmlns:r="http://schemas.openxmlformats.org/officeDocument/2006/relationships" xmlns:p="http://schemas.openxmlformats.org/presentationml/2006/main">
   <p:cSld>
     <p:spTree>
@@ -9785,6 +9886,138 @@
         </p:nvSpPr>
         <p:spPr/>
         <p:txBody>
+          <a:bodyPr/>
+          <a:lstStyle/>
+          <a:p>
+            <a:r>
+              <a:rPr lang="en-GB" dirty="0"/>
+              <a:t>Dependencies</a:t>
+            </a:r>
+            <a:endParaRPr lang="en-US" dirty="0"/>
+          </a:p>
+        </p:txBody>
+      </p:sp>
+      <p:sp>
+        <p:nvSpPr>
+          <p:cNvPr id="3" name="Content Placeholder 2"/>
+          <p:cNvSpPr>
+            <a:spLocks noGrp="1"/>
+          </p:cNvSpPr>
+          <p:nvPr>
+            <p:ph idx="1"/>
+          </p:nvPr>
+        </p:nvSpPr>
+        <p:spPr/>
+        <p:txBody>
+          <a:bodyPr/>
+          <a:lstStyle/>
+          <a:p>
+            <a:r>
+              <a:rPr lang="en-GB" dirty="0"/>
+              <a:t>Java </a:t>
+            </a:r>
+            <a:r>
+              <a:rPr lang="en-GB" dirty="0" smtClean="0"/>
+              <a:t>8</a:t>
+            </a:r>
+            <a:r>
+              <a:rPr lang="en-GB" dirty="0"/>
+              <a:t>+</a:t>
+            </a:r>
+          </a:p>
+          <a:p>
+            <a:r>
+              <a:rPr lang="en-GB" dirty="0"/>
+              <a:t>Apache Commons Logging</a:t>
+            </a:r>
+          </a:p>
+          <a:p>
+            <a:r>
+              <a:rPr lang="en-GB" dirty="0"/>
+              <a:t>JPA</a:t>
+            </a:r>
+          </a:p>
+          <a:p>
+            <a:r>
+              <a:rPr lang="en-GB" dirty="0"/>
+              <a:t>Spring Data JPA</a:t>
+            </a:r>
+          </a:p>
+          <a:p>
+            <a:r>
+              <a:rPr lang="en-GB" dirty="0"/>
+              <a:t>Spring Framework dependency injection</a:t>
+            </a:r>
+            <a:endParaRPr lang="en-US" dirty="0"/>
+          </a:p>
+        </p:txBody>
+      </p:sp>
+      <p:sp>
+        <p:nvSpPr>
+          <p:cNvPr id="4" name="Slide Number Placeholder 3"/>
+          <p:cNvSpPr>
+            <a:spLocks noGrp="1"/>
+          </p:cNvSpPr>
+          <p:nvPr>
+            <p:ph type="sldNum" sz="quarter" idx="12"/>
+          </p:nvPr>
+        </p:nvSpPr>
+        <p:spPr/>
+        <p:txBody>
+          <a:bodyPr/>
+          <a:lstStyle/>
+          <a:p>
+            <a:fld id="{024A9932-4E76-455F-8E1A-2CC10C89B014}" type="slidenum">
+              <a:rPr lang="pt-PT" smtClean="0"/>
+              <a:pPr/>
+              <a:t>4</a:t>
+            </a:fld>
+            <a:endParaRPr lang="pt-PT"/>
+          </a:p>
+        </p:txBody>
+      </p:sp>
+    </p:spTree>
+    <p:extLst>
+      <p:ext uri="{BB962C8B-B14F-4D97-AF65-F5344CB8AC3E}">
+        <p14:creationId xmlns:p14="http://schemas.microsoft.com/office/powerpoint/2010/main" val="2447458527"/>
+      </p:ext>
+    </p:extLst>
+  </p:cSld>
+  <p:clrMapOvr>
+    <a:masterClrMapping/>
+  </p:clrMapOvr>
+</p:sld>
+</file>
+
+<file path=ppt/slides/slide40.xml><?xml version="1.0" encoding="utf-8"?>
+<p:sld xmlns:a="http://schemas.openxmlformats.org/drawingml/2006/main" xmlns:r="http://schemas.openxmlformats.org/officeDocument/2006/relationships" xmlns:p="http://schemas.openxmlformats.org/presentationml/2006/main">
+  <p:cSld>
+    <p:spTree>
+      <p:nvGrpSpPr>
+        <p:cNvPr id="1" name=""/>
+        <p:cNvGrpSpPr/>
+        <p:nvPr/>
+      </p:nvGrpSpPr>
+      <p:grpSpPr>
+        <a:xfrm>
+          <a:off x="0" y="0"/>
+          <a:ext cx="0" cy="0"/>
+          <a:chOff x="0" y="0"/>
+          <a:chExt cx="0" cy="0"/>
+        </a:xfrm>
+      </p:grpSpPr>
+      <p:sp>
+        <p:nvSpPr>
+          <p:cNvPr id="2" name="Title 1"/>
+          <p:cNvSpPr>
+            <a:spLocks noGrp="1"/>
+          </p:cNvSpPr>
+          <p:nvPr>
+            <p:ph type="title"/>
+          </p:nvPr>
+        </p:nvSpPr>
+        <p:spPr/>
+        <p:txBody>
           <a:bodyPr>
             <a:normAutofit fontScale="90000"/>
           </a:bodyPr>
@@ -9816,7 +10049,7 @@
             <a:fld id="{024A9932-4E76-455F-8E1A-2CC10C89B014}" type="slidenum">
               <a:rPr lang="pt-PT" smtClean="0"/>
               <a:pPr/>
-              <a:t>39</a:t>
+              <a:t>40</a:t>
             </a:fld>
             <a:endParaRPr lang="pt-PT"/>
           </a:p>
@@ -9869,7 +10102,7 @@
 </p:sld>
 </file>
 
-<file path=ppt/slides/slide4.xml><?xml version="1.0" encoding="utf-8"?>
+<file path=ppt/slides/slide41.xml><?xml version="1.0" encoding="utf-8"?>
 <p:sld xmlns:a="http://schemas.openxmlformats.org/drawingml/2006/main" xmlns:r="http://schemas.openxmlformats.org/officeDocument/2006/relationships" xmlns:p="http://schemas.openxmlformats.org/presentationml/2006/main">
   <p:cSld>
     <p:spTree>
@@ -9898,61 +10131,16 @@
         </p:nvSpPr>
         <p:spPr/>
         <p:txBody>
-          <a:bodyPr/>
-          <a:lstStyle/>
-          <a:p>
-            <a:r>
-              <a:rPr lang="en-GB" dirty="0"/>
-              <a:t>Dependencies</a:t>
-            </a:r>
-            <a:endParaRPr lang="en-US" dirty="0"/>
-          </a:p>
-        </p:txBody>
-      </p:sp>
-      <p:sp>
-        <p:nvSpPr>
-          <p:cNvPr id="3" name="Content Placeholder 2"/>
-          <p:cNvSpPr>
-            <a:spLocks noGrp="1"/>
-          </p:cNvSpPr>
-          <p:nvPr>
-            <p:ph idx="1"/>
-          </p:nvPr>
-        </p:nvSpPr>
-        <p:spPr/>
-        <p:txBody>
-          <a:bodyPr/>
-          <a:lstStyle/>
-          <a:p>
-            <a:r>
-              <a:rPr lang="en-GB" dirty="0"/>
-              <a:t>Java 1.8+</a:t>
-            </a:r>
-          </a:p>
-          <a:p>
-            <a:r>
-              <a:rPr lang="en-GB" dirty="0"/>
-              <a:t>Apache Commons Logging</a:t>
-            </a:r>
-          </a:p>
-          <a:p>
-            <a:r>
-              <a:rPr lang="en-GB" dirty="0"/>
-              <a:t>JPA</a:t>
-            </a:r>
-          </a:p>
-          <a:p>
-            <a:r>
-              <a:rPr lang="en-GB" dirty="0"/>
-              <a:t>Spring Data JPA</a:t>
-            </a:r>
-          </a:p>
-          <a:p>
-            <a:r>
-              <a:rPr lang="en-GB" dirty="0"/>
-              <a:t>Spring Framework dependency injection</a:t>
-            </a:r>
-            <a:endParaRPr lang="en-US" dirty="0"/>
+          <a:bodyPr>
+            <a:normAutofit fontScale="90000"/>
+          </a:bodyPr>
+          <a:lstStyle/>
+          <a:p>
+            <a:r>
+              <a:rPr lang="en-GB" dirty="0"/>
+              <a:t>Transaction control (3): explicit control by the controller</a:t>
+            </a:r>
+            <a:endParaRPr lang="pt-PT" dirty="0"/>
           </a:p>
         </p:txBody>
       </p:sp>
@@ -9974,86 +10162,7 @@
             <a:fld id="{024A9932-4E76-455F-8E1A-2CC10C89B014}" type="slidenum">
               <a:rPr lang="pt-PT" smtClean="0"/>
               <a:pPr/>
-              <a:t>4</a:t>
-            </a:fld>
-            <a:endParaRPr lang="pt-PT"/>
-          </a:p>
-        </p:txBody>
-      </p:sp>
-    </p:spTree>
-    <p:extLst>
-      <p:ext uri="{BB962C8B-B14F-4D97-AF65-F5344CB8AC3E}">
-        <p14:creationId xmlns:p14="http://schemas.microsoft.com/office/powerpoint/2010/main" val="2447458527"/>
-      </p:ext>
-    </p:extLst>
-  </p:cSld>
-  <p:clrMapOvr>
-    <a:masterClrMapping/>
-  </p:clrMapOvr>
-</p:sld>
-</file>
-
-<file path=ppt/slides/slide40.xml><?xml version="1.0" encoding="utf-8"?>
-<p:sld xmlns:a="http://schemas.openxmlformats.org/drawingml/2006/main" xmlns:r="http://schemas.openxmlformats.org/officeDocument/2006/relationships" xmlns:p="http://schemas.openxmlformats.org/presentationml/2006/main">
-  <p:cSld>
-    <p:spTree>
-      <p:nvGrpSpPr>
-        <p:cNvPr id="1" name=""/>
-        <p:cNvGrpSpPr/>
-        <p:nvPr/>
-      </p:nvGrpSpPr>
-      <p:grpSpPr>
-        <a:xfrm>
-          <a:off x="0" y="0"/>
-          <a:ext cx="0" cy="0"/>
-          <a:chOff x="0" y="0"/>
-          <a:chExt cx="0" cy="0"/>
-        </a:xfrm>
-      </p:grpSpPr>
-      <p:sp>
-        <p:nvSpPr>
-          <p:cNvPr id="2" name="Title 1"/>
-          <p:cNvSpPr>
-            <a:spLocks noGrp="1"/>
-          </p:cNvSpPr>
-          <p:nvPr>
-            <p:ph type="title"/>
-          </p:nvPr>
-        </p:nvSpPr>
-        <p:spPr/>
-        <p:txBody>
-          <a:bodyPr>
-            <a:normAutofit fontScale="90000"/>
-          </a:bodyPr>
-          <a:lstStyle/>
-          <a:p>
-            <a:r>
-              <a:rPr lang="en-GB" dirty="0"/>
-              <a:t>Transaction control (3): explicit control by the controller</a:t>
-            </a:r>
-            <a:endParaRPr lang="pt-PT" dirty="0"/>
-          </a:p>
-        </p:txBody>
-      </p:sp>
-      <p:sp>
-        <p:nvSpPr>
-          <p:cNvPr id="4" name="Slide Number Placeholder 3"/>
-          <p:cNvSpPr>
-            <a:spLocks noGrp="1"/>
-          </p:cNvSpPr>
-          <p:nvPr>
-            <p:ph type="sldNum" sz="quarter" idx="12"/>
-          </p:nvPr>
-        </p:nvSpPr>
-        <p:spPr/>
-        <p:txBody>
-          <a:bodyPr/>
-          <a:lstStyle/>
-          <a:p>
-            <a:fld id="{024A9932-4E76-455F-8E1A-2CC10C89B014}" type="slidenum">
-              <a:rPr lang="pt-PT" smtClean="0"/>
-              <a:pPr/>
-              <a:t>40</a:t>
+              <a:t>41</a:t>
             </a:fld>
             <a:endParaRPr lang="pt-PT"/>
           </a:p>
@@ -10106,106 +10215,6 @@
 </p:sld>
 </file>
 
-<file path=ppt/slides/slide41.xml><?xml version="1.0" encoding="utf-8"?>
-<p:sld xmlns:a="http://schemas.openxmlformats.org/drawingml/2006/main" xmlns:r="http://schemas.openxmlformats.org/officeDocument/2006/relationships" xmlns:p="http://schemas.openxmlformats.org/presentationml/2006/main">
-  <p:cSld>
-    <p:spTree>
-      <p:nvGrpSpPr>
-        <p:cNvPr id="1" name=""/>
-        <p:cNvGrpSpPr/>
-        <p:nvPr/>
-      </p:nvGrpSpPr>
-      <p:grpSpPr>
-        <a:xfrm>
-          <a:off x="0" y="0"/>
-          <a:ext cx="0" cy="0"/>
-          <a:chOff x="0" y="0"/>
-          <a:chExt cx="0" cy="0"/>
-        </a:xfrm>
-      </p:grpSpPr>
-      <p:sp>
-        <p:nvSpPr>
-          <p:cNvPr id="3" name="Title 2"/>
-          <p:cNvSpPr>
-            <a:spLocks noGrp="1"/>
-          </p:cNvSpPr>
-          <p:nvPr>
-            <p:ph type="title"/>
-          </p:nvPr>
-        </p:nvSpPr>
-        <p:spPr/>
-        <p:txBody>
-          <a:bodyPr/>
-          <a:lstStyle/>
-          <a:p>
-            <a:r>
-              <a:rPr lang="en-GB" dirty="0"/>
-              <a:t>Infrastructure </a:t>
-            </a:r>
-            <a:r>
-              <a:rPr lang="en-GB" dirty="0" err="1"/>
-              <a:t>Authz</a:t>
-            </a:r>
-            <a:endParaRPr lang="en-US" dirty="0"/>
-          </a:p>
-        </p:txBody>
-      </p:sp>
-      <p:sp>
-        <p:nvSpPr>
-          <p:cNvPr id="4" name="Text Placeholder 3"/>
-          <p:cNvSpPr>
-            <a:spLocks noGrp="1"/>
-          </p:cNvSpPr>
-          <p:nvPr>
-            <p:ph type="body" idx="1"/>
-          </p:nvPr>
-        </p:nvSpPr>
-        <p:spPr/>
-        <p:txBody>
-          <a:bodyPr/>
-          <a:lstStyle/>
-          <a:p>
-            <a:endParaRPr lang="en-US"/>
-          </a:p>
-        </p:txBody>
-      </p:sp>
-      <p:sp>
-        <p:nvSpPr>
-          <p:cNvPr id="2" name="Slide Number Placeholder 1"/>
-          <p:cNvSpPr>
-            <a:spLocks noGrp="1"/>
-          </p:cNvSpPr>
-          <p:nvPr>
-            <p:ph type="sldNum" sz="quarter" idx="12"/>
-          </p:nvPr>
-        </p:nvSpPr>
-        <p:spPr/>
-        <p:txBody>
-          <a:bodyPr/>
-          <a:lstStyle/>
-          <a:p>
-            <a:fld id="{024A9932-4E76-455F-8E1A-2CC10C89B014}" type="slidenum">
-              <a:rPr lang="pt-PT" smtClean="0"/>
-              <a:pPr/>
-              <a:t>41</a:t>
-            </a:fld>
-            <a:endParaRPr lang="pt-PT"/>
-          </a:p>
-        </p:txBody>
-      </p:sp>
-    </p:spTree>
-    <p:extLst>
-      <p:ext uri="{BB962C8B-B14F-4D97-AF65-F5344CB8AC3E}">
-        <p14:creationId xmlns:p14="http://schemas.microsoft.com/office/powerpoint/2010/main" val="4178914156"/>
-      </p:ext>
-    </p:extLst>
-  </p:cSld>
-  <p:clrMapOvr>
-    <a:masterClrMapping/>
-  </p:clrMapOvr>
-</p:sld>
-</file>
-
 <file path=ppt/slides/slide42.xml><?xml version="1.0" encoding="utf-8"?>
 <p:sld xmlns:a="http://schemas.openxmlformats.org/drawingml/2006/main" xmlns:r="http://schemas.openxmlformats.org/officeDocument/2006/relationships" xmlns:p="http://schemas.openxmlformats.org/presentationml/2006/main">
   <p:cSld>
@@ -10225,7 +10234,7 @@
       </p:grpSpPr>
       <p:sp>
         <p:nvSpPr>
-          <p:cNvPr id="2" name="Title 1"/>
+          <p:cNvPr id="3" name="Title 2"/>
           <p:cNvSpPr>
             <a:spLocks noGrp="1"/>
           </p:cNvSpPr>
@@ -10240,7 +10249,11 @@
           <a:p>
             <a:r>
               <a:rPr lang="en-GB" dirty="0"/>
-              <a:t>User model</a:t>
+              <a:t>Infrastructure </a:t>
+            </a:r>
+            <a:r>
+              <a:rPr lang="en-GB" dirty="0" err="1"/>
+              <a:t>Authz</a:t>
             </a:r>
             <a:endParaRPr lang="en-US" dirty="0"/>
           </a:p>
@@ -10248,7 +10261,26 @@
       </p:sp>
       <p:sp>
         <p:nvSpPr>
-          <p:cNvPr id="4" name="Slide Number Placeholder 3"/>
+          <p:cNvPr id="4" name="Text Placeholder 3"/>
+          <p:cNvSpPr>
+            <a:spLocks noGrp="1"/>
+          </p:cNvSpPr>
+          <p:nvPr>
+            <p:ph type="body" idx="1"/>
+          </p:nvPr>
+        </p:nvSpPr>
+        <p:spPr/>
+        <p:txBody>
+          <a:bodyPr/>
+          <a:lstStyle/>
+          <a:p>
+            <a:endParaRPr lang="en-US"/>
+          </a:p>
+        </p:txBody>
+      </p:sp>
+      <p:sp>
+        <p:nvSpPr>
+          <p:cNvPr id="2" name="Slide Number Placeholder 1"/>
           <p:cNvSpPr>
             <a:spLocks noGrp="1"/>
           </p:cNvSpPr>
@@ -10265,6 +10297,83 @@
               <a:rPr lang="pt-PT" smtClean="0"/>
               <a:pPr/>
               <a:t>42</a:t>
+            </a:fld>
+            <a:endParaRPr lang="pt-PT"/>
+          </a:p>
+        </p:txBody>
+      </p:sp>
+    </p:spTree>
+    <p:extLst>
+      <p:ext uri="{BB962C8B-B14F-4D97-AF65-F5344CB8AC3E}">
+        <p14:creationId xmlns:p14="http://schemas.microsoft.com/office/powerpoint/2010/main" val="4178914156"/>
+      </p:ext>
+    </p:extLst>
+  </p:cSld>
+  <p:clrMapOvr>
+    <a:masterClrMapping/>
+  </p:clrMapOvr>
+</p:sld>
+</file>
+
+<file path=ppt/slides/slide43.xml><?xml version="1.0" encoding="utf-8"?>
+<p:sld xmlns:a="http://schemas.openxmlformats.org/drawingml/2006/main" xmlns:r="http://schemas.openxmlformats.org/officeDocument/2006/relationships" xmlns:p="http://schemas.openxmlformats.org/presentationml/2006/main">
+  <p:cSld>
+    <p:spTree>
+      <p:nvGrpSpPr>
+        <p:cNvPr id="1" name=""/>
+        <p:cNvGrpSpPr/>
+        <p:nvPr/>
+      </p:nvGrpSpPr>
+      <p:grpSpPr>
+        <a:xfrm>
+          <a:off x="0" y="0"/>
+          <a:ext cx="0" cy="0"/>
+          <a:chOff x="0" y="0"/>
+          <a:chExt cx="0" cy="0"/>
+        </a:xfrm>
+      </p:grpSpPr>
+      <p:sp>
+        <p:nvSpPr>
+          <p:cNvPr id="2" name="Title 1"/>
+          <p:cNvSpPr>
+            <a:spLocks noGrp="1"/>
+          </p:cNvSpPr>
+          <p:nvPr>
+            <p:ph type="title"/>
+          </p:nvPr>
+        </p:nvSpPr>
+        <p:spPr/>
+        <p:txBody>
+          <a:bodyPr/>
+          <a:lstStyle/>
+          <a:p>
+            <a:r>
+              <a:rPr lang="en-GB" dirty="0"/>
+              <a:t>User model</a:t>
+            </a:r>
+            <a:endParaRPr lang="en-US" dirty="0"/>
+          </a:p>
+        </p:txBody>
+      </p:sp>
+      <p:sp>
+        <p:nvSpPr>
+          <p:cNvPr id="4" name="Slide Number Placeholder 3"/>
+          <p:cNvSpPr>
+            <a:spLocks noGrp="1"/>
+          </p:cNvSpPr>
+          <p:nvPr>
+            <p:ph type="sldNum" sz="quarter" idx="12"/>
+          </p:nvPr>
+        </p:nvSpPr>
+        <p:spPr/>
+        <p:txBody>
+          <a:bodyPr/>
+          <a:lstStyle/>
+          <a:p>
+            <a:fld id="{024A9932-4E76-455F-8E1A-2CC10C89B014}" type="slidenum">
+              <a:rPr lang="pt-PT" smtClean="0"/>
+              <a:pPr/>
+              <a:t>43</a:t>
             </a:fld>
             <a:endParaRPr lang="pt-PT"/>
           </a:p>
@@ -10340,341 +10449,6 @@
 </p:sld>
 </file>
 
-<file path=ppt/slides/slide43.xml><?xml version="1.0" encoding="utf-8"?>
-<p:sld xmlns:a="http://schemas.openxmlformats.org/drawingml/2006/main" xmlns:r="http://schemas.openxmlformats.org/officeDocument/2006/relationships" xmlns:p="http://schemas.openxmlformats.org/presentationml/2006/main">
-  <p:cSld>
-    <p:spTree>
-      <p:nvGrpSpPr>
-        <p:cNvPr id="1" name=""/>
-        <p:cNvGrpSpPr/>
-        <p:nvPr/>
-      </p:nvGrpSpPr>
-      <p:grpSpPr>
-        <a:xfrm>
-          <a:off x="0" y="0"/>
-          <a:ext cx="0" cy="0"/>
-          <a:chOff x="0" y="0"/>
-          <a:chExt cx="0" cy="0"/>
-        </a:xfrm>
-      </p:grpSpPr>
-      <p:sp>
-        <p:nvSpPr>
-          <p:cNvPr id="2" name="Title 1"/>
-          <p:cNvSpPr>
-            <a:spLocks noGrp="1"/>
-          </p:cNvSpPr>
-          <p:nvPr>
-            <p:ph type="title"/>
-          </p:nvPr>
-        </p:nvSpPr>
-        <p:spPr/>
-        <p:txBody>
-          <a:bodyPr/>
-          <a:lstStyle/>
-          <a:p>
-            <a:r>
-              <a:rPr lang="en-GB" dirty="0"/>
-              <a:t>Domain invariants</a:t>
-            </a:r>
-          </a:p>
-        </p:txBody>
-      </p:sp>
-      <p:sp>
-        <p:nvSpPr>
-          <p:cNvPr id="3" name="Content Placeholder 2"/>
-          <p:cNvSpPr>
-            <a:spLocks noGrp="1"/>
-          </p:cNvSpPr>
-          <p:nvPr>
-            <p:ph idx="1"/>
-          </p:nvPr>
-        </p:nvSpPr>
-        <p:spPr/>
-        <p:style>
-          <a:lnRef idx="1">
-            <a:schemeClr val="accent2"/>
-          </a:lnRef>
-          <a:fillRef idx="2">
-            <a:schemeClr val="accent2"/>
-          </a:fillRef>
-          <a:effectRef idx="1">
-            <a:schemeClr val="accent2"/>
-          </a:effectRef>
-          <a:fontRef idx="minor">
-            <a:schemeClr val="dk1"/>
-          </a:fontRef>
-        </p:style>
-        <p:txBody>
-          <a:bodyPr>
-            <a:noAutofit/>
-          </a:bodyPr>
-          <a:lstStyle/>
-          <a:p>
-            <a:pPr marL="118872" indent="0">
-              <a:buNone/>
-            </a:pPr>
-            <a:endParaRPr lang="en-GB" sz="1600" dirty="0">
-              <a:latin typeface="Courier New" panose="02070309020205020404" pitchFamily="49" charset="0"/>
-              <a:cs typeface="Courier New" panose="02070309020205020404" pitchFamily="49" charset="0"/>
-            </a:endParaRPr>
-          </a:p>
-          <a:p>
-            <a:pPr marL="118872" indent="0">
-              <a:buNone/>
-            </a:pPr>
-            <a:r>
-              <a:rPr lang="en-GB" sz="1600" dirty="0">
-                <a:latin typeface="Courier New" panose="02070309020205020404" pitchFamily="49" charset="0"/>
-                <a:cs typeface="Courier New" panose="02070309020205020404" pitchFamily="49" charset="0"/>
-              </a:rPr>
-              <a:t>@Test</a:t>
-            </a:r>
-          </a:p>
-          <a:p>
-            <a:pPr marL="118872" indent="0">
-              <a:buNone/>
-            </a:pPr>
-            <a:r>
-              <a:rPr lang="en-GB" sz="1600" dirty="0">
-                <a:latin typeface="Courier New" panose="02070309020205020404" pitchFamily="49" charset="0"/>
-                <a:cs typeface="Courier New" panose="02070309020205020404" pitchFamily="49" charset="0"/>
-              </a:rPr>
-              <a:t>public void ensurePasswordHasAtLeastOneDigitAnd6CharactersLong() {</a:t>
-            </a:r>
-          </a:p>
-          <a:p>
-            <a:pPr marL="118872" indent="0">
-              <a:buNone/>
-            </a:pPr>
-            <a:r>
-              <a:rPr lang="en-GB" sz="1600" dirty="0">
-                <a:latin typeface="Courier New" panose="02070309020205020404" pitchFamily="49" charset="0"/>
-                <a:cs typeface="Courier New" panose="02070309020205020404" pitchFamily="49" charset="0"/>
-              </a:rPr>
-              <a:t>	new Password("abcdefgh1");</a:t>
-            </a:r>
-          </a:p>
-          <a:p>
-            <a:pPr marL="118872" indent="0">
-              <a:buNone/>
-            </a:pPr>
-            <a:r>
-              <a:rPr lang="en-GB" sz="1600" dirty="0">
-                <a:latin typeface="Courier New" panose="02070309020205020404" pitchFamily="49" charset="0"/>
-                <a:cs typeface="Courier New" panose="02070309020205020404" pitchFamily="49" charset="0"/>
-              </a:rPr>
-              <a:t>}</a:t>
-            </a:r>
-          </a:p>
-          <a:p>
-            <a:pPr marL="118872" indent="0">
-              <a:buNone/>
-            </a:pPr>
-            <a:endParaRPr lang="en-GB" sz="1600" dirty="0">
-              <a:latin typeface="Courier New" panose="02070309020205020404" pitchFamily="49" charset="0"/>
-              <a:cs typeface="Courier New" panose="02070309020205020404" pitchFamily="49" charset="0"/>
-            </a:endParaRPr>
-          </a:p>
-          <a:p>
-            <a:pPr marL="118872" indent="0">
-              <a:buNone/>
-            </a:pPr>
-            <a:r>
-              <a:rPr lang="en-GB" sz="1600" dirty="0">
-                <a:latin typeface="Courier New" panose="02070309020205020404" pitchFamily="49" charset="0"/>
-                <a:cs typeface="Courier New" panose="02070309020205020404" pitchFamily="49" charset="0"/>
-              </a:rPr>
-              <a:t>@Test(expected = </a:t>
-            </a:r>
-            <a:r>
-              <a:rPr lang="en-GB" sz="1600" dirty="0" err="1">
-                <a:latin typeface="Courier New" panose="02070309020205020404" pitchFamily="49" charset="0"/>
-                <a:cs typeface="Courier New" panose="02070309020205020404" pitchFamily="49" charset="0"/>
-              </a:rPr>
-              <a:t>IllegalArgumentException.class</a:t>
-            </a:r>
-            <a:r>
-              <a:rPr lang="en-GB" sz="1600" dirty="0">
-                <a:latin typeface="Courier New" panose="02070309020205020404" pitchFamily="49" charset="0"/>
-                <a:cs typeface="Courier New" panose="02070309020205020404" pitchFamily="49" charset="0"/>
-              </a:rPr>
-              <a:t>)</a:t>
-            </a:r>
-          </a:p>
-          <a:p>
-            <a:pPr marL="118872" indent="0">
-              <a:buNone/>
-            </a:pPr>
-            <a:r>
-              <a:rPr lang="en-GB" sz="1600" dirty="0">
-                <a:latin typeface="Courier New" panose="02070309020205020404" pitchFamily="49" charset="0"/>
-                <a:cs typeface="Courier New" panose="02070309020205020404" pitchFamily="49" charset="0"/>
-              </a:rPr>
-              <a:t>public void ensurePasswordsSmallerThan6CharactersAreNotAllowed() {</a:t>
-            </a:r>
-          </a:p>
-          <a:p>
-            <a:pPr marL="118872" indent="0">
-              <a:buNone/>
-            </a:pPr>
-            <a:r>
-              <a:rPr lang="en-GB" sz="1600" dirty="0">
-                <a:latin typeface="Courier New" panose="02070309020205020404" pitchFamily="49" charset="0"/>
-                <a:cs typeface="Courier New" panose="02070309020205020404" pitchFamily="49" charset="0"/>
-              </a:rPr>
-              <a:t>	new Password("ab1c");</a:t>
-            </a:r>
-          </a:p>
-          <a:p>
-            <a:pPr marL="118872" indent="0">
-              <a:buNone/>
-            </a:pPr>
-            <a:r>
-              <a:rPr lang="en-GB" sz="1600" dirty="0">
-                <a:latin typeface="Courier New" panose="02070309020205020404" pitchFamily="49" charset="0"/>
-                <a:cs typeface="Courier New" panose="02070309020205020404" pitchFamily="49" charset="0"/>
-              </a:rPr>
-              <a:t>}</a:t>
-            </a:r>
-          </a:p>
-          <a:p>
-            <a:pPr marL="118872" indent="0">
-              <a:buNone/>
-            </a:pPr>
-            <a:endParaRPr lang="en-GB" sz="1600" dirty="0">
-              <a:latin typeface="Courier New" panose="02070309020205020404" pitchFamily="49" charset="0"/>
-              <a:cs typeface="Courier New" panose="02070309020205020404" pitchFamily="49" charset="0"/>
-            </a:endParaRPr>
-          </a:p>
-          <a:p>
-            <a:pPr marL="118872" indent="0">
-              <a:buNone/>
-            </a:pPr>
-            <a:r>
-              <a:rPr lang="en-GB" sz="1600" dirty="0">
-                <a:latin typeface="Courier New" panose="02070309020205020404" pitchFamily="49" charset="0"/>
-                <a:cs typeface="Courier New" panose="02070309020205020404" pitchFamily="49" charset="0"/>
-              </a:rPr>
-              <a:t>@Test(expected = </a:t>
-            </a:r>
-            <a:r>
-              <a:rPr lang="en-GB" sz="1600" dirty="0" err="1">
-                <a:latin typeface="Courier New" panose="02070309020205020404" pitchFamily="49" charset="0"/>
-                <a:cs typeface="Courier New" panose="02070309020205020404" pitchFamily="49" charset="0"/>
-              </a:rPr>
-              <a:t>IllegalArgumentException.class</a:t>
-            </a:r>
-            <a:r>
-              <a:rPr lang="en-GB" sz="1600" dirty="0">
-                <a:latin typeface="Courier New" panose="02070309020205020404" pitchFamily="49" charset="0"/>
-                <a:cs typeface="Courier New" panose="02070309020205020404" pitchFamily="49" charset="0"/>
-              </a:rPr>
-              <a:t>)</a:t>
-            </a:r>
-          </a:p>
-          <a:p>
-            <a:pPr marL="118872" indent="0">
-              <a:buNone/>
-            </a:pPr>
-            <a:r>
-              <a:rPr lang="en-GB" sz="1600" dirty="0">
-                <a:latin typeface="Courier New" panose="02070309020205020404" pitchFamily="49" charset="0"/>
-                <a:cs typeface="Courier New" panose="02070309020205020404" pitchFamily="49" charset="0"/>
-              </a:rPr>
-              <a:t>public void </a:t>
-            </a:r>
-            <a:r>
-              <a:rPr lang="en-GB" sz="1600" dirty="0" err="1">
-                <a:latin typeface="Courier New" panose="02070309020205020404" pitchFamily="49" charset="0"/>
-                <a:cs typeface="Courier New" panose="02070309020205020404" pitchFamily="49" charset="0"/>
-              </a:rPr>
-              <a:t>ensurePasswordsWithoutDigitsAreNotAllowed</a:t>
-            </a:r>
-            <a:r>
-              <a:rPr lang="en-GB" sz="1600" dirty="0">
-                <a:latin typeface="Courier New" panose="02070309020205020404" pitchFamily="49" charset="0"/>
-                <a:cs typeface="Courier New" panose="02070309020205020404" pitchFamily="49" charset="0"/>
-              </a:rPr>
-              <a:t>() {</a:t>
-            </a:r>
-          </a:p>
-          <a:p>
-            <a:pPr marL="118872" indent="0">
-              <a:buNone/>
-            </a:pPr>
-            <a:r>
-              <a:rPr lang="en-GB" sz="1600" dirty="0">
-                <a:latin typeface="Courier New" panose="02070309020205020404" pitchFamily="49" charset="0"/>
-                <a:cs typeface="Courier New" panose="02070309020205020404" pitchFamily="49" charset="0"/>
-              </a:rPr>
-              <a:t>	new Password("</a:t>
-            </a:r>
-            <a:r>
-              <a:rPr lang="en-GB" sz="1600" dirty="0" err="1">
-                <a:latin typeface="Courier New" panose="02070309020205020404" pitchFamily="49" charset="0"/>
-                <a:cs typeface="Courier New" panose="02070309020205020404" pitchFamily="49" charset="0"/>
-              </a:rPr>
-              <a:t>abcdefgh</a:t>
-            </a:r>
-            <a:r>
-              <a:rPr lang="en-GB" sz="1600" dirty="0">
-                <a:latin typeface="Courier New" panose="02070309020205020404" pitchFamily="49" charset="0"/>
-                <a:cs typeface="Courier New" panose="02070309020205020404" pitchFamily="49" charset="0"/>
-              </a:rPr>
-              <a:t>");</a:t>
-            </a:r>
-          </a:p>
-          <a:p>
-            <a:pPr marL="118872" indent="0">
-              <a:buNone/>
-            </a:pPr>
-            <a:r>
-              <a:rPr lang="en-GB" sz="1600" dirty="0">
-                <a:latin typeface="Courier New" panose="02070309020205020404" pitchFamily="49" charset="0"/>
-                <a:cs typeface="Courier New" panose="02070309020205020404" pitchFamily="49" charset="0"/>
-              </a:rPr>
-              <a:t>}</a:t>
-            </a:r>
-          </a:p>
-        </p:txBody>
-      </p:sp>
-      <p:sp>
-        <p:nvSpPr>
-          <p:cNvPr id="5" name="Slide Number Placeholder 4"/>
-          <p:cNvSpPr>
-            <a:spLocks noGrp="1"/>
-          </p:cNvSpPr>
-          <p:nvPr>
-            <p:ph type="sldNum" sz="quarter" idx="12"/>
-          </p:nvPr>
-        </p:nvSpPr>
-        <p:spPr/>
-        <p:txBody>
-          <a:bodyPr/>
-          <a:lstStyle/>
-          <a:p>
-            <a:fld id="{024A9932-4E76-455F-8E1A-2CC10C89B014}" type="slidenum">
-              <a:rPr lang="pt-PT" smtClean="0"/>
-              <a:pPr/>
-              <a:t>43</a:t>
-            </a:fld>
-            <a:endParaRPr lang="pt-PT"/>
-          </a:p>
-        </p:txBody>
-      </p:sp>
-    </p:spTree>
-    <p:extLst>
-      <p:ext uri="{BB962C8B-B14F-4D97-AF65-F5344CB8AC3E}">
-        <p14:creationId xmlns:p14="http://schemas.microsoft.com/office/powerpoint/2010/main" val="1968312242"/>
-      </p:ext>
-    </p:extLst>
-  </p:cSld>
-  <p:clrMapOvr>
-    <a:masterClrMapping/>
-  </p:clrMapOvr>
-</p:sld>
-</file>
-
 <file path=ppt/slides/slide44.xml><?xml version="1.0" encoding="utf-8"?>
 <p:sld xmlns:a="http://schemas.openxmlformats.org/drawingml/2006/main" xmlns:r="http://schemas.openxmlformats.org/officeDocument/2006/relationships" xmlns:p="http://schemas.openxmlformats.org/presentationml/2006/main">
   <p:cSld>
@@ -10709,7 +10483,7 @@
           <a:p>
             <a:r>
               <a:rPr lang="en-GB" dirty="0"/>
-              <a:t>Domain</a:t>
+              <a:t>Domain invariants</a:t>
             </a:r>
           </a:p>
         </p:txBody>
@@ -10748,152 +10522,53 @@
             <a:pPr marL="118872" indent="0">
               <a:buNone/>
             </a:pPr>
-            <a:r>
-              <a:rPr lang="en-GB" sz="1400" dirty="0">
+            <a:endParaRPr lang="en-GB" sz="1600" dirty="0">
+              <a:latin typeface="Courier New" panose="02070309020205020404" pitchFamily="49" charset="0"/>
+              <a:cs typeface="Courier New" panose="02070309020205020404" pitchFamily="49" charset="0"/>
+            </a:endParaRPr>
+          </a:p>
+          <a:p>
+            <a:pPr marL="118872" indent="0">
+              <a:buNone/>
+            </a:pPr>
+            <a:r>
+              <a:rPr lang="en-GB" sz="1600" dirty="0">
                 <a:latin typeface="Courier New" panose="02070309020205020404" pitchFamily="49" charset="0"/>
                 <a:cs typeface="Courier New" panose="02070309020205020404" pitchFamily="49" charset="0"/>
               </a:rPr>
-              <a:t>public class Password {</a:t>
+              <a:t>@Test</a:t>
             </a:r>
           </a:p>
           <a:p>
             <a:pPr marL="118872" indent="0">
               <a:buNone/>
             </a:pPr>
-            <a:endParaRPr lang="en-GB" sz="1400" dirty="0">
-              <a:latin typeface="Courier New" panose="02070309020205020404" pitchFamily="49" charset="0"/>
-              <a:cs typeface="Courier New" panose="02070309020205020404" pitchFamily="49" charset="0"/>
-            </a:endParaRPr>
+            <a:r>
+              <a:rPr lang="en-GB" sz="1600" dirty="0">
+                <a:latin typeface="Courier New" panose="02070309020205020404" pitchFamily="49" charset="0"/>
+                <a:cs typeface="Courier New" panose="02070309020205020404" pitchFamily="49" charset="0"/>
+              </a:rPr>
+              <a:t>public void ensurePasswordHasAtLeastOneDigitAnd6CharactersLong() {</a:t>
+            </a:r>
           </a:p>
           <a:p>
             <a:pPr marL="118872" indent="0">
               <a:buNone/>
             </a:pPr>
             <a:r>
-              <a:rPr lang="en-GB" sz="1400" dirty="0">
+              <a:rPr lang="en-GB" sz="1600" dirty="0">
                 <a:latin typeface="Courier New" panose="02070309020205020404" pitchFamily="49" charset="0"/>
                 <a:cs typeface="Courier New" panose="02070309020205020404" pitchFamily="49" charset="0"/>
               </a:rPr>
-              <a:t>…</a:t>
+              <a:t>	new Password("abcdefgh1");</a:t>
             </a:r>
           </a:p>
           <a:p>
             <a:pPr marL="118872" indent="0">
               <a:buNone/>
             </a:pPr>
-            <a:endParaRPr lang="en-GB" sz="1400" dirty="0">
-              <a:latin typeface="Courier New" panose="02070309020205020404" pitchFamily="49" charset="0"/>
-              <a:cs typeface="Courier New" panose="02070309020205020404" pitchFamily="49" charset="0"/>
-            </a:endParaRPr>
-          </a:p>
-          <a:p>
-            <a:pPr marL="118872" indent="0">
-              <a:buNone/>
-            </a:pPr>
-            <a:r>
-              <a:rPr lang="en-GB" sz="1400" dirty="0">
-                <a:latin typeface="Courier New" panose="02070309020205020404" pitchFamily="49" charset="0"/>
-                <a:cs typeface="Courier New" panose="02070309020205020404" pitchFamily="49" charset="0"/>
-              </a:rPr>
-              <a:t>public Password(String password) {</a:t>
-            </a:r>
-          </a:p>
-          <a:p>
-            <a:pPr marL="118872" indent="0">
-              <a:buNone/>
-            </a:pPr>
-            <a:r>
-              <a:rPr lang="en-GB" sz="1400" dirty="0">
-                <a:latin typeface="Courier New" panose="02070309020205020404" pitchFamily="49" charset="0"/>
-                <a:cs typeface="Courier New" panose="02070309020205020404" pitchFamily="49" charset="0"/>
-              </a:rPr>
-              <a:t>	if (!</a:t>
-            </a:r>
-            <a:r>
-              <a:rPr lang="en-GB" sz="1400" dirty="0" err="1">
-                <a:latin typeface="Courier New" panose="02070309020205020404" pitchFamily="49" charset="0"/>
-                <a:cs typeface="Courier New" panose="02070309020205020404" pitchFamily="49" charset="0"/>
-              </a:rPr>
-              <a:t>meetsMinimumRequirements</a:t>
-            </a:r>
-            <a:r>
-              <a:rPr lang="en-GB" sz="1400" dirty="0">
-                <a:latin typeface="Courier New" panose="02070309020205020404" pitchFamily="49" charset="0"/>
-                <a:cs typeface="Courier New" panose="02070309020205020404" pitchFamily="49" charset="0"/>
-              </a:rPr>
-              <a:t>(password)) {</a:t>
-            </a:r>
-          </a:p>
-          <a:p>
-            <a:pPr marL="118872" indent="0">
-              <a:buNone/>
-            </a:pPr>
-            <a:r>
-              <a:rPr lang="en-GB" sz="1400" dirty="0">
-                <a:latin typeface="Courier New" panose="02070309020205020404" pitchFamily="49" charset="0"/>
-                <a:cs typeface="Courier New" panose="02070309020205020404" pitchFamily="49" charset="0"/>
-              </a:rPr>
-              <a:t>	    throw new </a:t>
-            </a:r>
-            <a:r>
-              <a:rPr lang="en-GB" sz="1400" dirty="0" err="1">
-                <a:latin typeface="Courier New" panose="02070309020205020404" pitchFamily="49" charset="0"/>
-                <a:cs typeface="Courier New" panose="02070309020205020404" pitchFamily="49" charset="0"/>
-              </a:rPr>
-              <a:t>IllegalStateException</a:t>
-            </a:r>
-            <a:r>
-              <a:rPr lang="en-GB" sz="1400" dirty="0">
-                <a:latin typeface="Courier New" panose="02070309020205020404" pitchFamily="49" charset="0"/>
-                <a:cs typeface="Courier New" panose="02070309020205020404" pitchFamily="49" charset="0"/>
-              </a:rPr>
-              <a:t>();</a:t>
-            </a:r>
-          </a:p>
-          <a:p>
-            <a:pPr marL="118872" indent="0">
-              <a:buNone/>
-            </a:pPr>
-            <a:r>
-              <a:rPr lang="en-GB" sz="1400" dirty="0">
-                <a:latin typeface="Courier New" panose="02070309020205020404" pitchFamily="49" charset="0"/>
-                <a:cs typeface="Courier New" panose="02070309020205020404" pitchFamily="49" charset="0"/>
-              </a:rPr>
-              <a:t>	}</a:t>
-            </a:r>
-          </a:p>
-          <a:p>
-            <a:pPr marL="118872" indent="0">
-              <a:buNone/>
-            </a:pPr>
-            <a:r>
-              <a:rPr lang="en-GB" sz="1400" dirty="0">
-                <a:latin typeface="Courier New" panose="02070309020205020404" pitchFamily="49" charset="0"/>
-                <a:cs typeface="Courier New" panose="02070309020205020404" pitchFamily="49" charset="0"/>
-              </a:rPr>
-              <a:t>	</a:t>
-            </a:r>
-            <a:r>
-              <a:rPr lang="en-GB" sz="1400" dirty="0" err="1">
-                <a:latin typeface="Courier New" panose="02070309020205020404" pitchFamily="49" charset="0"/>
-                <a:cs typeface="Courier New" panose="02070309020205020404" pitchFamily="49" charset="0"/>
-              </a:rPr>
-              <a:t>thePassword</a:t>
-            </a:r>
-            <a:r>
-              <a:rPr lang="en-GB" sz="1400" dirty="0">
-                <a:latin typeface="Courier New" panose="02070309020205020404" pitchFamily="49" charset="0"/>
-                <a:cs typeface="Courier New" panose="02070309020205020404" pitchFamily="49" charset="0"/>
-              </a:rPr>
-              <a:t> = password;</a:t>
-            </a:r>
-          </a:p>
-          <a:p>
-            <a:pPr marL="118872" indent="0">
-              <a:buNone/>
-            </a:pPr>
-            <a:r>
-              <a:rPr lang="en-GB" sz="1400" dirty="0">
+            <a:r>
+              <a:rPr lang="en-GB" sz="1600" dirty="0">
                 <a:latin typeface="Courier New" panose="02070309020205020404" pitchFamily="49" charset="0"/>
                 <a:cs typeface="Courier New" panose="02070309020205020404" pitchFamily="49" charset="0"/>
               </a:rPr>
@@ -10904,7 +10579,7 @@
             <a:pPr marL="118872" indent="0">
               <a:buNone/>
             </a:pPr>
-            <a:endParaRPr lang="en-GB" sz="1400" dirty="0">
+            <a:endParaRPr lang="en-GB" sz="1600" dirty="0">
               <a:latin typeface="Courier New" panose="02070309020205020404" pitchFamily="49" charset="0"/>
               <a:cs typeface="Courier New" panose="02070309020205020404" pitchFamily="49" charset="0"/>
             </a:endParaRPr>
@@ -10914,39 +10589,49 @@
               <a:buNone/>
             </a:pPr>
             <a:r>
-              <a:rPr lang="en-GB" sz="1400" dirty="0">
+              <a:rPr lang="en-GB" sz="1600" dirty="0">
                 <a:latin typeface="Courier New" panose="02070309020205020404" pitchFamily="49" charset="0"/>
                 <a:cs typeface="Courier New" panose="02070309020205020404" pitchFamily="49" charset="0"/>
               </a:rPr>
-              <a:t>private </a:t>
-            </a:r>
-            <a:r>
-              <a:rPr lang="en-GB" sz="1400" dirty="0" err="1">
+              <a:t>@Test(expected = </a:t>
+            </a:r>
+            <a:r>
+              <a:rPr lang="en-GB" sz="1600" dirty="0" err="1">
                 <a:latin typeface="Courier New" panose="02070309020205020404" pitchFamily="49" charset="0"/>
                 <a:cs typeface="Courier New" panose="02070309020205020404" pitchFamily="49" charset="0"/>
               </a:rPr>
-              <a:t>boolean</a:t>
-            </a:r>
-            <a:r>
-              <a:rPr lang="en-GB" sz="1400" dirty="0">
+              <a:t>IllegalArgumentException.class</a:t>
+            </a:r>
+            <a:r>
+              <a:rPr lang="en-GB" sz="1600" dirty="0">
                 <a:latin typeface="Courier New" panose="02070309020205020404" pitchFamily="49" charset="0"/>
                 <a:cs typeface="Courier New" panose="02070309020205020404" pitchFamily="49" charset="0"/>
               </a:rPr>
-              <a:t> </a:t>
-            </a:r>
-            <a:r>
-              <a:rPr lang="en-GB" sz="1400" dirty="0" err="1">
+              <a:t>)</a:t>
+            </a:r>
+          </a:p>
+          <a:p>
+            <a:pPr marL="118872" indent="0">
+              <a:buNone/>
+            </a:pPr>
+            <a:r>
+              <a:rPr lang="en-GB" sz="1600" dirty="0">
                 <a:latin typeface="Courier New" panose="02070309020205020404" pitchFamily="49" charset="0"/>
                 <a:cs typeface="Courier New" panose="02070309020205020404" pitchFamily="49" charset="0"/>
               </a:rPr>
-              <a:t>meetsMinimumRequirements</a:t>
-            </a:r>
-            <a:r>
-              <a:rPr lang="en-GB" sz="1400" dirty="0">
+              <a:t>public void ensurePasswordsSmallerThan6CharactersAreNotAllowed() {</a:t>
+            </a:r>
+          </a:p>
+          <a:p>
+            <a:pPr marL="118872" indent="0">
+              <a:buNone/>
+            </a:pPr>
+            <a:r>
+              <a:rPr lang="en-GB" sz="1600" dirty="0">
                 <a:latin typeface="Courier New" panose="02070309020205020404" pitchFamily="49" charset="0"/>
                 <a:cs typeface="Courier New" panose="02070309020205020404" pitchFamily="49" charset="0"/>
               </a:rPr>
-              <a:t>(String password) {</a:t>
+              <a:t>	new Password("ab1c");</a:t>
             </a:r>
           </a:p>
           <a:p>
@@ -10954,25 +10639,46 @@
               <a:buNone/>
             </a:pPr>
             <a:r>
-              <a:rPr lang="en-GB" sz="1400" dirty="0">
+              <a:rPr lang="en-GB" sz="1600" dirty="0">
                 <a:latin typeface="Courier New" panose="02070309020205020404" pitchFamily="49" charset="0"/>
                 <a:cs typeface="Courier New" panose="02070309020205020404" pitchFamily="49" charset="0"/>
               </a:rPr>
-              <a:t>	if (</a:t>
-            </a:r>
-            <a:r>
-              <a:rPr lang="en-GB" sz="1400" dirty="0" err="1">
+              <a:t>}</a:t>
+            </a:r>
+          </a:p>
+          <a:p>
+            <a:pPr marL="118872" indent="0">
+              <a:buNone/>
+            </a:pPr>
+            <a:endParaRPr lang="en-GB" sz="1600" dirty="0">
+              <a:latin typeface="Courier New" panose="02070309020205020404" pitchFamily="49" charset="0"/>
+              <a:cs typeface="Courier New" panose="02070309020205020404" pitchFamily="49" charset="0"/>
+            </a:endParaRPr>
+          </a:p>
+          <a:p>
+            <a:pPr marL="118872" indent="0">
+              <a:buNone/>
+            </a:pPr>
+            <a:r>
+              <a:rPr lang="en-GB" sz="1600" dirty="0">
                 <a:latin typeface="Courier New" panose="02070309020205020404" pitchFamily="49" charset="0"/>
                 <a:cs typeface="Courier New" panose="02070309020205020404" pitchFamily="49" charset="0"/>
               </a:rPr>
-              <a:t>Strings.isNullOrEmpty</a:t>
-            </a:r>
-            <a:r>
-              <a:rPr lang="en-GB" sz="1400" dirty="0">
+              <a:t>@Test(expected = </a:t>
+            </a:r>
+            <a:r>
+              <a:rPr lang="en-GB" sz="1600" dirty="0" err="1">
                 <a:latin typeface="Courier New" panose="02070309020205020404" pitchFamily="49" charset="0"/>
                 <a:cs typeface="Courier New" panose="02070309020205020404" pitchFamily="49" charset="0"/>
               </a:rPr>
-              <a:t>(password)</a:t>
+              <a:t>IllegalArgumentException.class</a:t>
+            </a:r>
+            <a:r>
+              <a:rPr lang="en-GB" sz="1600" dirty="0">
+                <a:latin typeface="Courier New" panose="02070309020205020404" pitchFamily="49" charset="0"/>
+                <a:cs typeface="Courier New" panose="02070309020205020404" pitchFamily="49" charset="0"/>
+              </a:rPr>
+              <a:t>)</a:t>
             </a:r>
           </a:p>
           <a:p>
@@ -10980,25 +10686,25 @@
               <a:buNone/>
             </a:pPr>
             <a:r>
-              <a:rPr lang="en-GB" sz="1400" dirty="0">
+              <a:rPr lang="en-GB" sz="1600" dirty="0">
                 <a:latin typeface="Courier New" panose="02070309020205020404" pitchFamily="49" charset="0"/>
                 <a:cs typeface="Courier New" panose="02070309020205020404" pitchFamily="49" charset="0"/>
               </a:rPr>
-              <a:t>	|| </a:t>
-            </a:r>
-            <a:r>
-              <a:rPr lang="en-GB" sz="1400" dirty="0" err="1">
+              <a:t>public void </a:t>
+            </a:r>
+            <a:r>
+              <a:rPr lang="en-GB" sz="1600" dirty="0" err="1">
                 <a:latin typeface="Courier New" panose="02070309020205020404" pitchFamily="49" charset="0"/>
                 <a:cs typeface="Courier New" panose="02070309020205020404" pitchFamily="49" charset="0"/>
               </a:rPr>
-              <a:t>password.length</a:t>
-            </a:r>
-            <a:r>
-              <a:rPr lang="en-GB" sz="1400" dirty="0">
+              <a:t>ensurePasswordsWithoutDigitsAreNotAllowed</a:t>
+            </a:r>
+            <a:r>
+              <a:rPr lang="en-GB" sz="1600" dirty="0">
                 <a:latin typeface="Courier New" panose="02070309020205020404" pitchFamily="49" charset="0"/>
                 <a:cs typeface="Courier New" panose="02070309020205020404" pitchFamily="49" charset="0"/>
               </a:rPr>
-              <a:t>() &lt; 6)</a:t>
+              <a:t>() {</a:t>
             </a:r>
           </a:p>
           <a:p>
@@ -11006,25 +10712,25 @@
               <a:buNone/>
             </a:pPr>
             <a:r>
-              <a:rPr lang="en-GB" sz="1400" dirty="0">
+              <a:rPr lang="en-GB" sz="1600" dirty="0">
                 <a:latin typeface="Courier New" panose="02070309020205020404" pitchFamily="49" charset="0"/>
                 <a:cs typeface="Courier New" panose="02070309020205020404" pitchFamily="49" charset="0"/>
               </a:rPr>
-              <a:t>	|| !</a:t>
-            </a:r>
-            <a:r>
-              <a:rPr lang="en-GB" sz="1400" dirty="0" err="1">
+              <a:t>	new Password("</a:t>
+            </a:r>
+            <a:r>
+              <a:rPr lang="en-GB" sz="1600" dirty="0" err="1">
                 <a:latin typeface="Courier New" panose="02070309020205020404" pitchFamily="49" charset="0"/>
                 <a:cs typeface="Courier New" panose="02070309020205020404" pitchFamily="49" charset="0"/>
               </a:rPr>
-              <a:t>Strings.containsDigit</a:t>
-            </a:r>
-            <a:r>
-              <a:rPr lang="en-GB" sz="1400" dirty="0">
+              <a:t>abcdefgh</a:t>
+            </a:r>
+            <a:r>
+              <a:rPr lang="en-GB" sz="1600" dirty="0">
                 <a:latin typeface="Courier New" panose="02070309020205020404" pitchFamily="49" charset="0"/>
                 <a:cs typeface="Courier New" panose="02070309020205020404" pitchFamily="49" charset="0"/>
               </a:rPr>
-              <a:t>(password)) </a:t>
+              <a:t>");</a:t>
             </a:r>
           </a:p>
           <a:p>
@@ -11032,64 +10738,7 @@
               <a:buNone/>
             </a:pPr>
             <a:r>
-              <a:rPr lang="en-GB" sz="1400" dirty="0">
-                <a:latin typeface="Courier New" panose="02070309020205020404" pitchFamily="49" charset="0"/>
-                <a:cs typeface="Courier New" panose="02070309020205020404" pitchFamily="49" charset="0"/>
-              </a:rPr>
-              <a:t>	{</a:t>
-            </a:r>
-          </a:p>
-          <a:p>
-            <a:pPr marL="118872" indent="0">
-              <a:buNone/>
-            </a:pPr>
-            <a:r>
-              <a:rPr lang="en-GB" sz="1400" dirty="0">
-                <a:latin typeface="Courier New" panose="02070309020205020404" pitchFamily="49" charset="0"/>
-                <a:cs typeface="Courier New" panose="02070309020205020404" pitchFamily="49" charset="0"/>
-              </a:rPr>
-              <a:t>	    return false;</a:t>
-            </a:r>
-          </a:p>
-          <a:p>
-            <a:pPr marL="118872" indent="0">
-              <a:buNone/>
-            </a:pPr>
-            <a:r>
-              <a:rPr lang="en-GB" sz="1400" dirty="0">
-                <a:latin typeface="Courier New" panose="02070309020205020404" pitchFamily="49" charset="0"/>
-                <a:cs typeface="Courier New" panose="02070309020205020404" pitchFamily="49" charset="0"/>
-              </a:rPr>
-              <a:t>	}</a:t>
-            </a:r>
-          </a:p>
-          <a:p>
-            <a:pPr marL="118872" indent="0">
-              <a:buNone/>
-            </a:pPr>
-            <a:endParaRPr lang="en-GB" sz="1400" dirty="0">
-              <a:latin typeface="Courier New" panose="02070309020205020404" pitchFamily="49" charset="0"/>
-              <a:cs typeface="Courier New" panose="02070309020205020404" pitchFamily="49" charset="0"/>
-            </a:endParaRPr>
-          </a:p>
-          <a:p>
-            <a:pPr marL="118872" indent="0">
-              <a:buNone/>
-            </a:pPr>
-            <a:r>
-              <a:rPr lang="en-GB" sz="1400" dirty="0">
-                <a:latin typeface="Courier New" panose="02070309020205020404" pitchFamily="49" charset="0"/>
-                <a:cs typeface="Courier New" panose="02070309020205020404" pitchFamily="49" charset="0"/>
-              </a:rPr>
-              <a:t>	return true;</a:t>
-            </a:r>
-          </a:p>
-          <a:p>
-            <a:pPr marL="118872" indent="0">
-              <a:buNone/>
-            </a:pPr>
-            <a:r>
-              <a:rPr lang="en-GB" sz="1400" dirty="0">
+              <a:rPr lang="en-GB" sz="1600" dirty="0">
                 <a:latin typeface="Courier New" panose="02070309020205020404" pitchFamily="49" charset="0"/>
                 <a:cs typeface="Courier New" panose="02070309020205020404" pitchFamily="49" charset="0"/>
               </a:rPr>
@@ -11125,16 +10774,13 @@
     </p:spTree>
     <p:extLst>
       <p:ext uri="{BB962C8B-B14F-4D97-AF65-F5344CB8AC3E}">
-        <p14:creationId xmlns:p14="http://schemas.microsoft.com/office/powerpoint/2010/main" val="208134332"/>
+        <p14:creationId xmlns:p14="http://schemas.microsoft.com/office/powerpoint/2010/main" val="1968312242"/>
       </p:ext>
     </p:extLst>
   </p:cSld>
   <p:clrMapOvr>
     <a:masterClrMapping/>
   </p:clrMapOvr>
-  <p:transition spd="med">
-    <p:fade/>
-  </p:transition>
 </p:sld>
 </file>
 
@@ -11157,7 +10803,7 @@
       </p:grpSpPr>
       <p:sp>
         <p:nvSpPr>
-          <p:cNvPr id="5" name="Title 4"/>
+          <p:cNvPr id="2" name="Title 1"/>
           <p:cNvSpPr>
             <a:spLocks noGrp="1"/>
           </p:cNvSpPr>
@@ -11172,34 +10818,398 @@
           <a:p>
             <a:r>
               <a:rPr lang="en-GB" dirty="0"/>
-              <a:t>Infrastructure Pub/Sub</a:t>
-            </a:r>
-            <a:endParaRPr lang="en-US" dirty="0"/>
-          </a:p>
-        </p:txBody>
-      </p:sp>
-      <p:sp>
-        <p:nvSpPr>
-          <p:cNvPr id="6" name="Text Placeholder 5"/>
-          <p:cNvSpPr>
-            <a:spLocks noGrp="1"/>
-          </p:cNvSpPr>
-          <p:nvPr>
-            <p:ph type="body" idx="1"/>
-          </p:nvPr>
-        </p:nvSpPr>
-        <p:spPr/>
-        <p:txBody>
-          <a:bodyPr/>
-          <a:lstStyle/>
-          <a:p>
-            <a:endParaRPr lang="en-US"/>
-          </a:p>
-        </p:txBody>
-      </p:sp>
-      <p:sp>
-        <p:nvSpPr>
-          <p:cNvPr id="4" name="Slide Number Placeholder 3"/>
+              <a:t>Domain</a:t>
+            </a:r>
+          </a:p>
+        </p:txBody>
+      </p:sp>
+      <p:sp>
+        <p:nvSpPr>
+          <p:cNvPr id="3" name="Content Placeholder 2"/>
+          <p:cNvSpPr>
+            <a:spLocks noGrp="1"/>
+          </p:cNvSpPr>
+          <p:nvPr>
+            <p:ph idx="1"/>
+          </p:nvPr>
+        </p:nvSpPr>
+        <p:spPr/>
+        <p:style>
+          <a:lnRef idx="1">
+            <a:schemeClr val="accent2"/>
+          </a:lnRef>
+          <a:fillRef idx="2">
+            <a:schemeClr val="accent2"/>
+          </a:fillRef>
+          <a:effectRef idx="1">
+            <a:schemeClr val="accent2"/>
+          </a:effectRef>
+          <a:fontRef idx="minor">
+            <a:schemeClr val="dk1"/>
+          </a:fontRef>
+        </p:style>
+        <p:txBody>
+          <a:bodyPr>
+            <a:noAutofit/>
+          </a:bodyPr>
+          <a:lstStyle/>
+          <a:p>
+            <a:pPr marL="118872" indent="0">
+              <a:buNone/>
+            </a:pPr>
+            <a:r>
+              <a:rPr lang="en-GB" sz="1400" dirty="0">
+                <a:latin typeface="Courier New" panose="02070309020205020404" pitchFamily="49" charset="0"/>
+                <a:cs typeface="Courier New" panose="02070309020205020404" pitchFamily="49" charset="0"/>
+              </a:rPr>
+              <a:t>public class Password {</a:t>
+            </a:r>
+          </a:p>
+          <a:p>
+            <a:pPr marL="118872" indent="0">
+              <a:buNone/>
+            </a:pPr>
+            <a:endParaRPr lang="en-GB" sz="1400" dirty="0">
+              <a:latin typeface="Courier New" panose="02070309020205020404" pitchFamily="49" charset="0"/>
+              <a:cs typeface="Courier New" panose="02070309020205020404" pitchFamily="49" charset="0"/>
+            </a:endParaRPr>
+          </a:p>
+          <a:p>
+            <a:pPr marL="118872" indent="0">
+              <a:buNone/>
+            </a:pPr>
+            <a:r>
+              <a:rPr lang="en-GB" sz="1400" dirty="0">
+                <a:latin typeface="Courier New" panose="02070309020205020404" pitchFamily="49" charset="0"/>
+                <a:cs typeface="Courier New" panose="02070309020205020404" pitchFamily="49" charset="0"/>
+              </a:rPr>
+              <a:t>…</a:t>
+            </a:r>
+          </a:p>
+          <a:p>
+            <a:pPr marL="118872" indent="0">
+              <a:buNone/>
+            </a:pPr>
+            <a:endParaRPr lang="en-GB" sz="1400" dirty="0">
+              <a:latin typeface="Courier New" panose="02070309020205020404" pitchFamily="49" charset="0"/>
+              <a:cs typeface="Courier New" panose="02070309020205020404" pitchFamily="49" charset="0"/>
+            </a:endParaRPr>
+          </a:p>
+          <a:p>
+            <a:pPr marL="118872" indent="0">
+              <a:buNone/>
+            </a:pPr>
+            <a:r>
+              <a:rPr lang="en-GB" sz="1400" dirty="0">
+                <a:latin typeface="Courier New" panose="02070309020205020404" pitchFamily="49" charset="0"/>
+                <a:cs typeface="Courier New" panose="02070309020205020404" pitchFamily="49" charset="0"/>
+              </a:rPr>
+              <a:t>public Password(String password) {</a:t>
+            </a:r>
+          </a:p>
+          <a:p>
+            <a:pPr marL="118872" indent="0">
+              <a:buNone/>
+            </a:pPr>
+            <a:r>
+              <a:rPr lang="en-GB" sz="1400" dirty="0">
+                <a:latin typeface="Courier New" panose="02070309020205020404" pitchFamily="49" charset="0"/>
+                <a:cs typeface="Courier New" panose="02070309020205020404" pitchFamily="49" charset="0"/>
+              </a:rPr>
+              <a:t>	if (!</a:t>
+            </a:r>
+            <a:r>
+              <a:rPr lang="en-GB" sz="1400" dirty="0" err="1">
+                <a:latin typeface="Courier New" panose="02070309020205020404" pitchFamily="49" charset="0"/>
+                <a:cs typeface="Courier New" panose="02070309020205020404" pitchFamily="49" charset="0"/>
+              </a:rPr>
+              <a:t>meetsMinimumRequirements</a:t>
+            </a:r>
+            <a:r>
+              <a:rPr lang="en-GB" sz="1400" dirty="0">
+                <a:latin typeface="Courier New" panose="02070309020205020404" pitchFamily="49" charset="0"/>
+                <a:cs typeface="Courier New" panose="02070309020205020404" pitchFamily="49" charset="0"/>
+              </a:rPr>
+              <a:t>(password)) {</a:t>
+            </a:r>
+          </a:p>
+          <a:p>
+            <a:pPr marL="118872" indent="0">
+              <a:buNone/>
+            </a:pPr>
+            <a:r>
+              <a:rPr lang="en-GB" sz="1400" dirty="0">
+                <a:latin typeface="Courier New" panose="02070309020205020404" pitchFamily="49" charset="0"/>
+                <a:cs typeface="Courier New" panose="02070309020205020404" pitchFamily="49" charset="0"/>
+              </a:rPr>
+              <a:t>	    throw new </a:t>
+            </a:r>
+            <a:r>
+              <a:rPr lang="en-GB" sz="1400" dirty="0" err="1">
+                <a:latin typeface="Courier New" panose="02070309020205020404" pitchFamily="49" charset="0"/>
+                <a:cs typeface="Courier New" panose="02070309020205020404" pitchFamily="49" charset="0"/>
+              </a:rPr>
+              <a:t>IllegalStateException</a:t>
+            </a:r>
+            <a:r>
+              <a:rPr lang="en-GB" sz="1400" dirty="0">
+                <a:latin typeface="Courier New" panose="02070309020205020404" pitchFamily="49" charset="0"/>
+                <a:cs typeface="Courier New" panose="02070309020205020404" pitchFamily="49" charset="0"/>
+              </a:rPr>
+              <a:t>();</a:t>
+            </a:r>
+          </a:p>
+          <a:p>
+            <a:pPr marL="118872" indent="0">
+              <a:buNone/>
+            </a:pPr>
+            <a:r>
+              <a:rPr lang="en-GB" sz="1400" dirty="0">
+                <a:latin typeface="Courier New" panose="02070309020205020404" pitchFamily="49" charset="0"/>
+                <a:cs typeface="Courier New" panose="02070309020205020404" pitchFamily="49" charset="0"/>
+              </a:rPr>
+              <a:t>	}</a:t>
+            </a:r>
+          </a:p>
+          <a:p>
+            <a:pPr marL="118872" indent="0">
+              <a:buNone/>
+            </a:pPr>
+            <a:r>
+              <a:rPr lang="en-GB" sz="1400" dirty="0">
+                <a:latin typeface="Courier New" panose="02070309020205020404" pitchFamily="49" charset="0"/>
+                <a:cs typeface="Courier New" panose="02070309020205020404" pitchFamily="49" charset="0"/>
+              </a:rPr>
+              <a:t>	</a:t>
+            </a:r>
+            <a:r>
+              <a:rPr lang="en-GB" sz="1400" dirty="0" err="1">
+                <a:latin typeface="Courier New" panose="02070309020205020404" pitchFamily="49" charset="0"/>
+                <a:cs typeface="Courier New" panose="02070309020205020404" pitchFamily="49" charset="0"/>
+              </a:rPr>
+              <a:t>thePassword</a:t>
+            </a:r>
+            <a:r>
+              <a:rPr lang="en-GB" sz="1400" dirty="0">
+                <a:latin typeface="Courier New" panose="02070309020205020404" pitchFamily="49" charset="0"/>
+                <a:cs typeface="Courier New" panose="02070309020205020404" pitchFamily="49" charset="0"/>
+              </a:rPr>
+              <a:t> = password;</a:t>
+            </a:r>
+          </a:p>
+          <a:p>
+            <a:pPr marL="118872" indent="0">
+              <a:buNone/>
+            </a:pPr>
+            <a:r>
+              <a:rPr lang="en-GB" sz="1400" dirty="0">
+                <a:latin typeface="Courier New" panose="02070309020205020404" pitchFamily="49" charset="0"/>
+                <a:cs typeface="Courier New" panose="02070309020205020404" pitchFamily="49" charset="0"/>
+              </a:rPr>
+              <a:t>}</a:t>
+            </a:r>
+          </a:p>
+          <a:p>
+            <a:pPr marL="118872" indent="0">
+              <a:buNone/>
+            </a:pPr>
+            <a:endParaRPr lang="en-GB" sz="1400" dirty="0">
+              <a:latin typeface="Courier New" panose="02070309020205020404" pitchFamily="49" charset="0"/>
+              <a:cs typeface="Courier New" panose="02070309020205020404" pitchFamily="49" charset="0"/>
+            </a:endParaRPr>
+          </a:p>
+          <a:p>
+            <a:pPr marL="118872" indent="0">
+              <a:buNone/>
+            </a:pPr>
+            <a:r>
+              <a:rPr lang="en-GB" sz="1400" dirty="0">
+                <a:latin typeface="Courier New" panose="02070309020205020404" pitchFamily="49" charset="0"/>
+                <a:cs typeface="Courier New" panose="02070309020205020404" pitchFamily="49" charset="0"/>
+              </a:rPr>
+              <a:t>private </a:t>
+            </a:r>
+            <a:r>
+              <a:rPr lang="en-GB" sz="1400" dirty="0" err="1">
+                <a:latin typeface="Courier New" panose="02070309020205020404" pitchFamily="49" charset="0"/>
+                <a:cs typeface="Courier New" panose="02070309020205020404" pitchFamily="49" charset="0"/>
+              </a:rPr>
+              <a:t>boolean</a:t>
+            </a:r>
+            <a:r>
+              <a:rPr lang="en-GB" sz="1400" dirty="0">
+                <a:latin typeface="Courier New" panose="02070309020205020404" pitchFamily="49" charset="0"/>
+                <a:cs typeface="Courier New" panose="02070309020205020404" pitchFamily="49" charset="0"/>
+              </a:rPr>
+              <a:t> </a:t>
+            </a:r>
+            <a:r>
+              <a:rPr lang="en-GB" sz="1400" dirty="0" err="1">
+                <a:latin typeface="Courier New" panose="02070309020205020404" pitchFamily="49" charset="0"/>
+                <a:cs typeface="Courier New" panose="02070309020205020404" pitchFamily="49" charset="0"/>
+              </a:rPr>
+              <a:t>meetsMinimumRequirements</a:t>
+            </a:r>
+            <a:r>
+              <a:rPr lang="en-GB" sz="1400" dirty="0">
+                <a:latin typeface="Courier New" panose="02070309020205020404" pitchFamily="49" charset="0"/>
+                <a:cs typeface="Courier New" panose="02070309020205020404" pitchFamily="49" charset="0"/>
+              </a:rPr>
+              <a:t>(String password) {</a:t>
+            </a:r>
+          </a:p>
+          <a:p>
+            <a:pPr marL="118872" indent="0">
+              <a:buNone/>
+            </a:pPr>
+            <a:r>
+              <a:rPr lang="en-GB" sz="1400" dirty="0">
+                <a:latin typeface="Courier New" panose="02070309020205020404" pitchFamily="49" charset="0"/>
+                <a:cs typeface="Courier New" panose="02070309020205020404" pitchFamily="49" charset="0"/>
+              </a:rPr>
+              <a:t>	if (</a:t>
+            </a:r>
+            <a:r>
+              <a:rPr lang="en-GB" sz="1400" dirty="0" err="1">
+                <a:latin typeface="Courier New" panose="02070309020205020404" pitchFamily="49" charset="0"/>
+                <a:cs typeface="Courier New" panose="02070309020205020404" pitchFamily="49" charset="0"/>
+              </a:rPr>
+              <a:t>Strings.isNullOrEmpty</a:t>
+            </a:r>
+            <a:r>
+              <a:rPr lang="en-GB" sz="1400" dirty="0">
+                <a:latin typeface="Courier New" panose="02070309020205020404" pitchFamily="49" charset="0"/>
+                <a:cs typeface="Courier New" panose="02070309020205020404" pitchFamily="49" charset="0"/>
+              </a:rPr>
+              <a:t>(password)</a:t>
+            </a:r>
+          </a:p>
+          <a:p>
+            <a:pPr marL="118872" indent="0">
+              <a:buNone/>
+            </a:pPr>
+            <a:r>
+              <a:rPr lang="en-GB" sz="1400" dirty="0">
+                <a:latin typeface="Courier New" panose="02070309020205020404" pitchFamily="49" charset="0"/>
+                <a:cs typeface="Courier New" panose="02070309020205020404" pitchFamily="49" charset="0"/>
+              </a:rPr>
+              <a:t>	|| </a:t>
+            </a:r>
+            <a:r>
+              <a:rPr lang="en-GB" sz="1400" dirty="0" err="1">
+                <a:latin typeface="Courier New" panose="02070309020205020404" pitchFamily="49" charset="0"/>
+                <a:cs typeface="Courier New" panose="02070309020205020404" pitchFamily="49" charset="0"/>
+              </a:rPr>
+              <a:t>password.length</a:t>
+            </a:r>
+            <a:r>
+              <a:rPr lang="en-GB" sz="1400" dirty="0">
+                <a:latin typeface="Courier New" panose="02070309020205020404" pitchFamily="49" charset="0"/>
+                <a:cs typeface="Courier New" panose="02070309020205020404" pitchFamily="49" charset="0"/>
+              </a:rPr>
+              <a:t>() &lt; 6)</a:t>
+            </a:r>
+          </a:p>
+          <a:p>
+            <a:pPr marL="118872" indent="0">
+              <a:buNone/>
+            </a:pPr>
+            <a:r>
+              <a:rPr lang="en-GB" sz="1400" dirty="0">
+                <a:latin typeface="Courier New" panose="02070309020205020404" pitchFamily="49" charset="0"/>
+                <a:cs typeface="Courier New" panose="02070309020205020404" pitchFamily="49" charset="0"/>
+              </a:rPr>
+              <a:t>	|| !</a:t>
+            </a:r>
+            <a:r>
+              <a:rPr lang="en-GB" sz="1400" dirty="0" err="1">
+                <a:latin typeface="Courier New" panose="02070309020205020404" pitchFamily="49" charset="0"/>
+                <a:cs typeface="Courier New" panose="02070309020205020404" pitchFamily="49" charset="0"/>
+              </a:rPr>
+              <a:t>Strings.containsDigit</a:t>
+            </a:r>
+            <a:r>
+              <a:rPr lang="en-GB" sz="1400" dirty="0">
+                <a:latin typeface="Courier New" panose="02070309020205020404" pitchFamily="49" charset="0"/>
+                <a:cs typeface="Courier New" panose="02070309020205020404" pitchFamily="49" charset="0"/>
+              </a:rPr>
+              <a:t>(password)) </a:t>
+            </a:r>
+          </a:p>
+          <a:p>
+            <a:pPr marL="118872" indent="0">
+              <a:buNone/>
+            </a:pPr>
+            <a:r>
+              <a:rPr lang="en-GB" sz="1400" dirty="0">
+                <a:latin typeface="Courier New" panose="02070309020205020404" pitchFamily="49" charset="0"/>
+                <a:cs typeface="Courier New" panose="02070309020205020404" pitchFamily="49" charset="0"/>
+              </a:rPr>
+              <a:t>	{</a:t>
+            </a:r>
+          </a:p>
+          <a:p>
+            <a:pPr marL="118872" indent="0">
+              <a:buNone/>
+            </a:pPr>
+            <a:r>
+              <a:rPr lang="en-GB" sz="1400" dirty="0">
+                <a:latin typeface="Courier New" panose="02070309020205020404" pitchFamily="49" charset="0"/>
+                <a:cs typeface="Courier New" panose="02070309020205020404" pitchFamily="49" charset="0"/>
+              </a:rPr>
+              <a:t>	    return false;</a:t>
+            </a:r>
+          </a:p>
+          <a:p>
+            <a:pPr marL="118872" indent="0">
+              <a:buNone/>
+            </a:pPr>
+            <a:r>
+              <a:rPr lang="en-GB" sz="1400" dirty="0">
+                <a:latin typeface="Courier New" panose="02070309020205020404" pitchFamily="49" charset="0"/>
+                <a:cs typeface="Courier New" panose="02070309020205020404" pitchFamily="49" charset="0"/>
+              </a:rPr>
+              <a:t>	}</a:t>
+            </a:r>
+          </a:p>
+          <a:p>
+            <a:pPr marL="118872" indent="0">
+              <a:buNone/>
+            </a:pPr>
+            <a:endParaRPr lang="en-GB" sz="1400" dirty="0">
+              <a:latin typeface="Courier New" panose="02070309020205020404" pitchFamily="49" charset="0"/>
+              <a:cs typeface="Courier New" panose="02070309020205020404" pitchFamily="49" charset="0"/>
+            </a:endParaRPr>
+          </a:p>
+          <a:p>
+            <a:pPr marL="118872" indent="0">
+              <a:buNone/>
+            </a:pPr>
+            <a:r>
+              <a:rPr lang="en-GB" sz="1400" dirty="0">
+                <a:latin typeface="Courier New" panose="02070309020205020404" pitchFamily="49" charset="0"/>
+                <a:cs typeface="Courier New" panose="02070309020205020404" pitchFamily="49" charset="0"/>
+              </a:rPr>
+              <a:t>	return true;</a:t>
+            </a:r>
+          </a:p>
+          <a:p>
+            <a:pPr marL="118872" indent="0">
+              <a:buNone/>
+            </a:pPr>
+            <a:r>
+              <a:rPr lang="en-GB" sz="1400" dirty="0">
+                <a:latin typeface="Courier New" panose="02070309020205020404" pitchFamily="49" charset="0"/>
+                <a:cs typeface="Courier New" panose="02070309020205020404" pitchFamily="49" charset="0"/>
+              </a:rPr>
+              <a:t>}</a:t>
+            </a:r>
+          </a:p>
+        </p:txBody>
+      </p:sp>
+      <p:sp>
+        <p:nvSpPr>
+          <p:cNvPr id="5" name="Slide Number Placeholder 4"/>
           <p:cNvSpPr>
             <a:spLocks noGrp="1"/>
           </p:cNvSpPr>
@@ -11224,13 +11234,16 @@
     </p:spTree>
     <p:extLst>
       <p:ext uri="{BB962C8B-B14F-4D97-AF65-F5344CB8AC3E}">
-        <p14:creationId xmlns:p14="http://schemas.microsoft.com/office/powerpoint/2010/main" val="477722368"/>
+        <p14:creationId xmlns:p14="http://schemas.microsoft.com/office/powerpoint/2010/main" val="208134332"/>
       </p:ext>
     </p:extLst>
   </p:cSld>
   <p:clrMapOvr>
     <a:masterClrMapping/>
   </p:clrMapOvr>
+  <p:transition spd="med">
+    <p:fade/>
+  </p:transition>
 </p:sld>
 </file>
 
@@ -11266,18 +11279,22 @@
           <a:bodyPr/>
           <a:lstStyle/>
           <a:p>
-            <a:endParaRPr lang="en-US"/>
-          </a:p>
-        </p:txBody>
-      </p:sp>
-      <p:sp>
-        <p:nvSpPr>
-          <p:cNvPr id="6" name="Content Placeholder 5"/>
-          <p:cNvSpPr>
-            <a:spLocks noGrp="1"/>
-          </p:cNvSpPr>
-          <p:nvPr>
-            <p:ph idx="1"/>
+            <a:r>
+              <a:rPr lang="en-GB" dirty="0"/>
+              <a:t>Infrastructure Pub/Sub</a:t>
+            </a:r>
+            <a:endParaRPr lang="en-US" dirty="0"/>
+          </a:p>
+        </p:txBody>
+      </p:sp>
+      <p:sp>
+        <p:nvSpPr>
+          <p:cNvPr id="6" name="Text Placeholder 5"/>
+          <p:cNvSpPr>
+            <a:spLocks noGrp="1"/>
+          </p:cNvSpPr>
+          <p:nvPr>
+            <p:ph type="body" idx="1"/>
           </p:nvPr>
         </p:nvSpPr>
         <p:spPr/>
@@ -11316,7 +11333,7 @@
     </p:spTree>
     <p:extLst>
       <p:ext uri="{BB962C8B-B14F-4D97-AF65-F5344CB8AC3E}">
-        <p14:creationId xmlns:p14="http://schemas.microsoft.com/office/powerpoint/2010/main" val="709132927"/>
+        <p14:creationId xmlns:p14="http://schemas.microsoft.com/office/powerpoint/2010/main" val="477722368"/>
       </p:ext>
     </p:extLst>
   </p:cSld>
@@ -11345,7 +11362,7 @@
       </p:grpSpPr>
       <p:sp>
         <p:nvSpPr>
-          <p:cNvPr id="2" name="Title 1"/>
+          <p:cNvPr id="5" name="Title 4"/>
           <p:cNvSpPr>
             <a:spLocks noGrp="1"/>
           </p:cNvSpPr>
@@ -11358,40 +11375,29 @@
           <a:bodyPr/>
           <a:lstStyle/>
           <a:p>
-            <a:r>
-              <a:rPr lang="en-GB" dirty="0"/>
-              <a:t>Abstract service</a:t>
-            </a:r>
-            <a:endParaRPr lang="en-US" dirty="0"/>
-          </a:p>
-        </p:txBody>
-      </p:sp>
-      <p:pic>
-        <p:nvPicPr>
-          <p:cNvPr id="5" name="Content Placeholder 4"/>
-          <p:cNvPicPr>
-            <a:picLocks noGrp="1" noChangeAspect="1"/>
-          </p:cNvPicPr>
+            <a:endParaRPr lang="en-US"/>
+          </a:p>
+        </p:txBody>
+      </p:sp>
+      <p:sp>
+        <p:nvSpPr>
+          <p:cNvPr id="6" name="Content Placeholder 5"/>
+          <p:cNvSpPr>
+            <a:spLocks noGrp="1"/>
+          </p:cNvSpPr>
           <p:nvPr>
             <p:ph idx="1"/>
           </p:nvPr>
-        </p:nvPicPr>
-        <p:blipFill>
-          <a:blip r:embed="rId2"/>
-          <a:stretch>
-            <a:fillRect/>
-          </a:stretch>
-        </p:blipFill>
-        <p:spPr>
-          <a:xfrm>
-            <a:off x="1674829" y="1774825"/>
-            <a:ext cx="5794342" cy="4625975"/>
-          </a:xfrm>
-          <a:prstGeom prst="rect">
-            <a:avLst/>
-          </a:prstGeom>
-        </p:spPr>
-      </p:pic>
+        </p:nvSpPr>
+        <p:spPr/>
+        <p:txBody>
+          <a:bodyPr/>
+          <a:lstStyle/>
+          <a:p>
+            <a:endParaRPr lang="en-US"/>
+          </a:p>
+        </p:txBody>
+      </p:sp>
       <p:sp>
         <p:nvSpPr>
           <p:cNvPr id="4" name="Slide Number Placeholder 3"/>
@@ -11419,7 +11425,7 @@
     </p:spTree>
     <p:extLst>
       <p:ext uri="{BB962C8B-B14F-4D97-AF65-F5344CB8AC3E}">
-        <p14:creationId xmlns:p14="http://schemas.microsoft.com/office/powerpoint/2010/main" val="1783994502"/>
+        <p14:creationId xmlns:p14="http://schemas.microsoft.com/office/powerpoint/2010/main" val="709132927"/>
       </p:ext>
     </p:extLst>
   </p:cSld>
@@ -11463,7 +11469,7 @@
           <a:p>
             <a:r>
               <a:rPr lang="en-GB" dirty="0"/>
-              <a:t>In Process</a:t>
+              <a:t>Abstract service</a:t>
             </a:r>
             <a:endParaRPr lang="en-US" dirty="0"/>
           </a:p>
@@ -11487,8 +11493,8 @@
         </p:blipFill>
         <p:spPr>
           <a:xfrm>
-            <a:off x="1123950" y="1958975"/>
-            <a:ext cx="6896100" cy="4257675"/>
+            <a:off x="1674829" y="1774825"/>
+            <a:ext cx="5794342" cy="4625975"/>
           </a:xfrm>
           <a:prstGeom prst="rect">
             <a:avLst/>
@@ -11522,7 +11528,7 @@
     </p:spTree>
     <p:extLst>
       <p:ext uri="{BB962C8B-B14F-4D97-AF65-F5344CB8AC3E}">
-        <p14:creationId xmlns:p14="http://schemas.microsoft.com/office/powerpoint/2010/main" val="3197191611"/>
+        <p14:creationId xmlns:p14="http://schemas.microsoft.com/office/powerpoint/2010/main" val="1783994502"/>
       </p:ext>
     </p:extLst>
   </p:cSld>
@@ -11572,45 +11578,32 @@
           </a:p>
         </p:txBody>
       </p:sp>
-      <p:sp>
-        <p:nvSpPr>
-          <p:cNvPr id="3" name="Content Placeholder 2"/>
-          <p:cNvSpPr>
-            <a:spLocks noGrp="1"/>
-          </p:cNvSpPr>
+      <p:pic>
+        <p:nvPicPr>
+          <p:cNvPr id="5" name="Content Placeholder 4"/>
+          <p:cNvPicPr>
+            <a:picLocks noGrp="1" noChangeAspect="1"/>
+          </p:cNvPicPr>
           <p:nvPr>
             <p:ph idx="1"/>
           </p:nvPr>
-        </p:nvSpPr>
-        <p:spPr/>
-        <p:txBody>
-          <a:bodyPr/>
-          <a:lstStyle/>
-          <a:p>
-            <a:r>
-              <a:rPr lang="en-GB" dirty="0"/>
-              <a:t>Client code uses </a:t>
-            </a:r>
-            <a:r>
-              <a:rPr lang="en-GB" dirty="0" err="1"/>
-              <a:t>InProcessEventPublisher</a:t>
-            </a:r>
-            <a:r>
-              <a:rPr lang="en-GB" dirty="0"/>
-              <a:t> or </a:t>
-            </a:r>
-            <a:r>
-              <a:rPr lang="en-GB" dirty="0" err="1"/>
-              <a:t>InProcessEventDispatcher</a:t>
-            </a:r>
-            <a:r>
-              <a:rPr lang="en-GB" dirty="0"/>
-              <a:t> via static instance() method or via dependency injection </a:t>
-            </a:r>
-            <a:endParaRPr lang="en-US" dirty="0"/>
-          </a:p>
-        </p:txBody>
-      </p:sp>
+        </p:nvPicPr>
+        <p:blipFill>
+          <a:blip r:embed="rId2"/>
+          <a:stretch>
+            <a:fillRect/>
+          </a:stretch>
+        </p:blipFill>
+        <p:spPr>
+          <a:xfrm>
+            <a:off x="1123950" y="1958975"/>
+            <a:ext cx="6896100" cy="4257675"/>
+          </a:xfrm>
+          <a:prstGeom prst="rect">
+            <a:avLst/>
+          </a:prstGeom>
+        </p:spPr>
+      </p:pic>
       <p:sp>
         <p:nvSpPr>
           <p:cNvPr id="4" name="Slide Number Placeholder 3"/>
@@ -11638,7 +11631,7 @@
     </p:spTree>
     <p:extLst>
       <p:ext uri="{BB962C8B-B14F-4D97-AF65-F5344CB8AC3E}">
-        <p14:creationId xmlns:p14="http://schemas.microsoft.com/office/powerpoint/2010/main" val="1984569913"/>
+        <p14:creationId xmlns:p14="http://schemas.microsoft.com/office/powerpoint/2010/main" val="3197191611"/>
       </p:ext>
     </p:extLst>
   </p:cSld>
@@ -11763,6 +11756,68 @@
       </p:grpSpPr>
       <p:sp>
         <p:nvSpPr>
+          <p:cNvPr id="2" name="Title 1"/>
+          <p:cNvSpPr>
+            <a:spLocks noGrp="1"/>
+          </p:cNvSpPr>
+          <p:nvPr>
+            <p:ph type="title"/>
+          </p:nvPr>
+        </p:nvSpPr>
+        <p:spPr/>
+        <p:txBody>
+          <a:bodyPr/>
+          <a:lstStyle/>
+          <a:p>
+            <a:r>
+              <a:rPr lang="en-GB" dirty="0"/>
+              <a:t>In Process</a:t>
+            </a:r>
+            <a:endParaRPr lang="en-US" dirty="0"/>
+          </a:p>
+        </p:txBody>
+      </p:sp>
+      <p:sp>
+        <p:nvSpPr>
+          <p:cNvPr id="3" name="Content Placeholder 2"/>
+          <p:cNvSpPr>
+            <a:spLocks noGrp="1"/>
+          </p:cNvSpPr>
+          <p:nvPr>
+            <p:ph idx="1"/>
+          </p:nvPr>
+        </p:nvSpPr>
+        <p:spPr/>
+        <p:txBody>
+          <a:bodyPr/>
+          <a:lstStyle/>
+          <a:p>
+            <a:r>
+              <a:rPr lang="en-GB" dirty="0"/>
+              <a:t>Client code uses </a:t>
+            </a:r>
+            <a:r>
+              <a:rPr lang="en-GB" dirty="0" err="1"/>
+              <a:t>InProcessEventPublisher</a:t>
+            </a:r>
+            <a:r>
+              <a:rPr lang="en-GB" dirty="0"/>
+              <a:t> or </a:t>
+            </a:r>
+            <a:r>
+              <a:rPr lang="en-GB" dirty="0" err="1"/>
+              <a:t>InProcessEventDispatcher</a:t>
+            </a:r>
+            <a:r>
+              <a:rPr lang="en-GB" dirty="0"/>
+              <a:t> via static instance() method or via dependency injection </a:t>
+            </a:r>
+            <a:endParaRPr lang="en-US" dirty="0"/>
+          </a:p>
+        </p:txBody>
+      </p:sp>
+      <p:sp>
+        <p:nvSpPr>
           <p:cNvPr id="4" name="Slide Number Placeholder 3"/>
           <p:cNvSpPr>
             <a:spLocks noGrp="1"/>
@@ -11785,90 +11840,10 @@
           </a:p>
         </p:txBody>
       </p:sp>
-      <p:pic>
-        <p:nvPicPr>
-          <p:cNvPr id="5" name="Content Placeholder 4"/>
-          <p:cNvPicPr>
-            <a:picLocks noGrp="1" noChangeAspect="1"/>
-          </p:cNvPicPr>
-          <p:nvPr>
-            <p:ph idx="4294967295"/>
-          </p:nvPr>
-        </p:nvPicPr>
-        <p:blipFill>
-          <a:blip r:embed="rId2"/>
-          <a:stretch>
-            <a:fillRect/>
-          </a:stretch>
-        </p:blipFill>
-        <p:spPr>
-          <a:xfrm>
-            <a:off x="571500" y="-41275"/>
-            <a:ext cx="8572500" cy="6899275"/>
-          </a:xfrm>
-          <a:prstGeom prst="rect">
-            <a:avLst/>
-          </a:prstGeom>
-        </p:spPr>
-      </p:pic>
-      <p:sp>
-        <p:nvSpPr>
-          <p:cNvPr id="2" name="Title 1"/>
-          <p:cNvSpPr>
-            <a:spLocks noGrp="1"/>
-          </p:cNvSpPr>
-          <p:nvPr>
-            <p:ph type="title" idx="4294967295"/>
-          </p:nvPr>
-        </p:nvSpPr>
-        <p:spPr>
-          <a:xfrm>
-            <a:off x="0" y="8620"/>
-            <a:ext cx="8229600" cy="1252538"/>
-          </a:xfrm>
-        </p:spPr>
-        <p:txBody>
-          <a:bodyPr/>
-          <a:lstStyle/>
-          <a:p>
-            <a:r>
-              <a:rPr lang="en-GB" dirty="0">
-                <a:ln w="22225">
-                  <a:solidFill>
-                    <a:schemeClr val="accent2"/>
-                  </a:solidFill>
-                  <a:prstDash val="solid"/>
-                </a:ln>
-                <a:solidFill>
-                  <a:schemeClr val="accent2">
-                    <a:lumMod val="40000"/>
-                    <a:lumOff val="60000"/>
-                  </a:schemeClr>
-                </a:solidFill>
-              </a:rPr>
-              <a:t>Simple Persistent</a:t>
-            </a:r>
-            <a:endParaRPr lang="en-US" dirty="0">
-              <a:ln w="22225">
-                <a:solidFill>
-                  <a:schemeClr val="accent2"/>
-                </a:solidFill>
-                <a:prstDash val="solid"/>
-              </a:ln>
-              <a:solidFill>
-                <a:schemeClr val="accent2">
-                  <a:lumMod val="40000"/>
-                  <a:lumOff val="60000"/>
-                </a:schemeClr>
-              </a:solidFill>
-            </a:endParaRPr>
-          </a:p>
-        </p:txBody>
-      </p:sp>
     </p:spTree>
     <p:extLst>
       <p:ext uri="{BB962C8B-B14F-4D97-AF65-F5344CB8AC3E}">
-        <p14:creationId xmlns:p14="http://schemas.microsoft.com/office/powerpoint/2010/main" val="3159413259"/>
+        <p14:creationId xmlns:p14="http://schemas.microsoft.com/office/powerpoint/2010/main" val="1984569913"/>
       </p:ext>
     </p:extLst>
   </p:cSld>
@@ -11897,60 +11872,6 @@
       </p:grpSpPr>
       <p:sp>
         <p:nvSpPr>
-          <p:cNvPr id="2" name="Title 1"/>
-          <p:cNvSpPr>
-            <a:spLocks noGrp="1"/>
-          </p:cNvSpPr>
-          <p:nvPr>
-            <p:ph type="title"/>
-          </p:nvPr>
-        </p:nvSpPr>
-        <p:spPr/>
-        <p:txBody>
-          <a:bodyPr/>
-          <a:lstStyle/>
-          <a:p>
-            <a:r>
-              <a:rPr lang="en-GB" dirty="0"/>
-              <a:t>Simple Persistent</a:t>
-            </a:r>
-            <a:endParaRPr lang="en-US" dirty="0"/>
-          </a:p>
-        </p:txBody>
-      </p:sp>
-      <p:sp>
-        <p:nvSpPr>
-          <p:cNvPr id="3" name="Content Placeholder 2"/>
-          <p:cNvSpPr>
-            <a:spLocks noGrp="1"/>
-          </p:cNvSpPr>
-          <p:nvPr>
-            <p:ph idx="1"/>
-          </p:nvPr>
-        </p:nvSpPr>
-        <p:spPr/>
-        <p:txBody>
-          <a:bodyPr/>
-          <a:lstStyle/>
-          <a:p>
-            <a:r>
-              <a:rPr lang="en-GB" dirty="0"/>
-              <a:t>Use only via dependency injection</a:t>
-            </a:r>
-          </a:p>
-          <a:p>
-            <a:r>
-              <a:rPr lang="en-GB" dirty="0"/>
-              <a:t>Domain entities must be registered in persistence.xml</a:t>
-            </a:r>
-          </a:p>
-          <a:p>
-            <a:endParaRPr lang="en-US" dirty="0"/>
-          </a:p>
-        </p:txBody>
-      </p:sp>
-      <p:sp>
-        <p:nvSpPr>
           <p:cNvPr id="4" name="Slide Number Placeholder 3"/>
           <p:cNvSpPr>
             <a:spLocks noGrp="1"/>
@@ -11973,10 +11894,90 @@
           </a:p>
         </p:txBody>
       </p:sp>
+      <p:pic>
+        <p:nvPicPr>
+          <p:cNvPr id="5" name="Content Placeholder 4"/>
+          <p:cNvPicPr>
+            <a:picLocks noGrp="1" noChangeAspect="1"/>
+          </p:cNvPicPr>
+          <p:nvPr>
+            <p:ph idx="4294967295"/>
+          </p:nvPr>
+        </p:nvPicPr>
+        <p:blipFill>
+          <a:blip r:embed="rId2"/>
+          <a:stretch>
+            <a:fillRect/>
+          </a:stretch>
+        </p:blipFill>
+        <p:spPr>
+          <a:xfrm>
+            <a:off x="571500" y="-41275"/>
+            <a:ext cx="8572500" cy="6899275"/>
+          </a:xfrm>
+          <a:prstGeom prst="rect">
+            <a:avLst/>
+          </a:prstGeom>
+        </p:spPr>
+      </p:pic>
+      <p:sp>
+        <p:nvSpPr>
+          <p:cNvPr id="2" name="Title 1"/>
+          <p:cNvSpPr>
+            <a:spLocks noGrp="1"/>
+          </p:cNvSpPr>
+          <p:nvPr>
+            <p:ph type="title" idx="4294967295"/>
+          </p:nvPr>
+        </p:nvSpPr>
+        <p:spPr>
+          <a:xfrm>
+            <a:off x="0" y="8620"/>
+            <a:ext cx="8229600" cy="1252538"/>
+          </a:xfrm>
+        </p:spPr>
+        <p:txBody>
+          <a:bodyPr/>
+          <a:lstStyle/>
+          <a:p>
+            <a:r>
+              <a:rPr lang="en-GB" dirty="0">
+                <a:ln w="22225">
+                  <a:solidFill>
+                    <a:schemeClr val="accent2"/>
+                  </a:solidFill>
+                  <a:prstDash val="solid"/>
+                </a:ln>
+                <a:solidFill>
+                  <a:schemeClr val="accent2">
+                    <a:lumMod val="40000"/>
+                    <a:lumOff val="60000"/>
+                  </a:schemeClr>
+                </a:solidFill>
+              </a:rPr>
+              <a:t>Simple Persistent</a:t>
+            </a:r>
+            <a:endParaRPr lang="en-US" dirty="0">
+              <a:ln w="22225">
+                <a:solidFill>
+                  <a:schemeClr val="accent2"/>
+                </a:solidFill>
+                <a:prstDash val="solid"/>
+              </a:ln>
+              <a:solidFill>
+                <a:schemeClr val="accent2">
+                  <a:lumMod val="40000"/>
+                  <a:lumOff val="60000"/>
+                </a:schemeClr>
+              </a:solidFill>
+            </a:endParaRPr>
+          </a:p>
+        </p:txBody>
+      </p:sp>
     </p:spTree>
     <p:extLst>
       <p:ext uri="{BB962C8B-B14F-4D97-AF65-F5344CB8AC3E}">
-        <p14:creationId xmlns:p14="http://schemas.microsoft.com/office/powerpoint/2010/main" val="3162552291"/>
+        <p14:creationId xmlns:p14="http://schemas.microsoft.com/office/powerpoint/2010/main" val="3159413259"/>
       </p:ext>
     </p:extLst>
   </p:cSld>
@@ -12005,7 +12006,7 @@
       </p:grpSpPr>
       <p:sp>
         <p:nvSpPr>
-          <p:cNvPr id="5" name="Title 4"/>
+          <p:cNvPr id="2" name="Title 1"/>
           <p:cNvSpPr>
             <a:spLocks noGrp="1"/>
           </p:cNvSpPr>
@@ -12018,26 +12019,42 @@
           <a:bodyPr/>
           <a:lstStyle/>
           <a:p>
-            <a:endParaRPr lang="en-US"/>
-          </a:p>
-        </p:txBody>
-      </p:sp>
-      <p:sp>
-        <p:nvSpPr>
-          <p:cNvPr id="6" name="Text Placeholder 5"/>
-          <p:cNvSpPr>
-            <a:spLocks noGrp="1"/>
-          </p:cNvSpPr>
-          <p:nvPr>
-            <p:ph type="body" idx="1"/>
-          </p:nvPr>
-        </p:nvSpPr>
-        <p:spPr/>
-        <p:txBody>
-          <a:bodyPr/>
-          <a:lstStyle/>
-          <a:p>
-            <a:endParaRPr lang="en-US"/>
+            <a:r>
+              <a:rPr lang="en-GB" dirty="0"/>
+              <a:t>Simple Persistent</a:t>
+            </a:r>
+            <a:endParaRPr lang="en-US" dirty="0"/>
+          </a:p>
+        </p:txBody>
+      </p:sp>
+      <p:sp>
+        <p:nvSpPr>
+          <p:cNvPr id="3" name="Content Placeholder 2"/>
+          <p:cNvSpPr>
+            <a:spLocks noGrp="1"/>
+          </p:cNvSpPr>
+          <p:nvPr>
+            <p:ph idx="1"/>
+          </p:nvPr>
+        </p:nvSpPr>
+        <p:spPr/>
+        <p:txBody>
+          <a:bodyPr/>
+          <a:lstStyle/>
+          <a:p>
+            <a:r>
+              <a:rPr lang="en-GB" dirty="0"/>
+              <a:t>Use only via dependency injection</a:t>
+            </a:r>
+          </a:p>
+          <a:p>
+            <a:r>
+              <a:rPr lang="en-GB" dirty="0"/>
+              <a:t>Domain entities must be registered in persistence.xml</a:t>
+            </a:r>
+          </a:p>
+          <a:p>
+            <a:endParaRPr lang="en-US" dirty="0"/>
           </a:p>
         </p:txBody>
       </p:sp>
@@ -12068,7 +12085,7 @@
     </p:spTree>
     <p:extLst>
       <p:ext uri="{BB962C8B-B14F-4D97-AF65-F5344CB8AC3E}">
-        <p14:creationId xmlns:p14="http://schemas.microsoft.com/office/powerpoint/2010/main" val="3437654254"/>
+        <p14:creationId xmlns:p14="http://schemas.microsoft.com/office/powerpoint/2010/main" val="3162552291"/>
       </p:ext>
     </p:extLst>
   </p:cSld>
@@ -12097,7 +12114,7 @@
       </p:grpSpPr>
       <p:sp>
         <p:nvSpPr>
-          <p:cNvPr id="3" name="Title 2"/>
+          <p:cNvPr id="5" name="Title 4"/>
           <p:cNvSpPr>
             <a:spLocks noGrp="1"/>
           </p:cNvSpPr>
@@ -12110,99 +12127,32 @@
           <a:bodyPr/>
           <a:lstStyle/>
           <a:p>
-            <a:r>
-              <a:rPr lang="en-GB" dirty="0"/>
-              <a:t>Build</a:t>
-            </a:r>
-            <a:endParaRPr lang="en-US" dirty="0"/>
-          </a:p>
-        </p:txBody>
-      </p:sp>
-      <p:sp>
-        <p:nvSpPr>
-          <p:cNvPr id="4" name="Content Placeholder 3"/>
-          <p:cNvSpPr>
-            <a:spLocks noGrp="1"/>
-          </p:cNvSpPr>
-          <p:nvPr>
-            <p:ph idx="1"/>
-          </p:nvPr>
-        </p:nvSpPr>
-        <p:spPr/>
-        <p:txBody>
-          <a:bodyPr/>
-          <a:lstStyle/>
-          <a:p>
-            <a:r>
-              <a:rPr lang="en-GB" dirty="0"/>
-              <a:t>Maven</a:t>
-            </a:r>
-          </a:p>
-          <a:p>
-            <a:pPr lvl="1"/>
-            <a:r>
-              <a:rPr lang="en-GB" dirty="0"/>
-              <a:t>Dependency manager</a:t>
-            </a:r>
-          </a:p>
-          <a:p>
-            <a:pPr lvl="1"/>
-            <a:r>
-              <a:rPr lang="en-GB" dirty="0" err="1"/>
-              <a:t>Artifact</a:t>
-            </a:r>
-            <a:r>
-              <a:rPr lang="en-GB" dirty="0"/>
-              <a:t> (jar) repository </a:t>
-            </a:r>
-          </a:p>
-          <a:p>
-            <a:pPr lvl="1"/>
-            <a:r>
-              <a:rPr lang="en-GB" dirty="0"/>
-              <a:t>Build automation</a:t>
-            </a:r>
-          </a:p>
-          <a:p>
-            <a:pPr lvl="1"/>
-            <a:r>
-              <a:rPr lang="en-GB" dirty="0"/>
-              <a:t>Other tasks, e.g., deploy, run</a:t>
-            </a:r>
-          </a:p>
-          <a:p>
-            <a:r>
-              <a:rPr lang="en-GB" dirty="0"/>
-              <a:t>Works for Eclipse, </a:t>
-            </a:r>
-            <a:r>
-              <a:rPr lang="en-GB" dirty="0" err="1"/>
-              <a:t>InteliJ</a:t>
-            </a:r>
-            <a:r>
-              <a:rPr lang="en-GB" dirty="0"/>
-              <a:t>, </a:t>
-            </a:r>
-            <a:r>
-              <a:rPr lang="en-GB" dirty="0" err="1"/>
-              <a:t>Netbeans</a:t>
-            </a:r>
-            <a:endParaRPr lang="en-GB" dirty="0"/>
-          </a:p>
-          <a:p>
-            <a:r>
-              <a:rPr lang="en-GB" dirty="0"/>
-              <a:t>Pom.xml</a:t>
-            </a:r>
-          </a:p>
-          <a:p>
-            <a:endParaRPr lang="en-US" dirty="0"/>
-          </a:p>
-        </p:txBody>
-      </p:sp>
-      <p:sp>
-        <p:nvSpPr>
-          <p:cNvPr id="2" name="Slide Number Placeholder 1"/>
+            <a:endParaRPr lang="en-US"/>
+          </a:p>
+        </p:txBody>
+      </p:sp>
+      <p:sp>
+        <p:nvSpPr>
+          <p:cNvPr id="6" name="Text Placeholder 5"/>
+          <p:cNvSpPr>
+            <a:spLocks noGrp="1"/>
+          </p:cNvSpPr>
+          <p:nvPr>
+            <p:ph type="body" idx="1"/>
+          </p:nvPr>
+        </p:nvSpPr>
+        <p:spPr/>
+        <p:txBody>
+          <a:bodyPr/>
+          <a:lstStyle/>
+          <a:p>
+            <a:endParaRPr lang="en-US"/>
+          </a:p>
+        </p:txBody>
+      </p:sp>
+      <p:sp>
+        <p:nvSpPr>
+          <p:cNvPr id="4" name="Slide Number Placeholder 3"/>
           <p:cNvSpPr>
             <a:spLocks noGrp="1"/>
           </p:cNvSpPr>
@@ -12227,7 +12177,7 @@
     </p:spTree>
     <p:extLst>
       <p:ext uri="{BB962C8B-B14F-4D97-AF65-F5344CB8AC3E}">
-        <p14:creationId xmlns:p14="http://schemas.microsoft.com/office/powerpoint/2010/main" val="3878863745"/>
+        <p14:creationId xmlns:p14="http://schemas.microsoft.com/office/powerpoint/2010/main" val="3437654254"/>
       </p:ext>
     </p:extLst>
   </p:cSld>
@@ -12256,7 +12206,7 @@
       </p:grpSpPr>
       <p:sp>
         <p:nvSpPr>
-          <p:cNvPr id="2" name="Title 1"/>
+          <p:cNvPr id="3" name="Title 2"/>
           <p:cNvSpPr>
             <a:spLocks noGrp="1"/>
           </p:cNvSpPr>
@@ -12269,13 +12219,17 @@
           <a:bodyPr/>
           <a:lstStyle/>
           <a:p>
-            <a:endParaRPr lang="en-US"/>
-          </a:p>
-        </p:txBody>
-      </p:sp>
-      <p:sp>
-        <p:nvSpPr>
-          <p:cNvPr id="3" name="Content Placeholder 2"/>
+            <a:r>
+              <a:rPr lang="en-GB" dirty="0"/>
+              <a:t>Build</a:t>
+            </a:r>
+            <a:endParaRPr lang="en-US" dirty="0"/>
+          </a:p>
+        </p:txBody>
+      </p:sp>
+      <p:sp>
+        <p:nvSpPr>
+          <p:cNvPr id="4" name="Content Placeholder 3"/>
           <p:cNvSpPr>
             <a:spLocks noGrp="1"/>
           </p:cNvSpPr>
@@ -12288,13 +12242,76 @@
           <a:bodyPr/>
           <a:lstStyle/>
           <a:p>
-            <a:endParaRPr lang="en-US"/>
-          </a:p>
-        </p:txBody>
-      </p:sp>
-      <p:sp>
-        <p:nvSpPr>
-          <p:cNvPr id="4" name="Slide Number Placeholder 3"/>
+            <a:r>
+              <a:rPr lang="en-GB" dirty="0"/>
+              <a:t>Maven</a:t>
+            </a:r>
+          </a:p>
+          <a:p>
+            <a:pPr lvl="1"/>
+            <a:r>
+              <a:rPr lang="en-GB" dirty="0"/>
+              <a:t>Dependency manager</a:t>
+            </a:r>
+          </a:p>
+          <a:p>
+            <a:pPr lvl="1"/>
+            <a:r>
+              <a:rPr lang="en-GB" dirty="0" err="1"/>
+              <a:t>Artifact</a:t>
+            </a:r>
+            <a:r>
+              <a:rPr lang="en-GB" dirty="0"/>
+              <a:t> (jar) repository </a:t>
+            </a:r>
+          </a:p>
+          <a:p>
+            <a:pPr lvl="1"/>
+            <a:r>
+              <a:rPr lang="en-GB" dirty="0"/>
+              <a:t>Build automation</a:t>
+            </a:r>
+          </a:p>
+          <a:p>
+            <a:pPr lvl="1"/>
+            <a:r>
+              <a:rPr lang="en-GB" dirty="0"/>
+              <a:t>Other tasks, e.g., deploy, run</a:t>
+            </a:r>
+          </a:p>
+          <a:p>
+            <a:r>
+              <a:rPr lang="en-GB" dirty="0"/>
+              <a:t>Works for Eclipse, </a:t>
+            </a:r>
+            <a:r>
+              <a:rPr lang="en-GB" dirty="0" err="1"/>
+              <a:t>InteliJ</a:t>
+            </a:r>
+            <a:r>
+              <a:rPr lang="en-GB" dirty="0"/>
+              <a:t>, </a:t>
+            </a:r>
+            <a:r>
+              <a:rPr lang="en-GB" dirty="0" err="1"/>
+              <a:t>Netbeans</a:t>
+            </a:r>
+            <a:endParaRPr lang="en-GB" dirty="0"/>
+          </a:p>
+          <a:p>
+            <a:r>
+              <a:rPr lang="en-GB" dirty="0"/>
+              <a:t>Pom.xml</a:t>
+            </a:r>
+          </a:p>
+          <a:p>
+            <a:endParaRPr lang="en-US" dirty="0"/>
+          </a:p>
+        </p:txBody>
+      </p:sp>
+      <p:sp>
+        <p:nvSpPr>
+          <p:cNvPr id="2" name="Slide Number Placeholder 1"/>
           <p:cNvSpPr>
             <a:spLocks noGrp="1"/>
           </p:cNvSpPr>
@@ -12311,6 +12328,98 @@
               <a:rPr lang="pt-PT" smtClean="0"/>
               <a:pPr/>
               <a:t>54</a:t>
+            </a:fld>
+            <a:endParaRPr lang="pt-PT"/>
+          </a:p>
+        </p:txBody>
+      </p:sp>
+    </p:spTree>
+    <p:extLst>
+      <p:ext uri="{BB962C8B-B14F-4D97-AF65-F5344CB8AC3E}">
+        <p14:creationId xmlns:p14="http://schemas.microsoft.com/office/powerpoint/2010/main" val="3878863745"/>
+      </p:ext>
+    </p:extLst>
+  </p:cSld>
+  <p:clrMapOvr>
+    <a:masterClrMapping/>
+  </p:clrMapOvr>
+</p:sld>
+</file>
+
+<file path=ppt/slides/slide55.xml><?xml version="1.0" encoding="utf-8"?>
+<p:sld xmlns:a="http://schemas.openxmlformats.org/drawingml/2006/main" xmlns:r="http://schemas.openxmlformats.org/officeDocument/2006/relationships" xmlns:p="http://schemas.openxmlformats.org/presentationml/2006/main">
+  <p:cSld>
+    <p:spTree>
+      <p:nvGrpSpPr>
+        <p:cNvPr id="1" name=""/>
+        <p:cNvGrpSpPr/>
+        <p:nvPr/>
+      </p:nvGrpSpPr>
+      <p:grpSpPr>
+        <a:xfrm>
+          <a:off x="0" y="0"/>
+          <a:ext cx="0" cy="0"/>
+          <a:chOff x="0" y="0"/>
+          <a:chExt cx="0" cy="0"/>
+        </a:xfrm>
+      </p:grpSpPr>
+      <p:sp>
+        <p:nvSpPr>
+          <p:cNvPr id="2" name="Title 1"/>
+          <p:cNvSpPr>
+            <a:spLocks noGrp="1"/>
+          </p:cNvSpPr>
+          <p:nvPr>
+            <p:ph type="title"/>
+          </p:nvPr>
+        </p:nvSpPr>
+        <p:spPr/>
+        <p:txBody>
+          <a:bodyPr/>
+          <a:lstStyle/>
+          <a:p>
+            <a:endParaRPr lang="en-US"/>
+          </a:p>
+        </p:txBody>
+      </p:sp>
+      <p:sp>
+        <p:nvSpPr>
+          <p:cNvPr id="3" name="Content Placeholder 2"/>
+          <p:cNvSpPr>
+            <a:spLocks noGrp="1"/>
+          </p:cNvSpPr>
+          <p:nvPr>
+            <p:ph idx="1"/>
+          </p:nvPr>
+        </p:nvSpPr>
+        <p:spPr/>
+        <p:txBody>
+          <a:bodyPr/>
+          <a:lstStyle/>
+          <a:p>
+            <a:endParaRPr lang="en-US"/>
+          </a:p>
+        </p:txBody>
+      </p:sp>
+      <p:sp>
+        <p:nvSpPr>
+          <p:cNvPr id="4" name="Slide Number Placeholder 3"/>
+          <p:cNvSpPr>
+            <a:spLocks noGrp="1"/>
+          </p:cNvSpPr>
+          <p:nvPr>
+            <p:ph type="sldNum" sz="quarter" idx="12"/>
+          </p:nvPr>
+        </p:nvSpPr>
+        <p:spPr/>
+        <p:txBody>
+          <a:bodyPr/>
+          <a:lstStyle/>
+          <a:p>
+            <a:fld id="{024A9932-4E76-455F-8E1A-2CC10C89B014}" type="slidenum">
+              <a:rPr lang="pt-PT" smtClean="0"/>
+              <a:pPr/>
+              <a:t>55</a:t>
             </a:fld>
             <a:endParaRPr lang="pt-PT"/>
           </a:p>
@@ -12353,7 +12462,7 @@
 </p:sld>
 </file>
 
-<file path=ppt/slides/slide55.xml><?xml version="1.0" encoding="utf-8"?>
+<file path=ppt/slides/slide56.xml><?xml version="1.0" encoding="utf-8"?>
 <p:sld xmlns:a="http://schemas.openxmlformats.org/drawingml/2006/main" xmlns:r="http://schemas.openxmlformats.org/officeDocument/2006/relationships" xmlns:p="http://schemas.openxmlformats.org/presentationml/2006/main">
   <p:cSld>
     <p:spTree>
@@ -12429,7 +12538,7 @@
             <a:fld id="{024A9932-4E76-455F-8E1A-2CC10C89B014}" type="slidenum">
               <a:rPr lang="pt-PT" smtClean="0"/>
               <a:pPr/>
-              <a:t>55</a:t>
+              <a:t>56</a:t>
             </a:fld>
             <a:endParaRPr lang="pt-PT"/>
           </a:p>
@@ -12623,7 +12732,7 @@
           <p:cNvPr id="7" name="Picture 6">
             <a:extLst>
               <a:ext uri="{FF2B5EF4-FFF2-40B4-BE49-F238E27FC236}">
-                <a16:creationId xmlns:a16="http://schemas.microsoft.com/office/drawing/2014/main" id="{A815CBF1-F6D3-44B1-A754-F452DB2377AC}"/>
+                <a16:creationId xmlns:a16="http://schemas.microsoft.com/office/drawing/2014/main" xmlns="" id="{A815CBF1-F6D3-44B1-A754-F452DB2377AC}"/>
               </a:ext>
             </a:extLst>
           </p:cNvPr>
@@ -12792,7 +12901,7 @@
           <p:cNvPr id="2" name="Picture 1">
             <a:extLst>
               <a:ext uri="{FF2B5EF4-FFF2-40B4-BE49-F238E27FC236}">
-                <a16:creationId xmlns:a16="http://schemas.microsoft.com/office/drawing/2014/main" id="{782F783B-EC76-42E8-A7D7-BF6895623C31}"/>
+                <a16:creationId xmlns:a16="http://schemas.microsoft.com/office/drawing/2014/main" xmlns="" id="{782F783B-EC76-42E8-A7D7-BF6895623C31}"/>
               </a:ext>
             </a:extLst>
           </p:cNvPr>
@@ -12988,7 +13097,15 @@
             <a:pPr lvl="1"/>
             <a:r>
               <a:rPr lang="en-GB" dirty="0"/>
-              <a:t>Simplifies generation oh a class’ hash code</a:t>
+              <a:t>Simplifies generation </a:t>
+            </a:r>
+            <a:r>
+              <a:rPr lang="en-GB" dirty="0" smtClean="0"/>
+              <a:t>of </a:t>
+            </a:r>
+            <a:r>
+              <a:rPr lang="en-GB" dirty="0"/>
+              <a:t>a class’ hash code</a:t>
             </a:r>
           </a:p>
           <a:p>
@@ -13108,7 +13225,7 @@
         <p:spPr/>
         <p:txBody>
           <a:bodyPr>
-            <a:normAutofit fontScale="92500" lnSpcReduction="10000"/>
+            <a:normAutofit/>
           </a:bodyPr>
           <a:lstStyle/>
           <a:p>
@@ -13118,15 +13235,8 @@
             </a:r>
           </a:p>
           <a:p>
-            <a:pPr lvl="1"/>
-            <a:r>
-              <a:rPr lang="en-GB" dirty="0"/>
-              <a:t>String manipulation</a:t>
-            </a:r>
-          </a:p>
-          <a:p>
-            <a:r>
-              <a:rPr lang="en-GB" dirty="0" err="1"/>
+            <a:r>
+              <a:rPr lang="en-GB" dirty="0" err="1" smtClean="0"/>
               <a:t>StringMixin</a:t>
             </a:r>
             <a:endParaRPr lang="en-GB" dirty="0"/>
@@ -13160,26 +13270,19 @@
             <a:endParaRPr lang="en-GB" dirty="0"/>
           </a:p>
           <a:p>
-            <a:pPr lvl="1"/>
-            <a:r>
-              <a:rPr lang="en-GB" dirty="0"/>
-              <a:t>Predicates to test strings</a:t>
-            </a:r>
-          </a:p>
-          <a:p>
-            <a:r>
-              <a:rPr lang="en-GB" dirty="0" err="1"/>
+            <a:r>
+              <a:rPr lang="en-GB" dirty="0" err="1" smtClean="0"/>
               <a:t>NumberPredicates</a:t>
             </a:r>
+            <a:endParaRPr lang="en-GB" dirty="0" smtClean="0"/>
+          </a:p>
+          <a:p>
+            <a:r>
+              <a:rPr lang="en-GB" dirty="0" err="1" smtClean="0"/>
+              <a:t>DateTimePredicates</a:t>
+            </a:r>
             <a:endParaRPr lang="en-GB" dirty="0"/>
           </a:p>
-          <a:p>
-            <a:pPr lvl="1"/>
-            <a:r>
-              <a:rPr lang="en-GB" dirty="0"/>
-              <a:t>Predicates to test primitive numbers</a:t>
-            </a:r>
-          </a:p>
         </p:txBody>
       </p:sp>
       <p:sp>
@@ -13195,7 +13298,7 @@
         <p:spPr/>
         <p:txBody>
           <a:bodyPr>
-            <a:normAutofit fontScale="92500" lnSpcReduction="10000"/>
+            <a:normAutofit/>
           </a:bodyPr>
           <a:lstStyle/>
           <a:p>
